--- a/OKCupid-Date-A-Scientist-Starter/OKCupid – Machine Learning Analysis.pptx
+++ b/OKCupid-Date-A-Scientist-Starter/OKCupid – Machine Learning Analysis.pptx
@@ -3309,6 +3309,753 @@
 </file>
 
 <file path=ppt/diagrams/colors5.xml><?xml version="1.0" encoding="utf-8"?>
+<dgm:colorsDef xmlns:dgm="http://schemas.openxmlformats.org/drawingml/2006/diagram" xmlns:a="http://schemas.openxmlformats.org/drawingml/2006/main" uniqueId="urn:microsoft.com/office/officeart/2005/8/colors/accent3_2#42">
+  <dgm:title val=""/>
+  <dgm:desc val=""/>
+  <dgm:catLst>
+    <dgm:cat type="accent3" pri="11200"/>
+  </dgm:catLst>
+  <dgm:styleLbl name="node0">
+    <dgm:fillClrLst meth="repeat">
+      <a:schemeClr val="accent3"/>
+    </dgm:fillClrLst>
+    <dgm:linClrLst meth="repeat">
+      <a:schemeClr val="lt1"/>
+    </dgm:linClrLst>
+    <dgm:effectClrLst/>
+    <dgm:txLinClrLst/>
+    <dgm:txFillClrLst/>
+    <dgm:txEffectClrLst/>
+  </dgm:styleLbl>
+  <dgm:styleLbl name="node1">
+    <dgm:fillClrLst meth="repeat">
+      <a:schemeClr val="accent3"/>
+    </dgm:fillClrLst>
+    <dgm:linClrLst meth="repeat">
+      <a:schemeClr val="lt1"/>
+    </dgm:linClrLst>
+    <dgm:effectClrLst/>
+    <dgm:txLinClrLst/>
+    <dgm:txFillClrLst/>
+    <dgm:txEffectClrLst/>
+  </dgm:styleLbl>
+  <dgm:styleLbl name="alignNode1">
+    <dgm:fillClrLst meth="repeat">
+      <a:schemeClr val="accent3"/>
+    </dgm:fillClrLst>
+    <dgm:linClrLst meth="repeat">
+      <a:schemeClr val="accent3"/>
+    </dgm:linClrLst>
+    <dgm:effectClrLst/>
+    <dgm:txLinClrLst/>
+    <dgm:txFillClrLst/>
+    <dgm:txEffectClrLst/>
+  </dgm:styleLbl>
+  <dgm:styleLbl name="lnNode1">
+    <dgm:fillClrLst meth="repeat">
+      <a:schemeClr val="accent3"/>
+    </dgm:fillClrLst>
+    <dgm:linClrLst meth="repeat">
+      <a:schemeClr val="lt1"/>
+    </dgm:linClrLst>
+    <dgm:effectClrLst/>
+    <dgm:txLinClrLst/>
+    <dgm:txFillClrLst/>
+    <dgm:txEffectClrLst/>
+  </dgm:styleLbl>
+  <dgm:styleLbl name="vennNode1">
+    <dgm:fillClrLst meth="repeat">
+      <a:schemeClr val="accent3">
+        <a:alpha val="50000"/>
+      </a:schemeClr>
+    </dgm:fillClrLst>
+    <dgm:linClrLst meth="repeat">
+      <a:schemeClr val="lt1"/>
+    </dgm:linClrLst>
+    <dgm:effectClrLst/>
+    <dgm:txLinClrLst/>
+    <dgm:txFillClrLst/>
+    <dgm:txEffectClrLst/>
+  </dgm:styleLbl>
+  <dgm:styleLbl name="node2">
+    <dgm:fillClrLst meth="repeat">
+      <a:schemeClr val="accent3"/>
+    </dgm:fillClrLst>
+    <dgm:linClrLst meth="repeat">
+      <a:schemeClr val="lt1"/>
+    </dgm:linClrLst>
+    <dgm:effectClrLst/>
+    <dgm:txLinClrLst/>
+    <dgm:txFillClrLst/>
+    <dgm:txEffectClrLst/>
+  </dgm:styleLbl>
+  <dgm:styleLbl name="node3">
+    <dgm:fillClrLst meth="repeat">
+      <a:schemeClr val="accent3"/>
+    </dgm:fillClrLst>
+    <dgm:linClrLst meth="repeat">
+      <a:schemeClr val="lt1"/>
+    </dgm:linClrLst>
+    <dgm:effectClrLst/>
+    <dgm:txLinClrLst/>
+    <dgm:txFillClrLst/>
+    <dgm:txEffectClrLst/>
+  </dgm:styleLbl>
+  <dgm:styleLbl name="node4">
+    <dgm:fillClrLst meth="repeat">
+      <a:schemeClr val="accent3"/>
+    </dgm:fillClrLst>
+    <dgm:linClrLst meth="repeat">
+      <a:schemeClr val="lt1"/>
+    </dgm:linClrLst>
+    <dgm:effectClrLst/>
+    <dgm:txLinClrLst/>
+    <dgm:txFillClrLst/>
+    <dgm:txEffectClrLst/>
+  </dgm:styleLbl>
+  <dgm:styleLbl name="fgImgPlace1">
+    <dgm:fillClrLst meth="repeat">
+      <a:schemeClr val="accent3">
+        <a:tint val="50000"/>
+      </a:schemeClr>
+    </dgm:fillClrLst>
+    <dgm:linClrLst meth="repeat">
+      <a:schemeClr val="lt1"/>
+    </dgm:linClrLst>
+    <dgm:effectClrLst/>
+    <dgm:txLinClrLst/>
+    <dgm:txFillClrLst meth="repeat">
+      <a:schemeClr val="lt1"/>
+    </dgm:txFillClrLst>
+    <dgm:txEffectClrLst/>
+  </dgm:styleLbl>
+  <dgm:styleLbl name="alignImgPlace1">
+    <dgm:fillClrLst meth="repeat">
+      <a:schemeClr val="accent3">
+        <a:tint val="50000"/>
+      </a:schemeClr>
+    </dgm:fillClrLst>
+    <dgm:linClrLst meth="repeat">
+      <a:schemeClr val="lt1"/>
+    </dgm:linClrLst>
+    <dgm:effectClrLst/>
+    <dgm:txLinClrLst/>
+    <dgm:txFillClrLst meth="repeat">
+      <a:schemeClr val="lt1"/>
+    </dgm:txFillClrLst>
+    <dgm:txEffectClrLst/>
+  </dgm:styleLbl>
+  <dgm:styleLbl name="bgImgPlace1">
+    <dgm:fillClrLst meth="repeat">
+      <a:schemeClr val="accent3">
+        <a:tint val="50000"/>
+      </a:schemeClr>
+    </dgm:fillClrLst>
+    <dgm:linClrLst meth="repeat">
+      <a:schemeClr val="lt1"/>
+    </dgm:linClrLst>
+    <dgm:effectClrLst/>
+    <dgm:txLinClrLst/>
+    <dgm:txFillClrLst meth="repeat">
+      <a:schemeClr val="lt1"/>
+    </dgm:txFillClrLst>
+    <dgm:txEffectClrLst/>
+  </dgm:styleLbl>
+  <dgm:styleLbl name="sibTrans2D1">
+    <dgm:fillClrLst meth="repeat">
+      <a:schemeClr val="accent3">
+        <a:tint val="60000"/>
+      </a:schemeClr>
+    </dgm:fillClrLst>
+    <dgm:linClrLst meth="repeat">
+      <a:schemeClr val="accent3">
+        <a:tint val="60000"/>
+      </a:schemeClr>
+    </dgm:linClrLst>
+    <dgm:effectClrLst/>
+    <dgm:txLinClrLst/>
+    <dgm:txFillClrLst/>
+    <dgm:txEffectClrLst/>
+  </dgm:styleLbl>
+  <dgm:styleLbl name="fgSibTrans2D1">
+    <dgm:fillClrLst meth="repeat">
+      <a:schemeClr val="accent3">
+        <a:tint val="60000"/>
+      </a:schemeClr>
+    </dgm:fillClrLst>
+    <dgm:linClrLst meth="repeat">
+      <a:schemeClr val="accent3">
+        <a:tint val="60000"/>
+      </a:schemeClr>
+    </dgm:linClrLst>
+    <dgm:effectClrLst/>
+    <dgm:txLinClrLst/>
+    <dgm:txFillClrLst/>
+    <dgm:txEffectClrLst/>
+  </dgm:styleLbl>
+  <dgm:styleLbl name="bgSibTrans2D1">
+    <dgm:fillClrLst meth="repeat">
+      <a:schemeClr val="accent3">
+        <a:tint val="60000"/>
+      </a:schemeClr>
+    </dgm:fillClrLst>
+    <dgm:linClrLst meth="repeat">
+      <a:schemeClr val="accent3">
+        <a:tint val="60000"/>
+      </a:schemeClr>
+    </dgm:linClrLst>
+    <dgm:effectClrLst/>
+    <dgm:txLinClrLst/>
+    <dgm:txFillClrLst/>
+    <dgm:txEffectClrLst/>
+  </dgm:styleLbl>
+  <dgm:styleLbl name="sibTrans1D1">
+    <dgm:fillClrLst meth="repeat">
+      <a:schemeClr val="accent3"/>
+    </dgm:fillClrLst>
+    <dgm:linClrLst meth="repeat">
+      <a:schemeClr val="accent3"/>
+    </dgm:linClrLst>
+    <dgm:effectClrLst/>
+    <dgm:txLinClrLst/>
+    <dgm:txFillClrLst meth="repeat">
+      <a:schemeClr val="tx1"/>
+    </dgm:txFillClrLst>
+    <dgm:txEffectClrLst/>
+  </dgm:styleLbl>
+  <dgm:styleLbl name="callout">
+    <dgm:fillClrLst meth="repeat">
+      <a:schemeClr val="accent3"/>
+    </dgm:fillClrLst>
+    <dgm:linClrLst meth="repeat">
+      <a:schemeClr val="accent3">
+        <a:tint val="50000"/>
+      </a:schemeClr>
+    </dgm:linClrLst>
+    <dgm:effectClrLst/>
+    <dgm:txLinClrLst/>
+    <dgm:txFillClrLst meth="repeat">
+      <a:schemeClr val="tx1"/>
+    </dgm:txFillClrLst>
+    <dgm:txEffectClrLst/>
+  </dgm:styleLbl>
+  <dgm:styleLbl name="asst0">
+    <dgm:fillClrLst meth="repeat">
+      <a:schemeClr val="accent3"/>
+    </dgm:fillClrLst>
+    <dgm:linClrLst meth="repeat">
+      <a:schemeClr val="lt1"/>
+    </dgm:linClrLst>
+    <dgm:effectClrLst/>
+    <dgm:txLinClrLst/>
+    <dgm:txFillClrLst/>
+    <dgm:txEffectClrLst/>
+  </dgm:styleLbl>
+  <dgm:styleLbl name="asst1">
+    <dgm:fillClrLst meth="repeat">
+      <a:schemeClr val="accent3"/>
+    </dgm:fillClrLst>
+    <dgm:linClrLst meth="repeat">
+      <a:schemeClr val="lt1"/>
+    </dgm:linClrLst>
+    <dgm:effectClrLst/>
+    <dgm:txLinClrLst/>
+    <dgm:txFillClrLst/>
+    <dgm:txEffectClrLst/>
+  </dgm:styleLbl>
+  <dgm:styleLbl name="asst2">
+    <dgm:fillClrLst meth="repeat">
+      <a:schemeClr val="accent3"/>
+    </dgm:fillClrLst>
+    <dgm:linClrLst meth="repeat">
+      <a:schemeClr val="lt1"/>
+    </dgm:linClrLst>
+    <dgm:effectClrLst/>
+    <dgm:txLinClrLst/>
+    <dgm:txFillClrLst/>
+    <dgm:txEffectClrLst/>
+  </dgm:styleLbl>
+  <dgm:styleLbl name="asst3">
+    <dgm:fillClrLst meth="repeat">
+      <a:schemeClr val="accent3"/>
+    </dgm:fillClrLst>
+    <dgm:linClrLst meth="repeat">
+      <a:schemeClr val="lt1"/>
+    </dgm:linClrLst>
+    <dgm:effectClrLst/>
+    <dgm:txLinClrLst/>
+    <dgm:txFillClrLst/>
+    <dgm:txEffectClrLst/>
+  </dgm:styleLbl>
+  <dgm:styleLbl name="asst4">
+    <dgm:fillClrLst meth="repeat">
+      <a:schemeClr val="accent3"/>
+    </dgm:fillClrLst>
+    <dgm:linClrLst meth="repeat">
+      <a:schemeClr val="lt1"/>
+    </dgm:linClrLst>
+    <dgm:effectClrLst/>
+    <dgm:txLinClrLst/>
+    <dgm:txFillClrLst/>
+    <dgm:txEffectClrLst/>
+  </dgm:styleLbl>
+  <dgm:styleLbl name="parChTrans2D1">
+    <dgm:fillClrLst meth="repeat">
+      <a:schemeClr val="accent3">
+        <a:tint val="60000"/>
+      </a:schemeClr>
+    </dgm:fillClrLst>
+    <dgm:linClrLst meth="repeat">
+      <a:schemeClr val="accent3">
+        <a:tint val="60000"/>
+      </a:schemeClr>
+    </dgm:linClrLst>
+    <dgm:effectClrLst/>
+    <dgm:txLinClrLst/>
+    <dgm:txFillClrLst meth="repeat">
+      <a:schemeClr val="lt1"/>
+    </dgm:txFillClrLst>
+    <dgm:txEffectClrLst/>
+  </dgm:styleLbl>
+  <dgm:styleLbl name="parChTrans2D2">
+    <dgm:fillClrLst meth="repeat">
+      <a:schemeClr val="accent3"/>
+    </dgm:fillClrLst>
+    <dgm:linClrLst meth="repeat">
+      <a:schemeClr val="accent3"/>
+    </dgm:linClrLst>
+    <dgm:effectClrLst/>
+    <dgm:txLinClrLst/>
+    <dgm:txFillClrLst meth="repeat">
+      <a:schemeClr val="lt1"/>
+    </dgm:txFillClrLst>
+    <dgm:txEffectClrLst/>
+  </dgm:styleLbl>
+  <dgm:styleLbl name="parChTrans2D3">
+    <dgm:fillClrLst meth="repeat">
+      <a:schemeClr val="accent3"/>
+    </dgm:fillClrLst>
+    <dgm:linClrLst meth="repeat">
+      <a:schemeClr val="accent3"/>
+    </dgm:linClrLst>
+    <dgm:effectClrLst/>
+    <dgm:txLinClrLst/>
+    <dgm:txFillClrLst meth="repeat">
+      <a:schemeClr val="lt1"/>
+    </dgm:txFillClrLst>
+    <dgm:txEffectClrLst/>
+  </dgm:styleLbl>
+  <dgm:styleLbl name="parChTrans2D4">
+    <dgm:fillClrLst meth="repeat">
+      <a:schemeClr val="accent3"/>
+    </dgm:fillClrLst>
+    <dgm:linClrLst meth="repeat">
+      <a:schemeClr val="accent3"/>
+    </dgm:linClrLst>
+    <dgm:effectClrLst/>
+    <dgm:txLinClrLst/>
+    <dgm:txFillClrLst meth="repeat">
+      <a:schemeClr val="lt1"/>
+    </dgm:txFillClrLst>
+    <dgm:txEffectClrLst/>
+  </dgm:styleLbl>
+  <dgm:styleLbl name="parChTrans1D1">
+    <dgm:fillClrLst meth="repeat">
+      <a:schemeClr val="accent3"/>
+    </dgm:fillClrLst>
+    <dgm:linClrLst meth="repeat">
+      <a:schemeClr val="accent3">
+        <a:shade val="60000"/>
+      </a:schemeClr>
+    </dgm:linClrLst>
+    <dgm:effectClrLst/>
+    <dgm:txLinClrLst/>
+    <dgm:txFillClrLst meth="repeat">
+      <a:schemeClr val="tx1"/>
+    </dgm:txFillClrLst>
+    <dgm:txEffectClrLst/>
+  </dgm:styleLbl>
+  <dgm:styleLbl name="parChTrans1D2">
+    <dgm:fillClrLst meth="repeat">
+      <a:schemeClr val="accent3"/>
+    </dgm:fillClrLst>
+    <dgm:linClrLst meth="repeat">
+      <a:schemeClr val="accent3">
+        <a:shade val="60000"/>
+      </a:schemeClr>
+    </dgm:linClrLst>
+    <dgm:effectClrLst/>
+    <dgm:txLinClrLst/>
+    <dgm:txFillClrLst meth="repeat">
+      <a:schemeClr val="tx1"/>
+    </dgm:txFillClrLst>
+    <dgm:txEffectClrLst/>
+  </dgm:styleLbl>
+  <dgm:styleLbl name="parChTrans1D3">
+    <dgm:fillClrLst meth="repeat">
+      <a:schemeClr val="accent3"/>
+    </dgm:fillClrLst>
+    <dgm:linClrLst meth="repeat">
+      <a:schemeClr val="accent3">
+        <a:shade val="80000"/>
+      </a:schemeClr>
+    </dgm:linClrLst>
+    <dgm:effectClrLst/>
+    <dgm:txLinClrLst/>
+    <dgm:txFillClrLst meth="repeat">
+      <a:schemeClr val="tx1"/>
+    </dgm:txFillClrLst>
+    <dgm:txEffectClrLst/>
+  </dgm:styleLbl>
+  <dgm:styleLbl name="parChTrans1D4">
+    <dgm:fillClrLst meth="repeat">
+      <a:schemeClr val="accent3"/>
+    </dgm:fillClrLst>
+    <dgm:linClrLst meth="repeat">
+      <a:schemeClr val="accent3">
+        <a:shade val="80000"/>
+      </a:schemeClr>
+    </dgm:linClrLst>
+    <dgm:effectClrLst/>
+    <dgm:txLinClrLst/>
+    <dgm:txFillClrLst meth="repeat">
+      <a:schemeClr val="tx1"/>
+    </dgm:txFillClrLst>
+    <dgm:txEffectClrLst/>
+  </dgm:styleLbl>
+  <dgm:styleLbl name="fgAcc1">
+    <dgm:fillClrLst meth="repeat">
+      <a:schemeClr val="lt1">
+        <a:alpha val="90000"/>
+      </a:schemeClr>
+    </dgm:fillClrLst>
+    <dgm:linClrLst meth="repeat">
+      <a:schemeClr val="accent3"/>
+    </dgm:linClrLst>
+    <dgm:effectClrLst/>
+    <dgm:txLinClrLst/>
+    <dgm:txFillClrLst meth="repeat">
+      <a:schemeClr val="dk1"/>
+    </dgm:txFillClrLst>
+    <dgm:txEffectClrLst/>
+  </dgm:styleLbl>
+  <dgm:styleLbl name="conFgAcc1">
+    <dgm:fillClrLst meth="repeat">
+      <a:schemeClr val="lt1">
+        <a:alpha val="90000"/>
+      </a:schemeClr>
+    </dgm:fillClrLst>
+    <dgm:linClrLst meth="repeat">
+      <a:schemeClr val="accent3"/>
+    </dgm:linClrLst>
+    <dgm:effectClrLst/>
+    <dgm:txLinClrLst/>
+    <dgm:txFillClrLst meth="repeat">
+      <a:schemeClr val="dk1"/>
+    </dgm:txFillClrLst>
+    <dgm:txEffectClrLst/>
+  </dgm:styleLbl>
+  <dgm:styleLbl name="alignAcc1">
+    <dgm:fillClrLst meth="repeat">
+      <a:schemeClr val="lt1">
+        <a:alpha val="90000"/>
+      </a:schemeClr>
+    </dgm:fillClrLst>
+    <dgm:linClrLst meth="repeat">
+      <a:schemeClr val="accent3"/>
+    </dgm:linClrLst>
+    <dgm:effectClrLst/>
+    <dgm:txLinClrLst/>
+    <dgm:txFillClrLst meth="repeat">
+      <a:schemeClr val="dk1"/>
+    </dgm:txFillClrLst>
+    <dgm:txEffectClrLst/>
+  </dgm:styleLbl>
+  <dgm:styleLbl name="trAlignAcc1">
+    <dgm:fillClrLst meth="repeat">
+      <a:schemeClr val="lt1">
+        <a:alpha val="40000"/>
+      </a:schemeClr>
+    </dgm:fillClrLst>
+    <dgm:linClrLst meth="repeat">
+      <a:schemeClr val="accent3"/>
+    </dgm:linClrLst>
+    <dgm:effectClrLst/>
+    <dgm:txLinClrLst/>
+    <dgm:txFillClrLst meth="repeat">
+      <a:schemeClr val="dk1"/>
+    </dgm:txFillClrLst>
+    <dgm:txEffectClrLst/>
+  </dgm:styleLbl>
+  <dgm:styleLbl name="bgAcc1">
+    <dgm:fillClrLst meth="repeat">
+      <a:schemeClr val="lt1">
+        <a:alpha val="90000"/>
+      </a:schemeClr>
+    </dgm:fillClrLst>
+    <dgm:linClrLst meth="repeat">
+      <a:schemeClr val="accent3"/>
+    </dgm:linClrLst>
+    <dgm:effectClrLst/>
+    <dgm:txLinClrLst/>
+    <dgm:txFillClrLst meth="repeat">
+      <a:schemeClr val="dk1"/>
+    </dgm:txFillClrLst>
+    <dgm:txEffectClrLst/>
+  </dgm:styleLbl>
+  <dgm:styleLbl name="solidFgAcc1">
+    <dgm:fillClrLst meth="repeat">
+      <a:schemeClr val="lt1"/>
+    </dgm:fillClrLst>
+    <dgm:linClrLst meth="repeat">
+      <a:schemeClr val="accent3"/>
+    </dgm:linClrLst>
+    <dgm:effectClrLst/>
+    <dgm:txLinClrLst/>
+    <dgm:txFillClrLst meth="repeat">
+      <a:schemeClr val="dk1"/>
+    </dgm:txFillClrLst>
+    <dgm:txEffectClrLst/>
+  </dgm:styleLbl>
+  <dgm:styleLbl name="solidAlignAcc1">
+    <dgm:fillClrLst meth="repeat">
+      <a:schemeClr val="lt1"/>
+    </dgm:fillClrLst>
+    <dgm:linClrLst meth="repeat">
+      <a:schemeClr val="accent3"/>
+    </dgm:linClrLst>
+    <dgm:effectClrLst/>
+    <dgm:txLinClrLst/>
+    <dgm:txFillClrLst meth="repeat">
+      <a:schemeClr val="dk1"/>
+    </dgm:txFillClrLst>
+    <dgm:txEffectClrLst/>
+  </dgm:styleLbl>
+  <dgm:styleLbl name="solidBgAcc1">
+    <dgm:fillClrLst meth="repeat">
+      <a:schemeClr val="lt1"/>
+    </dgm:fillClrLst>
+    <dgm:linClrLst meth="repeat">
+      <a:schemeClr val="accent3"/>
+    </dgm:linClrLst>
+    <dgm:effectClrLst/>
+    <dgm:txLinClrLst/>
+    <dgm:txFillClrLst meth="repeat">
+      <a:schemeClr val="dk1"/>
+    </dgm:txFillClrLst>
+    <dgm:txEffectClrLst/>
+  </dgm:styleLbl>
+  <dgm:styleLbl name="fgAccFollowNode1">
+    <dgm:fillClrLst meth="repeat">
+      <a:schemeClr val="accent3">
+        <a:alpha val="90000"/>
+        <a:tint val="40000"/>
+      </a:schemeClr>
+    </dgm:fillClrLst>
+    <dgm:linClrLst meth="repeat">
+      <a:schemeClr val="accent3">
+        <a:alpha val="90000"/>
+        <a:tint val="40000"/>
+      </a:schemeClr>
+    </dgm:linClrLst>
+    <dgm:effectClrLst/>
+    <dgm:txLinClrLst/>
+    <dgm:txFillClrLst meth="repeat">
+      <a:schemeClr val="dk1"/>
+    </dgm:txFillClrLst>
+    <dgm:txEffectClrLst/>
+  </dgm:styleLbl>
+  <dgm:styleLbl name="alignAccFollowNode1">
+    <dgm:fillClrLst meth="repeat">
+      <a:schemeClr val="accent3">
+        <a:alpha val="90000"/>
+        <a:tint val="40000"/>
+      </a:schemeClr>
+    </dgm:fillClrLst>
+    <dgm:linClrLst meth="repeat">
+      <a:schemeClr val="accent3">
+        <a:alpha val="90000"/>
+        <a:tint val="40000"/>
+      </a:schemeClr>
+    </dgm:linClrLst>
+    <dgm:effectClrLst/>
+    <dgm:txLinClrLst/>
+    <dgm:txFillClrLst meth="repeat">
+      <a:schemeClr val="dk1"/>
+    </dgm:txFillClrLst>
+    <dgm:txEffectClrLst/>
+  </dgm:styleLbl>
+  <dgm:styleLbl name="bgAccFollowNode1">
+    <dgm:fillClrLst meth="repeat">
+      <a:schemeClr val="accent3">
+        <a:alpha val="90000"/>
+        <a:tint val="40000"/>
+      </a:schemeClr>
+    </dgm:fillClrLst>
+    <dgm:linClrLst meth="repeat">
+      <a:schemeClr val="accent3">
+        <a:alpha val="90000"/>
+        <a:tint val="40000"/>
+      </a:schemeClr>
+    </dgm:linClrLst>
+    <dgm:effectClrLst/>
+    <dgm:txLinClrLst/>
+    <dgm:txFillClrLst meth="repeat">
+      <a:schemeClr val="dk1"/>
+    </dgm:txFillClrLst>
+    <dgm:txEffectClrLst/>
+  </dgm:styleLbl>
+  <dgm:styleLbl name="fgAcc0">
+    <dgm:fillClrLst meth="repeat">
+      <a:schemeClr val="lt1">
+        <a:alpha val="90000"/>
+      </a:schemeClr>
+    </dgm:fillClrLst>
+    <dgm:linClrLst meth="repeat">
+      <a:schemeClr val="accent3"/>
+    </dgm:linClrLst>
+    <dgm:effectClrLst/>
+    <dgm:txLinClrLst/>
+    <dgm:txFillClrLst meth="repeat">
+      <a:schemeClr val="dk1"/>
+    </dgm:txFillClrLst>
+    <dgm:txEffectClrLst/>
+  </dgm:styleLbl>
+  <dgm:styleLbl name="fgAcc2">
+    <dgm:fillClrLst meth="repeat">
+      <a:schemeClr val="lt1">
+        <a:alpha val="90000"/>
+      </a:schemeClr>
+    </dgm:fillClrLst>
+    <dgm:linClrLst meth="repeat">
+      <a:schemeClr val="accent3"/>
+    </dgm:linClrLst>
+    <dgm:effectClrLst/>
+    <dgm:txLinClrLst/>
+    <dgm:txFillClrLst meth="repeat">
+      <a:schemeClr val="dk1"/>
+    </dgm:txFillClrLst>
+    <dgm:txEffectClrLst/>
+  </dgm:styleLbl>
+  <dgm:styleLbl name="fgAcc3">
+    <dgm:fillClrLst meth="repeat">
+      <a:schemeClr val="lt1">
+        <a:alpha val="90000"/>
+      </a:schemeClr>
+    </dgm:fillClrLst>
+    <dgm:linClrLst meth="repeat">
+      <a:schemeClr val="accent3"/>
+    </dgm:linClrLst>
+    <dgm:effectClrLst/>
+    <dgm:txLinClrLst/>
+    <dgm:txFillClrLst meth="repeat">
+      <a:schemeClr val="dk1"/>
+    </dgm:txFillClrLst>
+    <dgm:txEffectClrLst/>
+  </dgm:styleLbl>
+  <dgm:styleLbl name="fgAcc4">
+    <dgm:fillClrLst meth="repeat">
+      <a:schemeClr val="lt1">
+        <a:alpha val="90000"/>
+      </a:schemeClr>
+    </dgm:fillClrLst>
+    <dgm:linClrLst meth="repeat">
+      <a:schemeClr val="accent3"/>
+    </dgm:linClrLst>
+    <dgm:effectClrLst/>
+    <dgm:txLinClrLst/>
+    <dgm:txFillClrLst meth="repeat">
+      <a:schemeClr val="dk1"/>
+    </dgm:txFillClrLst>
+    <dgm:txEffectClrLst/>
+  </dgm:styleLbl>
+  <dgm:styleLbl name="bgShp">
+    <dgm:fillClrLst meth="repeat">
+      <a:schemeClr val="accent3">
+        <a:tint val="40000"/>
+      </a:schemeClr>
+    </dgm:fillClrLst>
+    <dgm:linClrLst meth="repeat">
+      <a:schemeClr val="accent3"/>
+    </dgm:linClrLst>
+    <dgm:effectClrLst/>
+    <dgm:txLinClrLst/>
+    <dgm:txFillClrLst meth="repeat">
+      <a:schemeClr val="dk1"/>
+    </dgm:txFillClrLst>
+    <dgm:txEffectClrLst/>
+  </dgm:styleLbl>
+  <dgm:styleLbl name="dkBgShp">
+    <dgm:fillClrLst meth="repeat">
+      <a:schemeClr val="accent3">
+        <a:shade val="80000"/>
+      </a:schemeClr>
+    </dgm:fillClrLst>
+    <dgm:linClrLst meth="repeat">
+      <a:schemeClr val="accent3"/>
+    </dgm:linClrLst>
+    <dgm:effectClrLst/>
+    <dgm:txLinClrLst/>
+    <dgm:txFillClrLst meth="repeat">
+      <a:schemeClr val="lt1"/>
+    </dgm:txFillClrLst>
+    <dgm:txEffectClrLst/>
+  </dgm:styleLbl>
+  <dgm:styleLbl name="trBgShp">
+    <dgm:fillClrLst meth="repeat">
+      <a:schemeClr val="accent3">
+        <a:tint val="50000"/>
+        <a:alpha val="40000"/>
+      </a:schemeClr>
+    </dgm:fillClrLst>
+    <dgm:linClrLst meth="repeat">
+      <a:schemeClr val="accent3"/>
+    </dgm:linClrLst>
+    <dgm:effectClrLst/>
+    <dgm:txLinClrLst/>
+    <dgm:txFillClrLst meth="repeat">
+      <a:schemeClr val="lt1"/>
+    </dgm:txFillClrLst>
+    <dgm:txEffectClrLst/>
+  </dgm:styleLbl>
+  <dgm:styleLbl name="fgShp">
+    <dgm:fillClrLst meth="repeat">
+      <a:schemeClr val="accent3">
+        <a:tint val="60000"/>
+      </a:schemeClr>
+    </dgm:fillClrLst>
+    <dgm:linClrLst meth="repeat">
+      <a:schemeClr val="lt1"/>
+    </dgm:linClrLst>
+    <dgm:effectClrLst/>
+    <dgm:txLinClrLst/>
+    <dgm:txFillClrLst meth="repeat">
+      <a:schemeClr val="dk1"/>
+    </dgm:txFillClrLst>
+    <dgm:txEffectClrLst/>
+  </dgm:styleLbl>
+  <dgm:styleLbl name="revTx">
+    <dgm:fillClrLst meth="repeat">
+      <a:schemeClr val="lt1">
+        <a:alpha val="0"/>
+      </a:schemeClr>
+    </dgm:fillClrLst>
+    <dgm:linClrLst meth="repeat">
+      <a:schemeClr val="dk1">
+        <a:alpha val="0"/>
+      </a:schemeClr>
+    </dgm:linClrLst>
+    <dgm:effectClrLst/>
+    <dgm:txLinClrLst/>
+    <dgm:txFillClrLst meth="repeat">
+      <a:schemeClr val="tx1"/>
+    </dgm:txFillClrLst>
+    <dgm:txEffectClrLst/>
+  </dgm:styleLbl>
+</dgm:colorsDef>
+</file>
+
+<file path=ppt/diagrams/colors6.xml><?xml version="1.0" encoding="utf-8"?>
 <dgm:colorsDef xmlns:dgm="http://schemas.openxmlformats.org/drawingml/2006/diagram" xmlns:a="http://schemas.openxmlformats.org/drawingml/2006/main" uniqueId="urn:microsoft.com/office/officeart/2005/8/colors/accent1_2#2">
   <dgm:title val=""/>
   <dgm:desc val=""/>
@@ -5844,6 +6591,694 @@
 </file>
 
 <file path=ppt/diagrams/data5.xml><?xml version="1.0" encoding="utf-8"?>
+<dgm:dataModel xmlns:dgm="http://schemas.openxmlformats.org/drawingml/2006/diagram" xmlns:a="http://schemas.openxmlformats.org/drawingml/2006/main">
+  <dgm:ptLst>
+    <dgm:pt modelId="{49680756-4BD3-4F84-8A5D-4B964453A280}" type="doc">
+      <dgm:prSet loTypeId="urn:microsoft.com/office/officeart/2018/2/layout/IconVerticalSolidList" loCatId="icon" qsTypeId="urn:microsoft.com/office/officeart/2005/8/quickstyle/simple1#43" qsCatId="simple" csTypeId="urn:microsoft.com/office/officeart/2005/8/colors/accent3_2#42" csCatId="accent3" phldr="1"/>
+      <dgm:spPr/>
+      <dgm:t>
+        <a:bodyPr/>
+        <a:lstStyle/>
+        <a:p>
+          <a:endParaRPr lang="en-US"/>
+        </a:p>
+      </dgm:t>
+    </dgm:pt>
+    <dgm:pt modelId="{75DC09F0-8E03-44E9-A3D6-D31D3A15C9C3}">
+      <dgm:prSet/>
+      <dgm:spPr/>
+      <dgm:t>
+        <a:bodyPr/>
+        <a:lstStyle/>
+        <a:p>
+          <a:pPr>
+            <a:lnSpc>
+              <a:spcPct val="100000"/>
+            </a:lnSpc>
+          </a:pPr>
+          <a:r>
+            <a:rPr lang="en-GB" b="1" dirty="0"/>
+            <a:t>Target Label Encoding </a:t>
+          </a:r>
+          <a:endParaRPr lang="en-US" b="1" dirty="0"/>
+        </a:p>
+      </dgm:t>
+    </dgm:pt>
+    <dgm:pt modelId="{9A5596AA-83B4-4804-9A4C-4B2B131B2E7B}" type="parTrans" cxnId="{745C17BF-CDFD-4871-8439-BCE8939E7EF2}">
+      <dgm:prSet/>
+      <dgm:spPr/>
+      <dgm:t>
+        <a:bodyPr/>
+        <a:lstStyle/>
+        <a:p>
+          <a:endParaRPr lang="en-US"/>
+        </a:p>
+      </dgm:t>
+    </dgm:pt>
+    <dgm:pt modelId="{D60A2AEF-5472-47C2-84AF-EAC0B153A42D}" type="sibTrans" cxnId="{745C17BF-CDFD-4871-8439-BCE8939E7EF2}">
+      <dgm:prSet/>
+      <dgm:spPr/>
+      <dgm:t>
+        <a:bodyPr/>
+        <a:lstStyle/>
+        <a:p>
+          <a:endParaRPr lang="en-US"/>
+        </a:p>
+      </dgm:t>
+    </dgm:pt>
+    <dgm:pt modelId="{9EC0802F-283C-4DF6-A974-ECC0CF60EC59}">
+      <dgm:prSet/>
+      <dgm:spPr/>
+      <dgm:t>
+        <a:bodyPr/>
+        <a:lstStyle/>
+        <a:p>
+          <a:pPr>
+            <a:lnSpc>
+              <a:spcPct val="100000"/>
+            </a:lnSpc>
+          </a:pPr>
+          <a:r>
+            <a:rPr lang="en-GB" dirty="0">
+              <a:latin typeface="+mn-lt"/>
+              <a:ea typeface="Yu Gothic UI Semilight" panose="020B0400000000000000" pitchFamily="34" charset="-128"/>
+            </a:rPr>
+            <a:t>The </a:t>
+          </a:r>
+          <a:r>
+            <a:rPr lang="en-GB" b="1" dirty="0">
+              <a:latin typeface="+mn-lt"/>
+              <a:ea typeface="Yu Gothic UI Semilight" panose="020B0400000000000000" pitchFamily="34" charset="-128"/>
+            </a:rPr>
+            <a:t>smokes</a:t>
+          </a:r>
+          <a:r>
+            <a:rPr lang="en-GB" dirty="0">
+              <a:latin typeface="+mn-lt"/>
+              <a:ea typeface="Yu Gothic UI Semilight" panose="020B0400000000000000" pitchFamily="34" charset="-128"/>
+            </a:rPr>
+            <a:t> column contains several categories aside from no smoker status. We will convert these into a binary label: users who answered no will be labelled as non-smokers, while all other responses will be labelled as smokers. This will create a clearer distinction for the classification.</a:t>
+          </a:r>
+          <a:endParaRPr lang="en-US" dirty="0">
+            <a:latin typeface="+mn-lt"/>
+            <a:ea typeface="Yu Gothic UI Semilight" panose="020B0400000000000000" pitchFamily="34" charset="-128"/>
+          </a:endParaRPr>
+        </a:p>
+      </dgm:t>
+    </dgm:pt>
+    <dgm:pt modelId="{8EBD0758-5141-4F19-ABB5-5157A615629B}" type="parTrans" cxnId="{11368B19-14DC-4322-95EB-9CD55644AB90}">
+      <dgm:prSet/>
+      <dgm:spPr/>
+      <dgm:t>
+        <a:bodyPr/>
+        <a:lstStyle/>
+        <a:p>
+          <a:endParaRPr lang="en-US"/>
+        </a:p>
+      </dgm:t>
+    </dgm:pt>
+    <dgm:pt modelId="{4C43970A-CE4A-4168-9906-2BF245EF3D13}" type="sibTrans" cxnId="{11368B19-14DC-4322-95EB-9CD55644AB90}">
+      <dgm:prSet/>
+      <dgm:spPr/>
+      <dgm:t>
+        <a:bodyPr/>
+        <a:lstStyle/>
+        <a:p>
+          <a:endParaRPr lang="en-US"/>
+        </a:p>
+      </dgm:t>
+    </dgm:pt>
+    <dgm:pt modelId="{74D560CC-34BE-4550-8737-A05713897D0C}">
+      <dgm:prSet/>
+      <dgm:spPr/>
+      <dgm:t>
+        <a:bodyPr/>
+        <a:lstStyle/>
+        <a:p>
+          <a:pPr>
+            <a:lnSpc>
+              <a:spcPct val="100000"/>
+            </a:lnSpc>
+          </a:pPr>
+          <a:r>
+            <a:rPr lang="en-GB" b="1" i="0" dirty="0"/>
+            <a:t>Train-test Split</a:t>
+          </a:r>
+          <a:endParaRPr lang="en-US" dirty="0"/>
+        </a:p>
+      </dgm:t>
+    </dgm:pt>
+    <dgm:pt modelId="{7B582DB2-50D3-431E-A39F-E2EEF6CFBF1A}" type="parTrans" cxnId="{6284149A-2A3F-40BC-92CF-F5E1E0ADA693}">
+      <dgm:prSet/>
+      <dgm:spPr/>
+      <dgm:t>
+        <a:bodyPr/>
+        <a:lstStyle/>
+        <a:p>
+          <a:endParaRPr lang="en-US"/>
+        </a:p>
+      </dgm:t>
+    </dgm:pt>
+    <dgm:pt modelId="{B0AD3191-E348-4AE7-AB67-2F46727E8878}" type="sibTrans" cxnId="{6284149A-2A3F-40BC-92CF-F5E1E0ADA693}">
+      <dgm:prSet/>
+      <dgm:spPr/>
+      <dgm:t>
+        <a:bodyPr/>
+        <a:lstStyle/>
+        <a:p>
+          <a:endParaRPr lang="en-US"/>
+        </a:p>
+      </dgm:t>
+    </dgm:pt>
+    <dgm:pt modelId="{00DCD73A-AB96-4525-A883-0F03A2273298}">
+      <dgm:prSet/>
+      <dgm:spPr/>
+      <dgm:t>
+        <a:bodyPr/>
+        <a:lstStyle/>
+        <a:p>
+          <a:pPr>
+            <a:lnSpc>
+              <a:spcPct val="100000"/>
+            </a:lnSpc>
+          </a:pPr>
+          <a:r>
+            <a:rPr lang="en-GB" b="0" i="0" dirty="0">
+              <a:latin typeface="+mn-lt"/>
+              <a:ea typeface="Yu Gothic UI Semilight" panose="020B0400000000000000" pitchFamily="34" charset="-128"/>
+            </a:rPr>
+            <a:t>We will split the data into features (X) and labels (Y), before using a </a:t>
+          </a:r>
+          <a:r>
+            <a:rPr lang="en-GB" b="0" i="0" dirty="0" err="1">
+              <a:latin typeface="+mn-lt"/>
+              <a:ea typeface="Yu Gothic UI Semilight" panose="020B0400000000000000" pitchFamily="34" charset="-128"/>
+            </a:rPr>
+            <a:t>train_test_split</a:t>
+          </a:r>
+          <a:r>
+            <a:rPr lang="en-GB" b="0" i="0" dirty="0">
+              <a:latin typeface="+mn-lt"/>
+              <a:ea typeface="Yu Gothic UI Semilight" panose="020B0400000000000000" pitchFamily="34" charset="-128"/>
+            </a:rPr>
+            <a:t> to split the clean dataset into training and validation sets. This is done before encoding and standardising to prevent data leakage.</a:t>
+          </a:r>
+          <a:endParaRPr lang="en-US" dirty="0">
+            <a:latin typeface="+mn-lt"/>
+            <a:ea typeface="Yu Gothic UI Semilight" panose="020B0400000000000000" pitchFamily="34" charset="-128"/>
+          </a:endParaRPr>
+        </a:p>
+      </dgm:t>
+    </dgm:pt>
+    <dgm:pt modelId="{44446489-8C50-4A76-9081-0D2C119AC6C2}" type="parTrans" cxnId="{D50705BC-A2FF-4D92-9BA2-86C9ABF7DDB4}">
+      <dgm:prSet/>
+      <dgm:spPr/>
+      <dgm:t>
+        <a:bodyPr/>
+        <a:lstStyle/>
+        <a:p>
+          <a:endParaRPr lang="en-US"/>
+        </a:p>
+      </dgm:t>
+    </dgm:pt>
+    <dgm:pt modelId="{FE57C30B-4255-40C2-ABD0-3E116B734535}" type="sibTrans" cxnId="{D50705BC-A2FF-4D92-9BA2-86C9ABF7DDB4}">
+      <dgm:prSet/>
+      <dgm:spPr/>
+      <dgm:t>
+        <a:bodyPr/>
+        <a:lstStyle/>
+        <a:p>
+          <a:endParaRPr lang="en-US"/>
+        </a:p>
+      </dgm:t>
+    </dgm:pt>
+    <dgm:pt modelId="{FFCE8147-13CA-449B-B3B2-71D15AAB19D2}">
+      <dgm:prSet/>
+      <dgm:spPr/>
+      <dgm:t>
+        <a:bodyPr/>
+        <a:lstStyle/>
+        <a:p>
+          <a:pPr>
+            <a:lnSpc>
+              <a:spcPct val="100000"/>
+            </a:lnSpc>
+          </a:pPr>
+          <a:r>
+            <a:rPr lang="en-GB" b="1" i="0" dirty="0"/>
+            <a:t>One-Hot Encoding</a:t>
+          </a:r>
+          <a:endParaRPr lang="en-US" dirty="0"/>
+        </a:p>
+      </dgm:t>
+    </dgm:pt>
+    <dgm:pt modelId="{0DB07463-79E4-4125-ADC4-170F0C599508}" type="parTrans" cxnId="{16741E2F-0C1F-4652-BC48-5672990F8323}">
+      <dgm:prSet/>
+      <dgm:spPr/>
+      <dgm:t>
+        <a:bodyPr/>
+        <a:lstStyle/>
+        <a:p>
+          <a:endParaRPr lang="en-US"/>
+        </a:p>
+      </dgm:t>
+    </dgm:pt>
+    <dgm:pt modelId="{72C9ED2E-D976-48FF-94FC-587E20F98CD7}" type="sibTrans" cxnId="{16741E2F-0C1F-4652-BC48-5672990F8323}">
+      <dgm:prSet/>
+      <dgm:spPr/>
+      <dgm:t>
+        <a:bodyPr/>
+        <a:lstStyle/>
+        <a:p>
+          <a:endParaRPr lang="en-US"/>
+        </a:p>
+      </dgm:t>
+    </dgm:pt>
+    <dgm:pt modelId="{F2C30BC1-8BB4-4B16-B190-72CE8A6CA3AD}">
+      <dgm:prSet/>
+      <dgm:spPr/>
+      <dgm:t>
+        <a:bodyPr/>
+        <a:lstStyle/>
+        <a:p>
+          <a:pPr>
+            <a:lnSpc>
+              <a:spcPct val="100000"/>
+            </a:lnSpc>
+          </a:pPr>
+          <a:r>
+            <a:rPr lang="en-GB" dirty="0"/>
+            <a:t>For our categorical features, we will be using one-hot encoding to convert the features into a format that the machine learning algorithms can interpret.</a:t>
+          </a:r>
+          <a:endParaRPr lang="en-US" dirty="0"/>
+        </a:p>
+      </dgm:t>
+    </dgm:pt>
+    <dgm:pt modelId="{2B7B291E-8EA6-4B5C-992D-D4C7BBE3A5A7}" type="parTrans" cxnId="{8DAAC2ED-0ECC-4F72-827D-898F48EFD2E7}">
+      <dgm:prSet/>
+      <dgm:spPr/>
+      <dgm:t>
+        <a:bodyPr/>
+        <a:lstStyle/>
+        <a:p>
+          <a:endParaRPr lang="en-US"/>
+        </a:p>
+      </dgm:t>
+    </dgm:pt>
+    <dgm:pt modelId="{824468B0-0665-48BE-9773-36A8F55D0BB2}" type="sibTrans" cxnId="{8DAAC2ED-0ECC-4F72-827D-898F48EFD2E7}">
+      <dgm:prSet/>
+      <dgm:spPr/>
+      <dgm:t>
+        <a:bodyPr/>
+        <a:lstStyle/>
+        <a:p>
+          <a:endParaRPr lang="en-US"/>
+        </a:p>
+      </dgm:t>
+    </dgm:pt>
+    <dgm:pt modelId="{6006ED6E-EF26-4773-8249-3C268B49A4F3}">
+      <dgm:prSet/>
+      <dgm:spPr/>
+      <dgm:t>
+        <a:bodyPr/>
+        <a:lstStyle/>
+        <a:p>
+          <a:pPr>
+            <a:lnSpc>
+              <a:spcPct val="100000"/>
+            </a:lnSpc>
+          </a:pPr>
+          <a:r>
+            <a:rPr lang="en-GB" b="1" i="0" dirty="0"/>
+            <a:t>Standardisation</a:t>
+          </a:r>
+          <a:endParaRPr lang="en-US" dirty="0"/>
+        </a:p>
+      </dgm:t>
+    </dgm:pt>
+    <dgm:pt modelId="{BF2E5147-E9F4-4F9A-9C53-7C722296905A}" type="parTrans" cxnId="{091840C4-6573-46FD-BFB0-D59E603C3439}">
+      <dgm:prSet/>
+      <dgm:spPr/>
+      <dgm:t>
+        <a:bodyPr/>
+        <a:lstStyle/>
+        <a:p>
+          <a:endParaRPr lang="en-US"/>
+        </a:p>
+      </dgm:t>
+    </dgm:pt>
+    <dgm:pt modelId="{F5CAAE20-D089-48DF-B1A0-C5EDD5EDEA8D}" type="sibTrans" cxnId="{091840C4-6573-46FD-BFB0-D59E603C3439}">
+      <dgm:prSet/>
+      <dgm:spPr/>
+      <dgm:t>
+        <a:bodyPr/>
+        <a:lstStyle/>
+        <a:p>
+          <a:endParaRPr lang="en-US"/>
+        </a:p>
+      </dgm:t>
+    </dgm:pt>
+    <dgm:pt modelId="{465146B8-399A-49D8-9983-9421F1B6A2E0}">
+      <dgm:prSet/>
+      <dgm:spPr/>
+      <dgm:t>
+        <a:bodyPr/>
+        <a:lstStyle/>
+        <a:p>
+          <a:pPr>
+            <a:lnSpc>
+              <a:spcPct val="100000"/>
+            </a:lnSpc>
+          </a:pPr>
+          <a:r>
+            <a:rPr lang="en-GB" b="0" i="0"/>
+            <a:t>Because logistic regression models are sensitive to feature scale, we will create a standardised set of feature data. This helps the model learn more effectively and will improve convergence and performance.</a:t>
+          </a:r>
+          <a:endParaRPr lang="en-US"/>
+        </a:p>
+      </dgm:t>
+    </dgm:pt>
+    <dgm:pt modelId="{E95CAAAE-4917-4AC5-BE57-539866CDC9A7}" type="parTrans" cxnId="{C2544508-DA2B-4566-9BE2-254652778471}">
+      <dgm:prSet/>
+      <dgm:spPr/>
+      <dgm:t>
+        <a:bodyPr/>
+        <a:lstStyle/>
+        <a:p>
+          <a:endParaRPr lang="en-US"/>
+        </a:p>
+      </dgm:t>
+    </dgm:pt>
+    <dgm:pt modelId="{647BF87C-89A4-4045-B031-9611FC5D3155}" type="sibTrans" cxnId="{C2544508-DA2B-4566-9BE2-254652778471}">
+      <dgm:prSet/>
+      <dgm:spPr/>
+      <dgm:t>
+        <a:bodyPr/>
+        <a:lstStyle/>
+        <a:p>
+          <a:endParaRPr lang="en-US"/>
+        </a:p>
+      </dgm:t>
+    </dgm:pt>
+    <dgm:pt modelId="{6AB764DC-0E61-4CBB-8DE5-694785AE9B68}" type="pres">
+      <dgm:prSet presAssocID="{49680756-4BD3-4F84-8A5D-4B964453A280}" presName="root" presStyleCnt="0">
+        <dgm:presLayoutVars>
+          <dgm:dir/>
+          <dgm:resizeHandles val="exact"/>
+        </dgm:presLayoutVars>
+      </dgm:prSet>
+      <dgm:spPr/>
+    </dgm:pt>
+    <dgm:pt modelId="{D463E207-701B-4F04-A8B0-E9884CD5262A}" type="pres">
+      <dgm:prSet presAssocID="{75DC09F0-8E03-44E9-A3D6-D31D3A15C9C3}" presName="compNode" presStyleCnt="0"/>
+      <dgm:spPr/>
+    </dgm:pt>
+    <dgm:pt modelId="{8D2E263E-EDF6-452B-9CB6-2B5582E5081D}" type="pres">
+      <dgm:prSet presAssocID="{75DC09F0-8E03-44E9-A3D6-D31D3A15C9C3}" presName="bgRect" presStyleLbl="bgShp" presStyleIdx="0" presStyleCnt="4"/>
+      <dgm:spPr/>
+    </dgm:pt>
+    <dgm:pt modelId="{D0ACD794-ACEA-4982-8D1C-6CCC65EB83E1}" type="pres">
+      <dgm:prSet presAssocID="{75DC09F0-8E03-44E9-A3D6-D31D3A15C9C3}" presName="iconRect" presStyleLbl="node1" presStyleIdx="0" presStyleCnt="4"/>
+      <dgm:spPr>
+        <a:blipFill>
+          <a:blip xmlns:r="http://schemas.openxmlformats.org/officeDocument/2006/relationships">
+            <a:extLst>
+              <a:ext uri="{28A0092B-C50C-407E-A947-70E740481C1C}">
+                <a14:useLocalDpi xmlns:a14="http://schemas.microsoft.com/office/drawing/2010/main" val="0"/>
+              </a:ext>
+              <a:ext uri="{96DAC541-7B7A-43D3-8B79-37D633B846F1}">
+                <asvg:svgBlip xmlns:asvg="http://schemas.microsoft.com/office/drawing/2016/SVG/main" r:embed="rId1"/>
+              </a:ext>
+            </a:extLst>
+          </a:blip>
+          <a:stretch>
+            <a:fillRect/>
+          </a:stretch>
+        </a:blipFill>
+        <a:ln>
+          <a:noFill/>
+        </a:ln>
+      </dgm:spPr>
+      <dgm:extLst>
+        <a:ext uri="{E40237B7-FDA0-4F09-8148-C483321AD2D9}">
+          <dgm14:cNvPr xmlns:dgm14="http://schemas.microsoft.com/office/drawing/2010/diagram" id="0" name="" descr="Smoking"/>
+        </a:ext>
+      </dgm:extLst>
+    </dgm:pt>
+    <dgm:pt modelId="{BF3CF92D-B0F8-47B5-8A4F-345AF778473A}" type="pres">
+      <dgm:prSet presAssocID="{75DC09F0-8E03-44E9-A3D6-D31D3A15C9C3}" presName="spaceRect" presStyleCnt="0"/>
+      <dgm:spPr/>
+    </dgm:pt>
+    <dgm:pt modelId="{E86FA69C-A857-4539-8AB4-C8683D0EC16E}" type="pres">
+      <dgm:prSet presAssocID="{75DC09F0-8E03-44E9-A3D6-D31D3A15C9C3}" presName="parTx" presStyleLbl="revTx" presStyleIdx="0" presStyleCnt="8">
+        <dgm:presLayoutVars>
+          <dgm:chMax val="0"/>
+          <dgm:chPref val="0"/>
+        </dgm:presLayoutVars>
+      </dgm:prSet>
+      <dgm:spPr/>
+    </dgm:pt>
+    <dgm:pt modelId="{0A06CC47-B981-45C2-A94F-BF6AF14E987E}" type="pres">
+      <dgm:prSet presAssocID="{75DC09F0-8E03-44E9-A3D6-D31D3A15C9C3}" presName="desTx" presStyleLbl="revTx" presStyleIdx="1" presStyleCnt="8">
+        <dgm:presLayoutVars/>
+      </dgm:prSet>
+      <dgm:spPr/>
+    </dgm:pt>
+    <dgm:pt modelId="{E5D4656C-146F-40B8-BA68-3FCD488058ED}" type="pres">
+      <dgm:prSet presAssocID="{D60A2AEF-5472-47C2-84AF-EAC0B153A42D}" presName="sibTrans" presStyleCnt="0"/>
+      <dgm:spPr/>
+    </dgm:pt>
+    <dgm:pt modelId="{FE684952-45F8-4133-9F7F-1BEB8285B9F3}" type="pres">
+      <dgm:prSet presAssocID="{74D560CC-34BE-4550-8737-A05713897D0C}" presName="compNode" presStyleCnt="0"/>
+      <dgm:spPr/>
+    </dgm:pt>
+    <dgm:pt modelId="{591D4A88-298A-4D98-96CD-F862B39A61F4}" type="pres">
+      <dgm:prSet presAssocID="{74D560CC-34BE-4550-8737-A05713897D0C}" presName="bgRect" presStyleLbl="bgShp" presStyleIdx="1" presStyleCnt="4"/>
+      <dgm:spPr/>
+    </dgm:pt>
+    <dgm:pt modelId="{BB85D6B5-9009-4A8F-A5A1-4E0EDB8CFC6E}" type="pres">
+      <dgm:prSet presAssocID="{74D560CC-34BE-4550-8737-A05713897D0C}" presName="iconRect" presStyleLbl="node1" presStyleIdx="1" presStyleCnt="4"/>
+      <dgm:spPr>
+        <a:blipFill>
+          <a:blip xmlns:r="http://schemas.openxmlformats.org/officeDocument/2006/relationships">
+            <a:extLst>
+              <a:ext uri="{28A0092B-C50C-407E-A947-70E740481C1C}">
+                <a14:useLocalDpi xmlns:a14="http://schemas.microsoft.com/office/drawing/2010/main" val="0"/>
+              </a:ext>
+              <a:ext uri="{96DAC541-7B7A-43D3-8B79-37D633B846F1}">
+                <asvg:svgBlip xmlns:asvg="http://schemas.microsoft.com/office/drawing/2016/SVG/main" r:embed="rId2"/>
+              </a:ext>
+            </a:extLst>
+          </a:blip>
+          <a:stretch>
+            <a:fillRect/>
+          </a:stretch>
+        </a:blipFill>
+        <a:ln>
+          <a:noFill/>
+        </a:ln>
+      </dgm:spPr>
+      <dgm:extLst>
+        <a:ext uri="{E40237B7-FDA0-4F09-8148-C483321AD2D9}">
+          <dgm14:cNvPr xmlns:dgm14="http://schemas.microsoft.com/office/drawing/2010/diagram" id="0" name="" descr="Train"/>
+        </a:ext>
+      </dgm:extLst>
+    </dgm:pt>
+    <dgm:pt modelId="{133AE7E8-F71D-4B0F-9396-22F2BB788CB2}" type="pres">
+      <dgm:prSet presAssocID="{74D560CC-34BE-4550-8737-A05713897D0C}" presName="spaceRect" presStyleCnt="0"/>
+      <dgm:spPr/>
+    </dgm:pt>
+    <dgm:pt modelId="{23001468-A7D8-450C-918D-8DC7DCD6DC2D}" type="pres">
+      <dgm:prSet presAssocID="{74D560CC-34BE-4550-8737-A05713897D0C}" presName="parTx" presStyleLbl="revTx" presStyleIdx="2" presStyleCnt="8">
+        <dgm:presLayoutVars>
+          <dgm:chMax val="0"/>
+          <dgm:chPref val="0"/>
+        </dgm:presLayoutVars>
+      </dgm:prSet>
+      <dgm:spPr/>
+    </dgm:pt>
+    <dgm:pt modelId="{13BF9963-FC3D-40C6-B594-46E1D79DA245}" type="pres">
+      <dgm:prSet presAssocID="{74D560CC-34BE-4550-8737-A05713897D0C}" presName="desTx" presStyleLbl="revTx" presStyleIdx="3" presStyleCnt="8">
+        <dgm:presLayoutVars/>
+      </dgm:prSet>
+      <dgm:spPr/>
+    </dgm:pt>
+    <dgm:pt modelId="{BCF8DB5F-3F7C-46D7-8D89-2483C0F58A3B}" type="pres">
+      <dgm:prSet presAssocID="{B0AD3191-E348-4AE7-AB67-2F46727E8878}" presName="sibTrans" presStyleCnt="0"/>
+      <dgm:spPr/>
+    </dgm:pt>
+    <dgm:pt modelId="{1E7C8DBF-E768-4B30-BC4F-7CCDC54EC11D}" type="pres">
+      <dgm:prSet presAssocID="{FFCE8147-13CA-449B-B3B2-71D15AAB19D2}" presName="compNode" presStyleCnt="0"/>
+      <dgm:spPr/>
+    </dgm:pt>
+    <dgm:pt modelId="{E95796B8-CB4A-44F8-ACBF-9F41AF6F350E}" type="pres">
+      <dgm:prSet presAssocID="{FFCE8147-13CA-449B-B3B2-71D15AAB19D2}" presName="bgRect" presStyleLbl="bgShp" presStyleIdx="2" presStyleCnt="4"/>
+      <dgm:spPr/>
+    </dgm:pt>
+    <dgm:pt modelId="{7BCF4D80-84DA-4FB4-88D1-E9E82A9F2EBF}" type="pres">
+      <dgm:prSet presAssocID="{FFCE8147-13CA-449B-B3B2-71D15AAB19D2}" presName="iconRect" presStyleLbl="node1" presStyleIdx="2" presStyleCnt="4"/>
+      <dgm:spPr>
+        <a:blipFill>
+          <a:blip xmlns:r="http://schemas.openxmlformats.org/officeDocument/2006/relationships">
+            <a:extLst>
+              <a:ext uri="{28A0092B-C50C-407E-A947-70E740481C1C}">
+                <a14:useLocalDpi xmlns:a14="http://schemas.microsoft.com/office/drawing/2010/main" val="0"/>
+              </a:ext>
+              <a:ext uri="{96DAC541-7B7A-43D3-8B79-37D633B846F1}">
+                <asvg:svgBlip xmlns:asvg="http://schemas.microsoft.com/office/drawing/2016/SVG/main" r:embed="rId3"/>
+              </a:ext>
+            </a:extLst>
+          </a:blip>
+          <a:stretch>
+            <a:fillRect/>
+          </a:stretch>
+        </a:blipFill>
+        <a:ln>
+          <a:noFill/>
+        </a:ln>
+      </dgm:spPr>
+      <dgm:extLst>
+        <a:ext uri="{E40237B7-FDA0-4F09-8148-C483321AD2D9}">
+          <dgm14:cNvPr xmlns:dgm14="http://schemas.microsoft.com/office/drawing/2010/diagram" id="0" name="" descr="Disconnected"/>
+        </a:ext>
+      </dgm:extLst>
+    </dgm:pt>
+    <dgm:pt modelId="{5347E5CB-3CED-43F7-8686-FA282084C54B}" type="pres">
+      <dgm:prSet presAssocID="{FFCE8147-13CA-449B-B3B2-71D15AAB19D2}" presName="spaceRect" presStyleCnt="0"/>
+      <dgm:spPr/>
+    </dgm:pt>
+    <dgm:pt modelId="{4B4E4611-E3F0-41B6-9E5C-7D2555D3FB68}" type="pres">
+      <dgm:prSet presAssocID="{FFCE8147-13CA-449B-B3B2-71D15AAB19D2}" presName="parTx" presStyleLbl="revTx" presStyleIdx="4" presStyleCnt="8">
+        <dgm:presLayoutVars>
+          <dgm:chMax val="0"/>
+          <dgm:chPref val="0"/>
+        </dgm:presLayoutVars>
+      </dgm:prSet>
+      <dgm:spPr/>
+    </dgm:pt>
+    <dgm:pt modelId="{207F25EA-76C1-4FC2-A295-FF5F7249C1D4}" type="pres">
+      <dgm:prSet presAssocID="{FFCE8147-13CA-449B-B3B2-71D15AAB19D2}" presName="desTx" presStyleLbl="revTx" presStyleIdx="5" presStyleCnt="8">
+        <dgm:presLayoutVars/>
+      </dgm:prSet>
+      <dgm:spPr/>
+    </dgm:pt>
+    <dgm:pt modelId="{4BF1341B-749E-4DDB-8E8A-5EE468337041}" type="pres">
+      <dgm:prSet presAssocID="{72C9ED2E-D976-48FF-94FC-587E20F98CD7}" presName="sibTrans" presStyleCnt="0"/>
+      <dgm:spPr/>
+    </dgm:pt>
+    <dgm:pt modelId="{6D8DA2A8-8A73-4948-BFFB-E10687684566}" type="pres">
+      <dgm:prSet presAssocID="{6006ED6E-EF26-4773-8249-3C268B49A4F3}" presName="compNode" presStyleCnt="0"/>
+      <dgm:spPr/>
+    </dgm:pt>
+    <dgm:pt modelId="{D39E7134-0899-4778-AA52-AD38D575CE2F}" type="pres">
+      <dgm:prSet presAssocID="{6006ED6E-EF26-4773-8249-3C268B49A4F3}" presName="bgRect" presStyleLbl="bgShp" presStyleIdx="3" presStyleCnt="4"/>
+      <dgm:spPr/>
+    </dgm:pt>
+    <dgm:pt modelId="{F79F01F7-0898-4489-A103-3CFBAD58B283}" type="pres">
+      <dgm:prSet presAssocID="{6006ED6E-EF26-4773-8249-3C268B49A4F3}" presName="iconRect" presStyleLbl="node1" presStyleIdx="3" presStyleCnt="4"/>
+      <dgm:spPr>
+        <a:blipFill>
+          <a:blip xmlns:r="http://schemas.openxmlformats.org/officeDocument/2006/relationships">
+            <a:extLst>
+              <a:ext uri="{28A0092B-C50C-407E-A947-70E740481C1C}">
+                <a14:useLocalDpi xmlns:a14="http://schemas.microsoft.com/office/drawing/2010/main" val="0"/>
+              </a:ext>
+              <a:ext uri="{96DAC541-7B7A-43D3-8B79-37D633B846F1}">
+                <asvg:svgBlip xmlns:asvg="http://schemas.microsoft.com/office/drawing/2016/SVG/main" r:embed="rId4"/>
+              </a:ext>
+            </a:extLst>
+          </a:blip>
+          <a:stretch>
+            <a:fillRect/>
+          </a:stretch>
+        </a:blipFill>
+        <a:ln>
+          <a:noFill/>
+        </a:ln>
+      </dgm:spPr>
+      <dgm:extLst>
+        <a:ext uri="{E40237B7-FDA0-4F09-8148-C483321AD2D9}">
+          <dgm14:cNvPr xmlns:dgm14="http://schemas.microsoft.com/office/drawing/2010/diagram" id="0" name="" descr="Flowchart"/>
+        </a:ext>
+      </dgm:extLst>
+    </dgm:pt>
+    <dgm:pt modelId="{9E12CC23-F492-4456-9F38-B77EF8C9D37B}" type="pres">
+      <dgm:prSet presAssocID="{6006ED6E-EF26-4773-8249-3C268B49A4F3}" presName="spaceRect" presStyleCnt="0"/>
+      <dgm:spPr/>
+    </dgm:pt>
+    <dgm:pt modelId="{C14E2CDE-0BB6-47C4-B536-CF16F3FF1ED4}" type="pres">
+      <dgm:prSet presAssocID="{6006ED6E-EF26-4773-8249-3C268B49A4F3}" presName="parTx" presStyleLbl="revTx" presStyleIdx="6" presStyleCnt="8">
+        <dgm:presLayoutVars>
+          <dgm:chMax val="0"/>
+          <dgm:chPref val="0"/>
+        </dgm:presLayoutVars>
+      </dgm:prSet>
+      <dgm:spPr/>
+    </dgm:pt>
+    <dgm:pt modelId="{31B96AEB-6F14-4E85-9147-2DB06D2B3421}" type="pres">
+      <dgm:prSet presAssocID="{6006ED6E-EF26-4773-8249-3C268B49A4F3}" presName="desTx" presStyleLbl="revTx" presStyleIdx="7" presStyleCnt="8">
+        <dgm:presLayoutVars/>
+      </dgm:prSet>
+      <dgm:spPr/>
+    </dgm:pt>
+  </dgm:ptLst>
+  <dgm:cxnLst>
+    <dgm:cxn modelId="{C2544508-DA2B-4566-9BE2-254652778471}" srcId="{6006ED6E-EF26-4773-8249-3C268B49A4F3}" destId="{465146B8-399A-49D8-9983-9421F1B6A2E0}" srcOrd="0" destOrd="0" parTransId="{E95CAAAE-4917-4AC5-BE57-539866CDC9A7}" sibTransId="{647BF87C-89A4-4045-B031-9611FC5D3155}"/>
+    <dgm:cxn modelId="{0AD4FC0D-48AE-4DC7-B9E3-7A64720D8B51}" type="presOf" srcId="{FFCE8147-13CA-449B-B3B2-71D15AAB19D2}" destId="{4B4E4611-E3F0-41B6-9E5C-7D2555D3FB68}" srcOrd="0" destOrd="0" presId="urn:microsoft.com/office/officeart/2018/2/layout/IconVerticalSolidList"/>
+    <dgm:cxn modelId="{0C029E14-9CFE-4BCC-BB2C-48E7A4EBA78D}" type="presOf" srcId="{49680756-4BD3-4F84-8A5D-4B964453A280}" destId="{6AB764DC-0E61-4CBB-8DE5-694785AE9B68}" srcOrd="0" destOrd="0" presId="urn:microsoft.com/office/officeart/2018/2/layout/IconVerticalSolidList"/>
+    <dgm:cxn modelId="{11368B19-14DC-4322-95EB-9CD55644AB90}" srcId="{75DC09F0-8E03-44E9-A3D6-D31D3A15C9C3}" destId="{9EC0802F-283C-4DF6-A974-ECC0CF60EC59}" srcOrd="0" destOrd="0" parTransId="{8EBD0758-5141-4F19-ABB5-5157A615629B}" sibTransId="{4C43970A-CE4A-4168-9906-2BF245EF3D13}"/>
+    <dgm:cxn modelId="{877DD226-8AF4-4600-80A0-2EB8C117CCCA}" type="presOf" srcId="{00DCD73A-AB96-4525-A883-0F03A2273298}" destId="{13BF9963-FC3D-40C6-B594-46E1D79DA245}" srcOrd="0" destOrd="0" presId="urn:microsoft.com/office/officeart/2018/2/layout/IconVerticalSolidList"/>
+    <dgm:cxn modelId="{16741E2F-0C1F-4652-BC48-5672990F8323}" srcId="{49680756-4BD3-4F84-8A5D-4B964453A280}" destId="{FFCE8147-13CA-449B-B3B2-71D15AAB19D2}" srcOrd="2" destOrd="0" parTransId="{0DB07463-79E4-4125-ADC4-170F0C599508}" sibTransId="{72C9ED2E-D976-48FF-94FC-587E20F98CD7}"/>
+    <dgm:cxn modelId="{25883542-1CA7-4C4A-8DAA-FE7B2C4BD671}" type="presOf" srcId="{74D560CC-34BE-4550-8737-A05713897D0C}" destId="{23001468-A7D8-450C-918D-8DC7DCD6DC2D}" srcOrd="0" destOrd="0" presId="urn:microsoft.com/office/officeart/2018/2/layout/IconVerticalSolidList"/>
+    <dgm:cxn modelId="{99426C67-CDF2-4676-AD2E-E1CB0D9DECFB}" type="presOf" srcId="{6006ED6E-EF26-4773-8249-3C268B49A4F3}" destId="{C14E2CDE-0BB6-47C4-B536-CF16F3FF1ED4}" srcOrd="0" destOrd="0" presId="urn:microsoft.com/office/officeart/2018/2/layout/IconVerticalSolidList"/>
+    <dgm:cxn modelId="{80EE7649-529D-458C-A1B3-F0D0B49CE7BD}" type="presOf" srcId="{9EC0802F-283C-4DF6-A974-ECC0CF60EC59}" destId="{0A06CC47-B981-45C2-A94F-BF6AF14E987E}" srcOrd="0" destOrd="0" presId="urn:microsoft.com/office/officeart/2018/2/layout/IconVerticalSolidList"/>
+    <dgm:cxn modelId="{D1140789-4D63-4FAD-A4C0-FB3223C560F1}" type="presOf" srcId="{75DC09F0-8E03-44E9-A3D6-D31D3A15C9C3}" destId="{E86FA69C-A857-4539-8AB4-C8683D0EC16E}" srcOrd="0" destOrd="0" presId="urn:microsoft.com/office/officeart/2018/2/layout/IconVerticalSolidList"/>
+    <dgm:cxn modelId="{339B5594-1D00-47C1-9B8F-A5E3BD214B30}" type="presOf" srcId="{465146B8-399A-49D8-9983-9421F1B6A2E0}" destId="{31B96AEB-6F14-4E85-9147-2DB06D2B3421}" srcOrd="0" destOrd="0" presId="urn:microsoft.com/office/officeart/2018/2/layout/IconVerticalSolidList"/>
+    <dgm:cxn modelId="{6284149A-2A3F-40BC-92CF-F5E1E0ADA693}" srcId="{49680756-4BD3-4F84-8A5D-4B964453A280}" destId="{74D560CC-34BE-4550-8737-A05713897D0C}" srcOrd="1" destOrd="0" parTransId="{7B582DB2-50D3-431E-A39F-E2EEF6CFBF1A}" sibTransId="{B0AD3191-E348-4AE7-AB67-2F46727E8878}"/>
+    <dgm:cxn modelId="{D50705BC-A2FF-4D92-9BA2-86C9ABF7DDB4}" srcId="{74D560CC-34BE-4550-8737-A05713897D0C}" destId="{00DCD73A-AB96-4525-A883-0F03A2273298}" srcOrd="0" destOrd="0" parTransId="{44446489-8C50-4A76-9081-0D2C119AC6C2}" sibTransId="{FE57C30B-4255-40C2-ABD0-3E116B734535}"/>
+    <dgm:cxn modelId="{745C17BF-CDFD-4871-8439-BCE8939E7EF2}" srcId="{49680756-4BD3-4F84-8A5D-4B964453A280}" destId="{75DC09F0-8E03-44E9-A3D6-D31D3A15C9C3}" srcOrd="0" destOrd="0" parTransId="{9A5596AA-83B4-4804-9A4C-4B2B131B2E7B}" sibTransId="{D60A2AEF-5472-47C2-84AF-EAC0B153A42D}"/>
+    <dgm:cxn modelId="{091840C4-6573-46FD-BFB0-D59E603C3439}" srcId="{49680756-4BD3-4F84-8A5D-4B964453A280}" destId="{6006ED6E-EF26-4773-8249-3C268B49A4F3}" srcOrd="3" destOrd="0" parTransId="{BF2E5147-E9F4-4F9A-9C53-7C722296905A}" sibTransId="{F5CAAE20-D089-48DF-B1A0-C5EDD5EDEA8D}"/>
+    <dgm:cxn modelId="{8DAAC2ED-0ECC-4F72-827D-898F48EFD2E7}" srcId="{FFCE8147-13CA-449B-B3B2-71D15AAB19D2}" destId="{F2C30BC1-8BB4-4B16-B190-72CE8A6CA3AD}" srcOrd="0" destOrd="0" parTransId="{2B7B291E-8EA6-4B5C-992D-D4C7BBE3A5A7}" sibTransId="{824468B0-0665-48BE-9773-36A8F55D0BB2}"/>
+    <dgm:cxn modelId="{7D1ABFF5-D662-4E4D-8131-A3BAE5A5177D}" type="presOf" srcId="{F2C30BC1-8BB4-4B16-B190-72CE8A6CA3AD}" destId="{207F25EA-76C1-4FC2-A295-FF5F7249C1D4}" srcOrd="0" destOrd="0" presId="urn:microsoft.com/office/officeart/2018/2/layout/IconVerticalSolidList"/>
+    <dgm:cxn modelId="{AC3C5378-65E9-4035-B97B-C5A23F47446E}" type="presParOf" srcId="{6AB764DC-0E61-4CBB-8DE5-694785AE9B68}" destId="{D463E207-701B-4F04-A8B0-E9884CD5262A}" srcOrd="0" destOrd="0" presId="urn:microsoft.com/office/officeart/2018/2/layout/IconVerticalSolidList"/>
+    <dgm:cxn modelId="{4ADA4954-CA19-4EBB-94A9-981E8FED9083}" type="presParOf" srcId="{D463E207-701B-4F04-A8B0-E9884CD5262A}" destId="{8D2E263E-EDF6-452B-9CB6-2B5582E5081D}" srcOrd="0" destOrd="0" presId="urn:microsoft.com/office/officeart/2018/2/layout/IconVerticalSolidList"/>
+    <dgm:cxn modelId="{6D46C8A3-9C37-4E4B-BCFE-C0FA00538C46}" type="presParOf" srcId="{D463E207-701B-4F04-A8B0-E9884CD5262A}" destId="{D0ACD794-ACEA-4982-8D1C-6CCC65EB83E1}" srcOrd="1" destOrd="0" presId="urn:microsoft.com/office/officeart/2018/2/layout/IconVerticalSolidList"/>
+    <dgm:cxn modelId="{EC76EA89-E869-434E-B89C-633E31900CD1}" type="presParOf" srcId="{D463E207-701B-4F04-A8B0-E9884CD5262A}" destId="{BF3CF92D-B0F8-47B5-8A4F-345AF778473A}" srcOrd="2" destOrd="0" presId="urn:microsoft.com/office/officeart/2018/2/layout/IconVerticalSolidList"/>
+    <dgm:cxn modelId="{25F7C755-A34B-4F33-A24C-1ABA4F214D9C}" type="presParOf" srcId="{D463E207-701B-4F04-A8B0-E9884CD5262A}" destId="{E86FA69C-A857-4539-8AB4-C8683D0EC16E}" srcOrd="3" destOrd="0" presId="urn:microsoft.com/office/officeart/2018/2/layout/IconVerticalSolidList"/>
+    <dgm:cxn modelId="{8AEBF203-9336-45B9-9AA4-04F1D1B48938}" type="presParOf" srcId="{D463E207-701B-4F04-A8B0-E9884CD5262A}" destId="{0A06CC47-B981-45C2-A94F-BF6AF14E987E}" srcOrd="4" destOrd="0" presId="urn:microsoft.com/office/officeart/2018/2/layout/IconVerticalSolidList"/>
+    <dgm:cxn modelId="{33A1CB40-2715-42C9-90C7-FC4EBA0773EE}" type="presParOf" srcId="{6AB764DC-0E61-4CBB-8DE5-694785AE9B68}" destId="{E5D4656C-146F-40B8-BA68-3FCD488058ED}" srcOrd="1" destOrd="0" presId="urn:microsoft.com/office/officeart/2018/2/layout/IconVerticalSolidList"/>
+    <dgm:cxn modelId="{28C4266F-8ACC-4B05-AC28-DB4AEA27C8EC}" type="presParOf" srcId="{6AB764DC-0E61-4CBB-8DE5-694785AE9B68}" destId="{FE684952-45F8-4133-9F7F-1BEB8285B9F3}" srcOrd="2" destOrd="0" presId="urn:microsoft.com/office/officeart/2018/2/layout/IconVerticalSolidList"/>
+    <dgm:cxn modelId="{ED9258AE-83B0-44BC-A9C5-83C3CEC2C538}" type="presParOf" srcId="{FE684952-45F8-4133-9F7F-1BEB8285B9F3}" destId="{591D4A88-298A-4D98-96CD-F862B39A61F4}" srcOrd="0" destOrd="0" presId="urn:microsoft.com/office/officeart/2018/2/layout/IconVerticalSolidList"/>
+    <dgm:cxn modelId="{3B46EB09-2C8C-4CB0-B3B4-6CFBE38B9BC7}" type="presParOf" srcId="{FE684952-45F8-4133-9F7F-1BEB8285B9F3}" destId="{BB85D6B5-9009-4A8F-A5A1-4E0EDB8CFC6E}" srcOrd="1" destOrd="0" presId="urn:microsoft.com/office/officeart/2018/2/layout/IconVerticalSolidList"/>
+    <dgm:cxn modelId="{763B1358-DD96-43AA-AC94-BC6656DCB64C}" type="presParOf" srcId="{FE684952-45F8-4133-9F7F-1BEB8285B9F3}" destId="{133AE7E8-F71D-4B0F-9396-22F2BB788CB2}" srcOrd="2" destOrd="0" presId="urn:microsoft.com/office/officeart/2018/2/layout/IconVerticalSolidList"/>
+    <dgm:cxn modelId="{B955F760-3944-475E-BF2C-F8710CF090F5}" type="presParOf" srcId="{FE684952-45F8-4133-9F7F-1BEB8285B9F3}" destId="{23001468-A7D8-450C-918D-8DC7DCD6DC2D}" srcOrd="3" destOrd="0" presId="urn:microsoft.com/office/officeart/2018/2/layout/IconVerticalSolidList"/>
+    <dgm:cxn modelId="{9D2A9DA6-ED57-4353-8944-F136D6052AC9}" type="presParOf" srcId="{FE684952-45F8-4133-9F7F-1BEB8285B9F3}" destId="{13BF9963-FC3D-40C6-B594-46E1D79DA245}" srcOrd="4" destOrd="0" presId="urn:microsoft.com/office/officeart/2018/2/layout/IconVerticalSolidList"/>
+    <dgm:cxn modelId="{1D9493B8-7392-4101-AED0-08817E0C5B0E}" type="presParOf" srcId="{6AB764DC-0E61-4CBB-8DE5-694785AE9B68}" destId="{BCF8DB5F-3F7C-46D7-8D89-2483C0F58A3B}" srcOrd="3" destOrd="0" presId="urn:microsoft.com/office/officeart/2018/2/layout/IconVerticalSolidList"/>
+    <dgm:cxn modelId="{C7101856-C364-46D5-8AAA-E39C3A2ED69D}" type="presParOf" srcId="{6AB764DC-0E61-4CBB-8DE5-694785AE9B68}" destId="{1E7C8DBF-E768-4B30-BC4F-7CCDC54EC11D}" srcOrd="4" destOrd="0" presId="urn:microsoft.com/office/officeart/2018/2/layout/IconVerticalSolidList"/>
+    <dgm:cxn modelId="{F3A06213-C4D3-43A6-8257-C09BC67CD33A}" type="presParOf" srcId="{1E7C8DBF-E768-4B30-BC4F-7CCDC54EC11D}" destId="{E95796B8-CB4A-44F8-ACBF-9F41AF6F350E}" srcOrd="0" destOrd="0" presId="urn:microsoft.com/office/officeart/2018/2/layout/IconVerticalSolidList"/>
+    <dgm:cxn modelId="{E63DB9B7-5872-474C-8D44-1E09F6A5FA37}" type="presParOf" srcId="{1E7C8DBF-E768-4B30-BC4F-7CCDC54EC11D}" destId="{7BCF4D80-84DA-4FB4-88D1-E9E82A9F2EBF}" srcOrd="1" destOrd="0" presId="urn:microsoft.com/office/officeart/2018/2/layout/IconVerticalSolidList"/>
+    <dgm:cxn modelId="{7348D66F-433F-4CCE-917B-8C30313B4E67}" type="presParOf" srcId="{1E7C8DBF-E768-4B30-BC4F-7CCDC54EC11D}" destId="{5347E5CB-3CED-43F7-8686-FA282084C54B}" srcOrd="2" destOrd="0" presId="urn:microsoft.com/office/officeart/2018/2/layout/IconVerticalSolidList"/>
+    <dgm:cxn modelId="{2361CC94-9641-4A84-AD4C-BCF71D83E5B4}" type="presParOf" srcId="{1E7C8DBF-E768-4B30-BC4F-7CCDC54EC11D}" destId="{4B4E4611-E3F0-41B6-9E5C-7D2555D3FB68}" srcOrd="3" destOrd="0" presId="urn:microsoft.com/office/officeart/2018/2/layout/IconVerticalSolidList"/>
+    <dgm:cxn modelId="{9881BD72-665F-4342-A2BB-B2ED3ACA6EEE}" type="presParOf" srcId="{1E7C8DBF-E768-4B30-BC4F-7CCDC54EC11D}" destId="{207F25EA-76C1-4FC2-A295-FF5F7249C1D4}" srcOrd="4" destOrd="0" presId="urn:microsoft.com/office/officeart/2018/2/layout/IconVerticalSolidList"/>
+    <dgm:cxn modelId="{922B5F5A-D2E3-4F37-8D8E-741781824523}" type="presParOf" srcId="{6AB764DC-0E61-4CBB-8DE5-694785AE9B68}" destId="{4BF1341B-749E-4DDB-8E8A-5EE468337041}" srcOrd="5" destOrd="0" presId="urn:microsoft.com/office/officeart/2018/2/layout/IconVerticalSolidList"/>
+    <dgm:cxn modelId="{BB4E79A6-D6AA-47BE-A830-44C1FBCFE120}" type="presParOf" srcId="{6AB764DC-0E61-4CBB-8DE5-694785AE9B68}" destId="{6D8DA2A8-8A73-4948-BFFB-E10687684566}" srcOrd="6" destOrd="0" presId="urn:microsoft.com/office/officeart/2018/2/layout/IconVerticalSolidList"/>
+    <dgm:cxn modelId="{6A3C1DA4-7A80-414D-859C-88A9FB0E9719}" type="presParOf" srcId="{6D8DA2A8-8A73-4948-BFFB-E10687684566}" destId="{D39E7134-0899-4778-AA52-AD38D575CE2F}" srcOrd="0" destOrd="0" presId="urn:microsoft.com/office/officeart/2018/2/layout/IconVerticalSolidList"/>
+    <dgm:cxn modelId="{AA9F9895-D0FB-446D-9D31-FAFA147DC493}" type="presParOf" srcId="{6D8DA2A8-8A73-4948-BFFB-E10687684566}" destId="{F79F01F7-0898-4489-A103-3CFBAD58B283}" srcOrd="1" destOrd="0" presId="urn:microsoft.com/office/officeart/2018/2/layout/IconVerticalSolidList"/>
+    <dgm:cxn modelId="{59E0C568-846D-4B93-A11B-E6A03CE07516}" type="presParOf" srcId="{6D8DA2A8-8A73-4948-BFFB-E10687684566}" destId="{9E12CC23-F492-4456-9F38-B77EF8C9D37B}" srcOrd="2" destOrd="0" presId="urn:microsoft.com/office/officeart/2018/2/layout/IconVerticalSolidList"/>
+    <dgm:cxn modelId="{C14CD7A8-3CF3-44DF-85E8-B19545395171}" type="presParOf" srcId="{6D8DA2A8-8A73-4948-BFFB-E10687684566}" destId="{C14E2CDE-0BB6-47C4-B536-CF16F3FF1ED4}" srcOrd="3" destOrd="0" presId="urn:microsoft.com/office/officeart/2018/2/layout/IconVerticalSolidList"/>
+    <dgm:cxn modelId="{03C5FB77-0645-47FD-ACDB-EBF0357DE38A}" type="presParOf" srcId="{6D8DA2A8-8A73-4948-BFFB-E10687684566}" destId="{31B96AEB-6F14-4E85-9147-2DB06D2B3421}" srcOrd="4" destOrd="0" presId="urn:microsoft.com/office/officeart/2018/2/layout/IconVerticalSolidList"/>
+  </dgm:cxnLst>
+  <dgm:bg/>
+  <dgm:whole/>
+  <dgm:extLst>
+    <a:ext uri="http://schemas.microsoft.com/office/drawing/2008/diagram">
+      <dsp:dataModelExt xmlns:dsp="http://schemas.microsoft.com/office/drawing/2008/diagram" relId="rId6" minVer="http://schemas.openxmlformats.org/drawingml/2006/diagram"/>
+    </a:ext>
+  </dgm:extLst>
+</dgm:dataModel>
+</file>
+
+<file path=ppt/diagrams/data6.xml><?xml version="1.0" encoding="utf-8"?>
 <dgm:dataModel xmlns:dgm="http://schemas.openxmlformats.org/drawingml/2006/diagram" xmlns:a="http://schemas.openxmlformats.org/drawingml/2006/main">
   <dgm:ptLst>
     <dgm:pt modelId="{BB313E4A-8B87-4AAD-AEEE-9B1435558CB9}" type="doc">
@@ -9138,6 +10573,914 @@
       <dsp:cNvGrpSpPr/>
     </dsp:nvGrpSpPr>
     <dsp:grpSpPr/>
+    <dsp:sp modelId="{8D2E263E-EDF6-452B-9CB6-2B5582E5081D}">
+      <dsp:nvSpPr>
+        <dsp:cNvPr id="0" name=""/>
+        <dsp:cNvSpPr/>
+      </dsp:nvSpPr>
+      <dsp:spPr>
+        <a:xfrm>
+          <a:off x="0" y="3130"/>
+          <a:ext cx="10515601" cy="728518"/>
+        </a:xfrm>
+        <a:prstGeom prst="roundRect">
+          <a:avLst>
+            <a:gd name="adj" fmla="val 10000"/>
+          </a:avLst>
+        </a:prstGeom>
+        <a:solidFill>
+          <a:schemeClr val="accent3">
+            <a:tint val="40000"/>
+            <a:hueOff val="0"/>
+            <a:satOff val="0"/>
+            <a:lumOff val="0"/>
+            <a:alphaOff val="0"/>
+          </a:schemeClr>
+        </a:solidFill>
+        <a:ln>
+          <a:noFill/>
+        </a:ln>
+        <a:effectLst/>
+      </dsp:spPr>
+      <dsp:style>
+        <a:lnRef idx="0">
+          <a:scrgbClr r="0" g="0" b="0"/>
+        </a:lnRef>
+        <a:fillRef idx="1">
+          <a:scrgbClr r="0" g="0" b="0"/>
+        </a:fillRef>
+        <a:effectRef idx="0">
+          <a:scrgbClr r="0" g="0" b="0"/>
+        </a:effectRef>
+        <a:fontRef idx="minor"/>
+      </dsp:style>
+    </dsp:sp>
+    <dsp:sp modelId="{D0ACD794-ACEA-4982-8D1C-6CCC65EB83E1}">
+      <dsp:nvSpPr>
+        <dsp:cNvPr id="0" name=""/>
+        <dsp:cNvSpPr/>
+      </dsp:nvSpPr>
+      <dsp:spPr>
+        <a:xfrm>
+          <a:off x="220376" y="167046"/>
+          <a:ext cx="400685" cy="400685"/>
+        </a:xfrm>
+        <a:prstGeom prst="rect">
+          <a:avLst/>
+        </a:prstGeom>
+        <a:blipFill>
+          <a:blip xmlns:r="http://schemas.openxmlformats.org/officeDocument/2006/relationships">
+            <a:extLst>
+              <a:ext uri="{28A0092B-C50C-407E-A947-70E740481C1C}">
+                <a14:useLocalDpi xmlns:a14="http://schemas.microsoft.com/office/drawing/2010/main" val="0"/>
+              </a:ext>
+              <a:ext uri="{96DAC541-7B7A-43D3-8B79-37D633B846F1}">
+                <asvg:svgBlip xmlns:asvg="http://schemas.microsoft.com/office/drawing/2016/SVG/main" r:embed="rId1"/>
+              </a:ext>
+            </a:extLst>
+          </a:blip>
+          <a:stretch>
+            <a:fillRect/>
+          </a:stretch>
+        </a:blipFill>
+        <a:ln w="12700" cap="flat" cmpd="sng" algn="ctr">
+          <a:noFill/>
+          <a:prstDash val="solid"/>
+          <a:miter lim="800000"/>
+        </a:ln>
+        <a:effectLst/>
+      </dsp:spPr>
+      <dsp:style>
+        <a:lnRef idx="2">
+          <a:scrgbClr r="0" g="0" b="0"/>
+        </a:lnRef>
+        <a:fillRef idx="1">
+          <a:scrgbClr r="0" g="0" b="0"/>
+        </a:fillRef>
+        <a:effectRef idx="0">
+          <a:scrgbClr r="0" g="0" b="0"/>
+        </a:effectRef>
+        <a:fontRef idx="minor">
+          <a:schemeClr val="lt1"/>
+        </a:fontRef>
+      </dsp:style>
+    </dsp:sp>
+    <dsp:sp modelId="{E86FA69C-A857-4539-8AB4-C8683D0EC16E}">
+      <dsp:nvSpPr>
+        <dsp:cNvPr id="0" name=""/>
+        <dsp:cNvSpPr/>
+      </dsp:nvSpPr>
+      <dsp:spPr>
+        <a:xfrm>
+          <a:off x="841439" y="3130"/>
+          <a:ext cx="4732020" cy="728518"/>
+        </a:xfrm>
+        <a:prstGeom prst="rect">
+          <a:avLst/>
+        </a:prstGeom>
+        <a:noFill/>
+        <a:ln>
+          <a:noFill/>
+        </a:ln>
+        <a:effectLst/>
+      </dsp:spPr>
+      <dsp:style>
+        <a:lnRef idx="0">
+          <a:scrgbClr r="0" g="0" b="0"/>
+        </a:lnRef>
+        <a:fillRef idx="0">
+          <a:scrgbClr r="0" g="0" b="0"/>
+        </a:fillRef>
+        <a:effectRef idx="0">
+          <a:scrgbClr r="0" g="0" b="0"/>
+        </a:effectRef>
+        <a:fontRef idx="minor"/>
+      </dsp:style>
+      <dsp:txBody>
+        <a:bodyPr spcFirstLastPara="0" vert="horz" wrap="square" lIns="77102" tIns="77102" rIns="77102" bIns="77102" numCol="1" spcCol="1270" anchor="ctr" anchorCtr="0">
+          <a:noAutofit/>
+        </a:bodyPr>
+        <a:lstStyle/>
+        <a:p>
+          <a:pPr marL="0" lvl="0" indent="0" algn="l" defTabSz="977900">
+            <a:lnSpc>
+              <a:spcPct val="100000"/>
+            </a:lnSpc>
+            <a:spcBef>
+              <a:spcPct val="0"/>
+            </a:spcBef>
+            <a:spcAft>
+              <a:spcPct val="35000"/>
+            </a:spcAft>
+            <a:buNone/>
+          </a:pPr>
+          <a:r>
+            <a:rPr lang="en-GB" sz="2200" b="1" kern="1200" dirty="0"/>
+            <a:t>Target Label Encoding </a:t>
+          </a:r>
+          <a:endParaRPr lang="en-US" sz="2200" b="1" kern="1200" dirty="0"/>
+        </a:p>
+      </dsp:txBody>
+      <dsp:txXfrm>
+        <a:off x="841439" y="3130"/>
+        <a:ext cx="4732020" cy="728518"/>
+      </dsp:txXfrm>
+    </dsp:sp>
+    <dsp:sp modelId="{0A06CC47-B981-45C2-A94F-BF6AF14E987E}">
+      <dsp:nvSpPr>
+        <dsp:cNvPr id="0" name=""/>
+        <dsp:cNvSpPr/>
+      </dsp:nvSpPr>
+      <dsp:spPr>
+        <a:xfrm>
+          <a:off x="5573459" y="3130"/>
+          <a:ext cx="4941318" cy="728518"/>
+        </a:xfrm>
+        <a:prstGeom prst="rect">
+          <a:avLst/>
+        </a:prstGeom>
+        <a:noFill/>
+        <a:ln>
+          <a:noFill/>
+        </a:ln>
+        <a:effectLst/>
+      </dsp:spPr>
+      <dsp:style>
+        <a:lnRef idx="0">
+          <a:scrgbClr r="0" g="0" b="0"/>
+        </a:lnRef>
+        <a:fillRef idx="0">
+          <a:scrgbClr r="0" g="0" b="0"/>
+        </a:fillRef>
+        <a:effectRef idx="0">
+          <a:scrgbClr r="0" g="0" b="0"/>
+        </a:effectRef>
+        <a:fontRef idx="minor"/>
+      </dsp:style>
+      <dsp:txBody>
+        <a:bodyPr spcFirstLastPara="0" vert="horz" wrap="square" lIns="77102" tIns="77102" rIns="77102" bIns="77102" numCol="1" spcCol="1270" anchor="ctr" anchorCtr="0">
+          <a:noAutofit/>
+        </a:bodyPr>
+        <a:lstStyle/>
+        <a:p>
+          <a:pPr marL="0" lvl="0" indent="0" algn="l" defTabSz="488950">
+            <a:lnSpc>
+              <a:spcPct val="100000"/>
+            </a:lnSpc>
+            <a:spcBef>
+              <a:spcPct val="0"/>
+            </a:spcBef>
+            <a:spcAft>
+              <a:spcPct val="35000"/>
+            </a:spcAft>
+            <a:buNone/>
+          </a:pPr>
+          <a:r>
+            <a:rPr lang="en-GB" sz="1100" kern="1200" dirty="0">
+              <a:latin typeface="+mn-lt"/>
+              <a:ea typeface="Yu Gothic UI Semilight" panose="020B0400000000000000" pitchFamily="34" charset="-128"/>
+            </a:rPr>
+            <a:t>The </a:t>
+          </a:r>
+          <a:r>
+            <a:rPr lang="en-GB" sz="1100" b="1" kern="1200" dirty="0">
+              <a:latin typeface="+mn-lt"/>
+              <a:ea typeface="Yu Gothic UI Semilight" panose="020B0400000000000000" pitchFamily="34" charset="-128"/>
+            </a:rPr>
+            <a:t>smokes</a:t>
+          </a:r>
+          <a:r>
+            <a:rPr lang="en-GB" sz="1100" kern="1200" dirty="0">
+              <a:latin typeface="+mn-lt"/>
+              <a:ea typeface="Yu Gothic UI Semilight" panose="020B0400000000000000" pitchFamily="34" charset="-128"/>
+            </a:rPr>
+            <a:t> column contains several categories aside from no smoker status. We will convert these into a binary label: users who answered no will be labelled as non-smokers, while all other responses will be labelled as smokers. This will create a clearer distinction for the classification.</a:t>
+          </a:r>
+          <a:endParaRPr lang="en-US" sz="1100" kern="1200" dirty="0">
+            <a:latin typeface="+mn-lt"/>
+            <a:ea typeface="Yu Gothic UI Semilight" panose="020B0400000000000000" pitchFamily="34" charset="-128"/>
+          </a:endParaRPr>
+        </a:p>
+      </dsp:txBody>
+      <dsp:txXfrm>
+        <a:off x="5573459" y="3130"/>
+        <a:ext cx="4941318" cy="728518"/>
+      </dsp:txXfrm>
+    </dsp:sp>
+    <dsp:sp modelId="{591D4A88-298A-4D98-96CD-F862B39A61F4}">
+      <dsp:nvSpPr>
+        <dsp:cNvPr id="0" name=""/>
+        <dsp:cNvSpPr/>
+      </dsp:nvSpPr>
+      <dsp:spPr>
+        <a:xfrm>
+          <a:off x="0" y="913778"/>
+          <a:ext cx="10515601" cy="728518"/>
+        </a:xfrm>
+        <a:prstGeom prst="roundRect">
+          <a:avLst>
+            <a:gd name="adj" fmla="val 10000"/>
+          </a:avLst>
+        </a:prstGeom>
+        <a:solidFill>
+          <a:schemeClr val="accent3">
+            <a:tint val="40000"/>
+            <a:hueOff val="0"/>
+            <a:satOff val="0"/>
+            <a:lumOff val="0"/>
+            <a:alphaOff val="0"/>
+          </a:schemeClr>
+        </a:solidFill>
+        <a:ln>
+          <a:noFill/>
+        </a:ln>
+        <a:effectLst/>
+      </dsp:spPr>
+      <dsp:style>
+        <a:lnRef idx="0">
+          <a:scrgbClr r="0" g="0" b="0"/>
+        </a:lnRef>
+        <a:fillRef idx="1">
+          <a:scrgbClr r="0" g="0" b="0"/>
+        </a:fillRef>
+        <a:effectRef idx="0">
+          <a:scrgbClr r="0" g="0" b="0"/>
+        </a:effectRef>
+        <a:fontRef idx="minor"/>
+      </dsp:style>
+    </dsp:sp>
+    <dsp:sp modelId="{BB85D6B5-9009-4A8F-A5A1-4E0EDB8CFC6E}">
+      <dsp:nvSpPr>
+        <dsp:cNvPr id="0" name=""/>
+        <dsp:cNvSpPr/>
+      </dsp:nvSpPr>
+      <dsp:spPr>
+        <a:xfrm>
+          <a:off x="220376" y="1077695"/>
+          <a:ext cx="400685" cy="400685"/>
+        </a:xfrm>
+        <a:prstGeom prst="rect">
+          <a:avLst/>
+        </a:prstGeom>
+        <a:blipFill>
+          <a:blip xmlns:r="http://schemas.openxmlformats.org/officeDocument/2006/relationships">
+            <a:extLst>
+              <a:ext uri="{28A0092B-C50C-407E-A947-70E740481C1C}">
+                <a14:useLocalDpi xmlns:a14="http://schemas.microsoft.com/office/drawing/2010/main" val="0"/>
+              </a:ext>
+              <a:ext uri="{96DAC541-7B7A-43D3-8B79-37D633B846F1}">
+                <asvg:svgBlip xmlns:asvg="http://schemas.microsoft.com/office/drawing/2016/SVG/main" r:embed="rId2"/>
+              </a:ext>
+            </a:extLst>
+          </a:blip>
+          <a:stretch>
+            <a:fillRect/>
+          </a:stretch>
+        </a:blipFill>
+        <a:ln w="12700" cap="flat" cmpd="sng" algn="ctr">
+          <a:noFill/>
+          <a:prstDash val="solid"/>
+          <a:miter lim="800000"/>
+        </a:ln>
+        <a:effectLst/>
+      </dsp:spPr>
+      <dsp:style>
+        <a:lnRef idx="2">
+          <a:scrgbClr r="0" g="0" b="0"/>
+        </a:lnRef>
+        <a:fillRef idx="1">
+          <a:scrgbClr r="0" g="0" b="0"/>
+        </a:fillRef>
+        <a:effectRef idx="0">
+          <a:scrgbClr r="0" g="0" b="0"/>
+        </a:effectRef>
+        <a:fontRef idx="minor">
+          <a:schemeClr val="lt1"/>
+        </a:fontRef>
+      </dsp:style>
+    </dsp:sp>
+    <dsp:sp modelId="{23001468-A7D8-450C-918D-8DC7DCD6DC2D}">
+      <dsp:nvSpPr>
+        <dsp:cNvPr id="0" name=""/>
+        <dsp:cNvSpPr/>
+      </dsp:nvSpPr>
+      <dsp:spPr>
+        <a:xfrm>
+          <a:off x="841439" y="913778"/>
+          <a:ext cx="4732020" cy="728518"/>
+        </a:xfrm>
+        <a:prstGeom prst="rect">
+          <a:avLst/>
+        </a:prstGeom>
+        <a:noFill/>
+        <a:ln>
+          <a:noFill/>
+        </a:ln>
+        <a:effectLst/>
+      </dsp:spPr>
+      <dsp:style>
+        <a:lnRef idx="0">
+          <a:scrgbClr r="0" g="0" b="0"/>
+        </a:lnRef>
+        <a:fillRef idx="0">
+          <a:scrgbClr r="0" g="0" b="0"/>
+        </a:fillRef>
+        <a:effectRef idx="0">
+          <a:scrgbClr r="0" g="0" b="0"/>
+        </a:effectRef>
+        <a:fontRef idx="minor"/>
+      </dsp:style>
+      <dsp:txBody>
+        <a:bodyPr spcFirstLastPara="0" vert="horz" wrap="square" lIns="77102" tIns="77102" rIns="77102" bIns="77102" numCol="1" spcCol="1270" anchor="ctr" anchorCtr="0">
+          <a:noAutofit/>
+        </a:bodyPr>
+        <a:lstStyle/>
+        <a:p>
+          <a:pPr marL="0" lvl="0" indent="0" algn="l" defTabSz="977900">
+            <a:lnSpc>
+              <a:spcPct val="100000"/>
+            </a:lnSpc>
+            <a:spcBef>
+              <a:spcPct val="0"/>
+            </a:spcBef>
+            <a:spcAft>
+              <a:spcPct val="35000"/>
+            </a:spcAft>
+            <a:buNone/>
+          </a:pPr>
+          <a:r>
+            <a:rPr lang="en-GB" sz="2200" b="1" i="0" kern="1200" dirty="0"/>
+            <a:t>Train-test Split</a:t>
+          </a:r>
+          <a:endParaRPr lang="en-US" sz="2200" kern="1200" dirty="0"/>
+        </a:p>
+      </dsp:txBody>
+      <dsp:txXfrm>
+        <a:off x="841439" y="913778"/>
+        <a:ext cx="4732020" cy="728518"/>
+      </dsp:txXfrm>
+    </dsp:sp>
+    <dsp:sp modelId="{13BF9963-FC3D-40C6-B594-46E1D79DA245}">
+      <dsp:nvSpPr>
+        <dsp:cNvPr id="0" name=""/>
+        <dsp:cNvSpPr/>
+      </dsp:nvSpPr>
+      <dsp:spPr>
+        <a:xfrm>
+          <a:off x="5573459" y="913778"/>
+          <a:ext cx="4941318" cy="728518"/>
+        </a:xfrm>
+        <a:prstGeom prst="rect">
+          <a:avLst/>
+        </a:prstGeom>
+        <a:noFill/>
+        <a:ln>
+          <a:noFill/>
+        </a:ln>
+        <a:effectLst/>
+      </dsp:spPr>
+      <dsp:style>
+        <a:lnRef idx="0">
+          <a:scrgbClr r="0" g="0" b="0"/>
+        </a:lnRef>
+        <a:fillRef idx="0">
+          <a:scrgbClr r="0" g="0" b="0"/>
+        </a:fillRef>
+        <a:effectRef idx="0">
+          <a:scrgbClr r="0" g="0" b="0"/>
+        </a:effectRef>
+        <a:fontRef idx="minor"/>
+      </dsp:style>
+      <dsp:txBody>
+        <a:bodyPr spcFirstLastPara="0" vert="horz" wrap="square" lIns="77102" tIns="77102" rIns="77102" bIns="77102" numCol="1" spcCol="1270" anchor="ctr" anchorCtr="0">
+          <a:noAutofit/>
+        </a:bodyPr>
+        <a:lstStyle/>
+        <a:p>
+          <a:pPr marL="0" lvl="0" indent="0" algn="l" defTabSz="488950">
+            <a:lnSpc>
+              <a:spcPct val="100000"/>
+            </a:lnSpc>
+            <a:spcBef>
+              <a:spcPct val="0"/>
+            </a:spcBef>
+            <a:spcAft>
+              <a:spcPct val="35000"/>
+            </a:spcAft>
+            <a:buNone/>
+          </a:pPr>
+          <a:r>
+            <a:rPr lang="en-GB" sz="1100" b="0" i="0" kern="1200" dirty="0">
+              <a:latin typeface="+mn-lt"/>
+              <a:ea typeface="Yu Gothic UI Semilight" panose="020B0400000000000000" pitchFamily="34" charset="-128"/>
+            </a:rPr>
+            <a:t>We will split the data into features (X) and labels (Y), before using a </a:t>
+          </a:r>
+          <a:r>
+            <a:rPr lang="en-GB" sz="1100" b="0" i="0" kern="1200" dirty="0" err="1">
+              <a:latin typeface="+mn-lt"/>
+              <a:ea typeface="Yu Gothic UI Semilight" panose="020B0400000000000000" pitchFamily="34" charset="-128"/>
+            </a:rPr>
+            <a:t>train_test_split</a:t>
+          </a:r>
+          <a:r>
+            <a:rPr lang="en-GB" sz="1100" b="0" i="0" kern="1200" dirty="0">
+              <a:latin typeface="+mn-lt"/>
+              <a:ea typeface="Yu Gothic UI Semilight" panose="020B0400000000000000" pitchFamily="34" charset="-128"/>
+            </a:rPr>
+            <a:t> to split the clean dataset into training and validation sets. This is done before encoding and standardising to prevent data leakage.</a:t>
+          </a:r>
+          <a:endParaRPr lang="en-US" sz="1100" kern="1200" dirty="0">
+            <a:latin typeface="+mn-lt"/>
+            <a:ea typeface="Yu Gothic UI Semilight" panose="020B0400000000000000" pitchFamily="34" charset="-128"/>
+          </a:endParaRPr>
+        </a:p>
+      </dsp:txBody>
+      <dsp:txXfrm>
+        <a:off x="5573459" y="913778"/>
+        <a:ext cx="4941318" cy="728518"/>
+      </dsp:txXfrm>
+    </dsp:sp>
+    <dsp:sp modelId="{E95796B8-CB4A-44F8-ACBF-9F41AF6F350E}">
+      <dsp:nvSpPr>
+        <dsp:cNvPr id="0" name=""/>
+        <dsp:cNvSpPr/>
+      </dsp:nvSpPr>
+      <dsp:spPr>
+        <a:xfrm>
+          <a:off x="0" y="1824427"/>
+          <a:ext cx="10515601" cy="728518"/>
+        </a:xfrm>
+        <a:prstGeom prst="roundRect">
+          <a:avLst>
+            <a:gd name="adj" fmla="val 10000"/>
+          </a:avLst>
+        </a:prstGeom>
+        <a:solidFill>
+          <a:schemeClr val="accent3">
+            <a:tint val="40000"/>
+            <a:hueOff val="0"/>
+            <a:satOff val="0"/>
+            <a:lumOff val="0"/>
+            <a:alphaOff val="0"/>
+          </a:schemeClr>
+        </a:solidFill>
+        <a:ln>
+          <a:noFill/>
+        </a:ln>
+        <a:effectLst/>
+      </dsp:spPr>
+      <dsp:style>
+        <a:lnRef idx="0">
+          <a:scrgbClr r="0" g="0" b="0"/>
+        </a:lnRef>
+        <a:fillRef idx="1">
+          <a:scrgbClr r="0" g="0" b="0"/>
+        </a:fillRef>
+        <a:effectRef idx="0">
+          <a:scrgbClr r="0" g="0" b="0"/>
+        </a:effectRef>
+        <a:fontRef idx="minor"/>
+      </dsp:style>
+    </dsp:sp>
+    <dsp:sp modelId="{7BCF4D80-84DA-4FB4-88D1-E9E82A9F2EBF}">
+      <dsp:nvSpPr>
+        <dsp:cNvPr id="0" name=""/>
+        <dsp:cNvSpPr/>
+      </dsp:nvSpPr>
+      <dsp:spPr>
+        <a:xfrm>
+          <a:off x="220376" y="1988344"/>
+          <a:ext cx="400685" cy="400685"/>
+        </a:xfrm>
+        <a:prstGeom prst="rect">
+          <a:avLst/>
+        </a:prstGeom>
+        <a:blipFill>
+          <a:blip xmlns:r="http://schemas.openxmlformats.org/officeDocument/2006/relationships">
+            <a:extLst>
+              <a:ext uri="{28A0092B-C50C-407E-A947-70E740481C1C}">
+                <a14:useLocalDpi xmlns:a14="http://schemas.microsoft.com/office/drawing/2010/main" val="0"/>
+              </a:ext>
+              <a:ext uri="{96DAC541-7B7A-43D3-8B79-37D633B846F1}">
+                <asvg:svgBlip xmlns:asvg="http://schemas.microsoft.com/office/drawing/2016/SVG/main" r:embed="rId3"/>
+              </a:ext>
+            </a:extLst>
+          </a:blip>
+          <a:stretch>
+            <a:fillRect/>
+          </a:stretch>
+        </a:blipFill>
+        <a:ln w="12700" cap="flat" cmpd="sng" algn="ctr">
+          <a:noFill/>
+          <a:prstDash val="solid"/>
+          <a:miter lim="800000"/>
+        </a:ln>
+        <a:effectLst/>
+      </dsp:spPr>
+      <dsp:style>
+        <a:lnRef idx="2">
+          <a:scrgbClr r="0" g="0" b="0"/>
+        </a:lnRef>
+        <a:fillRef idx="1">
+          <a:scrgbClr r="0" g="0" b="0"/>
+        </a:fillRef>
+        <a:effectRef idx="0">
+          <a:scrgbClr r="0" g="0" b="0"/>
+        </a:effectRef>
+        <a:fontRef idx="minor">
+          <a:schemeClr val="lt1"/>
+        </a:fontRef>
+      </dsp:style>
+    </dsp:sp>
+    <dsp:sp modelId="{4B4E4611-E3F0-41B6-9E5C-7D2555D3FB68}">
+      <dsp:nvSpPr>
+        <dsp:cNvPr id="0" name=""/>
+        <dsp:cNvSpPr/>
+      </dsp:nvSpPr>
+      <dsp:spPr>
+        <a:xfrm>
+          <a:off x="841439" y="1824427"/>
+          <a:ext cx="4732020" cy="728518"/>
+        </a:xfrm>
+        <a:prstGeom prst="rect">
+          <a:avLst/>
+        </a:prstGeom>
+        <a:noFill/>
+        <a:ln>
+          <a:noFill/>
+        </a:ln>
+        <a:effectLst/>
+      </dsp:spPr>
+      <dsp:style>
+        <a:lnRef idx="0">
+          <a:scrgbClr r="0" g="0" b="0"/>
+        </a:lnRef>
+        <a:fillRef idx="0">
+          <a:scrgbClr r="0" g="0" b="0"/>
+        </a:fillRef>
+        <a:effectRef idx="0">
+          <a:scrgbClr r="0" g="0" b="0"/>
+        </a:effectRef>
+        <a:fontRef idx="minor"/>
+      </dsp:style>
+      <dsp:txBody>
+        <a:bodyPr spcFirstLastPara="0" vert="horz" wrap="square" lIns="77102" tIns="77102" rIns="77102" bIns="77102" numCol="1" spcCol="1270" anchor="ctr" anchorCtr="0">
+          <a:noAutofit/>
+        </a:bodyPr>
+        <a:lstStyle/>
+        <a:p>
+          <a:pPr marL="0" lvl="0" indent="0" algn="l" defTabSz="977900">
+            <a:lnSpc>
+              <a:spcPct val="100000"/>
+            </a:lnSpc>
+            <a:spcBef>
+              <a:spcPct val="0"/>
+            </a:spcBef>
+            <a:spcAft>
+              <a:spcPct val="35000"/>
+            </a:spcAft>
+            <a:buNone/>
+          </a:pPr>
+          <a:r>
+            <a:rPr lang="en-GB" sz="2200" b="1" i="0" kern="1200" dirty="0"/>
+            <a:t>One-Hot Encoding</a:t>
+          </a:r>
+          <a:endParaRPr lang="en-US" sz="2200" kern="1200" dirty="0"/>
+        </a:p>
+      </dsp:txBody>
+      <dsp:txXfrm>
+        <a:off x="841439" y="1824427"/>
+        <a:ext cx="4732020" cy="728518"/>
+      </dsp:txXfrm>
+    </dsp:sp>
+    <dsp:sp modelId="{207F25EA-76C1-4FC2-A295-FF5F7249C1D4}">
+      <dsp:nvSpPr>
+        <dsp:cNvPr id="0" name=""/>
+        <dsp:cNvSpPr/>
+      </dsp:nvSpPr>
+      <dsp:spPr>
+        <a:xfrm>
+          <a:off x="5573459" y="1824427"/>
+          <a:ext cx="4941318" cy="728518"/>
+        </a:xfrm>
+        <a:prstGeom prst="rect">
+          <a:avLst/>
+        </a:prstGeom>
+        <a:noFill/>
+        <a:ln>
+          <a:noFill/>
+        </a:ln>
+        <a:effectLst/>
+      </dsp:spPr>
+      <dsp:style>
+        <a:lnRef idx="0">
+          <a:scrgbClr r="0" g="0" b="0"/>
+        </a:lnRef>
+        <a:fillRef idx="0">
+          <a:scrgbClr r="0" g="0" b="0"/>
+        </a:fillRef>
+        <a:effectRef idx="0">
+          <a:scrgbClr r="0" g="0" b="0"/>
+        </a:effectRef>
+        <a:fontRef idx="minor"/>
+      </dsp:style>
+      <dsp:txBody>
+        <a:bodyPr spcFirstLastPara="0" vert="horz" wrap="square" lIns="77102" tIns="77102" rIns="77102" bIns="77102" numCol="1" spcCol="1270" anchor="ctr" anchorCtr="0">
+          <a:noAutofit/>
+        </a:bodyPr>
+        <a:lstStyle/>
+        <a:p>
+          <a:pPr marL="0" lvl="0" indent="0" algn="l" defTabSz="488950">
+            <a:lnSpc>
+              <a:spcPct val="100000"/>
+            </a:lnSpc>
+            <a:spcBef>
+              <a:spcPct val="0"/>
+            </a:spcBef>
+            <a:spcAft>
+              <a:spcPct val="35000"/>
+            </a:spcAft>
+            <a:buNone/>
+          </a:pPr>
+          <a:r>
+            <a:rPr lang="en-GB" sz="1100" kern="1200" dirty="0"/>
+            <a:t>For our categorical features, we will be using one-hot encoding to convert the features into a format that the machine learning algorithms can interpret.</a:t>
+          </a:r>
+          <a:endParaRPr lang="en-US" sz="1100" kern="1200" dirty="0"/>
+        </a:p>
+      </dsp:txBody>
+      <dsp:txXfrm>
+        <a:off x="5573459" y="1824427"/>
+        <a:ext cx="4941318" cy="728518"/>
+      </dsp:txXfrm>
+    </dsp:sp>
+    <dsp:sp modelId="{D39E7134-0899-4778-AA52-AD38D575CE2F}">
+      <dsp:nvSpPr>
+        <dsp:cNvPr id="0" name=""/>
+        <dsp:cNvSpPr/>
+      </dsp:nvSpPr>
+      <dsp:spPr>
+        <a:xfrm>
+          <a:off x="0" y="2735075"/>
+          <a:ext cx="10515601" cy="728518"/>
+        </a:xfrm>
+        <a:prstGeom prst="roundRect">
+          <a:avLst>
+            <a:gd name="adj" fmla="val 10000"/>
+          </a:avLst>
+        </a:prstGeom>
+        <a:solidFill>
+          <a:schemeClr val="accent3">
+            <a:tint val="40000"/>
+            <a:hueOff val="0"/>
+            <a:satOff val="0"/>
+            <a:lumOff val="0"/>
+            <a:alphaOff val="0"/>
+          </a:schemeClr>
+        </a:solidFill>
+        <a:ln>
+          <a:noFill/>
+        </a:ln>
+        <a:effectLst/>
+      </dsp:spPr>
+      <dsp:style>
+        <a:lnRef idx="0">
+          <a:scrgbClr r="0" g="0" b="0"/>
+        </a:lnRef>
+        <a:fillRef idx="1">
+          <a:scrgbClr r="0" g="0" b="0"/>
+        </a:fillRef>
+        <a:effectRef idx="0">
+          <a:scrgbClr r="0" g="0" b="0"/>
+        </a:effectRef>
+        <a:fontRef idx="minor"/>
+      </dsp:style>
+    </dsp:sp>
+    <dsp:sp modelId="{F79F01F7-0898-4489-A103-3CFBAD58B283}">
+      <dsp:nvSpPr>
+        <dsp:cNvPr id="0" name=""/>
+        <dsp:cNvSpPr/>
+      </dsp:nvSpPr>
+      <dsp:spPr>
+        <a:xfrm>
+          <a:off x="220376" y="2898992"/>
+          <a:ext cx="400685" cy="400685"/>
+        </a:xfrm>
+        <a:prstGeom prst="rect">
+          <a:avLst/>
+        </a:prstGeom>
+        <a:blipFill>
+          <a:blip xmlns:r="http://schemas.openxmlformats.org/officeDocument/2006/relationships">
+            <a:extLst>
+              <a:ext uri="{28A0092B-C50C-407E-A947-70E740481C1C}">
+                <a14:useLocalDpi xmlns:a14="http://schemas.microsoft.com/office/drawing/2010/main" val="0"/>
+              </a:ext>
+              <a:ext uri="{96DAC541-7B7A-43D3-8B79-37D633B846F1}">
+                <asvg:svgBlip xmlns:asvg="http://schemas.microsoft.com/office/drawing/2016/SVG/main" r:embed="rId4"/>
+              </a:ext>
+            </a:extLst>
+          </a:blip>
+          <a:stretch>
+            <a:fillRect/>
+          </a:stretch>
+        </a:blipFill>
+        <a:ln w="12700" cap="flat" cmpd="sng" algn="ctr">
+          <a:noFill/>
+          <a:prstDash val="solid"/>
+          <a:miter lim="800000"/>
+        </a:ln>
+        <a:effectLst/>
+      </dsp:spPr>
+      <dsp:style>
+        <a:lnRef idx="2">
+          <a:scrgbClr r="0" g="0" b="0"/>
+        </a:lnRef>
+        <a:fillRef idx="1">
+          <a:scrgbClr r="0" g="0" b="0"/>
+        </a:fillRef>
+        <a:effectRef idx="0">
+          <a:scrgbClr r="0" g="0" b="0"/>
+        </a:effectRef>
+        <a:fontRef idx="minor">
+          <a:schemeClr val="lt1"/>
+        </a:fontRef>
+      </dsp:style>
+    </dsp:sp>
+    <dsp:sp modelId="{C14E2CDE-0BB6-47C4-B536-CF16F3FF1ED4}">
+      <dsp:nvSpPr>
+        <dsp:cNvPr id="0" name=""/>
+        <dsp:cNvSpPr/>
+      </dsp:nvSpPr>
+      <dsp:spPr>
+        <a:xfrm>
+          <a:off x="841439" y="2735075"/>
+          <a:ext cx="4732020" cy="728518"/>
+        </a:xfrm>
+        <a:prstGeom prst="rect">
+          <a:avLst/>
+        </a:prstGeom>
+        <a:noFill/>
+        <a:ln>
+          <a:noFill/>
+        </a:ln>
+        <a:effectLst/>
+      </dsp:spPr>
+      <dsp:style>
+        <a:lnRef idx="0">
+          <a:scrgbClr r="0" g="0" b="0"/>
+        </a:lnRef>
+        <a:fillRef idx="0">
+          <a:scrgbClr r="0" g="0" b="0"/>
+        </a:fillRef>
+        <a:effectRef idx="0">
+          <a:scrgbClr r="0" g="0" b="0"/>
+        </a:effectRef>
+        <a:fontRef idx="minor"/>
+      </dsp:style>
+      <dsp:txBody>
+        <a:bodyPr spcFirstLastPara="0" vert="horz" wrap="square" lIns="77102" tIns="77102" rIns="77102" bIns="77102" numCol="1" spcCol="1270" anchor="ctr" anchorCtr="0">
+          <a:noAutofit/>
+        </a:bodyPr>
+        <a:lstStyle/>
+        <a:p>
+          <a:pPr marL="0" lvl="0" indent="0" algn="l" defTabSz="977900">
+            <a:lnSpc>
+              <a:spcPct val="100000"/>
+            </a:lnSpc>
+            <a:spcBef>
+              <a:spcPct val="0"/>
+            </a:spcBef>
+            <a:spcAft>
+              <a:spcPct val="35000"/>
+            </a:spcAft>
+            <a:buNone/>
+          </a:pPr>
+          <a:r>
+            <a:rPr lang="en-GB" sz="2200" b="1" i="0" kern="1200" dirty="0"/>
+            <a:t>Standardisation</a:t>
+          </a:r>
+          <a:endParaRPr lang="en-US" sz="2200" kern="1200" dirty="0"/>
+        </a:p>
+      </dsp:txBody>
+      <dsp:txXfrm>
+        <a:off x="841439" y="2735075"/>
+        <a:ext cx="4732020" cy="728518"/>
+      </dsp:txXfrm>
+    </dsp:sp>
+    <dsp:sp modelId="{31B96AEB-6F14-4E85-9147-2DB06D2B3421}">
+      <dsp:nvSpPr>
+        <dsp:cNvPr id="0" name=""/>
+        <dsp:cNvSpPr/>
+      </dsp:nvSpPr>
+      <dsp:spPr>
+        <a:xfrm>
+          <a:off x="5573459" y="2735075"/>
+          <a:ext cx="4941318" cy="728518"/>
+        </a:xfrm>
+        <a:prstGeom prst="rect">
+          <a:avLst/>
+        </a:prstGeom>
+        <a:noFill/>
+        <a:ln>
+          <a:noFill/>
+        </a:ln>
+        <a:effectLst/>
+      </dsp:spPr>
+      <dsp:style>
+        <a:lnRef idx="0">
+          <a:scrgbClr r="0" g="0" b="0"/>
+        </a:lnRef>
+        <a:fillRef idx="0">
+          <a:scrgbClr r="0" g="0" b="0"/>
+        </a:fillRef>
+        <a:effectRef idx="0">
+          <a:scrgbClr r="0" g="0" b="0"/>
+        </a:effectRef>
+        <a:fontRef idx="minor"/>
+      </dsp:style>
+      <dsp:txBody>
+        <a:bodyPr spcFirstLastPara="0" vert="horz" wrap="square" lIns="77102" tIns="77102" rIns="77102" bIns="77102" numCol="1" spcCol="1270" anchor="ctr" anchorCtr="0">
+          <a:noAutofit/>
+        </a:bodyPr>
+        <a:lstStyle/>
+        <a:p>
+          <a:pPr marL="0" lvl="0" indent="0" algn="l" defTabSz="488950">
+            <a:lnSpc>
+              <a:spcPct val="100000"/>
+            </a:lnSpc>
+            <a:spcBef>
+              <a:spcPct val="0"/>
+            </a:spcBef>
+            <a:spcAft>
+              <a:spcPct val="35000"/>
+            </a:spcAft>
+            <a:buNone/>
+          </a:pPr>
+          <a:r>
+            <a:rPr lang="en-GB" sz="1100" b="0" i="0" kern="1200"/>
+            <a:t>Because logistic regression models are sensitive to feature scale, we will create a standardised set of feature data. This helps the model learn more effectively and will improve convergence and performance.</a:t>
+          </a:r>
+          <a:endParaRPr lang="en-US" sz="1100" kern="1200"/>
+        </a:p>
+      </dsp:txBody>
+      <dsp:txXfrm>
+        <a:off x="5573459" y="2735075"/>
+        <a:ext cx="4941318" cy="728518"/>
+      </dsp:txXfrm>
+    </dsp:sp>
+  </dsp:spTree>
+</dsp:drawing>
+</file>
+
+<file path=ppt/diagrams/drawing6.xml><?xml version="1.0" encoding="utf-8"?>
+<dsp:drawing xmlns:dgm="http://schemas.openxmlformats.org/drawingml/2006/diagram" xmlns:dsp="http://schemas.microsoft.com/office/drawing/2008/diagram" xmlns:a="http://schemas.openxmlformats.org/drawingml/2006/main">
+  <dsp:spTree>
+    <dsp:nvGrpSpPr>
+      <dsp:cNvPr id="0" name=""/>
+      <dsp:cNvGrpSpPr/>
+    </dsp:nvGrpSpPr>
+    <dsp:grpSpPr/>
     <dsp:sp modelId="{4E247E96-070B-4744-96B3-E1F97A845C9F}">
       <dsp:nvSpPr>
         <dsp:cNvPr id="0" name=""/>
@@ -10893,6 +13236,300 @@
 </file>
 
 <file path=ppt/diagrams/layout5.xml><?xml version="1.0" encoding="utf-8"?>
+<dgm:layoutDef xmlns:dgm="http://schemas.openxmlformats.org/drawingml/2006/diagram" xmlns:a="http://schemas.openxmlformats.org/drawingml/2006/main" uniqueId="urn:microsoft.com/office/officeart/2018/2/layout/IconVerticalSolidList">
+  <dgm:title val="Icon Vertical Solid List"/>
+  <dgm:desc val="Use to show a series of visuals from top to bottom with Level 1 or Level 1 and Level 2 text grouped in a shape. Works best with icons or small pictures with lengthier descriptions."/>
+  <dgm:catLst>
+    <dgm:cat type="icon" pri="500"/>
+  </dgm:catLst>
+  <dgm:sampData useDef="1">
+    <dgm:dataModel>
+      <dgm:ptLst/>
+      <dgm:bg/>
+      <dgm:whole/>
+    </dgm:dataModel>
+  </dgm:sampData>
+  <dgm:styleData useDef="1">
+    <dgm:dataModel>
+      <dgm:ptLst/>
+      <dgm:bg/>
+      <dgm:whole/>
+    </dgm:dataModel>
+  </dgm:styleData>
+  <dgm:clrData useDef="1">
+    <dgm:dataModel>
+      <dgm:ptLst/>
+      <dgm:bg/>
+      <dgm:whole/>
+    </dgm:dataModel>
+  </dgm:clrData>
+  <dgm:layoutNode name="root">
+    <dgm:varLst>
+      <dgm:dir/>
+      <dgm:resizeHandles val="exact"/>
+    </dgm:varLst>
+    <dgm:choose name="Name0">
+      <dgm:if name="Name1" axis="self" func="var" arg="dir" op="equ" val="norm">
+        <dgm:alg type="lin">
+          <dgm:param type="linDir" val="fromT"/>
+          <dgm:param type="nodeHorzAlign" val="l"/>
+        </dgm:alg>
+      </dgm:if>
+      <dgm:else name="Name2">
+        <dgm:alg type="lin">
+          <dgm:param type="linDir" val="fromT"/>
+          <dgm:param type="nodeHorzAlign" val="r"/>
+        </dgm:alg>
+      </dgm:else>
+    </dgm:choose>
+    <dgm:shape xmlns:r="http://schemas.openxmlformats.org/officeDocument/2006/relationships" r:blip="">
+      <dgm:adjLst/>
+    </dgm:shape>
+    <dgm:presOf/>
+    <dgm:choose name="Name3">
+      <dgm:if name="Name4" axis="ch" ptType="node" func="cnt" op="lte" val="3">
+        <dgm:constrLst>
+          <dgm:constr type="h" for="ch" forName="compNode" refType="h" fact="0.3"/>
+          <dgm:constr type="w" for="ch" forName="compNode" refType="w"/>
+          <dgm:constr type="h" for="ch" forName="sibTrans" refType="h" refFor="ch" refForName="compNode" fact="0.25"/>
+          <dgm:constr type="primFontSz" for="des" forName="parTx" val="25"/>
+          <dgm:constr type="primFontSz" for="des" forName="desTx" refType="primFontSz" refFor="des" refForName="parTx" op="lte" fact="0.75"/>
+          <dgm:constr type="h" for="des" forName="compNode" op="equ"/>
+          <dgm:constr type="h" for="des" forName="bgRect" op="equ"/>
+          <dgm:constr type="h" for="des" forName="iconRect" op="equ"/>
+          <dgm:constr type="w" for="des" forName="iconRect" op="equ"/>
+          <dgm:constr type="h" for="des" forName="spaceRect" op="equ"/>
+          <dgm:constr type="h" for="des" forName="parTx" op="equ"/>
+          <dgm:constr type="h" for="des" forName="desTx" op="equ"/>
+        </dgm:constrLst>
+      </dgm:if>
+      <dgm:if name="Name5" axis="ch" ptType="node" func="cnt" op="lte" val="4">
+        <dgm:constrLst>
+          <dgm:constr type="h" for="ch" forName="compNode" refType="h" fact="0.3"/>
+          <dgm:constr type="w" for="ch" forName="compNode" refType="w"/>
+          <dgm:constr type="h" for="ch" forName="sibTrans" refType="h" refFor="ch" refForName="compNode" fact="0.25"/>
+          <dgm:constr type="primFontSz" for="des" forName="parTx" val="22"/>
+          <dgm:constr type="primFontSz" for="des" forName="desTx" refType="primFontSz" refFor="des" refForName="parTx" op="lte" fact="0.75"/>
+          <dgm:constr type="h" for="des" forName="compNode" op="equ"/>
+          <dgm:constr type="h" for="des" forName="bgRect" op="equ"/>
+          <dgm:constr type="h" for="des" forName="iconRect" op="equ"/>
+          <dgm:constr type="w" for="des" forName="iconRect" op="equ"/>
+          <dgm:constr type="h" for="des" forName="spaceRect" op="equ"/>
+          <dgm:constr type="h" for="des" forName="parTx" op="equ"/>
+          <dgm:constr type="h" for="des" forName="desTx" op="equ"/>
+        </dgm:constrLst>
+      </dgm:if>
+      <dgm:if name="Name6" axis="ch" ptType="node" func="cnt" op="lte" val="6">
+        <dgm:constrLst>
+          <dgm:constr type="h" for="ch" forName="compNode" refType="h" fact="0.3"/>
+          <dgm:constr type="w" for="ch" forName="compNode" refType="w"/>
+          <dgm:constr type="h" for="ch" forName="sibTrans" refType="h" refFor="ch" refForName="compNode" fact="0.25"/>
+          <dgm:constr type="primFontSz" for="des" forName="parTx" val="19"/>
+          <dgm:constr type="primFontSz" for="des" forName="desTx" refType="primFontSz" refFor="des" refForName="parTx" op="lte" fact="0.75"/>
+          <dgm:constr type="h" for="des" forName="compNode" op="equ"/>
+          <dgm:constr type="h" for="des" forName="bgRect" op="equ"/>
+          <dgm:constr type="h" for="des" forName="iconRect" op="equ"/>
+          <dgm:constr type="w" for="des" forName="iconRect" op="equ"/>
+          <dgm:constr type="h" for="des" forName="spaceRect" op="equ"/>
+          <dgm:constr type="h" for="des" forName="parTx" op="equ"/>
+          <dgm:constr type="h" for="des" forName="desTx" op="equ"/>
+        </dgm:constrLst>
+      </dgm:if>
+      <dgm:else name="Name7">
+        <dgm:constrLst>
+          <dgm:constr type="h" for="ch" forName="compNode" refType="h" fact="0.3"/>
+          <dgm:constr type="w" for="ch" forName="compNode" refType="w"/>
+          <dgm:constr type="h" for="ch" forName="sibTrans" refType="h" refFor="ch" refForName="compNode" fact="0.25"/>
+          <dgm:constr type="primFontSz" for="des" forName="parTx" val="16"/>
+          <dgm:constr type="primFontSz" for="des" forName="desTx" refType="primFontSz" refFor="des" refForName="parTx" op="lte" fact="0.75"/>
+          <dgm:constr type="h" for="des" forName="compNode" op="equ"/>
+          <dgm:constr type="h" for="des" forName="bgRect" op="equ"/>
+          <dgm:constr type="h" for="des" forName="iconRect" op="equ"/>
+          <dgm:constr type="w" for="des" forName="iconRect" op="equ"/>
+          <dgm:constr type="h" for="des" forName="spaceRect" op="equ"/>
+          <dgm:constr type="h" for="des" forName="parTx" op="equ"/>
+          <dgm:constr type="h" for="des" forName="desTx" op="equ"/>
+        </dgm:constrLst>
+      </dgm:else>
+    </dgm:choose>
+    <dgm:ruleLst>
+      <dgm:rule type="h" for="ch" forName="compNode" val="0" fact="NaN" max="NaN"/>
+    </dgm:ruleLst>
+    <dgm:forEach name="Name8" axis="ch" ptType="node">
+      <dgm:layoutNode name="compNode">
+        <dgm:alg type="composite"/>
+        <dgm:shape xmlns:r="http://schemas.openxmlformats.org/officeDocument/2006/relationships" r:blip="">
+          <dgm:adjLst/>
+        </dgm:shape>
+        <dgm:presOf axis="self"/>
+        <dgm:choose name="Name9">
+          <dgm:if name="Name10" axis="ch" ptType="node" func="cnt" op="gte" val="1">
+            <dgm:constrLst>
+              <dgm:constr type="w" for="ch" forName="bgRect" refType="w"/>
+              <dgm:constr type="h" for="ch" forName="bgRect" refType="h"/>
+              <dgm:constr type="l" for="ch" forName="bgRect"/>
+              <dgm:constr type="t" for="ch" forName="bgRect"/>
+              <dgm:constr type="h" for="ch" forName="iconRect" refType="h" fact="0.55"/>
+              <dgm:constr type="w" for="ch" forName="iconRect" refType="h" refFor="ch" refForName="iconRect"/>
+              <dgm:constr type="l" for="ch" forName="iconRect" refType="h" refFor="ch" refForName="iconRect" fact="0.55"/>
+              <dgm:constr type="ctrY" for="ch" forName="iconRect" refType="ctrY" refFor="ch" refForName="bgRect"/>
+              <dgm:constr type="w" for="ch" forName="spaceRect" refType="l" refFor="ch" refForName="iconRect"/>
+              <dgm:constr type="h" for="ch" forName="spaceRect" refType="h"/>
+              <dgm:constr type="l" for="ch" forName="spaceRect" refType="r" refFor="ch" refForName="iconRect"/>
+              <dgm:constr type="t" for="ch" forName="spaceRect"/>
+              <dgm:constr type="w" for="ch" forName="parTx" refType="w" fact="0.45"/>
+              <dgm:constr type="h" for="ch" forName="parTx" refType="h"/>
+              <dgm:constr type="l" for="ch" forName="parTx" refType="r" refFor="ch" refForName="spaceRect"/>
+              <dgm:constr type="t" for="ch" forName="parTx"/>
+              <dgm:constr type="h" for="ch" forName="desTx" refType="h"/>
+              <dgm:constr type="l" for="ch" forName="desTx" refType="r" refFor="ch" refForName="parTx"/>
+              <dgm:constr type="t" for="ch" forName="desTx"/>
+            </dgm:constrLst>
+          </dgm:if>
+          <dgm:else name="Name11">
+            <dgm:constrLst>
+              <dgm:constr type="w" for="ch" forName="bgRect" refType="w"/>
+              <dgm:constr type="h" for="ch" forName="bgRect" refType="h"/>
+              <dgm:constr type="l" for="ch" forName="bgRect"/>
+              <dgm:constr type="t" for="ch" forName="bgRect"/>
+              <dgm:constr type="h" for="ch" forName="iconRect" refType="h" fact="0.55"/>
+              <dgm:constr type="w" for="ch" forName="iconRect" refType="h" refFor="ch" refForName="iconRect"/>
+              <dgm:constr type="l" for="ch" forName="iconRect" refType="h" refFor="ch" refForName="iconRect" fact="0.55"/>
+              <dgm:constr type="ctrY" for="ch" forName="iconRect" refType="ctrY" refFor="ch" refForName="bgRect"/>
+              <dgm:constr type="w" for="ch" forName="spaceRect" refType="l" refFor="ch" refForName="iconRect"/>
+              <dgm:constr type="h" for="ch" forName="spaceRect" refType="h"/>
+              <dgm:constr type="l" for="ch" forName="spaceRect" refType="r" refFor="ch" refForName="iconRect"/>
+              <dgm:constr type="t" for="ch" forName="spaceRect"/>
+              <dgm:constr type="h" for="ch" forName="parTx" refType="h"/>
+              <dgm:constr type="l" for="ch" forName="parTx" refType="r" refFor="ch" refForName="spaceRect"/>
+              <dgm:constr type="t" for="ch" forName="parTx"/>
+            </dgm:constrLst>
+          </dgm:else>
+        </dgm:choose>
+        <dgm:ruleLst>
+          <dgm:rule type="h" val="INF" fact="NaN" max="NaN"/>
+        </dgm:ruleLst>
+        <dgm:layoutNode name="bgRect" styleLbl="bgShp">
+          <dgm:alg type="sp"/>
+          <dgm:shape xmlns:r="http://schemas.openxmlformats.org/officeDocument/2006/relationships" type="roundRect" r:blip="">
+            <dgm:adjLst>
+              <dgm:adj idx="1" val="0.1"/>
+            </dgm:adjLst>
+          </dgm:shape>
+          <dgm:presOf/>
+          <dgm:constrLst/>
+          <dgm:ruleLst/>
+        </dgm:layoutNode>
+        <dgm:layoutNode name="iconRect" styleLbl="node1">
+          <dgm:alg type="sp"/>
+          <dgm:shape xmlns:r="http://schemas.openxmlformats.org/officeDocument/2006/relationships" type="rect" r:blip="" blipPhldr="1">
+            <dgm:adjLst/>
+          </dgm:shape>
+          <dgm:presOf/>
+          <dgm:constrLst/>
+          <dgm:ruleLst/>
+        </dgm:layoutNode>
+        <dgm:layoutNode name="spaceRect">
+          <dgm:alg type="sp"/>
+          <dgm:shape xmlns:r="http://schemas.openxmlformats.org/officeDocument/2006/relationships" r:blip="">
+            <dgm:adjLst/>
+          </dgm:shape>
+          <dgm:presOf/>
+          <dgm:constrLst/>
+          <dgm:ruleLst/>
+        </dgm:layoutNode>
+        <dgm:layoutNode name="parTx" styleLbl="revTx">
+          <dgm:varLst>
+            <dgm:chMax val="0"/>
+            <dgm:chPref val="0"/>
+          </dgm:varLst>
+          <dgm:alg type="tx">
+            <dgm:param type="txAnchorVert" val="mid"/>
+            <dgm:param type="parTxLTRAlign" val="l"/>
+            <dgm:param type="shpTxLTRAlignCh" val="l"/>
+            <dgm:param type="parTxRTLAlign" val="r"/>
+            <dgm:param type="shpTxRTLAlignCh" val="r"/>
+          </dgm:alg>
+          <dgm:shape xmlns:r="http://schemas.openxmlformats.org/officeDocument/2006/relationships" type="rect" r:blip="">
+            <dgm:adjLst/>
+          </dgm:shape>
+          <dgm:presOf axis="self" ptType="node"/>
+          <dgm:constrLst>
+            <dgm:constr type="lMarg" refType="h" fact="0.3"/>
+            <dgm:constr type="rMarg" refType="h" fact="0.3"/>
+            <dgm:constr type="tMarg" refType="h" fact="0.3"/>
+            <dgm:constr type="bMarg" refType="h" fact="0.3"/>
+          </dgm:constrLst>
+          <dgm:ruleLst>
+            <dgm:rule type="primFontSz" val="14" fact="NaN" max="NaN"/>
+            <dgm:rule type="h" val="INF" fact="NaN" max="NaN"/>
+          </dgm:ruleLst>
+        </dgm:layoutNode>
+        <dgm:choose name="Name12">
+          <dgm:if name="Name13" axis="ch" ptType="node" func="cnt" op="gte" val="1">
+            <dgm:layoutNode name="desTx" styleLbl="revTx">
+              <dgm:varLst/>
+              <dgm:alg type="tx">
+                <dgm:param type="txAnchorVertCh" val="mid"/>
+                <dgm:param type="parTxLTRAlign" val="l"/>
+                <dgm:param type="shpTxLTRAlignCh" val="l"/>
+                <dgm:param type="parTxRTLAlign" val="r"/>
+                <dgm:param type="shpTxRTLAlignCh" val="r"/>
+                <dgm:param type="stBulletLvl" val="0"/>
+              </dgm:alg>
+              <dgm:shape xmlns:r="http://schemas.openxmlformats.org/officeDocument/2006/relationships" type="rect" r:blip="">
+                <dgm:adjLst/>
+              </dgm:shape>
+              <dgm:presOf axis="des" ptType="node"/>
+              <dgm:constrLst>
+                <dgm:constr type="primFontSz" val="18"/>
+                <dgm:constr type="secFontSz" refType="primFontSz"/>
+                <dgm:constr type="lMarg" refType="h" fact="0.3"/>
+                <dgm:constr type="rMarg" refType="h" fact="0.3"/>
+                <dgm:constr type="tMarg" refType="h" fact="0.3"/>
+                <dgm:constr type="bMarg" refType="h" fact="0.3"/>
+              </dgm:constrLst>
+              <dgm:ruleLst>
+                <dgm:rule type="primFontSz" val="11" fact="NaN" max="NaN"/>
+              </dgm:ruleLst>
+            </dgm:layoutNode>
+          </dgm:if>
+          <dgm:else name="Name14"/>
+        </dgm:choose>
+      </dgm:layoutNode>
+      <dgm:forEach name="Name15" axis="followSib" ptType="sibTrans" cnt="1">
+        <dgm:layoutNode name="sibTrans">
+          <dgm:alg type="sp"/>
+          <dgm:shape xmlns:r="http://schemas.openxmlformats.org/officeDocument/2006/relationships" r:blip="">
+            <dgm:adjLst/>
+          </dgm:shape>
+          <dgm:presOf axis="self"/>
+          <dgm:constrLst/>
+          <dgm:ruleLst/>
+        </dgm:layoutNode>
+      </dgm:forEach>
+    </dgm:forEach>
+  </dgm:layoutNode>
+  <dgm:extLst>
+    <a:ext uri="{68A01E43-0DF5-4B5B-8FA6-DAF915123BFB}">
+      <dgm1612:lstStyle xmlns:dgm1612="http://schemas.microsoft.com/office/drawing/2016/12/diagram">
+        <a:lvl1pPr>
+          <a:lnSpc>
+            <a:spcPct val="100000"/>
+          </a:lnSpc>
+        </a:lvl1pPr>
+        <a:lvl2pPr>
+          <a:lnSpc>
+            <a:spcPct val="100000"/>
+          </a:lnSpc>
+        </a:lvl2pPr>
+      </dgm1612:lstStyle>
+    </a:ext>
+  </dgm:extLst>
+</dgm:layoutDef>
+</file>
+
+<file path=ppt/diagrams/layout6.xml><?xml version="1.0" encoding="utf-8"?>
 <dgm:layoutDef xmlns:dgm="http://schemas.openxmlformats.org/drawingml/2006/diagram" xmlns:a="http://schemas.openxmlformats.org/drawingml/2006/main" uniqueId="urn:microsoft.com/office/officeart/2008/layout/LinedList">
   <dgm:title val=""/>
   <dgm:desc val=""/>
@@ -15803,6 +18440,1040 @@
 </file>
 
 <file path=ppt/diagrams/quickStyle5.xml><?xml version="1.0" encoding="utf-8"?>
+<dgm:styleDef xmlns:dgm="http://schemas.openxmlformats.org/drawingml/2006/diagram" xmlns:a="http://schemas.openxmlformats.org/drawingml/2006/main" uniqueId="urn:microsoft.com/office/officeart/2005/8/quickstyle/simple1#43">
+  <dgm:title val=""/>
+  <dgm:desc val=""/>
+  <dgm:catLst>
+    <dgm:cat type="simple" pri="10100"/>
+  </dgm:catLst>
+  <dgm:scene3d>
+    <a:camera prst="orthographicFront"/>
+    <a:lightRig rig="threePt" dir="t"/>
+  </dgm:scene3d>
+  <dgm:styleLbl name="node0">
+    <dgm:scene3d>
+      <a:camera prst="orthographicFront"/>
+      <a:lightRig rig="threePt" dir="t"/>
+    </dgm:scene3d>
+    <dgm:sp3d/>
+    <dgm:txPr/>
+    <dgm:style>
+      <a:lnRef idx="2">
+        <a:scrgbClr r="0" g="0" b="0"/>
+      </a:lnRef>
+      <a:fillRef idx="1">
+        <a:scrgbClr r="0" g="0" b="0"/>
+      </a:fillRef>
+      <a:effectRef idx="0">
+        <a:scrgbClr r="0" g="0" b="0"/>
+      </a:effectRef>
+      <a:fontRef idx="minor">
+        <a:schemeClr val="lt1"/>
+      </a:fontRef>
+    </dgm:style>
+  </dgm:styleLbl>
+  <dgm:styleLbl name="lnNode1">
+    <dgm:scene3d>
+      <a:camera prst="orthographicFront"/>
+      <a:lightRig rig="threePt" dir="t"/>
+    </dgm:scene3d>
+    <dgm:sp3d/>
+    <dgm:txPr/>
+    <dgm:style>
+      <a:lnRef idx="2">
+        <a:scrgbClr r="0" g="0" b="0"/>
+      </a:lnRef>
+      <a:fillRef idx="1">
+        <a:scrgbClr r="0" g="0" b="0"/>
+      </a:fillRef>
+      <a:effectRef idx="0">
+        <a:scrgbClr r="0" g="0" b="0"/>
+      </a:effectRef>
+      <a:fontRef idx="minor">
+        <a:schemeClr val="lt1"/>
+      </a:fontRef>
+    </dgm:style>
+  </dgm:styleLbl>
+  <dgm:styleLbl name="vennNode1">
+    <dgm:scene3d>
+      <a:camera prst="orthographicFront"/>
+      <a:lightRig rig="threePt" dir="t"/>
+    </dgm:scene3d>
+    <dgm:sp3d/>
+    <dgm:txPr/>
+    <dgm:style>
+      <a:lnRef idx="2">
+        <a:scrgbClr r="0" g="0" b="0"/>
+      </a:lnRef>
+      <a:fillRef idx="1">
+        <a:scrgbClr r="0" g="0" b="0"/>
+      </a:fillRef>
+      <a:effectRef idx="0">
+        <a:scrgbClr r="0" g="0" b="0"/>
+      </a:effectRef>
+      <a:fontRef idx="minor">
+        <a:schemeClr val="tx1"/>
+      </a:fontRef>
+    </dgm:style>
+  </dgm:styleLbl>
+  <dgm:styleLbl name="alignNode1">
+    <dgm:scene3d>
+      <a:camera prst="orthographicFront"/>
+      <a:lightRig rig="threePt" dir="t"/>
+    </dgm:scene3d>
+    <dgm:sp3d/>
+    <dgm:txPr/>
+    <dgm:style>
+      <a:lnRef idx="2">
+        <a:scrgbClr r="0" g="0" b="0"/>
+      </a:lnRef>
+      <a:fillRef idx="1">
+        <a:scrgbClr r="0" g="0" b="0"/>
+      </a:fillRef>
+      <a:effectRef idx="0">
+        <a:scrgbClr r="0" g="0" b="0"/>
+      </a:effectRef>
+      <a:fontRef idx="minor">
+        <a:schemeClr val="lt1"/>
+      </a:fontRef>
+    </dgm:style>
+  </dgm:styleLbl>
+  <dgm:styleLbl name="node1">
+    <dgm:scene3d>
+      <a:camera prst="orthographicFront"/>
+      <a:lightRig rig="threePt" dir="t"/>
+    </dgm:scene3d>
+    <dgm:sp3d/>
+    <dgm:txPr/>
+    <dgm:style>
+      <a:lnRef idx="2">
+        <a:scrgbClr r="0" g="0" b="0"/>
+      </a:lnRef>
+      <a:fillRef idx="1">
+        <a:scrgbClr r="0" g="0" b="0"/>
+      </a:fillRef>
+      <a:effectRef idx="0">
+        <a:scrgbClr r="0" g="0" b="0"/>
+      </a:effectRef>
+      <a:fontRef idx="minor">
+        <a:schemeClr val="lt1"/>
+      </a:fontRef>
+    </dgm:style>
+  </dgm:styleLbl>
+  <dgm:styleLbl name="node2">
+    <dgm:scene3d>
+      <a:camera prst="orthographicFront"/>
+      <a:lightRig rig="threePt" dir="t"/>
+    </dgm:scene3d>
+    <dgm:sp3d/>
+    <dgm:txPr/>
+    <dgm:style>
+      <a:lnRef idx="2">
+        <a:scrgbClr r="0" g="0" b="0"/>
+      </a:lnRef>
+      <a:fillRef idx="1">
+        <a:scrgbClr r="0" g="0" b="0"/>
+      </a:fillRef>
+      <a:effectRef idx="0">
+        <a:scrgbClr r="0" g="0" b="0"/>
+      </a:effectRef>
+      <a:fontRef idx="minor">
+        <a:schemeClr val="lt1"/>
+      </a:fontRef>
+    </dgm:style>
+  </dgm:styleLbl>
+  <dgm:styleLbl name="node3">
+    <dgm:scene3d>
+      <a:camera prst="orthographicFront"/>
+      <a:lightRig rig="threePt" dir="t"/>
+    </dgm:scene3d>
+    <dgm:sp3d/>
+    <dgm:txPr/>
+    <dgm:style>
+      <a:lnRef idx="2">
+        <a:scrgbClr r="0" g="0" b="0"/>
+      </a:lnRef>
+      <a:fillRef idx="1">
+        <a:scrgbClr r="0" g="0" b="0"/>
+      </a:fillRef>
+      <a:effectRef idx="0">
+        <a:scrgbClr r="0" g="0" b="0"/>
+      </a:effectRef>
+      <a:fontRef idx="minor">
+        <a:schemeClr val="lt1"/>
+      </a:fontRef>
+    </dgm:style>
+  </dgm:styleLbl>
+  <dgm:styleLbl name="node4">
+    <dgm:scene3d>
+      <a:camera prst="orthographicFront"/>
+      <a:lightRig rig="threePt" dir="t"/>
+    </dgm:scene3d>
+    <dgm:sp3d/>
+    <dgm:txPr/>
+    <dgm:style>
+      <a:lnRef idx="2">
+        <a:scrgbClr r="0" g="0" b="0"/>
+      </a:lnRef>
+      <a:fillRef idx="1">
+        <a:scrgbClr r="0" g="0" b="0"/>
+      </a:fillRef>
+      <a:effectRef idx="0">
+        <a:scrgbClr r="0" g="0" b="0"/>
+      </a:effectRef>
+      <a:fontRef idx="minor">
+        <a:schemeClr val="lt1"/>
+      </a:fontRef>
+    </dgm:style>
+  </dgm:styleLbl>
+  <dgm:styleLbl name="fgImgPlace1">
+    <dgm:scene3d>
+      <a:camera prst="orthographicFront"/>
+      <a:lightRig rig="threePt" dir="t"/>
+    </dgm:scene3d>
+    <dgm:sp3d/>
+    <dgm:txPr/>
+    <dgm:style>
+      <a:lnRef idx="2">
+        <a:scrgbClr r="0" g="0" b="0"/>
+      </a:lnRef>
+      <a:fillRef idx="1">
+        <a:scrgbClr r="0" g="0" b="0"/>
+      </a:fillRef>
+      <a:effectRef idx="0">
+        <a:scrgbClr r="0" g="0" b="0"/>
+      </a:effectRef>
+      <a:fontRef idx="minor"/>
+    </dgm:style>
+  </dgm:styleLbl>
+  <dgm:styleLbl name="alignImgPlace1">
+    <dgm:scene3d>
+      <a:camera prst="orthographicFront"/>
+      <a:lightRig rig="threePt" dir="t"/>
+    </dgm:scene3d>
+    <dgm:sp3d/>
+    <dgm:txPr/>
+    <dgm:style>
+      <a:lnRef idx="2">
+        <a:scrgbClr r="0" g="0" b="0"/>
+      </a:lnRef>
+      <a:fillRef idx="1">
+        <a:scrgbClr r="0" g="0" b="0"/>
+      </a:fillRef>
+      <a:effectRef idx="0">
+        <a:scrgbClr r="0" g="0" b="0"/>
+      </a:effectRef>
+      <a:fontRef idx="minor"/>
+    </dgm:style>
+  </dgm:styleLbl>
+  <dgm:styleLbl name="bgImgPlace1">
+    <dgm:scene3d>
+      <a:camera prst="orthographicFront"/>
+      <a:lightRig rig="threePt" dir="t"/>
+    </dgm:scene3d>
+    <dgm:sp3d/>
+    <dgm:txPr/>
+    <dgm:style>
+      <a:lnRef idx="2">
+        <a:scrgbClr r="0" g="0" b="0"/>
+      </a:lnRef>
+      <a:fillRef idx="1">
+        <a:scrgbClr r="0" g="0" b="0"/>
+      </a:fillRef>
+      <a:effectRef idx="0">
+        <a:scrgbClr r="0" g="0" b="0"/>
+      </a:effectRef>
+      <a:fontRef idx="minor"/>
+    </dgm:style>
+  </dgm:styleLbl>
+  <dgm:styleLbl name="sibTrans2D1">
+    <dgm:scene3d>
+      <a:camera prst="orthographicFront"/>
+      <a:lightRig rig="threePt" dir="t"/>
+    </dgm:scene3d>
+    <dgm:sp3d/>
+    <dgm:txPr/>
+    <dgm:style>
+      <a:lnRef idx="0">
+        <a:scrgbClr r="0" g="0" b="0"/>
+      </a:lnRef>
+      <a:fillRef idx="1">
+        <a:scrgbClr r="0" g="0" b="0"/>
+      </a:fillRef>
+      <a:effectRef idx="0">
+        <a:scrgbClr r="0" g="0" b="0"/>
+      </a:effectRef>
+      <a:fontRef idx="minor">
+        <a:schemeClr val="lt1"/>
+      </a:fontRef>
+    </dgm:style>
+  </dgm:styleLbl>
+  <dgm:styleLbl name="fgSibTrans2D1">
+    <dgm:scene3d>
+      <a:camera prst="orthographicFront"/>
+      <a:lightRig rig="threePt" dir="t"/>
+    </dgm:scene3d>
+    <dgm:sp3d/>
+    <dgm:txPr/>
+    <dgm:style>
+      <a:lnRef idx="0">
+        <a:scrgbClr r="0" g="0" b="0"/>
+      </a:lnRef>
+      <a:fillRef idx="1">
+        <a:scrgbClr r="0" g="0" b="0"/>
+      </a:fillRef>
+      <a:effectRef idx="0">
+        <a:scrgbClr r="0" g="0" b="0"/>
+      </a:effectRef>
+      <a:fontRef idx="minor">
+        <a:schemeClr val="lt1"/>
+      </a:fontRef>
+    </dgm:style>
+  </dgm:styleLbl>
+  <dgm:styleLbl name="bgSibTrans2D1">
+    <dgm:scene3d>
+      <a:camera prst="orthographicFront"/>
+      <a:lightRig rig="threePt" dir="t"/>
+    </dgm:scene3d>
+    <dgm:sp3d/>
+    <dgm:txPr/>
+    <dgm:style>
+      <a:lnRef idx="0">
+        <a:scrgbClr r="0" g="0" b="0"/>
+      </a:lnRef>
+      <a:fillRef idx="1">
+        <a:scrgbClr r="0" g="0" b="0"/>
+      </a:fillRef>
+      <a:effectRef idx="0">
+        <a:scrgbClr r="0" g="0" b="0"/>
+      </a:effectRef>
+      <a:fontRef idx="minor">
+        <a:schemeClr val="lt1"/>
+      </a:fontRef>
+    </dgm:style>
+  </dgm:styleLbl>
+  <dgm:styleLbl name="sibTrans1D1">
+    <dgm:scene3d>
+      <a:camera prst="orthographicFront"/>
+      <a:lightRig rig="threePt" dir="t"/>
+    </dgm:scene3d>
+    <dgm:sp3d/>
+    <dgm:txPr/>
+    <dgm:style>
+      <a:lnRef idx="1">
+        <a:scrgbClr r="0" g="0" b="0"/>
+      </a:lnRef>
+      <a:fillRef idx="0">
+        <a:scrgbClr r="0" g="0" b="0"/>
+      </a:fillRef>
+      <a:effectRef idx="0">
+        <a:scrgbClr r="0" g="0" b="0"/>
+      </a:effectRef>
+      <a:fontRef idx="minor"/>
+    </dgm:style>
+  </dgm:styleLbl>
+  <dgm:styleLbl name="callout">
+    <dgm:scene3d>
+      <a:camera prst="orthographicFront"/>
+      <a:lightRig rig="threePt" dir="t"/>
+    </dgm:scene3d>
+    <dgm:sp3d/>
+    <dgm:txPr/>
+    <dgm:style>
+      <a:lnRef idx="2">
+        <a:scrgbClr r="0" g="0" b="0"/>
+      </a:lnRef>
+      <a:fillRef idx="1">
+        <a:scrgbClr r="0" g="0" b="0"/>
+      </a:fillRef>
+      <a:effectRef idx="0">
+        <a:scrgbClr r="0" g="0" b="0"/>
+      </a:effectRef>
+      <a:fontRef idx="minor"/>
+    </dgm:style>
+  </dgm:styleLbl>
+  <dgm:styleLbl name="asst0">
+    <dgm:scene3d>
+      <a:camera prst="orthographicFront"/>
+      <a:lightRig rig="threePt" dir="t"/>
+    </dgm:scene3d>
+    <dgm:sp3d/>
+    <dgm:txPr/>
+    <dgm:style>
+      <a:lnRef idx="2">
+        <a:scrgbClr r="0" g="0" b="0"/>
+      </a:lnRef>
+      <a:fillRef idx="1">
+        <a:scrgbClr r="0" g="0" b="0"/>
+      </a:fillRef>
+      <a:effectRef idx="0">
+        <a:scrgbClr r="0" g="0" b="0"/>
+      </a:effectRef>
+      <a:fontRef idx="minor">
+        <a:schemeClr val="lt1"/>
+      </a:fontRef>
+    </dgm:style>
+  </dgm:styleLbl>
+  <dgm:styleLbl name="asst1">
+    <dgm:scene3d>
+      <a:camera prst="orthographicFront"/>
+      <a:lightRig rig="threePt" dir="t"/>
+    </dgm:scene3d>
+    <dgm:sp3d/>
+    <dgm:txPr/>
+    <dgm:style>
+      <a:lnRef idx="2">
+        <a:scrgbClr r="0" g="0" b="0"/>
+      </a:lnRef>
+      <a:fillRef idx="1">
+        <a:scrgbClr r="0" g="0" b="0"/>
+      </a:fillRef>
+      <a:effectRef idx="0">
+        <a:scrgbClr r="0" g="0" b="0"/>
+      </a:effectRef>
+      <a:fontRef idx="minor">
+        <a:schemeClr val="lt1"/>
+      </a:fontRef>
+    </dgm:style>
+  </dgm:styleLbl>
+  <dgm:styleLbl name="asst2">
+    <dgm:scene3d>
+      <a:camera prst="orthographicFront"/>
+      <a:lightRig rig="threePt" dir="t"/>
+    </dgm:scene3d>
+    <dgm:sp3d/>
+    <dgm:txPr/>
+    <dgm:style>
+      <a:lnRef idx="2">
+        <a:scrgbClr r="0" g="0" b="0"/>
+      </a:lnRef>
+      <a:fillRef idx="1">
+        <a:scrgbClr r="0" g="0" b="0"/>
+      </a:fillRef>
+      <a:effectRef idx="0">
+        <a:scrgbClr r="0" g="0" b="0"/>
+      </a:effectRef>
+      <a:fontRef idx="minor">
+        <a:schemeClr val="lt1"/>
+      </a:fontRef>
+    </dgm:style>
+  </dgm:styleLbl>
+  <dgm:styleLbl name="asst3">
+    <dgm:scene3d>
+      <a:camera prst="orthographicFront"/>
+      <a:lightRig rig="threePt" dir="t"/>
+    </dgm:scene3d>
+    <dgm:sp3d/>
+    <dgm:txPr/>
+    <dgm:style>
+      <a:lnRef idx="2">
+        <a:scrgbClr r="0" g="0" b="0"/>
+      </a:lnRef>
+      <a:fillRef idx="1">
+        <a:scrgbClr r="0" g="0" b="0"/>
+      </a:fillRef>
+      <a:effectRef idx="0">
+        <a:scrgbClr r="0" g="0" b="0"/>
+      </a:effectRef>
+      <a:fontRef idx="minor">
+        <a:schemeClr val="lt1"/>
+      </a:fontRef>
+    </dgm:style>
+  </dgm:styleLbl>
+  <dgm:styleLbl name="asst4">
+    <dgm:scene3d>
+      <a:camera prst="orthographicFront"/>
+      <a:lightRig rig="threePt" dir="t"/>
+    </dgm:scene3d>
+    <dgm:sp3d/>
+    <dgm:txPr/>
+    <dgm:style>
+      <a:lnRef idx="2">
+        <a:scrgbClr r="0" g="0" b="0"/>
+      </a:lnRef>
+      <a:fillRef idx="1">
+        <a:scrgbClr r="0" g="0" b="0"/>
+      </a:fillRef>
+      <a:effectRef idx="0">
+        <a:scrgbClr r="0" g="0" b="0"/>
+      </a:effectRef>
+      <a:fontRef idx="minor">
+        <a:schemeClr val="lt1"/>
+      </a:fontRef>
+    </dgm:style>
+  </dgm:styleLbl>
+  <dgm:styleLbl name="parChTrans2D1">
+    <dgm:scene3d>
+      <a:camera prst="orthographicFront"/>
+      <a:lightRig rig="threePt" dir="t"/>
+    </dgm:scene3d>
+    <dgm:sp3d/>
+    <dgm:txPr/>
+    <dgm:style>
+      <a:lnRef idx="2">
+        <a:scrgbClr r="0" g="0" b="0"/>
+      </a:lnRef>
+      <a:fillRef idx="1">
+        <a:scrgbClr r="0" g="0" b="0"/>
+      </a:fillRef>
+      <a:effectRef idx="0">
+        <a:scrgbClr r="0" g="0" b="0"/>
+      </a:effectRef>
+      <a:fontRef idx="minor">
+        <a:schemeClr val="lt1"/>
+      </a:fontRef>
+    </dgm:style>
+  </dgm:styleLbl>
+  <dgm:styleLbl name="parChTrans2D2">
+    <dgm:scene3d>
+      <a:camera prst="orthographicFront"/>
+      <a:lightRig rig="threePt" dir="t"/>
+    </dgm:scene3d>
+    <dgm:sp3d/>
+    <dgm:txPr/>
+    <dgm:style>
+      <a:lnRef idx="2">
+        <a:scrgbClr r="0" g="0" b="0"/>
+      </a:lnRef>
+      <a:fillRef idx="1">
+        <a:scrgbClr r="0" g="0" b="0"/>
+      </a:fillRef>
+      <a:effectRef idx="0">
+        <a:scrgbClr r="0" g="0" b="0"/>
+      </a:effectRef>
+      <a:fontRef idx="minor">
+        <a:schemeClr val="lt1"/>
+      </a:fontRef>
+    </dgm:style>
+  </dgm:styleLbl>
+  <dgm:styleLbl name="parChTrans2D3">
+    <dgm:scene3d>
+      <a:camera prst="orthographicFront"/>
+      <a:lightRig rig="threePt" dir="t"/>
+    </dgm:scene3d>
+    <dgm:sp3d/>
+    <dgm:txPr/>
+    <dgm:style>
+      <a:lnRef idx="2">
+        <a:scrgbClr r="0" g="0" b="0"/>
+      </a:lnRef>
+      <a:fillRef idx="1">
+        <a:scrgbClr r="0" g="0" b="0"/>
+      </a:fillRef>
+      <a:effectRef idx="0">
+        <a:scrgbClr r="0" g="0" b="0"/>
+      </a:effectRef>
+      <a:fontRef idx="minor">
+        <a:schemeClr val="lt1"/>
+      </a:fontRef>
+    </dgm:style>
+  </dgm:styleLbl>
+  <dgm:styleLbl name="parChTrans2D4">
+    <dgm:scene3d>
+      <a:camera prst="orthographicFront"/>
+      <a:lightRig rig="threePt" dir="t"/>
+    </dgm:scene3d>
+    <dgm:sp3d/>
+    <dgm:txPr/>
+    <dgm:style>
+      <a:lnRef idx="2">
+        <a:scrgbClr r="0" g="0" b="0"/>
+      </a:lnRef>
+      <a:fillRef idx="1">
+        <a:scrgbClr r="0" g="0" b="0"/>
+      </a:fillRef>
+      <a:effectRef idx="0">
+        <a:scrgbClr r="0" g="0" b="0"/>
+      </a:effectRef>
+      <a:fontRef idx="minor">
+        <a:schemeClr val="lt1"/>
+      </a:fontRef>
+    </dgm:style>
+  </dgm:styleLbl>
+  <dgm:styleLbl name="parChTrans1D1">
+    <dgm:scene3d>
+      <a:camera prst="orthographicFront"/>
+      <a:lightRig rig="threePt" dir="t"/>
+    </dgm:scene3d>
+    <dgm:sp3d/>
+    <dgm:txPr/>
+    <dgm:style>
+      <a:lnRef idx="2">
+        <a:scrgbClr r="0" g="0" b="0"/>
+      </a:lnRef>
+      <a:fillRef idx="0">
+        <a:scrgbClr r="0" g="0" b="0"/>
+      </a:fillRef>
+      <a:effectRef idx="0">
+        <a:scrgbClr r="0" g="0" b="0"/>
+      </a:effectRef>
+      <a:fontRef idx="minor"/>
+    </dgm:style>
+  </dgm:styleLbl>
+  <dgm:styleLbl name="parChTrans1D2">
+    <dgm:scene3d>
+      <a:camera prst="orthographicFront"/>
+      <a:lightRig rig="threePt" dir="t"/>
+    </dgm:scene3d>
+    <dgm:sp3d/>
+    <dgm:txPr/>
+    <dgm:style>
+      <a:lnRef idx="2">
+        <a:scrgbClr r="0" g="0" b="0"/>
+      </a:lnRef>
+      <a:fillRef idx="0">
+        <a:scrgbClr r="0" g="0" b="0"/>
+      </a:fillRef>
+      <a:effectRef idx="0">
+        <a:scrgbClr r="0" g="0" b="0"/>
+      </a:effectRef>
+      <a:fontRef idx="minor"/>
+    </dgm:style>
+  </dgm:styleLbl>
+  <dgm:styleLbl name="parChTrans1D3">
+    <dgm:scene3d>
+      <a:camera prst="orthographicFront"/>
+      <a:lightRig rig="threePt" dir="t"/>
+    </dgm:scene3d>
+    <dgm:sp3d/>
+    <dgm:txPr/>
+    <dgm:style>
+      <a:lnRef idx="2">
+        <a:scrgbClr r="0" g="0" b="0"/>
+      </a:lnRef>
+      <a:fillRef idx="0">
+        <a:scrgbClr r="0" g="0" b="0"/>
+      </a:fillRef>
+      <a:effectRef idx="0">
+        <a:scrgbClr r="0" g="0" b="0"/>
+      </a:effectRef>
+      <a:fontRef idx="minor"/>
+    </dgm:style>
+  </dgm:styleLbl>
+  <dgm:styleLbl name="parChTrans1D4">
+    <dgm:scene3d>
+      <a:camera prst="orthographicFront"/>
+      <a:lightRig rig="threePt" dir="t"/>
+    </dgm:scene3d>
+    <dgm:sp3d/>
+    <dgm:txPr/>
+    <dgm:style>
+      <a:lnRef idx="2">
+        <a:scrgbClr r="0" g="0" b="0"/>
+      </a:lnRef>
+      <a:fillRef idx="0">
+        <a:scrgbClr r="0" g="0" b="0"/>
+      </a:fillRef>
+      <a:effectRef idx="0">
+        <a:scrgbClr r="0" g="0" b="0"/>
+      </a:effectRef>
+      <a:fontRef idx="minor"/>
+    </dgm:style>
+  </dgm:styleLbl>
+  <dgm:styleLbl name="fgAcc1">
+    <dgm:scene3d>
+      <a:camera prst="orthographicFront"/>
+      <a:lightRig rig="threePt" dir="t"/>
+    </dgm:scene3d>
+    <dgm:sp3d/>
+    <dgm:txPr/>
+    <dgm:style>
+      <a:lnRef idx="2">
+        <a:scrgbClr r="0" g="0" b="0"/>
+      </a:lnRef>
+      <a:fillRef idx="1">
+        <a:scrgbClr r="0" g="0" b="0"/>
+      </a:fillRef>
+      <a:effectRef idx="0">
+        <a:scrgbClr r="0" g="0" b="0"/>
+      </a:effectRef>
+      <a:fontRef idx="minor"/>
+    </dgm:style>
+  </dgm:styleLbl>
+  <dgm:styleLbl name="conFgAcc1">
+    <dgm:scene3d>
+      <a:camera prst="orthographicFront"/>
+      <a:lightRig rig="threePt" dir="t"/>
+    </dgm:scene3d>
+    <dgm:sp3d/>
+    <dgm:txPr/>
+    <dgm:style>
+      <a:lnRef idx="2">
+        <a:scrgbClr r="0" g="0" b="0"/>
+      </a:lnRef>
+      <a:fillRef idx="1">
+        <a:scrgbClr r="0" g="0" b="0"/>
+      </a:fillRef>
+      <a:effectRef idx="0">
+        <a:scrgbClr r="0" g="0" b="0"/>
+      </a:effectRef>
+      <a:fontRef idx="minor"/>
+    </dgm:style>
+  </dgm:styleLbl>
+  <dgm:styleLbl name="alignAcc1">
+    <dgm:scene3d>
+      <a:camera prst="orthographicFront"/>
+      <a:lightRig rig="threePt" dir="t"/>
+    </dgm:scene3d>
+    <dgm:sp3d/>
+    <dgm:txPr/>
+    <dgm:style>
+      <a:lnRef idx="2">
+        <a:scrgbClr r="0" g="0" b="0"/>
+      </a:lnRef>
+      <a:fillRef idx="1">
+        <a:scrgbClr r="0" g="0" b="0"/>
+      </a:fillRef>
+      <a:effectRef idx="0">
+        <a:scrgbClr r="0" g="0" b="0"/>
+      </a:effectRef>
+      <a:fontRef idx="minor"/>
+    </dgm:style>
+  </dgm:styleLbl>
+  <dgm:styleLbl name="trAlignAcc1">
+    <dgm:scene3d>
+      <a:camera prst="orthographicFront"/>
+      <a:lightRig rig="threePt" dir="t"/>
+    </dgm:scene3d>
+    <dgm:sp3d/>
+    <dgm:txPr/>
+    <dgm:style>
+      <a:lnRef idx="1">
+        <a:scrgbClr r="0" g="0" b="0"/>
+      </a:lnRef>
+      <a:fillRef idx="1">
+        <a:scrgbClr r="0" g="0" b="0"/>
+      </a:fillRef>
+      <a:effectRef idx="0">
+        <a:scrgbClr r="0" g="0" b="0"/>
+      </a:effectRef>
+      <a:fontRef idx="minor"/>
+    </dgm:style>
+  </dgm:styleLbl>
+  <dgm:styleLbl name="bgAcc1">
+    <dgm:scene3d>
+      <a:camera prst="orthographicFront"/>
+      <a:lightRig rig="threePt" dir="t"/>
+    </dgm:scene3d>
+    <dgm:sp3d/>
+    <dgm:txPr/>
+    <dgm:style>
+      <a:lnRef idx="2">
+        <a:scrgbClr r="0" g="0" b="0"/>
+      </a:lnRef>
+      <a:fillRef idx="1">
+        <a:scrgbClr r="0" g="0" b="0"/>
+      </a:fillRef>
+      <a:effectRef idx="0">
+        <a:scrgbClr r="0" g="0" b="0"/>
+      </a:effectRef>
+      <a:fontRef idx="minor"/>
+    </dgm:style>
+  </dgm:styleLbl>
+  <dgm:styleLbl name="solidFgAcc1">
+    <dgm:scene3d>
+      <a:camera prst="orthographicFront"/>
+      <a:lightRig rig="threePt" dir="t"/>
+    </dgm:scene3d>
+    <dgm:sp3d/>
+    <dgm:txPr/>
+    <dgm:style>
+      <a:lnRef idx="2">
+        <a:scrgbClr r="0" g="0" b="0"/>
+      </a:lnRef>
+      <a:fillRef idx="1">
+        <a:scrgbClr r="0" g="0" b="0"/>
+      </a:fillRef>
+      <a:effectRef idx="0">
+        <a:scrgbClr r="0" g="0" b="0"/>
+      </a:effectRef>
+      <a:fontRef idx="minor"/>
+    </dgm:style>
+  </dgm:styleLbl>
+  <dgm:styleLbl name="solidAlignAcc1">
+    <dgm:scene3d>
+      <a:camera prst="orthographicFront"/>
+      <a:lightRig rig="threePt" dir="t"/>
+    </dgm:scene3d>
+    <dgm:sp3d/>
+    <dgm:txPr/>
+    <dgm:style>
+      <a:lnRef idx="2">
+        <a:scrgbClr r="0" g="0" b="0"/>
+      </a:lnRef>
+      <a:fillRef idx="1">
+        <a:scrgbClr r="0" g="0" b="0"/>
+      </a:fillRef>
+      <a:effectRef idx="0">
+        <a:scrgbClr r="0" g="0" b="0"/>
+      </a:effectRef>
+      <a:fontRef idx="minor"/>
+    </dgm:style>
+  </dgm:styleLbl>
+  <dgm:styleLbl name="solidBgAcc1">
+    <dgm:scene3d>
+      <a:camera prst="orthographicFront"/>
+      <a:lightRig rig="threePt" dir="t"/>
+    </dgm:scene3d>
+    <dgm:sp3d/>
+    <dgm:txPr/>
+    <dgm:style>
+      <a:lnRef idx="2">
+        <a:scrgbClr r="0" g="0" b="0"/>
+      </a:lnRef>
+      <a:fillRef idx="1">
+        <a:scrgbClr r="0" g="0" b="0"/>
+      </a:fillRef>
+      <a:effectRef idx="0">
+        <a:scrgbClr r="0" g="0" b="0"/>
+      </a:effectRef>
+      <a:fontRef idx="minor"/>
+    </dgm:style>
+  </dgm:styleLbl>
+  <dgm:styleLbl name="fgAccFollowNode1">
+    <dgm:scene3d>
+      <a:camera prst="orthographicFront"/>
+      <a:lightRig rig="threePt" dir="t"/>
+    </dgm:scene3d>
+    <dgm:sp3d/>
+    <dgm:txPr/>
+    <dgm:style>
+      <a:lnRef idx="2">
+        <a:scrgbClr r="0" g="0" b="0"/>
+      </a:lnRef>
+      <a:fillRef idx="1">
+        <a:scrgbClr r="0" g="0" b="0"/>
+      </a:fillRef>
+      <a:effectRef idx="0">
+        <a:scrgbClr r="0" g="0" b="0"/>
+      </a:effectRef>
+      <a:fontRef idx="minor"/>
+    </dgm:style>
+  </dgm:styleLbl>
+  <dgm:styleLbl name="alignAccFollowNode1">
+    <dgm:scene3d>
+      <a:camera prst="orthographicFront"/>
+      <a:lightRig rig="threePt" dir="t"/>
+    </dgm:scene3d>
+    <dgm:sp3d/>
+    <dgm:txPr/>
+    <dgm:style>
+      <a:lnRef idx="2">
+        <a:scrgbClr r="0" g="0" b="0"/>
+      </a:lnRef>
+      <a:fillRef idx="1">
+        <a:scrgbClr r="0" g="0" b="0"/>
+      </a:fillRef>
+      <a:effectRef idx="0">
+        <a:scrgbClr r="0" g="0" b="0"/>
+      </a:effectRef>
+      <a:fontRef idx="minor"/>
+    </dgm:style>
+  </dgm:styleLbl>
+  <dgm:styleLbl name="bgAccFollowNode1">
+    <dgm:scene3d>
+      <a:camera prst="orthographicFront"/>
+      <a:lightRig rig="threePt" dir="t"/>
+    </dgm:scene3d>
+    <dgm:sp3d/>
+    <dgm:txPr/>
+    <dgm:style>
+      <a:lnRef idx="2">
+        <a:scrgbClr r="0" g="0" b="0"/>
+      </a:lnRef>
+      <a:fillRef idx="1">
+        <a:scrgbClr r="0" g="0" b="0"/>
+      </a:fillRef>
+      <a:effectRef idx="0">
+        <a:scrgbClr r="0" g="0" b="0"/>
+      </a:effectRef>
+      <a:fontRef idx="minor"/>
+    </dgm:style>
+  </dgm:styleLbl>
+  <dgm:styleLbl name="fgAcc0">
+    <dgm:scene3d>
+      <a:camera prst="orthographicFront"/>
+      <a:lightRig rig="threePt" dir="t"/>
+    </dgm:scene3d>
+    <dgm:sp3d/>
+    <dgm:txPr/>
+    <dgm:style>
+      <a:lnRef idx="2">
+        <a:scrgbClr r="0" g="0" b="0"/>
+      </a:lnRef>
+      <a:fillRef idx="1">
+        <a:scrgbClr r="0" g="0" b="0"/>
+      </a:fillRef>
+      <a:effectRef idx="0">
+        <a:scrgbClr r="0" g="0" b="0"/>
+      </a:effectRef>
+      <a:fontRef idx="minor"/>
+    </dgm:style>
+  </dgm:styleLbl>
+  <dgm:styleLbl name="fgAcc2">
+    <dgm:scene3d>
+      <a:camera prst="orthographicFront"/>
+      <a:lightRig rig="threePt" dir="t"/>
+    </dgm:scene3d>
+    <dgm:sp3d/>
+    <dgm:txPr/>
+    <dgm:style>
+      <a:lnRef idx="2">
+        <a:scrgbClr r="0" g="0" b="0"/>
+      </a:lnRef>
+      <a:fillRef idx="1">
+        <a:scrgbClr r="0" g="0" b="0"/>
+      </a:fillRef>
+      <a:effectRef idx="0">
+        <a:scrgbClr r="0" g="0" b="0"/>
+      </a:effectRef>
+      <a:fontRef idx="minor"/>
+    </dgm:style>
+  </dgm:styleLbl>
+  <dgm:styleLbl name="fgAcc3">
+    <dgm:scene3d>
+      <a:camera prst="orthographicFront"/>
+      <a:lightRig rig="threePt" dir="t"/>
+    </dgm:scene3d>
+    <dgm:sp3d/>
+    <dgm:txPr/>
+    <dgm:style>
+      <a:lnRef idx="2">
+        <a:scrgbClr r="0" g="0" b="0"/>
+      </a:lnRef>
+      <a:fillRef idx="1">
+        <a:scrgbClr r="0" g="0" b="0"/>
+      </a:fillRef>
+      <a:effectRef idx="0">
+        <a:scrgbClr r="0" g="0" b="0"/>
+      </a:effectRef>
+      <a:fontRef idx="minor"/>
+    </dgm:style>
+  </dgm:styleLbl>
+  <dgm:styleLbl name="fgAcc4">
+    <dgm:scene3d>
+      <a:camera prst="orthographicFront"/>
+      <a:lightRig rig="threePt" dir="t"/>
+    </dgm:scene3d>
+    <dgm:sp3d/>
+    <dgm:txPr/>
+    <dgm:style>
+      <a:lnRef idx="2">
+        <a:scrgbClr r="0" g="0" b="0"/>
+      </a:lnRef>
+      <a:fillRef idx="1">
+        <a:scrgbClr r="0" g="0" b="0"/>
+      </a:fillRef>
+      <a:effectRef idx="0">
+        <a:scrgbClr r="0" g="0" b="0"/>
+      </a:effectRef>
+      <a:fontRef idx="minor"/>
+    </dgm:style>
+  </dgm:styleLbl>
+  <dgm:styleLbl name="bgShp">
+    <dgm:scene3d>
+      <a:camera prst="orthographicFront"/>
+      <a:lightRig rig="threePt" dir="t"/>
+    </dgm:scene3d>
+    <dgm:sp3d/>
+    <dgm:txPr/>
+    <dgm:style>
+      <a:lnRef idx="0">
+        <a:scrgbClr r="0" g="0" b="0"/>
+      </a:lnRef>
+      <a:fillRef idx="1">
+        <a:scrgbClr r="0" g="0" b="0"/>
+      </a:fillRef>
+      <a:effectRef idx="0">
+        <a:scrgbClr r="0" g="0" b="0"/>
+      </a:effectRef>
+      <a:fontRef idx="minor"/>
+    </dgm:style>
+  </dgm:styleLbl>
+  <dgm:styleLbl name="dkBgShp">
+    <dgm:scene3d>
+      <a:camera prst="orthographicFront"/>
+      <a:lightRig rig="threePt" dir="t"/>
+    </dgm:scene3d>
+    <dgm:sp3d/>
+    <dgm:txPr/>
+    <dgm:style>
+      <a:lnRef idx="0">
+        <a:scrgbClr r="0" g="0" b="0"/>
+      </a:lnRef>
+      <a:fillRef idx="1">
+        <a:scrgbClr r="0" g="0" b="0"/>
+      </a:fillRef>
+      <a:effectRef idx="0">
+        <a:scrgbClr r="0" g="0" b="0"/>
+      </a:effectRef>
+      <a:fontRef idx="minor"/>
+    </dgm:style>
+  </dgm:styleLbl>
+  <dgm:styleLbl name="trBgShp">
+    <dgm:scene3d>
+      <a:camera prst="orthographicFront"/>
+      <a:lightRig rig="threePt" dir="t"/>
+    </dgm:scene3d>
+    <dgm:sp3d/>
+    <dgm:txPr/>
+    <dgm:style>
+      <a:lnRef idx="0">
+        <a:scrgbClr r="0" g="0" b="0"/>
+      </a:lnRef>
+      <a:fillRef idx="1">
+        <a:scrgbClr r="0" g="0" b="0"/>
+      </a:fillRef>
+      <a:effectRef idx="0">
+        <a:scrgbClr r="0" g="0" b="0"/>
+      </a:effectRef>
+      <a:fontRef idx="minor"/>
+    </dgm:style>
+  </dgm:styleLbl>
+  <dgm:styleLbl name="fgShp">
+    <dgm:scene3d>
+      <a:camera prst="orthographicFront"/>
+      <a:lightRig rig="threePt" dir="t"/>
+    </dgm:scene3d>
+    <dgm:sp3d/>
+    <dgm:txPr/>
+    <dgm:style>
+      <a:lnRef idx="2">
+        <a:scrgbClr r="0" g="0" b="0"/>
+      </a:lnRef>
+      <a:fillRef idx="1">
+        <a:scrgbClr r="0" g="0" b="0"/>
+      </a:fillRef>
+      <a:effectRef idx="0">
+        <a:scrgbClr r="0" g="0" b="0"/>
+      </a:effectRef>
+      <a:fontRef idx="minor"/>
+    </dgm:style>
+  </dgm:styleLbl>
+  <dgm:styleLbl name="revTx">
+    <dgm:scene3d>
+      <a:camera prst="orthographicFront"/>
+      <a:lightRig rig="threePt" dir="t"/>
+    </dgm:scene3d>
+    <dgm:sp3d/>
+    <dgm:txPr/>
+    <dgm:style>
+      <a:lnRef idx="0">
+        <a:scrgbClr r="0" g="0" b="0"/>
+      </a:lnRef>
+      <a:fillRef idx="0">
+        <a:scrgbClr r="0" g="0" b="0"/>
+      </a:fillRef>
+      <a:effectRef idx="0">
+        <a:scrgbClr r="0" g="0" b="0"/>
+      </a:effectRef>
+      <a:fontRef idx="minor"/>
+    </dgm:style>
+  </dgm:styleLbl>
+</dgm:styleDef>
+</file>
+
+<file path=ppt/diagrams/quickStyle6.xml><?xml version="1.0" encoding="utf-8"?>
 <dgm:styleDef xmlns:dgm="http://schemas.openxmlformats.org/drawingml/2006/diagram" xmlns:a="http://schemas.openxmlformats.org/drawingml/2006/main" uniqueId="urn:microsoft.com/office/officeart/2005/8/quickstyle/simple1#2">
   <dgm:title val=""/>
   <dgm:desc val=""/>
@@ -23475,8 +27146,8 @@
         </p:nvSpPr>
         <p:spPr>
           <a:xfrm>
-            <a:off x="6509659" y="1376516"/>
-            <a:ext cx="4844143" cy="2585323"/>
+            <a:off x="6509657" y="853333"/>
+            <a:ext cx="4844143" cy="5355312"/>
           </a:xfrm>
           <a:prstGeom prst="rect">
             <a:avLst/>
@@ -23523,7 +27194,7 @@
                 <a:latin typeface="Yu Gothic UI Semilight" panose="020B0400000000000000" pitchFamily="34" charset="-128"/>
                 <a:ea typeface="Yu Gothic UI Semilight" panose="020B0400000000000000" pitchFamily="34" charset="-128"/>
               </a:rPr>
-              <a:t>, focusing on categorical features. We did this because numerical height, age and income features posed a risk of introducing bias or noise into the models.</a:t>
+              <a:t>, focusing on categorical features. We did this because the numerical features, such as height, age and income, posed a risk of introducing bias and noise into the models. </a:t>
             </a:r>
           </a:p>
           <a:p>
@@ -23533,10 +27204,158 @@
                 <a:ea typeface="Yu Gothic UI Semilight" panose="020B0400000000000000" pitchFamily="34" charset="-128"/>
               </a:rPr>
             </a:br>
-            <a:endParaRPr lang="en-GB" dirty="0">
-              <a:latin typeface="Yu Gothic UI Semilight" panose="020B0400000000000000" pitchFamily="34" charset="-128"/>
-              <a:ea typeface="Yu Gothic UI Semilight" panose="020B0400000000000000" pitchFamily="34" charset="-128"/>
-            </a:endParaRPr>
+            <a:r>
+              <a:rPr lang="en-GB" dirty="0">
+                <a:latin typeface="Yu Gothic UI Semilight" panose="020B0400000000000000" pitchFamily="34" charset="-128"/>
+                <a:ea typeface="Yu Gothic UI Semilight" panose="020B0400000000000000" pitchFamily="34" charset="-128"/>
+              </a:rPr>
+              <a:t>The subset used in this project consisted of the following features:</a:t>
+            </a:r>
+          </a:p>
+          <a:p>
+            <a:pPr marL="285750" indent="-285750">
+              <a:buFont typeface="Arial" panose="020B0604020202020204" pitchFamily="34" charset="0"/>
+              <a:buChar char="•"/>
+            </a:pPr>
+            <a:r>
+              <a:rPr lang="en-GB" dirty="0">
+                <a:latin typeface="Yu Gothic UI Semilight" panose="020B0400000000000000" pitchFamily="34" charset="-128"/>
+                <a:ea typeface="Yu Gothic UI Semilight" panose="020B0400000000000000" pitchFamily="34" charset="-128"/>
+              </a:rPr>
+              <a:t>'sex’</a:t>
+            </a:r>
+          </a:p>
+          <a:p>
+            <a:pPr marL="285750" indent="-285750">
+              <a:buFont typeface="Arial" panose="020B0604020202020204" pitchFamily="34" charset="0"/>
+              <a:buChar char="•"/>
+            </a:pPr>
+            <a:r>
+              <a:rPr lang="en-GB" dirty="0">
+                <a:latin typeface="Yu Gothic UI Semilight" panose="020B0400000000000000" pitchFamily="34" charset="-128"/>
+                <a:ea typeface="Yu Gothic UI Semilight" panose="020B0400000000000000" pitchFamily="34" charset="-128"/>
+              </a:rPr>
+              <a:t>'</a:t>
+            </a:r>
+            <a:r>
+              <a:rPr lang="en-GB" dirty="0" err="1">
+                <a:latin typeface="Yu Gothic UI Semilight" panose="020B0400000000000000" pitchFamily="34" charset="-128"/>
+                <a:ea typeface="Yu Gothic UI Semilight" panose="020B0400000000000000" pitchFamily="34" charset="-128"/>
+              </a:rPr>
+              <a:t>body_type</a:t>
+            </a:r>
+            <a:r>
+              <a:rPr lang="en-GB" dirty="0">
+                <a:latin typeface="Yu Gothic UI Semilight" panose="020B0400000000000000" pitchFamily="34" charset="-128"/>
+                <a:ea typeface="Yu Gothic UI Semilight" panose="020B0400000000000000" pitchFamily="34" charset="-128"/>
+              </a:rPr>
+              <a:t>’</a:t>
+            </a:r>
+          </a:p>
+          <a:p>
+            <a:pPr marL="285750" indent="-285750">
+              <a:buFont typeface="Arial" panose="020B0604020202020204" pitchFamily="34" charset="0"/>
+              <a:buChar char="•"/>
+            </a:pPr>
+            <a:r>
+              <a:rPr lang="en-GB" dirty="0">
+                <a:latin typeface="Yu Gothic UI Semilight" panose="020B0400000000000000" pitchFamily="34" charset="-128"/>
+                <a:ea typeface="Yu Gothic UI Semilight" panose="020B0400000000000000" pitchFamily="34" charset="-128"/>
+              </a:rPr>
+              <a:t>'diet’</a:t>
+            </a:r>
+          </a:p>
+          <a:p>
+            <a:pPr marL="285750" indent="-285750">
+              <a:buFont typeface="Arial" panose="020B0604020202020204" pitchFamily="34" charset="0"/>
+              <a:buChar char="•"/>
+            </a:pPr>
+            <a:r>
+              <a:rPr lang="en-GB" dirty="0">
+                <a:latin typeface="Yu Gothic UI Semilight" panose="020B0400000000000000" pitchFamily="34" charset="-128"/>
+                <a:ea typeface="Yu Gothic UI Semilight" panose="020B0400000000000000" pitchFamily="34" charset="-128"/>
+              </a:rPr>
+              <a:t>'drinks’</a:t>
+            </a:r>
+          </a:p>
+          <a:p>
+            <a:pPr marL="285750" indent="-285750">
+              <a:buFont typeface="Arial" panose="020B0604020202020204" pitchFamily="34" charset="0"/>
+              <a:buChar char="•"/>
+            </a:pPr>
+            <a:r>
+              <a:rPr lang="en-GB" dirty="0">
+                <a:latin typeface="Yu Gothic UI Semilight" panose="020B0400000000000000" pitchFamily="34" charset="-128"/>
+                <a:ea typeface="Yu Gothic UI Semilight" panose="020B0400000000000000" pitchFamily="34" charset="-128"/>
+              </a:rPr>
+              <a:t>'drugs’</a:t>
+            </a:r>
+          </a:p>
+          <a:p>
+            <a:pPr marL="285750" indent="-285750">
+              <a:buFont typeface="Arial" panose="020B0604020202020204" pitchFamily="34" charset="0"/>
+              <a:buChar char="•"/>
+            </a:pPr>
+            <a:r>
+              <a:rPr lang="en-GB" dirty="0">
+                <a:latin typeface="Yu Gothic UI Semilight" panose="020B0400000000000000" pitchFamily="34" charset="-128"/>
+                <a:ea typeface="Yu Gothic UI Semilight" panose="020B0400000000000000" pitchFamily="34" charset="-128"/>
+              </a:rPr>
+              <a:t>'education’</a:t>
+            </a:r>
+          </a:p>
+          <a:p>
+            <a:pPr marL="285750" indent="-285750">
+              <a:buFont typeface="Arial" panose="020B0604020202020204" pitchFamily="34" charset="0"/>
+              <a:buChar char="•"/>
+            </a:pPr>
+            <a:r>
+              <a:rPr lang="en-GB" dirty="0">
+                <a:latin typeface="Yu Gothic UI Semilight" panose="020B0400000000000000" pitchFamily="34" charset="-128"/>
+                <a:ea typeface="Yu Gothic UI Semilight" panose="020B0400000000000000" pitchFamily="34" charset="-128"/>
+              </a:rPr>
+              <a:t>'offspring’</a:t>
+            </a:r>
+          </a:p>
+          <a:p>
+            <a:pPr marL="285750" indent="-285750">
+              <a:buFont typeface="Arial" panose="020B0604020202020204" pitchFamily="34" charset="0"/>
+              <a:buChar char="•"/>
+            </a:pPr>
+            <a:r>
+              <a:rPr lang="en-GB" dirty="0">
+                <a:latin typeface="Yu Gothic UI Semilight" panose="020B0400000000000000" pitchFamily="34" charset="-128"/>
+                <a:ea typeface="Yu Gothic UI Semilight" panose="020B0400000000000000" pitchFamily="34" charset="-128"/>
+              </a:rPr>
+              <a:t>'orientation’</a:t>
+            </a:r>
+          </a:p>
+          <a:p>
+            <a:pPr marL="285750" indent="-285750">
+              <a:buFont typeface="Arial" panose="020B0604020202020204" pitchFamily="34" charset="0"/>
+              <a:buChar char="•"/>
+            </a:pPr>
+            <a:r>
+              <a:rPr lang="en-GB" dirty="0">
+                <a:latin typeface="Yu Gothic UI Semilight" panose="020B0400000000000000" pitchFamily="34" charset="-128"/>
+                <a:ea typeface="Yu Gothic UI Semilight" panose="020B0400000000000000" pitchFamily="34" charset="-128"/>
+              </a:rPr>
+              <a:t>'</a:t>
+            </a:r>
+            <a:r>
+              <a:rPr lang="en-GB" dirty="0" err="1">
+                <a:latin typeface="Yu Gothic UI Semilight" panose="020B0400000000000000" pitchFamily="34" charset="-128"/>
+                <a:ea typeface="Yu Gothic UI Semilight" panose="020B0400000000000000" pitchFamily="34" charset="-128"/>
+              </a:rPr>
+              <a:t>religion_cleaned</a:t>
+            </a:r>
+            <a:r>
+              <a:rPr lang="en-GB" dirty="0">
+                <a:latin typeface="Yu Gothic UI Semilight" panose="020B0400000000000000" pitchFamily="34" charset="-128"/>
+                <a:ea typeface="Yu Gothic UI Semilight" panose="020B0400000000000000" pitchFamily="34" charset="-128"/>
+              </a:rPr>
+              <a:t>'</a:t>
+            </a:r>
           </a:p>
         </p:txBody>
       </p:sp>
@@ -23556,17 +27375,6 @@
 <file path=ppt/slides/slide16.xml><?xml version="1.0" encoding="utf-8"?>
 <p:sld xmlns:a="http://schemas.openxmlformats.org/drawingml/2006/main" xmlns:r="http://schemas.openxmlformats.org/officeDocument/2006/relationships" xmlns:p="http://schemas.openxmlformats.org/presentationml/2006/main">
   <p:cSld>
-    <p:bg>
-      <p:bgPr>
-        <a:solidFill>
-          <a:schemeClr val="accent1">
-            <a:lumMod val="40000"/>
-            <a:lumOff val="60000"/>
-          </a:schemeClr>
-        </a:solidFill>
-        <a:effectLst/>
-      </p:bgPr>
-    </p:bg>
     <p:spTree>
       <p:nvGrpSpPr>
         <p:cNvPr id="1" name="">
@@ -23603,44 +27411,56 @@
             <p:ph type="title"/>
           </p:nvPr>
         </p:nvSpPr>
-        <p:spPr/>
+        <p:spPr>
+          <a:xfrm>
+            <a:off x="838198" y="853335"/>
+            <a:ext cx="10515602" cy="1377184"/>
+          </a:xfrm>
+        </p:spPr>
         <p:txBody>
-          <a:bodyPr/>
+          <a:bodyPr anchor="t">
+            <a:normAutofit/>
+          </a:bodyPr>
           <a:lstStyle/>
           <a:p>
-            <a:endParaRPr lang="en-GB" dirty="0">
-              <a:solidFill>
-                <a:schemeClr val="accent3"/>
-              </a:solidFill>
-            </a:endParaRPr>
+            <a:r>
+              <a:rPr lang="en-GB" dirty="0"/>
+              <a:t>Feature Preprocessing</a:t>
+            </a:r>
           </a:p>
         </p:txBody>
       </p:sp>
-      <p:sp>
-        <p:nvSpPr>
-          <p:cNvPr id="3" name="Picture Placeholder 2">
+      <p:graphicFrame>
+        <p:nvGraphicFramePr>
+          <p:cNvPr id="8" name="Content Placeholder 5">
             <a:extLst>
               <a:ext uri="{FF2B5EF4-FFF2-40B4-BE49-F238E27FC236}">
-                <a16:creationId xmlns:a16="http://schemas.microsoft.com/office/drawing/2014/main" id="{C0A52D61-8824-A4C7-09CC-7FE05198BD07}"/>
+                <a16:creationId xmlns:a16="http://schemas.microsoft.com/office/drawing/2014/main" id="{90C19B34-462A-3D74-5345-D187EE91F761}"/>
               </a:ext>
             </a:extLst>
           </p:cNvPr>
-          <p:cNvSpPr>
-            <a:spLocks noGrp="1"/>
-          </p:cNvSpPr>
+          <p:cNvGraphicFramePr>
+            <a:graphicFrameLocks noGrp="1"/>
+          </p:cNvGraphicFramePr>
           <p:nvPr>
-            <p:ph type="pic" sz="quarter" idx="11"/>
+            <p:ph sz="quarter" idx="14"/>
+            <p:extLst>
+              <p:ext uri="{D42A27DB-BD31-4B8C-83A1-F6EECF244321}">
+                <p14:modId xmlns:p14="http://schemas.microsoft.com/office/powerpoint/2010/main" val="2666295521"/>
+              </p:ext>
+            </p:extLst>
           </p:nvPr>
-        </p:nvSpPr>
-        <p:spPr/>
-        <p:txBody>
-          <a:bodyPr/>
-          <a:lstStyle/>
-          <a:p>
-            <a:endParaRPr lang="en-GB"/>
-          </a:p>
-        </p:txBody>
-      </p:sp>
+        </p:nvGraphicFramePr>
+        <p:xfrm>
+          <a:off x="837520" y="2651758"/>
+          <a:ext cx="10515601" cy="3466725"/>
+        </p:xfrm>
+        <a:graphic>
+          <a:graphicData uri="http://schemas.openxmlformats.org/drawingml/2006/diagram">
+            <dgm:relIds xmlns:dgm="http://schemas.openxmlformats.org/drawingml/2006/diagram" xmlns:r="http://schemas.openxmlformats.org/officeDocument/2006/relationships" r:dm="rId2" r:lo="rId3" r:qs="rId4" r:cs="rId5"/>
+          </a:graphicData>
+        </a:graphic>
+      </p:graphicFrame>
     </p:spTree>
     <p:extLst>
       <p:ext uri="{BB962C8B-B14F-4D97-AF65-F5344CB8AC3E}">

--- a/OKCupid-Date-A-Scientist-Starter/OKCupid – Machine Learning Analysis.pptx
+++ b/OKCupid-Date-A-Scientist-Starter/OKCupid – Machine Learning Analysis.pptx
@@ -5,10 +5,10 @@
     <p:sldMasterId id="2147483648" r:id="rId4"/>
   </p:sldMasterIdLst>
   <p:notesMasterIdLst>
-    <p:notesMasterId r:id="rId31"/>
+    <p:notesMasterId r:id="rId35"/>
   </p:notesMasterIdLst>
   <p:handoutMasterIdLst>
-    <p:handoutMasterId r:id="rId32"/>
+    <p:handoutMasterId r:id="rId36"/>
   </p:handoutMasterIdLst>
   <p:sldIdLst>
     <p:sldId id="256" r:id="rId5"/>
@@ -28,15 +28,19 @@
     <p:sldId id="294" r:id="rId19"/>
     <p:sldId id="290" r:id="rId20"/>
     <p:sldId id="281" r:id="rId21"/>
-    <p:sldId id="282" r:id="rId22"/>
-    <p:sldId id="272" r:id="rId23"/>
-    <p:sldId id="273" r:id="rId24"/>
-    <p:sldId id="274" r:id="rId25"/>
-    <p:sldId id="275" r:id="rId26"/>
-    <p:sldId id="276" r:id="rId27"/>
-    <p:sldId id="267" r:id="rId28"/>
-    <p:sldId id="277" r:id="rId29"/>
-    <p:sldId id="278" r:id="rId30"/>
+    <p:sldId id="273" r:id="rId22"/>
+    <p:sldId id="295" r:id="rId23"/>
+    <p:sldId id="296" r:id="rId24"/>
+    <p:sldId id="297" r:id="rId25"/>
+    <p:sldId id="298" r:id="rId26"/>
+    <p:sldId id="282" r:id="rId27"/>
+    <p:sldId id="272" r:id="rId28"/>
+    <p:sldId id="274" r:id="rId29"/>
+    <p:sldId id="275" r:id="rId30"/>
+    <p:sldId id="276" r:id="rId31"/>
+    <p:sldId id="267" r:id="rId32"/>
+    <p:sldId id="277" r:id="rId33"/>
+    <p:sldId id="278" r:id="rId34"/>
   </p:sldIdLst>
   <p:sldSz cx="12192000" cy="6858000"/>
   <p:notesSz cx="6858000" cy="9144000"/>
@@ -169,6 +173,11 @@
         <p14:section name="Model Building" id="{C57D0D48-4BFF-447E-AE1B-027BA2C66E31}">
           <p14:sldIdLst>
             <p14:sldId id="281"/>
+            <p14:sldId id="273"/>
+            <p14:sldId id="295"/>
+            <p14:sldId id="296"/>
+            <p14:sldId id="297"/>
+            <p14:sldId id="298"/>
           </p14:sldIdLst>
         </p14:section>
         <p14:section name="Model Evaluation" id="{C4FF13F1-7E39-4AB8-AB4D-D7B290A99173}">
@@ -179,7 +188,6 @@
         <p14:section name="Conclusion" id="{D40678AF-1A16-4A05-8F05-5E5965F8B786}">
           <p14:sldIdLst>
             <p14:sldId id="272"/>
-            <p14:sldId id="273"/>
             <p14:sldId id="274"/>
             <p14:sldId id="275"/>
             <p14:sldId id="276"/>
@@ -4797,6 +4805,857 @@
     <dgm:txFillClrLst meth="repeat">
       <a:schemeClr val="tx1"/>
     </dgm:txFillClrLst>
+    <dgm:txEffectClrLst/>
+  </dgm:styleLbl>
+</dgm:colorsDef>
+</file>
+
+<file path=ppt/diagrams/colors7.xml><?xml version="1.0" encoding="utf-8"?>
+<dgm:colorsDef xmlns:dgm="http://schemas.openxmlformats.org/drawingml/2006/diagram" xmlns:a="http://schemas.openxmlformats.org/drawingml/2006/main" uniqueId="urn:microsoft.com/office/officeart/2005/8/colors/accent1_2">
+  <dgm:title val=""/>
+  <dgm:desc val=""/>
+  <dgm:catLst>
+    <dgm:cat type="accent1" pri="11200"/>
+  </dgm:catLst>
+  <dgm:styleLbl name="node0">
+    <dgm:fillClrLst meth="repeat">
+      <a:schemeClr val="accent1"/>
+    </dgm:fillClrLst>
+    <dgm:linClrLst meth="repeat">
+      <a:schemeClr val="lt1"/>
+    </dgm:linClrLst>
+    <dgm:effectClrLst/>
+    <dgm:txLinClrLst/>
+    <dgm:txFillClrLst/>
+    <dgm:txEffectClrLst/>
+  </dgm:styleLbl>
+  <dgm:styleLbl name="node0NoLn">
+    <dgm:fillClrLst meth="repeat">
+      <a:schemeClr val="accent1"/>
+    </dgm:fillClrLst>
+    <dgm:linClrLst meth="repeat">
+      <a:schemeClr val="lt1">
+        <a:alpha val="0"/>
+      </a:schemeClr>
+    </dgm:linClrLst>
+    <dgm:effectClrLst/>
+    <dgm:txLinClrLst/>
+    <dgm:txFillClrLst/>
+    <dgm:txEffectClrLst/>
+  </dgm:styleLbl>
+  <dgm:styleLbl name="alignNode1">
+    <dgm:fillClrLst meth="repeat">
+      <a:schemeClr val="accent1"/>
+    </dgm:fillClrLst>
+    <dgm:linClrLst meth="repeat">
+      <a:schemeClr val="accent1"/>
+    </dgm:linClrLst>
+    <dgm:effectClrLst/>
+    <dgm:txLinClrLst/>
+    <dgm:txFillClrLst/>
+    <dgm:txEffectClrLst/>
+  </dgm:styleLbl>
+  <dgm:styleLbl name="node1">
+    <dgm:fillClrLst meth="repeat">
+      <a:schemeClr val="accent1"/>
+    </dgm:fillClrLst>
+    <dgm:linClrLst meth="repeat">
+      <a:schemeClr val="lt1"/>
+    </dgm:linClrLst>
+    <dgm:effectClrLst/>
+    <dgm:txLinClrLst/>
+    <dgm:txFillClrLst/>
+    <dgm:txEffectClrLst/>
+  </dgm:styleLbl>
+  <dgm:styleLbl name="node1NoLn">
+    <dgm:fillClrLst meth="repeat">
+      <a:schemeClr val="accent1"/>
+    </dgm:fillClrLst>
+    <dgm:linClrLst meth="repeat">
+      <a:schemeClr val="lt1">
+        <a:alpha val="0"/>
+      </a:schemeClr>
+    </dgm:linClrLst>
+    <dgm:effectClrLst/>
+    <dgm:txLinClrLst/>
+    <dgm:txFillClrLst/>
+    <dgm:txEffectClrLst/>
+  </dgm:styleLbl>
+  <dgm:styleLbl name="ltNode1NoLn">
+    <dgm:fillClrLst meth="repeat">
+      <a:schemeClr val="accent1">
+        <a:tint val="75000"/>
+      </a:schemeClr>
+    </dgm:fillClrLst>
+    <dgm:linClrLst meth="repeat">
+      <a:schemeClr val="lt1">
+        <a:alpha val="0"/>
+      </a:schemeClr>
+    </dgm:linClrLst>
+    <dgm:effectClrLst/>
+    <dgm:txLinClrLst/>
+    <dgm:txFillClrLst meth="repeat">
+      <a:schemeClr val="dk1"/>
+    </dgm:txFillClrLst>
+    <dgm:txEffectClrLst/>
+  </dgm:styleLbl>
+  <dgm:styleLbl name="lnNode1">
+    <dgm:fillClrLst meth="repeat">
+      <a:schemeClr val="accent1"/>
+    </dgm:fillClrLst>
+    <dgm:linClrLst meth="repeat">
+      <a:schemeClr val="lt1"/>
+    </dgm:linClrLst>
+    <dgm:effectClrLst/>
+    <dgm:txLinClrLst/>
+    <dgm:txFillClrLst/>
+    <dgm:txEffectClrLst/>
+  </dgm:styleLbl>
+  <dgm:styleLbl name="vennNode1">
+    <dgm:fillClrLst meth="repeat">
+      <a:schemeClr val="accent1">
+        <a:alpha val="50000"/>
+      </a:schemeClr>
+    </dgm:fillClrLst>
+    <dgm:linClrLst meth="repeat">
+      <a:schemeClr val="lt1"/>
+    </dgm:linClrLst>
+    <dgm:effectClrLst/>
+    <dgm:txLinClrLst/>
+    <dgm:txFillClrLst/>
+    <dgm:txEffectClrLst/>
+  </dgm:styleLbl>
+  <dgm:styleLbl name="node2">
+    <dgm:fillClrLst meth="repeat">
+      <a:schemeClr val="accent1"/>
+    </dgm:fillClrLst>
+    <dgm:linClrLst meth="repeat">
+      <a:schemeClr val="lt1"/>
+    </dgm:linClrLst>
+    <dgm:effectClrLst/>
+    <dgm:txLinClrLst/>
+    <dgm:txFillClrLst/>
+    <dgm:txEffectClrLst/>
+  </dgm:styleLbl>
+  <dgm:styleLbl name="node2NoLn">
+    <dgm:fillClrLst meth="repeat">
+      <a:schemeClr val="accent1"/>
+    </dgm:fillClrLst>
+    <dgm:linClrLst meth="repeat">
+      <a:schemeClr val="lt1">
+        <a:alpha val="0"/>
+      </a:schemeClr>
+    </dgm:linClrLst>
+    <dgm:effectClrLst/>
+    <dgm:txLinClrLst/>
+    <dgm:txFillClrLst/>
+    <dgm:txEffectClrLst/>
+  </dgm:styleLbl>
+  <dgm:styleLbl name="node3">
+    <dgm:fillClrLst meth="repeat">
+      <a:schemeClr val="accent1"/>
+    </dgm:fillClrLst>
+    <dgm:linClrLst meth="repeat">
+      <a:schemeClr val="lt1"/>
+    </dgm:linClrLst>
+    <dgm:effectClrLst/>
+    <dgm:txLinClrLst/>
+    <dgm:txFillClrLst/>
+    <dgm:txEffectClrLst/>
+  </dgm:styleLbl>
+  <dgm:styleLbl name="node3NoLn">
+    <dgm:fillClrLst meth="repeat">
+      <a:schemeClr val="accent1"/>
+    </dgm:fillClrLst>
+    <dgm:linClrLst meth="repeat">
+      <a:schemeClr val="lt1">
+        <a:alpha val="0"/>
+      </a:schemeClr>
+    </dgm:linClrLst>
+    <dgm:effectClrLst/>
+    <dgm:txLinClrLst/>
+    <dgm:txFillClrLst/>
+    <dgm:txEffectClrLst/>
+  </dgm:styleLbl>
+  <dgm:styleLbl name="node4">
+    <dgm:fillClrLst meth="repeat">
+      <a:schemeClr val="accent1"/>
+    </dgm:fillClrLst>
+    <dgm:linClrLst meth="repeat">
+      <a:schemeClr val="lt1"/>
+    </dgm:linClrLst>
+    <dgm:effectClrLst/>
+    <dgm:txLinClrLst/>
+    <dgm:txFillClrLst/>
+    <dgm:txEffectClrLst/>
+  </dgm:styleLbl>
+  <dgm:styleLbl name="node4NoLn">
+    <dgm:fillClrLst meth="repeat">
+      <a:schemeClr val="accent1"/>
+    </dgm:fillClrLst>
+    <dgm:linClrLst meth="repeat">
+      <a:schemeClr val="lt1">
+        <a:alpha val="0"/>
+      </a:schemeClr>
+    </dgm:linClrLst>
+    <dgm:effectClrLst/>
+    <dgm:txLinClrLst/>
+    <dgm:txFillClrLst/>
+    <dgm:txEffectClrLst/>
+  </dgm:styleLbl>
+  <dgm:styleLbl name="fgImgPlace1">
+    <dgm:fillClrLst meth="repeat">
+      <a:schemeClr val="accent1">
+        <a:tint val="50000"/>
+      </a:schemeClr>
+    </dgm:fillClrLst>
+    <dgm:linClrLst meth="repeat">
+      <a:schemeClr val="lt1"/>
+    </dgm:linClrLst>
+    <dgm:effectClrLst/>
+    <dgm:txLinClrLst/>
+    <dgm:txFillClrLst meth="repeat">
+      <a:schemeClr val="lt1"/>
+    </dgm:txFillClrLst>
+    <dgm:txEffectClrLst/>
+  </dgm:styleLbl>
+  <dgm:styleLbl name="alignImgPlace1">
+    <dgm:fillClrLst meth="repeat">
+      <a:schemeClr val="accent1">
+        <a:tint val="50000"/>
+      </a:schemeClr>
+    </dgm:fillClrLst>
+    <dgm:linClrLst meth="repeat">
+      <a:schemeClr val="lt1"/>
+    </dgm:linClrLst>
+    <dgm:effectClrLst/>
+    <dgm:txLinClrLst/>
+    <dgm:txFillClrLst meth="repeat">
+      <a:schemeClr val="lt1"/>
+    </dgm:txFillClrLst>
+    <dgm:txEffectClrLst/>
+  </dgm:styleLbl>
+  <dgm:styleLbl name="bgImgPlace1">
+    <dgm:fillClrLst meth="repeat">
+      <a:schemeClr val="accent1">
+        <a:tint val="50000"/>
+      </a:schemeClr>
+    </dgm:fillClrLst>
+    <dgm:linClrLst meth="repeat">
+      <a:schemeClr val="lt1"/>
+    </dgm:linClrLst>
+    <dgm:effectClrLst/>
+    <dgm:txLinClrLst/>
+    <dgm:txFillClrLst meth="repeat">
+      <a:schemeClr val="lt1"/>
+    </dgm:txFillClrLst>
+    <dgm:txEffectClrLst/>
+  </dgm:styleLbl>
+  <dgm:styleLbl name="sibTrans2D1">
+    <dgm:fillClrLst meth="repeat">
+      <a:schemeClr val="accent1">
+        <a:tint val="60000"/>
+      </a:schemeClr>
+    </dgm:fillClrLst>
+    <dgm:linClrLst meth="repeat">
+      <a:schemeClr val="accent1">
+        <a:tint val="60000"/>
+      </a:schemeClr>
+    </dgm:linClrLst>
+    <dgm:effectClrLst/>
+    <dgm:txLinClrLst/>
+    <dgm:txFillClrLst/>
+    <dgm:txEffectClrLst/>
+  </dgm:styleLbl>
+  <dgm:styleLbl name="fgSibTrans2D1">
+    <dgm:fillClrLst meth="repeat">
+      <a:schemeClr val="accent1">
+        <a:tint val="60000"/>
+      </a:schemeClr>
+    </dgm:fillClrLst>
+    <dgm:linClrLst meth="repeat">
+      <a:schemeClr val="accent1">
+        <a:tint val="60000"/>
+      </a:schemeClr>
+    </dgm:linClrLst>
+    <dgm:effectClrLst/>
+    <dgm:txLinClrLst/>
+    <dgm:txFillClrLst/>
+    <dgm:txEffectClrLst/>
+  </dgm:styleLbl>
+  <dgm:styleLbl name="bgSibTrans2D1">
+    <dgm:fillClrLst meth="repeat">
+      <a:schemeClr val="accent1">
+        <a:tint val="60000"/>
+      </a:schemeClr>
+    </dgm:fillClrLst>
+    <dgm:linClrLst meth="repeat">
+      <a:schemeClr val="accent1">
+        <a:tint val="60000"/>
+      </a:schemeClr>
+    </dgm:linClrLst>
+    <dgm:effectClrLst/>
+    <dgm:txLinClrLst/>
+    <dgm:txFillClrLst/>
+    <dgm:txEffectClrLst/>
+  </dgm:styleLbl>
+  <dgm:styleLbl name="sibTrans1D1">
+    <dgm:fillClrLst meth="repeat">
+      <a:schemeClr val="accent1"/>
+    </dgm:fillClrLst>
+    <dgm:linClrLst meth="repeat">
+      <a:schemeClr val="accent1"/>
+    </dgm:linClrLst>
+    <dgm:effectClrLst/>
+    <dgm:txLinClrLst/>
+    <dgm:txFillClrLst meth="repeat">
+      <a:schemeClr val="tx1"/>
+    </dgm:txFillClrLst>
+    <dgm:txEffectClrLst/>
+  </dgm:styleLbl>
+  <dgm:styleLbl name="callout">
+    <dgm:fillClrLst meth="repeat">
+      <a:schemeClr val="accent1"/>
+    </dgm:fillClrLst>
+    <dgm:linClrLst meth="repeat">
+      <a:schemeClr val="accent1">
+        <a:tint val="50000"/>
+      </a:schemeClr>
+    </dgm:linClrLst>
+    <dgm:effectClrLst/>
+    <dgm:txLinClrLst/>
+    <dgm:txFillClrLst meth="repeat">
+      <a:schemeClr val="tx1"/>
+    </dgm:txFillClrLst>
+    <dgm:txEffectClrLst/>
+  </dgm:styleLbl>
+  <dgm:styleLbl name="asst0">
+    <dgm:fillClrLst meth="repeat">
+      <a:schemeClr val="accent1"/>
+    </dgm:fillClrLst>
+    <dgm:linClrLst meth="repeat">
+      <a:schemeClr val="lt1"/>
+    </dgm:linClrLst>
+    <dgm:effectClrLst/>
+    <dgm:txLinClrLst/>
+    <dgm:txFillClrLst/>
+    <dgm:txEffectClrLst/>
+  </dgm:styleLbl>
+  <dgm:styleLbl name="asst1">
+    <dgm:fillClrLst meth="repeat">
+      <a:schemeClr val="accent1"/>
+    </dgm:fillClrLst>
+    <dgm:linClrLst meth="repeat">
+      <a:schemeClr val="lt1"/>
+    </dgm:linClrLst>
+    <dgm:effectClrLst/>
+    <dgm:txLinClrLst/>
+    <dgm:txFillClrLst/>
+    <dgm:txEffectClrLst/>
+  </dgm:styleLbl>
+  <dgm:styleLbl name="asst2">
+    <dgm:fillClrLst meth="repeat">
+      <a:schemeClr val="accent1"/>
+    </dgm:fillClrLst>
+    <dgm:linClrLst meth="repeat">
+      <a:schemeClr val="lt1"/>
+    </dgm:linClrLst>
+    <dgm:effectClrLst/>
+    <dgm:txLinClrLst/>
+    <dgm:txFillClrLst/>
+    <dgm:txEffectClrLst/>
+  </dgm:styleLbl>
+  <dgm:styleLbl name="asst3">
+    <dgm:fillClrLst meth="repeat">
+      <a:schemeClr val="accent1"/>
+    </dgm:fillClrLst>
+    <dgm:linClrLst meth="repeat">
+      <a:schemeClr val="lt1"/>
+    </dgm:linClrLst>
+    <dgm:effectClrLst/>
+    <dgm:txLinClrLst/>
+    <dgm:txFillClrLst/>
+    <dgm:txEffectClrLst/>
+  </dgm:styleLbl>
+  <dgm:styleLbl name="asst4">
+    <dgm:fillClrLst meth="repeat">
+      <a:schemeClr val="accent1"/>
+    </dgm:fillClrLst>
+    <dgm:linClrLst meth="repeat">
+      <a:schemeClr val="lt1"/>
+    </dgm:linClrLst>
+    <dgm:effectClrLst/>
+    <dgm:txLinClrLst/>
+    <dgm:txFillClrLst/>
+    <dgm:txEffectClrLst/>
+  </dgm:styleLbl>
+  <dgm:styleLbl name="parChTrans2D1">
+    <dgm:fillClrLst meth="repeat">
+      <a:schemeClr val="accent1">
+        <a:tint val="60000"/>
+      </a:schemeClr>
+    </dgm:fillClrLst>
+    <dgm:linClrLst meth="repeat">
+      <a:schemeClr val="accent1">
+        <a:tint val="60000"/>
+      </a:schemeClr>
+    </dgm:linClrLst>
+    <dgm:effectClrLst/>
+    <dgm:txLinClrLst/>
+    <dgm:txFillClrLst meth="repeat">
+      <a:schemeClr val="lt1"/>
+    </dgm:txFillClrLst>
+    <dgm:txEffectClrLst/>
+  </dgm:styleLbl>
+  <dgm:styleLbl name="parChTrans2D2">
+    <dgm:fillClrLst meth="repeat">
+      <a:schemeClr val="accent1"/>
+    </dgm:fillClrLst>
+    <dgm:linClrLst meth="repeat">
+      <a:schemeClr val="accent1"/>
+    </dgm:linClrLst>
+    <dgm:effectClrLst/>
+    <dgm:txLinClrLst/>
+    <dgm:txFillClrLst meth="repeat">
+      <a:schemeClr val="lt1"/>
+    </dgm:txFillClrLst>
+    <dgm:txEffectClrLst/>
+  </dgm:styleLbl>
+  <dgm:styleLbl name="parChTrans2D3">
+    <dgm:fillClrLst meth="repeat">
+      <a:schemeClr val="accent1"/>
+    </dgm:fillClrLst>
+    <dgm:linClrLst meth="repeat">
+      <a:schemeClr val="accent1"/>
+    </dgm:linClrLst>
+    <dgm:effectClrLst/>
+    <dgm:txLinClrLst/>
+    <dgm:txFillClrLst meth="repeat">
+      <a:schemeClr val="lt1"/>
+    </dgm:txFillClrLst>
+    <dgm:txEffectClrLst/>
+  </dgm:styleLbl>
+  <dgm:styleLbl name="parChTrans2D4">
+    <dgm:fillClrLst meth="repeat">
+      <a:schemeClr val="accent1"/>
+    </dgm:fillClrLst>
+    <dgm:linClrLst meth="repeat">
+      <a:schemeClr val="accent1"/>
+    </dgm:linClrLst>
+    <dgm:effectClrLst/>
+    <dgm:txLinClrLst/>
+    <dgm:txFillClrLst meth="repeat">
+      <a:schemeClr val="lt1"/>
+    </dgm:txFillClrLst>
+    <dgm:txEffectClrLst/>
+  </dgm:styleLbl>
+  <dgm:styleLbl name="parChTrans1D1">
+    <dgm:fillClrLst meth="repeat">
+      <a:schemeClr val="accent1"/>
+    </dgm:fillClrLst>
+    <dgm:linClrLst meth="repeat">
+      <a:schemeClr val="accent1">
+        <a:shade val="60000"/>
+      </a:schemeClr>
+    </dgm:linClrLst>
+    <dgm:effectClrLst/>
+    <dgm:txLinClrLst/>
+    <dgm:txFillClrLst meth="repeat">
+      <a:schemeClr val="tx1"/>
+    </dgm:txFillClrLst>
+    <dgm:txEffectClrLst/>
+  </dgm:styleLbl>
+  <dgm:styleLbl name="parChTrans1D2">
+    <dgm:fillClrLst meth="repeat">
+      <a:schemeClr val="accent1"/>
+    </dgm:fillClrLst>
+    <dgm:linClrLst meth="repeat">
+      <a:schemeClr val="accent1">
+        <a:shade val="60000"/>
+      </a:schemeClr>
+    </dgm:linClrLst>
+    <dgm:effectClrLst/>
+    <dgm:txLinClrLst/>
+    <dgm:txFillClrLst meth="repeat">
+      <a:schemeClr val="tx1"/>
+    </dgm:txFillClrLst>
+    <dgm:txEffectClrLst/>
+  </dgm:styleLbl>
+  <dgm:styleLbl name="parChTrans1D3">
+    <dgm:fillClrLst meth="repeat">
+      <a:schemeClr val="accent1"/>
+    </dgm:fillClrLst>
+    <dgm:linClrLst meth="repeat">
+      <a:schemeClr val="accent1">
+        <a:shade val="80000"/>
+      </a:schemeClr>
+    </dgm:linClrLst>
+    <dgm:effectClrLst/>
+    <dgm:txLinClrLst/>
+    <dgm:txFillClrLst meth="repeat">
+      <a:schemeClr val="tx1"/>
+    </dgm:txFillClrLst>
+    <dgm:txEffectClrLst/>
+  </dgm:styleLbl>
+  <dgm:styleLbl name="parChTrans1D4">
+    <dgm:fillClrLst meth="repeat">
+      <a:schemeClr val="accent1"/>
+    </dgm:fillClrLst>
+    <dgm:linClrLst meth="repeat">
+      <a:schemeClr val="accent1">
+        <a:shade val="80000"/>
+      </a:schemeClr>
+    </dgm:linClrLst>
+    <dgm:effectClrLst/>
+    <dgm:txLinClrLst/>
+    <dgm:txFillClrLst meth="repeat">
+      <a:schemeClr val="tx1"/>
+    </dgm:txFillClrLst>
+    <dgm:txEffectClrLst/>
+  </dgm:styleLbl>
+  <dgm:styleLbl name="fgAcc1">
+    <dgm:fillClrLst meth="repeat">
+      <a:schemeClr val="lt1">
+        <a:alpha val="90000"/>
+      </a:schemeClr>
+    </dgm:fillClrLst>
+    <dgm:linClrLst meth="repeat">
+      <a:schemeClr val="accent1"/>
+    </dgm:linClrLst>
+    <dgm:effectClrLst/>
+    <dgm:txLinClrLst/>
+    <dgm:txFillClrLst meth="repeat">
+      <a:schemeClr val="dk1"/>
+    </dgm:txFillClrLst>
+    <dgm:txEffectClrLst/>
+  </dgm:styleLbl>
+  <dgm:styleLbl name="conFgAcc1">
+    <dgm:fillClrLst meth="repeat">
+      <a:schemeClr val="lt1">
+        <a:alpha val="90000"/>
+      </a:schemeClr>
+    </dgm:fillClrLst>
+    <dgm:linClrLst meth="repeat">
+      <a:schemeClr val="accent1"/>
+    </dgm:linClrLst>
+    <dgm:effectClrLst/>
+    <dgm:txLinClrLst/>
+    <dgm:txFillClrLst meth="repeat">
+      <a:schemeClr val="dk1"/>
+    </dgm:txFillClrLst>
+    <dgm:txEffectClrLst/>
+  </dgm:styleLbl>
+  <dgm:styleLbl name="alignAcc1">
+    <dgm:fillClrLst meth="repeat">
+      <a:schemeClr val="lt1">
+        <a:alpha val="90000"/>
+      </a:schemeClr>
+    </dgm:fillClrLst>
+    <dgm:linClrLst meth="repeat">
+      <a:schemeClr val="accent1"/>
+    </dgm:linClrLst>
+    <dgm:effectClrLst/>
+    <dgm:txLinClrLst/>
+    <dgm:txFillClrLst meth="repeat">
+      <a:schemeClr val="dk1"/>
+    </dgm:txFillClrLst>
+    <dgm:txEffectClrLst/>
+  </dgm:styleLbl>
+  <dgm:styleLbl name="trAlignAcc1">
+    <dgm:fillClrLst meth="repeat">
+      <a:schemeClr val="lt1">
+        <a:alpha val="40000"/>
+      </a:schemeClr>
+    </dgm:fillClrLst>
+    <dgm:linClrLst meth="repeat">
+      <a:schemeClr val="accent1"/>
+    </dgm:linClrLst>
+    <dgm:effectClrLst/>
+    <dgm:txLinClrLst/>
+    <dgm:txFillClrLst meth="repeat">
+      <a:schemeClr val="dk1"/>
+    </dgm:txFillClrLst>
+    <dgm:txEffectClrLst/>
+  </dgm:styleLbl>
+  <dgm:styleLbl name="bgAcc1">
+    <dgm:fillClrLst meth="repeat">
+      <a:schemeClr val="lt1">
+        <a:alpha val="90000"/>
+      </a:schemeClr>
+    </dgm:fillClrLst>
+    <dgm:linClrLst meth="repeat">
+      <a:schemeClr val="accent1"/>
+    </dgm:linClrLst>
+    <dgm:effectClrLst/>
+    <dgm:txLinClrLst/>
+    <dgm:txFillClrLst meth="repeat">
+      <a:schemeClr val="dk1"/>
+    </dgm:txFillClrLst>
+    <dgm:txEffectClrLst/>
+  </dgm:styleLbl>
+  <dgm:styleLbl name="solidFgAcc1">
+    <dgm:fillClrLst meth="repeat">
+      <a:schemeClr val="lt1"/>
+    </dgm:fillClrLst>
+    <dgm:linClrLst meth="repeat">
+      <a:schemeClr val="accent1"/>
+    </dgm:linClrLst>
+    <dgm:effectClrLst/>
+    <dgm:txLinClrLst/>
+    <dgm:txFillClrLst meth="repeat">
+      <a:schemeClr val="dk1"/>
+    </dgm:txFillClrLst>
+    <dgm:txEffectClrLst/>
+  </dgm:styleLbl>
+  <dgm:styleLbl name="solidAlignAcc1">
+    <dgm:fillClrLst meth="repeat">
+      <a:schemeClr val="lt1"/>
+    </dgm:fillClrLst>
+    <dgm:linClrLst meth="repeat">
+      <a:schemeClr val="accent1"/>
+    </dgm:linClrLst>
+    <dgm:effectClrLst/>
+    <dgm:txLinClrLst/>
+    <dgm:txFillClrLst meth="repeat">
+      <a:schemeClr val="dk1"/>
+    </dgm:txFillClrLst>
+    <dgm:txEffectClrLst/>
+  </dgm:styleLbl>
+  <dgm:styleLbl name="solidBgAcc1">
+    <dgm:fillClrLst meth="repeat">
+      <a:schemeClr val="lt1"/>
+    </dgm:fillClrLst>
+    <dgm:linClrLst meth="repeat">
+      <a:schemeClr val="accent1"/>
+    </dgm:linClrLst>
+    <dgm:effectClrLst/>
+    <dgm:txLinClrLst/>
+    <dgm:txFillClrLst meth="repeat">
+      <a:schemeClr val="dk1"/>
+    </dgm:txFillClrLst>
+    <dgm:txEffectClrLst/>
+  </dgm:styleLbl>
+  <dgm:styleLbl name="fgAccFollowNode1">
+    <dgm:fillClrLst meth="repeat">
+      <a:schemeClr val="accent1">
+        <a:alpha val="90000"/>
+        <a:tint val="40000"/>
+      </a:schemeClr>
+    </dgm:fillClrLst>
+    <dgm:linClrLst meth="repeat">
+      <a:schemeClr val="accent1">
+        <a:alpha val="90000"/>
+        <a:tint val="40000"/>
+      </a:schemeClr>
+    </dgm:linClrLst>
+    <dgm:effectClrLst/>
+    <dgm:txLinClrLst/>
+    <dgm:txFillClrLst meth="repeat">
+      <a:schemeClr val="dk1"/>
+    </dgm:txFillClrLst>
+    <dgm:txEffectClrLst/>
+  </dgm:styleLbl>
+  <dgm:styleLbl name="alignAccFollowNode1">
+    <dgm:fillClrLst meth="repeat">
+      <a:schemeClr val="accent1">
+        <a:alpha val="90000"/>
+        <a:tint val="40000"/>
+      </a:schemeClr>
+    </dgm:fillClrLst>
+    <dgm:linClrLst meth="repeat">
+      <a:schemeClr val="accent1">
+        <a:alpha val="90000"/>
+        <a:tint val="40000"/>
+      </a:schemeClr>
+    </dgm:linClrLst>
+    <dgm:effectClrLst/>
+    <dgm:txLinClrLst/>
+    <dgm:txFillClrLst meth="repeat">
+      <a:schemeClr val="dk1"/>
+    </dgm:txFillClrLst>
+    <dgm:txEffectClrLst/>
+  </dgm:styleLbl>
+  <dgm:styleLbl name="bgAccFollowNode1">
+    <dgm:fillClrLst meth="repeat">
+      <a:schemeClr val="accent1">
+        <a:alpha val="90000"/>
+        <a:tint val="40000"/>
+      </a:schemeClr>
+    </dgm:fillClrLst>
+    <dgm:linClrLst meth="repeat">
+      <a:schemeClr val="accent1">
+        <a:alpha val="90000"/>
+        <a:tint val="40000"/>
+      </a:schemeClr>
+    </dgm:linClrLst>
+    <dgm:effectClrLst/>
+    <dgm:txLinClrLst/>
+    <dgm:txFillClrLst meth="repeat">
+      <a:schemeClr val="dk1"/>
+    </dgm:txFillClrLst>
+    <dgm:txEffectClrLst/>
+  </dgm:styleLbl>
+  <dgm:styleLbl name="fgAcc0">
+    <dgm:fillClrLst meth="repeat">
+      <a:schemeClr val="lt1">
+        <a:alpha val="90000"/>
+      </a:schemeClr>
+    </dgm:fillClrLst>
+    <dgm:linClrLst meth="repeat">
+      <a:schemeClr val="accent1"/>
+    </dgm:linClrLst>
+    <dgm:effectClrLst/>
+    <dgm:txLinClrLst/>
+    <dgm:txFillClrLst meth="repeat">
+      <a:schemeClr val="dk1"/>
+    </dgm:txFillClrLst>
+    <dgm:txEffectClrLst/>
+  </dgm:styleLbl>
+  <dgm:styleLbl name="fgAcc2">
+    <dgm:fillClrLst meth="repeat">
+      <a:schemeClr val="lt1">
+        <a:alpha val="90000"/>
+      </a:schemeClr>
+    </dgm:fillClrLst>
+    <dgm:linClrLst meth="repeat">
+      <a:schemeClr val="accent1"/>
+    </dgm:linClrLst>
+    <dgm:effectClrLst/>
+    <dgm:txLinClrLst/>
+    <dgm:txFillClrLst meth="repeat">
+      <a:schemeClr val="dk1"/>
+    </dgm:txFillClrLst>
+    <dgm:txEffectClrLst/>
+  </dgm:styleLbl>
+  <dgm:styleLbl name="fgAcc3">
+    <dgm:fillClrLst meth="repeat">
+      <a:schemeClr val="lt1">
+        <a:alpha val="90000"/>
+      </a:schemeClr>
+    </dgm:fillClrLst>
+    <dgm:linClrLst meth="repeat">
+      <a:schemeClr val="accent1"/>
+    </dgm:linClrLst>
+    <dgm:effectClrLst/>
+    <dgm:txLinClrLst/>
+    <dgm:txFillClrLst meth="repeat">
+      <a:schemeClr val="dk1"/>
+    </dgm:txFillClrLst>
+    <dgm:txEffectClrLst/>
+  </dgm:styleLbl>
+  <dgm:styleLbl name="fgAcc4">
+    <dgm:fillClrLst meth="repeat">
+      <a:schemeClr val="lt1">
+        <a:alpha val="90000"/>
+      </a:schemeClr>
+    </dgm:fillClrLst>
+    <dgm:linClrLst meth="repeat">
+      <a:schemeClr val="accent1"/>
+    </dgm:linClrLst>
+    <dgm:effectClrLst/>
+    <dgm:txLinClrLst/>
+    <dgm:txFillClrLst meth="repeat">
+      <a:schemeClr val="dk1"/>
+    </dgm:txFillClrLst>
+    <dgm:txEffectClrLst/>
+  </dgm:styleLbl>
+  <dgm:styleLbl name="bgShp">
+    <dgm:fillClrLst meth="repeat">
+      <a:schemeClr val="accent1">
+        <a:tint val="40000"/>
+      </a:schemeClr>
+    </dgm:fillClrLst>
+    <dgm:linClrLst meth="repeat">
+      <a:schemeClr val="accent1"/>
+    </dgm:linClrLst>
+    <dgm:effectClrLst/>
+    <dgm:txLinClrLst/>
+    <dgm:txFillClrLst meth="repeat">
+      <a:schemeClr val="dk1"/>
+    </dgm:txFillClrLst>
+    <dgm:txEffectClrLst/>
+  </dgm:styleLbl>
+  <dgm:styleLbl name="dkBgShp">
+    <dgm:fillClrLst meth="repeat">
+      <a:schemeClr val="accent1">
+        <a:shade val="80000"/>
+      </a:schemeClr>
+    </dgm:fillClrLst>
+    <dgm:linClrLst meth="repeat">
+      <a:schemeClr val="accent1"/>
+    </dgm:linClrLst>
+    <dgm:effectClrLst/>
+    <dgm:txLinClrLst/>
+    <dgm:txFillClrLst meth="repeat">
+      <a:schemeClr val="lt1"/>
+    </dgm:txFillClrLst>
+    <dgm:txEffectClrLst/>
+  </dgm:styleLbl>
+  <dgm:styleLbl name="trBgShp">
+    <dgm:fillClrLst meth="repeat">
+      <a:schemeClr val="accent1">
+        <a:tint val="50000"/>
+        <a:alpha val="40000"/>
+      </a:schemeClr>
+    </dgm:fillClrLst>
+    <dgm:linClrLst meth="repeat">
+      <a:schemeClr val="accent1"/>
+    </dgm:linClrLst>
+    <dgm:effectClrLst/>
+    <dgm:txLinClrLst/>
+    <dgm:txFillClrLst meth="repeat">
+      <a:schemeClr val="lt1"/>
+    </dgm:txFillClrLst>
+    <dgm:txEffectClrLst/>
+  </dgm:styleLbl>
+  <dgm:styleLbl name="fgShp">
+    <dgm:fillClrLst meth="repeat">
+      <a:schemeClr val="accent1">
+        <a:tint val="60000"/>
+      </a:schemeClr>
+    </dgm:fillClrLst>
+    <dgm:linClrLst meth="repeat">
+      <a:schemeClr val="lt1"/>
+    </dgm:linClrLst>
+    <dgm:effectClrLst/>
+    <dgm:txLinClrLst/>
+    <dgm:txFillClrLst meth="repeat">
+      <a:schemeClr val="dk1"/>
+    </dgm:txFillClrLst>
+    <dgm:txEffectClrLst/>
+  </dgm:styleLbl>
+  <dgm:styleLbl name="revTx">
+    <dgm:fillClrLst meth="repeat">
+      <a:schemeClr val="lt1">
+        <a:alpha val="0"/>
+      </a:schemeClr>
+    </dgm:fillClrLst>
+    <dgm:linClrLst meth="repeat">
+      <a:schemeClr val="dk1">
+        <a:alpha val="0"/>
+      </a:schemeClr>
+    </dgm:linClrLst>
+    <dgm:effectClrLst/>
+    <dgm:txLinClrLst/>
+    <dgm:txFillClrLst meth="repeat">
+      <a:schemeClr val="tx1"/>
+    </dgm:txFillClrLst>
+    <dgm:txEffectClrLst/>
+  </dgm:styleLbl>
+  <dgm:styleLbl name="revTxLt">
+    <dgm:fillClrLst meth="repeat">
+      <a:schemeClr val="lt1">
+        <a:alpha val="0"/>
+      </a:schemeClr>
+    </dgm:fillClrLst>
+    <dgm:linClrLst meth="repeat">
+      <a:schemeClr val="dk1">
+        <a:alpha val="0"/>
+      </a:schemeClr>
+    </dgm:linClrLst>
+    <dgm:effectClrLst/>
+    <dgm:txLinClrLst/>
+    <dgm:txFillClrLst/>
     <dgm:txEffectClrLst/>
   </dgm:styleLbl>
 </dgm:colorsDef>
@@ -6659,25 +7518,16 @@
             </a:lnSpc>
           </a:pPr>
           <a:r>
-            <a:rPr lang="en-GB" dirty="0">
-              <a:latin typeface="+mn-lt"/>
-              <a:ea typeface="Yu Gothic UI Semilight" panose="020B0400000000000000" pitchFamily="34" charset="-128"/>
-            </a:rPr>
+            <a:rPr lang="en-GB" b="0" i="0" dirty="0"/>
             <a:t>The </a:t>
           </a:r>
           <a:r>
-            <a:rPr lang="en-GB" b="1" dirty="0">
-              <a:latin typeface="+mn-lt"/>
-              <a:ea typeface="Yu Gothic UI Semilight" panose="020B0400000000000000" pitchFamily="34" charset="-128"/>
-            </a:rPr>
+            <a:rPr lang="en-GB" b="1" i="0" dirty="0"/>
             <a:t>smokes</a:t>
           </a:r>
           <a:r>
-            <a:rPr lang="en-GB" dirty="0">
-              <a:latin typeface="+mn-lt"/>
-              <a:ea typeface="Yu Gothic UI Semilight" panose="020B0400000000000000" pitchFamily="34" charset="-128"/>
-            </a:rPr>
-            <a:t> column contains several categories aside from no smoker status. We will convert these into a binary label: users who answered no will be labelled as non-smokers, while all other responses will be labelled as smokers. This will create a clearer distinction for the classification.</a:t>
+            <a:rPr lang="en-GB" b="0" i="0" dirty="0"/>
+            <a:t> column contained several categories aside from no smoker status. We converted these into a binary label: users who answered no were labelled as non-smokers, while all other responses were labelled as smokers. </a:t>
           </a:r>
           <a:endParaRPr lang="en-US" dirty="0">
             <a:latin typeface="+mn-lt"/>
@@ -6763,25 +7613,8 @@
             </a:lnSpc>
           </a:pPr>
           <a:r>
-            <a:rPr lang="en-GB" b="0" i="0" dirty="0">
-              <a:latin typeface="+mn-lt"/>
-              <a:ea typeface="Yu Gothic UI Semilight" panose="020B0400000000000000" pitchFamily="34" charset="-128"/>
-            </a:rPr>
-            <a:t>We will split the data into features (X) and labels (Y), before using a </a:t>
-          </a:r>
-          <a:r>
-            <a:rPr lang="en-GB" b="0" i="0" dirty="0" err="1">
-              <a:latin typeface="+mn-lt"/>
-              <a:ea typeface="Yu Gothic UI Semilight" panose="020B0400000000000000" pitchFamily="34" charset="-128"/>
-            </a:rPr>
-            <a:t>train_test_split</a:t>
-          </a:r>
-          <a:r>
-            <a:rPr lang="en-GB" b="0" i="0" dirty="0">
-              <a:latin typeface="+mn-lt"/>
-              <a:ea typeface="Yu Gothic UI Semilight" panose="020B0400000000000000" pitchFamily="34" charset="-128"/>
-            </a:rPr>
-            <a:t> to split the clean dataset into training and validation sets. This is done before encoding and standardising to prevent data leakage.</a:t>
+            <a:rPr lang="en-GB" b="0" i="0" dirty="0"/>
+            <a:t>We split the data into features (X) and labels (Y), then used a train-test split to divide the clean dataset into training and validation sets. This was done before encoding and standardising to prevent data leakage between sets.</a:t>
           </a:r>
           <a:endParaRPr lang="en-US" dirty="0">
             <a:latin typeface="+mn-lt"/>
@@ -6867,8 +7700,8 @@
             </a:lnSpc>
           </a:pPr>
           <a:r>
-            <a:rPr lang="en-GB" dirty="0"/>
-            <a:t>For our categorical features, we will be using one-hot encoding to convert the features into a format that the machine learning algorithms can interpret.</a:t>
+            <a:rPr lang="en-GB" b="0" i="0" dirty="0"/>
+            <a:t>For our categorical features, we used one-hot encoding to convert the categorical features into a numeric format that the machine learning algorithms could interpret.</a:t>
           </a:r>
           <a:endParaRPr lang="en-US" dirty="0"/>
         </a:p>
@@ -6951,10 +7784,10 @@
             </a:lnSpc>
           </a:pPr>
           <a:r>
-            <a:rPr lang="en-GB" b="0" i="0"/>
-            <a:t>Because logistic regression models are sensitive to feature scale, we will create a standardised set of feature data. This helps the model learn more effectively and will improve convergence and performance.</a:t>
+            <a:rPr lang="en-GB" b="0" i="0" dirty="0"/>
+            <a:t>Because logistic regression models are sensitive to feature scale, we created a standardised set of feature data. This helped our logistic regression model learn more effectively and improved its performance.</a:t>
           </a:r>
-          <a:endParaRPr lang="en-US"/>
+          <a:endParaRPr lang="en-US" dirty="0"/>
         </a:p>
       </dgm:t>
     </dgm:pt>
@@ -7062,14 +7895,12 @@
         <a:blipFill>
           <a:blip xmlns:r="http://schemas.openxmlformats.org/officeDocument/2006/relationships">
             <a:extLst>
-              <a:ext uri="{28A0092B-C50C-407E-A947-70E740481C1C}">
-                <a14:useLocalDpi xmlns:a14="http://schemas.microsoft.com/office/drawing/2010/main" val="0"/>
-              </a:ext>
               <a:ext uri="{96DAC541-7B7A-43D3-8B79-37D633B846F1}">
                 <asvg:svgBlip xmlns:asvg="http://schemas.microsoft.com/office/drawing/2016/SVG/main" r:embed="rId2"/>
               </a:ext>
             </a:extLst>
           </a:blip>
+          <a:srcRect/>
           <a:stretch>
             <a:fillRect/>
           </a:stretch>
@@ -7080,7 +7911,7 @@
       </dgm:spPr>
       <dgm:extLst>
         <a:ext uri="{E40237B7-FDA0-4F09-8148-C483321AD2D9}">
-          <dgm14:cNvPr xmlns:dgm14="http://schemas.microsoft.com/office/drawing/2010/diagram" id="0" name="" descr="Train"/>
+          <dgm14:cNvPr xmlns:dgm14="http://schemas.microsoft.com/office/drawing/2010/diagram" id="0" name="" descr="Decision chart with solid fill"/>
         </a:ext>
       </dgm:extLst>
     </dgm:pt>
@@ -7175,19 +8006,17 @@
       <dgm:spPr/>
     </dgm:pt>
     <dgm:pt modelId="{F79F01F7-0898-4489-A103-3CFBAD58B283}" type="pres">
-      <dgm:prSet presAssocID="{6006ED6E-EF26-4773-8249-3C268B49A4F3}" presName="iconRect" presStyleLbl="node1" presStyleIdx="3" presStyleCnt="4"/>
+      <dgm:prSet presAssocID="{6006ED6E-EF26-4773-8249-3C268B49A4F3}" presName="iconRect" presStyleLbl="node1" presStyleIdx="3" presStyleCnt="4" custLinFactNeighborY="-2454"/>
       <dgm:spPr>
         <a:blipFill>
           <a:blip xmlns:r="http://schemas.openxmlformats.org/officeDocument/2006/relationships">
             <a:extLst>
-              <a:ext uri="{28A0092B-C50C-407E-A947-70E740481C1C}">
-                <a14:useLocalDpi xmlns:a14="http://schemas.microsoft.com/office/drawing/2010/main" val="0"/>
-              </a:ext>
               <a:ext uri="{96DAC541-7B7A-43D3-8B79-37D633B846F1}">
                 <asvg:svgBlip xmlns:asvg="http://schemas.microsoft.com/office/drawing/2016/SVG/main" r:embed="rId4"/>
               </a:ext>
             </a:extLst>
           </a:blip>
+          <a:srcRect/>
           <a:stretch>
             <a:fillRect/>
           </a:stretch>
@@ -7198,7 +8027,7 @@
       </dgm:spPr>
       <dgm:extLst>
         <a:ext uri="{E40237B7-FDA0-4F09-8148-C483321AD2D9}">
-          <dgm14:cNvPr xmlns:dgm14="http://schemas.microsoft.com/office/drawing/2010/diagram" id="0" name="" descr="Flowchart"/>
+          <dgm14:cNvPr xmlns:dgm14="http://schemas.microsoft.com/office/drawing/2010/diagram" id="0" name="" descr="Network with solid fill"/>
         </a:ext>
       </dgm:extLst>
     </dgm:pt>
@@ -7312,7 +8141,7 @@
               <a:ea typeface="+mn-ea"/>
               <a:cs typeface="+mn-cs"/>
             </a:rPr>
-            <a:t>Market Research</a:t>
+            <a:t>Binomial Logistic regression</a:t>
           </a:r>
         </a:p>
       </dgm:t>
@@ -7375,7 +8204,29 @@
               <a:ea typeface="+mn-ea"/>
               <a:cs typeface="+mn-cs"/>
             </a:rPr>
-            <a:t>User Testing</a:t>
+            <a:t>K-nearest </a:t>
+          </a:r>
+          <a:r>
+            <a:rPr lang="en-US" sz="1600" b="0" i="0" kern="1200" cap="all" spc="300" baseline="0" dirty="0" err="1">
+              <a:solidFill>
+                <a:prstClr val="black"/>
+              </a:solidFill>
+              <a:latin typeface="Yu Gothic UI Semilight" panose="020B0400000000000000" pitchFamily="34" charset="-128"/>
+              <a:ea typeface="+mn-ea"/>
+              <a:cs typeface="+mn-cs"/>
+            </a:rPr>
+            <a:t>neigbours</a:t>
+          </a:r>
+          <a:r>
+            <a:rPr lang="en-US" sz="1600" b="0" i="0" kern="1200" cap="all" spc="300" baseline="0" dirty="0">
+              <a:solidFill>
+                <a:prstClr val="black"/>
+              </a:solidFill>
+              <a:latin typeface="Yu Gothic UI Semilight" panose="020B0400000000000000" pitchFamily="34" charset="-128"/>
+              <a:ea typeface="+mn-ea"/>
+              <a:cs typeface="+mn-cs"/>
+            </a:rPr>
+            <a:t> classifier</a:t>
           </a:r>
         </a:p>
       </dgm:t>
@@ -7410,120 +8261,6 @@
         </a:p>
       </dgm:t>
     </dgm:pt>
-    <dgm:pt modelId="{01FCF63A-9A53-4641-925C-35AB10312164}">
-      <dgm:prSet phldrT="[Text]" custT="1"/>
-      <dgm:spPr/>
-      <dgm:t>
-        <a:bodyPr anchor="ctr"/>
-        <a:lstStyle/>
-        <a:p>
-          <a:pPr marL="0" lvl="0" indent="0" algn="l" defTabSz="711200">
-            <a:lnSpc>
-              <a:spcPct val="90000"/>
-            </a:lnSpc>
-            <a:spcBef>
-              <a:spcPct val="0"/>
-            </a:spcBef>
-            <a:spcAft>
-              <a:spcPct val="35000"/>
-            </a:spcAft>
-            <a:buNone/>
-          </a:pPr>
-          <a:r>
-            <a:rPr lang="en-US" sz="1600" b="0" i="0" kern="1200" cap="all" spc="300" baseline="0" dirty="0">
-              <a:solidFill>
-                <a:prstClr val="black"/>
-              </a:solidFill>
-              <a:latin typeface="Yu Gothic UI Semilight" panose="020B0400000000000000" pitchFamily="34" charset="-128"/>
-              <a:ea typeface="+mn-ea"/>
-              <a:cs typeface="+mn-cs"/>
-            </a:rPr>
-            <a:t>Product Launch</a:t>
-          </a:r>
-        </a:p>
-      </dgm:t>
-    </dgm:pt>
-    <dgm:pt modelId="{50233F51-F48D-4039-B4C4-FDE607161996}" type="parTrans" cxnId="{0B2CF146-F6F1-4A46-B0F9-EFBDA54F8880}">
-      <dgm:prSet/>
-      <dgm:spPr/>
-      <dgm:t>
-        <a:bodyPr/>
-        <a:lstStyle/>
-        <a:p>
-          <a:endParaRPr lang="en-US" sz="1400">
-            <a:solidFill>
-              <a:schemeClr val="accent3"/>
-            </a:solidFill>
-          </a:endParaRPr>
-        </a:p>
-      </dgm:t>
-    </dgm:pt>
-    <dgm:pt modelId="{47AD5E5A-539A-4690-BE35-128ECD2C6096}" type="sibTrans" cxnId="{0B2CF146-F6F1-4A46-B0F9-EFBDA54F8880}">
-      <dgm:prSet/>
-      <dgm:spPr/>
-      <dgm:t>
-        <a:bodyPr/>
-        <a:lstStyle/>
-        <a:p>
-          <a:endParaRPr lang="en-US" sz="1400">
-            <a:solidFill>
-              <a:schemeClr val="accent3"/>
-            </a:solidFill>
-          </a:endParaRPr>
-        </a:p>
-      </dgm:t>
-    </dgm:pt>
-    <dgm:pt modelId="{19F861D7-06D0-4475-8396-2F5BA32F3667}">
-      <dgm:prSet phldrT="[Text]" custT="1"/>
-      <dgm:spPr/>
-      <dgm:t>
-        <a:bodyPr anchor="ctr"/>
-        <a:lstStyle/>
-        <a:p>
-          <a:r>
-            <a:rPr lang="en-US" sz="1600" b="0" i="0" kern="1200" cap="all" spc="300" baseline="0" dirty="0">
-              <a:solidFill>
-                <a:prstClr val="black"/>
-              </a:solidFill>
-              <a:latin typeface="Yu Gothic UI Semilight" panose="020B0400000000000000" pitchFamily="34" charset="-128"/>
-              <a:ea typeface="+mn-ea"/>
-              <a:cs typeface="+mn-cs"/>
-            </a:rPr>
-            <a:t>Product Development</a:t>
-          </a:r>
-        </a:p>
-      </dgm:t>
-    </dgm:pt>
-    <dgm:pt modelId="{688591F3-C9FA-4E02-ACDA-6F3849A6023D}" type="parTrans" cxnId="{1BBF4133-48CE-4EF2-B1A9-2D15BDAD32DA}">
-      <dgm:prSet/>
-      <dgm:spPr/>
-      <dgm:t>
-        <a:bodyPr/>
-        <a:lstStyle/>
-        <a:p>
-          <a:endParaRPr lang="en-US" sz="1400">
-            <a:solidFill>
-              <a:schemeClr val="accent3"/>
-            </a:solidFill>
-          </a:endParaRPr>
-        </a:p>
-      </dgm:t>
-    </dgm:pt>
-    <dgm:pt modelId="{E600A78F-D810-48FA-BA62-69BAA380AFC0}" type="sibTrans" cxnId="{1BBF4133-48CE-4EF2-B1A9-2D15BDAD32DA}">
-      <dgm:prSet/>
-      <dgm:spPr/>
-      <dgm:t>
-        <a:bodyPr/>
-        <a:lstStyle/>
-        <a:p>
-          <a:endParaRPr lang="en-US" sz="1400">
-            <a:solidFill>
-              <a:schemeClr val="accent3"/>
-            </a:solidFill>
-          </a:endParaRPr>
-        </a:p>
-      </dgm:t>
-    </dgm:pt>
     <dgm:pt modelId="{D005F7E6-D3D7-4736-A565-5597C92EEA6E}">
       <dgm:prSet phldrT="[Text]" custT="1"/>
       <dgm:spPr/>
@@ -7538,7 +8275,7 @@
               </a:solidFill>
               <a:latin typeface="+mj-lt"/>
             </a:rPr>
-            <a:t>Q1</a:t>
+            <a:t>M1</a:t>
           </a:r>
         </a:p>
       </dgm:t>
@@ -7587,7 +8324,7 @@
               </a:solidFill>
               <a:latin typeface="+mj-lt"/>
             </a:rPr>
-            <a:t>Q2</a:t>
+            <a:t>M2</a:t>
           </a:r>
         </a:p>
       </dgm:t>
@@ -7636,7 +8373,7 @@
               </a:solidFill>
               <a:latin typeface="+mj-lt"/>
             </a:rPr>
-            <a:t>Q3</a:t>
+            <a:t>M3</a:t>
           </a:r>
         </a:p>
       </dgm:t>
@@ -7671,7 +8408,7 @@
         </a:p>
       </dgm:t>
     </dgm:pt>
-    <dgm:pt modelId="{2EB0FCD1-A97B-454C-A3B5-CC24E538FD7F}">
+    <dgm:pt modelId="{19F861D7-06D0-4475-8396-2F5BA32F3667}">
       <dgm:prSet phldrT="[Text]" custT="1"/>
       <dgm:spPr/>
       <dgm:t>
@@ -7679,18 +8416,20 @@
         <a:lstStyle/>
         <a:p>
           <a:r>
-            <a:rPr lang="en-US" sz="3600" dirty="0">
+            <a:rPr lang="en-US" sz="1600" b="0" i="0" kern="1200" cap="all" spc="300" baseline="0" dirty="0">
               <a:solidFill>
-                <a:schemeClr val="accent3"/>
+                <a:prstClr val="black"/>
               </a:solidFill>
-              <a:latin typeface="+mj-lt"/>
+              <a:latin typeface="Yu Gothic UI Semilight" panose="020B0400000000000000" pitchFamily="34" charset="-128"/>
+              <a:ea typeface="+mn-ea"/>
+              <a:cs typeface="+mn-cs"/>
             </a:rPr>
-            <a:t>Q4</a:t>
+            <a:t>Random Forests Classifier</a:t>
           </a:r>
         </a:p>
       </dgm:t>
     </dgm:pt>
-    <dgm:pt modelId="{6756F059-AD87-4860-A8D7-76D0AD87A366}" type="parTrans" cxnId="{14282BA9-66B7-4EF9-83BA-49E8D1383532}">
+    <dgm:pt modelId="{E600A78F-D810-48FA-BA62-69BAA380AFC0}" type="sibTrans" cxnId="{1BBF4133-48CE-4EF2-B1A9-2D15BDAD32DA}">
       <dgm:prSet/>
       <dgm:spPr/>
       <dgm:t>
@@ -7705,7 +8444,7 @@
         </a:p>
       </dgm:t>
     </dgm:pt>
-    <dgm:pt modelId="{67CB2841-D2B7-47CA-AD93-4E66D2439A58}" type="sibTrans" cxnId="{14282BA9-66B7-4EF9-83BA-49E8D1383532}">
+    <dgm:pt modelId="{688591F3-C9FA-4E02-ACDA-6F3849A6023D}" type="parTrans" cxnId="{1BBF4133-48CE-4EF2-B1A9-2D15BDAD32DA}">
       <dgm:prSet/>
       <dgm:spPr/>
       <dgm:t>
@@ -7731,7 +8470,7 @@
       <dgm:spPr/>
     </dgm:pt>
     <dgm:pt modelId="{4E247E96-070B-4744-96B3-E1F97A845C9F}" type="pres">
-      <dgm:prSet presAssocID="{D005F7E6-D3D7-4736-A565-5597C92EEA6E}" presName="thickLine" presStyleLbl="alignNode1" presStyleIdx="0" presStyleCnt="4"/>
+      <dgm:prSet presAssocID="{D005F7E6-D3D7-4736-A565-5597C92EEA6E}" presName="thickLine" presStyleLbl="alignNode1" presStyleIdx="0" presStyleCnt="3"/>
       <dgm:spPr/>
     </dgm:pt>
     <dgm:pt modelId="{27343992-1E43-4DD5-A34F-B5C1356DFE59}" type="pres">
@@ -7739,7 +8478,7 @@
       <dgm:spPr/>
     </dgm:pt>
     <dgm:pt modelId="{794A25E5-C31E-4F51-977B-29908E4DED60}" type="pres">
-      <dgm:prSet presAssocID="{D005F7E6-D3D7-4736-A565-5597C92EEA6E}" presName="tx1" presStyleLbl="revTx" presStyleIdx="0" presStyleCnt="8"/>
+      <dgm:prSet presAssocID="{D005F7E6-D3D7-4736-A565-5597C92EEA6E}" presName="tx1" presStyleLbl="revTx" presStyleIdx="0" presStyleCnt="6"/>
       <dgm:spPr/>
     </dgm:pt>
     <dgm:pt modelId="{D7852091-6875-4A46-BEE1-63E8C2BCD888}" type="pres">
@@ -7759,7 +8498,7 @@
       <dgm:spPr/>
     </dgm:pt>
     <dgm:pt modelId="{E375414F-0076-4C00-857D-10F60768B5A1}" type="pres">
-      <dgm:prSet presAssocID="{527C33A0-D4CE-48C2-812A-2152C182D6D8}" presName="tx2" presStyleLbl="revTx" presStyleIdx="1" presStyleCnt="8"/>
+      <dgm:prSet presAssocID="{527C33A0-D4CE-48C2-812A-2152C182D6D8}" presName="tx2" presStyleLbl="revTx" presStyleIdx="1" presStyleCnt="6"/>
       <dgm:spPr/>
     </dgm:pt>
     <dgm:pt modelId="{BC0F0F45-6B28-47F0-8900-09203954EE61}" type="pres">
@@ -7767,7 +8506,7 @@
       <dgm:spPr/>
     </dgm:pt>
     <dgm:pt modelId="{A71BDFB5-6117-4C8B-8D80-B6049D42BB45}" type="pres">
-      <dgm:prSet presAssocID="{527C33A0-D4CE-48C2-812A-2152C182D6D8}" presName="thinLine2b" presStyleLbl="callout" presStyleIdx="0" presStyleCnt="4"/>
+      <dgm:prSet presAssocID="{527C33A0-D4CE-48C2-812A-2152C182D6D8}" presName="thinLine2b" presStyleLbl="callout" presStyleIdx="0" presStyleCnt="3"/>
       <dgm:spPr>
         <a:ln>
           <a:noFill/>
@@ -7779,7 +8518,7 @@
       <dgm:spPr/>
     </dgm:pt>
     <dgm:pt modelId="{0466FBD4-672A-478D-B685-49046823EBFF}" type="pres">
-      <dgm:prSet presAssocID="{6F977B38-B94F-4762-9FA8-43006E979831}" presName="thickLine" presStyleLbl="alignNode1" presStyleIdx="1" presStyleCnt="4"/>
+      <dgm:prSet presAssocID="{6F977B38-B94F-4762-9FA8-43006E979831}" presName="thickLine" presStyleLbl="alignNode1" presStyleIdx="1" presStyleCnt="3"/>
       <dgm:spPr/>
     </dgm:pt>
     <dgm:pt modelId="{CD94F179-39E0-448F-85E4-129118A1510A}" type="pres">
@@ -7787,7 +8526,7 @@
       <dgm:spPr/>
     </dgm:pt>
     <dgm:pt modelId="{27AE1F8E-D743-4045-8E99-EDACF531D229}" type="pres">
-      <dgm:prSet presAssocID="{6F977B38-B94F-4762-9FA8-43006E979831}" presName="tx1" presStyleLbl="revTx" presStyleIdx="2" presStyleCnt="8"/>
+      <dgm:prSet presAssocID="{6F977B38-B94F-4762-9FA8-43006E979831}" presName="tx1" presStyleLbl="revTx" presStyleIdx="2" presStyleCnt="6"/>
       <dgm:spPr/>
     </dgm:pt>
     <dgm:pt modelId="{C56D60A2-1EF5-4EE8-B59E-9BC24794D33B}" type="pres">
@@ -7807,7 +8546,7 @@
       <dgm:spPr/>
     </dgm:pt>
     <dgm:pt modelId="{8F8B6AF1-ABF7-490E-91F4-D9BF1971E612}" type="pres">
-      <dgm:prSet presAssocID="{19F861D7-06D0-4475-8396-2F5BA32F3667}" presName="tx2" presStyleLbl="revTx" presStyleIdx="3" presStyleCnt="8"/>
+      <dgm:prSet presAssocID="{19F861D7-06D0-4475-8396-2F5BA32F3667}" presName="tx2" presStyleLbl="revTx" presStyleIdx="3" presStyleCnt="6"/>
       <dgm:spPr/>
     </dgm:pt>
     <dgm:pt modelId="{58C08AD8-0A53-4FA4-A089-A58442D0DF2C}" type="pres">
@@ -7815,7 +8554,7 @@
       <dgm:spPr/>
     </dgm:pt>
     <dgm:pt modelId="{ED686FDA-E1A9-411A-922C-3304600C1C77}" type="pres">
-      <dgm:prSet presAssocID="{19F861D7-06D0-4475-8396-2F5BA32F3667}" presName="thinLine2b" presStyleLbl="callout" presStyleIdx="1" presStyleCnt="4"/>
+      <dgm:prSet presAssocID="{19F861D7-06D0-4475-8396-2F5BA32F3667}" presName="thinLine2b" presStyleLbl="callout" presStyleIdx="1" presStyleCnt="3"/>
       <dgm:spPr>
         <a:ln>
           <a:noFill/>
@@ -7827,7 +8566,7 @@
       <dgm:spPr/>
     </dgm:pt>
     <dgm:pt modelId="{B28246E4-7BC5-45AF-BA42-DDBC1C2C2E2A}" type="pres">
-      <dgm:prSet presAssocID="{D1DFD31E-EBD3-4332-8636-6D8373C48843}" presName="thickLine" presStyleLbl="alignNode1" presStyleIdx="2" presStyleCnt="4"/>
+      <dgm:prSet presAssocID="{D1DFD31E-EBD3-4332-8636-6D8373C48843}" presName="thickLine" presStyleLbl="alignNode1" presStyleIdx="2" presStyleCnt="3"/>
       <dgm:spPr/>
     </dgm:pt>
     <dgm:pt modelId="{238C59FC-EE92-495D-8535-280132FE3CC8}" type="pres">
@@ -7835,7 +8574,7 @@
       <dgm:spPr/>
     </dgm:pt>
     <dgm:pt modelId="{94243B8C-4525-4765-A713-E2F4D7D955D2}" type="pres">
-      <dgm:prSet presAssocID="{D1DFD31E-EBD3-4332-8636-6D8373C48843}" presName="tx1" presStyleLbl="revTx" presStyleIdx="4" presStyleCnt="8"/>
+      <dgm:prSet presAssocID="{D1DFD31E-EBD3-4332-8636-6D8373C48843}" presName="tx1" presStyleLbl="revTx" presStyleIdx="4" presStyleCnt="6"/>
       <dgm:spPr/>
     </dgm:pt>
     <dgm:pt modelId="{C5CBCA6D-774E-4CF6-843F-95660CCF6404}" type="pres">
@@ -7855,7 +8594,7 @@
       <dgm:spPr/>
     </dgm:pt>
     <dgm:pt modelId="{9A0947CA-0828-427D-806E-BCC9C040AB48}" type="pres">
-      <dgm:prSet presAssocID="{B6769171-B80C-4F5B-90C7-EC3BDB7E9754}" presName="tx2" presStyleLbl="revTx" presStyleIdx="5" presStyleCnt="8"/>
+      <dgm:prSet presAssocID="{B6769171-B80C-4F5B-90C7-EC3BDB7E9754}" presName="tx2" presStyleLbl="revTx" presStyleIdx="5" presStyleCnt="6"/>
       <dgm:spPr/>
     </dgm:pt>
     <dgm:pt modelId="{6A24333E-5826-47ED-8DEB-F4CB79DB5CF5}" type="pres">
@@ -7863,7 +8602,7 @@
       <dgm:spPr/>
     </dgm:pt>
     <dgm:pt modelId="{58AEF715-538E-4FCF-B500-3EDFACBD68A6}" type="pres">
-      <dgm:prSet presAssocID="{B6769171-B80C-4F5B-90C7-EC3BDB7E9754}" presName="thinLine2b" presStyleLbl="callout" presStyleIdx="2" presStyleCnt="4"/>
+      <dgm:prSet presAssocID="{B6769171-B80C-4F5B-90C7-EC3BDB7E9754}" presName="thinLine2b" presStyleLbl="callout" presStyleIdx="2" presStyleCnt="3"/>
       <dgm:spPr>
         <a:ln>
           <a:noFill/>
@@ -7874,69 +8613,17 @@
       <dgm:prSet presAssocID="{B6769171-B80C-4F5B-90C7-EC3BDB7E9754}" presName="vertSpace2b" presStyleCnt="0"/>
       <dgm:spPr/>
     </dgm:pt>
-    <dgm:pt modelId="{27ACEE2A-FEF4-404F-AB64-BBA8B44105A3}" type="pres">
-      <dgm:prSet presAssocID="{2EB0FCD1-A97B-454C-A3B5-CC24E538FD7F}" presName="thickLine" presStyleLbl="alignNode1" presStyleIdx="3" presStyleCnt="4"/>
-      <dgm:spPr/>
-    </dgm:pt>
-    <dgm:pt modelId="{D0FE4CC2-9F53-49FE-B3CF-66C4D8D2EB0E}" type="pres">
-      <dgm:prSet presAssocID="{2EB0FCD1-A97B-454C-A3B5-CC24E538FD7F}" presName="horz1" presStyleCnt="0"/>
-      <dgm:spPr/>
-    </dgm:pt>
-    <dgm:pt modelId="{74391C42-C7D3-4D68-8573-85CF435773EE}" type="pres">
-      <dgm:prSet presAssocID="{2EB0FCD1-A97B-454C-A3B5-CC24E538FD7F}" presName="tx1" presStyleLbl="revTx" presStyleIdx="6" presStyleCnt="8"/>
-      <dgm:spPr/>
-    </dgm:pt>
-    <dgm:pt modelId="{A9505772-616C-4932-8F25-52B30FD291C5}" type="pres">
-      <dgm:prSet presAssocID="{2EB0FCD1-A97B-454C-A3B5-CC24E538FD7F}" presName="vert1" presStyleCnt="0"/>
-      <dgm:spPr/>
-    </dgm:pt>
-    <dgm:pt modelId="{1BC3518C-6ABB-4DA5-AB2A-A498096179D7}" type="pres">
-      <dgm:prSet presAssocID="{01FCF63A-9A53-4641-925C-35AB10312164}" presName="vertSpace2a" presStyleCnt="0"/>
-      <dgm:spPr/>
-    </dgm:pt>
-    <dgm:pt modelId="{B327246B-238F-4DC6-9B20-A719838831B8}" type="pres">
-      <dgm:prSet presAssocID="{01FCF63A-9A53-4641-925C-35AB10312164}" presName="horz2" presStyleCnt="0"/>
-      <dgm:spPr/>
-    </dgm:pt>
-    <dgm:pt modelId="{55F3241E-988A-40FF-ACFC-10D76AA339D6}" type="pres">
-      <dgm:prSet presAssocID="{01FCF63A-9A53-4641-925C-35AB10312164}" presName="horzSpace2" presStyleCnt="0"/>
-      <dgm:spPr/>
-    </dgm:pt>
-    <dgm:pt modelId="{2FEB345E-D9F3-4461-A6C6-B047D3390664}" type="pres">
-      <dgm:prSet presAssocID="{01FCF63A-9A53-4641-925C-35AB10312164}" presName="tx2" presStyleLbl="revTx" presStyleIdx="7" presStyleCnt="8"/>
-      <dgm:spPr/>
-    </dgm:pt>
-    <dgm:pt modelId="{C4F2F344-8F2E-4066-917B-1EB3BA067465}" type="pres">
-      <dgm:prSet presAssocID="{01FCF63A-9A53-4641-925C-35AB10312164}" presName="vert2" presStyleCnt="0"/>
-      <dgm:spPr/>
-    </dgm:pt>
-    <dgm:pt modelId="{E6365EE9-1704-48EE-8A92-5D8EA459D769}" type="pres">
-      <dgm:prSet presAssocID="{01FCF63A-9A53-4641-925C-35AB10312164}" presName="thinLine2b" presStyleLbl="callout" presStyleIdx="3" presStyleCnt="4"/>
-      <dgm:spPr>
-        <a:ln>
-          <a:noFill/>
-        </a:ln>
-      </dgm:spPr>
-    </dgm:pt>
-    <dgm:pt modelId="{475DBFE9-E379-4960-96ED-5454B878821F}" type="pres">
-      <dgm:prSet presAssocID="{01FCF63A-9A53-4641-925C-35AB10312164}" presName="vertSpace2b" presStyleCnt="0"/>
-      <dgm:spPr/>
-    </dgm:pt>
   </dgm:ptLst>
   <dgm:cxnLst>
-    <dgm:cxn modelId="{C06C5714-CDEC-422C-963C-DFE1248B1E0C}" type="presOf" srcId="{2EB0FCD1-A97B-454C-A3B5-CC24E538FD7F}" destId="{74391C42-C7D3-4D68-8573-85CF435773EE}" srcOrd="0" destOrd="0" presId="urn:microsoft.com/office/officeart/2008/layout/LinedList"/>
     <dgm:cxn modelId="{EB93DE1A-F1C2-46BB-91EC-F2BFD558BDCD}" srcId="{BB313E4A-8B87-4AAD-AEEE-9B1435558CB9}" destId="{D005F7E6-D3D7-4736-A565-5597C92EEA6E}" srcOrd="0" destOrd="0" parTransId="{5488EE6F-940A-406A-80A3-42C5A10B4269}" sibTransId="{52810DCF-3FEF-47BA-9560-DDA76F05622B}"/>
     <dgm:cxn modelId="{67CDFC22-3852-49AA-846F-62CFC47D4773}" srcId="{D005F7E6-D3D7-4736-A565-5597C92EEA6E}" destId="{527C33A0-D4CE-48C2-812A-2152C182D6D8}" srcOrd="0" destOrd="0" parTransId="{051EA6F1-57D0-42F2-BD63-8D741E1935F1}" sibTransId="{E3167961-4CF2-4300-9C4A-A70246E015B1}"/>
-    <dgm:cxn modelId="{47311529-1A3F-42EB-AD7A-402FFFCF6AD5}" type="presOf" srcId="{01FCF63A-9A53-4641-925C-35AB10312164}" destId="{2FEB345E-D9F3-4461-A6C6-B047D3390664}" srcOrd="0" destOrd="0" presId="urn:microsoft.com/office/officeart/2008/layout/LinedList"/>
     <dgm:cxn modelId="{1BBF4133-48CE-4EF2-B1A9-2D15BDAD32DA}" srcId="{6F977B38-B94F-4762-9FA8-43006E979831}" destId="{19F861D7-06D0-4475-8396-2F5BA32F3667}" srcOrd="0" destOrd="0" parTransId="{688591F3-C9FA-4E02-ACDA-6F3849A6023D}" sibTransId="{E600A78F-D810-48FA-BA62-69BAA380AFC0}"/>
     <dgm:cxn modelId="{61DFE55D-38EF-4731-902C-3E6F606D8B40}" type="presOf" srcId="{6F977B38-B94F-4762-9FA8-43006E979831}" destId="{27AE1F8E-D743-4045-8E99-EDACF531D229}" srcOrd="0" destOrd="0" presId="urn:microsoft.com/office/officeart/2008/layout/LinedList"/>
     <dgm:cxn modelId="{A3E8F565-D509-4242-89E5-F545BD9B39AF}" srcId="{BB313E4A-8B87-4AAD-AEEE-9B1435558CB9}" destId="{D1DFD31E-EBD3-4332-8636-6D8373C48843}" srcOrd="2" destOrd="0" parTransId="{6DD3ACB7-7BFD-4F02-8143-F4245AB3D242}" sibTransId="{8A67AB22-1ED0-4C87-93DD-EC8BA8AC9DE1}"/>
-    <dgm:cxn modelId="{0B2CF146-F6F1-4A46-B0F9-EFBDA54F8880}" srcId="{2EB0FCD1-A97B-454C-A3B5-CC24E538FD7F}" destId="{01FCF63A-9A53-4641-925C-35AB10312164}" srcOrd="0" destOrd="0" parTransId="{50233F51-F48D-4039-B4C4-FDE607161996}" sibTransId="{47AD5E5A-539A-4690-BE35-128ECD2C6096}"/>
     <dgm:cxn modelId="{AA8FBB77-5FA8-493F-94A2-8786EB5B3083}" type="presOf" srcId="{BB313E4A-8B87-4AAD-AEEE-9B1435558CB9}" destId="{D342E22F-EB29-4FAD-9B28-4C34502171B9}" srcOrd="0" destOrd="0" presId="urn:microsoft.com/office/officeart/2008/layout/LinedList"/>
     <dgm:cxn modelId="{88FF1C7F-80D6-42CE-B602-E852DA6E791B}" type="presOf" srcId="{D005F7E6-D3D7-4736-A565-5597C92EEA6E}" destId="{794A25E5-C31E-4F51-977B-29908E4DED60}" srcOrd="0" destOrd="0" presId="urn:microsoft.com/office/officeart/2008/layout/LinedList"/>
     <dgm:cxn modelId="{D5D21386-72BD-4C27-BD5D-A96F8EDD0079}" type="presOf" srcId="{B6769171-B80C-4F5B-90C7-EC3BDB7E9754}" destId="{9A0947CA-0828-427D-806E-BCC9C040AB48}" srcOrd="0" destOrd="0" presId="urn:microsoft.com/office/officeart/2008/layout/LinedList"/>
     <dgm:cxn modelId="{FA89F48A-741D-43D6-AF9F-272E94B50C1D}" type="presOf" srcId="{19F861D7-06D0-4475-8396-2F5BA32F3667}" destId="{8F8B6AF1-ABF7-490E-91F4-D9BF1971E612}" srcOrd="0" destOrd="0" presId="urn:microsoft.com/office/officeart/2008/layout/LinedList"/>
-    <dgm:cxn modelId="{14282BA9-66B7-4EF9-83BA-49E8D1383532}" srcId="{BB313E4A-8B87-4AAD-AEEE-9B1435558CB9}" destId="{2EB0FCD1-A97B-454C-A3B5-CC24E538FD7F}" srcOrd="3" destOrd="0" parTransId="{6756F059-AD87-4860-A8D7-76D0AD87A366}" sibTransId="{67CB2841-D2B7-47CA-AD93-4E66D2439A58}"/>
     <dgm:cxn modelId="{21A593B1-0C91-4039-82CE-6A28EA2C42D4}" type="presOf" srcId="{527C33A0-D4CE-48C2-812A-2152C182D6D8}" destId="{E375414F-0076-4C00-857D-10F60768B5A1}" srcOrd="0" destOrd="0" presId="urn:microsoft.com/office/officeart/2008/layout/LinedList"/>
     <dgm:cxn modelId="{F2E15CDB-CF08-4E99-9BB4-FE8B9862B0BE}" srcId="{BB313E4A-8B87-4AAD-AEEE-9B1435558CB9}" destId="{6F977B38-B94F-4762-9FA8-43006E979831}" srcOrd="1" destOrd="0" parTransId="{D645353D-A275-487B-92A0-06F88FEAB990}" sibTransId="{C116B6CE-0E45-468A-8FCD-98B3260F6E2B}"/>
     <dgm:cxn modelId="{DE2646DB-D133-4C29-A2FC-663797E2947F}" srcId="{D1DFD31E-EBD3-4332-8636-6D8373C48843}" destId="{B6769171-B80C-4F5B-90C7-EC3BDB7E9754}" srcOrd="0" destOrd="0" parTransId="{EBFED7B5-6EA8-4A9E-BFDD-4F059EEEF6B1}" sibTransId="{15DA4E02-04FA-4A21-9790-F88305AE1DDF}"/>
@@ -7974,19 +8661,260 @@
     <dgm:cxn modelId="{4C21A011-0D73-4F9C-8C5B-A1E1D280952A}" type="presParOf" srcId="{E3873E4A-935D-4571-90E1-50623F2F0CED}" destId="{6A24333E-5826-47ED-8DEB-F4CB79DB5CF5}" srcOrd="2" destOrd="0" presId="urn:microsoft.com/office/officeart/2008/layout/LinedList"/>
     <dgm:cxn modelId="{BDA38931-F4C6-40CC-98C4-964F50A66E19}" type="presParOf" srcId="{C5CBCA6D-774E-4CF6-843F-95660CCF6404}" destId="{58AEF715-538E-4FCF-B500-3EDFACBD68A6}" srcOrd="2" destOrd="0" presId="urn:microsoft.com/office/officeart/2008/layout/LinedList"/>
     <dgm:cxn modelId="{18271D40-3AEE-446C-8CCE-37535173FB28}" type="presParOf" srcId="{C5CBCA6D-774E-4CF6-843F-95660CCF6404}" destId="{44F457FD-5A06-4D21-A44F-72B7CDEE607A}" srcOrd="3" destOrd="0" presId="urn:microsoft.com/office/officeart/2008/layout/LinedList"/>
-    <dgm:cxn modelId="{A6E0064E-B7BB-4795-BEE0-4CF371A6E600}" type="presParOf" srcId="{D342E22F-EB29-4FAD-9B28-4C34502171B9}" destId="{27ACEE2A-FEF4-404F-AB64-BBA8B44105A3}" srcOrd="6" destOrd="0" presId="urn:microsoft.com/office/officeart/2008/layout/LinedList"/>
-    <dgm:cxn modelId="{758133C0-8E43-4D3F-A1B5-1E8B06FB17E8}" type="presParOf" srcId="{D342E22F-EB29-4FAD-9B28-4C34502171B9}" destId="{D0FE4CC2-9F53-49FE-B3CF-66C4D8D2EB0E}" srcOrd="7" destOrd="0" presId="urn:microsoft.com/office/officeart/2008/layout/LinedList"/>
-    <dgm:cxn modelId="{9640FF45-CBCF-421B-87FB-6FF156B1F578}" type="presParOf" srcId="{D0FE4CC2-9F53-49FE-B3CF-66C4D8D2EB0E}" destId="{74391C42-C7D3-4D68-8573-85CF435773EE}" srcOrd="0" destOrd="0" presId="urn:microsoft.com/office/officeart/2008/layout/LinedList"/>
-    <dgm:cxn modelId="{B4FBFA51-0322-466B-85DF-EA6593B0D4D9}" type="presParOf" srcId="{D0FE4CC2-9F53-49FE-B3CF-66C4D8D2EB0E}" destId="{A9505772-616C-4932-8F25-52B30FD291C5}" srcOrd="1" destOrd="0" presId="urn:microsoft.com/office/officeart/2008/layout/LinedList"/>
-    <dgm:cxn modelId="{6ADA837C-B861-4B1D-84C2-2BB2A92C22C9}" type="presParOf" srcId="{A9505772-616C-4932-8F25-52B30FD291C5}" destId="{1BC3518C-6ABB-4DA5-AB2A-A498096179D7}" srcOrd="0" destOrd="0" presId="urn:microsoft.com/office/officeart/2008/layout/LinedList"/>
-    <dgm:cxn modelId="{FF7906A4-E1E6-45FB-B233-0D757F6D18A5}" type="presParOf" srcId="{A9505772-616C-4932-8F25-52B30FD291C5}" destId="{B327246B-238F-4DC6-9B20-A719838831B8}" srcOrd="1" destOrd="0" presId="urn:microsoft.com/office/officeart/2008/layout/LinedList"/>
-    <dgm:cxn modelId="{3F9A7A03-629E-4B01-98D6-E24985B259F5}" type="presParOf" srcId="{B327246B-238F-4DC6-9B20-A719838831B8}" destId="{55F3241E-988A-40FF-ACFC-10D76AA339D6}" srcOrd="0" destOrd="0" presId="urn:microsoft.com/office/officeart/2008/layout/LinedList"/>
-    <dgm:cxn modelId="{5D9793A9-9095-4B78-AD5D-83E5C98D3855}" type="presParOf" srcId="{B327246B-238F-4DC6-9B20-A719838831B8}" destId="{2FEB345E-D9F3-4461-A6C6-B047D3390664}" srcOrd="1" destOrd="0" presId="urn:microsoft.com/office/officeart/2008/layout/LinedList"/>
-    <dgm:cxn modelId="{41013D6E-A5DB-4966-BB8A-B4AB345F585B}" type="presParOf" srcId="{B327246B-238F-4DC6-9B20-A719838831B8}" destId="{C4F2F344-8F2E-4066-917B-1EB3BA067465}" srcOrd="2" destOrd="0" presId="urn:microsoft.com/office/officeart/2008/layout/LinedList"/>
-    <dgm:cxn modelId="{E3BC8C30-51F6-4AAA-BDA7-B9A152519346}" type="presParOf" srcId="{A9505772-616C-4932-8F25-52B30FD291C5}" destId="{E6365EE9-1704-48EE-8A92-5D8EA459D769}" srcOrd="2" destOrd="0" presId="urn:microsoft.com/office/officeart/2008/layout/LinedList"/>
-    <dgm:cxn modelId="{5864D3F0-70C1-474B-B190-BCB9A45F53DC}" type="presParOf" srcId="{A9505772-616C-4932-8F25-52B30FD291C5}" destId="{475DBFE9-E379-4960-96ED-5454B878821F}" srcOrd="3" destOrd="0" presId="urn:microsoft.com/office/officeart/2008/layout/LinedList"/>
   </dgm:cxnLst>
   <dgm:bg/>
+  <dgm:whole/>
+  <dgm:extLst>
+    <a:ext uri="http://schemas.microsoft.com/office/drawing/2008/diagram">
+      <dsp:dataModelExt xmlns:dsp="http://schemas.microsoft.com/office/drawing/2008/diagram" relId="rId6" minVer="http://schemas.openxmlformats.org/drawingml/2006/diagram"/>
+    </a:ext>
+  </dgm:extLst>
+</dgm:dataModel>
+</file>
+
+<file path=ppt/diagrams/data7.xml><?xml version="1.0" encoding="utf-8"?>
+<dgm:dataModel xmlns:dgm="http://schemas.openxmlformats.org/drawingml/2006/diagram" xmlns:a="http://schemas.openxmlformats.org/drawingml/2006/main">
+  <dgm:ptLst>
+    <dgm:pt modelId="{A59CC7A5-D768-46BB-881E-38135F09791D}" type="doc">
+      <dgm:prSet loTypeId="urn:microsoft.com/office/officeart/2005/8/layout/pList1" loCatId="list" qsTypeId="urn:microsoft.com/office/officeart/2005/8/quickstyle/simple1" qsCatId="simple" csTypeId="urn:microsoft.com/office/officeart/2005/8/colors/accent1_2" csCatId="accent1" phldr="1"/>
+      <dgm:spPr/>
+      <dgm:t>
+        <a:bodyPr/>
+        <a:lstStyle/>
+        <a:p>
+          <a:endParaRPr lang="en-GB"/>
+        </a:p>
+      </dgm:t>
+    </dgm:pt>
+    <dgm:pt modelId="{B3B4F47B-5B48-4C4E-9F05-9621EFDE957F}">
+      <dgm:prSet phldrT="[Text]" phldr="0"/>
+      <dgm:spPr/>
+      <dgm:t>
+        <a:bodyPr/>
+        <a:lstStyle/>
+        <a:p>
+          <a:r>
+            <a:rPr lang="en-GB" dirty="0">
+              <a:latin typeface="+mj-lt"/>
+            </a:rPr>
+            <a:t>Logistic Regression</a:t>
+          </a:r>
+        </a:p>
+      </dgm:t>
+    </dgm:pt>
+    <dgm:pt modelId="{FBF1FDBF-DEF2-4D93-8B36-32035F0C0D88}" type="parTrans" cxnId="{C11A2446-5A27-4240-9176-0A328E1B0CD9}">
+      <dgm:prSet/>
+      <dgm:spPr/>
+      <dgm:t>
+        <a:bodyPr/>
+        <a:lstStyle/>
+        <a:p>
+          <a:endParaRPr lang="en-GB"/>
+        </a:p>
+      </dgm:t>
+    </dgm:pt>
+    <dgm:pt modelId="{AD04AFC8-63F3-4D28-8CCD-455D8770DF05}" type="sibTrans" cxnId="{C11A2446-5A27-4240-9176-0A328E1B0CD9}">
+      <dgm:prSet/>
+      <dgm:spPr/>
+      <dgm:t>
+        <a:bodyPr/>
+        <a:lstStyle/>
+        <a:p>
+          <a:endParaRPr lang="en-GB"/>
+        </a:p>
+      </dgm:t>
+    </dgm:pt>
+    <dgm:pt modelId="{FEA849CA-A795-40B2-BEF6-C81709EA7183}">
+      <dgm:prSet phldrT="[Text]" phldr="0"/>
+      <dgm:spPr/>
+      <dgm:t>
+        <a:bodyPr/>
+        <a:lstStyle/>
+        <a:p>
+          <a:r>
+            <a:rPr lang="en-GB" dirty="0">
+              <a:latin typeface="+mj-lt"/>
+            </a:rPr>
+            <a:t>K-Nearest Neighbours</a:t>
+          </a:r>
+        </a:p>
+      </dgm:t>
+    </dgm:pt>
+    <dgm:pt modelId="{FA4D5A3F-01D0-4F14-B4AF-8FC71782959C}" type="parTrans" cxnId="{8C847E2A-4F5A-4C1A-B297-223C997C7F6C}">
+      <dgm:prSet/>
+      <dgm:spPr/>
+      <dgm:t>
+        <a:bodyPr/>
+        <a:lstStyle/>
+        <a:p>
+          <a:endParaRPr lang="en-GB"/>
+        </a:p>
+      </dgm:t>
+    </dgm:pt>
+    <dgm:pt modelId="{C282E216-DCB9-4505-BFAE-611DC1FD6E1A}" type="sibTrans" cxnId="{8C847E2A-4F5A-4C1A-B297-223C997C7F6C}">
+      <dgm:prSet/>
+      <dgm:spPr/>
+      <dgm:t>
+        <a:bodyPr/>
+        <a:lstStyle/>
+        <a:p>
+          <a:endParaRPr lang="en-GB"/>
+        </a:p>
+      </dgm:t>
+    </dgm:pt>
+    <dgm:pt modelId="{6D941E3E-BA87-4A3D-87B1-3C2E68BBF106}">
+      <dgm:prSet phldrT="[Text]" phldr="0"/>
+      <dgm:spPr/>
+      <dgm:t>
+        <a:bodyPr/>
+        <a:lstStyle/>
+        <a:p>
+          <a:r>
+            <a:rPr lang="en-GB" dirty="0">
+              <a:latin typeface="+mj-lt"/>
+            </a:rPr>
+            <a:t>Random Forests</a:t>
+          </a:r>
+        </a:p>
+      </dgm:t>
+    </dgm:pt>
+    <dgm:pt modelId="{742BD4B2-06D3-48EF-906E-46E1F0FB830A}" type="parTrans" cxnId="{F0C70428-F241-4A28-8349-4A2AF6F403DF}">
+      <dgm:prSet/>
+      <dgm:spPr/>
+      <dgm:t>
+        <a:bodyPr/>
+        <a:lstStyle/>
+        <a:p>
+          <a:endParaRPr lang="en-GB"/>
+        </a:p>
+      </dgm:t>
+    </dgm:pt>
+    <dgm:pt modelId="{0008EA42-0234-4CE5-BE35-EA74B8E92192}" type="sibTrans" cxnId="{F0C70428-F241-4A28-8349-4A2AF6F403DF}">
+      <dgm:prSet/>
+      <dgm:spPr/>
+      <dgm:t>
+        <a:bodyPr/>
+        <a:lstStyle/>
+        <a:p>
+          <a:endParaRPr lang="en-GB"/>
+        </a:p>
+      </dgm:t>
+    </dgm:pt>
+    <dgm:pt modelId="{A09CE610-2605-4F96-9146-10F4BDC12089}" type="pres">
+      <dgm:prSet presAssocID="{A59CC7A5-D768-46BB-881E-38135F09791D}" presName="Name0" presStyleCnt="0">
+        <dgm:presLayoutVars>
+          <dgm:dir/>
+          <dgm:resizeHandles val="exact"/>
+        </dgm:presLayoutVars>
+      </dgm:prSet>
+      <dgm:spPr/>
+    </dgm:pt>
+    <dgm:pt modelId="{BA14BA05-080A-407D-B214-E01CDF501204}" type="pres">
+      <dgm:prSet presAssocID="{B3B4F47B-5B48-4C4E-9F05-9621EFDE957F}" presName="compNode" presStyleCnt="0"/>
+      <dgm:spPr/>
+    </dgm:pt>
+    <dgm:pt modelId="{7032BB5A-2D8A-4300-838D-C47B2F2E4BA7}" type="pres">
+      <dgm:prSet presAssocID="{B3B4F47B-5B48-4C4E-9F05-9621EFDE957F}" presName="pictRect" presStyleLbl="node1" presStyleIdx="0" presStyleCnt="3" custScaleX="68989"/>
+      <dgm:spPr>
+        <a:blipFill>
+          <a:blip xmlns:r="http://schemas.openxmlformats.org/officeDocument/2006/relationships" r:embed="rId1"/>
+          <a:srcRect/>
+          <a:stretch>
+            <a:fillRect/>
+          </a:stretch>
+        </a:blipFill>
+      </dgm:spPr>
+    </dgm:pt>
+    <dgm:pt modelId="{01781F16-0C2D-4586-8AFB-F87900D9A657}" type="pres">
+      <dgm:prSet presAssocID="{B3B4F47B-5B48-4C4E-9F05-9621EFDE957F}" presName="textRect" presStyleLbl="revTx" presStyleIdx="0" presStyleCnt="3">
+        <dgm:presLayoutVars>
+          <dgm:bulletEnabled val="1"/>
+        </dgm:presLayoutVars>
+      </dgm:prSet>
+      <dgm:spPr/>
+    </dgm:pt>
+    <dgm:pt modelId="{2C402089-8E84-4972-BD95-0ECFA8C7CDD0}" type="pres">
+      <dgm:prSet presAssocID="{AD04AFC8-63F3-4D28-8CCD-455D8770DF05}" presName="sibTrans" presStyleLbl="sibTrans2D1" presStyleIdx="0" presStyleCnt="0"/>
+      <dgm:spPr/>
+    </dgm:pt>
+    <dgm:pt modelId="{55A9F854-E901-4D34-8982-91E3434C47A0}" type="pres">
+      <dgm:prSet presAssocID="{6D941E3E-BA87-4A3D-87B1-3C2E68BBF106}" presName="compNode" presStyleCnt="0"/>
+      <dgm:spPr/>
+    </dgm:pt>
+    <dgm:pt modelId="{E57FDBEA-07CD-4EE0-B9F6-B3513C800D23}" type="pres">
+      <dgm:prSet presAssocID="{6D941E3E-BA87-4A3D-87B1-3C2E68BBF106}" presName="pictRect" presStyleLbl="node1" presStyleIdx="1" presStyleCnt="3" custScaleX="68989"/>
+      <dgm:spPr>
+        <a:blipFill>
+          <a:blip xmlns:r="http://schemas.openxmlformats.org/officeDocument/2006/relationships" r:embed="rId2"/>
+          <a:srcRect/>
+          <a:stretch>
+            <a:fillRect/>
+          </a:stretch>
+        </a:blipFill>
+      </dgm:spPr>
+    </dgm:pt>
+    <dgm:pt modelId="{5A2326FB-9C5F-4C93-94B6-3F68487EE15B}" type="pres">
+      <dgm:prSet presAssocID="{6D941E3E-BA87-4A3D-87B1-3C2E68BBF106}" presName="textRect" presStyleLbl="revTx" presStyleIdx="1" presStyleCnt="3">
+        <dgm:presLayoutVars>
+          <dgm:bulletEnabled val="1"/>
+        </dgm:presLayoutVars>
+      </dgm:prSet>
+      <dgm:spPr/>
+    </dgm:pt>
+    <dgm:pt modelId="{FBB6A2C1-ABDE-4364-BDF9-6EBC88D5F2AF}" type="pres">
+      <dgm:prSet presAssocID="{0008EA42-0234-4CE5-BE35-EA74B8E92192}" presName="sibTrans" presStyleLbl="sibTrans2D1" presStyleIdx="0" presStyleCnt="0"/>
+      <dgm:spPr/>
+    </dgm:pt>
+    <dgm:pt modelId="{5600010E-AFAD-4192-9F26-4CA4FBF925C4}" type="pres">
+      <dgm:prSet presAssocID="{FEA849CA-A795-40B2-BEF6-C81709EA7183}" presName="compNode" presStyleCnt="0"/>
+      <dgm:spPr/>
+    </dgm:pt>
+    <dgm:pt modelId="{48E9D8B7-C615-4785-9984-18582DDB6C31}" type="pres">
+      <dgm:prSet presAssocID="{FEA849CA-A795-40B2-BEF6-C81709EA7183}" presName="pictRect" presStyleLbl="node1" presStyleIdx="2" presStyleCnt="3" custScaleX="68989"/>
+      <dgm:spPr>
+        <a:blipFill>
+          <a:blip xmlns:r="http://schemas.openxmlformats.org/officeDocument/2006/relationships" r:embed="rId3"/>
+          <a:srcRect/>
+          <a:stretch>
+            <a:fillRect/>
+          </a:stretch>
+        </a:blipFill>
+      </dgm:spPr>
+    </dgm:pt>
+    <dgm:pt modelId="{D267D666-2C35-4EC6-8B1E-910B727C725A}" type="pres">
+      <dgm:prSet presAssocID="{FEA849CA-A795-40B2-BEF6-C81709EA7183}" presName="textRect" presStyleLbl="revTx" presStyleIdx="2" presStyleCnt="3">
+        <dgm:presLayoutVars>
+          <dgm:bulletEnabled val="1"/>
+        </dgm:presLayoutVars>
+      </dgm:prSet>
+      <dgm:spPr/>
+    </dgm:pt>
+  </dgm:ptLst>
+  <dgm:cxnLst>
+    <dgm:cxn modelId="{65C8C90C-45C3-4357-8265-5E32875ECCBB}" type="presOf" srcId="{0008EA42-0234-4CE5-BE35-EA74B8E92192}" destId="{FBB6A2C1-ABDE-4364-BDF9-6EBC88D5F2AF}" srcOrd="0" destOrd="0" presId="urn:microsoft.com/office/officeart/2005/8/layout/pList1"/>
+    <dgm:cxn modelId="{F0C70428-F241-4A28-8349-4A2AF6F403DF}" srcId="{A59CC7A5-D768-46BB-881E-38135F09791D}" destId="{6D941E3E-BA87-4A3D-87B1-3C2E68BBF106}" srcOrd="1" destOrd="0" parTransId="{742BD4B2-06D3-48EF-906E-46E1F0FB830A}" sibTransId="{0008EA42-0234-4CE5-BE35-EA74B8E92192}"/>
+    <dgm:cxn modelId="{8C847E2A-4F5A-4C1A-B297-223C997C7F6C}" srcId="{A59CC7A5-D768-46BB-881E-38135F09791D}" destId="{FEA849CA-A795-40B2-BEF6-C81709EA7183}" srcOrd="2" destOrd="0" parTransId="{FA4D5A3F-01D0-4F14-B4AF-8FC71782959C}" sibTransId="{C282E216-DCB9-4505-BFAE-611DC1FD6E1A}"/>
+    <dgm:cxn modelId="{F134583A-3336-446D-BB3D-ADC33509CB74}" type="presOf" srcId="{FEA849CA-A795-40B2-BEF6-C81709EA7183}" destId="{D267D666-2C35-4EC6-8B1E-910B727C725A}" srcOrd="0" destOrd="0" presId="urn:microsoft.com/office/officeart/2005/8/layout/pList1"/>
+    <dgm:cxn modelId="{C11A2446-5A27-4240-9176-0A328E1B0CD9}" srcId="{A59CC7A5-D768-46BB-881E-38135F09791D}" destId="{B3B4F47B-5B48-4C4E-9F05-9621EFDE957F}" srcOrd="0" destOrd="0" parTransId="{FBF1FDBF-DEF2-4D93-8B36-32035F0C0D88}" sibTransId="{AD04AFC8-63F3-4D28-8CCD-455D8770DF05}"/>
+    <dgm:cxn modelId="{51D3E899-B148-4056-B613-1128211D5D3C}" type="presOf" srcId="{AD04AFC8-63F3-4D28-8CCD-455D8770DF05}" destId="{2C402089-8E84-4972-BD95-0ECFA8C7CDD0}" srcOrd="0" destOrd="0" presId="urn:microsoft.com/office/officeart/2005/8/layout/pList1"/>
+    <dgm:cxn modelId="{EEEA90B9-B54B-40AE-897F-F0C96D829DC0}" type="presOf" srcId="{6D941E3E-BA87-4A3D-87B1-3C2E68BBF106}" destId="{5A2326FB-9C5F-4C93-94B6-3F68487EE15B}" srcOrd="0" destOrd="0" presId="urn:microsoft.com/office/officeart/2005/8/layout/pList1"/>
+    <dgm:cxn modelId="{A303D6C6-D8B5-4773-8EAA-6A04F2738817}" type="presOf" srcId="{B3B4F47B-5B48-4C4E-9F05-9621EFDE957F}" destId="{01781F16-0C2D-4586-8AFB-F87900D9A657}" srcOrd="0" destOrd="0" presId="urn:microsoft.com/office/officeart/2005/8/layout/pList1"/>
+    <dgm:cxn modelId="{C67E65D9-3B14-4112-AFF2-7351062D9252}" type="presOf" srcId="{A59CC7A5-D768-46BB-881E-38135F09791D}" destId="{A09CE610-2605-4F96-9146-10F4BDC12089}" srcOrd="0" destOrd="0" presId="urn:microsoft.com/office/officeart/2005/8/layout/pList1"/>
+    <dgm:cxn modelId="{DEB80D80-F589-435F-8E52-CA70F3DF82EC}" type="presParOf" srcId="{A09CE610-2605-4F96-9146-10F4BDC12089}" destId="{BA14BA05-080A-407D-B214-E01CDF501204}" srcOrd="0" destOrd="0" presId="urn:microsoft.com/office/officeart/2005/8/layout/pList1"/>
+    <dgm:cxn modelId="{1EFAA57C-C4FA-41BE-924B-BD2B1AE4EE50}" type="presParOf" srcId="{BA14BA05-080A-407D-B214-E01CDF501204}" destId="{7032BB5A-2D8A-4300-838D-C47B2F2E4BA7}" srcOrd="0" destOrd="0" presId="urn:microsoft.com/office/officeart/2005/8/layout/pList1"/>
+    <dgm:cxn modelId="{AB1A2F32-08FD-43C7-9C68-B38192DD4BBA}" type="presParOf" srcId="{BA14BA05-080A-407D-B214-E01CDF501204}" destId="{01781F16-0C2D-4586-8AFB-F87900D9A657}" srcOrd="1" destOrd="0" presId="urn:microsoft.com/office/officeart/2005/8/layout/pList1"/>
+    <dgm:cxn modelId="{FF09DF6B-EFC0-4E58-810C-154A35D0A21A}" type="presParOf" srcId="{A09CE610-2605-4F96-9146-10F4BDC12089}" destId="{2C402089-8E84-4972-BD95-0ECFA8C7CDD0}" srcOrd="1" destOrd="0" presId="urn:microsoft.com/office/officeart/2005/8/layout/pList1"/>
+    <dgm:cxn modelId="{66B40D53-1DF6-4753-80B4-FAC3F82B9046}" type="presParOf" srcId="{A09CE610-2605-4F96-9146-10F4BDC12089}" destId="{55A9F854-E901-4D34-8982-91E3434C47A0}" srcOrd="2" destOrd="0" presId="urn:microsoft.com/office/officeart/2005/8/layout/pList1"/>
+    <dgm:cxn modelId="{FBF20499-73BB-4B33-A13B-5600E9B1CFE8}" type="presParOf" srcId="{55A9F854-E901-4D34-8982-91E3434C47A0}" destId="{E57FDBEA-07CD-4EE0-B9F6-B3513C800D23}" srcOrd="0" destOrd="0" presId="urn:microsoft.com/office/officeart/2005/8/layout/pList1"/>
+    <dgm:cxn modelId="{476D9C86-D72E-442D-A217-49D4DE1CEE35}" type="presParOf" srcId="{55A9F854-E901-4D34-8982-91E3434C47A0}" destId="{5A2326FB-9C5F-4C93-94B6-3F68487EE15B}" srcOrd="1" destOrd="0" presId="urn:microsoft.com/office/officeart/2005/8/layout/pList1"/>
+    <dgm:cxn modelId="{2BC41412-C7FC-4C4C-8A8E-FF3B9FB3330D}" type="presParOf" srcId="{A09CE610-2605-4F96-9146-10F4BDC12089}" destId="{FBB6A2C1-ABDE-4364-BDF9-6EBC88D5F2AF}" srcOrd="3" destOrd="0" presId="urn:microsoft.com/office/officeart/2005/8/layout/pList1"/>
+    <dgm:cxn modelId="{27711C6D-6B9B-4C9C-92C6-67AFB4CD0498}" type="presParOf" srcId="{A09CE610-2605-4F96-9146-10F4BDC12089}" destId="{5600010E-AFAD-4192-9F26-4CA4FBF925C4}" srcOrd="4" destOrd="0" presId="urn:microsoft.com/office/officeart/2005/8/layout/pList1"/>
+    <dgm:cxn modelId="{22283B7E-98F7-4F81-87EC-507CEB50333D}" type="presParOf" srcId="{5600010E-AFAD-4192-9F26-4CA4FBF925C4}" destId="{48E9D8B7-C615-4785-9984-18582DDB6C31}" srcOrd="0" destOrd="0" presId="urn:microsoft.com/office/officeart/2005/8/layout/pList1"/>
+    <dgm:cxn modelId="{74638D9A-D647-4BBD-A2E1-AEE5BAA8F0D1}" type="presParOf" srcId="{5600010E-AFAD-4192-9F26-4CA4FBF925C4}" destId="{D267D666-2C35-4EC6-8B1E-910B727C725A}" srcOrd="1" destOrd="0" presId="urn:microsoft.com/office/officeart/2005/8/layout/pList1"/>
+  </dgm:cxnLst>
+  <dgm:bg>
+    <a:noFill/>
+  </dgm:bg>
   <dgm:whole/>
   <dgm:extLst>
     <a:ext uri="http://schemas.microsoft.com/office/drawing/2008/diagram">
@@ -10580,8 +11508,8 @@
       </dsp:nvSpPr>
       <dsp:spPr>
         <a:xfrm>
-          <a:off x="0" y="3130"/>
-          <a:ext cx="10515601" cy="728518"/>
+          <a:off x="0" y="1438"/>
+          <a:ext cx="10515601" cy="729231"/>
         </a:xfrm>
         <a:prstGeom prst="roundRect">
           <a:avLst>
@@ -10622,8 +11550,8 @@
       </dsp:nvSpPr>
       <dsp:spPr>
         <a:xfrm>
-          <a:off x="220376" y="167046"/>
-          <a:ext cx="400685" cy="400685"/>
+          <a:off x="220592" y="165515"/>
+          <a:ext cx="401077" cy="401077"/>
         </a:xfrm>
         <a:prstGeom prst="rect">
           <a:avLst/>
@@ -10672,8 +11600,8 @@
       </dsp:nvSpPr>
       <dsp:spPr>
         <a:xfrm>
-          <a:off x="841439" y="3130"/>
-          <a:ext cx="4732020" cy="728518"/>
+          <a:off x="842261" y="1438"/>
+          <a:ext cx="4732020" cy="729231"/>
         </a:xfrm>
         <a:prstGeom prst="rect">
           <a:avLst/>
@@ -10697,7 +11625,7 @@
         <a:fontRef idx="minor"/>
       </dsp:style>
       <dsp:txBody>
-        <a:bodyPr spcFirstLastPara="0" vert="horz" wrap="square" lIns="77102" tIns="77102" rIns="77102" bIns="77102" numCol="1" spcCol="1270" anchor="ctr" anchorCtr="0">
+        <a:bodyPr spcFirstLastPara="0" vert="horz" wrap="square" lIns="77177" tIns="77177" rIns="77177" bIns="77177" numCol="1" spcCol="1270" anchor="ctr" anchorCtr="0">
           <a:noAutofit/>
         </a:bodyPr>
         <a:lstStyle/>
@@ -10722,8 +11650,8 @@
         </a:p>
       </dsp:txBody>
       <dsp:txXfrm>
-        <a:off x="841439" y="3130"/>
-        <a:ext cx="4732020" cy="728518"/>
+        <a:off x="842261" y="1438"/>
+        <a:ext cx="4732020" cy="729231"/>
       </dsp:txXfrm>
     </dsp:sp>
     <dsp:sp modelId="{0A06CC47-B981-45C2-A94F-BF6AF14E987E}">
@@ -10733,8 +11661,8 @@
       </dsp:nvSpPr>
       <dsp:spPr>
         <a:xfrm>
-          <a:off x="5573459" y="3130"/>
-          <a:ext cx="4941318" cy="728518"/>
+          <a:off x="5574282" y="1438"/>
+          <a:ext cx="4941318" cy="729231"/>
         </a:xfrm>
         <a:prstGeom prst="rect">
           <a:avLst/>
@@ -10758,7 +11686,7 @@
         <a:fontRef idx="minor"/>
       </dsp:style>
       <dsp:txBody>
-        <a:bodyPr spcFirstLastPara="0" vert="horz" wrap="square" lIns="77102" tIns="77102" rIns="77102" bIns="77102" numCol="1" spcCol="1270" anchor="ctr" anchorCtr="0">
+        <a:bodyPr spcFirstLastPara="0" vert="horz" wrap="square" lIns="77177" tIns="77177" rIns="77177" bIns="77177" numCol="1" spcCol="1270" anchor="ctr" anchorCtr="0">
           <a:noAutofit/>
         </a:bodyPr>
         <a:lstStyle/>
@@ -10776,25 +11704,16 @@
             <a:buNone/>
           </a:pPr>
           <a:r>
-            <a:rPr lang="en-GB" sz="1100" kern="1200" dirty="0">
-              <a:latin typeface="+mn-lt"/>
-              <a:ea typeface="Yu Gothic UI Semilight" panose="020B0400000000000000" pitchFamily="34" charset="-128"/>
-            </a:rPr>
+            <a:rPr lang="en-GB" sz="1100" b="0" i="0" kern="1200" dirty="0"/>
             <a:t>The </a:t>
           </a:r>
           <a:r>
-            <a:rPr lang="en-GB" sz="1100" b="1" kern="1200" dirty="0">
-              <a:latin typeface="+mn-lt"/>
-              <a:ea typeface="Yu Gothic UI Semilight" panose="020B0400000000000000" pitchFamily="34" charset="-128"/>
-            </a:rPr>
+            <a:rPr lang="en-GB" sz="1100" b="1" i="0" kern="1200" dirty="0"/>
             <a:t>smokes</a:t>
           </a:r>
           <a:r>
-            <a:rPr lang="en-GB" sz="1100" kern="1200" dirty="0">
-              <a:latin typeface="+mn-lt"/>
-              <a:ea typeface="Yu Gothic UI Semilight" panose="020B0400000000000000" pitchFamily="34" charset="-128"/>
-            </a:rPr>
-            <a:t> column contains several categories aside from no smoker status. We will convert these into a binary label: users who answered no will be labelled as non-smokers, while all other responses will be labelled as smokers. This will create a clearer distinction for the classification.</a:t>
+            <a:rPr lang="en-GB" sz="1100" b="0" i="0" kern="1200" dirty="0"/>
+            <a:t> column contained several categories aside from no smoker status. We converted these into a binary label: users who answered no were labelled as non-smokers, while all other responses were labelled as smokers. </a:t>
           </a:r>
           <a:endParaRPr lang="en-US" sz="1100" kern="1200" dirty="0">
             <a:latin typeface="+mn-lt"/>
@@ -10803,8 +11722,8 @@
         </a:p>
       </dsp:txBody>
       <dsp:txXfrm>
-        <a:off x="5573459" y="3130"/>
-        <a:ext cx="4941318" cy="728518"/>
+        <a:off x="5574282" y="1438"/>
+        <a:ext cx="4941318" cy="729231"/>
       </dsp:txXfrm>
     </dsp:sp>
     <dsp:sp modelId="{591D4A88-298A-4D98-96CD-F862B39A61F4}">
@@ -10814,8 +11733,8 @@
       </dsp:nvSpPr>
       <dsp:spPr>
         <a:xfrm>
-          <a:off x="0" y="913778"/>
-          <a:ext cx="10515601" cy="728518"/>
+          <a:off x="0" y="912977"/>
+          <a:ext cx="10515601" cy="729231"/>
         </a:xfrm>
         <a:prstGeom prst="roundRect">
           <a:avLst>
@@ -10856,8 +11775,8 @@
       </dsp:nvSpPr>
       <dsp:spPr>
         <a:xfrm>
-          <a:off x="220376" y="1077695"/>
-          <a:ext cx="400685" cy="400685"/>
+          <a:off x="220592" y="1077054"/>
+          <a:ext cx="401077" cy="401077"/>
         </a:xfrm>
         <a:prstGeom prst="rect">
           <a:avLst/>
@@ -10865,14 +11784,12 @@
         <a:blipFill>
           <a:blip xmlns:r="http://schemas.openxmlformats.org/officeDocument/2006/relationships">
             <a:extLst>
-              <a:ext uri="{28A0092B-C50C-407E-A947-70E740481C1C}">
-                <a14:useLocalDpi xmlns:a14="http://schemas.microsoft.com/office/drawing/2010/main" val="0"/>
-              </a:ext>
               <a:ext uri="{96DAC541-7B7A-43D3-8B79-37D633B846F1}">
                 <asvg:svgBlip xmlns:asvg="http://schemas.microsoft.com/office/drawing/2016/SVG/main" r:embed="rId2"/>
               </a:ext>
             </a:extLst>
           </a:blip>
+          <a:srcRect/>
           <a:stretch>
             <a:fillRect/>
           </a:stretch>
@@ -10906,8 +11823,8 @@
       </dsp:nvSpPr>
       <dsp:spPr>
         <a:xfrm>
-          <a:off x="841439" y="913778"/>
-          <a:ext cx="4732020" cy="728518"/>
+          <a:off x="842261" y="912977"/>
+          <a:ext cx="4732020" cy="729231"/>
         </a:xfrm>
         <a:prstGeom prst="rect">
           <a:avLst/>
@@ -10931,7 +11848,7 @@
         <a:fontRef idx="minor"/>
       </dsp:style>
       <dsp:txBody>
-        <a:bodyPr spcFirstLastPara="0" vert="horz" wrap="square" lIns="77102" tIns="77102" rIns="77102" bIns="77102" numCol="1" spcCol="1270" anchor="ctr" anchorCtr="0">
+        <a:bodyPr spcFirstLastPara="0" vert="horz" wrap="square" lIns="77177" tIns="77177" rIns="77177" bIns="77177" numCol="1" spcCol="1270" anchor="ctr" anchorCtr="0">
           <a:noAutofit/>
         </a:bodyPr>
         <a:lstStyle/>
@@ -10956,8 +11873,8 @@
         </a:p>
       </dsp:txBody>
       <dsp:txXfrm>
-        <a:off x="841439" y="913778"/>
-        <a:ext cx="4732020" cy="728518"/>
+        <a:off x="842261" y="912977"/>
+        <a:ext cx="4732020" cy="729231"/>
       </dsp:txXfrm>
     </dsp:sp>
     <dsp:sp modelId="{13BF9963-FC3D-40C6-B594-46E1D79DA245}">
@@ -10967,8 +11884,8 @@
       </dsp:nvSpPr>
       <dsp:spPr>
         <a:xfrm>
-          <a:off x="5573459" y="913778"/>
-          <a:ext cx="4941318" cy="728518"/>
+          <a:off x="5574282" y="912977"/>
+          <a:ext cx="4941318" cy="729231"/>
         </a:xfrm>
         <a:prstGeom prst="rect">
           <a:avLst/>
@@ -10992,7 +11909,7 @@
         <a:fontRef idx="minor"/>
       </dsp:style>
       <dsp:txBody>
-        <a:bodyPr spcFirstLastPara="0" vert="horz" wrap="square" lIns="77102" tIns="77102" rIns="77102" bIns="77102" numCol="1" spcCol="1270" anchor="ctr" anchorCtr="0">
+        <a:bodyPr spcFirstLastPara="0" vert="horz" wrap="square" lIns="77177" tIns="77177" rIns="77177" bIns="77177" numCol="1" spcCol="1270" anchor="ctr" anchorCtr="0">
           <a:noAutofit/>
         </a:bodyPr>
         <a:lstStyle/>
@@ -11010,25 +11927,8 @@
             <a:buNone/>
           </a:pPr>
           <a:r>
-            <a:rPr lang="en-GB" sz="1100" b="0" i="0" kern="1200" dirty="0">
-              <a:latin typeface="+mn-lt"/>
-              <a:ea typeface="Yu Gothic UI Semilight" panose="020B0400000000000000" pitchFamily="34" charset="-128"/>
-            </a:rPr>
-            <a:t>We will split the data into features (X) and labels (Y), before using a </a:t>
-          </a:r>
-          <a:r>
-            <a:rPr lang="en-GB" sz="1100" b="0" i="0" kern="1200" dirty="0" err="1">
-              <a:latin typeface="+mn-lt"/>
-              <a:ea typeface="Yu Gothic UI Semilight" panose="020B0400000000000000" pitchFamily="34" charset="-128"/>
-            </a:rPr>
-            <a:t>train_test_split</a:t>
-          </a:r>
-          <a:r>
-            <a:rPr lang="en-GB" sz="1100" b="0" i="0" kern="1200" dirty="0">
-              <a:latin typeface="+mn-lt"/>
-              <a:ea typeface="Yu Gothic UI Semilight" panose="020B0400000000000000" pitchFamily="34" charset="-128"/>
-            </a:rPr>
-            <a:t> to split the clean dataset into training and validation sets. This is done before encoding and standardising to prevent data leakage.</a:t>
+            <a:rPr lang="en-GB" sz="1100" b="0" i="0" kern="1200" dirty="0"/>
+            <a:t>We split the data into features (X) and labels (Y), then used a train-test split to divide the clean dataset into training and validation sets. This was done before encoding and standardising to prevent data leakage between sets.</a:t>
           </a:r>
           <a:endParaRPr lang="en-US" sz="1100" kern="1200" dirty="0">
             <a:latin typeface="+mn-lt"/>
@@ -11037,8 +11937,8 @@
         </a:p>
       </dsp:txBody>
       <dsp:txXfrm>
-        <a:off x="5573459" y="913778"/>
-        <a:ext cx="4941318" cy="728518"/>
+        <a:off x="5574282" y="912977"/>
+        <a:ext cx="4941318" cy="729231"/>
       </dsp:txXfrm>
     </dsp:sp>
     <dsp:sp modelId="{E95796B8-CB4A-44F8-ACBF-9F41AF6F350E}">
@@ -11048,8 +11948,8 @@
       </dsp:nvSpPr>
       <dsp:spPr>
         <a:xfrm>
-          <a:off x="0" y="1824427"/>
-          <a:ext cx="10515601" cy="728518"/>
+          <a:off x="0" y="1824516"/>
+          <a:ext cx="10515601" cy="729231"/>
         </a:xfrm>
         <a:prstGeom prst="roundRect">
           <a:avLst>
@@ -11090,8 +11990,8 @@
       </dsp:nvSpPr>
       <dsp:spPr>
         <a:xfrm>
-          <a:off x="220376" y="1988344"/>
-          <a:ext cx="400685" cy="400685"/>
+          <a:off x="220592" y="1988593"/>
+          <a:ext cx="401077" cy="401077"/>
         </a:xfrm>
         <a:prstGeom prst="rect">
           <a:avLst/>
@@ -11140,8 +12040,8 @@
       </dsp:nvSpPr>
       <dsp:spPr>
         <a:xfrm>
-          <a:off x="841439" y="1824427"/>
-          <a:ext cx="4732020" cy="728518"/>
+          <a:off x="842261" y="1824516"/>
+          <a:ext cx="4732020" cy="729231"/>
         </a:xfrm>
         <a:prstGeom prst="rect">
           <a:avLst/>
@@ -11165,7 +12065,7 @@
         <a:fontRef idx="minor"/>
       </dsp:style>
       <dsp:txBody>
-        <a:bodyPr spcFirstLastPara="0" vert="horz" wrap="square" lIns="77102" tIns="77102" rIns="77102" bIns="77102" numCol="1" spcCol="1270" anchor="ctr" anchorCtr="0">
+        <a:bodyPr spcFirstLastPara="0" vert="horz" wrap="square" lIns="77177" tIns="77177" rIns="77177" bIns="77177" numCol="1" spcCol="1270" anchor="ctr" anchorCtr="0">
           <a:noAutofit/>
         </a:bodyPr>
         <a:lstStyle/>
@@ -11190,8 +12090,8 @@
         </a:p>
       </dsp:txBody>
       <dsp:txXfrm>
-        <a:off x="841439" y="1824427"/>
-        <a:ext cx="4732020" cy="728518"/>
+        <a:off x="842261" y="1824516"/>
+        <a:ext cx="4732020" cy="729231"/>
       </dsp:txXfrm>
     </dsp:sp>
     <dsp:sp modelId="{207F25EA-76C1-4FC2-A295-FF5F7249C1D4}">
@@ -11201,8 +12101,8 @@
       </dsp:nvSpPr>
       <dsp:spPr>
         <a:xfrm>
-          <a:off x="5573459" y="1824427"/>
-          <a:ext cx="4941318" cy="728518"/>
+          <a:off x="5574282" y="1824516"/>
+          <a:ext cx="4941318" cy="729231"/>
         </a:xfrm>
         <a:prstGeom prst="rect">
           <a:avLst/>
@@ -11226,7 +12126,7 @@
         <a:fontRef idx="minor"/>
       </dsp:style>
       <dsp:txBody>
-        <a:bodyPr spcFirstLastPara="0" vert="horz" wrap="square" lIns="77102" tIns="77102" rIns="77102" bIns="77102" numCol="1" spcCol="1270" anchor="ctr" anchorCtr="0">
+        <a:bodyPr spcFirstLastPara="0" vert="horz" wrap="square" lIns="77177" tIns="77177" rIns="77177" bIns="77177" numCol="1" spcCol="1270" anchor="ctr" anchorCtr="0">
           <a:noAutofit/>
         </a:bodyPr>
         <a:lstStyle/>
@@ -11244,15 +12144,15 @@
             <a:buNone/>
           </a:pPr>
           <a:r>
-            <a:rPr lang="en-GB" sz="1100" kern="1200" dirty="0"/>
-            <a:t>For our categorical features, we will be using one-hot encoding to convert the features into a format that the machine learning algorithms can interpret.</a:t>
+            <a:rPr lang="en-GB" sz="1100" b="0" i="0" kern="1200" dirty="0"/>
+            <a:t>For our categorical features, we used one-hot encoding to convert the categorical features into a numeric format that the machine learning algorithms could interpret.</a:t>
           </a:r>
           <a:endParaRPr lang="en-US" sz="1100" kern="1200" dirty="0"/>
         </a:p>
       </dsp:txBody>
       <dsp:txXfrm>
-        <a:off x="5573459" y="1824427"/>
-        <a:ext cx="4941318" cy="728518"/>
+        <a:off x="5574282" y="1824516"/>
+        <a:ext cx="4941318" cy="729231"/>
       </dsp:txXfrm>
     </dsp:sp>
     <dsp:sp modelId="{D39E7134-0899-4778-AA52-AD38D575CE2F}">
@@ -11262,8 +12162,8 @@
       </dsp:nvSpPr>
       <dsp:spPr>
         <a:xfrm>
-          <a:off x="0" y="2735075"/>
-          <a:ext cx="10515601" cy="728518"/>
+          <a:off x="0" y="2736055"/>
+          <a:ext cx="10515601" cy="729231"/>
         </a:xfrm>
         <a:prstGeom prst="roundRect">
           <a:avLst>
@@ -11304,8 +12204,8 @@
       </dsp:nvSpPr>
       <dsp:spPr>
         <a:xfrm>
-          <a:off x="220376" y="2898992"/>
-          <a:ext cx="400685" cy="400685"/>
+          <a:off x="220592" y="2890289"/>
+          <a:ext cx="401077" cy="401077"/>
         </a:xfrm>
         <a:prstGeom prst="rect">
           <a:avLst/>
@@ -11313,14 +12213,12 @@
         <a:blipFill>
           <a:blip xmlns:r="http://schemas.openxmlformats.org/officeDocument/2006/relationships">
             <a:extLst>
-              <a:ext uri="{28A0092B-C50C-407E-A947-70E740481C1C}">
-                <a14:useLocalDpi xmlns:a14="http://schemas.microsoft.com/office/drawing/2010/main" val="0"/>
-              </a:ext>
               <a:ext uri="{96DAC541-7B7A-43D3-8B79-37D633B846F1}">
                 <asvg:svgBlip xmlns:asvg="http://schemas.microsoft.com/office/drawing/2016/SVG/main" r:embed="rId4"/>
               </a:ext>
             </a:extLst>
           </a:blip>
+          <a:srcRect/>
           <a:stretch>
             <a:fillRect/>
           </a:stretch>
@@ -11354,8 +12252,8 @@
       </dsp:nvSpPr>
       <dsp:spPr>
         <a:xfrm>
-          <a:off x="841439" y="2735075"/>
-          <a:ext cx="4732020" cy="728518"/>
+          <a:off x="842261" y="2736055"/>
+          <a:ext cx="4732020" cy="729231"/>
         </a:xfrm>
         <a:prstGeom prst="rect">
           <a:avLst/>
@@ -11379,7 +12277,7 @@
         <a:fontRef idx="minor"/>
       </dsp:style>
       <dsp:txBody>
-        <a:bodyPr spcFirstLastPara="0" vert="horz" wrap="square" lIns="77102" tIns="77102" rIns="77102" bIns="77102" numCol="1" spcCol="1270" anchor="ctr" anchorCtr="0">
+        <a:bodyPr spcFirstLastPara="0" vert="horz" wrap="square" lIns="77177" tIns="77177" rIns="77177" bIns="77177" numCol="1" spcCol="1270" anchor="ctr" anchorCtr="0">
           <a:noAutofit/>
         </a:bodyPr>
         <a:lstStyle/>
@@ -11404,8 +12302,8 @@
         </a:p>
       </dsp:txBody>
       <dsp:txXfrm>
-        <a:off x="841439" y="2735075"/>
-        <a:ext cx="4732020" cy="728518"/>
+        <a:off x="842261" y="2736055"/>
+        <a:ext cx="4732020" cy="729231"/>
       </dsp:txXfrm>
     </dsp:sp>
     <dsp:sp modelId="{31B96AEB-6F14-4E85-9147-2DB06D2B3421}">
@@ -11415,8 +12313,8 @@
       </dsp:nvSpPr>
       <dsp:spPr>
         <a:xfrm>
-          <a:off x="5573459" y="2735075"/>
-          <a:ext cx="4941318" cy="728518"/>
+          <a:off x="5574282" y="2736055"/>
+          <a:ext cx="4941318" cy="729231"/>
         </a:xfrm>
         <a:prstGeom prst="rect">
           <a:avLst/>
@@ -11440,7 +12338,7 @@
         <a:fontRef idx="minor"/>
       </dsp:style>
       <dsp:txBody>
-        <a:bodyPr spcFirstLastPara="0" vert="horz" wrap="square" lIns="77102" tIns="77102" rIns="77102" bIns="77102" numCol="1" spcCol="1270" anchor="ctr" anchorCtr="0">
+        <a:bodyPr spcFirstLastPara="0" vert="horz" wrap="square" lIns="77177" tIns="77177" rIns="77177" bIns="77177" numCol="1" spcCol="1270" anchor="ctr" anchorCtr="0">
           <a:noAutofit/>
         </a:bodyPr>
         <a:lstStyle/>
@@ -11458,15 +12356,15 @@
             <a:buNone/>
           </a:pPr>
           <a:r>
-            <a:rPr lang="en-GB" sz="1100" b="0" i="0" kern="1200"/>
-            <a:t>Because logistic regression models are sensitive to feature scale, we will create a standardised set of feature data. This helps the model learn more effectively and will improve convergence and performance.</a:t>
+            <a:rPr lang="en-GB" sz="1100" b="0" i="0" kern="1200" dirty="0"/>
+            <a:t>Because logistic regression models are sensitive to feature scale, we created a standardised set of feature data. This helped our logistic regression model learn more effectively and improved its performance.</a:t>
           </a:r>
-          <a:endParaRPr lang="en-US" sz="1100" kern="1200"/>
+          <a:endParaRPr lang="en-US" sz="1100" kern="1200" dirty="0"/>
         </a:p>
       </dsp:txBody>
       <dsp:txXfrm>
-        <a:off x="5573459" y="2735075"/>
-        <a:ext cx="4941318" cy="728518"/>
+        <a:off x="5574282" y="2736055"/>
+        <a:ext cx="4941318" cy="729231"/>
       </dsp:txXfrm>
     </dsp:sp>
   </dsp:spTree>
@@ -11488,7 +12386,7 @@
       </dsp:nvSpPr>
       <dsp:spPr>
         <a:xfrm>
-          <a:off x="0" y="0"/>
+          <a:off x="0" y="2638"/>
           <a:ext cx="4843462" cy="0"/>
         </a:xfrm>
         <a:prstGeom prst="line">
@@ -11538,8 +12436,8 @@
       </dsp:nvSpPr>
       <dsp:spPr>
         <a:xfrm>
-          <a:off x="0" y="0"/>
-          <a:ext cx="968692" cy="1350962"/>
+          <a:off x="0" y="2638"/>
+          <a:ext cx="968692" cy="1799524"/>
         </a:xfrm>
         <a:prstGeom prst="rect">
           <a:avLst/>
@@ -11587,13 +12485,13 @@
               </a:solidFill>
               <a:latin typeface="+mj-lt"/>
             </a:rPr>
-            <a:t>Q1</a:t>
+            <a:t>M1</a:t>
           </a:r>
         </a:p>
       </dsp:txBody>
       <dsp:txXfrm>
-        <a:off x="0" y="0"/>
-        <a:ext cx="968692" cy="1350962"/>
+        <a:off x="0" y="2638"/>
+        <a:ext cx="968692" cy="1799524"/>
       </dsp:txXfrm>
     </dsp:sp>
     <dsp:sp modelId="{E375414F-0076-4C00-857D-10F60768B5A1}">
@@ -11603,8 +12501,8 @@
       </dsp:nvSpPr>
       <dsp:spPr>
         <a:xfrm>
-          <a:off x="1041344" y="61347"/>
-          <a:ext cx="3802117" cy="1226948"/>
+          <a:off x="1041344" y="84355"/>
+          <a:ext cx="3802117" cy="1634333"/>
         </a:xfrm>
         <a:prstGeom prst="rect">
           <a:avLst/>
@@ -11654,13 +12552,13 @@
               <a:ea typeface="+mn-ea"/>
               <a:cs typeface="+mn-cs"/>
             </a:rPr>
-            <a:t>Market Research</a:t>
+            <a:t>Binomial Logistic regression</a:t>
           </a:r>
         </a:p>
       </dsp:txBody>
       <dsp:txXfrm>
-        <a:off x="1041344" y="61347"/>
-        <a:ext cx="3802117" cy="1226948"/>
+        <a:off x="1041344" y="84355"/>
+        <a:ext cx="3802117" cy="1634333"/>
       </dsp:txXfrm>
     </dsp:sp>
     <dsp:sp modelId="{A71BDFB5-6117-4C8B-8D80-B6049D42BB45}">
@@ -11670,7 +12568,7 @@
       </dsp:nvSpPr>
       <dsp:spPr>
         <a:xfrm>
-          <a:off x="968692" y="1288295"/>
+          <a:off x="968692" y="1718688"/>
           <a:ext cx="3874769" cy="0"/>
         </a:xfrm>
         <a:prstGeom prst="line">
@@ -11711,7 +12609,7 @@
       </dsp:nvSpPr>
       <dsp:spPr>
         <a:xfrm>
-          <a:off x="0" y="1350962"/>
+          <a:off x="0" y="1802162"/>
           <a:ext cx="4843462" cy="0"/>
         </a:xfrm>
         <a:prstGeom prst="line">
@@ -11761,8 +12659,8 @@
       </dsp:nvSpPr>
       <dsp:spPr>
         <a:xfrm>
-          <a:off x="0" y="1350962"/>
-          <a:ext cx="968692" cy="1350962"/>
+          <a:off x="0" y="1802162"/>
+          <a:ext cx="968692" cy="1799524"/>
         </a:xfrm>
         <a:prstGeom prst="rect">
           <a:avLst/>
@@ -11810,13 +12708,13 @@
               </a:solidFill>
               <a:latin typeface="+mj-lt"/>
             </a:rPr>
-            <a:t>Q2</a:t>
+            <a:t>M2</a:t>
           </a:r>
         </a:p>
       </dsp:txBody>
       <dsp:txXfrm>
-        <a:off x="0" y="1350962"/>
-        <a:ext cx="968692" cy="1350962"/>
+        <a:off x="0" y="1802162"/>
+        <a:ext cx="968692" cy="1799524"/>
       </dsp:txXfrm>
     </dsp:sp>
     <dsp:sp modelId="{8F8B6AF1-ABF7-490E-91F4-D9BF1971E612}">
@@ -11826,8 +12724,8 @@
       </dsp:nvSpPr>
       <dsp:spPr>
         <a:xfrm>
-          <a:off x="1041344" y="1412309"/>
-          <a:ext cx="3802117" cy="1226948"/>
+          <a:off x="1041344" y="1883879"/>
+          <a:ext cx="3802117" cy="1634333"/>
         </a:xfrm>
         <a:prstGeom prst="rect">
           <a:avLst/>
@@ -11877,13 +12775,13 @@
               <a:ea typeface="+mn-ea"/>
               <a:cs typeface="+mn-cs"/>
             </a:rPr>
-            <a:t>Product Development</a:t>
+            <a:t>Random Forests Classifier</a:t>
           </a:r>
         </a:p>
       </dsp:txBody>
       <dsp:txXfrm>
-        <a:off x="1041344" y="1412309"/>
-        <a:ext cx="3802117" cy="1226948"/>
+        <a:off x="1041344" y="1883879"/>
+        <a:ext cx="3802117" cy="1634333"/>
       </dsp:txXfrm>
     </dsp:sp>
     <dsp:sp modelId="{ED686FDA-E1A9-411A-922C-3304600C1C77}">
@@ -11893,7 +12791,7 @@
       </dsp:nvSpPr>
       <dsp:spPr>
         <a:xfrm>
-          <a:off x="968692" y="2639258"/>
+          <a:off x="968692" y="3518213"/>
           <a:ext cx="3874769" cy="0"/>
         </a:xfrm>
         <a:prstGeom prst="line">
@@ -11934,7 +12832,7 @@
       </dsp:nvSpPr>
       <dsp:spPr>
         <a:xfrm>
-          <a:off x="0" y="2701925"/>
+          <a:off x="0" y="3601687"/>
           <a:ext cx="4843462" cy="0"/>
         </a:xfrm>
         <a:prstGeom prst="line">
@@ -11984,8 +12882,8 @@
       </dsp:nvSpPr>
       <dsp:spPr>
         <a:xfrm>
-          <a:off x="0" y="2701925"/>
-          <a:ext cx="968692" cy="1350962"/>
+          <a:off x="0" y="3601687"/>
+          <a:ext cx="968692" cy="1799524"/>
         </a:xfrm>
         <a:prstGeom prst="rect">
           <a:avLst/>
@@ -12033,13 +12931,13 @@
               </a:solidFill>
               <a:latin typeface="+mj-lt"/>
             </a:rPr>
-            <a:t>Q3</a:t>
+            <a:t>M3</a:t>
           </a:r>
         </a:p>
       </dsp:txBody>
       <dsp:txXfrm>
-        <a:off x="0" y="2701925"/>
-        <a:ext cx="968692" cy="1350962"/>
+        <a:off x="0" y="3601687"/>
+        <a:ext cx="968692" cy="1799524"/>
       </dsp:txXfrm>
     </dsp:sp>
     <dsp:sp modelId="{9A0947CA-0828-427D-806E-BCC9C040AB48}">
@@ -12049,8 +12947,8 @@
       </dsp:nvSpPr>
       <dsp:spPr>
         <a:xfrm>
-          <a:off x="1041344" y="2763272"/>
-          <a:ext cx="3802117" cy="1226948"/>
+          <a:off x="1041344" y="3683403"/>
+          <a:ext cx="3802117" cy="1634333"/>
         </a:xfrm>
         <a:prstGeom prst="rect">
           <a:avLst/>
@@ -12100,13 +12998,35 @@
               <a:ea typeface="+mn-ea"/>
               <a:cs typeface="+mn-cs"/>
             </a:rPr>
-            <a:t>User Testing</a:t>
+            <a:t>K-nearest </a:t>
+          </a:r>
+          <a:r>
+            <a:rPr lang="en-US" sz="1600" b="0" i="0" kern="1200" cap="all" spc="300" baseline="0" dirty="0" err="1">
+              <a:solidFill>
+                <a:prstClr val="black"/>
+              </a:solidFill>
+              <a:latin typeface="Yu Gothic UI Semilight" panose="020B0400000000000000" pitchFamily="34" charset="-128"/>
+              <a:ea typeface="+mn-ea"/>
+              <a:cs typeface="+mn-cs"/>
+            </a:rPr>
+            <a:t>neigbours</a:t>
+          </a:r>
+          <a:r>
+            <a:rPr lang="en-US" sz="1600" b="0" i="0" kern="1200" cap="all" spc="300" baseline="0" dirty="0">
+              <a:solidFill>
+                <a:prstClr val="black"/>
+              </a:solidFill>
+              <a:latin typeface="Yu Gothic UI Semilight" panose="020B0400000000000000" pitchFamily="34" charset="-128"/>
+              <a:ea typeface="+mn-ea"/>
+              <a:cs typeface="+mn-cs"/>
+            </a:rPr>
+            <a:t> classifier</a:t>
           </a:r>
         </a:p>
       </dsp:txBody>
       <dsp:txXfrm>
-        <a:off x="1041344" y="2763272"/>
-        <a:ext cx="3802117" cy="1226948"/>
+        <a:off x="1041344" y="3683403"/>
+        <a:ext cx="3802117" cy="1634333"/>
       </dsp:txXfrm>
     </dsp:sp>
     <dsp:sp modelId="{58AEF715-538E-4FCF-B500-3EDFACBD68A6}">
@@ -12116,7 +13036,7 @@
       </dsp:nvSpPr>
       <dsp:spPr>
         <a:xfrm>
-          <a:off x="968692" y="3990220"/>
+          <a:off x="968692" y="5317737"/>
           <a:ext cx="3874769" cy="0"/>
         </a:xfrm>
         <a:prstGeom prst="line">
@@ -12150,30 +13070,41 @@
         <a:fontRef idx="minor"/>
       </dsp:style>
     </dsp:sp>
-    <dsp:sp modelId="{27ACEE2A-FEF4-404F-AB64-BBA8B44105A3}">
+  </dsp:spTree>
+</dsp:drawing>
+</file>
+
+<file path=ppt/diagrams/drawing7.xml><?xml version="1.0" encoding="utf-8"?>
+<dsp:drawing xmlns:dgm="http://schemas.openxmlformats.org/drawingml/2006/diagram" xmlns:dsp="http://schemas.microsoft.com/office/drawing/2008/diagram" xmlns:a="http://schemas.openxmlformats.org/drawingml/2006/main">
+  <dsp:spTree>
+    <dsp:nvGrpSpPr>
+      <dsp:cNvPr id="0" name=""/>
+      <dsp:cNvGrpSpPr/>
+    </dsp:nvGrpSpPr>
+    <dsp:grpSpPr/>
+    <dsp:sp modelId="{7032BB5A-2D8A-4300-838D-C47B2F2E4BA7}">
       <dsp:nvSpPr>
         <dsp:cNvPr id="0" name=""/>
         <dsp:cNvSpPr/>
       </dsp:nvSpPr>
       <dsp:spPr>
         <a:xfrm>
-          <a:off x="0" y="4052887"/>
-          <a:ext cx="4843462" cy="0"/>
+          <a:off x="533635" y="795"/>
+          <a:ext cx="2255490" cy="2252580"/>
         </a:xfrm>
-        <a:prstGeom prst="line">
+        <a:prstGeom prst="roundRect">
           <a:avLst/>
         </a:prstGeom>
-        <a:solidFill>
-          <a:schemeClr val="accent1">
-            <a:hueOff val="0"/>
-            <a:satOff val="0"/>
-            <a:lumOff val="0"/>
-            <a:alphaOff val="0"/>
-          </a:schemeClr>
-        </a:solidFill>
+        <a:blipFill>
+          <a:blip xmlns:r="http://schemas.openxmlformats.org/officeDocument/2006/relationships" r:embed="rId1"/>
+          <a:srcRect/>
+          <a:stretch>
+            <a:fillRect/>
+          </a:stretch>
+        </a:blipFill>
         <a:ln w="12700" cap="flat" cmpd="sng" algn="ctr">
           <a:solidFill>
-            <a:schemeClr val="accent1">
+            <a:schemeClr val="lt1">
               <a:hueOff val="0"/>
               <a:satOff val="0"/>
               <a:lumOff val="0"/>
@@ -12200,15 +13131,15 @@
         </a:fontRef>
       </dsp:style>
     </dsp:sp>
-    <dsp:sp modelId="{74391C42-C7D3-4D68-8573-85CF435773EE}">
+    <dsp:sp modelId="{01781F16-0C2D-4586-8AFB-F87900D9A657}">
       <dsp:nvSpPr>
         <dsp:cNvPr id="0" name=""/>
         <dsp:cNvSpPr/>
       </dsp:nvSpPr>
       <dsp:spPr>
         <a:xfrm>
-          <a:off x="0" y="4052887"/>
-          <a:ext cx="968692" cy="1350962"/>
+          <a:off x="26706" y="2253376"/>
+          <a:ext cx="3269347" cy="1212927"/>
         </a:xfrm>
         <a:prstGeom prst="rect">
           <a:avLst/>
@@ -12232,12 +13163,12 @@
         <a:fontRef idx="minor"/>
       </dsp:style>
       <dsp:txBody>
-        <a:bodyPr spcFirstLastPara="0" vert="horz" wrap="square" lIns="137160" tIns="137160" rIns="137160" bIns="137160" numCol="1" spcCol="1270" anchor="ctr" anchorCtr="0">
+        <a:bodyPr spcFirstLastPara="0" vert="horz" wrap="square" lIns="220472" tIns="220472" rIns="220472" bIns="0" numCol="1" spcCol="1270" anchor="t" anchorCtr="0">
           <a:noAutofit/>
         </a:bodyPr>
         <a:lstStyle/>
         <a:p>
-          <a:pPr marL="0" lvl="0" indent="0" algn="l" defTabSz="1600200">
+          <a:pPr marL="0" lvl="0" indent="0" algn="ctr" defTabSz="1377950">
             <a:lnSpc>
               <a:spcPct val="90000"/>
             </a:lnSpc>
@@ -12250,30 +13181,76 @@
             <a:buNone/>
           </a:pPr>
           <a:r>
-            <a:rPr lang="en-US" sz="3600" kern="1200" dirty="0">
-              <a:solidFill>
-                <a:schemeClr val="accent3"/>
-              </a:solidFill>
+            <a:rPr lang="en-GB" sz="3100" kern="1200" dirty="0">
               <a:latin typeface="+mj-lt"/>
             </a:rPr>
-            <a:t>Q4</a:t>
+            <a:t>Logistic Regression</a:t>
           </a:r>
         </a:p>
       </dsp:txBody>
       <dsp:txXfrm>
-        <a:off x="0" y="4052887"/>
-        <a:ext cx="968692" cy="1350962"/>
+        <a:off x="26706" y="2253376"/>
+        <a:ext cx="3269347" cy="1212927"/>
       </dsp:txXfrm>
     </dsp:sp>
-    <dsp:sp modelId="{2FEB345E-D9F3-4461-A6C6-B047D3390664}">
+    <dsp:sp modelId="{E57FDBEA-07CD-4EE0-B9F6-B3513C800D23}">
       <dsp:nvSpPr>
         <dsp:cNvPr id="0" name=""/>
         <dsp:cNvSpPr/>
       </dsp:nvSpPr>
       <dsp:spPr>
         <a:xfrm>
-          <a:off x="1041344" y="4114234"/>
-          <a:ext cx="3802117" cy="1226948"/>
+          <a:off x="4130054" y="795"/>
+          <a:ext cx="2255490" cy="2252580"/>
+        </a:xfrm>
+        <a:prstGeom prst="roundRect">
+          <a:avLst/>
+        </a:prstGeom>
+        <a:blipFill>
+          <a:blip xmlns:r="http://schemas.openxmlformats.org/officeDocument/2006/relationships" r:embed="rId2"/>
+          <a:srcRect/>
+          <a:stretch>
+            <a:fillRect/>
+          </a:stretch>
+        </a:blipFill>
+        <a:ln w="12700" cap="flat" cmpd="sng" algn="ctr">
+          <a:solidFill>
+            <a:schemeClr val="lt1">
+              <a:hueOff val="0"/>
+              <a:satOff val="0"/>
+              <a:lumOff val="0"/>
+              <a:alphaOff val="0"/>
+            </a:schemeClr>
+          </a:solidFill>
+          <a:prstDash val="solid"/>
+          <a:miter lim="800000"/>
+        </a:ln>
+        <a:effectLst/>
+      </dsp:spPr>
+      <dsp:style>
+        <a:lnRef idx="2">
+          <a:scrgbClr r="0" g="0" b="0"/>
+        </a:lnRef>
+        <a:fillRef idx="1">
+          <a:scrgbClr r="0" g="0" b="0"/>
+        </a:fillRef>
+        <a:effectRef idx="0">
+          <a:scrgbClr r="0" g="0" b="0"/>
+        </a:effectRef>
+        <a:fontRef idx="minor">
+          <a:schemeClr val="lt1"/>
+        </a:fontRef>
+      </dsp:style>
+    </dsp:sp>
+    <dsp:sp modelId="{5A2326FB-9C5F-4C93-94B6-3F68487EE15B}">
+      <dsp:nvSpPr>
+        <dsp:cNvPr id="0" name=""/>
+        <dsp:cNvSpPr/>
+      </dsp:nvSpPr>
+      <dsp:spPr>
+        <a:xfrm>
+          <a:off x="3623126" y="2253376"/>
+          <a:ext cx="3269347" cy="1212927"/>
         </a:xfrm>
         <a:prstGeom prst="rect">
           <a:avLst/>
@@ -12297,12 +13274,12 @@
         <a:fontRef idx="minor"/>
       </dsp:style>
       <dsp:txBody>
-        <a:bodyPr spcFirstLastPara="0" vert="horz" wrap="square" lIns="60960" tIns="60960" rIns="60960" bIns="60960" numCol="1" spcCol="1270" anchor="ctr" anchorCtr="0">
+        <a:bodyPr spcFirstLastPara="0" vert="horz" wrap="square" lIns="220472" tIns="220472" rIns="220472" bIns="0" numCol="1" spcCol="1270" anchor="t" anchorCtr="0">
           <a:noAutofit/>
         </a:bodyPr>
         <a:lstStyle/>
         <a:p>
-          <a:pPr marL="0" lvl="0" indent="0" algn="l" defTabSz="711200">
+          <a:pPr marL="0" lvl="0" indent="0" algn="ctr" defTabSz="1377950">
             <a:lnSpc>
               <a:spcPct val="90000"/>
             </a:lnSpc>
@@ -12315,46 +13292,47 @@
             <a:buNone/>
           </a:pPr>
           <a:r>
-            <a:rPr lang="en-US" sz="1600" b="0" i="0" kern="1200" cap="all" spc="300" baseline="0" dirty="0">
-              <a:solidFill>
-                <a:prstClr val="black"/>
-              </a:solidFill>
-              <a:latin typeface="Yu Gothic UI Semilight" panose="020B0400000000000000" pitchFamily="34" charset="-128"/>
-              <a:ea typeface="+mn-ea"/>
-              <a:cs typeface="+mn-cs"/>
+            <a:rPr lang="en-GB" sz="3100" kern="1200" dirty="0">
+              <a:latin typeface="+mj-lt"/>
             </a:rPr>
-            <a:t>Product Launch</a:t>
+            <a:t>Random Forests</a:t>
           </a:r>
         </a:p>
       </dsp:txBody>
       <dsp:txXfrm>
-        <a:off x="1041344" y="4114234"/>
-        <a:ext cx="3802117" cy="1226948"/>
+        <a:off x="3623126" y="2253376"/>
+        <a:ext cx="3269347" cy="1212927"/>
       </dsp:txXfrm>
     </dsp:sp>
-    <dsp:sp modelId="{E6365EE9-1704-48EE-8A92-5D8EA459D769}">
+    <dsp:sp modelId="{48E9D8B7-C615-4785-9984-18582DDB6C31}">
       <dsp:nvSpPr>
         <dsp:cNvPr id="0" name=""/>
         <dsp:cNvSpPr/>
       </dsp:nvSpPr>
       <dsp:spPr>
         <a:xfrm>
-          <a:off x="968692" y="5341183"/>
-          <a:ext cx="3874769" cy="0"/>
+          <a:off x="7726474" y="795"/>
+          <a:ext cx="2255490" cy="2252580"/>
         </a:xfrm>
-        <a:prstGeom prst="line">
+        <a:prstGeom prst="roundRect">
           <a:avLst/>
         </a:prstGeom>
-        <a:solidFill>
-          <a:schemeClr val="accent1">
-            <a:hueOff val="0"/>
-            <a:satOff val="0"/>
-            <a:lumOff val="0"/>
-            <a:alphaOff val="0"/>
-          </a:schemeClr>
-        </a:solidFill>
+        <a:blipFill>
+          <a:blip xmlns:r="http://schemas.openxmlformats.org/officeDocument/2006/relationships" r:embed="rId3"/>
+          <a:srcRect/>
+          <a:stretch>
+            <a:fillRect/>
+          </a:stretch>
+        </a:blipFill>
         <a:ln w="12700" cap="flat" cmpd="sng" algn="ctr">
-          <a:noFill/>
+          <a:solidFill>
+            <a:schemeClr val="lt1">
+              <a:hueOff val="0"/>
+              <a:satOff val="0"/>
+              <a:lumOff val="0"/>
+              <a:alphaOff val="0"/>
+            </a:schemeClr>
+          </a:solidFill>
           <a:prstDash val="solid"/>
           <a:miter lim="800000"/>
         </a:ln>
@@ -12370,8 +13348,72 @@
         <a:effectRef idx="0">
           <a:scrgbClr r="0" g="0" b="0"/>
         </a:effectRef>
+        <a:fontRef idx="minor">
+          <a:schemeClr val="lt1"/>
+        </a:fontRef>
+      </dsp:style>
+    </dsp:sp>
+    <dsp:sp modelId="{D267D666-2C35-4EC6-8B1E-910B727C725A}">
+      <dsp:nvSpPr>
+        <dsp:cNvPr id="0" name=""/>
+        <dsp:cNvSpPr/>
+      </dsp:nvSpPr>
+      <dsp:spPr>
+        <a:xfrm>
+          <a:off x="7219545" y="2253376"/>
+          <a:ext cx="3269347" cy="1212927"/>
+        </a:xfrm>
+        <a:prstGeom prst="rect">
+          <a:avLst/>
+        </a:prstGeom>
+        <a:noFill/>
+        <a:ln>
+          <a:noFill/>
+        </a:ln>
+        <a:effectLst/>
+      </dsp:spPr>
+      <dsp:style>
+        <a:lnRef idx="0">
+          <a:scrgbClr r="0" g="0" b="0"/>
+        </a:lnRef>
+        <a:fillRef idx="0">
+          <a:scrgbClr r="0" g="0" b="0"/>
+        </a:fillRef>
+        <a:effectRef idx="0">
+          <a:scrgbClr r="0" g="0" b="0"/>
+        </a:effectRef>
         <a:fontRef idx="minor"/>
       </dsp:style>
+      <dsp:txBody>
+        <a:bodyPr spcFirstLastPara="0" vert="horz" wrap="square" lIns="220472" tIns="220472" rIns="220472" bIns="0" numCol="1" spcCol="1270" anchor="t" anchorCtr="0">
+          <a:noAutofit/>
+        </a:bodyPr>
+        <a:lstStyle/>
+        <a:p>
+          <a:pPr marL="0" lvl="0" indent="0" algn="ctr" defTabSz="1377950">
+            <a:lnSpc>
+              <a:spcPct val="90000"/>
+            </a:lnSpc>
+            <a:spcBef>
+              <a:spcPct val="0"/>
+            </a:spcBef>
+            <a:spcAft>
+              <a:spcPct val="35000"/>
+            </a:spcAft>
+            <a:buNone/>
+          </a:pPr>
+          <a:r>
+            <a:rPr lang="en-GB" sz="3100" kern="1200" dirty="0">
+              <a:latin typeface="+mj-lt"/>
+            </a:rPr>
+            <a:t>K-Nearest Neighbours</a:t>
+          </a:r>
+        </a:p>
+      </dsp:txBody>
+      <dsp:txXfrm>
+        <a:off x="7219545" y="2253376"/>
+        <a:ext cx="3269347" cy="1212927"/>
+      </dsp:txXfrm>
     </dsp:sp>
   </dsp:spTree>
 </dsp:drawing>
@@ -13995,6 +15037,167 @@
 </dgm:layoutDef>
 </file>
 
+<file path=ppt/diagrams/layout7.xml><?xml version="1.0" encoding="utf-8"?>
+<dgm:layoutDef xmlns:dgm="http://schemas.openxmlformats.org/drawingml/2006/diagram" xmlns:a="http://schemas.openxmlformats.org/drawingml/2006/main" uniqueId="urn:microsoft.com/office/officeart/2005/8/layout/pList1">
+  <dgm:title val=""/>
+  <dgm:desc val=""/>
+  <dgm:catLst>
+    <dgm:cat type="list" pri="2000"/>
+    <dgm:cat type="picture" pri="2500"/>
+    <dgm:cat type="pictureconvert" pri="2500"/>
+  </dgm:catLst>
+  <dgm:sampData>
+    <dgm:dataModel>
+      <dgm:ptLst>
+        <dgm:pt modelId="0" type="doc"/>
+        <dgm:pt modelId="1">
+          <dgm:prSet phldr="1"/>
+        </dgm:pt>
+        <dgm:pt modelId="2">
+          <dgm:prSet phldr="1"/>
+        </dgm:pt>
+        <dgm:pt modelId="3">
+          <dgm:prSet phldr="1"/>
+        </dgm:pt>
+        <dgm:pt modelId="4">
+          <dgm:prSet phldr="1"/>
+        </dgm:pt>
+      </dgm:ptLst>
+      <dgm:cxnLst>
+        <dgm:cxn modelId="7" srcId="0" destId="1" srcOrd="0" destOrd="0"/>
+        <dgm:cxn modelId="8" srcId="0" destId="2" srcOrd="1" destOrd="0"/>
+        <dgm:cxn modelId="9" srcId="0" destId="3" srcOrd="2" destOrd="0"/>
+        <dgm:cxn modelId="10" srcId="0" destId="4" srcOrd="3" destOrd="0"/>
+      </dgm:cxnLst>
+      <dgm:bg/>
+      <dgm:whole/>
+    </dgm:dataModel>
+  </dgm:sampData>
+  <dgm:styleData>
+    <dgm:dataModel>
+      <dgm:ptLst>
+        <dgm:pt modelId="0" type="doc"/>
+        <dgm:pt modelId="1"/>
+        <dgm:pt modelId="2"/>
+      </dgm:ptLst>
+      <dgm:cxnLst>
+        <dgm:cxn modelId="3" srcId="0" destId="1" srcOrd="0" destOrd="0"/>
+        <dgm:cxn modelId="4" srcId="0" destId="2" srcOrd="1" destOrd="0"/>
+      </dgm:cxnLst>
+      <dgm:bg/>
+      <dgm:whole/>
+    </dgm:dataModel>
+  </dgm:styleData>
+  <dgm:clrData useDef="1">
+    <dgm:dataModel>
+      <dgm:ptLst/>
+      <dgm:bg/>
+      <dgm:whole/>
+    </dgm:dataModel>
+  </dgm:clrData>
+  <dgm:layoutNode name="Name0">
+    <dgm:varLst>
+      <dgm:dir/>
+      <dgm:resizeHandles val="exact"/>
+    </dgm:varLst>
+    <dgm:choose name="Name1">
+      <dgm:if name="Name2" axis="self" func="var" arg="dir" op="equ" val="norm">
+        <dgm:alg type="snake">
+          <dgm:param type="grDir" val="tL"/>
+          <dgm:param type="flowDir" val="row"/>
+          <dgm:param type="contDir" val="sameDir"/>
+          <dgm:param type="off" val="ctr"/>
+          <dgm:param type="vertAlign" val="mid"/>
+          <dgm:param type="horzAlign" val="ctr"/>
+        </dgm:alg>
+      </dgm:if>
+      <dgm:else name="Name3">
+        <dgm:alg type="snake">
+          <dgm:param type="grDir" val="tR"/>
+          <dgm:param type="flowDir" val="row"/>
+          <dgm:param type="contDir" val="sameDir"/>
+          <dgm:param type="off" val="ctr"/>
+          <dgm:param type="vertAlign" val="mid"/>
+          <dgm:param type="horzAlign" val="ctr"/>
+        </dgm:alg>
+      </dgm:else>
+    </dgm:choose>
+    <dgm:shape xmlns:r="http://schemas.openxmlformats.org/officeDocument/2006/relationships" r:blip="">
+      <dgm:adjLst/>
+    </dgm:shape>
+    <dgm:presOf/>
+    <dgm:constrLst>
+      <dgm:constr type="w" for="ch" forName="compNode" refType="w"/>
+      <dgm:constr type="w" for="ch" ptType="sibTrans" refType="w" refFor="ch" refForName="compNode" op="equ" fact="0.1"/>
+      <dgm:constr type="sp" refType="w" refFor="ch" refForName="compNode" op="equ" fact="0.1"/>
+      <dgm:constr type="primFontSz" for="des" ptType="node" op="equ" val="65"/>
+    </dgm:constrLst>
+    <dgm:ruleLst/>
+    <dgm:forEach name="Name4" axis="ch" ptType="node">
+      <dgm:layoutNode name="compNode">
+        <dgm:alg type="composite">
+          <dgm:param type="ar" val="0.943"/>
+        </dgm:alg>
+        <dgm:shape xmlns:r="http://schemas.openxmlformats.org/officeDocument/2006/relationships" r:blip="">
+          <dgm:adjLst/>
+        </dgm:shape>
+        <dgm:presOf axis="self"/>
+        <dgm:constrLst>
+          <dgm:constr type="h" refType="w" fact="1.06"/>
+          <dgm:constr type="h" for="ch" forName="pictRect" refType="h" fact="0.65"/>
+          <dgm:constr type="w" for="ch" forName="pictRect" refType="w"/>
+          <dgm:constr type="l" for="ch" forName="pictRect"/>
+          <dgm:constr type="t" for="ch" forName="pictRect"/>
+          <dgm:constr type="w" for="ch" forName="textRect" refType="w"/>
+          <dgm:constr type="h" for="ch" forName="textRect" refType="h" fact="0.35"/>
+          <dgm:constr type="l" for="ch" forName="textRect"/>
+          <dgm:constr type="t" for="ch" forName="textRect" refType="b" refFor="ch" refForName="pictRect"/>
+        </dgm:constrLst>
+        <dgm:ruleLst/>
+        <dgm:layoutNode name="pictRect">
+          <dgm:alg type="sp"/>
+          <dgm:shape xmlns:r="http://schemas.openxmlformats.org/officeDocument/2006/relationships" type="roundRect" r:blip="" blipPhldr="1">
+            <dgm:adjLst/>
+          </dgm:shape>
+          <dgm:presOf/>
+          <dgm:constrLst/>
+          <dgm:ruleLst/>
+        </dgm:layoutNode>
+        <dgm:layoutNode name="textRect" styleLbl="revTx">
+          <dgm:varLst>
+            <dgm:bulletEnabled val="1"/>
+          </dgm:varLst>
+          <dgm:alg type="tx">
+            <dgm:param type="txAnchorVert" val="t"/>
+          </dgm:alg>
+          <dgm:shape xmlns:r="http://schemas.openxmlformats.org/officeDocument/2006/relationships" type="rect" r:blip="">
+            <dgm:adjLst/>
+          </dgm:shape>
+          <dgm:presOf axis="desOrSelf" ptType="node"/>
+          <dgm:constrLst>
+            <dgm:constr type="bMarg"/>
+          </dgm:constrLst>
+          <dgm:ruleLst>
+            <dgm:rule type="primFontSz" val="5" fact="NaN" max="NaN"/>
+          </dgm:ruleLst>
+        </dgm:layoutNode>
+      </dgm:layoutNode>
+      <dgm:forEach name="Name5" axis="followSib" ptType="sibTrans" cnt="1">
+        <dgm:layoutNode name="sibTrans">
+          <dgm:alg type="sp"/>
+          <dgm:shape xmlns:r="http://schemas.openxmlformats.org/officeDocument/2006/relationships" type="rect" r:blip="" hideGeom="1">
+            <dgm:adjLst/>
+          </dgm:shape>
+          <dgm:presOf axis="self"/>
+          <dgm:constrLst/>
+          <dgm:ruleLst/>
+        </dgm:layoutNode>
+      </dgm:forEach>
+    </dgm:forEach>
+  </dgm:layoutNode>
+</dgm:layoutDef>
+</file>
+
 <file path=ppt/diagrams/quickStyle1.xml><?xml version="1.0" encoding="utf-8"?>
 <dgm:styleDef xmlns:dgm="http://schemas.openxmlformats.org/drawingml/2006/diagram" xmlns:a="http://schemas.openxmlformats.org/drawingml/2006/main" uniqueId="urn:microsoft.com/office/officeart/2005/8/quickstyle/simple1#1">
   <dgm:title val=""/>
@@ -20502,6 +21705,1194 @@
         <a:scrgbClr r="0" g="0" b="0"/>
       </a:effectRef>
       <a:fontRef idx="minor"/>
+    </dgm:style>
+  </dgm:styleLbl>
+</dgm:styleDef>
+</file>
+
+<file path=ppt/diagrams/quickStyle7.xml><?xml version="1.0" encoding="utf-8"?>
+<dgm:styleDef xmlns:dgm="http://schemas.openxmlformats.org/drawingml/2006/diagram" xmlns:a="http://schemas.openxmlformats.org/drawingml/2006/main" uniqueId="urn:microsoft.com/office/officeart/2005/8/quickstyle/simple1">
+  <dgm:title val=""/>
+  <dgm:desc val=""/>
+  <dgm:catLst>
+    <dgm:cat type="simple" pri="10100"/>
+  </dgm:catLst>
+  <dgm:scene3d>
+    <a:camera prst="orthographicFront"/>
+    <a:lightRig rig="threePt" dir="t"/>
+  </dgm:scene3d>
+  <dgm:styleLbl name="node0">
+    <dgm:scene3d>
+      <a:camera prst="orthographicFront"/>
+      <a:lightRig rig="threePt" dir="t"/>
+    </dgm:scene3d>
+    <dgm:sp3d/>
+    <dgm:txPr/>
+    <dgm:style>
+      <a:lnRef idx="2">
+        <a:scrgbClr r="0" g="0" b="0"/>
+      </a:lnRef>
+      <a:fillRef idx="1">
+        <a:scrgbClr r="0" g="0" b="0"/>
+      </a:fillRef>
+      <a:effectRef idx="0">
+        <a:scrgbClr r="0" g="0" b="0"/>
+      </a:effectRef>
+      <a:fontRef idx="minor">
+        <a:schemeClr val="lt1"/>
+      </a:fontRef>
+    </dgm:style>
+  </dgm:styleLbl>
+  <dgm:styleLbl name="node0NoLn">
+    <dgm:scene3d>
+      <a:camera prst="orthographicFront"/>
+      <a:lightRig rig="threePt" dir="t"/>
+    </dgm:scene3d>
+    <dgm:sp3d/>
+    <dgm:txPr/>
+    <dgm:style>
+      <a:lnRef idx="1">
+        <a:scrgbClr r="0" g="0" b="0"/>
+      </a:lnRef>
+      <a:fillRef idx="1">
+        <a:scrgbClr r="0" g="0" b="0"/>
+      </a:fillRef>
+      <a:effectRef idx="0">
+        <a:scrgbClr r="0" g="0" b="0"/>
+      </a:effectRef>
+      <a:fontRef idx="minor">
+        <a:schemeClr val="lt1"/>
+      </a:fontRef>
+    </dgm:style>
+  </dgm:styleLbl>
+  <dgm:styleLbl name="lnNode1">
+    <dgm:scene3d>
+      <a:camera prst="orthographicFront"/>
+      <a:lightRig rig="threePt" dir="t"/>
+    </dgm:scene3d>
+    <dgm:sp3d/>
+    <dgm:txPr/>
+    <dgm:style>
+      <a:lnRef idx="2">
+        <a:scrgbClr r="0" g="0" b="0"/>
+      </a:lnRef>
+      <a:fillRef idx="1">
+        <a:scrgbClr r="0" g="0" b="0"/>
+      </a:fillRef>
+      <a:effectRef idx="0">
+        <a:scrgbClr r="0" g="0" b="0"/>
+      </a:effectRef>
+      <a:fontRef idx="minor">
+        <a:schemeClr val="lt1"/>
+      </a:fontRef>
+    </dgm:style>
+  </dgm:styleLbl>
+  <dgm:styleLbl name="vennNode1">
+    <dgm:scene3d>
+      <a:camera prst="orthographicFront"/>
+      <a:lightRig rig="threePt" dir="t"/>
+    </dgm:scene3d>
+    <dgm:sp3d/>
+    <dgm:txPr/>
+    <dgm:style>
+      <a:lnRef idx="2">
+        <a:scrgbClr r="0" g="0" b="0"/>
+      </a:lnRef>
+      <a:fillRef idx="1">
+        <a:scrgbClr r="0" g="0" b="0"/>
+      </a:fillRef>
+      <a:effectRef idx="0">
+        <a:scrgbClr r="0" g="0" b="0"/>
+      </a:effectRef>
+      <a:fontRef idx="minor">
+        <a:schemeClr val="tx1"/>
+      </a:fontRef>
+    </dgm:style>
+  </dgm:styleLbl>
+  <dgm:styleLbl name="alignNode1">
+    <dgm:scene3d>
+      <a:camera prst="orthographicFront"/>
+      <a:lightRig rig="threePt" dir="t"/>
+    </dgm:scene3d>
+    <dgm:sp3d/>
+    <dgm:txPr/>
+    <dgm:style>
+      <a:lnRef idx="2">
+        <a:scrgbClr r="0" g="0" b="0"/>
+      </a:lnRef>
+      <a:fillRef idx="1">
+        <a:scrgbClr r="0" g="0" b="0"/>
+      </a:fillRef>
+      <a:effectRef idx="0">
+        <a:scrgbClr r="0" g="0" b="0"/>
+      </a:effectRef>
+      <a:fontRef idx="minor">
+        <a:schemeClr val="lt1"/>
+      </a:fontRef>
+    </dgm:style>
+  </dgm:styleLbl>
+  <dgm:styleLbl name="node1">
+    <dgm:scene3d>
+      <a:camera prst="orthographicFront"/>
+      <a:lightRig rig="threePt" dir="t"/>
+    </dgm:scene3d>
+    <dgm:sp3d/>
+    <dgm:txPr/>
+    <dgm:style>
+      <a:lnRef idx="2">
+        <a:scrgbClr r="0" g="0" b="0"/>
+      </a:lnRef>
+      <a:fillRef idx="1">
+        <a:scrgbClr r="0" g="0" b="0"/>
+      </a:fillRef>
+      <a:effectRef idx="0">
+        <a:scrgbClr r="0" g="0" b="0"/>
+      </a:effectRef>
+      <a:fontRef idx="minor">
+        <a:schemeClr val="lt1"/>
+      </a:fontRef>
+    </dgm:style>
+  </dgm:styleLbl>
+  <dgm:styleLbl name="node1NoLn">
+    <dgm:scene3d>
+      <a:camera prst="orthographicFront"/>
+      <a:lightRig rig="threePt" dir="t"/>
+    </dgm:scene3d>
+    <dgm:sp3d/>
+    <dgm:txPr/>
+    <dgm:style>
+      <a:lnRef idx="1">
+        <a:scrgbClr r="0" g="0" b="0"/>
+      </a:lnRef>
+      <a:fillRef idx="1">
+        <a:scrgbClr r="0" g="0" b="0"/>
+      </a:fillRef>
+      <a:effectRef idx="0">
+        <a:scrgbClr r="0" g="0" b="0"/>
+      </a:effectRef>
+      <a:fontRef idx="minor">
+        <a:schemeClr val="lt1"/>
+      </a:fontRef>
+    </dgm:style>
+  </dgm:styleLbl>
+  <dgm:styleLbl name="ltNode1NoLn">
+    <dgm:scene3d>
+      <a:camera prst="orthographicFront"/>
+      <a:lightRig rig="threePt" dir="t"/>
+    </dgm:scene3d>
+    <dgm:sp3d/>
+    <dgm:txPr/>
+    <dgm:style>
+      <a:lnRef idx="1">
+        <a:scrgbClr r="0" g="0" b="0"/>
+      </a:lnRef>
+      <a:fillRef idx="1">
+        <a:scrgbClr r="0" g="0" b="0"/>
+      </a:fillRef>
+      <a:effectRef idx="0">
+        <a:scrgbClr r="0" g="0" b="0"/>
+      </a:effectRef>
+      <a:fontRef idx="minor">
+        <a:schemeClr val="lt1"/>
+      </a:fontRef>
+    </dgm:style>
+  </dgm:styleLbl>
+  <dgm:styleLbl name="node2">
+    <dgm:scene3d>
+      <a:camera prst="orthographicFront"/>
+      <a:lightRig rig="threePt" dir="t"/>
+    </dgm:scene3d>
+    <dgm:sp3d/>
+    <dgm:txPr/>
+    <dgm:style>
+      <a:lnRef idx="2">
+        <a:scrgbClr r="0" g="0" b="0"/>
+      </a:lnRef>
+      <a:fillRef idx="1">
+        <a:scrgbClr r="0" g="0" b="0"/>
+      </a:fillRef>
+      <a:effectRef idx="0">
+        <a:scrgbClr r="0" g="0" b="0"/>
+      </a:effectRef>
+      <a:fontRef idx="minor">
+        <a:schemeClr val="lt1"/>
+      </a:fontRef>
+    </dgm:style>
+  </dgm:styleLbl>
+  <dgm:styleLbl name="node2NoLn">
+    <dgm:scene3d>
+      <a:camera prst="orthographicFront"/>
+      <a:lightRig rig="threePt" dir="t"/>
+    </dgm:scene3d>
+    <dgm:sp3d/>
+    <dgm:txPr/>
+    <dgm:style>
+      <a:lnRef idx="1">
+        <a:scrgbClr r="0" g="0" b="0"/>
+      </a:lnRef>
+      <a:fillRef idx="1">
+        <a:scrgbClr r="0" g="0" b="0"/>
+      </a:fillRef>
+      <a:effectRef idx="0">
+        <a:scrgbClr r="0" g="0" b="0"/>
+      </a:effectRef>
+      <a:fontRef idx="minor">
+        <a:schemeClr val="lt1"/>
+      </a:fontRef>
+    </dgm:style>
+  </dgm:styleLbl>
+  <dgm:styleLbl name="node3">
+    <dgm:scene3d>
+      <a:camera prst="orthographicFront"/>
+      <a:lightRig rig="threePt" dir="t"/>
+    </dgm:scene3d>
+    <dgm:sp3d/>
+    <dgm:txPr/>
+    <dgm:style>
+      <a:lnRef idx="2">
+        <a:scrgbClr r="0" g="0" b="0"/>
+      </a:lnRef>
+      <a:fillRef idx="1">
+        <a:scrgbClr r="0" g="0" b="0"/>
+      </a:fillRef>
+      <a:effectRef idx="0">
+        <a:scrgbClr r="0" g="0" b="0"/>
+      </a:effectRef>
+      <a:fontRef idx="minor">
+        <a:schemeClr val="lt1"/>
+      </a:fontRef>
+    </dgm:style>
+  </dgm:styleLbl>
+  <dgm:styleLbl name="node3NoLn">
+    <dgm:scene3d>
+      <a:camera prst="orthographicFront"/>
+      <a:lightRig rig="threePt" dir="t"/>
+    </dgm:scene3d>
+    <dgm:sp3d/>
+    <dgm:txPr/>
+    <dgm:style>
+      <a:lnRef idx="1">
+        <a:scrgbClr r="0" g="0" b="0"/>
+      </a:lnRef>
+      <a:fillRef idx="1">
+        <a:scrgbClr r="0" g="0" b="0"/>
+      </a:fillRef>
+      <a:effectRef idx="0">
+        <a:scrgbClr r="0" g="0" b="0"/>
+      </a:effectRef>
+      <a:fontRef idx="minor">
+        <a:schemeClr val="lt1"/>
+      </a:fontRef>
+    </dgm:style>
+  </dgm:styleLbl>
+  <dgm:styleLbl name="node4">
+    <dgm:scene3d>
+      <a:camera prst="orthographicFront"/>
+      <a:lightRig rig="threePt" dir="t"/>
+    </dgm:scene3d>
+    <dgm:sp3d/>
+    <dgm:txPr/>
+    <dgm:style>
+      <a:lnRef idx="2">
+        <a:scrgbClr r="0" g="0" b="0"/>
+      </a:lnRef>
+      <a:fillRef idx="1">
+        <a:scrgbClr r="0" g="0" b="0"/>
+      </a:fillRef>
+      <a:effectRef idx="0">
+        <a:scrgbClr r="0" g="0" b="0"/>
+      </a:effectRef>
+      <a:fontRef idx="minor">
+        <a:schemeClr val="lt1"/>
+      </a:fontRef>
+    </dgm:style>
+  </dgm:styleLbl>
+  <dgm:styleLbl name="node4NoLn">
+    <dgm:scene3d>
+      <a:camera prst="orthographicFront"/>
+      <a:lightRig rig="threePt" dir="t"/>
+    </dgm:scene3d>
+    <dgm:sp3d/>
+    <dgm:txPr/>
+    <dgm:style>
+      <a:lnRef idx="1">
+        <a:scrgbClr r="0" g="0" b="0"/>
+      </a:lnRef>
+      <a:fillRef idx="1">
+        <a:scrgbClr r="0" g="0" b="0"/>
+      </a:fillRef>
+      <a:effectRef idx="0">
+        <a:scrgbClr r="0" g="0" b="0"/>
+      </a:effectRef>
+      <a:fontRef idx="minor">
+        <a:schemeClr val="lt1"/>
+      </a:fontRef>
+    </dgm:style>
+  </dgm:styleLbl>
+  <dgm:styleLbl name="fgImgPlace1">
+    <dgm:scene3d>
+      <a:camera prst="orthographicFront"/>
+      <a:lightRig rig="threePt" dir="t"/>
+    </dgm:scene3d>
+    <dgm:sp3d/>
+    <dgm:txPr/>
+    <dgm:style>
+      <a:lnRef idx="2">
+        <a:scrgbClr r="0" g="0" b="0"/>
+      </a:lnRef>
+      <a:fillRef idx="1">
+        <a:scrgbClr r="0" g="0" b="0"/>
+      </a:fillRef>
+      <a:effectRef idx="0">
+        <a:scrgbClr r="0" g="0" b="0"/>
+      </a:effectRef>
+      <a:fontRef idx="minor"/>
+    </dgm:style>
+  </dgm:styleLbl>
+  <dgm:styleLbl name="alignImgPlace1">
+    <dgm:scene3d>
+      <a:camera prst="orthographicFront"/>
+      <a:lightRig rig="threePt" dir="t"/>
+    </dgm:scene3d>
+    <dgm:sp3d/>
+    <dgm:txPr/>
+    <dgm:style>
+      <a:lnRef idx="2">
+        <a:scrgbClr r="0" g="0" b="0"/>
+      </a:lnRef>
+      <a:fillRef idx="1">
+        <a:scrgbClr r="0" g="0" b="0"/>
+      </a:fillRef>
+      <a:effectRef idx="0">
+        <a:scrgbClr r="0" g="0" b="0"/>
+      </a:effectRef>
+      <a:fontRef idx="minor"/>
+    </dgm:style>
+  </dgm:styleLbl>
+  <dgm:styleLbl name="bgImgPlace1">
+    <dgm:scene3d>
+      <a:camera prst="orthographicFront"/>
+      <a:lightRig rig="threePt" dir="t"/>
+    </dgm:scene3d>
+    <dgm:sp3d/>
+    <dgm:txPr/>
+    <dgm:style>
+      <a:lnRef idx="2">
+        <a:scrgbClr r="0" g="0" b="0"/>
+      </a:lnRef>
+      <a:fillRef idx="1">
+        <a:scrgbClr r="0" g="0" b="0"/>
+      </a:fillRef>
+      <a:effectRef idx="0">
+        <a:scrgbClr r="0" g="0" b="0"/>
+      </a:effectRef>
+      <a:fontRef idx="minor"/>
+    </dgm:style>
+  </dgm:styleLbl>
+  <dgm:styleLbl name="sibTrans2D1">
+    <dgm:scene3d>
+      <a:camera prst="orthographicFront"/>
+      <a:lightRig rig="threePt" dir="t"/>
+    </dgm:scene3d>
+    <dgm:sp3d/>
+    <dgm:txPr/>
+    <dgm:style>
+      <a:lnRef idx="0">
+        <a:scrgbClr r="0" g="0" b="0"/>
+      </a:lnRef>
+      <a:fillRef idx="1">
+        <a:scrgbClr r="0" g="0" b="0"/>
+      </a:fillRef>
+      <a:effectRef idx="0">
+        <a:scrgbClr r="0" g="0" b="0"/>
+      </a:effectRef>
+      <a:fontRef idx="minor">
+        <a:schemeClr val="lt1"/>
+      </a:fontRef>
+    </dgm:style>
+  </dgm:styleLbl>
+  <dgm:styleLbl name="fgSibTrans2D1">
+    <dgm:scene3d>
+      <a:camera prst="orthographicFront"/>
+      <a:lightRig rig="threePt" dir="t"/>
+    </dgm:scene3d>
+    <dgm:sp3d/>
+    <dgm:txPr/>
+    <dgm:style>
+      <a:lnRef idx="0">
+        <a:scrgbClr r="0" g="0" b="0"/>
+      </a:lnRef>
+      <a:fillRef idx="1">
+        <a:scrgbClr r="0" g="0" b="0"/>
+      </a:fillRef>
+      <a:effectRef idx="0">
+        <a:scrgbClr r="0" g="0" b="0"/>
+      </a:effectRef>
+      <a:fontRef idx="minor">
+        <a:schemeClr val="lt1"/>
+      </a:fontRef>
+    </dgm:style>
+  </dgm:styleLbl>
+  <dgm:styleLbl name="bgSibTrans2D1">
+    <dgm:scene3d>
+      <a:camera prst="orthographicFront"/>
+      <a:lightRig rig="threePt" dir="t"/>
+    </dgm:scene3d>
+    <dgm:sp3d/>
+    <dgm:txPr/>
+    <dgm:style>
+      <a:lnRef idx="0">
+        <a:scrgbClr r="0" g="0" b="0"/>
+      </a:lnRef>
+      <a:fillRef idx="1">
+        <a:scrgbClr r="0" g="0" b="0"/>
+      </a:fillRef>
+      <a:effectRef idx="0">
+        <a:scrgbClr r="0" g="0" b="0"/>
+      </a:effectRef>
+      <a:fontRef idx="minor">
+        <a:schemeClr val="lt1"/>
+      </a:fontRef>
+    </dgm:style>
+  </dgm:styleLbl>
+  <dgm:styleLbl name="sibTrans1D1">
+    <dgm:scene3d>
+      <a:camera prst="orthographicFront"/>
+      <a:lightRig rig="threePt" dir="t"/>
+    </dgm:scene3d>
+    <dgm:sp3d/>
+    <dgm:txPr/>
+    <dgm:style>
+      <a:lnRef idx="1">
+        <a:scrgbClr r="0" g="0" b="0"/>
+      </a:lnRef>
+      <a:fillRef idx="0">
+        <a:scrgbClr r="0" g="0" b="0"/>
+      </a:fillRef>
+      <a:effectRef idx="0">
+        <a:scrgbClr r="0" g="0" b="0"/>
+      </a:effectRef>
+      <a:fontRef idx="minor"/>
+    </dgm:style>
+  </dgm:styleLbl>
+  <dgm:styleLbl name="callout">
+    <dgm:scene3d>
+      <a:camera prst="orthographicFront"/>
+      <a:lightRig rig="threePt" dir="t"/>
+    </dgm:scene3d>
+    <dgm:sp3d/>
+    <dgm:txPr/>
+    <dgm:style>
+      <a:lnRef idx="2">
+        <a:scrgbClr r="0" g="0" b="0"/>
+      </a:lnRef>
+      <a:fillRef idx="1">
+        <a:scrgbClr r="0" g="0" b="0"/>
+      </a:fillRef>
+      <a:effectRef idx="0">
+        <a:scrgbClr r="0" g="0" b="0"/>
+      </a:effectRef>
+      <a:fontRef idx="minor"/>
+    </dgm:style>
+  </dgm:styleLbl>
+  <dgm:styleLbl name="asst0">
+    <dgm:scene3d>
+      <a:camera prst="orthographicFront"/>
+      <a:lightRig rig="threePt" dir="t"/>
+    </dgm:scene3d>
+    <dgm:sp3d/>
+    <dgm:txPr/>
+    <dgm:style>
+      <a:lnRef idx="2">
+        <a:scrgbClr r="0" g="0" b="0"/>
+      </a:lnRef>
+      <a:fillRef idx="1">
+        <a:scrgbClr r="0" g="0" b="0"/>
+      </a:fillRef>
+      <a:effectRef idx="0">
+        <a:scrgbClr r="0" g="0" b="0"/>
+      </a:effectRef>
+      <a:fontRef idx="minor">
+        <a:schemeClr val="lt1"/>
+      </a:fontRef>
+    </dgm:style>
+  </dgm:styleLbl>
+  <dgm:styleLbl name="asst1">
+    <dgm:scene3d>
+      <a:camera prst="orthographicFront"/>
+      <a:lightRig rig="threePt" dir="t"/>
+    </dgm:scene3d>
+    <dgm:sp3d/>
+    <dgm:txPr/>
+    <dgm:style>
+      <a:lnRef idx="2">
+        <a:scrgbClr r="0" g="0" b="0"/>
+      </a:lnRef>
+      <a:fillRef idx="1">
+        <a:scrgbClr r="0" g="0" b="0"/>
+      </a:fillRef>
+      <a:effectRef idx="0">
+        <a:scrgbClr r="0" g="0" b="0"/>
+      </a:effectRef>
+      <a:fontRef idx="minor">
+        <a:schemeClr val="lt1"/>
+      </a:fontRef>
+    </dgm:style>
+  </dgm:styleLbl>
+  <dgm:styleLbl name="asst2">
+    <dgm:scene3d>
+      <a:camera prst="orthographicFront"/>
+      <a:lightRig rig="threePt" dir="t"/>
+    </dgm:scene3d>
+    <dgm:sp3d/>
+    <dgm:txPr/>
+    <dgm:style>
+      <a:lnRef idx="2">
+        <a:scrgbClr r="0" g="0" b="0"/>
+      </a:lnRef>
+      <a:fillRef idx="1">
+        <a:scrgbClr r="0" g="0" b="0"/>
+      </a:fillRef>
+      <a:effectRef idx="0">
+        <a:scrgbClr r="0" g="0" b="0"/>
+      </a:effectRef>
+      <a:fontRef idx="minor">
+        <a:schemeClr val="lt1"/>
+      </a:fontRef>
+    </dgm:style>
+  </dgm:styleLbl>
+  <dgm:styleLbl name="asst3">
+    <dgm:scene3d>
+      <a:camera prst="orthographicFront"/>
+      <a:lightRig rig="threePt" dir="t"/>
+    </dgm:scene3d>
+    <dgm:sp3d/>
+    <dgm:txPr/>
+    <dgm:style>
+      <a:lnRef idx="2">
+        <a:scrgbClr r="0" g="0" b="0"/>
+      </a:lnRef>
+      <a:fillRef idx="1">
+        <a:scrgbClr r="0" g="0" b="0"/>
+      </a:fillRef>
+      <a:effectRef idx="0">
+        <a:scrgbClr r="0" g="0" b="0"/>
+      </a:effectRef>
+      <a:fontRef idx="minor">
+        <a:schemeClr val="lt1"/>
+      </a:fontRef>
+    </dgm:style>
+  </dgm:styleLbl>
+  <dgm:styleLbl name="asst4">
+    <dgm:scene3d>
+      <a:camera prst="orthographicFront"/>
+      <a:lightRig rig="threePt" dir="t"/>
+    </dgm:scene3d>
+    <dgm:sp3d/>
+    <dgm:txPr/>
+    <dgm:style>
+      <a:lnRef idx="2">
+        <a:scrgbClr r="0" g="0" b="0"/>
+      </a:lnRef>
+      <a:fillRef idx="1">
+        <a:scrgbClr r="0" g="0" b="0"/>
+      </a:fillRef>
+      <a:effectRef idx="0">
+        <a:scrgbClr r="0" g="0" b="0"/>
+      </a:effectRef>
+      <a:fontRef idx="minor">
+        <a:schemeClr val="lt1"/>
+      </a:fontRef>
+    </dgm:style>
+  </dgm:styleLbl>
+  <dgm:styleLbl name="parChTrans2D1">
+    <dgm:scene3d>
+      <a:camera prst="orthographicFront"/>
+      <a:lightRig rig="threePt" dir="t"/>
+    </dgm:scene3d>
+    <dgm:sp3d/>
+    <dgm:txPr/>
+    <dgm:style>
+      <a:lnRef idx="2">
+        <a:scrgbClr r="0" g="0" b="0"/>
+      </a:lnRef>
+      <a:fillRef idx="1">
+        <a:scrgbClr r="0" g="0" b="0"/>
+      </a:fillRef>
+      <a:effectRef idx="0">
+        <a:scrgbClr r="0" g="0" b="0"/>
+      </a:effectRef>
+      <a:fontRef idx="minor">
+        <a:schemeClr val="lt1"/>
+      </a:fontRef>
+    </dgm:style>
+  </dgm:styleLbl>
+  <dgm:styleLbl name="parChTrans2D2">
+    <dgm:scene3d>
+      <a:camera prst="orthographicFront"/>
+      <a:lightRig rig="threePt" dir="t"/>
+    </dgm:scene3d>
+    <dgm:sp3d/>
+    <dgm:txPr/>
+    <dgm:style>
+      <a:lnRef idx="2">
+        <a:scrgbClr r="0" g="0" b="0"/>
+      </a:lnRef>
+      <a:fillRef idx="1">
+        <a:scrgbClr r="0" g="0" b="0"/>
+      </a:fillRef>
+      <a:effectRef idx="0">
+        <a:scrgbClr r="0" g="0" b="0"/>
+      </a:effectRef>
+      <a:fontRef idx="minor">
+        <a:schemeClr val="lt1"/>
+      </a:fontRef>
+    </dgm:style>
+  </dgm:styleLbl>
+  <dgm:styleLbl name="parChTrans2D3">
+    <dgm:scene3d>
+      <a:camera prst="orthographicFront"/>
+      <a:lightRig rig="threePt" dir="t"/>
+    </dgm:scene3d>
+    <dgm:sp3d/>
+    <dgm:txPr/>
+    <dgm:style>
+      <a:lnRef idx="2">
+        <a:scrgbClr r="0" g="0" b="0"/>
+      </a:lnRef>
+      <a:fillRef idx="1">
+        <a:scrgbClr r="0" g="0" b="0"/>
+      </a:fillRef>
+      <a:effectRef idx="0">
+        <a:scrgbClr r="0" g="0" b="0"/>
+      </a:effectRef>
+      <a:fontRef idx="minor">
+        <a:schemeClr val="lt1"/>
+      </a:fontRef>
+    </dgm:style>
+  </dgm:styleLbl>
+  <dgm:styleLbl name="parChTrans2D4">
+    <dgm:scene3d>
+      <a:camera prst="orthographicFront"/>
+      <a:lightRig rig="threePt" dir="t"/>
+    </dgm:scene3d>
+    <dgm:sp3d/>
+    <dgm:txPr/>
+    <dgm:style>
+      <a:lnRef idx="2">
+        <a:scrgbClr r="0" g="0" b="0"/>
+      </a:lnRef>
+      <a:fillRef idx="1">
+        <a:scrgbClr r="0" g="0" b="0"/>
+      </a:fillRef>
+      <a:effectRef idx="0">
+        <a:scrgbClr r="0" g="0" b="0"/>
+      </a:effectRef>
+      <a:fontRef idx="minor">
+        <a:schemeClr val="lt1"/>
+      </a:fontRef>
+    </dgm:style>
+  </dgm:styleLbl>
+  <dgm:styleLbl name="parChTrans1D1">
+    <dgm:scene3d>
+      <a:camera prst="orthographicFront"/>
+      <a:lightRig rig="threePt" dir="t"/>
+    </dgm:scene3d>
+    <dgm:sp3d/>
+    <dgm:txPr/>
+    <dgm:style>
+      <a:lnRef idx="2">
+        <a:scrgbClr r="0" g="0" b="0"/>
+      </a:lnRef>
+      <a:fillRef idx="0">
+        <a:scrgbClr r="0" g="0" b="0"/>
+      </a:fillRef>
+      <a:effectRef idx="0">
+        <a:scrgbClr r="0" g="0" b="0"/>
+      </a:effectRef>
+      <a:fontRef idx="minor"/>
+    </dgm:style>
+  </dgm:styleLbl>
+  <dgm:styleLbl name="parChTrans1D2">
+    <dgm:scene3d>
+      <a:camera prst="orthographicFront"/>
+      <a:lightRig rig="threePt" dir="t"/>
+    </dgm:scene3d>
+    <dgm:sp3d/>
+    <dgm:txPr/>
+    <dgm:style>
+      <a:lnRef idx="2">
+        <a:scrgbClr r="0" g="0" b="0"/>
+      </a:lnRef>
+      <a:fillRef idx="0">
+        <a:scrgbClr r="0" g="0" b="0"/>
+      </a:fillRef>
+      <a:effectRef idx="0">
+        <a:scrgbClr r="0" g="0" b="0"/>
+      </a:effectRef>
+      <a:fontRef idx="minor"/>
+    </dgm:style>
+  </dgm:styleLbl>
+  <dgm:styleLbl name="parChTrans1D3">
+    <dgm:scene3d>
+      <a:camera prst="orthographicFront"/>
+      <a:lightRig rig="threePt" dir="t"/>
+    </dgm:scene3d>
+    <dgm:sp3d/>
+    <dgm:txPr/>
+    <dgm:style>
+      <a:lnRef idx="2">
+        <a:scrgbClr r="0" g="0" b="0"/>
+      </a:lnRef>
+      <a:fillRef idx="0">
+        <a:scrgbClr r="0" g="0" b="0"/>
+      </a:fillRef>
+      <a:effectRef idx="0">
+        <a:scrgbClr r="0" g="0" b="0"/>
+      </a:effectRef>
+      <a:fontRef idx="minor"/>
+    </dgm:style>
+  </dgm:styleLbl>
+  <dgm:styleLbl name="parChTrans1D4">
+    <dgm:scene3d>
+      <a:camera prst="orthographicFront"/>
+      <a:lightRig rig="threePt" dir="t"/>
+    </dgm:scene3d>
+    <dgm:sp3d/>
+    <dgm:txPr/>
+    <dgm:style>
+      <a:lnRef idx="2">
+        <a:scrgbClr r="0" g="0" b="0"/>
+      </a:lnRef>
+      <a:fillRef idx="0">
+        <a:scrgbClr r="0" g="0" b="0"/>
+      </a:fillRef>
+      <a:effectRef idx="0">
+        <a:scrgbClr r="0" g="0" b="0"/>
+      </a:effectRef>
+      <a:fontRef idx="minor"/>
+    </dgm:style>
+  </dgm:styleLbl>
+  <dgm:styleLbl name="fgAcc1">
+    <dgm:scene3d>
+      <a:camera prst="orthographicFront"/>
+      <a:lightRig rig="threePt" dir="t"/>
+    </dgm:scene3d>
+    <dgm:sp3d/>
+    <dgm:txPr/>
+    <dgm:style>
+      <a:lnRef idx="2">
+        <a:scrgbClr r="0" g="0" b="0"/>
+      </a:lnRef>
+      <a:fillRef idx="1">
+        <a:scrgbClr r="0" g="0" b="0"/>
+      </a:fillRef>
+      <a:effectRef idx="0">
+        <a:scrgbClr r="0" g="0" b="0"/>
+      </a:effectRef>
+      <a:fontRef idx="minor"/>
+    </dgm:style>
+  </dgm:styleLbl>
+  <dgm:styleLbl name="conFgAcc1">
+    <dgm:scene3d>
+      <a:camera prst="orthographicFront"/>
+      <a:lightRig rig="threePt" dir="t"/>
+    </dgm:scene3d>
+    <dgm:sp3d/>
+    <dgm:txPr/>
+    <dgm:style>
+      <a:lnRef idx="2">
+        <a:scrgbClr r="0" g="0" b="0"/>
+      </a:lnRef>
+      <a:fillRef idx="1">
+        <a:scrgbClr r="0" g="0" b="0"/>
+      </a:fillRef>
+      <a:effectRef idx="0">
+        <a:scrgbClr r="0" g="0" b="0"/>
+      </a:effectRef>
+      <a:fontRef idx="minor"/>
+    </dgm:style>
+  </dgm:styleLbl>
+  <dgm:styleLbl name="alignAcc1">
+    <dgm:scene3d>
+      <a:camera prst="orthographicFront"/>
+      <a:lightRig rig="threePt" dir="t"/>
+    </dgm:scene3d>
+    <dgm:sp3d/>
+    <dgm:txPr/>
+    <dgm:style>
+      <a:lnRef idx="2">
+        <a:scrgbClr r="0" g="0" b="0"/>
+      </a:lnRef>
+      <a:fillRef idx="1">
+        <a:scrgbClr r="0" g="0" b="0"/>
+      </a:fillRef>
+      <a:effectRef idx="0">
+        <a:scrgbClr r="0" g="0" b="0"/>
+      </a:effectRef>
+      <a:fontRef idx="minor"/>
+    </dgm:style>
+  </dgm:styleLbl>
+  <dgm:styleLbl name="trAlignAcc1">
+    <dgm:scene3d>
+      <a:camera prst="orthographicFront"/>
+      <a:lightRig rig="threePt" dir="t"/>
+    </dgm:scene3d>
+    <dgm:sp3d/>
+    <dgm:txPr/>
+    <dgm:style>
+      <a:lnRef idx="1">
+        <a:scrgbClr r="0" g="0" b="0"/>
+      </a:lnRef>
+      <a:fillRef idx="1">
+        <a:scrgbClr r="0" g="0" b="0"/>
+      </a:fillRef>
+      <a:effectRef idx="0">
+        <a:scrgbClr r="0" g="0" b="0"/>
+      </a:effectRef>
+      <a:fontRef idx="minor"/>
+    </dgm:style>
+  </dgm:styleLbl>
+  <dgm:styleLbl name="bgAcc1">
+    <dgm:scene3d>
+      <a:camera prst="orthographicFront"/>
+      <a:lightRig rig="threePt" dir="t"/>
+    </dgm:scene3d>
+    <dgm:sp3d/>
+    <dgm:txPr/>
+    <dgm:style>
+      <a:lnRef idx="2">
+        <a:scrgbClr r="0" g="0" b="0"/>
+      </a:lnRef>
+      <a:fillRef idx="1">
+        <a:scrgbClr r="0" g="0" b="0"/>
+      </a:fillRef>
+      <a:effectRef idx="0">
+        <a:scrgbClr r="0" g="0" b="0"/>
+      </a:effectRef>
+      <a:fontRef idx="minor"/>
+    </dgm:style>
+  </dgm:styleLbl>
+  <dgm:styleLbl name="solidFgAcc1">
+    <dgm:scene3d>
+      <a:camera prst="orthographicFront"/>
+      <a:lightRig rig="threePt" dir="t"/>
+    </dgm:scene3d>
+    <dgm:sp3d/>
+    <dgm:txPr/>
+    <dgm:style>
+      <a:lnRef idx="2">
+        <a:scrgbClr r="0" g="0" b="0"/>
+      </a:lnRef>
+      <a:fillRef idx="1">
+        <a:scrgbClr r="0" g="0" b="0"/>
+      </a:fillRef>
+      <a:effectRef idx="0">
+        <a:scrgbClr r="0" g="0" b="0"/>
+      </a:effectRef>
+      <a:fontRef idx="minor"/>
+    </dgm:style>
+  </dgm:styleLbl>
+  <dgm:styleLbl name="solidAlignAcc1">
+    <dgm:scene3d>
+      <a:camera prst="orthographicFront"/>
+      <a:lightRig rig="threePt" dir="t"/>
+    </dgm:scene3d>
+    <dgm:sp3d/>
+    <dgm:txPr/>
+    <dgm:style>
+      <a:lnRef idx="2">
+        <a:scrgbClr r="0" g="0" b="0"/>
+      </a:lnRef>
+      <a:fillRef idx="1">
+        <a:scrgbClr r="0" g="0" b="0"/>
+      </a:fillRef>
+      <a:effectRef idx="0">
+        <a:scrgbClr r="0" g="0" b="0"/>
+      </a:effectRef>
+      <a:fontRef idx="minor"/>
+    </dgm:style>
+  </dgm:styleLbl>
+  <dgm:styleLbl name="solidBgAcc1">
+    <dgm:scene3d>
+      <a:camera prst="orthographicFront"/>
+      <a:lightRig rig="threePt" dir="t"/>
+    </dgm:scene3d>
+    <dgm:sp3d/>
+    <dgm:txPr/>
+    <dgm:style>
+      <a:lnRef idx="2">
+        <a:scrgbClr r="0" g="0" b="0"/>
+      </a:lnRef>
+      <a:fillRef idx="1">
+        <a:scrgbClr r="0" g="0" b="0"/>
+      </a:fillRef>
+      <a:effectRef idx="0">
+        <a:scrgbClr r="0" g="0" b="0"/>
+      </a:effectRef>
+      <a:fontRef idx="minor"/>
+    </dgm:style>
+  </dgm:styleLbl>
+  <dgm:styleLbl name="fgAccFollowNode1">
+    <dgm:scene3d>
+      <a:camera prst="orthographicFront"/>
+      <a:lightRig rig="threePt" dir="t"/>
+    </dgm:scene3d>
+    <dgm:sp3d/>
+    <dgm:txPr/>
+    <dgm:style>
+      <a:lnRef idx="2">
+        <a:scrgbClr r="0" g="0" b="0"/>
+      </a:lnRef>
+      <a:fillRef idx="1">
+        <a:scrgbClr r="0" g="0" b="0"/>
+      </a:fillRef>
+      <a:effectRef idx="0">
+        <a:scrgbClr r="0" g="0" b="0"/>
+      </a:effectRef>
+      <a:fontRef idx="minor"/>
+    </dgm:style>
+  </dgm:styleLbl>
+  <dgm:styleLbl name="alignAccFollowNode1">
+    <dgm:scene3d>
+      <a:camera prst="orthographicFront"/>
+      <a:lightRig rig="threePt" dir="t"/>
+    </dgm:scene3d>
+    <dgm:sp3d/>
+    <dgm:txPr/>
+    <dgm:style>
+      <a:lnRef idx="2">
+        <a:scrgbClr r="0" g="0" b="0"/>
+      </a:lnRef>
+      <a:fillRef idx="1">
+        <a:scrgbClr r="0" g="0" b="0"/>
+      </a:fillRef>
+      <a:effectRef idx="0">
+        <a:scrgbClr r="0" g="0" b="0"/>
+      </a:effectRef>
+      <a:fontRef idx="minor"/>
+    </dgm:style>
+  </dgm:styleLbl>
+  <dgm:styleLbl name="bgAccFollowNode1">
+    <dgm:scene3d>
+      <a:camera prst="orthographicFront"/>
+      <a:lightRig rig="threePt" dir="t"/>
+    </dgm:scene3d>
+    <dgm:sp3d/>
+    <dgm:txPr/>
+    <dgm:style>
+      <a:lnRef idx="2">
+        <a:scrgbClr r="0" g="0" b="0"/>
+      </a:lnRef>
+      <a:fillRef idx="1">
+        <a:scrgbClr r="0" g="0" b="0"/>
+      </a:fillRef>
+      <a:effectRef idx="0">
+        <a:scrgbClr r="0" g="0" b="0"/>
+      </a:effectRef>
+      <a:fontRef idx="minor"/>
+    </dgm:style>
+  </dgm:styleLbl>
+  <dgm:styleLbl name="fgAcc0">
+    <dgm:scene3d>
+      <a:camera prst="orthographicFront"/>
+      <a:lightRig rig="threePt" dir="t"/>
+    </dgm:scene3d>
+    <dgm:sp3d/>
+    <dgm:txPr/>
+    <dgm:style>
+      <a:lnRef idx="2">
+        <a:scrgbClr r="0" g="0" b="0"/>
+      </a:lnRef>
+      <a:fillRef idx="1">
+        <a:scrgbClr r="0" g="0" b="0"/>
+      </a:fillRef>
+      <a:effectRef idx="0">
+        <a:scrgbClr r="0" g="0" b="0"/>
+      </a:effectRef>
+      <a:fontRef idx="minor"/>
+    </dgm:style>
+  </dgm:styleLbl>
+  <dgm:styleLbl name="fgAcc2">
+    <dgm:scene3d>
+      <a:camera prst="orthographicFront"/>
+      <a:lightRig rig="threePt" dir="t"/>
+    </dgm:scene3d>
+    <dgm:sp3d/>
+    <dgm:txPr/>
+    <dgm:style>
+      <a:lnRef idx="2">
+        <a:scrgbClr r="0" g="0" b="0"/>
+      </a:lnRef>
+      <a:fillRef idx="1">
+        <a:scrgbClr r="0" g="0" b="0"/>
+      </a:fillRef>
+      <a:effectRef idx="0">
+        <a:scrgbClr r="0" g="0" b="0"/>
+      </a:effectRef>
+      <a:fontRef idx="minor"/>
+    </dgm:style>
+  </dgm:styleLbl>
+  <dgm:styleLbl name="fgAcc3">
+    <dgm:scene3d>
+      <a:camera prst="orthographicFront"/>
+      <a:lightRig rig="threePt" dir="t"/>
+    </dgm:scene3d>
+    <dgm:sp3d/>
+    <dgm:txPr/>
+    <dgm:style>
+      <a:lnRef idx="2">
+        <a:scrgbClr r="0" g="0" b="0"/>
+      </a:lnRef>
+      <a:fillRef idx="1">
+        <a:scrgbClr r="0" g="0" b="0"/>
+      </a:fillRef>
+      <a:effectRef idx="0">
+        <a:scrgbClr r="0" g="0" b="0"/>
+      </a:effectRef>
+      <a:fontRef idx="minor"/>
+    </dgm:style>
+  </dgm:styleLbl>
+  <dgm:styleLbl name="fgAcc4">
+    <dgm:scene3d>
+      <a:camera prst="orthographicFront"/>
+      <a:lightRig rig="threePt" dir="t"/>
+    </dgm:scene3d>
+    <dgm:sp3d/>
+    <dgm:txPr/>
+    <dgm:style>
+      <a:lnRef idx="2">
+        <a:scrgbClr r="0" g="0" b="0"/>
+      </a:lnRef>
+      <a:fillRef idx="1">
+        <a:scrgbClr r="0" g="0" b="0"/>
+      </a:fillRef>
+      <a:effectRef idx="0">
+        <a:scrgbClr r="0" g="0" b="0"/>
+      </a:effectRef>
+      <a:fontRef idx="minor"/>
+    </dgm:style>
+  </dgm:styleLbl>
+  <dgm:styleLbl name="bgShp">
+    <dgm:scene3d>
+      <a:camera prst="orthographicFront"/>
+      <a:lightRig rig="threePt" dir="t"/>
+    </dgm:scene3d>
+    <dgm:sp3d/>
+    <dgm:txPr/>
+    <dgm:style>
+      <a:lnRef idx="0">
+        <a:scrgbClr r="0" g="0" b="0"/>
+      </a:lnRef>
+      <a:fillRef idx="1">
+        <a:scrgbClr r="0" g="0" b="0"/>
+      </a:fillRef>
+      <a:effectRef idx="0">
+        <a:scrgbClr r="0" g="0" b="0"/>
+      </a:effectRef>
+      <a:fontRef idx="minor"/>
+    </dgm:style>
+  </dgm:styleLbl>
+  <dgm:styleLbl name="dkBgShp">
+    <dgm:scene3d>
+      <a:camera prst="orthographicFront"/>
+      <a:lightRig rig="threePt" dir="t"/>
+    </dgm:scene3d>
+    <dgm:sp3d/>
+    <dgm:txPr/>
+    <dgm:style>
+      <a:lnRef idx="0">
+        <a:scrgbClr r="0" g="0" b="0"/>
+      </a:lnRef>
+      <a:fillRef idx="1">
+        <a:scrgbClr r="0" g="0" b="0"/>
+      </a:fillRef>
+      <a:effectRef idx="0">
+        <a:scrgbClr r="0" g="0" b="0"/>
+      </a:effectRef>
+      <a:fontRef idx="minor"/>
+    </dgm:style>
+  </dgm:styleLbl>
+  <dgm:styleLbl name="trBgShp">
+    <dgm:scene3d>
+      <a:camera prst="orthographicFront"/>
+      <a:lightRig rig="threePt" dir="t"/>
+    </dgm:scene3d>
+    <dgm:sp3d/>
+    <dgm:txPr/>
+    <dgm:style>
+      <a:lnRef idx="0">
+        <a:scrgbClr r="0" g="0" b="0"/>
+      </a:lnRef>
+      <a:fillRef idx="1">
+        <a:scrgbClr r="0" g="0" b="0"/>
+      </a:fillRef>
+      <a:effectRef idx="0">
+        <a:scrgbClr r="0" g="0" b="0"/>
+      </a:effectRef>
+      <a:fontRef idx="minor"/>
+    </dgm:style>
+  </dgm:styleLbl>
+  <dgm:styleLbl name="fgShp">
+    <dgm:scene3d>
+      <a:camera prst="orthographicFront"/>
+      <a:lightRig rig="threePt" dir="t"/>
+    </dgm:scene3d>
+    <dgm:sp3d/>
+    <dgm:txPr/>
+    <dgm:style>
+      <a:lnRef idx="2">
+        <a:scrgbClr r="0" g="0" b="0"/>
+      </a:lnRef>
+      <a:fillRef idx="1">
+        <a:scrgbClr r="0" g="0" b="0"/>
+      </a:fillRef>
+      <a:effectRef idx="0">
+        <a:scrgbClr r="0" g="0" b="0"/>
+      </a:effectRef>
+      <a:fontRef idx="minor"/>
+    </dgm:style>
+  </dgm:styleLbl>
+  <dgm:styleLbl name="revTx">
+    <dgm:scene3d>
+      <a:camera prst="orthographicFront"/>
+      <a:lightRig rig="threePt" dir="t"/>
+    </dgm:scene3d>
+    <dgm:sp3d/>
+    <dgm:txPr/>
+    <dgm:style>
+      <a:lnRef idx="0">
+        <a:scrgbClr r="0" g="0" b="0"/>
+      </a:lnRef>
+      <a:fillRef idx="0">
+        <a:scrgbClr r="0" g="0" b="0"/>
+      </a:fillRef>
+      <a:effectRef idx="0">
+        <a:scrgbClr r="0" g="0" b="0"/>
+      </a:effectRef>
+      <a:fontRef idx="minor"/>
+    </dgm:style>
+  </dgm:styleLbl>
+  <dgm:styleLbl name="revTxLt">
+    <dgm:scene3d>
+      <a:camera prst="orthographicFront"/>
+      <a:lightRig rig="threePt" dir="t"/>
+    </dgm:scene3d>
+    <dgm:sp3d/>
+    <dgm:txPr/>
+    <dgm:style>
+      <a:lnRef idx="0">
+        <a:scrgbClr r="0" g="0" b="0"/>
+      </a:lnRef>
+      <a:fillRef idx="0">
+        <a:scrgbClr r="0" g="0" b="0"/>
+      </a:fillRef>
+      <a:effectRef idx="0">
+        <a:scrgbClr r="0" g="0" b="0"/>
+      </a:effectRef>
+      <a:fontRef idx="minor">
+        <a:schemeClr val="lt1"/>
+      </a:fontRef>
     </dgm:style>
   </dgm:styleLbl>
 </dgm:styleDef>
@@ -20601,7 +22992,7 @@
           <a:p>
             <a:fld id="{D3D47A4C-1800-412B-9042-C93F1924AECC}" type="datetimeFigureOut">
               <a:rPr lang="en-US" smtClean="0"/>
-              <a:t>8/27/2026</a:t>
+              <a:t>9/1/2026</a:t>
             </a:fld>
             <a:endParaRPr lang="en-US"/>
           </a:p>
@@ -20778,7 +23169,7 @@
           <a:p>
             <a:fld id="{7000EB3D-2307-4317-8A1D-B47FA45245F0}" type="datetimeFigureOut">
               <a:rPr lang="en-US" noProof="0" smtClean="0"/>
-              <a:t>8/27/2026</a:t>
+              <a:t>9/1/2026</a:t>
             </a:fld>
             <a:endParaRPr lang="en-US" noProof="0"/>
           </a:p>
@@ -21570,7 +23961,7 @@
           <a:p>
             <a:fld id="{F9880A97-BB72-4C49-B020-C005FF9D43B4}" type="datetime1">
               <a:rPr lang="en-US" smtClean="0"/>
-              <a:t>8/27/2026</a:t>
+              <a:t>9/1/2026</a:t>
             </a:fld>
             <a:endParaRPr lang="en-US" dirty="0"/>
           </a:p>
@@ -22258,7 +24649,7 @@
           <a:p>
             <a:fld id="{8B1E16E5-E5E5-4583-9AF7-83D9607A8145}" type="datetime1">
               <a:rPr lang="en-US" smtClean="0"/>
-              <a:t>8/27/2026</a:t>
+              <a:t>9/1/2026</a:t>
             </a:fld>
             <a:endParaRPr lang="en-US" dirty="0"/>
           </a:p>
@@ -22792,7 +25183,7 @@
           <a:p>
             <a:fld id="{0B4AC9CD-0374-4BE7-8481-7982C4A3E9D1}" type="datetime1">
               <a:rPr lang="en-US" smtClean="0"/>
-              <a:t>8/27/2026</a:t>
+              <a:t>9/1/2026</a:t>
             </a:fld>
             <a:endParaRPr lang="en-US" dirty="0"/>
           </a:p>
@@ -23433,7 +25824,7 @@
           <a:p>
             <a:fld id="{222400DF-651A-4479-9C74-9CDA47151016}" type="datetime1">
               <a:rPr lang="en-US" smtClean="0"/>
-              <a:t>8/27/2026</a:t>
+              <a:t>9/1/2026</a:t>
             </a:fld>
             <a:endParaRPr lang="en-US" dirty="0"/>
           </a:p>
@@ -24233,7 +26624,7 @@
           <a:p>
             <a:fld id="{1201FEBF-D140-4633-9B70-3A503CA61AD4}" type="datetime1">
               <a:rPr lang="en-US" smtClean="0"/>
-              <a:t>8/27/2026</a:t>
+              <a:t>9/1/2026</a:t>
             </a:fld>
             <a:endParaRPr lang="en-US" dirty="0"/>
           </a:p>
@@ -25118,7 +27509,7 @@
           <a:p>
             <a:fld id="{B63BE472-3891-4216-B770-F52E53667131}" type="datetime1">
               <a:rPr lang="en-US" smtClean="0"/>
-              <a:t>8/27/2026</a:t>
+              <a:t>9/1/2026</a:t>
             </a:fld>
             <a:endParaRPr lang="en-US" dirty="0"/>
           </a:p>
@@ -25451,7 +27842,7 @@
           <a:p>
             <a:fld id="{92C9618A-2189-4802-BD34-F288EF802528}" type="datetime1">
               <a:rPr lang="en-US" smtClean="0"/>
-              <a:t>8/27/2026</a:t>
+              <a:t>9/1/2026</a:t>
             </a:fld>
             <a:endParaRPr lang="en-US" dirty="0"/>
           </a:p>
@@ -25645,7 +28036,7 @@
             <a:fld id="{3CA3B387-33D3-4D27-BE27-9B85ACC6AC8A}" type="datetime1">
               <a:rPr lang="en-US" smtClean="0"/>
               <a:pPr/>
-              <a:t>8/27/2026</a:t>
+              <a:t>9/1/2026</a:t>
             </a:fld>
             <a:endParaRPr lang="en-US" dirty="0"/>
           </a:p>
@@ -26807,6 +29198,17 @@
 <file path=ppt/slides/slide13.xml><?xml version="1.0" encoding="utf-8"?>
 <p:sld xmlns:a="http://schemas.openxmlformats.org/drawingml/2006/main" xmlns:r="http://schemas.openxmlformats.org/officeDocument/2006/relationships" xmlns:p="http://schemas.openxmlformats.org/presentationml/2006/main">
   <p:cSld>
+    <p:bg>
+      <p:bgPr>
+        <a:solidFill>
+          <a:schemeClr val="accent1">
+            <a:lumMod val="40000"/>
+            <a:lumOff val="60000"/>
+          </a:schemeClr>
+        </a:solidFill>
+        <a:effectLst/>
+      </p:bgPr>
+    </p:bg>
     <p:spTree>
       <p:nvGrpSpPr>
         <p:cNvPr id="1" name="">
@@ -27222,7 +29624,21 @@
                 <a:latin typeface="Yu Gothic UI Semilight" panose="020B0400000000000000" pitchFamily="34" charset="-128"/>
                 <a:ea typeface="Yu Gothic UI Semilight" panose="020B0400000000000000" pitchFamily="34" charset="-128"/>
               </a:rPr>
-              <a:t>'sex’</a:t>
+              <a:t>'</a:t>
+            </a:r>
+            <a:r>
+              <a:rPr lang="en-GB" b="1" dirty="0">
+                <a:latin typeface="Yu Gothic UI Semilight" panose="020B0400000000000000" pitchFamily="34" charset="-128"/>
+                <a:ea typeface="Yu Gothic UI Semilight" panose="020B0400000000000000" pitchFamily="34" charset="-128"/>
+              </a:rPr>
+              <a:t>sex</a:t>
+            </a:r>
+            <a:r>
+              <a:rPr lang="en-GB" dirty="0">
+                <a:latin typeface="Yu Gothic UI Semilight" panose="020B0400000000000000" pitchFamily="34" charset="-128"/>
+                <a:ea typeface="Yu Gothic UI Semilight" panose="020B0400000000000000" pitchFamily="34" charset="-128"/>
+              </a:rPr>
+              <a:t>’</a:t>
             </a:r>
           </a:p>
           <a:p>
@@ -27238,7 +29654,7 @@
               <a:t>'</a:t>
             </a:r>
             <a:r>
-              <a:rPr lang="en-GB" dirty="0" err="1">
+              <a:rPr lang="en-GB" b="1" dirty="0" err="1">
                 <a:latin typeface="Yu Gothic UI Semilight" panose="020B0400000000000000" pitchFamily="34" charset="-128"/>
                 <a:ea typeface="Yu Gothic UI Semilight" panose="020B0400000000000000" pitchFamily="34" charset="-128"/>
               </a:rPr>
@@ -27262,72 +29678,21 @@
                 <a:latin typeface="Yu Gothic UI Semilight" panose="020B0400000000000000" pitchFamily="34" charset="-128"/>
                 <a:ea typeface="Yu Gothic UI Semilight" panose="020B0400000000000000" pitchFamily="34" charset="-128"/>
               </a:rPr>
-              <a:t>'diet’</a:t>
+              <a:t>'</a:t>
             </a:r>
-          </a:p>
-          <a:p>
-            <a:pPr marL="285750" indent="-285750">
-              <a:buFont typeface="Arial" panose="020B0604020202020204" pitchFamily="34" charset="0"/>
-              <a:buChar char="•"/>
-            </a:pPr>
+            <a:r>
+              <a:rPr lang="en-GB" b="1" dirty="0">
+                <a:latin typeface="Yu Gothic UI Semilight" panose="020B0400000000000000" pitchFamily="34" charset="-128"/>
+                <a:ea typeface="Yu Gothic UI Semilight" panose="020B0400000000000000" pitchFamily="34" charset="-128"/>
+              </a:rPr>
+              <a:t>diet</a:t>
+            </a:r>
             <a:r>
               <a:rPr lang="en-GB" dirty="0">
                 <a:latin typeface="Yu Gothic UI Semilight" panose="020B0400000000000000" pitchFamily="34" charset="-128"/>
                 <a:ea typeface="Yu Gothic UI Semilight" panose="020B0400000000000000" pitchFamily="34" charset="-128"/>
               </a:rPr>
-              <a:t>'drinks’</a:t>
-            </a:r>
-          </a:p>
-          <a:p>
-            <a:pPr marL="285750" indent="-285750">
-              <a:buFont typeface="Arial" panose="020B0604020202020204" pitchFamily="34" charset="0"/>
-              <a:buChar char="•"/>
-            </a:pPr>
-            <a:r>
-              <a:rPr lang="en-GB" dirty="0">
-                <a:latin typeface="Yu Gothic UI Semilight" panose="020B0400000000000000" pitchFamily="34" charset="-128"/>
-                <a:ea typeface="Yu Gothic UI Semilight" panose="020B0400000000000000" pitchFamily="34" charset="-128"/>
-              </a:rPr>
-              <a:t>'drugs’</a:t>
-            </a:r>
-          </a:p>
-          <a:p>
-            <a:pPr marL="285750" indent="-285750">
-              <a:buFont typeface="Arial" panose="020B0604020202020204" pitchFamily="34" charset="0"/>
-              <a:buChar char="•"/>
-            </a:pPr>
-            <a:r>
-              <a:rPr lang="en-GB" dirty="0">
-                <a:latin typeface="Yu Gothic UI Semilight" panose="020B0400000000000000" pitchFamily="34" charset="-128"/>
-                <a:ea typeface="Yu Gothic UI Semilight" panose="020B0400000000000000" pitchFamily="34" charset="-128"/>
-              </a:rPr>
-              <a:t>'education’</a:t>
-            </a:r>
-          </a:p>
-          <a:p>
-            <a:pPr marL="285750" indent="-285750">
-              <a:buFont typeface="Arial" panose="020B0604020202020204" pitchFamily="34" charset="0"/>
-              <a:buChar char="•"/>
-            </a:pPr>
-            <a:r>
-              <a:rPr lang="en-GB" dirty="0">
-                <a:latin typeface="Yu Gothic UI Semilight" panose="020B0400000000000000" pitchFamily="34" charset="-128"/>
-                <a:ea typeface="Yu Gothic UI Semilight" panose="020B0400000000000000" pitchFamily="34" charset="-128"/>
-              </a:rPr>
-              <a:t>'offspring’</a:t>
-            </a:r>
-          </a:p>
-          <a:p>
-            <a:pPr marL="285750" indent="-285750">
-              <a:buFont typeface="Arial" panose="020B0604020202020204" pitchFamily="34" charset="0"/>
-              <a:buChar char="•"/>
-            </a:pPr>
-            <a:r>
-              <a:rPr lang="en-GB" dirty="0">
-                <a:latin typeface="Yu Gothic UI Semilight" panose="020B0400000000000000" pitchFamily="34" charset="-128"/>
-                <a:ea typeface="Yu Gothic UI Semilight" panose="020B0400000000000000" pitchFamily="34" charset="-128"/>
-              </a:rPr>
-              <a:t>'orientation’</a:t>
+              <a:t>’</a:t>
             </a:r>
           </a:p>
           <a:p>
@@ -27343,7 +29708,142 @@
               <a:t>'</a:t>
             </a:r>
             <a:r>
-              <a:rPr lang="en-GB" dirty="0" err="1">
+              <a:rPr lang="en-GB" b="1" dirty="0">
+                <a:latin typeface="Yu Gothic UI Semilight" panose="020B0400000000000000" pitchFamily="34" charset="-128"/>
+                <a:ea typeface="Yu Gothic UI Semilight" panose="020B0400000000000000" pitchFamily="34" charset="-128"/>
+              </a:rPr>
+              <a:t>drinks</a:t>
+            </a:r>
+            <a:r>
+              <a:rPr lang="en-GB" dirty="0">
+                <a:latin typeface="Yu Gothic UI Semilight" panose="020B0400000000000000" pitchFamily="34" charset="-128"/>
+                <a:ea typeface="Yu Gothic UI Semilight" panose="020B0400000000000000" pitchFamily="34" charset="-128"/>
+              </a:rPr>
+              <a:t>’</a:t>
+            </a:r>
+          </a:p>
+          <a:p>
+            <a:pPr marL="285750" indent="-285750">
+              <a:buFont typeface="Arial" panose="020B0604020202020204" pitchFamily="34" charset="0"/>
+              <a:buChar char="•"/>
+            </a:pPr>
+            <a:r>
+              <a:rPr lang="en-GB" dirty="0">
+                <a:latin typeface="Yu Gothic UI Semilight" panose="020B0400000000000000" pitchFamily="34" charset="-128"/>
+                <a:ea typeface="Yu Gothic UI Semilight" panose="020B0400000000000000" pitchFamily="34" charset="-128"/>
+              </a:rPr>
+              <a:t>'</a:t>
+            </a:r>
+            <a:r>
+              <a:rPr lang="en-GB" b="1" dirty="0">
+                <a:latin typeface="Yu Gothic UI Semilight" panose="020B0400000000000000" pitchFamily="34" charset="-128"/>
+                <a:ea typeface="Yu Gothic UI Semilight" panose="020B0400000000000000" pitchFamily="34" charset="-128"/>
+              </a:rPr>
+              <a:t>drugs</a:t>
+            </a:r>
+            <a:r>
+              <a:rPr lang="en-GB" dirty="0">
+                <a:latin typeface="Yu Gothic UI Semilight" panose="020B0400000000000000" pitchFamily="34" charset="-128"/>
+                <a:ea typeface="Yu Gothic UI Semilight" panose="020B0400000000000000" pitchFamily="34" charset="-128"/>
+              </a:rPr>
+              <a:t>’</a:t>
+            </a:r>
+          </a:p>
+          <a:p>
+            <a:pPr marL="285750" indent="-285750">
+              <a:buFont typeface="Arial" panose="020B0604020202020204" pitchFamily="34" charset="0"/>
+              <a:buChar char="•"/>
+            </a:pPr>
+            <a:r>
+              <a:rPr lang="en-GB" dirty="0">
+                <a:latin typeface="Yu Gothic UI Semilight" panose="020B0400000000000000" pitchFamily="34" charset="-128"/>
+                <a:ea typeface="Yu Gothic UI Semilight" panose="020B0400000000000000" pitchFamily="34" charset="-128"/>
+              </a:rPr>
+              <a:t>'</a:t>
+            </a:r>
+            <a:r>
+              <a:rPr lang="en-GB" b="1" dirty="0">
+                <a:latin typeface="Yu Gothic UI Semilight" panose="020B0400000000000000" pitchFamily="34" charset="-128"/>
+                <a:ea typeface="Yu Gothic UI Semilight" panose="020B0400000000000000" pitchFamily="34" charset="-128"/>
+              </a:rPr>
+              <a:t>education</a:t>
+            </a:r>
+            <a:r>
+              <a:rPr lang="en-GB" dirty="0">
+                <a:latin typeface="Yu Gothic UI Semilight" panose="020B0400000000000000" pitchFamily="34" charset="-128"/>
+                <a:ea typeface="Yu Gothic UI Semilight" panose="020B0400000000000000" pitchFamily="34" charset="-128"/>
+              </a:rPr>
+              <a:t>’</a:t>
+            </a:r>
+          </a:p>
+          <a:p>
+            <a:pPr marL="285750" indent="-285750">
+              <a:buFont typeface="Arial" panose="020B0604020202020204" pitchFamily="34" charset="0"/>
+              <a:buChar char="•"/>
+            </a:pPr>
+            <a:r>
+              <a:rPr lang="en-GB" dirty="0">
+                <a:latin typeface="Yu Gothic UI Semilight" panose="020B0400000000000000" pitchFamily="34" charset="-128"/>
+                <a:ea typeface="Yu Gothic UI Semilight" panose="020B0400000000000000" pitchFamily="34" charset="-128"/>
+              </a:rPr>
+              <a:t>'</a:t>
+            </a:r>
+            <a:r>
+              <a:rPr lang="en-GB" b="1" dirty="0">
+                <a:latin typeface="Yu Gothic UI Semilight" panose="020B0400000000000000" pitchFamily="34" charset="-128"/>
+                <a:ea typeface="Yu Gothic UI Semilight" panose="020B0400000000000000" pitchFamily="34" charset="-128"/>
+              </a:rPr>
+              <a:t>offspring</a:t>
+            </a:r>
+            <a:r>
+              <a:rPr lang="en-GB" dirty="0">
+                <a:latin typeface="Yu Gothic UI Semilight" panose="020B0400000000000000" pitchFamily="34" charset="-128"/>
+                <a:ea typeface="Yu Gothic UI Semilight" panose="020B0400000000000000" pitchFamily="34" charset="-128"/>
+              </a:rPr>
+              <a:t>’</a:t>
+            </a:r>
+          </a:p>
+          <a:p>
+            <a:pPr marL="285750" indent="-285750">
+              <a:buFont typeface="Arial" panose="020B0604020202020204" pitchFamily="34" charset="0"/>
+              <a:buChar char="•"/>
+            </a:pPr>
+            <a:r>
+              <a:rPr lang="en-GB" dirty="0">
+                <a:latin typeface="Yu Gothic UI Semilight" panose="020B0400000000000000" pitchFamily="34" charset="-128"/>
+                <a:ea typeface="Yu Gothic UI Semilight" panose="020B0400000000000000" pitchFamily="34" charset="-128"/>
+              </a:rPr>
+              <a:t>'</a:t>
+            </a:r>
+            <a:r>
+              <a:rPr lang="en-GB" b="1" dirty="0">
+                <a:latin typeface="Yu Gothic UI Semilight" panose="020B0400000000000000" pitchFamily="34" charset="-128"/>
+                <a:ea typeface="Yu Gothic UI Semilight" panose="020B0400000000000000" pitchFamily="34" charset="-128"/>
+              </a:rPr>
+              <a:t>orientation</a:t>
+            </a:r>
+            <a:r>
+              <a:rPr lang="en-GB" dirty="0">
+                <a:latin typeface="Yu Gothic UI Semilight" panose="020B0400000000000000" pitchFamily="34" charset="-128"/>
+                <a:ea typeface="Yu Gothic UI Semilight" panose="020B0400000000000000" pitchFamily="34" charset="-128"/>
+              </a:rPr>
+              <a:t>’</a:t>
+            </a:r>
+          </a:p>
+          <a:p>
+            <a:pPr marL="285750" indent="-285750">
+              <a:buFont typeface="Arial" panose="020B0604020202020204" pitchFamily="34" charset="0"/>
+              <a:buChar char="•"/>
+            </a:pPr>
+            <a:r>
+              <a:rPr lang="en-GB" dirty="0">
+                <a:latin typeface="Yu Gothic UI Semilight" panose="020B0400000000000000" pitchFamily="34" charset="-128"/>
+                <a:ea typeface="Yu Gothic UI Semilight" panose="020B0400000000000000" pitchFamily="34" charset="-128"/>
+              </a:rPr>
+              <a:t>'</a:t>
+            </a:r>
+            <a:r>
+              <a:rPr lang="en-GB" b="1" dirty="0" err="1">
                 <a:latin typeface="Yu Gothic UI Semilight" panose="020B0400000000000000" pitchFamily="34" charset="-128"/>
                 <a:ea typeface="Yu Gothic UI Semilight" panose="020B0400000000000000" pitchFamily="34" charset="-128"/>
               </a:rPr>
@@ -27446,7 +29946,7 @@
             <p:ph sz="quarter" idx="14"/>
             <p:extLst>
               <p:ext uri="{D42A27DB-BD31-4B8C-83A1-F6EECF244321}">
-                <p14:modId xmlns:p14="http://schemas.microsoft.com/office/powerpoint/2010/main" val="2666295521"/>
+                <p14:modId xmlns:p14="http://schemas.microsoft.com/office/powerpoint/2010/main" val="53148538"/>
               </p:ext>
             </p:extLst>
           </p:nvPr>
@@ -27641,6 +30141,937 @@
     <p:bg>
       <p:bgPr>
         <a:solidFill>
+          <a:schemeClr val="accent1">
+            <a:lumMod val="20000"/>
+            <a:lumOff val="80000"/>
+          </a:schemeClr>
+        </a:solidFill>
+        <a:effectLst/>
+      </p:bgPr>
+    </p:bg>
+    <p:spTree>
+      <p:nvGrpSpPr>
+        <p:cNvPr id="1" name=""/>
+        <p:cNvGrpSpPr/>
+        <p:nvPr/>
+      </p:nvGrpSpPr>
+      <p:grpSpPr>
+        <a:xfrm>
+          <a:off x="0" y="0"/>
+          <a:ext cx="0" cy="0"/>
+          <a:chOff x="0" y="0"/>
+          <a:chExt cx="0" cy="0"/>
+        </a:xfrm>
+      </p:grpSpPr>
+      <p:sp>
+        <p:nvSpPr>
+          <p:cNvPr id="2" name="Title 1">
+            <a:extLst>
+              <a:ext uri="{FF2B5EF4-FFF2-40B4-BE49-F238E27FC236}">
+                <a16:creationId xmlns:a16="http://schemas.microsoft.com/office/drawing/2014/main" id="{338A15DE-D135-0710-9984-A0A55E960CB0}"/>
+              </a:ext>
+            </a:extLst>
+          </p:cNvPr>
+          <p:cNvSpPr>
+            <a:spLocks noGrp="1"/>
+          </p:cNvSpPr>
+          <p:nvPr>
+            <p:ph type="title"/>
+          </p:nvPr>
+        </p:nvSpPr>
+        <p:spPr>
+          <a:xfrm>
+            <a:off x="838200" y="853333"/>
+            <a:ext cx="4844143" cy="2792412"/>
+          </a:xfrm>
+          <a:noFill/>
+        </p:spPr>
+        <p:txBody>
+          <a:bodyPr>
+            <a:noAutofit/>
+          </a:bodyPr>
+          <a:lstStyle/>
+          <a:p>
+            <a:r>
+              <a:rPr lang="en-US" dirty="0"/>
+              <a:t>Building and Training Models</a:t>
+            </a:r>
+          </a:p>
+        </p:txBody>
+      </p:sp>
+      <p:sp>
+        <p:nvSpPr>
+          <p:cNvPr id="3" name="Content Placeholder 2">
+            <a:extLst>
+              <a:ext uri="{FF2B5EF4-FFF2-40B4-BE49-F238E27FC236}">
+                <a16:creationId xmlns:a16="http://schemas.microsoft.com/office/drawing/2014/main" id="{ECC8AA23-D8D0-93BE-5C5F-103A750B0D2F}"/>
+              </a:ext>
+            </a:extLst>
+          </p:cNvPr>
+          <p:cNvSpPr>
+            <a:spLocks noGrp="1"/>
+          </p:cNvSpPr>
+          <p:nvPr>
+            <p:ph sz="half" idx="13"/>
+          </p:nvPr>
+        </p:nvSpPr>
+        <p:spPr>
+          <a:xfrm>
+            <a:off x="838200" y="3813681"/>
+            <a:ext cx="4898571" cy="2188317"/>
+          </a:xfrm>
+          <a:noFill/>
+        </p:spPr>
+        <p:txBody>
+          <a:bodyPr vert="horz" lIns="91440" tIns="45720" rIns="91440" bIns="45720" rtlCol="0" anchor="t">
+            <a:normAutofit lnSpcReduction="10000"/>
+          </a:bodyPr>
+          <a:lstStyle/>
+          <a:p>
+            <a:r>
+              <a:rPr lang="en-US" dirty="0"/>
+              <a:t>With the data preprocessed and ready for training, we built three different machine learning algorithms and trained them on the training data. We used hyperparameter tuning for the more complex models to try and improve the accuracy before testing.</a:t>
+            </a:r>
+          </a:p>
+          <a:p>
+            <a:r>
+              <a:rPr lang="en-US" dirty="0"/>
+              <a:t>The three ML models we used are:</a:t>
+            </a:r>
+          </a:p>
+        </p:txBody>
+      </p:sp>
+      <p:graphicFrame>
+        <p:nvGraphicFramePr>
+          <p:cNvPr id="11" name="Content Placeholder 10" descr="Lined list SmartArt graphic">
+            <a:extLst>
+              <a:ext uri="{FF2B5EF4-FFF2-40B4-BE49-F238E27FC236}">
+                <a16:creationId xmlns:a16="http://schemas.microsoft.com/office/drawing/2014/main" id="{C619B1BA-71C2-42B2-CE82-5EBA957CEB36}"/>
+              </a:ext>
+            </a:extLst>
+          </p:cNvPr>
+          <p:cNvGraphicFramePr>
+            <a:graphicFrameLocks noGrp="1"/>
+          </p:cNvGraphicFramePr>
+          <p:nvPr>
+            <p:ph sz="half" idx="2"/>
+            <p:extLst>
+              <p:ext uri="{D42A27DB-BD31-4B8C-83A1-F6EECF244321}">
+                <p14:modId xmlns:p14="http://schemas.microsoft.com/office/powerpoint/2010/main" val="2576962486"/>
+              </p:ext>
+            </p:extLst>
+          </p:nvPr>
+        </p:nvGraphicFramePr>
+        <p:xfrm>
+          <a:off x="6510338" y="850900"/>
+          <a:ext cx="4843462" cy="5403850"/>
+        </p:xfrm>
+        <a:graphic>
+          <a:graphicData uri="http://schemas.openxmlformats.org/drawingml/2006/diagram">
+            <dgm:relIds xmlns:dgm="http://schemas.openxmlformats.org/drawingml/2006/diagram" xmlns:r="http://schemas.openxmlformats.org/officeDocument/2006/relationships" r:dm="rId2" r:lo="rId3" r:qs="rId4" r:cs="rId5"/>
+          </a:graphicData>
+        </a:graphic>
+      </p:graphicFrame>
+    </p:spTree>
+    <p:extLst>
+      <p:ext uri="{BB962C8B-B14F-4D97-AF65-F5344CB8AC3E}">
+        <p14:creationId xmlns:p14="http://schemas.microsoft.com/office/powerpoint/2010/main" val="2737241225"/>
+      </p:ext>
+    </p:extLst>
+  </p:cSld>
+  <p:clrMapOvr>
+    <a:masterClrMapping/>
+  </p:clrMapOvr>
+</p:sld>
+</file>
+
+<file path=ppt/slides/slide19.xml><?xml version="1.0" encoding="utf-8"?>
+<p:sld xmlns:a="http://schemas.openxmlformats.org/drawingml/2006/main" xmlns:r="http://schemas.openxmlformats.org/officeDocument/2006/relationships" xmlns:p="http://schemas.openxmlformats.org/presentationml/2006/main">
+  <p:cSld>
+    <p:bg>
+      <p:bgPr>
+        <a:solidFill>
+          <a:schemeClr val="accent1">
+            <a:lumMod val="40000"/>
+            <a:lumOff val="60000"/>
+          </a:schemeClr>
+        </a:solidFill>
+        <a:effectLst/>
+      </p:bgPr>
+    </p:bg>
+    <p:spTree>
+      <p:nvGrpSpPr>
+        <p:cNvPr id="1" name=""/>
+        <p:cNvGrpSpPr/>
+        <p:nvPr/>
+      </p:nvGrpSpPr>
+      <p:grpSpPr>
+        <a:xfrm>
+          <a:off x="0" y="0"/>
+          <a:ext cx="0" cy="0"/>
+          <a:chOff x="0" y="0"/>
+          <a:chExt cx="0" cy="0"/>
+        </a:xfrm>
+      </p:grpSpPr>
+      <p:sp>
+        <p:nvSpPr>
+          <p:cNvPr id="4" name="Title 3">
+            <a:extLst>
+              <a:ext uri="{FF2B5EF4-FFF2-40B4-BE49-F238E27FC236}">
+                <a16:creationId xmlns:a16="http://schemas.microsoft.com/office/drawing/2014/main" id="{54187331-6706-5434-190D-0174D4B7F316}"/>
+              </a:ext>
+            </a:extLst>
+          </p:cNvPr>
+          <p:cNvSpPr>
+            <a:spLocks noGrp="1"/>
+          </p:cNvSpPr>
+          <p:nvPr>
+            <p:ph type="title"/>
+          </p:nvPr>
+        </p:nvSpPr>
+        <p:spPr>
+          <a:xfrm>
+            <a:off x="838200" y="990987"/>
+            <a:ext cx="10515602" cy="1377184"/>
+          </a:xfrm>
+        </p:spPr>
+        <p:txBody>
+          <a:bodyPr>
+            <a:normAutofit/>
+          </a:bodyPr>
+          <a:lstStyle/>
+          <a:p>
+            <a:pPr algn="ctr"/>
+            <a:r>
+              <a:rPr lang="en-GB" sz="7200" dirty="0"/>
+              <a:t>The Models</a:t>
+            </a:r>
+          </a:p>
+        </p:txBody>
+      </p:sp>
+      <p:graphicFrame>
+        <p:nvGraphicFramePr>
+          <p:cNvPr id="6" name="Content Placeholder 5">
+            <a:extLst>
+              <a:ext uri="{FF2B5EF4-FFF2-40B4-BE49-F238E27FC236}">
+                <a16:creationId xmlns:a16="http://schemas.microsoft.com/office/drawing/2014/main" id="{B59F138B-D01C-12F4-2ADD-8B0723D321DA}"/>
+              </a:ext>
+            </a:extLst>
+          </p:cNvPr>
+          <p:cNvGraphicFramePr>
+            <a:graphicFrameLocks noGrp="1"/>
+          </p:cNvGraphicFramePr>
+          <p:nvPr>
+            <p:ph sz="quarter" idx="14"/>
+            <p:extLst>
+              <p:ext uri="{D42A27DB-BD31-4B8C-83A1-F6EECF244321}">
+                <p14:modId xmlns:p14="http://schemas.microsoft.com/office/powerpoint/2010/main" val="307324376"/>
+              </p:ext>
+            </p:extLst>
+          </p:nvPr>
+        </p:nvGraphicFramePr>
+        <p:xfrm>
+          <a:off x="838200" y="2399913"/>
+          <a:ext cx="10515600" cy="3467100"/>
+        </p:xfrm>
+        <a:graphic>
+          <a:graphicData uri="http://schemas.openxmlformats.org/drawingml/2006/diagram">
+            <dgm:relIds xmlns:dgm="http://schemas.openxmlformats.org/drawingml/2006/diagram" xmlns:r="http://schemas.openxmlformats.org/officeDocument/2006/relationships" r:dm="rId2" r:lo="rId3" r:qs="rId4" r:cs="rId5"/>
+          </a:graphicData>
+        </a:graphic>
+      </p:graphicFrame>
+    </p:spTree>
+    <p:extLst>
+      <p:ext uri="{BB962C8B-B14F-4D97-AF65-F5344CB8AC3E}">
+        <p14:creationId xmlns:p14="http://schemas.microsoft.com/office/powerpoint/2010/main" val="1414522372"/>
+      </p:ext>
+    </p:extLst>
+  </p:cSld>
+  <p:clrMapOvr>
+    <a:masterClrMapping/>
+  </p:clrMapOvr>
+</p:sld>
+</file>
+
+<file path=ppt/slides/slide2.xml><?xml version="1.0" encoding="utf-8"?>
+<p:sld xmlns:a="http://schemas.openxmlformats.org/drawingml/2006/main" xmlns:r="http://schemas.openxmlformats.org/officeDocument/2006/relationships" xmlns:p="http://schemas.openxmlformats.org/presentationml/2006/main">
+  <p:cSld>
+    <p:bg>
+      <p:bgPr>
+        <a:solidFill>
+          <a:srgbClr val="B32752"/>
+        </a:solidFill>
+        <a:effectLst/>
+      </p:bgPr>
+    </p:bg>
+    <p:spTree>
+      <p:nvGrpSpPr>
+        <p:cNvPr id="1" name=""/>
+        <p:cNvGrpSpPr/>
+        <p:nvPr/>
+      </p:nvGrpSpPr>
+      <p:grpSpPr>
+        <a:xfrm>
+          <a:off x="0" y="0"/>
+          <a:ext cx="0" cy="0"/>
+          <a:chOff x="0" y="0"/>
+          <a:chExt cx="0" cy="0"/>
+        </a:xfrm>
+      </p:grpSpPr>
+      <p:sp>
+        <p:nvSpPr>
+          <p:cNvPr id="2" name="Title 1">
+            <a:extLst>
+              <a:ext uri="{FF2B5EF4-FFF2-40B4-BE49-F238E27FC236}">
+                <a16:creationId xmlns:a16="http://schemas.microsoft.com/office/drawing/2014/main" id="{BF463CB3-2956-E8D2-C23D-A3BAA7295DEC}"/>
+              </a:ext>
+            </a:extLst>
+          </p:cNvPr>
+          <p:cNvSpPr>
+            <a:spLocks noGrp="1"/>
+          </p:cNvSpPr>
+          <p:nvPr>
+            <p:ph type="title"/>
+          </p:nvPr>
+        </p:nvSpPr>
+        <p:spPr>
+          <a:xfrm>
+            <a:off x="838200" y="853334"/>
+            <a:ext cx="4844142" cy="5151334"/>
+          </a:xfrm>
+          <a:noFill/>
+        </p:spPr>
+        <p:txBody>
+          <a:bodyPr>
+            <a:noAutofit/>
+          </a:bodyPr>
+          <a:lstStyle/>
+          <a:p>
+            <a:r>
+              <a:rPr lang="en-US" dirty="0"/>
+              <a:t>Introduction</a:t>
+            </a:r>
+          </a:p>
+        </p:txBody>
+      </p:sp>
+      <p:pic>
+        <p:nvPicPr>
+          <p:cNvPr id="9" name="Online Image Placeholder 12" descr="A person wearing a suit sitting on a bed drinking from a cup, with a suitcase nearby">
+            <a:extLst>
+              <a:ext uri="{FF2B5EF4-FFF2-40B4-BE49-F238E27FC236}">
+                <a16:creationId xmlns:a16="http://schemas.microsoft.com/office/drawing/2014/main" id="{F03AA6D8-831B-8498-BA31-38792288C6AD}"/>
+              </a:ext>
+            </a:extLst>
+          </p:cNvPr>
+          <p:cNvPicPr>
+            <a:picLocks noGrp="1" noChangeAspect="1"/>
+          </p:cNvPicPr>
+          <p:nvPr>
+            <p:ph type="pic" sz="quarter" idx="11"/>
+          </p:nvPr>
+        </p:nvPicPr>
+        <p:blipFill rotWithShape="1">
+          <a:blip r:embed="rId2" cstate="print">
+            <a:duotone>
+              <a:prstClr val="black"/>
+              <a:schemeClr val="accent3">
+                <a:tint val="45000"/>
+                <a:satMod val="400000"/>
+              </a:schemeClr>
+            </a:duotone>
+            <a:extLst>
+              <a:ext uri="{28A0092B-C50C-407E-A947-70E740481C1C}">
+                <a14:useLocalDpi xmlns:a14="http://schemas.microsoft.com/office/drawing/2010/main"/>
+              </a:ext>
+            </a:extLst>
+          </a:blip>
+          <a:srcRect/>
+          <a:stretch/>
+        </p:blipFill>
+        <p:spPr>
+          <a:xfrm>
+            <a:off x="6428012" y="685800"/>
+            <a:ext cx="5070020" cy="5486400"/>
+          </a:xfrm>
+        </p:spPr>
+      </p:pic>
+    </p:spTree>
+    <p:extLst>
+      <p:ext uri="{BB962C8B-B14F-4D97-AF65-F5344CB8AC3E}">
+        <p14:creationId xmlns:p14="http://schemas.microsoft.com/office/powerpoint/2010/main" val="435195399"/>
+      </p:ext>
+    </p:extLst>
+  </p:cSld>
+  <p:clrMapOvr>
+    <a:masterClrMapping/>
+  </p:clrMapOvr>
+</p:sld>
+</file>
+
+<file path=ppt/slides/slide20.xml><?xml version="1.0" encoding="utf-8"?>
+<p:sld xmlns:a="http://schemas.openxmlformats.org/drawingml/2006/main" xmlns:r="http://schemas.openxmlformats.org/officeDocument/2006/relationships" xmlns:p="http://schemas.openxmlformats.org/presentationml/2006/main">
+  <p:cSld>
+    <p:bg>
+      <p:bgPr>
+        <a:solidFill>
+          <a:schemeClr val="accent1">
+            <a:lumMod val="40000"/>
+            <a:lumOff val="60000"/>
+          </a:schemeClr>
+        </a:solidFill>
+        <a:effectLst/>
+      </p:bgPr>
+    </p:bg>
+    <p:spTree>
+      <p:nvGrpSpPr>
+        <p:cNvPr id="1" name="">
+          <a:extLst>
+            <a:ext uri="{FF2B5EF4-FFF2-40B4-BE49-F238E27FC236}">
+              <a16:creationId xmlns:a16="http://schemas.microsoft.com/office/drawing/2014/main" id="{75B67C5E-EBA7-82E3-CE4B-1A81532F8E63}"/>
+            </a:ext>
+          </a:extLst>
+        </p:cNvPr>
+        <p:cNvGrpSpPr/>
+        <p:nvPr/>
+      </p:nvGrpSpPr>
+      <p:grpSpPr>
+        <a:xfrm>
+          <a:off x="0" y="0"/>
+          <a:ext cx="0" cy="0"/>
+          <a:chOff x="0" y="0"/>
+          <a:chExt cx="0" cy="0"/>
+        </a:xfrm>
+      </p:grpSpPr>
+      <p:sp>
+        <p:nvSpPr>
+          <p:cNvPr id="4" name="Title 3">
+            <a:extLst>
+              <a:ext uri="{FF2B5EF4-FFF2-40B4-BE49-F238E27FC236}">
+                <a16:creationId xmlns:a16="http://schemas.microsoft.com/office/drawing/2014/main" id="{967DFE84-B92C-7652-D420-17BAEBCA6049}"/>
+              </a:ext>
+            </a:extLst>
+          </p:cNvPr>
+          <p:cNvSpPr>
+            <a:spLocks noGrp="1"/>
+          </p:cNvSpPr>
+          <p:nvPr>
+            <p:ph type="title"/>
+          </p:nvPr>
+        </p:nvSpPr>
+        <p:spPr/>
+        <p:txBody>
+          <a:bodyPr>
+            <a:normAutofit fontScale="90000"/>
+          </a:bodyPr>
+          <a:lstStyle/>
+          <a:p>
+            <a:pPr algn="ctr"/>
+            <a:r>
+              <a:rPr lang="en-GB" sz="7200" dirty="0"/>
+              <a:t>Logistic Regression Model</a:t>
+            </a:r>
+          </a:p>
+        </p:txBody>
+      </p:sp>
+      <p:sp>
+        <p:nvSpPr>
+          <p:cNvPr id="7" name="Content Placeholder 6">
+            <a:extLst>
+              <a:ext uri="{FF2B5EF4-FFF2-40B4-BE49-F238E27FC236}">
+                <a16:creationId xmlns:a16="http://schemas.microsoft.com/office/drawing/2014/main" id="{229A5699-E7A9-CBF4-D0D1-2A23A099F406}"/>
+              </a:ext>
+            </a:extLst>
+          </p:cNvPr>
+          <p:cNvSpPr>
+            <a:spLocks noGrp="1"/>
+          </p:cNvSpPr>
+          <p:nvPr>
+            <p:ph sz="quarter" idx="16"/>
+          </p:nvPr>
+        </p:nvSpPr>
+        <p:spPr/>
+        <p:txBody>
+          <a:bodyPr>
+            <a:normAutofit/>
+          </a:bodyPr>
+          <a:lstStyle/>
+          <a:p>
+            <a:pPr marL="0" indent="0">
+              <a:buNone/>
+            </a:pPr>
+            <a:r>
+              <a:rPr lang="en-GB" dirty="0"/>
+              <a:t>Our first model used binomial logistic regression, to predict the binary target labels of smoker vs. non-smoker. We used the encoded and standardised data for this model, as logistic regression models are sensitive to feature scale. The logistic regression model was relatively simple compared to the other classifier models.</a:t>
+            </a:r>
+          </a:p>
+          <a:p>
+            <a:pPr marL="0" indent="0">
+              <a:buNone/>
+            </a:pPr>
+            <a:endParaRPr lang="en-GB" dirty="0"/>
+          </a:p>
+          <a:p>
+            <a:pPr marL="0" indent="0">
+              <a:buNone/>
+            </a:pPr>
+            <a:r>
+              <a:rPr lang="en-GB" dirty="0"/>
+              <a:t>A binomial logistic regression model predicts the probability that an input belongs to one of two classes. It uses the sigmoid function and weighted sums of input features to generate a probability between 1 (one label) and 0 (the other label) and determine which the input is most likely to be.</a:t>
+            </a:r>
+          </a:p>
+        </p:txBody>
+      </p:sp>
+      <p:sp>
+        <p:nvSpPr>
+          <p:cNvPr id="8" name="Rectangle: Rounded Corners 7">
+            <a:extLst>
+              <a:ext uri="{FF2B5EF4-FFF2-40B4-BE49-F238E27FC236}">
+                <a16:creationId xmlns:a16="http://schemas.microsoft.com/office/drawing/2014/main" id="{98CA089F-8E4C-0546-54A1-F6240B0ADB93}"/>
+              </a:ext>
+            </a:extLst>
+          </p:cNvPr>
+          <p:cNvSpPr/>
+          <p:nvPr/>
+        </p:nvSpPr>
+        <p:spPr>
+          <a:xfrm>
+            <a:off x="2132526" y="3751345"/>
+            <a:ext cx="2255490" cy="2252580"/>
+          </a:xfrm>
+          <a:prstGeom prst="roundRect">
+            <a:avLst/>
+          </a:prstGeom>
+          <a:blipFill>
+            <a:blip r:embed="rId2"/>
+            <a:srcRect/>
+            <a:stretch>
+              <a:fillRect/>
+            </a:stretch>
+          </a:blipFill>
+        </p:spPr>
+        <p:style>
+          <a:lnRef idx="2">
+            <a:schemeClr val="lt1">
+              <a:hueOff val="0"/>
+              <a:satOff val="0"/>
+              <a:lumOff val="0"/>
+              <a:alphaOff val="0"/>
+            </a:schemeClr>
+          </a:lnRef>
+          <a:fillRef idx="1">
+            <a:scrgbClr r="0" g="0" b="0"/>
+          </a:fillRef>
+          <a:effectRef idx="0">
+            <a:schemeClr val="accent1">
+              <a:hueOff val="0"/>
+              <a:satOff val="0"/>
+              <a:lumOff val="0"/>
+              <a:alphaOff val="0"/>
+            </a:schemeClr>
+          </a:effectRef>
+          <a:fontRef idx="minor">
+            <a:schemeClr val="lt1"/>
+          </a:fontRef>
+        </p:style>
+        <p:txBody>
+          <a:bodyPr/>
+          <a:lstStyle/>
+          <a:p>
+            <a:endParaRPr lang="en-GB"/>
+          </a:p>
+        </p:txBody>
+      </p:sp>
+    </p:spTree>
+    <p:extLst>
+      <p:ext uri="{BB962C8B-B14F-4D97-AF65-F5344CB8AC3E}">
+        <p14:creationId xmlns:p14="http://schemas.microsoft.com/office/powerpoint/2010/main" val="2380920676"/>
+      </p:ext>
+    </p:extLst>
+  </p:cSld>
+  <p:clrMapOvr>
+    <a:masterClrMapping/>
+  </p:clrMapOvr>
+</p:sld>
+</file>
+
+<file path=ppt/slides/slide21.xml><?xml version="1.0" encoding="utf-8"?>
+<p:sld xmlns:a="http://schemas.openxmlformats.org/drawingml/2006/main" xmlns:r="http://schemas.openxmlformats.org/officeDocument/2006/relationships" xmlns:p="http://schemas.openxmlformats.org/presentationml/2006/main">
+  <p:cSld>
+    <p:bg>
+      <p:bgPr>
+        <a:solidFill>
+          <a:schemeClr val="accent1">
+            <a:lumMod val="40000"/>
+            <a:lumOff val="60000"/>
+          </a:schemeClr>
+        </a:solidFill>
+        <a:effectLst/>
+      </p:bgPr>
+    </p:bg>
+    <p:spTree>
+      <p:nvGrpSpPr>
+        <p:cNvPr id="1" name="">
+          <a:extLst>
+            <a:ext uri="{FF2B5EF4-FFF2-40B4-BE49-F238E27FC236}">
+              <a16:creationId xmlns:a16="http://schemas.microsoft.com/office/drawing/2014/main" id="{9F5964F0-4633-9E85-9787-5050199CEB5F}"/>
+            </a:ext>
+          </a:extLst>
+        </p:cNvPr>
+        <p:cNvGrpSpPr/>
+        <p:nvPr/>
+      </p:nvGrpSpPr>
+      <p:grpSpPr>
+        <a:xfrm>
+          <a:off x="0" y="0"/>
+          <a:ext cx="0" cy="0"/>
+          <a:chOff x="0" y="0"/>
+          <a:chExt cx="0" cy="0"/>
+        </a:xfrm>
+      </p:grpSpPr>
+      <p:sp>
+        <p:nvSpPr>
+          <p:cNvPr id="4" name="Title 3">
+            <a:extLst>
+              <a:ext uri="{FF2B5EF4-FFF2-40B4-BE49-F238E27FC236}">
+                <a16:creationId xmlns:a16="http://schemas.microsoft.com/office/drawing/2014/main" id="{A1493611-26EA-543F-07EE-6F42A7D82803}"/>
+              </a:ext>
+            </a:extLst>
+          </p:cNvPr>
+          <p:cNvSpPr>
+            <a:spLocks noGrp="1"/>
+          </p:cNvSpPr>
+          <p:nvPr>
+            <p:ph type="title"/>
+          </p:nvPr>
+        </p:nvSpPr>
+        <p:spPr/>
+        <p:txBody>
+          <a:bodyPr>
+            <a:normAutofit fontScale="90000"/>
+          </a:bodyPr>
+          <a:lstStyle/>
+          <a:p>
+            <a:pPr algn="ctr"/>
+            <a:r>
+              <a:rPr lang="en-GB" sz="7200" dirty="0"/>
+              <a:t>Random Forests Classifier</a:t>
+            </a:r>
+          </a:p>
+        </p:txBody>
+      </p:sp>
+      <p:sp>
+        <p:nvSpPr>
+          <p:cNvPr id="7" name="Content Placeholder 6">
+            <a:extLst>
+              <a:ext uri="{FF2B5EF4-FFF2-40B4-BE49-F238E27FC236}">
+                <a16:creationId xmlns:a16="http://schemas.microsoft.com/office/drawing/2014/main" id="{29BACD7D-96A6-CCFE-2758-D4FDB26C3EEA}"/>
+              </a:ext>
+            </a:extLst>
+          </p:cNvPr>
+          <p:cNvSpPr>
+            <a:spLocks noGrp="1"/>
+          </p:cNvSpPr>
+          <p:nvPr>
+            <p:ph sz="quarter" idx="16"/>
+          </p:nvPr>
+        </p:nvSpPr>
+        <p:spPr/>
+        <p:txBody>
+          <a:bodyPr>
+            <a:normAutofit/>
+          </a:bodyPr>
+          <a:lstStyle/>
+          <a:p>
+            <a:pPr marL="0" indent="0">
+              <a:buNone/>
+            </a:pPr>
+            <a:r>
+              <a:rPr lang="en-GB" dirty="0"/>
+              <a:t>Our second model used a combination of many decision trees to select a predicted label for each input. Using a technique called hyperparameter tuning, we cycled over multiple values of hyperparameters to select the best number of decision trees for the random forest classifier before building our model.</a:t>
+            </a:r>
+          </a:p>
+          <a:p>
+            <a:pPr marL="0" indent="0">
+              <a:buNone/>
+            </a:pPr>
+            <a:endParaRPr lang="en-GB" dirty="0"/>
+          </a:p>
+          <a:p>
+            <a:pPr marL="0" indent="0">
+              <a:buNone/>
+            </a:pPr>
+            <a:r>
+              <a:rPr lang="en-GB" dirty="0"/>
+              <a:t>Random forest classifiers work by building many decision trees, each trained on different parts of the data. Each tree makes its own prediction, and the random forest chooses the final label by taking a majority vote from all the trees. This approach avoids overfitting and tends to improve prediction accuracy.</a:t>
+            </a:r>
+          </a:p>
+        </p:txBody>
+      </p:sp>
+      <p:sp>
+        <p:nvSpPr>
+          <p:cNvPr id="3" name="Rectangle: Rounded Corners 2">
+            <a:extLst>
+              <a:ext uri="{FF2B5EF4-FFF2-40B4-BE49-F238E27FC236}">
+                <a16:creationId xmlns:a16="http://schemas.microsoft.com/office/drawing/2014/main" id="{004047F2-F607-B150-0737-791BF39C937C}"/>
+              </a:ext>
+            </a:extLst>
+          </p:cNvPr>
+          <p:cNvSpPr/>
+          <p:nvPr/>
+        </p:nvSpPr>
+        <p:spPr>
+          <a:xfrm>
+            <a:off x="2132526" y="3751345"/>
+            <a:ext cx="2255490" cy="2252580"/>
+          </a:xfrm>
+          <a:prstGeom prst="roundRect">
+            <a:avLst/>
+          </a:prstGeom>
+          <a:blipFill>
+            <a:blip r:embed="rId2"/>
+            <a:srcRect/>
+            <a:stretch>
+              <a:fillRect/>
+            </a:stretch>
+          </a:blipFill>
+        </p:spPr>
+        <p:style>
+          <a:lnRef idx="2">
+            <a:schemeClr val="lt1">
+              <a:hueOff val="0"/>
+              <a:satOff val="0"/>
+              <a:lumOff val="0"/>
+              <a:alphaOff val="0"/>
+            </a:schemeClr>
+          </a:lnRef>
+          <a:fillRef idx="1">
+            <a:scrgbClr r="0" g="0" b="0"/>
+          </a:fillRef>
+          <a:effectRef idx="0">
+            <a:schemeClr val="accent1">
+              <a:hueOff val="0"/>
+              <a:satOff val="0"/>
+              <a:lumOff val="0"/>
+              <a:alphaOff val="0"/>
+            </a:schemeClr>
+          </a:effectRef>
+          <a:fontRef idx="minor">
+            <a:schemeClr val="lt1"/>
+          </a:fontRef>
+        </p:style>
+        <p:txBody>
+          <a:bodyPr/>
+          <a:lstStyle/>
+          <a:p>
+            <a:endParaRPr lang="en-GB" dirty="0"/>
+          </a:p>
+        </p:txBody>
+      </p:sp>
+    </p:spTree>
+    <p:extLst>
+      <p:ext uri="{BB962C8B-B14F-4D97-AF65-F5344CB8AC3E}">
+        <p14:creationId xmlns:p14="http://schemas.microsoft.com/office/powerpoint/2010/main" val="2930555874"/>
+      </p:ext>
+    </p:extLst>
+  </p:cSld>
+  <p:clrMapOvr>
+    <a:masterClrMapping/>
+  </p:clrMapOvr>
+</p:sld>
+</file>
+
+<file path=ppt/slides/slide22.xml><?xml version="1.0" encoding="utf-8"?>
+<p:sld xmlns:a="http://schemas.openxmlformats.org/drawingml/2006/main" xmlns:r="http://schemas.openxmlformats.org/officeDocument/2006/relationships" xmlns:p="http://schemas.openxmlformats.org/presentationml/2006/main">
+  <p:cSld>
+    <p:bg>
+      <p:bgPr>
+        <a:solidFill>
+          <a:schemeClr val="accent1">
+            <a:lumMod val="40000"/>
+            <a:lumOff val="60000"/>
+          </a:schemeClr>
+        </a:solidFill>
+        <a:effectLst/>
+      </p:bgPr>
+    </p:bg>
+    <p:spTree>
+      <p:nvGrpSpPr>
+        <p:cNvPr id="1" name="">
+          <a:extLst>
+            <a:ext uri="{FF2B5EF4-FFF2-40B4-BE49-F238E27FC236}">
+              <a16:creationId xmlns:a16="http://schemas.microsoft.com/office/drawing/2014/main" id="{1D2C3510-AB40-91B6-222B-BA931BB7C481}"/>
+            </a:ext>
+          </a:extLst>
+        </p:cNvPr>
+        <p:cNvGrpSpPr/>
+        <p:nvPr/>
+      </p:nvGrpSpPr>
+      <p:grpSpPr>
+        <a:xfrm>
+          <a:off x="0" y="0"/>
+          <a:ext cx="0" cy="0"/>
+          <a:chOff x="0" y="0"/>
+          <a:chExt cx="0" cy="0"/>
+        </a:xfrm>
+      </p:grpSpPr>
+      <p:sp>
+        <p:nvSpPr>
+          <p:cNvPr id="4" name="Title 3">
+            <a:extLst>
+              <a:ext uri="{FF2B5EF4-FFF2-40B4-BE49-F238E27FC236}">
+                <a16:creationId xmlns:a16="http://schemas.microsoft.com/office/drawing/2014/main" id="{A18CBDE7-F025-1B91-9645-4FF7BEA4179E}"/>
+              </a:ext>
+            </a:extLst>
+          </p:cNvPr>
+          <p:cNvSpPr>
+            <a:spLocks noGrp="1"/>
+          </p:cNvSpPr>
+          <p:nvPr>
+            <p:ph type="title"/>
+          </p:nvPr>
+        </p:nvSpPr>
+        <p:spPr/>
+        <p:txBody>
+          <a:bodyPr>
+            <a:normAutofit fontScale="90000"/>
+          </a:bodyPr>
+          <a:lstStyle/>
+          <a:p>
+            <a:pPr algn="ctr"/>
+            <a:r>
+              <a:rPr lang="en-GB" sz="7200" dirty="0"/>
+              <a:t>K-Nearest Neighbours Classifier</a:t>
+            </a:r>
+          </a:p>
+        </p:txBody>
+      </p:sp>
+      <p:sp>
+        <p:nvSpPr>
+          <p:cNvPr id="7" name="Content Placeholder 6">
+            <a:extLst>
+              <a:ext uri="{FF2B5EF4-FFF2-40B4-BE49-F238E27FC236}">
+                <a16:creationId xmlns:a16="http://schemas.microsoft.com/office/drawing/2014/main" id="{B82E5086-8E2A-6DF6-F6EE-46909F569ED5}"/>
+              </a:ext>
+            </a:extLst>
+          </p:cNvPr>
+          <p:cNvSpPr>
+            <a:spLocks noGrp="1"/>
+          </p:cNvSpPr>
+          <p:nvPr>
+            <p:ph sz="quarter" idx="16"/>
+          </p:nvPr>
+        </p:nvSpPr>
+        <p:spPr/>
+        <p:txBody>
+          <a:bodyPr>
+            <a:normAutofit/>
+          </a:bodyPr>
+          <a:lstStyle/>
+          <a:p>
+            <a:pPr marL="0" indent="0">
+              <a:buNone/>
+            </a:pPr>
+            <a:r>
+              <a:rPr lang="en-GB" dirty="0"/>
+              <a:t>Our third model predicted smoker status based on the most similar data points to each input. We used the standardised data, as k-nearest neighbours (KNN) models use ‘distance’ to calculate labels and are sensitive to feature scale.</a:t>
+            </a:r>
+          </a:p>
+          <a:p>
+            <a:pPr marL="0" indent="0">
+              <a:buNone/>
+            </a:pPr>
+            <a:endParaRPr lang="en-GB" dirty="0"/>
+          </a:p>
+          <a:p>
+            <a:pPr marL="0" indent="0">
+              <a:buNone/>
+            </a:pPr>
+            <a:r>
+              <a:rPr lang="en-GB" dirty="0"/>
+              <a:t>The model predicts labels for each input by looking at the labels of the ‘k-closest’ data points in the training set. The model assigns the most common label among these neighbours to the input. The value of k controls how many neighbours are considered for each prediction. We calculated the optimal K using hyperparameter tuning as we did with the random forest classifier.</a:t>
+            </a:r>
+          </a:p>
+        </p:txBody>
+      </p:sp>
+      <p:sp>
+        <p:nvSpPr>
+          <p:cNvPr id="2" name="Rectangle: Rounded Corners 1">
+            <a:extLst>
+              <a:ext uri="{FF2B5EF4-FFF2-40B4-BE49-F238E27FC236}">
+                <a16:creationId xmlns:a16="http://schemas.microsoft.com/office/drawing/2014/main" id="{B86F96B6-A3CA-06A2-8FDD-0B2231C10C29}"/>
+              </a:ext>
+            </a:extLst>
+          </p:cNvPr>
+          <p:cNvSpPr/>
+          <p:nvPr/>
+        </p:nvSpPr>
+        <p:spPr>
+          <a:xfrm>
+            <a:off x="2132526" y="3791509"/>
+            <a:ext cx="2255490" cy="2252580"/>
+          </a:xfrm>
+          <a:prstGeom prst="roundRect">
+            <a:avLst/>
+          </a:prstGeom>
+          <a:blipFill>
+            <a:blip r:embed="rId2"/>
+            <a:srcRect/>
+            <a:stretch>
+              <a:fillRect/>
+            </a:stretch>
+          </a:blipFill>
+        </p:spPr>
+        <p:style>
+          <a:lnRef idx="2">
+            <a:schemeClr val="lt1">
+              <a:hueOff val="0"/>
+              <a:satOff val="0"/>
+              <a:lumOff val="0"/>
+              <a:alphaOff val="0"/>
+            </a:schemeClr>
+          </a:lnRef>
+          <a:fillRef idx="1">
+            <a:scrgbClr r="0" g="0" b="0"/>
+          </a:fillRef>
+          <a:effectRef idx="0">
+            <a:schemeClr val="accent1">
+              <a:hueOff val="0"/>
+              <a:satOff val="0"/>
+              <a:lumOff val="0"/>
+              <a:alphaOff val="0"/>
+            </a:schemeClr>
+          </a:effectRef>
+          <a:fontRef idx="minor">
+            <a:schemeClr val="lt1"/>
+          </a:fontRef>
+        </p:style>
+        <p:txBody>
+          <a:bodyPr/>
+          <a:lstStyle/>
+          <a:p>
+            <a:endParaRPr lang="en-GB"/>
+          </a:p>
+        </p:txBody>
+      </p:sp>
+    </p:spTree>
+    <p:extLst>
+      <p:ext uri="{BB962C8B-B14F-4D97-AF65-F5344CB8AC3E}">
+        <p14:creationId xmlns:p14="http://schemas.microsoft.com/office/powerpoint/2010/main" val="2535731229"/>
+      </p:ext>
+    </p:extLst>
+  </p:cSld>
+  <p:clrMapOvr>
+    <a:masterClrMapping/>
+  </p:clrMapOvr>
+</p:sld>
+</file>
+
+<file path=ppt/slides/slide23.xml><?xml version="1.0" encoding="utf-8"?>
+<p:sld xmlns:a="http://schemas.openxmlformats.org/drawingml/2006/main" xmlns:r="http://schemas.openxmlformats.org/officeDocument/2006/relationships" xmlns:p="http://schemas.openxmlformats.org/presentationml/2006/main">
+  <p:cSld>
+    <p:bg>
+      <p:bgPr>
+        <a:solidFill>
           <a:srgbClr val="B32752"/>
         </a:solidFill>
         <a:effectLst/>
@@ -27796,7 +31227,7 @@
 </p:sld>
 </file>
 
-<file path=ppt/slides/slide19.xml><?xml version="1.0" encoding="utf-8"?>
+<file path=ppt/slides/slide24.xml><?xml version="1.0" encoding="utf-8"?>
 <p:sld xmlns:a="http://schemas.openxmlformats.org/drawingml/2006/main" xmlns:r="http://schemas.openxmlformats.org/officeDocument/2006/relationships" xmlns:p="http://schemas.openxmlformats.org/presentationml/2006/main">
   <p:cSld>
     <p:bg>
@@ -27911,308 +31342,7 @@
 </p:sld>
 </file>
 
-<file path=ppt/slides/slide2.xml><?xml version="1.0" encoding="utf-8"?>
-<p:sld xmlns:a="http://schemas.openxmlformats.org/drawingml/2006/main" xmlns:r="http://schemas.openxmlformats.org/officeDocument/2006/relationships" xmlns:p="http://schemas.openxmlformats.org/presentationml/2006/main">
-  <p:cSld>
-    <p:bg>
-      <p:bgPr>
-        <a:solidFill>
-          <a:srgbClr val="B32752"/>
-        </a:solidFill>
-        <a:effectLst/>
-      </p:bgPr>
-    </p:bg>
-    <p:spTree>
-      <p:nvGrpSpPr>
-        <p:cNvPr id="1" name=""/>
-        <p:cNvGrpSpPr/>
-        <p:nvPr/>
-      </p:nvGrpSpPr>
-      <p:grpSpPr>
-        <a:xfrm>
-          <a:off x="0" y="0"/>
-          <a:ext cx="0" cy="0"/>
-          <a:chOff x="0" y="0"/>
-          <a:chExt cx="0" cy="0"/>
-        </a:xfrm>
-      </p:grpSpPr>
-      <p:sp>
-        <p:nvSpPr>
-          <p:cNvPr id="2" name="Title 1">
-            <a:extLst>
-              <a:ext uri="{FF2B5EF4-FFF2-40B4-BE49-F238E27FC236}">
-                <a16:creationId xmlns:a16="http://schemas.microsoft.com/office/drawing/2014/main" id="{BF463CB3-2956-E8D2-C23D-A3BAA7295DEC}"/>
-              </a:ext>
-            </a:extLst>
-          </p:cNvPr>
-          <p:cNvSpPr>
-            <a:spLocks noGrp="1"/>
-          </p:cNvSpPr>
-          <p:nvPr>
-            <p:ph type="title"/>
-          </p:nvPr>
-        </p:nvSpPr>
-        <p:spPr>
-          <a:xfrm>
-            <a:off x="838200" y="853334"/>
-            <a:ext cx="4844142" cy="5151334"/>
-          </a:xfrm>
-          <a:noFill/>
-        </p:spPr>
-        <p:txBody>
-          <a:bodyPr>
-            <a:noAutofit/>
-          </a:bodyPr>
-          <a:lstStyle/>
-          <a:p>
-            <a:r>
-              <a:rPr lang="en-US" dirty="0"/>
-              <a:t>Introduction</a:t>
-            </a:r>
-          </a:p>
-        </p:txBody>
-      </p:sp>
-      <p:pic>
-        <p:nvPicPr>
-          <p:cNvPr id="9" name="Online Image Placeholder 12" descr="A person wearing a suit sitting on a bed drinking from a cup, with a suitcase nearby">
-            <a:extLst>
-              <a:ext uri="{FF2B5EF4-FFF2-40B4-BE49-F238E27FC236}">
-                <a16:creationId xmlns:a16="http://schemas.microsoft.com/office/drawing/2014/main" id="{F03AA6D8-831B-8498-BA31-38792288C6AD}"/>
-              </a:ext>
-            </a:extLst>
-          </p:cNvPr>
-          <p:cNvPicPr>
-            <a:picLocks noGrp="1" noChangeAspect="1"/>
-          </p:cNvPicPr>
-          <p:nvPr>
-            <p:ph type="pic" sz="quarter" idx="11"/>
-          </p:nvPr>
-        </p:nvPicPr>
-        <p:blipFill rotWithShape="1">
-          <a:blip r:embed="rId2" cstate="print">
-            <a:duotone>
-              <a:prstClr val="black"/>
-              <a:schemeClr val="accent3">
-                <a:tint val="45000"/>
-                <a:satMod val="400000"/>
-              </a:schemeClr>
-            </a:duotone>
-            <a:extLst>
-              <a:ext uri="{28A0092B-C50C-407E-A947-70E740481C1C}">
-                <a14:useLocalDpi xmlns:a14="http://schemas.microsoft.com/office/drawing/2010/main"/>
-              </a:ext>
-            </a:extLst>
-          </a:blip>
-          <a:srcRect/>
-          <a:stretch/>
-        </p:blipFill>
-        <p:spPr>
-          <a:xfrm>
-            <a:off x="6428012" y="685800"/>
-            <a:ext cx="5070020" cy="5486400"/>
-          </a:xfrm>
-        </p:spPr>
-      </p:pic>
-    </p:spTree>
-    <p:extLst>
-      <p:ext uri="{BB962C8B-B14F-4D97-AF65-F5344CB8AC3E}">
-        <p14:creationId xmlns:p14="http://schemas.microsoft.com/office/powerpoint/2010/main" val="435195399"/>
-      </p:ext>
-    </p:extLst>
-  </p:cSld>
-  <p:clrMapOvr>
-    <a:masterClrMapping/>
-  </p:clrMapOvr>
-</p:sld>
-</file>
-
-<file path=ppt/slides/slide20.xml><?xml version="1.0" encoding="utf-8"?>
-<p:sld xmlns:a="http://schemas.openxmlformats.org/drawingml/2006/main" xmlns:r="http://schemas.openxmlformats.org/officeDocument/2006/relationships" xmlns:p="http://schemas.openxmlformats.org/presentationml/2006/main">
-  <p:cSld>
-    <p:bg>
-      <p:bgPr>
-        <a:solidFill>
-          <a:schemeClr val="accent1">
-            <a:lumMod val="20000"/>
-            <a:lumOff val="80000"/>
-          </a:schemeClr>
-        </a:solidFill>
-        <a:effectLst/>
-      </p:bgPr>
-    </p:bg>
-    <p:spTree>
-      <p:nvGrpSpPr>
-        <p:cNvPr id="1" name=""/>
-        <p:cNvGrpSpPr/>
-        <p:nvPr/>
-      </p:nvGrpSpPr>
-      <p:grpSpPr>
-        <a:xfrm>
-          <a:off x="0" y="0"/>
-          <a:ext cx="0" cy="0"/>
-          <a:chOff x="0" y="0"/>
-          <a:chExt cx="0" cy="0"/>
-        </a:xfrm>
-      </p:grpSpPr>
-      <p:sp>
-        <p:nvSpPr>
-          <p:cNvPr id="2" name="Title 1">
-            <a:extLst>
-              <a:ext uri="{FF2B5EF4-FFF2-40B4-BE49-F238E27FC236}">
-                <a16:creationId xmlns:a16="http://schemas.microsoft.com/office/drawing/2014/main" id="{338A15DE-D135-0710-9984-A0A55E960CB0}"/>
-              </a:ext>
-            </a:extLst>
-          </p:cNvPr>
-          <p:cNvSpPr>
-            <a:spLocks noGrp="1"/>
-          </p:cNvSpPr>
-          <p:nvPr>
-            <p:ph type="title"/>
-          </p:nvPr>
-        </p:nvSpPr>
-        <p:spPr>
-          <a:xfrm>
-            <a:off x="838200" y="853333"/>
-            <a:ext cx="4844143" cy="2792412"/>
-          </a:xfrm>
-          <a:noFill/>
-        </p:spPr>
-        <p:txBody>
-          <a:bodyPr>
-            <a:noAutofit/>
-          </a:bodyPr>
-          <a:lstStyle/>
-          <a:p>
-            <a:r>
-              <a:rPr lang="en-US"/>
-              <a:t>Product launch </a:t>
-            </a:r>
-            <a:br>
-              <a:rPr lang="en-US"/>
-            </a:br>
-            <a:r>
-              <a:rPr lang="en-US"/>
-              <a:t>timeline</a:t>
-            </a:r>
-            <a:endParaRPr lang="en-US" dirty="0"/>
-          </a:p>
-        </p:txBody>
-      </p:sp>
-      <p:sp>
-        <p:nvSpPr>
-          <p:cNvPr id="3" name="Content Placeholder 2">
-            <a:extLst>
-              <a:ext uri="{FF2B5EF4-FFF2-40B4-BE49-F238E27FC236}">
-                <a16:creationId xmlns:a16="http://schemas.microsoft.com/office/drawing/2014/main" id="{ECC8AA23-D8D0-93BE-5C5F-103A750B0D2F}"/>
-              </a:ext>
-            </a:extLst>
-          </p:cNvPr>
-          <p:cNvSpPr>
-            <a:spLocks noGrp="1"/>
-          </p:cNvSpPr>
-          <p:nvPr>
-            <p:ph sz="half" idx="13"/>
-          </p:nvPr>
-        </p:nvSpPr>
-        <p:spPr>
-          <a:xfrm>
-            <a:off x="838200" y="3813681"/>
-            <a:ext cx="4898571" cy="2188317"/>
-          </a:xfrm>
-          <a:noFill/>
-        </p:spPr>
-        <p:txBody>
-          <a:bodyPr vert="horz" lIns="91440" tIns="45720" rIns="91440" bIns="45720" rtlCol="0" anchor="t">
-            <a:normAutofit/>
-          </a:bodyPr>
-          <a:lstStyle/>
-          <a:p>
-            <a:r>
-              <a:rPr lang="en-US"/>
-              <a:t>Currently gearing up for a </a:t>
-            </a:r>
-            <a:br>
-              <a:rPr lang="en-US"/>
-            </a:br>
-            <a:r>
-              <a:rPr lang="en-US"/>
-              <a:t>ground-breaking launch </a:t>
-            </a:r>
-          </a:p>
-          <a:p>
-            <a:r>
-              <a:rPr lang="en-US"/>
-              <a:t>Our new offerings will captivate </a:t>
-            </a:r>
-            <a:br>
-              <a:rPr lang="en-US"/>
-            </a:br>
-            <a:r>
-              <a:rPr lang="en-US"/>
-              <a:t>the market</a:t>
-            </a:r>
-          </a:p>
-          <a:p>
-            <a:r>
-              <a:rPr lang="en-US"/>
-              <a:t>Our marketing campaign will </a:t>
-            </a:r>
-            <a:br>
-              <a:rPr lang="en-US"/>
-            </a:br>
-            <a:r>
-              <a:rPr lang="en-US"/>
-              <a:t>generate anticipation</a:t>
-            </a:r>
-            <a:endParaRPr lang="en-US" dirty="0"/>
-          </a:p>
-        </p:txBody>
-      </p:sp>
-      <p:graphicFrame>
-        <p:nvGraphicFramePr>
-          <p:cNvPr id="11" name="Content Placeholder 10" descr="Lined list SmartArt graphic">
-            <a:extLst>
-              <a:ext uri="{FF2B5EF4-FFF2-40B4-BE49-F238E27FC236}">
-                <a16:creationId xmlns:a16="http://schemas.microsoft.com/office/drawing/2014/main" id="{C619B1BA-71C2-42B2-CE82-5EBA957CEB36}"/>
-              </a:ext>
-            </a:extLst>
-          </p:cNvPr>
-          <p:cNvGraphicFramePr>
-            <a:graphicFrameLocks noGrp="1"/>
-          </p:cNvGraphicFramePr>
-          <p:nvPr>
-            <p:ph sz="half" idx="2"/>
-            <p:extLst>
-              <p:ext uri="{D42A27DB-BD31-4B8C-83A1-F6EECF244321}">
-                <p14:modId xmlns:p14="http://schemas.microsoft.com/office/powerpoint/2010/main" val="2751956016"/>
-              </p:ext>
-            </p:extLst>
-          </p:nvPr>
-        </p:nvGraphicFramePr>
-        <p:xfrm>
-          <a:off x="6510338" y="850900"/>
-          <a:ext cx="4843462" cy="5403850"/>
-        </p:xfrm>
-        <a:graphic>
-          <a:graphicData uri="http://schemas.openxmlformats.org/drawingml/2006/diagram">
-            <dgm:relIds xmlns:dgm="http://schemas.openxmlformats.org/drawingml/2006/diagram" xmlns:r="http://schemas.openxmlformats.org/officeDocument/2006/relationships" r:dm="rId2" r:lo="rId3" r:qs="rId4" r:cs="rId5"/>
-          </a:graphicData>
-        </a:graphic>
-      </p:graphicFrame>
-    </p:spTree>
-    <p:extLst>
-      <p:ext uri="{BB962C8B-B14F-4D97-AF65-F5344CB8AC3E}">
-        <p14:creationId xmlns:p14="http://schemas.microsoft.com/office/powerpoint/2010/main" val="2737241225"/>
-      </p:ext>
-    </p:extLst>
-  </p:cSld>
-  <p:clrMapOvr>
-    <a:masterClrMapping/>
-  </p:clrMapOvr>
-</p:sld>
-</file>
-
-<file path=ppt/slides/slide21.xml><?xml version="1.0" encoding="utf-8"?>
+<file path=ppt/slides/slide25.xml><?xml version="1.0" encoding="utf-8"?>
 <p:sld xmlns:a="http://schemas.openxmlformats.org/drawingml/2006/main" xmlns:r="http://schemas.openxmlformats.org/officeDocument/2006/relationships" xmlns:p="http://schemas.openxmlformats.org/presentationml/2006/main">
   <p:cSld>
     <p:bg>
@@ -28374,7 +31504,7 @@
 </p:sld>
 </file>
 
-<file path=ppt/slides/slide22.xml><?xml version="1.0" encoding="utf-8"?>
+<file path=ppt/slides/slide26.xml><?xml version="1.0" encoding="utf-8"?>
 <p:sld xmlns:a="http://schemas.openxmlformats.org/drawingml/2006/main" xmlns:r="http://schemas.openxmlformats.org/officeDocument/2006/relationships" xmlns:p="http://schemas.openxmlformats.org/presentationml/2006/main">
   <p:cSld>
     <p:bg>
@@ -28545,7 +31675,7 @@
 </p:sld>
 </file>
 
-<file path=ppt/slides/slide23.xml><?xml version="1.0" encoding="utf-8"?>
+<file path=ppt/slides/slide27.xml><?xml version="1.0" encoding="utf-8"?>
 <p:sld xmlns:a="http://schemas.openxmlformats.org/drawingml/2006/main" xmlns:r="http://schemas.openxmlformats.org/officeDocument/2006/relationships" xmlns:p="http://schemas.openxmlformats.org/presentationml/2006/main">
   <p:cSld>
     <p:bg>
@@ -29180,7 +32310,7 @@
 </p:sld>
 </file>
 
-<file path=ppt/slides/slide24.xml><?xml version="1.0" encoding="utf-8"?>
+<file path=ppt/slides/slide28.xml><?xml version="1.0" encoding="utf-8"?>
 <p:sld xmlns:a="http://schemas.openxmlformats.org/drawingml/2006/main" xmlns:r="http://schemas.openxmlformats.org/officeDocument/2006/relationships" xmlns:p="http://schemas.openxmlformats.org/presentationml/2006/main">
   <p:cSld>
     <p:bg>
@@ -29827,7 +32957,7 @@
 </p:sld>
 </file>
 
-<file path=ppt/slides/slide25.xml><?xml version="1.0" encoding="utf-8"?>
+<file path=ppt/slides/slide29.xml><?xml version="1.0" encoding="utf-8"?>
 <p:sld xmlns:a="http://schemas.openxmlformats.org/drawingml/2006/main" xmlns:r="http://schemas.openxmlformats.org/officeDocument/2006/relationships" xmlns:p="http://schemas.openxmlformats.org/presentationml/2006/main">
   <p:cSld>
     <p:bg>
@@ -29901,7 +33031,103 @@
 </p:sld>
 </file>
 
-<file path=ppt/slides/slide26.xml><?xml version="1.0" encoding="utf-8"?>
+<file path=ppt/slides/slide3.xml><?xml version="1.0" encoding="utf-8"?>
+<p:sld xmlns:a="http://schemas.openxmlformats.org/drawingml/2006/main" xmlns:r="http://schemas.openxmlformats.org/officeDocument/2006/relationships" xmlns:p="http://schemas.openxmlformats.org/presentationml/2006/main">
+  <p:cSld>
+    <p:spTree>
+      <p:nvGrpSpPr>
+        <p:cNvPr id="1" name=""/>
+        <p:cNvGrpSpPr/>
+        <p:nvPr/>
+      </p:nvGrpSpPr>
+      <p:grpSpPr>
+        <a:xfrm>
+          <a:off x="0" y="0"/>
+          <a:ext cx="0" cy="0"/>
+          <a:chOff x="0" y="0"/>
+          <a:chExt cx="0" cy="0"/>
+        </a:xfrm>
+      </p:grpSpPr>
+      <p:sp>
+        <p:nvSpPr>
+          <p:cNvPr id="3" name="Content Placeholder 2">
+            <a:extLst>
+              <a:ext uri="{FF2B5EF4-FFF2-40B4-BE49-F238E27FC236}">
+                <a16:creationId xmlns:a16="http://schemas.microsoft.com/office/drawing/2014/main" id="{9B33A463-AB57-6332-E6A2-A1A7AB3ED115}"/>
+              </a:ext>
+            </a:extLst>
+          </p:cNvPr>
+          <p:cNvSpPr>
+            <a:spLocks noGrp="1"/>
+          </p:cNvSpPr>
+          <p:nvPr>
+            <p:ph type="title"/>
+            <p:extLst>
+              <p:ext uri="{E7BDC344-281C-4309-B0C6-D0EE65EED2A8}">
+                <p202:designPr xmlns:p202="http://schemas.microsoft.com/office/powerpoint/2020/02/main">
+                  <p202:designTagLst>
+                    <p202:designTag name="ARCH:1:CLS" val="LargePlainText"/>
+                  </p202:designTagLst>
+                </p202:designPr>
+              </p:ext>
+            </p:extLst>
+          </p:nvPr>
+        </p:nvSpPr>
+        <p:spPr>
+          <a:xfrm>
+            <a:off x="1704181" y="2167821"/>
+            <a:ext cx="8783638" cy="2522359"/>
+          </a:xfrm>
+        </p:spPr>
+        <p:txBody>
+          <a:bodyPr anchor="ctr">
+            <a:normAutofit/>
+          </a:bodyPr>
+          <a:lstStyle/>
+          <a:p>
+            <a:pPr indent="0">
+              <a:buNone/>
+            </a:pPr>
+            <a:r>
+              <a:rPr lang="en-GB" sz="1800" b="1" dirty="0"/>
+              <a:t>“</a:t>
+            </a:r>
+            <a:r>
+              <a:rPr lang="en-GB" sz="1800" b="1" kern="1200" cap="all" spc="300" dirty="0"/>
+              <a:t>In recent years, there has been a massive rise in the usage of dating apps to find love. Many of these apps use sophisticated data science techniques to recommend possible matches to users and to optimize the user experience. These apps give us access to a wealth of information that we’ve never had before about how different people experience romance.” </a:t>
+            </a:r>
+            <a:br>
+              <a:rPr lang="en-GB" sz="1800" b="1" kern="1200" cap="all" spc="300" dirty="0"/>
+            </a:br>
+            <a:br>
+              <a:rPr lang="en-GB" sz="1800" b="1" kern="1200" cap="all" spc="300" dirty="0"/>
+            </a:br>
+            <a:r>
+              <a:rPr lang="en-GB" sz="1800" b="1" kern="1200" cap="all" spc="300" dirty="0"/>
+              <a:t>– </a:t>
+            </a:r>
+            <a:r>
+              <a:rPr lang="en-GB" sz="1800" b="1" kern="1200" cap="all" spc="300" dirty="0" err="1"/>
+              <a:t>Codecademy</a:t>
+            </a:r>
+            <a:endParaRPr lang="en-GB" sz="1800" dirty="0"/>
+          </a:p>
+        </p:txBody>
+      </p:sp>
+    </p:spTree>
+    <p:extLst>
+      <p:ext uri="{BB962C8B-B14F-4D97-AF65-F5344CB8AC3E}">
+        <p14:creationId xmlns:p14="http://schemas.microsoft.com/office/powerpoint/2010/main" val="806335326"/>
+      </p:ext>
+    </p:extLst>
+  </p:cSld>
+  <p:clrMapOvr>
+    <a:masterClrMapping/>
+  </p:clrMapOvr>
+</p:sld>
+</file>
+
+<file path=ppt/slides/slide30.xml><?xml version="1.0" encoding="utf-8"?>
 <p:sld xmlns:a="http://schemas.openxmlformats.org/drawingml/2006/main" xmlns:r="http://schemas.openxmlformats.org/officeDocument/2006/relationships" xmlns:p="http://schemas.openxmlformats.org/presentationml/2006/main">
   <p:cSld>
     <p:bg>
@@ -30017,102 +33243,6 @@
     <p:extLst>
       <p:ext uri="{BB962C8B-B14F-4D97-AF65-F5344CB8AC3E}">
         <p14:creationId xmlns:p14="http://schemas.microsoft.com/office/powerpoint/2010/main" val="2715385371"/>
-      </p:ext>
-    </p:extLst>
-  </p:cSld>
-  <p:clrMapOvr>
-    <a:masterClrMapping/>
-  </p:clrMapOvr>
-</p:sld>
-</file>
-
-<file path=ppt/slides/slide3.xml><?xml version="1.0" encoding="utf-8"?>
-<p:sld xmlns:a="http://schemas.openxmlformats.org/drawingml/2006/main" xmlns:r="http://schemas.openxmlformats.org/officeDocument/2006/relationships" xmlns:p="http://schemas.openxmlformats.org/presentationml/2006/main">
-  <p:cSld>
-    <p:spTree>
-      <p:nvGrpSpPr>
-        <p:cNvPr id="1" name=""/>
-        <p:cNvGrpSpPr/>
-        <p:nvPr/>
-      </p:nvGrpSpPr>
-      <p:grpSpPr>
-        <a:xfrm>
-          <a:off x="0" y="0"/>
-          <a:ext cx="0" cy="0"/>
-          <a:chOff x="0" y="0"/>
-          <a:chExt cx="0" cy="0"/>
-        </a:xfrm>
-      </p:grpSpPr>
-      <p:sp>
-        <p:nvSpPr>
-          <p:cNvPr id="3" name="Content Placeholder 2">
-            <a:extLst>
-              <a:ext uri="{FF2B5EF4-FFF2-40B4-BE49-F238E27FC236}">
-                <a16:creationId xmlns:a16="http://schemas.microsoft.com/office/drawing/2014/main" id="{9B33A463-AB57-6332-E6A2-A1A7AB3ED115}"/>
-              </a:ext>
-            </a:extLst>
-          </p:cNvPr>
-          <p:cNvSpPr>
-            <a:spLocks noGrp="1"/>
-          </p:cNvSpPr>
-          <p:nvPr>
-            <p:ph type="title"/>
-            <p:extLst>
-              <p:ext uri="{E7BDC344-281C-4309-B0C6-D0EE65EED2A8}">
-                <p202:designPr xmlns:p202="http://schemas.microsoft.com/office/powerpoint/2020/02/main">
-                  <p202:designTagLst>
-                    <p202:designTag name="ARCH:1:CLS" val="LargePlainText"/>
-                  </p202:designTagLst>
-                </p202:designPr>
-              </p:ext>
-            </p:extLst>
-          </p:nvPr>
-        </p:nvSpPr>
-        <p:spPr>
-          <a:xfrm>
-            <a:off x="1704181" y="2167821"/>
-            <a:ext cx="8783638" cy="2522359"/>
-          </a:xfrm>
-        </p:spPr>
-        <p:txBody>
-          <a:bodyPr anchor="ctr">
-            <a:normAutofit/>
-          </a:bodyPr>
-          <a:lstStyle/>
-          <a:p>
-            <a:pPr indent="0">
-              <a:buNone/>
-            </a:pPr>
-            <a:r>
-              <a:rPr lang="en-GB" sz="1800" b="1" dirty="0"/>
-              <a:t>“</a:t>
-            </a:r>
-            <a:r>
-              <a:rPr lang="en-GB" sz="1800" b="1" kern="1200" cap="all" spc="300" dirty="0"/>
-              <a:t>In recent years, there has been a massive rise in the usage of dating apps to find love. Many of these apps use sophisticated data science techniques to recommend possible matches to users and to optimize the user experience. These apps give us access to a wealth of information that we’ve never had before about how different people experience romance.” </a:t>
-            </a:r>
-            <a:br>
-              <a:rPr lang="en-GB" sz="1800" b="1" kern="1200" cap="all" spc="300" dirty="0"/>
-            </a:br>
-            <a:br>
-              <a:rPr lang="en-GB" sz="1800" b="1" kern="1200" cap="all" spc="300" dirty="0"/>
-            </a:br>
-            <a:r>
-              <a:rPr lang="en-GB" sz="1800" b="1" kern="1200" cap="all" spc="300" dirty="0"/>
-              <a:t>– </a:t>
-            </a:r>
-            <a:r>
-              <a:rPr lang="en-GB" sz="1800" b="1" kern="1200" cap="all" spc="300" dirty="0" err="1"/>
-              <a:t>Codecademy</a:t>
-            </a:r>
-            <a:endParaRPr lang="en-GB" sz="1800" dirty="0"/>
-          </a:p>
-        </p:txBody>
-      </p:sp>
-    </p:spTree>
-    <p:extLst>
-      <p:ext uri="{BB962C8B-B14F-4D97-AF65-F5344CB8AC3E}">
-        <p14:creationId xmlns:p14="http://schemas.microsoft.com/office/powerpoint/2010/main" val="806335326"/>
       </p:ext>
     </p:extLst>
   </p:cSld>
@@ -31846,15 +34976,6 @@
 </file>
 
 <file path=customXml/item1.xml><?xml version="1.0" encoding="utf-8"?>
-<?mso-contentType ?>
-<FormTemplates xmlns="http://schemas.microsoft.com/sharepoint/v3/contenttype/forms">
-  <Display>DocumentLibraryForm</Display>
-  <Edit>DocumentLibraryForm</Edit>
-  <New>DocumentLibraryForm</New>
-</FormTemplates>
-</file>
-
-<file path=customXml/item2.xml><?xml version="1.0" encoding="utf-8"?>
 <ct:contentTypeSchema xmlns:ct="http://schemas.microsoft.com/office/2006/metadata/contentType" xmlns:ma="http://schemas.microsoft.com/office/2006/metadata/properties/metaAttributes" ct:_="" ma:_="" ma:contentTypeName="Document" ma:contentTypeID="0x01010079F111ED35F8CC479449609E8A0923A6" ma:contentTypeVersion="30" ma:contentTypeDescription="Create a new document." ma:contentTypeScope="" ma:versionID="cec0622158e8f13124e9e8fd4de31bd1">
   <xsd:schema xmlns:xsd="http://www.w3.org/2001/XMLSchema" xmlns:xs="http://www.w3.org/2001/XMLSchema" xmlns:p="http://schemas.microsoft.com/office/2006/metadata/properties" xmlns:ns1="http://schemas.microsoft.com/sharepoint/v3" xmlns:ns2="71af3243-3dd4-4a8d-8c0d-dd76da1f02a5" xmlns:ns3="16c05727-aa75-4e4a-9b5f-8a80a1165891" xmlns:ns4="230e9df3-be65-4c73-a93b-d1236ebd677e" targetNamespace="http://schemas.microsoft.com/office/2006/metadata/properties" ma:root="true" ma:fieldsID="3b52f30ab005d15df08657af532e6e38" ns1:_="" ns2:_="" ns3:_="" ns4:_="">
     <xsd:import namespace="http://schemas.microsoft.com/sharepoint/v3"/>
@@ -32172,6 +35293,15 @@
 </ct:contentTypeSchema>
 </file>
 
+<file path=customXml/item2.xml><?xml version="1.0" encoding="utf-8"?>
+<?mso-contentType ?>
+<FormTemplates xmlns="http://schemas.microsoft.com/sharepoint/v3/contenttype/forms">
+  <Display>DocumentLibraryForm</Display>
+  <Edit>DocumentLibraryForm</Edit>
+  <New>DocumentLibraryForm</New>
+</FormTemplates>
+</file>
+
 <file path=customXml/item3.xml><?xml version="1.0" encoding="utf-8"?>
 <p:properties xmlns:p="http://schemas.microsoft.com/office/2006/metadata/properties" xmlns:xsi="http://www.w3.org/2001/XMLSchema-instance" xmlns:pc="http://schemas.microsoft.com/office/infopath/2007/PartnerControls">
   <documentManagement>
@@ -32193,14 +35323,6 @@
 </file>
 
 <file path=customXml/itemProps1.xml><?xml version="1.0" encoding="utf-8"?>
-<ds:datastoreItem xmlns:ds="http://schemas.openxmlformats.org/officeDocument/2006/customXml" ds:itemID="{0F60B100-7079-4DE7-AF7C-20BFB1D62C46}">
-  <ds:schemaRefs>
-    <ds:schemaRef ds:uri="http://schemas.microsoft.com/sharepoint/v3/contenttype/forms"/>
-  </ds:schemaRefs>
-</ds:datastoreItem>
-</file>
-
-<file path=customXml/itemProps2.xml><?xml version="1.0" encoding="utf-8"?>
 <ds:datastoreItem xmlns:ds="http://schemas.openxmlformats.org/officeDocument/2006/customXml" ds:itemID="{118B1F56-8983-41A9-8E90-86247BC2C41D}">
   <ds:schemaRefs>
     <ds:schemaRef ds:uri="http://schemas.microsoft.com/office/2006/metadata/contentType"/>
@@ -32217,6 +35339,14 @@
     <ds:schemaRef ds:uri="http://purl.org/dc/elements/1.1/"/>
     <ds:schemaRef ds:uri="http://purl.org/dc/terms/"/>
     <ds:schemaRef ds:uri="http://schemas.microsoft.com/internal/obd"/>
+  </ds:schemaRefs>
+</ds:datastoreItem>
+</file>
+
+<file path=customXml/itemProps2.xml><?xml version="1.0" encoding="utf-8"?>
+<ds:datastoreItem xmlns:ds="http://schemas.openxmlformats.org/officeDocument/2006/customXml" ds:itemID="{0F60B100-7079-4DE7-AF7C-20BFB1D62C46}">
+  <ds:schemaRefs>
+    <ds:schemaRef ds:uri="http://schemas.microsoft.com/sharepoint/v3/contenttype/forms"/>
   </ds:schemaRefs>
 </ds:datastoreItem>
 </file>

--- a/OKCupid-Date-A-Scientist-Starter/OKCupid – Machine Learning Analysis.pptx
+++ b/OKCupid-Date-A-Scientist-Starter/OKCupid – Machine Learning Analysis.pptx
@@ -5,16 +5,16 @@
     <p:sldMasterId id="2147483648" r:id="rId4"/>
   </p:sldMasterIdLst>
   <p:notesMasterIdLst>
-    <p:notesMasterId r:id="rId35"/>
+    <p:notesMasterId r:id="rId40"/>
   </p:notesMasterIdLst>
   <p:handoutMasterIdLst>
-    <p:handoutMasterId r:id="rId36"/>
+    <p:handoutMasterId r:id="rId41"/>
   </p:handoutMasterIdLst>
   <p:sldIdLst>
     <p:sldId id="256" r:id="rId5"/>
     <p:sldId id="270" r:id="rId6"/>
-    <p:sldId id="284" r:id="rId7"/>
-    <p:sldId id="271" r:id="rId8"/>
+    <p:sldId id="271" r:id="rId7"/>
+    <p:sldId id="284" r:id="rId8"/>
     <p:sldId id="269" r:id="rId9"/>
     <p:sldId id="279" r:id="rId10"/>
     <p:sldId id="266" r:id="rId11"/>
@@ -34,13 +34,18 @@
     <p:sldId id="297" r:id="rId25"/>
     <p:sldId id="298" r:id="rId26"/>
     <p:sldId id="282" r:id="rId27"/>
-    <p:sldId id="272" r:id="rId28"/>
-    <p:sldId id="274" r:id="rId29"/>
-    <p:sldId id="275" r:id="rId30"/>
-    <p:sldId id="276" r:id="rId31"/>
-    <p:sldId id="267" r:id="rId32"/>
-    <p:sldId id="277" r:id="rId33"/>
-    <p:sldId id="278" r:id="rId34"/>
+    <p:sldId id="303" r:id="rId28"/>
+    <p:sldId id="301" r:id="rId29"/>
+    <p:sldId id="302" r:id="rId30"/>
+    <p:sldId id="304" r:id="rId31"/>
+    <p:sldId id="305" r:id="rId32"/>
+    <p:sldId id="306" r:id="rId33"/>
+    <p:sldId id="272" r:id="rId34"/>
+    <p:sldId id="274" r:id="rId35"/>
+    <p:sldId id="299" r:id="rId36"/>
+    <p:sldId id="275" r:id="rId37"/>
+    <p:sldId id="300" r:id="rId38"/>
+    <p:sldId id="277" r:id="rId39"/>
   </p:sldIdLst>
   <p:sldSz cx="12192000" cy="6858000"/>
   <p:notesSz cx="6858000" cy="9144000"/>
@@ -146,8 +151,8 @@
           <p14:sldIdLst>
             <p14:sldId id="256"/>
             <p14:sldId id="270"/>
+            <p14:sldId id="271"/>
             <p14:sldId id="284"/>
-            <p14:sldId id="271"/>
             <p14:sldId id="269"/>
           </p14:sldIdLst>
         </p14:section>
@@ -183,17 +188,22 @@
         <p14:section name="Model Evaluation" id="{C4FF13F1-7E39-4AB8-AB4D-D7B290A99173}">
           <p14:sldIdLst>
             <p14:sldId id="282"/>
+            <p14:sldId id="303"/>
+            <p14:sldId id="301"/>
+            <p14:sldId id="302"/>
+            <p14:sldId id="304"/>
+            <p14:sldId id="305"/>
+            <p14:sldId id="306"/>
           </p14:sldIdLst>
         </p14:section>
         <p14:section name="Conclusion" id="{D40678AF-1A16-4A05-8F05-5E5965F8B786}">
           <p14:sldIdLst>
             <p14:sldId id="272"/>
             <p14:sldId id="274"/>
+            <p14:sldId id="299"/>
             <p14:sldId id="275"/>
-            <p14:sldId id="276"/>
-            <p14:sldId id="267"/>
+            <p14:sldId id="300"/>
             <p14:sldId id="277"/>
-            <p14:sldId id="278"/>
           </p14:sldIdLst>
         </p14:section>
       </p14:sectionLst>
@@ -4811,6 +4821,857 @@
 </file>
 
 <file path=ppt/diagrams/colors7.xml><?xml version="1.0" encoding="utf-8"?>
+<dgm:colorsDef xmlns:dgm="http://schemas.openxmlformats.org/drawingml/2006/diagram" xmlns:a="http://schemas.openxmlformats.org/drawingml/2006/main" uniqueId="urn:microsoft.com/office/officeart/2005/8/colors/accent1_2">
+  <dgm:title val=""/>
+  <dgm:desc val=""/>
+  <dgm:catLst>
+    <dgm:cat type="accent1" pri="11200"/>
+  </dgm:catLst>
+  <dgm:styleLbl name="node0">
+    <dgm:fillClrLst meth="repeat">
+      <a:schemeClr val="accent1"/>
+    </dgm:fillClrLst>
+    <dgm:linClrLst meth="repeat">
+      <a:schemeClr val="lt1"/>
+    </dgm:linClrLst>
+    <dgm:effectClrLst/>
+    <dgm:txLinClrLst/>
+    <dgm:txFillClrLst/>
+    <dgm:txEffectClrLst/>
+  </dgm:styleLbl>
+  <dgm:styleLbl name="node0NoLn">
+    <dgm:fillClrLst meth="repeat">
+      <a:schemeClr val="accent1"/>
+    </dgm:fillClrLst>
+    <dgm:linClrLst meth="repeat">
+      <a:schemeClr val="lt1">
+        <a:alpha val="0"/>
+      </a:schemeClr>
+    </dgm:linClrLst>
+    <dgm:effectClrLst/>
+    <dgm:txLinClrLst/>
+    <dgm:txFillClrLst/>
+    <dgm:txEffectClrLst/>
+  </dgm:styleLbl>
+  <dgm:styleLbl name="alignNode1">
+    <dgm:fillClrLst meth="repeat">
+      <a:schemeClr val="accent1"/>
+    </dgm:fillClrLst>
+    <dgm:linClrLst meth="repeat">
+      <a:schemeClr val="accent1"/>
+    </dgm:linClrLst>
+    <dgm:effectClrLst/>
+    <dgm:txLinClrLst/>
+    <dgm:txFillClrLst/>
+    <dgm:txEffectClrLst/>
+  </dgm:styleLbl>
+  <dgm:styleLbl name="node1">
+    <dgm:fillClrLst meth="repeat">
+      <a:schemeClr val="accent1"/>
+    </dgm:fillClrLst>
+    <dgm:linClrLst meth="repeat">
+      <a:schemeClr val="lt1"/>
+    </dgm:linClrLst>
+    <dgm:effectClrLst/>
+    <dgm:txLinClrLst/>
+    <dgm:txFillClrLst/>
+    <dgm:txEffectClrLst/>
+  </dgm:styleLbl>
+  <dgm:styleLbl name="node1NoLn">
+    <dgm:fillClrLst meth="repeat">
+      <a:schemeClr val="accent1"/>
+    </dgm:fillClrLst>
+    <dgm:linClrLst meth="repeat">
+      <a:schemeClr val="lt1">
+        <a:alpha val="0"/>
+      </a:schemeClr>
+    </dgm:linClrLst>
+    <dgm:effectClrLst/>
+    <dgm:txLinClrLst/>
+    <dgm:txFillClrLst/>
+    <dgm:txEffectClrLst/>
+  </dgm:styleLbl>
+  <dgm:styleLbl name="ltNode1NoLn">
+    <dgm:fillClrLst meth="repeat">
+      <a:schemeClr val="accent1">
+        <a:tint val="75000"/>
+      </a:schemeClr>
+    </dgm:fillClrLst>
+    <dgm:linClrLst meth="repeat">
+      <a:schemeClr val="lt1">
+        <a:alpha val="0"/>
+      </a:schemeClr>
+    </dgm:linClrLst>
+    <dgm:effectClrLst/>
+    <dgm:txLinClrLst/>
+    <dgm:txFillClrLst meth="repeat">
+      <a:schemeClr val="dk1"/>
+    </dgm:txFillClrLst>
+    <dgm:txEffectClrLst/>
+  </dgm:styleLbl>
+  <dgm:styleLbl name="lnNode1">
+    <dgm:fillClrLst meth="repeat">
+      <a:schemeClr val="accent1"/>
+    </dgm:fillClrLst>
+    <dgm:linClrLst meth="repeat">
+      <a:schemeClr val="lt1"/>
+    </dgm:linClrLst>
+    <dgm:effectClrLst/>
+    <dgm:txLinClrLst/>
+    <dgm:txFillClrLst/>
+    <dgm:txEffectClrLst/>
+  </dgm:styleLbl>
+  <dgm:styleLbl name="vennNode1">
+    <dgm:fillClrLst meth="repeat">
+      <a:schemeClr val="accent1">
+        <a:alpha val="50000"/>
+      </a:schemeClr>
+    </dgm:fillClrLst>
+    <dgm:linClrLst meth="repeat">
+      <a:schemeClr val="lt1"/>
+    </dgm:linClrLst>
+    <dgm:effectClrLst/>
+    <dgm:txLinClrLst/>
+    <dgm:txFillClrLst/>
+    <dgm:txEffectClrLst/>
+  </dgm:styleLbl>
+  <dgm:styleLbl name="node2">
+    <dgm:fillClrLst meth="repeat">
+      <a:schemeClr val="accent1"/>
+    </dgm:fillClrLst>
+    <dgm:linClrLst meth="repeat">
+      <a:schemeClr val="lt1"/>
+    </dgm:linClrLst>
+    <dgm:effectClrLst/>
+    <dgm:txLinClrLst/>
+    <dgm:txFillClrLst/>
+    <dgm:txEffectClrLst/>
+  </dgm:styleLbl>
+  <dgm:styleLbl name="node2NoLn">
+    <dgm:fillClrLst meth="repeat">
+      <a:schemeClr val="accent1"/>
+    </dgm:fillClrLst>
+    <dgm:linClrLst meth="repeat">
+      <a:schemeClr val="lt1">
+        <a:alpha val="0"/>
+      </a:schemeClr>
+    </dgm:linClrLst>
+    <dgm:effectClrLst/>
+    <dgm:txLinClrLst/>
+    <dgm:txFillClrLst/>
+    <dgm:txEffectClrLst/>
+  </dgm:styleLbl>
+  <dgm:styleLbl name="node3">
+    <dgm:fillClrLst meth="repeat">
+      <a:schemeClr val="accent1"/>
+    </dgm:fillClrLst>
+    <dgm:linClrLst meth="repeat">
+      <a:schemeClr val="lt1"/>
+    </dgm:linClrLst>
+    <dgm:effectClrLst/>
+    <dgm:txLinClrLst/>
+    <dgm:txFillClrLst/>
+    <dgm:txEffectClrLst/>
+  </dgm:styleLbl>
+  <dgm:styleLbl name="node3NoLn">
+    <dgm:fillClrLst meth="repeat">
+      <a:schemeClr val="accent1"/>
+    </dgm:fillClrLst>
+    <dgm:linClrLst meth="repeat">
+      <a:schemeClr val="lt1">
+        <a:alpha val="0"/>
+      </a:schemeClr>
+    </dgm:linClrLst>
+    <dgm:effectClrLst/>
+    <dgm:txLinClrLst/>
+    <dgm:txFillClrLst/>
+    <dgm:txEffectClrLst/>
+  </dgm:styleLbl>
+  <dgm:styleLbl name="node4">
+    <dgm:fillClrLst meth="repeat">
+      <a:schemeClr val="accent1"/>
+    </dgm:fillClrLst>
+    <dgm:linClrLst meth="repeat">
+      <a:schemeClr val="lt1"/>
+    </dgm:linClrLst>
+    <dgm:effectClrLst/>
+    <dgm:txLinClrLst/>
+    <dgm:txFillClrLst/>
+    <dgm:txEffectClrLst/>
+  </dgm:styleLbl>
+  <dgm:styleLbl name="node4NoLn">
+    <dgm:fillClrLst meth="repeat">
+      <a:schemeClr val="accent1"/>
+    </dgm:fillClrLst>
+    <dgm:linClrLst meth="repeat">
+      <a:schemeClr val="lt1">
+        <a:alpha val="0"/>
+      </a:schemeClr>
+    </dgm:linClrLst>
+    <dgm:effectClrLst/>
+    <dgm:txLinClrLst/>
+    <dgm:txFillClrLst/>
+    <dgm:txEffectClrLst/>
+  </dgm:styleLbl>
+  <dgm:styleLbl name="fgImgPlace1">
+    <dgm:fillClrLst meth="repeat">
+      <a:schemeClr val="accent1">
+        <a:tint val="50000"/>
+      </a:schemeClr>
+    </dgm:fillClrLst>
+    <dgm:linClrLst meth="repeat">
+      <a:schemeClr val="lt1"/>
+    </dgm:linClrLst>
+    <dgm:effectClrLst/>
+    <dgm:txLinClrLst/>
+    <dgm:txFillClrLst meth="repeat">
+      <a:schemeClr val="lt1"/>
+    </dgm:txFillClrLst>
+    <dgm:txEffectClrLst/>
+  </dgm:styleLbl>
+  <dgm:styleLbl name="alignImgPlace1">
+    <dgm:fillClrLst meth="repeat">
+      <a:schemeClr val="accent1">
+        <a:tint val="50000"/>
+      </a:schemeClr>
+    </dgm:fillClrLst>
+    <dgm:linClrLst meth="repeat">
+      <a:schemeClr val="lt1"/>
+    </dgm:linClrLst>
+    <dgm:effectClrLst/>
+    <dgm:txLinClrLst/>
+    <dgm:txFillClrLst meth="repeat">
+      <a:schemeClr val="lt1"/>
+    </dgm:txFillClrLst>
+    <dgm:txEffectClrLst/>
+  </dgm:styleLbl>
+  <dgm:styleLbl name="bgImgPlace1">
+    <dgm:fillClrLst meth="repeat">
+      <a:schemeClr val="accent1">
+        <a:tint val="50000"/>
+      </a:schemeClr>
+    </dgm:fillClrLst>
+    <dgm:linClrLst meth="repeat">
+      <a:schemeClr val="lt1"/>
+    </dgm:linClrLst>
+    <dgm:effectClrLst/>
+    <dgm:txLinClrLst/>
+    <dgm:txFillClrLst meth="repeat">
+      <a:schemeClr val="lt1"/>
+    </dgm:txFillClrLst>
+    <dgm:txEffectClrLst/>
+  </dgm:styleLbl>
+  <dgm:styleLbl name="sibTrans2D1">
+    <dgm:fillClrLst meth="repeat">
+      <a:schemeClr val="accent1">
+        <a:tint val="60000"/>
+      </a:schemeClr>
+    </dgm:fillClrLst>
+    <dgm:linClrLst meth="repeat">
+      <a:schemeClr val="accent1">
+        <a:tint val="60000"/>
+      </a:schemeClr>
+    </dgm:linClrLst>
+    <dgm:effectClrLst/>
+    <dgm:txLinClrLst/>
+    <dgm:txFillClrLst/>
+    <dgm:txEffectClrLst/>
+  </dgm:styleLbl>
+  <dgm:styleLbl name="fgSibTrans2D1">
+    <dgm:fillClrLst meth="repeat">
+      <a:schemeClr val="accent1">
+        <a:tint val="60000"/>
+      </a:schemeClr>
+    </dgm:fillClrLst>
+    <dgm:linClrLst meth="repeat">
+      <a:schemeClr val="accent1">
+        <a:tint val="60000"/>
+      </a:schemeClr>
+    </dgm:linClrLst>
+    <dgm:effectClrLst/>
+    <dgm:txLinClrLst/>
+    <dgm:txFillClrLst/>
+    <dgm:txEffectClrLst/>
+  </dgm:styleLbl>
+  <dgm:styleLbl name="bgSibTrans2D1">
+    <dgm:fillClrLst meth="repeat">
+      <a:schemeClr val="accent1">
+        <a:tint val="60000"/>
+      </a:schemeClr>
+    </dgm:fillClrLst>
+    <dgm:linClrLst meth="repeat">
+      <a:schemeClr val="accent1">
+        <a:tint val="60000"/>
+      </a:schemeClr>
+    </dgm:linClrLst>
+    <dgm:effectClrLst/>
+    <dgm:txLinClrLst/>
+    <dgm:txFillClrLst/>
+    <dgm:txEffectClrLst/>
+  </dgm:styleLbl>
+  <dgm:styleLbl name="sibTrans1D1">
+    <dgm:fillClrLst meth="repeat">
+      <a:schemeClr val="accent1"/>
+    </dgm:fillClrLst>
+    <dgm:linClrLst meth="repeat">
+      <a:schemeClr val="accent1"/>
+    </dgm:linClrLst>
+    <dgm:effectClrLst/>
+    <dgm:txLinClrLst/>
+    <dgm:txFillClrLst meth="repeat">
+      <a:schemeClr val="tx1"/>
+    </dgm:txFillClrLst>
+    <dgm:txEffectClrLst/>
+  </dgm:styleLbl>
+  <dgm:styleLbl name="callout">
+    <dgm:fillClrLst meth="repeat">
+      <a:schemeClr val="accent1"/>
+    </dgm:fillClrLst>
+    <dgm:linClrLst meth="repeat">
+      <a:schemeClr val="accent1">
+        <a:tint val="50000"/>
+      </a:schemeClr>
+    </dgm:linClrLst>
+    <dgm:effectClrLst/>
+    <dgm:txLinClrLst/>
+    <dgm:txFillClrLst meth="repeat">
+      <a:schemeClr val="tx1"/>
+    </dgm:txFillClrLst>
+    <dgm:txEffectClrLst/>
+  </dgm:styleLbl>
+  <dgm:styleLbl name="asst0">
+    <dgm:fillClrLst meth="repeat">
+      <a:schemeClr val="accent1"/>
+    </dgm:fillClrLst>
+    <dgm:linClrLst meth="repeat">
+      <a:schemeClr val="lt1"/>
+    </dgm:linClrLst>
+    <dgm:effectClrLst/>
+    <dgm:txLinClrLst/>
+    <dgm:txFillClrLst/>
+    <dgm:txEffectClrLst/>
+  </dgm:styleLbl>
+  <dgm:styleLbl name="asst1">
+    <dgm:fillClrLst meth="repeat">
+      <a:schemeClr val="accent1"/>
+    </dgm:fillClrLst>
+    <dgm:linClrLst meth="repeat">
+      <a:schemeClr val="lt1"/>
+    </dgm:linClrLst>
+    <dgm:effectClrLst/>
+    <dgm:txLinClrLst/>
+    <dgm:txFillClrLst/>
+    <dgm:txEffectClrLst/>
+  </dgm:styleLbl>
+  <dgm:styleLbl name="asst2">
+    <dgm:fillClrLst meth="repeat">
+      <a:schemeClr val="accent1"/>
+    </dgm:fillClrLst>
+    <dgm:linClrLst meth="repeat">
+      <a:schemeClr val="lt1"/>
+    </dgm:linClrLst>
+    <dgm:effectClrLst/>
+    <dgm:txLinClrLst/>
+    <dgm:txFillClrLst/>
+    <dgm:txEffectClrLst/>
+  </dgm:styleLbl>
+  <dgm:styleLbl name="asst3">
+    <dgm:fillClrLst meth="repeat">
+      <a:schemeClr val="accent1"/>
+    </dgm:fillClrLst>
+    <dgm:linClrLst meth="repeat">
+      <a:schemeClr val="lt1"/>
+    </dgm:linClrLst>
+    <dgm:effectClrLst/>
+    <dgm:txLinClrLst/>
+    <dgm:txFillClrLst/>
+    <dgm:txEffectClrLst/>
+  </dgm:styleLbl>
+  <dgm:styleLbl name="asst4">
+    <dgm:fillClrLst meth="repeat">
+      <a:schemeClr val="accent1"/>
+    </dgm:fillClrLst>
+    <dgm:linClrLst meth="repeat">
+      <a:schemeClr val="lt1"/>
+    </dgm:linClrLst>
+    <dgm:effectClrLst/>
+    <dgm:txLinClrLst/>
+    <dgm:txFillClrLst/>
+    <dgm:txEffectClrLst/>
+  </dgm:styleLbl>
+  <dgm:styleLbl name="parChTrans2D1">
+    <dgm:fillClrLst meth="repeat">
+      <a:schemeClr val="accent1">
+        <a:tint val="60000"/>
+      </a:schemeClr>
+    </dgm:fillClrLst>
+    <dgm:linClrLst meth="repeat">
+      <a:schemeClr val="accent1">
+        <a:tint val="60000"/>
+      </a:schemeClr>
+    </dgm:linClrLst>
+    <dgm:effectClrLst/>
+    <dgm:txLinClrLst/>
+    <dgm:txFillClrLst meth="repeat">
+      <a:schemeClr val="lt1"/>
+    </dgm:txFillClrLst>
+    <dgm:txEffectClrLst/>
+  </dgm:styleLbl>
+  <dgm:styleLbl name="parChTrans2D2">
+    <dgm:fillClrLst meth="repeat">
+      <a:schemeClr val="accent1"/>
+    </dgm:fillClrLst>
+    <dgm:linClrLst meth="repeat">
+      <a:schemeClr val="accent1"/>
+    </dgm:linClrLst>
+    <dgm:effectClrLst/>
+    <dgm:txLinClrLst/>
+    <dgm:txFillClrLst meth="repeat">
+      <a:schemeClr val="lt1"/>
+    </dgm:txFillClrLst>
+    <dgm:txEffectClrLst/>
+  </dgm:styleLbl>
+  <dgm:styleLbl name="parChTrans2D3">
+    <dgm:fillClrLst meth="repeat">
+      <a:schemeClr val="accent1"/>
+    </dgm:fillClrLst>
+    <dgm:linClrLst meth="repeat">
+      <a:schemeClr val="accent1"/>
+    </dgm:linClrLst>
+    <dgm:effectClrLst/>
+    <dgm:txLinClrLst/>
+    <dgm:txFillClrLst meth="repeat">
+      <a:schemeClr val="lt1"/>
+    </dgm:txFillClrLst>
+    <dgm:txEffectClrLst/>
+  </dgm:styleLbl>
+  <dgm:styleLbl name="parChTrans2D4">
+    <dgm:fillClrLst meth="repeat">
+      <a:schemeClr val="accent1"/>
+    </dgm:fillClrLst>
+    <dgm:linClrLst meth="repeat">
+      <a:schemeClr val="accent1"/>
+    </dgm:linClrLst>
+    <dgm:effectClrLst/>
+    <dgm:txLinClrLst/>
+    <dgm:txFillClrLst meth="repeat">
+      <a:schemeClr val="lt1"/>
+    </dgm:txFillClrLst>
+    <dgm:txEffectClrLst/>
+  </dgm:styleLbl>
+  <dgm:styleLbl name="parChTrans1D1">
+    <dgm:fillClrLst meth="repeat">
+      <a:schemeClr val="accent1"/>
+    </dgm:fillClrLst>
+    <dgm:linClrLst meth="repeat">
+      <a:schemeClr val="accent1">
+        <a:shade val="60000"/>
+      </a:schemeClr>
+    </dgm:linClrLst>
+    <dgm:effectClrLst/>
+    <dgm:txLinClrLst/>
+    <dgm:txFillClrLst meth="repeat">
+      <a:schemeClr val="tx1"/>
+    </dgm:txFillClrLst>
+    <dgm:txEffectClrLst/>
+  </dgm:styleLbl>
+  <dgm:styleLbl name="parChTrans1D2">
+    <dgm:fillClrLst meth="repeat">
+      <a:schemeClr val="accent1"/>
+    </dgm:fillClrLst>
+    <dgm:linClrLst meth="repeat">
+      <a:schemeClr val="accent1">
+        <a:shade val="60000"/>
+      </a:schemeClr>
+    </dgm:linClrLst>
+    <dgm:effectClrLst/>
+    <dgm:txLinClrLst/>
+    <dgm:txFillClrLst meth="repeat">
+      <a:schemeClr val="tx1"/>
+    </dgm:txFillClrLst>
+    <dgm:txEffectClrLst/>
+  </dgm:styleLbl>
+  <dgm:styleLbl name="parChTrans1D3">
+    <dgm:fillClrLst meth="repeat">
+      <a:schemeClr val="accent1"/>
+    </dgm:fillClrLst>
+    <dgm:linClrLst meth="repeat">
+      <a:schemeClr val="accent1">
+        <a:shade val="80000"/>
+      </a:schemeClr>
+    </dgm:linClrLst>
+    <dgm:effectClrLst/>
+    <dgm:txLinClrLst/>
+    <dgm:txFillClrLst meth="repeat">
+      <a:schemeClr val="tx1"/>
+    </dgm:txFillClrLst>
+    <dgm:txEffectClrLst/>
+  </dgm:styleLbl>
+  <dgm:styleLbl name="parChTrans1D4">
+    <dgm:fillClrLst meth="repeat">
+      <a:schemeClr val="accent1"/>
+    </dgm:fillClrLst>
+    <dgm:linClrLst meth="repeat">
+      <a:schemeClr val="accent1">
+        <a:shade val="80000"/>
+      </a:schemeClr>
+    </dgm:linClrLst>
+    <dgm:effectClrLst/>
+    <dgm:txLinClrLst/>
+    <dgm:txFillClrLst meth="repeat">
+      <a:schemeClr val="tx1"/>
+    </dgm:txFillClrLst>
+    <dgm:txEffectClrLst/>
+  </dgm:styleLbl>
+  <dgm:styleLbl name="fgAcc1">
+    <dgm:fillClrLst meth="repeat">
+      <a:schemeClr val="lt1">
+        <a:alpha val="90000"/>
+      </a:schemeClr>
+    </dgm:fillClrLst>
+    <dgm:linClrLst meth="repeat">
+      <a:schemeClr val="accent1"/>
+    </dgm:linClrLst>
+    <dgm:effectClrLst/>
+    <dgm:txLinClrLst/>
+    <dgm:txFillClrLst meth="repeat">
+      <a:schemeClr val="dk1"/>
+    </dgm:txFillClrLst>
+    <dgm:txEffectClrLst/>
+  </dgm:styleLbl>
+  <dgm:styleLbl name="conFgAcc1">
+    <dgm:fillClrLst meth="repeat">
+      <a:schemeClr val="lt1">
+        <a:alpha val="90000"/>
+      </a:schemeClr>
+    </dgm:fillClrLst>
+    <dgm:linClrLst meth="repeat">
+      <a:schemeClr val="accent1"/>
+    </dgm:linClrLst>
+    <dgm:effectClrLst/>
+    <dgm:txLinClrLst/>
+    <dgm:txFillClrLst meth="repeat">
+      <a:schemeClr val="dk1"/>
+    </dgm:txFillClrLst>
+    <dgm:txEffectClrLst/>
+  </dgm:styleLbl>
+  <dgm:styleLbl name="alignAcc1">
+    <dgm:fillClrLst meth="repeat">
+      <a:schemeClr val="lt1">
+        <a:alpha val="90000"/>
+      </a:schemeClr>
+    </dgm:fillClrLst>
+    <dgm:linClrLst meth="repeat">
+      <a:schemeClr val="accent1"/>
+    </dgm:linClrLst>
+    <dgm:effectClrLst/>
+    <dgm:txLinClrLst/>
+    <dgm:txFillClrLst meth="repeat">
+      <a:schemeClr val="dk1"/>
+    </dgm:txFillClrLst>
+    <dgm:txEffectClrLst/>
+  </dgm:styleLbl>
+  <dgm:styleLbl name="trAlignAcc1">
+    <dgm:fillClrLst meth="repeat">
+      <a:schemeClr val="lt1">
+        <a:alpha val="40000"/>
+      </a:schemeClr>
+    </dgm:fillClrLst>
+    <dgm:linClrLst meth="repeat">
+      <a:schemeClr val="accent1"/>
+    </dgm:linClrLst>
+    <dgm:effectClrLst/>
+    <dgm:txLinClrLst/>
+    <dgm:txFillClrLst meth="repeat">
+      <a:schemeClr val="dk1"/>
+    </dgm:txFillClrLst>
+    <dgm:txEffectClrLst/>
+  </dgm:styleLbl>
+  <dgm:styleLbl name="bgAcc1">
+    <dgm:fillClrLst meth="repeat">
+      <a:schemeClr val="lt1">
+        <a:alpha val="90000"/>
+      </a:schemeClr>
+    </dgm:fillClrLst>
+    <dgm:linClrLst meth="repeat">
+      <a:schemeClr val="accent1"/>
+    </dgm:linClrLst>
+    <dgm:effectClrLst/>
+    <dgm:txLinClrLst/>
+    <dgm:txFillClrLst meth="repeat">
+      <a:schemeClr val="dk1"/>
+    </dgm:txFillClrLst>
+    <dgm:txEffectClrLst/>
+  </dgm:styleLbl>
+  <dgm:styleLbl name="solidFgAcc1">
+    <dgm:fillClrLst meth="repeat">
+      <a:schemeClr val="lt1"/>
+    </dgm:fillClrLst>
+    <dgm:linClrLst meth="repeat">
+      <a:schemeClr val="accent1"/>
+    </dgm:linClrLst>
+    <dgm:effectClrLst/>
+    <dgm:txLinClrLst/>
+    <dgm:txFillClrLst meth="repeat">
+      <a:schemeClr val="dk1"/>
+    </dgm:txFillClrLst>
+    <dgm:txEffectClrLst/>
+  </dgm:styleLbl>
+  <dgm:styleLbl name="solidAlignAcc1">
+    <dgm:fillClrLst meth="repeat">
+      <a:schemeClr val="lt1"/>
+    </dgm:fillClrLst>
+    <dgm:linClrLst meth="repeat">
+      <a:schemeClr val="accent1"/>
+    </dgm:linClrLst>
+    <dgm:effectClrLst/>
+    <dgm:txLinClrLst/>
+    <dgm:txFillClrLst meth="repeat">
+      <a:schemeClr val="dk1"/>
+    </dgm:txFillClrLst>
+    <dgm:txEffectClrLst/>
+  </dgm:styleLbl>
+  <dgm:styleLbl name="solidBgAcc1">
+    <dgm:fillClrLst meth="repeat">
+      <a:schemeClr val="lt1"/>
+    </dgm:fillClrLst>
+    <dgm:linClrLst meth="repeat">
+      <a:schemeClr val="accent1"/>
+    </dgm:linClrLst>
+    <dgm:effectClrLst/>
+    <dgm:txLinClrLst/>
+    <dgm:txFillClrLst meth="repeat">
+      <a:schemeClr val="dk1"/>
+    </dgm:txFillClrLst>
+    <dgm:txEffectClrLst/>
+  </dgm:styleLbl>
+  <dgm:styleLbl name="fgAccFollowNode1">
+    <dgm:fillClrLst meth="repeat">
+      <a:schemeClr val="accent1">
+        <a:alpha val="90000"/>
+        <a:tint val="40000"/>
+      </a:schemeClr>
+    </dgm:fillClrLst>
+    <dgm:linClrLst meth="repeat">
+      <a:schemeClr val="accent1">
+        <a:alpha val="90000"/>
+        <a:tint val="40000"/>
+      </a:schemeClr>
+    </dgm:linClrLst>
+    <dgm:effectClrLst/>
+    <dgm:txLinClrLst/>
+    <dgm:txFillClrLst meth="repeat">
+      <a:schemeClr val="dk1"/>
+    </dgm:txFillClrLst>
+    <dgm:txEffectClrLst/>
+  </dgm:styleLbl>
+  <dgm:styleLbl name="alignAccFollowNode1">
+    <dgm:fillClrLst meth="repeat">
+      <a:schemeClr val="accent1">
+        <a:alpha val="90000"/>
+        <a:tint val="40000"/>
+      </a:schemeClr>
+    </dgm:fillClrLst>
+    <dgm:linClrLst meth="repeat">
+      <a:schemeClr val="accent1">
+        <a:alpha val="90000"/>
+        <a:tint val="40000"/>
+      </a:schemeClr>
+    </dgm:linClrLst>
+    <dgm:effectClrLst/>
+    <dgm:txLinClrLst/>
+    <dgm:txFillClrLst meth="repeat">
+      <a:schemeClr val="dk1"/>
+    </dgm:txFillClrLst>
+    <dgm:txEffectClrLst/>
+  </dgm:styleLbl>
+  <dgm:styleLbl name="bgAccFollowNode1">
+    <dgm:fillClrLst meth="repeat">
+      <a:schemeClr val="accent1">
+        <a:alpha val="90000"/>
+        <a:tint val="40000"/>
+      </a:schemeClr>
+    </dgm:fillClrLst>
+    <dgm:linClrLst meth="repeat">
+      <a:schemeClr val="accent1">
+        <a:alpha val="90000"/>
+        <a:tint val="40000"/>
+      </a:schemeClr>
+    </dgm:linClrLst>
+    <dgm:effectClrLst/>
+    <dgm:txLinClrLst/>
+    <dgm:txFillClrLst meth="repeat">
+      <a:schemeClr val="dk1"/>
+    </dgm:txFillClrLst>
+    <dgm:txEffectClrLst/>
+  </dgm:styleLbl>
+  <dgm:styleLbl name="fgAcc0">
+    <dgm:fillClrLst meth="repeat">
+      <a:schemeClr val="lt1">
+        <a:alpha val="90000"/>
+      </a:schemeClr>
+    </dgm:fillClrLst>
+    <dgm:linClrLst meth="repeat">
+      <a:schemeClr val="accent1"/>
+    </dgm:linClrLst>
+    <dgm:effectClrLst/>
+    <dgm:txLinClrLst/>
+    <dgm:txFillClrLst meth="repeat">
+      <a:schemeClr val="dk1"/>
+    </dgm:txFillClrLst>
+    <dgm:txEffectClrLst/>
+  </dgm:styleLbl>
+  <dgm:styleLbl name="fgAcc2">
+    <dgm:fillClrLst meth="repeat">
+      <a:schemeClr val="lt1">
+        <a:alpha val="90000"/>
+      </a:schemeClr>
+    </dgm:fillClrLst>
+    <dgm:linClrLst meth="repeat">
+      <a:schemeClr val="accent1"/>
+    </dgm:linClrLst>
+    <dgm:effectClrLst/>
+    <dgm:txLinClrLst/>
+    <dgm:txFillClrLst meth="repeat">
+      <a:schemeClr val="dk1"/>
+    </dgm:txFillClrLst>
+    <dgm:txEffectClrLst/>
+  </dgm:styleLbl>
+  <dgm:styleLbl name="fgAcc3">
+    <dgm:fillClrLst meth="repeat">
+      <a:schemeClr val="lt1">
+        <a:alpha val="90000"/>
+      </a:schemeClr>
+    </dgm:fillClrLst>
+    <dgm:linClrLst meth="repeat">
+      <a:schemeClr val="accent1"/>
+    </dgm:linClrLst>
+    <dgm:effectClrLst/>
+    <dgm:txLinClrLst/>
+    <dgm:txFillClrLst meth="repeat">
+      <a:schemeClr val="dk1"/>
+    </dgm:txFillClrLst>
+    <dgm:txEffectClrLst/>
+  </dgm:styleLbl>
+  <dgm:styleLbl name="fgAcc4">
+    <dgm:fillClrLst meth="repeat">
+      <a:schemeClr val="lt1">
+        <a:alpha val="90000"/>
+      </a:schemeClr>
+    </dgm:fillClrLst>
+    <dgm:linClrLst meth="repeat">
+      <a:schemeClr val="accent1"/>
+    </dgm:linClrLst>
+    <dgm:effectClrLst/>
+    <dgm:txLinClrLst/>
+    <dgm:txFillClrLst meth="repeat">
+      <a:schemeClr val="dk1"/>
+    </dgm:txFillClrLst>
+    <dgm:txEffectClrLst/>
+  </dgm:styleLbl>
+  <dgm:styleLbl name="bgShp">
+    <dgm:fillClrLst meth="repeat">
+      <a:schemeClr val="accent1">
+        <a:tint val="40000"/>
+      </a:schemeClr>
+    </dgm:fillClrLst>
+    <dgm:linClrLst meth="repeat">
+      <a:schemeClr val="accent1"/>
+    </dgm:linClrLst>
+    <dgm:effectClrLst/>
+    <dgm:txLinClrLst/>
+    <dgm:txFillClrLst meth="repeat">
+      <a:schemeClr val="dk1"/>
+    </dgm:txFillClrLst>
+    <dgm:txEffectClrLst/>
+  </dgm:styleLbl>
+  <dgm:styleLbl name="dkBgShp">
+    <dgm:fillClrLst meth="repeat">
+      <a:schemeClr val="accent1">
+        <a:shade val="80000"/>
+      </a:schemeClr>
+    </dgm:fillClrLst>
+    <dgm:linClrLst meth="repeat">
+      <a:schemeClr val="accent1"/>
+    </dgm:linClrLst>
+    <dgm:effectClrLst/>
+    <dgm:txLinClrLst/>
+    <dgm:txFillClrLst meth="repeat">
+      <a:schemeClr val="lt1"/>
+    </dgm:txFillClrLst>
+    <dgm:txEffectClrLst/>
+  </dgm:styleLbl>
+  <dgm:styleLbl name="trBgShp">
+    <dgm:fillClrLst meth="repeat">
+      <a:schemeClr val="accent1">
+        <a:tint val="50000"/>
+        <a:alpha val="40000"/>
+      </a:schemeClr>
+    </dgm:fillClrLst>
+    <dgm:linClrLst meth="repeat">
+      <a:schemeClr val="accent1"/>
+    </dgm:linClrLst>
+    <dgm:effectClrLst/>
+    <dgm:txLinClrLst/>
+    <dgm:txFillClrLst meth="repeat">
+      <a:schemeClr val="lt1"/>
+    </dgm:txFillClrLst>
+    <dgm:txEffectClrLst/>
+  </dgm:styleLbl>
+  <dgm:styleLbl name="fgShp">
+    <dgm:fillClrLst meth="repeat">
+      <a:schemeClr val="accent1">
+        <a:tint val="60000"/>
+      </a:schemeClr>
+    </dgm:fillClrLst>
+    <dgm:linClrLst meth="repeat">
+      <a:schemeClr val="lt1"/>
+    </dgm:linClrLst>
+    <dgm:effectClrLst/>
+    <dgm:txLinClrLst/>
+    <dgm:txFillClrLst meth="repeat">
+      <a:schemeClr val="dk1"/>
+    </dgm:txFillClrLst>
+    <dgm:txEffectClrLst/>
+  </dgm:styleLbl>
+  <dgm:styleLbl name="revTx">
+    <dgm:fillClrLst meth="repeat">
+      <a:schemeClr val="lt1">
+        <a:alpha val="0"/>
+      </a:schemeClr>
+    </dgm:fillClrLst>
+    <dgm:linClrLst meth="repeat">
+      <a:schemeClr val="dk1">
+        <a:alpha val="0"/>
+      </a:schemeClr>
+    </dgm:linClrLst>
+    <dgm:effectClrLst/>
+    <dgm:txLinClrLst/>
+    <dgm:txFillClrLst meth="repeat">
+      <a:schemeClr val="tx1"/>
+    </dgm:txFillClrLst>
+    <dgm:txEffectClrLst/>
+  </dgm:styleLbl>
+  <dgm:styleLbl name="revTxLt">
+    <dgm:fillClrLst meth="repeat">
+      <a:schemeClr val="lt1">
+        <a:alpha val="0"/>
+      </a:schemeClr>
+    </dgm:fillClrLst>
+    <dgm:linClrLst meth="repeat">
+      <a:schemeClr val="dk1">
+        <a:alpha val="0"/>
+      </a:schemeClr>
+    </dgm:linClrLst>
+    <dgm:effectClrLst/>
+    <dgm:txLinClrLst/>
+    <dgm:txFillClrLst/>
+    <dgm:txEffectClrLst/>
+  </dgm:styleLbl>
+</dgm:colorsDef>
+</file>
+
+<file path=ppt/diagrams/colors8.xml><?xml version="1.0" encoding="utf-8"?>
 <dgm:colorsDef xmlns:dgm="http://schemas.openxmlformats.org/drawingml/2006/diagram" xmlns:a="http://schemas.openxmlformats.org/drawingml/2006/main" uniqueId="urn:microsoft.com/office/officeart/2005/8/colors/accent1_2">
   <dgm:title val=""/>
   <dgm:desc val=""/>
@@ -8673,6 +9534,258 @@
 </file>
 
 <file path=ppt/diagrams/data7.xml><?xml version="1.0" encoding="utf-8"?>
+<dgm:dataModel xmlns:dgm="http://schemas.openxmlformats.org/drawingml/2006/diagram" xmlns:a="http://schemas.openxmlformats.org/drawingml/2006/main">
+  <dgm:ptLst>
+    <dgm:pt modelId="{A59CC7A5-D768-46BB-881E-38135F09791D}" type="doc">
+      <dgm:prSet loTypeId="urn:microsoft.com/office/officeart/2005/8/layout/pList1" loCatId="list" qsTypeId="urn:microsoft.com/office/officeart/2005/8/quickstyle/simple1" qsCatId="simple" csTypeId="urn:microsoft.com/office/officeart/2005/8/colors/accent1_2" csCatId="accent1" phldr="1"/>
+      <dgm:spPr/>
+      <dgm:t>
+        <a:bodyPr/>
+        <a:lstStyle/>
+        <a:p>
+          <a:endParaRPr lang="en-GB"/>
+        </a:p>
+      </dgm:t>
+    </dgm:pt>
+    <dgm:pt modelId="{B3B4F47B-5B48-4C4E-9F05-9621EFDE957F}">
+      <dgm:prSet phldrT="[Text]" phldr="0"/>
+      <dgm:spPr/>
+      <dgm:t>
+        <a:bodyPr/>
+        <a:lstStyle/>
+        <a:p>
+          <a:r>
+            <a:rPr lang="en-GB" dirty="0">
+              <a:latin typeface="+mj-lt"/>
+            </a:rPr>
+            <a:t>Logistic Regression</a:t>
+          </a:r>
+        </a:p>
+      </dgm:t>
+    </dgm:pt>
+    <dgm:pt modelId="{FBF1FDBF-DEF2-4D93-8B36-32035F0C0D88}" type="parTrans" cxnId="{C11A2446-5A27-4240-9176-0A328E1B0CD9}">
+      <dgm:prSet/>
+      <dgm:spPr/>
+      <dgm:t>
+        <a:bodyPr/>
+        <a:lstStyle/>
+        <a:p>
+          <a:endParaRPr lang="en-GB"/>
+        </a:p>
+      </dgm:t>
+    </dgm:pt>
+    <dgm:pt modelId="{AD04AFC8-63F3-4D28-8CCD-455D8770DF05}" type="sibTrans" cxnId="{C11A2446-5A27-4240-9176-0A328E1B0CD9}">
+      <dgm:prSet/>
+      <dgm:spPr/>
+      <dgm:t>
+        <a:bodyPr/>
+        <a:lstStyle/>
+        <a:p>
+          <a:endParaRPr lang="en-GB"/>
+        </a:p>
+      </dgm:t>
+    </dgm:pt>
+    <dgm:pt modelId="{FEA849CA-A795-40B2-BEF6-C81709EA7183}">
+      <dgm:prSet phldrT="[Text]" phldr="0"/>
+      <dgm:spPr/>
+      <dgm:t>
+        <a:bodyPr/>
+        <a:lstStyle/>
+        <a:p>
+          <a:r>
+            <a:rPr lang="en-GB" dirty="0">
+              <a:latin typeface="+mj-lt"/>
+            </a:rPr>
+            <a:t>K-Nearest Neighbours</a:t>
+          </a:r>
+        </a:p>
+      </dgm:t>
+    </dgm:pt>
+    <dgm:pt modelId="{FA4D5A3F-01D0-4F14-B4AF-8FC71782959C}" type="parTrans" cxnId="{8C847E2A-4F5A-4C1A-B297-223C997C7F6C}">
+      <dgm:prSet/>
+      <dgm:spPr/>
+      <dgm:t>
+        <a:bodyPr/>
+        <a:lstStyle/>
+        <a:p>
+          <a:endParaRPr lang="en-GB"/>
+        </a:p>
+      </dgm:t>
+    </dgm:pt>
+    <dgm:pt modelId="{C282E216-DCB9-4505-BFAE-611DC1FD6E1A}" type="sibTrans" cxnId="{8C847E2A-4F5A-4C1A-B297-223C997C7F6C}">
+      <dgm:prSet/>
+      <dgm:spPr/>
+      <dgm:t>
+        <a:bodyPr/>
+        <a:lstStyle/>
+        <a:p>
+          <a:endParaRPr lang="en-GB"/>
+        </a:p>
+      </dgm:t>
+    </dgm:pt>
+    <dgm:pt modelId="{6D941E3E-BA87-4A3D-87B1-3C2E68BBF106}">
+      <dgm:prSet phldrT="[Text]" phldr="0"/>
+      <dgm:spPr/>
+      <dgm:t>
+        <a:bodyPr/>
+        <a:lstStyle/>
+        <a:p>
+          <a:r>
+            <a:rPr lang="en-GB" dirty="0">
+              <a:latin typeface="+mj-lt"/>
+            </a:rPr>
+            <a:t>Random Forests</a:t>
+          </a:r>
+        </a:p>
+      </dgm:t>
+    </dgm:pt>
+    <dgm:pt modelId="{742BD4B2-06D3-48EF-906E-46E1F0FB830A}" type="parTrans" cxnId="{F0C70428-F241-4A28-8349-4A2AF6F403DF}">
+      <dgm:prSet/>
+      <dgm:spPr/>
+      <dgm:t>
+        <a:bodyPr/>
+        <a:lstStyle/>
+        <a:p>
+          <a:endParaRPr lang="en-GB"/>
+        </a:p>
+      </dgm:t>
+    </dgm:pt>
+    <dgm:pt modelId="{0008EA42-0234-4CE5-BE35-EA74B8E92192}" type="sibTrans" cxnId="{F0C70428-F241-4A28-8349-4A2AF6F403DF}">
+      <dgm:prSet/>
+      <dgm:spPr/>
+      <dgm:t>
+        <a:bodyPr/>
+        <a:lstStyle/>
+        <a:p>
+          <a:endParaRPr lang="en-GB"/>
+        </a:p>
+      </dgm:t>
+    </dgm:pt>
+    <dgm:pt modelId="{A09CE610-2605-4F96-9146-10F4BDC12089}" type="pres">
+      <dgm:prSet presAssocID="{A59CC7A5-D768-46BB-881E-38135F09791D}" presName="Name0" presStyleCnt="0">
+        <dgm:presLayoutVars>
+          <dgm:dir/>
+          <dgm:resizeHandles val="exact"/>
+        </dgm:presLayoutVars>
+      </dgm:prSet>
+      <dgm:spPr/>
+    </dgm:pt>
+    <dgm:pt modelId="{BA14BA05-080A-407D-B214-E01CDF501204}" type="pres">
+      <dgm:prSet presAssocID="{B3B4F47B-5B48-4C4E-9F05-9621EFDE957F}" presName="compNode" presStyleCnt="0"/>
+      <dgm:spPr/>
+    </dgm:pt>
+    <dgm:pt modelId="{7032BB5A-2D8A-4300-838D-C47B2F2E4BA7}" type="pres">
+      <dgm:prSet presAssocID="{B3B4F47B-5B48-4C4E-9F05-9621EFDE957F}" presName="pictRect" presStyleLbl="node1" presStyleIdx="0" presStyleCnt="3" custScaleX="68989"/>
+      <dgm:spPr>
+        <a:blipFill>
+          <a:blip xmlns:r="http://schemas.openxmlformats.org/officeDocument/2006/relationships" r:embed="rId1"/>
+          <a:srcRect/>
+          <a:stretch>
+            <a:fillRect/>
+          </a:stretch>
+        </a:blipFill>
+      </dgm:spPr>
+    </dgm:pt>
+    <dgm:pt modelId="{01781F16-0C2D-4586-8AFB-F87900D9A657}" type="pres">
+      <dgm:prSet presAssocID="{B3B4F47B-5B48-4C4E-9F05-9621EFDE957F}" presName="textRect" presStyleLbl="revTx" presStyleIdx="0" presStyleCnt="3">
+        <dgm:presLayoutVars>
+          <dgm:bulletEnabled val="1"/>
+        </dgm:presLayoutVars>
+      </dgm:prSet>
+      <dgm:spPr/>
+    </dgm:pt>
+    <dgm:pt modelId="{2C402089-8E84-4972-BD95-0ECFA8C7CDD0}" type="pres">
+      <dgm:prSet presAssocID="{AD04AFC8-63F3-4D28-8CCD-455D8770DF05}" presName="sibTrans" presStyleLbl="sibTrans2D1" presStyleIdx="0" presStyleCnt="0"/>
+      <dgm:spPr/>
+    </dgm:pt>
+    <dgm:pt modelId="{55A9F854-E901-4D34-8982-91E3434C47A0}" type="pres">
+      <dgm:prSet presAssocID="{6D941E3E-BA87-4A3D-87B1-3C2E68BBF106}" presName="compNode" presStyleCnt="0"/>
+      <dgm:spPr/>
+    </dgm:pt>
+    <dgm:pt modelId="{E57FDBEA-07CD-4EE0-B9F6-B3513C800D23}" type="pres">
+      <dgm:prSet presAssocID="{6D941E3E-BA87-4A3D-87B1-3C2E68BBF106}" presName="pictRect" presStyleLbl="node1" presStyleIdx="1" presStyleCnt="3" custScaleX="68989"/>
+      <dgm:spPr>
+        <a:blipFill>
+          <a:blip xmlns:r="http://schemas.openxmlformats.org/officeDocument/2006/relationships" r:embed="rId2"/>
+          <a:srcRect/>
+          <a:stretch>
+            <a:fillRect/>
+          </a:stretch>
+        </a:blipFill>
+      </dgm:spPr>
+    </dgm:pt>
+    <dgm:pt modelId="{5A2326FB-9C5F-4C93-94B6-3F68487EE15B}" type="pres">
+      <dgm:prSet presAssocID="{6D941E3E-BA87-4A3D-87B1-3C2E68BBF106}" presName="textRect" presStyleLbl="revTx" presStyleIdx="1" presStyleCnt="3">
+        <dgm:presLayoutVars>
+          <dgm:bulletEnabled val="1"/>
+        </dgm:presLayoutVars>
+      </dgm:prSet>
+      <dgm:spPr/>
+    </dgm:pt>
+    <dgm:pt modelId="{FBB6A2C1-ABDE-4364-BDF9-6EBC88D5F2AF}" type="pres">
+      <dgm:prSet presAssocID="{0008EA42-0234-4CE5-BE35-EA74B8E92192}" presName="sibTrans" presStyleLbl="sibTrans2D1" presStyleIdx="0" presStyleCnt="0"/>
+      <dgm:spPr/>
+    </dgm:pt>
+    <dgm:pt modelId="{5600010E-AFAD-4192-9F26-4CA4FBF925C4}" type="pres">
+      <dgm:prSet presAssocID="{FEA849CA-A795-40B2-BEF6-C81709EA7183}" presName="compNode" presStyleCnt="0"/>
+      <dgm:spPr/>
+    </dgm:pt>
+    <dgm:pt modelId="{48E9D8B7-C615-4785-9984-18582DDB6C31}" type="pres">
+      <dgm:prSet presAssocID="{FEA849CA-A795-40B2-BEF6-C81709EA7183}" presName="pictRect" presStyleLbl="node1" presStyleIdx="2" presStyleCnt="3" custScaleX="68989"/>
+      <dgm:spPr>
+        <a:blipFill>
+          <a:blip xmlns:r="http://schemas.openxmlformats.org/officeDocument/2006/relationships" r:embed="rId3"/>
+          <a:srcRect/>
+          <a:stretch>
+            <a:fillRect/>
+          </a:stretch>
+        </a:blipFill>
+      </dgm:spPr>
+    </dgm:pt>
+    <dgm:pt modelId="{D267D666-2C35-4EC6-8B1E-910B727C725A}" type="pres">
+      <dgm:prSet presAssocID="{FEA849CA-A795-40B2-BEF6-C81709EA7183}" presName="textRect" presStyleLbl="revTx" presStyleIdx="2" presStyleCnt="3">
+        <dgm:presLayoutVars>
+          <dgm:bulletEnabled val="1"/>
+        </dgm:presLayoutVars>
+      </dgm:prSet>
+      <dgm:spPr/>
+    </dgm:pt>
+  </dgm:ptLst>
+  <dgm:cxnLst>
+    <dgm:cxn modelId="{65C8C90C-45C3-4357-8265-5E32875ECCBB}" type="presOf" srcId="{0008EA42-0234-4CE5-BE35-EA74B8E92192}" destId="{FBB6A2C1-ABDE-4364-BDF9-6EBC88D5F2AF}" srcOrd="0" destOrd="0" presId="urn:microsoft.com/office/officeart/2005/8/layout/pList1"/>
+    <dgm:cxn modelId="{F0C70428-F241-4A28-8349-4A2AF6F403DF}" srcId="{A59CC7A5-D768-46BB-881E-38135F09791D}" destId="{6D941E3E-BA87-4A3D-87B1-3C2E68BBF106}" srcOrd="1" destOrd="0" parTransId="{742BD4B2-06D3-48EF-906E-46E1F0FB830A}" sibTransId="{0008EA42-0234-4CE5-BE35-EA74B8E92192}"/>
+    <dgm:cxn modelId="{8C847E2A-4F5A-4C1A-B297-223C997C7F6C}" srcId="{A59CC7A5-D768-46BB-881E-38135F09791D}" destId="{FEA849CA-A795-40B2-BEF6-C81709EA7183}" srcOrd="2" destOrd="0" parTransId="{FA4D5A3F-01D0-4F14-B4AF-8FC71782959C}" sibTransId="{C282E216-DCB9-4505-BFAE-611DC1FD6E1A}"/>
+    <dgm:cxn modelId="{F134583A-3336-446D-BB3D-ADC33509CB74}" type="presOf" srcId="{FEA849CA-A795-40B2-BEF6-C81709EA7183}" destId="{D267D666-2C35-4EC6-8B1E-910B727C725A}" srcOrd="0" destOrd="0" presId="urn:microsoft.com/office/officeart/2005/8/layout/pList1"/>
+    <dgm:cxn modelId="{C11A2446-5A27-4240-9176-0A328E1B0CD9}" srcId="{A59CC7A5-D768-46BB-881E-38135F09791D}" destId="{B3B4F47B-5B48-4C4E-9F05-9621EFDE957F}" srcOrd="0" destOrd="0" parTransId="{FBF1FDBF-DEF2-4D93-8B36-32035F0C0D88}" sibTransId="{AD04AFC8-63F3-4D28-8CCD-455D8770DF05}"/>
+    <dgm:cxn modelId="{51D3E899-B148-4056-B613-1128211D5D3C}" type="presOf" srcId="{AD04AFC8-63F3-4D28-8CCD-455D8770DF05}" destId="{2C402089-8E84-4972-BD95-0ECFA8C7CDD0}" srcOrd="0" destOrd="0" presId="urn:microsoft.com/office/officeart/2005/8/layout/pList1"/>
+    <dgm:cxn modelId="{EEEA90B9-B54B-40AE-897F-F0C96D829DC0}" type="presOf" srcId="{6D941E3E-BA87-4A3D-87B1-3C2E68BBF106}" destId="{5A2326FB-9C5F-4C93-94B6-3F68487EE15B}" srcOrd="0" destOrd="0" presId="urn:microsoft.com/office/officeart/2005/8/layout/pList1"/>
+    <dgm:cxn modelId="{A303D6C6-D8B5-4773-8EAA-6A04F2738817}" type="presOf" srcId="{B3B4F47B-5B48-4C4E-9F05-9621EFDE957F}" destId="{01781F16-0C2D-4586-8AFB-F87900D9A657}" srcOrd="0" destOrd="0" presId="urn:microsoft.com/office/officeart/2005/8/layout/pList1"/>
+    <dgm:cxn modelId="{C67E65D9-3B14-4112-AFF2-7351062D9252}" type="presOf" srcId="{A59CC7A5-D768-46BB-881E-38135F09791D}" destId="{A09CE610-2605-4F96-9146-10F4BDC12089}" srcOrd="0" destOrd="0" presId="urn:microsoft.com/office/officeart/2005/8/layout/pList1"/>
+    <dgm:cxn modelId="{DEB80D80-F589-435F-8E52-CA70F3DF82EC}" type="presParOf" srcId="{A09CE610-2605-4F96-9146-10F4BDC12089}" destId="{BA14BA05-080A-407D-B214-E01CDF501204}" srcOrd="0" destOrd="0" presId="urn:microsoft.com/office/officeart/2005/8/layout/pList1"/>
+    <dgm:cxn modelId="{1EFAA57C-C4FA-41BE-924B-BD2B1AE4EE50}" type="presParOf" srcId="{BA14BA05-080A-407D-B214-E01CDF501204}" destId="{7032BB5A-2D8A-4300-838D-C47B2F2E4BA7}" srcOrd="0" destOrd="0" presId="urn:microsoft.com/office/officeart/2005/8/layout/pList1"/>
+    <dgm:cxn modelId="{AB1A2F32-08FD-43C7-9C68-B38192DD4BBA}" type="presParOf" srcId="{BA14BA05-080A-407D-B214-E01CDF501204}" destId="{01781F16-0C2D-4586-8AFB-F87900D9A657}" srcOrd="1" destOrd="0" presId="urn:microsoft.com/office/officeart/2005/8/layout/pList1"/>
+    <dgm:cxn modelId="{FF09DF6B-EFC0-4E58-810C-154A35D0A21A}" type="presParOf" srcId="{A09CE610-2605-4F96-9146-10F4BDC12089}" destId="{2C402089-8E84-4972-BD95-0ECFA8C7CDD0}" srcOrd="1" destOrd="0" presId="urn:microsoft.com/office/officeart/2005/8/layout/pList1"/>
+    <dgm:cxn modelId="{66B40D53-1DF6-4753-80B4-FAC3F82B9046}" type="presParOf" srcId="{A09CE610-2605-4F96-9146-10F4BDC12089}" destId="{55A9F854-E901-4D34-8982-91E3434C47A0}" srcOrd="2" destOrd="0" presId="urn:microsoft.com/office/officeart/2005/8/layout/pList1"/>
+    <dgm:cxn modelId="{FBF20499-73BB-4B33-A13B-5600E9B1CFE8}" type="presParOf" srcId="{55A9F854-E901-4D34-8982-91E3434C47A0}" destId="{E57FDBEA-07CD-4EE0-B9F6-B3513C800D23}" srcOrd="0" destOrd="0" presId="urn:microsoft.com/office/officeart/2005/8/layout/pList1"/>
+    <dgm:cxn modelId="{476D9C86-D72E-442D-A217-49D4DE1CEE35}" type="presParOf" srcId="{55A9F854-E901-4D34-8982-91E3434C47A0}" destId="{5A2326FB-9C5F-4C93-94B6-3F68487EE15B}" srcOrd="1" destOrd="0" presId="urn:microsoft.com/office/officeart/2005/8/layout/pList1"/>
+    <dgm:cxn modelId="{2BC41412-C7FC-4C4C-8A8E-FF3B9FB3330D}" type="presParOf" srcId="{A09CE610-2605-4F96-9146-10F4BDC12089}" destId="{FBB6A2C1-ABDE-4364-BDF9-6EBC88D5F2AF}" srcOrd="3" destOrd="0" presId="urn:microsoft.com/office/officeart/2005/8/layout/pList1"/>
+    <dgm:cxn modelId="{27711C6D-6B9B-4C9C-92C6-67AFB4CD0498}" type="presParOf" srcId="{A09CE610-2605-4F96-9146-10F4BDC12089}" destId="{5600010E-AFAD-4192-9F26-4CA4FBF925C4}" srcOrd="4" destOrd="0" presId="urn:microsoft.com/office/officeart/2005/8/layout/pList1"/>
+    <dgm:cxn modelId="{22283B7E-98F7-4F81-87EC-507CEB50333D}" type="presParOf" srcId="{5600010E-AFAD-4192-9F26-4CA4FBF925C4}" destId="{48E9D8B7-C615-4785-9984-18582DDB6C31}" srcOrd="0" destOrd="0" presId="urn:microsoft.com/office/officeart/2005/8/layout/pList1"/>
+    <dgm:cxn modelId="{74638D9A-D647-4BBD-A2E1-AEE5BAA8F0D1}" type="presParOf" srcId="{5600010E-AFAD-4192-9F26-4CA4FBF925C4}" destId="{D267D666-2C35-4EC6-8B1E-910B727C725A}" srcOrd="1" destOrd="0" presId="urn:microsoft.com/office/officeart/2005/8/layout/pList1"/>
+  </dgm:cxnLst>
+  <dgm:bg>
+    <a:noFill/>
+  </dgm:bg>
+  <dgm:whole/>
+  <dgm:extLst>
+    <a:ext uri="http://schemas.microsoft.com/office/drawing/2008/diagram">
+      <dsp:dataModelExt xmlns:dsp="http://schemas.microsoft.com/office/drawing/2008/diagram" relId="rId6" minVer="http://schemas.openxmlformats.org/drawingml/2006/diagram"/>
+    </a:ext>
+  </dgm:extLst>
+</dgm:dataModel>
+</file>
+
+<file path=ppt/diagrams/data8.xml><?xml version="1.0" encoding="utf-8"?>
 <dgm:dataModel xmlns:dgm="http://schemas.openxmlformats.org/drawingml/2006/diagram" xmlns:a="http://schemas.openxmlformats.org/drawingml/2006/main">
   <dgm:ptLst>
     <dgm:pt modelId="{A59CC7A5-D768-46BB-881E-38135F09791D}" type="doc">
@@ -13419,6 +14532,351 @@
 </dsp:drawing>
 </file>
 
+<file path=ppt/diagrams/drawing8.xml><?xml version="1.0" encoding="utf-8"?>
+<dsp:drawing xmlns:dgm="http://schemas.openxmlformats.org/drawingml/2006/diagram" xmlns:dsp="http://schemas.microsoft.com/office/drawing/2008/diagram" xmlns:a="http://schemas.openxmlformats.org/drawingml/2006/main">
+  <dsp:spTree>
+    <dsp:nvGrpSpPr>
+      <dsp:cNvPr id="0" name=""/>
+      <dsp:cNvGrpSpPr/>
+    </dsp:nvGrpSpPr>
+    <dsp:grpSpPr/>
+    <dsp:sp modelId="{7032BB5A-2D8A-4300-838D-C47B2F2E4BA7}">
+      <dsp:nvSpPr>
+        <dsp:cNvPr id="0" name=""/>
+        <dsp:cNvSpPr/>
+      </dsp:nvSpPr>
+      <dsp:spPr>
+        <a:xfrm>
+          <a:off x="533635" y="795"/>
+          <a:ext cx="2255490" cy="2252580"/>
+        </a:xfrm>
+        <a:prstGeom prst="roundRect">
+          <a:avLst/>
+        </a:prstGeom>
+        <a:blipFill>
+          <a:blip xmlns:r="http://schemas.openxmlformats.org/officeDocument/2006/relationships" r:embed="rId1"/>
+          <a:srcRect/>
+          <a:stretch>
+            <a:fillRect/>
+          </a:stretch>
+        </a:blipFill>
+        <a:ln w="12700" cap="flat" cmpd="sng" algn="ctr">
+          <a:solidFill>
+            <a:schemeClr val="lt1">
+              <a:hueOff val="0"/>
+              <a:satOff val="0"/>
+              <a:lumOff val="0"/>
+              <a:alphaOff val="0"/>
+            </a:schemeClr>
+          </a:solidFill>
+          <a:prstDash val="solid"/>
+          <a:miter lim="800000"/>
+        </a:ln>
+        <a:effectLst/>
+      </dsp:spPr>
+      <dsp:style>
+        <a:lnRef idx="2">
+          <a:scrgbClr r="0" g="0" b="0"/>
+        </a:lnRef>
+        <a:fillRef idx="1">
+          <a:scrgbClr r="0" g="0" b="0"/>
+        </a:fillRef>
+        <a:effectRef idx="0">
+          <a:scrgbClr r="0" g="0" b="0"/>
+        </a:effectRef>
+        <a:fontRef idx="minor">
+          <a:schemeClr val="lt1"/>
+        </a:fontRef>
+      </dsp:style>
+    </dsp:sp>
+    <dsp:sp modelId="{01781F16-0C2D-4586-8AFB-F87900D9A657}">
+      <dsp:nvSpPr>
+        <dsp:cNvPr id="0" name=""/>
+        <dsp:cNvSpPr/>
+      </dsp:nvSpPr>
+      <dsp:spPr>
+        <a:xfrm>
+          <a:off x="26706" y="2253376"/>
+          <a:ext cx="3269347" cy="1212927"/>
+        </a:xfrm>
+        <a:prstGeom prst="rect">
+          <a:avLst/>
+        </a:prstGeom>
+        <a:noFill/>
+        <a:ln>
+          <a:noFill/>
+        </a:ln>
+        <a:effectLst/>
+      </dsp:spPr>
+      <dsp:style>
+        <a:lnRef idx="0">
+          <a:scrgbClr r="0" g="0" b="0"/>
+        </a:lnRef>
+        <a:fillRef idx="0">
+          <a:scrgbClr r="0" g="0" b="0"/>
+        </a:fillRef>
+        <a:effectRef idx="0">
+          <a:scrgbClr r="0" g="0" b="0"/>
+        </a:effectRef>
+        <a:fontRef idx="minor"/>
+      </dsp:style>
+      <dsp:txBody>
+        <a:bodyPr spcFirstLastPara="0" vert="horz" wrap="square" lIns="220472" tIns="220472" rIns="220472" bIns="0" numCol="1" spcCol="1270" anchor="t" anchorCtr="0">
+          <a:noAutofit/>
+        </a:bodyPr>
+        <a:lstStyle/>
+        <a:p>
+          <a:pPr marL="0" lvl="0" indent="0" algn="ctr" defTabSz="1377950">
+            <a:lnSpc>
+              <a:spcPct val="90000"/>
+            </a:lnSpc>
+            <a:spcBef>
+              <a:spcPct val="0"/>
+            </a:spcBef>
+            <a:spcAft>
+              <a:spcPct val="35000"/>
+            </a:spcAft>
+            <a:buNone/>
+          </a:pPr>
+          <a:r>
+            <a:rPr lang="en-GB" sz="3100" kern="1200" dirty="0">
+              <a:latin typeface="+mj-lt"/>
+            </a:rPr>
+            <a:t>Logistic Regression</a:t>
+          </a:r>
+        </a:p>
+      </dsp:txBody>
+      <dsp:txXfrm>
+        <a:off x="26706" y="2253376"/>
+        <a:ext cx="3269347" cy="1212927"/>
+      </dsp:txXfrm>
+    </dsp:sp>
+    <dsp:sp modelId="{E57FDBEA-07CD-4EE0-B9F6-B3513C800D23}">
+      <dsp:nvSpPr>
+        <dsp:cNvPr id="0" name=""/>
+        <dsp:cNvSpPr/>
+      </dsp:nvSpPr>
+      <dsp:spPr>
+        <a:xfrm>
+          <a:off x="4130054" y="795"/>
+          <a:ext cx="2255490" cy="2252580"/>
+        </a:xfrm>
+        <a:prstGeom prst="roundRect">
+          <a:avLst/>
+        </a:prstGeom>
+        <a:blipFill>
+          <a:blip xmlns:r="http://schemas.openxmlformats.org/officeDocument/2006/relationships" r:embed="rId2"/>
+          <a:srcRect/>
+          <a:stretch>
+            <a:fillRect/>
+          </a:stretch>
+        </a:blipFill>
+        <a:ln w="12700" cap="flat" cmpd="sng" algn="ctr">
+          <a:solidFill>
+            <a:schemeClr val="lt1">
+              <a:hueOff val="0"/>
+              <a:satOff val="0"/>
+              <a:lumOff val="0"/>
+              <a:alphaOff val="0"/>
+            </a:schemeClr>
+          </a:solidFill>
+          <a:prstDash val="solid"/>
+          <a:miter lim="800000"/>
+        </a:ln>
+        <a:effectLst/>
+      </dsp:spPr>
+      <dsp:style>
+        <a:lnRef idx="2">
+          <a:scrgbClr r="0" g="0" b="0"/>
+        </a:lnRef>
+        <a:fillRef idx="1">
+          <a:scrgbClr r="0" g="0" b="0"/>
+        </a:fillRef>
+        <a:effectRef idx="0">
+          <a:scrgbClr r="0" g="0" b="0"/>
+        </a:effectRef>
+        <a:fontRef idx="minor">
+          <a:schemeClr val="lt1"/>
+        </a:fontRef>
+      </dsp:style>
+    </dsp:sp>
+    <dsp:sp modelId="{5A2326FB-9C5F-4C93-94B6-3F68487EE15B}">
+      <dsp:nvSpPr>
+        <dsp:cNvPr id="0" name=""/>
+        <dsp:cNvSpPr/>
+      </dsp:nvSpPr>
+      <dsp:spPr>
+        <a:xfrm>
+          <a:off x="3623126" y="2253376"/>
+          <a:ext cx="3269347" cy="1212927"/>
+        </a:xfrm>
+        <a:prstGeom prst="rect">
+          <a:avLst/>
+        </a:prstGeom>
+        <a:noFill/>
+        <a:ln>
+          <a:noFill/>
+        </a:ln>
+        <a:effectLst/>
+      </dsp:spPr>
+      <dsp:style>
+        <a:lnRef idx="0">
+          <a:scrgbClr r="0" g="0" b="0"/>
+        </a:lnRef>
+        <a:fillRef idx="0">
+          <a:scrgbClr r="0" g="0" b="0"/>
+        </a:fillRef>
+        <a:effectRef idx="0">
+          <a:scrgbClr r="0" g="0" b="0"/>
+        </a:effectRef>
+        <a:fontRef idx="minor"/>
+      </dsp:style>
+      <dsp:txBody>
+        <a:bodyPr spcFirstLastPara="0" vert="horz" wrap="square" lIns="220472" tIns="220472" rIns="220472" bIns="0" numCol="1" spcCol="1270" anchor="t" anchorCtr="0">
+          <a:noAutofit/>
+        </a:bodyPr>
+        <a:lstStyle/>
+        <a:p>
+          <a:pPr marL="0" lvl="0" indent="0" algn="ctr" defTabSz="1377950">
+            <a:lnSpc>
+              <a:spcPct val="90000"/>
+            </a:lnSpc>
+            <a:spcBef>
+              <a:spcPct val="0"/>
+            </a:spcBef>
+            <a:spcAft>
+              <a:spcPct val="35000"/>
+            </a:spcAft>
+            <a:buNone/>
+          </a:pPr>
+          <a:r>
+            <a:rPr lang="en-GB" sz="3100" kern="1200" dirty="0">
+              <a:latin typeface="+mj-lt"/>
+            </a:rPr>
+            <a:t>Random Forests</a:t>
+          </a:r>
+        </a:p>
+      </dsp:txBody>
+      <dsp:txXfrm>
+        <a:off x="3623126" y="2253376"/>
+        <a:ext cx="3269347" cy="1212927"/>
+      </dsp:txXfrm>
+    </dsp:sp>
+    <dsp:sp modelId="{48E9D8B7-C615-4785-9984-18582DDB6C31}">
+      <dsp:nvSpPr>
+        <dsp:cNvPr id="0" name=""/>
+        <dsp:cNvSpPr/>
+      </dsp:nvSpPr>
+      <dsp:spPr>
+        <a:xfrm>
+          <a:off x="7726474" y="795"/>
+          <a:ext cx="2255490" cy="2252580"/>
+        </a:xfrm>
+        <a:prstGeom prst="roundRect">
+          <a:avLst/>
+        </a:prstGeom>
+        <a:blipFill>
+          <a:blip xmlns:r="http://schemas.openxmlformats.org/officeDocument/2006/relationships" r:embed="rId3"/>
+          <a:srcRect/>
+          <a:stretch>
+            <a:fillRect/>
+          </a:stretch>
+        </a:blipFill>
+        <a:ln w="12700" cap="flat" cmpd="sng" algn="ctr">
+          <a:solidFill>
+            <a:schemeClr val="lt1">
+              <a:hueOff val="0"/>
+              <a:satOff val="0"/>
+              <a:lumOff val="0"/>
+              <a:alphaOff val="0"/>
+            </a:schemeClr>
+          </a:solidFill>
+          <a:prstDash val="solid"/>
+          <a:miter lim="800000"/>
+        </a:ln>
+        <a:effectLst/>
+      </dsp:spPr>
+      <dsp:style>
+        <a:lnRef idx="2">
+          <a:scrgbClr r="0" g="0" b="0"/>
+        </a:lnRef>
+        <a:fillRef idx="1">
+          <a:scrgbClr r="0" g="0" b="0"/>
+        </a:fillRef>
+        <a:effectRef idx="0">
+          <a:scrgbClr r="0" g="0" b="0"/>
+        </a:effectRef>
+        <a:fontRef idx="minor">
+          <a:schemeClr val="lt1"/>
+        </a:fontRef>
+      </dsp:style>
+    </dsp:sp>
+    <dsp:sp modelId="{D267D666-2C35-4EC6-8B1E-910B727C725A}">
+      <dsp:nvSpPr>
+        <dsp:cNvPr id="0" name=""/>
+        <dsp:cNvSpPr/>
+      </dsp:nvSpPr>
+      <dsp:spPr>
+        <a:xfrm>
+          <a:off x="7219545" y="2253376"/>
+          <a:ext cx="3269347" cy="1212927"/>
+        </a:xfrm>
+        <a:prstGeom prst="rect">
+          <a:avLst/>
+        </a:prstGeom>
+        <a:noFill/>
+        <a:ln>
+          <a:noFill/>
+        </a:ln>
+        <a:effectLst/>
+      </dsp:spPr>
+      <dsp:style>
+        <a:lnRef idx="0">
+          <a:scrgbClr r="0" g="0" b="0"/>
+        </a:lnRef>
+        <a:fillRef idx="0">
+          <a:scrgbClr r="0" g="0" b="0"/>
+        </a:fillRef>
+        <a:effectRef idx="0">
+          <a:scrgbClr r="0" g="0" b="0"/>
+        </a:effectRef>
+        <a:fontRef idx="minor"/>
+      </dsp:style>
+      <dsp:txBody>
+        <a:bodyPr spcFirstLastPara="0" vert="horz" wrap="square" lIns="220472" tIns="220472" rIns="220472" bIns="0" numCol="1" spcCol="1270" anchor="t" anchorCtr="0">
+          <a:noAutofit/>
+        </a:bodyPr>
+        <a:lstStyle/>
+        <a:p>
+          <a:pPr marL="0" lvl="0" indent="0" algn="ctr" defTabSz="1377950">
+            <a:lnSpc>
+              <a:spcPct val="90000"/>
+            </a:lnSpc>
+            <a:spcBef>
+              <a:spcPct val="0"/>
+            </a:spcBef>
+            <a:spcAft>
+              <a:spcPct val="35000"/>
+            </a:spcAft>
+            <a:buNone/>
+          </a:pPr>
+          <a:r>
+            <a:rPr lang="en-GB" sz="3100" kern="1200" dirty="0">
+              <a:latin typeface="+mj-lt"/>
+            </a:rPr>
+            <a:t>K-Nearest Neighbours</a:t>
+          </a:r>
+        </a:p>
+      </dsp:txBody>
+      <dsp:txXfrm>
+        <a:off x="7219545" y="2253376"/>
+        <a:ext cx="3269347" cy="1212927"/>
+      </dsp:txXfrm>
+    </dsp:sp>
+  </dsp:spTree>
+</dsp:drawing>
+</file>
+
 <file path=ppt/diagrams/layout1.xml><?xml version="1.0" encoding="utf-8"?>
 <dgm:layoutDef xmlns:dgm="http://schemas.openxmlformats.org/drawingml/2006/diagram" xmlns:a="http://schemas.openxmlformats.org/drawingml/2006/main" uniqueId="urn:microsoft.com/office/officeart/2026/layout/TextCardShortLine">
   <dgm:title val=""/>
@@ -15198,6 +16656,167 @@
 </dgm:layoutDef>
 </file>
 
+<file path=ppt/diagrams/layout8.xml><?xml version="1.0" encoding="utf-8"?>
+<dgm:layoutDef xmlns:dgm="http://schemas.openxmlformats.org/drawingml/2006/diagram" xmlns:a="http://schemas.openxmlformats.org/drawingml/2006/main" uniqueId="urn:microsoft.com/office/officeart/2005/8/layout/pList1">
+  <dgm:title val=""/>
+  <dgm:desc val=""/>
+  <dgm:catLst>
+    <dgm:cat type="list" pri="2000"/>
+    <dgm:cat type="picture" pri="2500"/>
+    <dgm:cat type="pictureconvert" pri="2500"/>
+  </dgm:catLst>
+  <dgm:sampData>
+    <dgm:dataModel>
+      <dgm:ptLst>
+        <dgm:pt modelId="0" type="doc"/>
+        <dgm:pt modelId="1">
+          <dgm:prSet phldr="1"/>
+        </dgm:pt>
+        <dgm:pt modelId="2">
+          <dgm:prSet phldr="1"/>
+        </dgm:pt>
+        <dgm:pt modelId="3">
+          <dgm:prSet phldr="1"/>
+        </dgm:pt>
+        <dgm:pt modelId="4">
+          <dgm:prSet phldr="1"/>
+        </dgm:pt>
+      </dgm:ptLst>
+      <dgm:cxnLst>
+        <dgm:cxn modelId="7" srcId="0" destId="1" srcOrd="0" destOrd="0"/>
+        <dgm:cxn modelId="8" srcId="0" destId="2" srcOrd="1" destOrd="0"/>
+        <dgm:cxn modelId="9" srcId="0" destId="3" srcOrd="2" destOrd="0"/>
+        <dgm:cxn modelId="10" srcId="0" destId="4" srcOrd="3" destOrd="0"/>
+      </dgm:cxnLst>
+      <dgm:bg/>
+      <dgm:whole/>
+    </dgm:dataModel>
+  </dgm:sampData>
+  <dgm:styleData>
+    <dgm:dataModel>
+      <dgm:ptLst>
+        <dgm:pt modelId="0" type="doc"/>
+        <dgm:pt modelId="1"/>
+        <dgm:pt modelId="2"/>
+      </dgm:ptLst>
+      <dgm:cxnLst>
+        <dgm:cxn modelId="3" srcId="0" destId="1" srcOrd="0" destOrd="0"/>
+        <dgm:cxn modelId="4" srcId="0" destId="2" srcOrd="1" destOrd="0"/>
+      </dgm:cxnLst>
+      <dgm:bg/>
+      <dgm:whole/>
+    </dgm:dataModel>
+  </dgm:styleData>
+  <dgm:clrData useDef="1">
+    <dgm:dataModel>
+      <dgm:ptLst/>
+      <dgm:bg/>
+      <dgm:whole/>
+    </dgm:dataModel>
+  </dgm:clrData>
+  <dgm:layoutNode name="Name0">
+    <dgm:varLst>
+      <dgm:dir/>
+      <dgm:resizeHandles val="exact"/>
+    </dgm:varLst>
+    <dgm:choose name="Name1">
+      <dgm:if name="Name2" axis="self" func="var" arg="dir" op="equ" val="norm">
+        <dgm:alg type="snake">
+          <dgm:param type="grDir" val="tL"/>
+          <dgm:param type="flowDir" val="row"/>
+          <dgm:param type="contDir" val="sameDir"/>
+          <dgm:param type="off" val="ctr"/>
+          <dgm:param type="vertAlign" val="mid"/>
+          <dgm:param type="horzAlign" val="ctr"/>
+        </dgm:alg>
+      </dgm:if>
+      <dgm:else name="Name3">
+        <dgm:alg type="snake">
+          <dgm:param type="grDir" val="tR"/>
+          <dgm:param type="flowDir" val="row"/>
+          <dgm:param type="contDir" val="sameDir"/>
+          <dgm:param type="off" val="ctr"/>
+          <dgm:param type="vertAlign" val="mid"/>
+          <dgm:param type="horzAlign" val="ctr"/>
+        </dgm:alg>
+      </dgm:else>
+    </dgm:choose>
+    <dgm:shape xmlns:r="http://schemas.openxmlformats.org/officeDocument/2006/relationships" r:blip="">
+      <dgm:adjLst/>
+    </dgm:shape>
+    <dgm:presOf/>
+    <dgm:constrLst>
+      <dgm:constr type="w" for="ch" forName="compNode" refType="w"/>
+      <dgm:constr type="w" for="ch" ptType="sibTrans" refType="w" refFor="ch" refForName="compNode" op="equ" fact="0.1"/>
+      <dgm:constr type="sp" refType="w" refFor="ch" refForName="compNode" op="equ" fact="0.1"/>
+      <dgm:constr type="primFontSz" for="des" ptType="node" op="equ" val="65"/>
+    </dgm:constrLst>
+    <dgm:ruleLst/>
+    <dgm:forEach name="Name4" axis="ch" ptType="node">
+      <dgm:layoutNode name="compNode">
+        <dgm:alg type="composite">
+          <dgm:param type="ar" val="0.943"/>
+        </dgm:alg>
+        <dgm:shape xmlns:r="http://schemas.openxmlformats.org/officeDocument/2006/relationships" r:blip="">
+          <dgm:adjLst/>
+        </dgm:shape>
+        <dgm:presOf axis="self"/>
+        <dgm:constrLst>
+          <dgm:constr type="h" refType="w" fact="1.06"/>
+          <dgm:constr type="h" for="ch" forName="pictRect" refType="h" fact="0.65"/>
+          <dgm:constr type="w" for="ch" forName="pictRect" refType="w"/>
+          <dgm:constr type="l" for="ch" forName="pictRect"/>
+          <dgm:constr type="t" for="ch" forName="pictRect"/>
+          <dgm:constr type="w" for="ch" forName="textRect" refType="w"/>
+          <dgm:constr type="h" for="ch" forName="textRect" refType="h" fact="0.35"/>
+          <dgm:constr type="l" for="ch" forName="textRect"/>
+          <dgm:constr type="t" for="ch" forName="textRect" refType="b" refFor="ch" refForName="pictRect"/>
+        </dgm:constrLst>
+        <dgm:ruleLst/>
+        <dgm:layoutNode name="pictRect">
+          <dgm:alg type="sp"/>
+          <dgm:shape xmlns:r="http://schemas.openxmlformats.org/officeDocument/2006/relationships" type="roundRect" r:blip="" blipPhldr="1">
+            <dgm:adjLst/>
+          </dgm:shape>
+          <dgm:presOf/>
+          <dgm:constrLst/>
+          <dgm:ruleLst/>
+        </dgm:layoutNode>
+        <dgm:layoutNode name="textRect" styleLbl="revTx">
+          <dgm:varLst>
+            <dgm:bulletEnabled val="1"/>
+          </dgm:varLst>
+          <dgm:alg type="tx">
+            <dgm:param type="txAnchorVert" val="t"/>
+          </dgm:alg>
+          <dgm:shape xmlns:r="http://schemas.openxmlformats.org/officeDocument/2006/relationships" type="rect" r:blip="">
+            <dgm:adjLst/>
+          </dgm:shape>
+          <dgm:presOf axis="desOrSelf" ptType="node"/>
+          <dgm:constrLst>
+            <dgm:constr type="bMarg"/>
+          </dgm:constrLst>
+          <dgm:ruleLst>
+            <dgm:rule type="primFontSz" val="5" fact="NaN" max="NaN"/>
+          </dgm:ruleLst>
+        </dgm:layoutNode>
+      </dgm:layoutNode>
+      <dgm:forEach name="Name5" axis="followSib" ptType="sibTrans" cnt="1">
+        <dgm:layoutNode name="sibTrans">
+          <dgm:alg type="sp"/>
+          <dgm:shape xmlns:r="http://schemas.openxmlformats.org/officeDocument/2006/relationships" type="rect" r:blip="" hideGeom="1">
+            <dgm:adjLst/>
+          </dgm:shape>
+          <dgm:presOf axis="self"/>
+          <dgm:constrLst/>
+          <dgm:ruleLst/>
+        </dgm:layoutNode>
+      </dgm:forEach>
+    </dgm:forEach>
+  </dgm:layoutNode>
+</dgm:layoutDef>
+</file>
+
 <file path=ppt/diagrams/quickStyle1.xml><?xml version="1.0" encoding="utf-8"?>
 <dgm:styleDef xmlns:dgm="http://schemas.openxmlformats.org/drawingml/2006/diagram" xmlns:a="http://schemas.openxmlformats.org/drawingml/2006/main" uniqueId="urn:microsoft.com/office/officeart/2005/8/quickstyle/simple1#1">
   <dgm:title val=""/>
@@ -21711,6 +23330,1194 @@
 </file>
 
 <file path=ppt/diagrams/quickStyle7.xml><?xml version="1.0" encoding="utf-8"?>
+<dgm:styleDef xmlns:dgm="http://schemas.openxmlformats.org/drawingml/2006/diagram" xmlns:a="http://schemas.openxmlformats.org/drawingml/2006/main" uniqueId="urn:microsoft.com/office/officeart/2005/8/quickstyle/simple1">
+  <dgm:title val=""/>
+  <dgm:desc val=""/>
+  <dgm:catLst>
+    <dgm:cat type="simple" pri="10100"/>
+  </dgm:catLst>
+  <dgm:scene3d>
+    <a:camera prst="orthographicFront"/>
+    <a:lightRig rig="threePt" dir="t"/>
+  </dgm:scene3d>
+  <dgm:styleLbl name="node0">
+    <dgm:scene3d>
+      <a:camera prst="orthographicFront"/>
+      <a:lightRig rig="threePt" dir="t"/>
+    </dgm:scene3d>
+    <dgm:sp3d/>
+    <dgm:txPr/>
+    <dgm:style>
+      <a:lnRef idx="2">
+        <a:scrgbClr r="0" g="0" b="0"/>
+      </a:lnRef>
+      <a:fillRef idx="1">
+        <a:scrgbClr r="0" g="0" b="0"/>
+      </a:fillRef>
+      <a:effectRef idx="0">
+        <a:scrgbClr r="0" g="0" b="0"/>
+      </a:effectRef>
+      <a:fontRef idx="minor">
+        <a:schemeClr val="lt1"/>
+      </a:fontRef>
+    </dgm:style>
+  </dgm:styleLbl>
+  <dgm:styleLbl name="node0NoLn">
+    <dgm:scene3d>
+      <a:camera prst="orthographicFront"/>
+      <a:lightRig rig="threePt" dir="t"/>
+    </dgm:scene3d>
+    <dgm:sp3d/>
+    <dgm:txPr/>
+    <dgm:style>
+      <a:lnRef idx="1">
+        <a:scrgbClr r="0" g="0" b="0"/>
+      </a:lnRef>
+      <a:fillRef idx="1">
+        <a:scrgbClr r="0" g="0" b="0"/>
+      </a:fillRef>
+      <a:effectRef idx="0">
+        <a:scrgbClr r="0" g="0" b="0"/>
+      </a:effectRef>
+      <a:fontRef idx="minor">
+        <a:schemeClr val="lt1"/>
+      </a:fontRef>
+    </dgm:style>
+  </dgm:styleLbl>
+  <dgm:styleLbl name="lnNode1">
+    <dgm:scene3d>
+      <a:camera prst="orthographicFront"/>
+      <a:lightRig rig="threePt" dir="t"/>
+    </dgm:scene3d>
+    <dgm:sp3d/>
+    <dgm:txPr/>
+    <dgm:style>
+      <a:lnRef idx="2">
+        <a:scrgbClr r="0" g="0" b="0"/>
+      </a:lnRef>
+      <a:fillRef idx="1">
+        <a:scrgbClr r="0" g="0" b="0"/>
+      </a:fillRef>
+      <a:effectRef idx="0">
+        <a:scrgbClr r="0" g="0" b="0"/>
+      </a:effectRef>
+      <a:fontRef idx="minor">
+        <a:schemeClr val="lt1"/>
+      </a:fontRef>
+    </dgm:style>
+  </dgm:styleLbl>
+  <dgm:styleLbl name="vennNode1">
+    <dgm:scene3d>
+      <a:camera prst="orthographicFront"/>
+      <a:lightRig rig="threePt" dir="t"/>
+    </dgm:scene3d>
+    <dgm:sp3d/>
+    <dgm:txPr/>
+    <dgm:style>
+      <a:lnRef idx="2">
+        <a:scrgbClr r="0" g="0" b="0"/>
+      </a:lnRef>
+      <a:fillRef idx="1">
+        <a:scrgbClr r="0" g="0" b="0"/>
+      </a:fillRef>
+      <a:effectRef idx="0">
+        <a:scrgbClr r="0" g="0" b="0"/>
+      </a:effectRef>
+      <a:fontRef idx="minor">
+        <a:schemeClr val="tx1"/>
+      </a:fontRef>
+    </dgm:style>
+  </dgm:styleLbl>
+  <dgm:styleLbl name="alignNode1">
+    <dgm:scene3d>
+      <a:camera prst="orthographicFront"/>
+      <a:lightRig rig="threePt" dir="t"/>
+    </dgm:scene3d>
+    <dgm:sp3d/>
+    <dgm:txPr/>
+    <dgm:style>
+      <a:lnRef idx="2">
+        <a:scrgbClr r="0" g="0" b="0"/>
+      </a:lnRef>
+      <a:fillRef idx="1">
+        <a:scrgbClr r="0" g="0" b="0"/>
+      </a:fillRef>
+      <a:effectRef idx="0">
+        <a:scrgbClr r="0" g="0" b="0"/>
+      </a:effectRef>
+      <a:fontRef idx="minor">
+        <a:schemeClr val="lt1"/>
+      </a:fontRef>
+    </dgm:style>
+  </dgm:styleLbl>
+  <dgm:styleLbl name="node1">
+    <dgm:scene3d>
+      <a:camera prst="orthographicFront"/>
+      <a:lightRig rig="threePt" dir="t"/>
+    </dgm:scene3d>
+    <dgm:sp3d/>
+    <dgm:txPr/>
+    <dgm:style>
+      <a:lnRef idx="2">
+        <a:scrgbClr r="0" g="0" b="0"/>
+      </a:lnRef>
+      <a:fillRef idx="1">
+        <a:scrgbClr r="0" g="0" b="0"/>
+      </a:fillRef>
+      <a:effectRef idx="0">
+        <a:scrgbClr r="0" g="0" b="0"/>
+      </a:effectRef>
+      <a:fontRef idx="minor">
+        <a:schemeClr val="lt1"/>
+      </a:fontRef>
+    </dgm:style>
+  </dgm:styleLbl>
+  <dgm:styleLbl name="node1NoLn">
+    <dgm:scene3d>
+      <a:camera prst="orthographicFront"/>
+      <a:lightRig rig="threePt" dir="t"/>
+    </dgm:scene3d>
+    <dgm:sp3d/>
+    <dgm:txPr/>
+    <dgm:style>
+      <a:lnRef idx="1">
+        <a:scrgbClr r="0" g="0" b="0"/>
+      </a:lnRef>
+      <a:fillRef idx="1">
+        <a:scrgbClr r="0" g="0" b="0"/>
+      </a:fillRef>
+      <a:effectRef idx="0">
+        <a:scrgbClr r="0" g="0" b="0"/>
+      </a:effectRef>
+      <a:fontRef idx="minor">
+        <a:schemeClr val="lt1"/>
+      </a:fontRef>
+    </dgm:style>
+  </dgm:styleLbl>
+  <dgm:styleLbl name="ltNode1NoLn">
+    <dgm:scene3d>
+      <a:camera prst="orthographicFront"/>
+      <a:lightRig rig="threePt" dir="t"/>
+    </dgm:scene3d>
+    <dgm:sp3d/>
+    <dgm:txPr/>
+    <dgm:style>
+      <a:lnRef idx="1">
+        <a:scrgbClr r="0" g="0" b="0"/>
+      </a:lnRef>
+      <a:fillRef idx="1">
+        <a:scrgbClr r="0" g="0" b="0"/>
+      </a:fillRef>
+      <a:effectRef idx="0">
+        <a:scrgbClr r="0" g="0" b="0"/>
+      </a:effectRef>
+      <a:fontRef idx="minor">
+        <a:schemeClr val="lt1"/>
+      </a:fontRef>
+    </dgm:style>
+  </dgm:styleLbl>
+  <dgm:styleLbl name="node2">
+    <dgm:scene3d>
+      <a:camera prst="orthographicFront"/>
+      <a:lightRig rig="threePt" dir="t"/>
+    </dgm:scene3d>
+    <dgm:sp3d/>
+    <dgm:txPr/>
+    <dgm:style>
+      <a:lnRef idx="2">
+        <a:scrgbClr r="0" g="0" b="0"/>
+      </a:lnRef>
+      <a:fillRef idx="1">
+        <a:scrgbClr r="0" g="0" b="0"/>
+      </a:fillRef>
+      <a:effectRef idx="0">
+        <a:scrgbClr r="0" g="0" b="0"/>
+      </a:effectRef>
+      <a:fontRef idx="minor">
+        <a:schemeClr val="lt1"/>
+      </a:fontRef>
+    </dgm:style>
+  </dgm:styleLbl>
+  <dgm:styleLbl name="node2NoLn">
+    <dgm:scene3d>
+      <a:camera prst="orthographicFront"/>
+      <a:lightRig rig="threePt" dir="t"/>
+    </dgm:scene3d>
+    <dgm:sp3d/>
+    <dgm:txPr/>
+    <dgm:style>
+      <a:lnRef idx="1">
+        <a:scrgbClr r="0" g="0" b="0"/>
+      </a:lnRef>
+      <a:fillRef idx="1">
+        <a:scrgbClr r="0" g="0" b="0"/>
+      </a:fillRef>
+      <a:effectRef idx="0">
+        <a:scrgbClr r="0" g="0" b="0"/>
+      </a:effectRef>
+      <a:fontRef idx="minor">
+        <a:schemeClr val="lt1"/>
+      </a:fontRef>
+    </dgm:style>
+  </dgm:styleLbl>
+  <dgm:styleLbl name="node3">
+    <dgm:scene3d>
+      <a:camera prst="orthographicFront"/>
+      <a:lightRig rig="threePt" dir="t"/>
+    </dgm:scene3d>
+    <dgm:sp3d/>
+    <dgm:txPr/>
+    <dgm:style>
+      <a:lnRef idx="2">
+        <a:scrgbClr r="0" g="0" b="0"/>
+      </a:lnRef>
+      <a:fillRef idx="1">
+        <a:scrgbClr r="0" g="0" b="0"/>
+      </a:fillRef>
+      <a:effectRef idx="0">
+        <a:scrgbClr r="0" g="0" b="0"/>
+      </a:effectRef>
+      <a:fontRef idx="minor">
+        <a:schemeClr val="lt1"/>
+      </a:fontRef>
+    </dgm:style>
+  </dgm:styleLbl>
+  <dgm:styleLbl name="node3NoLn">
+    <dgm:scene3d>
+      <a:camera prst="orthographicFront"/>
+      <a:lightRig rig="threePt" dir="t"/>
+    </dgm:scene3d>
+    <dgm:sp3d/>
+    <dgm:txPr/>
+    <dgm:style>
+      <a:lnRef idx="1">
+        <a:scrgbClr r="0" g="0" b="0"/>
+      </a:lnRef>
+      <a:fillRef idx="1">
+        <a:scrgbClr r="0" g="0" b="0"/>
+      </a:fillRef>
+      <a:effectRef idx="0">
+        <a:scrgbClr r="0" g="0" b="0"/>
+      </a:effectRef>
+      <a:fontRef idx="minor">
+        <a:schemeClr val="lt1"/>
+      </a:fontRef>
+    </dgm:style>
+  </dgm:styleLbl>
+  <dgm:styleLbl name="node4">
+    <dgm:scene3d>
+      <a:camera prst="orthographicFront"/>
+      <a:lightRig rig="threePt" dir="t"/>
+    </dgm:scene3d>
+    <dgm:sp3d/>
+    <dgm:txPr/>
+    <dgm:style>
+      <a:lnRef idx="2">
+        <a:scrgbClr r="0" g="0" b="0"/>
+      </a:lnRef>
+      <a:fillRef idx="1">
+        <a:scrgbClr r="0" g="0" b="0"/>
+      </a:fillRef>
+      <a:effectRef idx="0">
+        <a:scrgbClr r="0" g="0" b="0"/>
+      </a:effectRef>
+      <a:fontRef idx="minor">
+        <a:schemeClr val="lt1"/>
+      </a:fontRef>
+    </dgm:style>
+  </dgm:styleLbl>
+  <dgm:styleLbl name="node4NoLn">
+    <dgm:scene3d>
+      <a:camera prst="orthographicFront"/>
+      <a:lightRig rig="threePt" dir="t"/>
+    </dgm:scene3d>
+    <dgm:sp3d/>
+    <dgm:txPr/>
+    <dgm:style>
+      <a:lnRef idx="1">
+        <a:scrgbClr r="0" g="0" b="0"/>
+      </a:lnRef>
+      <a:fillRef idx="1">
+        <a:scrgbClr r="0" g="0" b="0"/>
+      </a:fillRef>
+      <a:effectRef idx="0">
+        <a:scrgbClr r="0" g="0" b="0"/>
+      </a:effectRef>
+      <a:fontRef idx="minor">
+        <a:schemeClr val="lt1"/>
+      </a:fontRef>
+    </dgm:style>
+  </dgm:styleLbl>
+  <dgm:styleLbl name="fgImgPlace1">
+    <dgm:scene3d>
+      <a:camera prst="orthographicFront"/>
+      <a:lightRig rig="threePt" dir="t"/>
+    </dgm:scene3d>
+    <dgm:sp3d/>
+    <dgm:txPr/>
+    <dgm:style>
+      <a:lnRef idx="2">
+        <a:scrgbClr r="0" g="0" b="0"/>
+      </a:lnRef>
+      <a:fillRef idx="1">
+        <a:scrgbClr r="0" g="0" b="0"/>
+      </a:fillRef>
+      <a:effectRef idx="0">
+        <a:scrgbClr r="0" g="0" b="0"/>
+      </a:effectRef>
+      <a:fontRef idx="minor"/>
+    </dgm:style>
+  </dgm:styleLbl>
+  <dgm:styleLbl name="alignImgPlace1">
+    <dgm:scene3d>
+      <a:camera prst="orthographicFront"/>
+      <a:lightRig rig="threePt" dir="t"/>
+    </dgm:scene3d>
+    <dgm:sp3d/>
+    <dgm:txPr/>
+    <dgm:style>
+      <a:lnRef idx="2">
+        <a:scrgbClr r="0" g="0" b="0"/>
+      </a:lnRef>
+      <a:fillRef idx="1">
+        <a:scrgbClr r="0" g="0" b="0"/>
+      </a:fillRef>
+      <a:effectRef idx="0">
+        <a:scrgbClr r="0" g="0" b="0"/>
+      </a:effectRef>
+      <a:fontRef idx="minor"/>
+    </dgm:style>
+  </dgm:styleLbl>
+  <dgm:styleLbl name="bgImgPlace1">
+    <dgm:scene3d>
+      <a:camera prst="orthographicFront"/>
+      <a:lightRig rig="threePt" dir="t"/>
+    </dgm:scene3d>
+    <dgm:sp3d/>
+    <dgm:txPr/>
+    <dgm:style>
+      <a:lnRef idx="2">
+        <a:scrgbClr r="0" g="0" b="0"/>
+      </a:lnRef>
+      <a:fillRef idx="1">
+        <a:scrgbClr r="0" g="0" b="0"/>
+      </a:fillRef>
+      <a:effectRef idx="0">
+        <a:scrgbClr r="0" g="0" b="0"/>
+      </a:effectRef>
+      <a:fontRef idx="minor"/>
+    </dgm:style>
+  </dgm:styleLbl>
+  <dgm:styleLbl name="sibTrans2D1">
+    <dgm:scene3d>
+      <a:camera prst="orthographicFront"/>
+      <a:lightRig rig="threePt" dir="t"/>
+    </dgm:scene3d>
+    <dgm:sp3d/>
+    <dgm:txPr/>
+    <dgm:style>
+      <a:lnRef idx="0">
+        <a:scrgbClr r="0" g="0" b="0"/>
+      </a:lnRef>
+      <a:fillRef idx="1">
+        <a:scrgbClr r="0" g="0" b="0"/>
+      </a:fillRef>
+      <a:effectRef idx="0">
+        <a:scrgbClr r="0" g="0" b="0"/>
+      </a:effectRef>
+      <a:fontRef idx="minor">
+        <a:schemeClr val="lt1"/>
+      </a:fontRef>
+    </dgm:style>
+  </dgm:styleLbl>
+  <dgm:styleLbl name="fgSibTrans2D1">
+    <dgm:scene3d>
+      <a:camera prst="orthographicFront"/>
+      <a:lightRig rig="threePt" dir="t"/>
+    </dgm:scene3d>
+    <dgm:sp3d/>
+    <dgm:txPr/>
+    <dgm:style>
+      <a:lnRef idx="0">
+        <a:scrgbClr r="0" g="0" b="0"/>
+      </a:lnRef>
+      <a:fillRef idx="1">
+        <a:scrgbClr r="0" g="0" b="0"/>
+      </a:fillRef>
+      <a:effectRef idx="0">
+        <a:scrgbClr r="0" g="0" b="0"/>
+      </a:effectRef>
+      <a:fontRef idx="minor">
+        <a:schemeClr val="lt1"/>
+      </a:fontRef>
+    </dgm:style>
+  </dgm:styleLbl>
+  <dgm:styleLbl name="bgSibTrans2D1">
+    <dgm:scene3d>
+      <a:camera prst="orthographicFront"/>
+      <a:lightRig rig="threePt" dir="t"/>
+    </dgm:scene3d>
+    <dgm:sp3d/>
+    <dgm:txPr/>
+    <dgm:style>
+      <a:lnRef idx="0">
+        <a:scrgbClr r="0" g="0" b="0"/>
+      </a:lnRef>
+      <a:fillRef idx="1">
+        <a:scrgbClr r="0" g="0" b="0"/>
+      </a:fillRef>
+      <a:effectRef idx="0">
+        <a:scrgbClr r="0" g="0" b="0"/>
+      </a:effectRef>
+      <a:fontRef idx="minor">
+        <a:schemeClr val="lt1"/>
+      </a:fontRef>
+    </dgm:style>
+  </dgm:styleLbl>
+  <dgm:styleLbl name="sibTrans1D1">
+    <dgm:scene3d>
+      <a:camera prst="orthographicFront"/>
+      <a:lightRig rig="threePt" dir="t"/>
+    </dgm:scene3d>
+    <dgm:sp3d/>
+    <dgm:txPr/>
+    <dgm:style>
+      <a:lnRef idx="1">
+        <a:scrgbClr r="0" g="0" b="0"/>
+      </a:lnRef>
+      <a:fillRef idx="0">
+        <a:scrgbClr r="0" g="0" b="0"/>
+      </a:fillRef>
+      <a:effectRef idx="0">
+        <a:scrgbClr r="0" g="0" b="0"/>
+      </a:effectRef>
+      <a:fontRef idx="minor"/>
+    </dgm:style>
+  </dgm:styleLbl>
+  <dgm:styleLbl name="callout">
+    <dgm:scene3d>
+      <a:camera prst="orthographicFront"/>
+      <a:lightRig rig="threePt" dir="t"/>
+    </dgm:scene3d>
+    <dgm:sp3d/>
+    <dgm:txPr/>
+    <dgm:style>
+      <a:lnRef idx="2">
+        <a:scrgbClr r="0" g="0" b="0"/>
+      </a:lnRef>
+      <a:fillRef idx="1">
+        <a:scrgbClr r="0" g="0" b="0"/>
+      </a:fillRef>
+      <a:effectRef idx="0">
+        <a:scrgbClr r="0" g="0" b="0"/>
+      </a:effectRef>
+      <a:fontRef idx="minor"/>
+    </dgm:style>
+  </dgm:styleLbl>
+  <dgm:styleLbl name="asst0">
+    <dgm:scene3d>
+      <a:camera prst="orthographicFront"/>
+      <a:lightRig rig="threePt" dir="t"/>
+    </dgm:scene3d>
+    <dgm:sp3d/>
+    <dgm:txPr/>
+    <dgm:style>
+      <a:lnRef idx="2">
+        <a:scrgbClr r="0" g="0" b="0"/>
+      </a:lnRef>
+      <a:fillRef idx="1">
+        <a:scrgbClr r="0" g="0" b="0"/>
+      </a:fillRef>
+      <a:effectRef idx="0">
+        <a:scrgbClr r="0" g="0" b="0"/>
+      </a:effectRef>
+      <a:fontRef idx="minor">
+        <a:schemeClr val="lt1"/>
+      </a:fontRef>
+    </dgm:style>
+  </dgm:styleLbl>
+  <dgm:styleLbl name="asst1">
+    <dgm:scene3d>
+      <a:camera prst="orthographicFront"/>
+      <a:lightRig rig="threePt" dir="t"/>
+    </dgm:scene3d>
+    <dgm:sp3d/>
+    <dgm:txPr/>
+    <dgm:style>
+      <a:lnRef idx="2">
+        <a:scrgbClr r="0" g="0" b="0"/>
+      </a:lnRef>
+      <a:fillRef idx="1">
+        <a:scrgbClr r="0" g="0" b="0"/>
+      </a:fillRef>
+      <a:effectRef idx="0">
+        <a:scrgbClr r="0" g="0" b="0"/>
+      </a:effectRef>
+      <a:fontRef idx="minor">
+        <a:schemeClr val="lt1"/>
+      </a:fontRef>
+    </dgm:style>
+  </dgm:styleLbl>
+  <dgm:styleLbl name="asst2">
+    <dgm:scene3d>
+      <a:camera prst="orthographicFront"/>
+      <a:lightRig rig="threePt" dir="t"/>
+    </dgm:scene3d>
+    <dgm:sp3d/>
+    <dgm:txPr/>
+    <dgm:style>
+      <a:lnRef idx="2">
+        <a:scrgbClr r="0" g="0" b="0"/>
+      </a:lnRef>
+      <a:fillRef idx="1">
+        <a:scrgbClr r="0" g="0" b="0"/>
+      </a:fillRef>
+      <a:effectRef idx="0">
+        <a:scrgbClr r="0" g="0" b="0"/>
+      </a:effectRef>
+      <a:fontRef idx="minor">
+        <a:schemeClr val="lt1"/>
+      </a:fontRef>
+    </dgm:style>
+  </dgm:styleLbl>
+  <dgm:styleLbl name="asst3">
+    <dgm:scene3d>
+      <a:camera prst="orthographicFront"/>
+      <a:lightRig rig="threePt" dir="t"/>
+    </dgm:scene3d>
+    <dgm:sp3d/>
+    <dgm:txPr/>
+    <dgm:style>
+      <a:lnRef idx="2">
+        <a:scrgbClr r="0" g="0" b="0"/>
+      </a:lnRef>
+      <a:fillRef idx="1">
+        <a:scrgbClr r="0" g="0" b="0"/>
+      </a:fillRef>
+      <a:effectRef idx="0">
+        <a:scrgbClr r="0" g="0" b="0"/>
+      </a:effectRef>
+      <a:fontRef idx="minor">
+        <a:schemeClr val="lt1"/>
+      </a:fontRef>
+    </dgm:style>
+  </dgm:styleLbl>
+  <dgm:styleLbl name="asst4">
+    <dgm:scene3d>
+      <a:camera prst="orthographicFront"/>
+      <a:lightRig rig="threePt" dir="t"/>
+    </dgm:scene3d>
+    <dgm:sp3d/>
+    <dgm:txPr/>
+    <dgm:style>
+      <a:lnRef idx="2">
+        <a:scrgbClr r="0" g="0" b="0"/>
+      </a:lnRef>
+      <a:fillRef idx="1">
+        <a:scrgbClr r="0" g="0" b="0"/>
+      </a:fillRef>
+      <a:effectRef idx="0">
+        <a:scrgbClr r="0" g="0" b="0"/>
+      </a:effectRef>
+      <a:fontRef idx="minor">
+        <a:schemeClr val="lt1"/>
+      </a:fontRef>
+    </dgm:style>
+  </dgm:styleLbl>
+  <dgm:styleLbl name="parChTrans2D1">
+    <dgm:scene3d>
+      <a:camera prst="orthographicFront"/>
+      <a:lightRig rig="threePt" dir="t"/>
+    </dgm:scene3d>
+    <dgm:sp3d/>
+    <dgm:txPr/>
+    <dgm:style>
+      <a:lnRef idx="2">
+        <a:scrgbClr r="0" g="0" b="0"/>
+      </a:lnRef>
+      <a:fillRef idx="1">
+        <a:scrgbClr r="0" g="0" b="0"/>
+      </a:fillRef>
+      <a:effectRef idx="0">
+        <a:scrgbClr r="0" g="0" b="0"/>
+      </a:effectRef>
+      <a:fontRef idx="minor">
+        <a:schemeClr val="lt1"/>
+      </a:fontRef>
+    </dgm:style>
+  </dgm:styleLbl>
+  <dgm:styleLbl name="parChTrans2D2">
+    <dgm:scene3d>
+      <a:camera prst="orthographicFront"/>
+      <a:lightRig rig="threePt" dir="t"/>
+    </dgm:scene3d>
+    <dgm:sp3d/>
+    <dgm:txPr/>
+    <dgm:style>
+      <a:lnRef idx="2">
+        <a:scrgbClr r="0" g="0" b="0"/>
+      </a:lnRef>
+      <a:fillRef idx="1">
+        <a:scrgbClr r="0" g="0" b="0"/>
+      </a:fillRef>
+      <a:effectRef idx="0">
+        <a:scrgbClr r="0" g="0" b="0"/>
+      </a:effectRef>
+      <a:fontRef idx="minor">
+        <a:schemeClr val="lt1"/>
+      </a:fontRef>
+    </dgm:style>
+  </dgm:styleLbl>
+  <dgm:styleLbl name="parChTrans2D3">
+    <dgm:scene3d>
+      <a:camera prst="orthographicFront"/>
+      <a:lightRig rig="threePt" dir="t"/>
+    </dgm:scene3d>
+    <dgm:sp3d/>
+    <dgm:txPr/>
+    <dgm:style>
+      <a:lnRef idx="2">
+        <a:scrgbClr r="0" g="0" b="0"/>
+      </a:lnRef>
+      <a:fillRef idx="1">
+        <a:scrgbClr r="0" g="0" b="0"/>
+      </a:fillRef>
+      <a:effectRef idx="0">
+        <a:scrgbClr r="0" g="0" b="0"/>
+      </a:effectRef>
+      <a:fontRef idx="minor">
+        <a:schemeClr val="lt1"/>
+      </a:fontRef>
+    </dgm:style>
+  </dgm:styleLbl>
+  <dgm:styleLbl name="parChTrans2D4">
+    <dgm:scene3d>
+      <a:camera prst="orthographicFront"/>
+      <a:lightRig rig="threePt" dir="t"/>
+    </dgm:scene3d>
+    <dgm:sp3d/>
+    <dgm:txPr/>
+    <dgm:style>
+      <a:lnRef idx="2">
+        <a:scrgbClr r="0" g="0" b="0"/>
+      </a:lnRef>
+      <a:fillRef idx="1">
+        <a:scrgbClr r="0" g="0" b="0"/>
+      </a:fillRef>
+      <a:effectRef idx="0">
+        <a:scrgbClr r="0" g="0" b="0"/>
+      </a:effectRef>
+      <a:fontRef idx="minor">
+        <a:schemeClr val="lt1"/>
+      </a:fontRef>
+    </dgm:style>
+  </dgm:styleLbl>
+  <dgm:styleLbl name="parChTrans1D1">
+    <dgm:scene3d>
+      <a:camera prst="orthographicFront"/>
+      <a:lightRig rig="threePt" dir="t"/>
+    </dgm:scene3d>
+    <dgm:sp3d/>
+    <dgm:txPr/>
+    <dgm:style>
+      <a:lnRef idx="2">
+        <a:scrgbClr r="0" g="0" b="0"/>
+      </a:lnRef>
+      <a:fillRef idx="0">
+        <a:scrgbClr r="0" g="0" b="0"/>
+      </a:fillRef>
+      <a:effectRef idx="0">
+        <a:scrgbClr r="0" g="0" b="0"/>
+      </a:effectRef>
+      <a:fontRef idx="minor"/>
+    </dgm:style>
+  </dgm:styleLbl>
+  <dgm:styleLbl name="parChTrans1D2">
+    <dgm:scene3d>
+      <a:camera prst="orthographicFront"/>
+      <a:lightRig rig="threePt" dir="t"/>
+    </dgm:scene3d>
+    <dgm:sp3d/>
+    <dgm:txPr/>
+    <dgm:style>
+      <a:lnRef idx="2">
+        <a:scrgbClr r="0" g="0" b="0"/>
+      </a:lnRef>
+      <a:fillRef idx="0">
+        <a:scrgbClr r="0" g="0" b="0"/>
+      </a:fillRef>
+      <a:effectRef idx="0">
+        <a:scrgbClr r="0" g="0" b="0"/>
+      </a:effectRef>
+      <a:fontRef idx="minor"/>
+    </dgm:style>
+  </dgm:styleLbl>
+  <dgm:styleLbl name="parChTrans1D3">
+    <dgm:scene3d>
+      <a:camera prst="orthographicFront"/>
+      <a:lightRig rig="threePt" dir="t"/>
+    </dgm:scene3d>
+    <dgm:sp3d/>
+    <dgm:txPr/>
+    <dgm:style>
+      <a:lnRef idx="2">
+        <a:scrgbClr r="0" g="0" b="0"/>
+      </a:lnRef>
+      <a:fillRef idx="0">
+        <a:scrgbClr r="0" g="0" b="0"/>
+      </a:fillRef>
+      <a:effectRef idx="0">
+        <a:scrgbClr r="0" g="0" b="0"/>
+      </a:effectRef>
+      <a:fontRef idx="minor"/>
+    </dgm:style>
+  </dgm:styleLbl>
+  <dgm:styleLbl name="parChTrans1D4">
+    <dgm:scene3d>
+      <a:camera prst="orthographicFront"/>
+      <a:lightRig rig="threePt" dir="t"/>
+    </dgm:scene3d>
+    <dgm:sp3d/>
+    <dgm:txPr/>
+    <dgm:style>
+      <a:lnRef idx="2">
+        <a:scrgbClr r="0" g="0" b="0"/>
+      </a:lnRef>
+      <a:fillRef idx="0">
+        <a:scrgbClr r="0" g="0" b="0"/>
+      </a:fillRef>
+      <a:effectRef idx="0">
+        <a:scrgbClr r="0" g="0" b="0"/>
+      </a:effectRef>
+      <a:fontRef idx="minor"/>
+    </dgm:style>
+  </dgm:styleLbl>
+  <dgm:styleLbl name="fgAcc1">
+    <dgm:scene3d>
+      <a:camera prst="orthographicFront"/>
+      <a:lightRig rig="threePt" dir="t"/>
+    </dgm:scene3d>
+    <dgm:sp3d/>
+    <dgm:txPr/>
+    <dgm:style>
+      <a:lnRef idx="2">
+        <a:scrgbClr r="0" g="0" b="0"/>
+      </a:lnRef>
+      <a:fillRef idx="1">
+        <a:scrgbClr r="0" g="0" b="0"/>
+      </a:fillRef>
+      <a:effectRef idx="0">
+        <a:scrgbClr r="0" g="0" b="0"/>
+      </a:effectRef>
+      <a:fontRef idx="minor"/>
+    </dgm:style>
+  </dgm:styleLbl>
+  <dgm:styleLbl name="conFgAcc1">
+    <dgm:scene3d>
+      <a:camera prst="orthographicFront"/>
+      <a:lightRig rig="threePt" dir="t"/>
+    </dgm:scene3d>
+    <dgm:sp3d/>
+    <dgm:txPr/>
+    <dgm:style>
+      <a:lnRef idx="2">
+        <a:scrgbClr r="0" g="0" b="0"/>
+      </a:lnRef>
+      <a:fillRef idx="1">
+        <a:scrgbClr r="0" g="0" b="0"/>
+      </a:fillRef>
+      <a:effectRef idx="0">
+        <a:scrgbClr r="0" g="0" b="0"/>
+      </a:effectRef>
+      <a:fontRef idx="minor"/>
+    </dgm:style>
+  </dgm:styleLbl>
+  <dgm:styleLbl name="alignAcc1">
+    <dgm:scene3d>
+      <a:camera prst="orthographicFront"/>
+      <a:lightRig rig="threePt" dir="t"/>
+    </dgm:scene3d>
+    <dgm:sp3d/>
+    <dgm:txPr/>
+    <dgm:style>
+      <a:lnRef idx="2">
+        <a:scrgbClr r="0" g="0" b="0"/>
+      </a:lnRef>
+      <a:fillRef idx="1">
+        <a:scrgbClr r="0" g="0" b="0"/>
+      </a:fillRef>
+      <a:effectRef idx="0">
+        <a:scrgbClr r="0" g="0" b="0"/>
+      </a:effectRef>
+      <a:fontRef idx="minor"/>
+    </dgm:style>
+  </dgm:styleLbl>
+  <dgm:styleLbl name="trAlignAcc1">
+    <dgm:scene3d>
+      <a:camera prst="orthographicFront"/>
+      <a:lightRig rig="threePt" dir="t"/>
+    </dgm:scene3d>
+    <dgm:sp3d/>
+    <dgm:txPr/>
+    <dgm:style>
+      <a:lnRef idx="1">
+        <a:scrgbClr r="0" g="0" b="0"/>
+      </a:lnRef>
+      <a:fillRef idx="1">
+        <a:scrgbClr r="0" g="0" b="0"/>
+      </a:fillRef>
+      <a:effectRef idx="0">
+        <a:scrgbClr r="0" g="0" b="0"/>
+      </a:effectRef>
+      <a:fontRef idx="minor"/>
+    </dgm:style>
+  </dgm:styleLbl>
+  <dgm:styleLbl name="bgAcc1">
+    <dgm:scene3d>
+      <a:camera prst="orthographicFront"/>
+      <a:lightRig rig="threePt" dir="t"/>
+    </dgm:scene3d>
+    <dgm:sp3d/>
+    <dgm:txPr/>
+    <dgm:style>
+      <a:lnRef idx="2">
+        <a:scrgbClr r="0" g="0" b="0"/>
+      </a:lnRef>
+      <a:fillRef idx="1">
+        <a:scrgbClr r="0" g="0" b="0"/>
+      </a:fillRef>
+      <a:effectRef idx="0">
+        <a:scrgbClr r="0" g="0" b="0"/>
+      </a:effectRef>
+      <a:fontRef idx="minor"/>
+    </dgm:style>
+  </dgm:styleLbl>
+  <dgm:styleLbl name="solidFgAcc1">
+    <dgm:scene3d>
+      <a:camera prst="orthographicFront"/>
+      <a:lightRig rig="threePt" dir="t"/>
+    </dgm:scene3d>
+    <dgm:sp3d/>
+    <dgm:txPr/>
+    <dgm:style>
+      <a:lnRef idx="2">
+        <a:scrgbClr r="0" g="0" b="0"/>
+      </a:lnRef>
+      <a:fillRef idx="1">
+        <a:scrgbClr r="0" g="0" b="0"/>
+      </a:fillRef>
+      <a:effectRef idx="0">
+        <a:scrgbClr r="0" g="0" b="0"/>
+      </a:effectRef>
+      <a:fontRef idx="minor"/>
+    </dgm:style>
+  </dgm:styleLbl>
+  <dgm:styleLbl name="solidAlignAcc1">
+    <dgm:scene3d>
+      <a:camera prst="orthographicFront"/>
+      <a:lightRig rig="threePt" dir="t"/>
+    </dgm:scene3d>
+    <dgm:sp3d/>
+    <dgm:txPr/>
+    <dgm:style>
+      <a:lnRef idx="2">
+        <a:scrgbClr r="0" g="0" b="0"/>
+      </a:lnRef>
+      <a:fillRef idx="1">
+        <a:scrgbClr r="0" g="0" b="0"/>
+      </a:fillRef>
+      <a:effectRef idx="0">
+        <a:scrgbClr r="0" g="0" b="0"/>
+      </a:effectRef>
+      <a:fontRef idx="minor"/>
+    </dgm:style>
+  </dgm:styleLbl>
+  <dgm:styleLbl name="solidBgAcc1">
+    <dgm:scene3d>
+      <a:camera prst="orthographicFront"/>
+      <a:lightRig rig="threePt" dir="t"/>
+    </dgm:scene3d>
+    <dgm:sp3d/>
+    <dgm:txPr/>
+    <dgm:style>
+      <a:lnRef idx="2">
+        <a:scrgbClr r="0" g="0" b="0"/>
+      </a:lnRef>
+      <a:fillRef idx="1">
+        <a:scrgbClr r="0" g="0" b="0"/>
+      </a:fillRef>
+      <a:effectRef idx="0">
+        <a:scrgbClr r="0" g="0" b="0"/>
+      </a:effectRef>
+      <a:fontRef idx="minor"/>
+    </dgm:style>
+  </dgm:styleLbl>
+  <dgm:styleLbl name="fgAccFollowNode1">
+    <dgm:scene3d>
+      <a:camera prst="orthographicFront"/>
+      <a:lightRig rig="threePt" dir="t"/>
+    </dgm:scene3d>
+    <dgm:sp3d/>
+    <dgm:txPr/>
+    <dgm:style>
+      <a:lnRef idx="2">
+        <a:scrgbClr r="0" g="0" b="0"/>
+      </a:lnRef>
+      <a:fillRef idx="1">
+        <a:scrgbClr r="0" g="0" b="0"/>
+      </a:fillRef>
+      <a:effectRef idx="0">
+        <a:scrgbClr r="0" g="0" b="0"/>
+      </a:effectRef>
+      <a:fontRef idx="minor"/>
+    </dgm:style>
+  </dgm:styleLbl>
+  <dgm:styleLbl name="alignAccFollowNode1">
+    <dgm:scene3d>
+      <a:camera prst="orthographicFront"/>
+      <a:lightRig rig="threePt" dir="t"/>
+    </dgm:scene3d>
+    <dgm:sp3d/>
+    <dgm:txPr/>
+    <dgm:style>
+      <a:lnRef idx="2">
+        <a:scrgbClr r="0" g="0" b="0"/>
+      </a:lnRef>
+      <a:fillRef idx="1">
+        <a:scrgbClr r="0" g="0" b="0"/>
+      </a:fillRef>
+      <a:effectRef idx="0">
+        <a:scrgbClr r="0" g="0" b="0"/>
+      </a:effectRef>
+      <a:fontRef idx="minor"/>
+    </dgm:style>
+  </dgm:styleLbl>
+  <dgm:styleLbl name="bgAccFollowNode1">
+    <dgm:scene3d>
+      <a:camera prst="orthographicFront"/>
+      <a:lightRig rig="threePt" dir="t"/>
+    </dgm:scene3d>
+    <dgm:sp3d/>
+    <dgm:txPr/>
+    <dgm:style>
+      <a:lnRef idx="2">
+        <a:scrgbClr r="0" g="0" b="0"/>
+      </a:lnRef>
+      <a:fillRef idx="1">
+        <a:scrgbClr r="0" g="0" b="0"/>
+      </a:fillRef>
+      <a:effectRef idx="0">
+        <a:scrgbClr r="0" g="0" b="0"/>
+      </a:effectRef>
+      <a:fontRef idx="minor"/>
+    </dgm:style>
+  </dgm:styleLbl>
+  <dgm:styleLbl name="fgAcc0">
+    <dgm:scene3d>
+      <a:camera prst="orthographicFront"/>
+      <a:lightRig rig="threePt" dir="t"/>
+    </dgm:scene3d>
+    <dgm:sp3d/>
+    <dgm:txPr/>
+    <dgm:style>
+      <a:lnRef idx="2">
+        <a:scrgbClr r="0" g="0" b="0"/>
+      </a:lnRef>
+      <a:fillRef idx="1">
+        <a:scrgbClr r="0" g="0" b="0"/>
+      </a:fillRef>
+      <a:effectRef idx="0">
+        <a:scrgbClr r="0" g="0" b="0"/>
+      </a:effectRef>
+      <a:fontRef idx="minor"/>
+    </dgm:style>
+  </dgm:styleLbl>
+  <dgm:styleLbl name="fgAcc2">
+    <dgm:scene3d>
+      <a:camera prst="orthographicFront"/>
+      <a:lightRig rig="threePt" dir="t"/>
+    </dgm:scene3d>
+    <dgm:sp3d/>
+    <dgm:txPr/>
+    <dgm:style>
+      <a:lnRef idx="2">
+        <a:scrgbClr r="0" g="0" b="0"/>
+      </a:lnRef>
+      <a:fillRef idx="1">
+        <a:scrgbClr r="0" g="0" b="0"/>
+      </a:fillRef>
+      <a:effectRef idx="0">
+        <a:scrgbClr r="0" g="0" b="0"/>
+      </a:effectRef>
+      <a:fontRef idx="minor"/>
+    </dgm:style>
+  </dgm:styleLbl>
+  <dgm:styleLbl name="fgAcc3">
+    <dgm:scene3d>
+      <a:camera prst="orthographicFront"/>
+      <a:lightRig rig="threePt" dir="t"/>
+    </dgm:scene3d>
+    <dgm:sp3d/>
+    <dgm:txPr/>
+    <dgm:style>
+      <a:lnRef idx="2">
+        <a:scrgbClr r="0" g="0" b="0"/>
+      </a:lnRef>
+      <a:fillRef idx="1">
+        <a:scrgbClr r="0" g="0" b="0"/>
+      </a:fillRef>
+      <a:effectRef idx="0">
+        <a:scrgbClr r="0" g="0" b="0"/>
+      </a:effectRef>
+      <a:fontRef idx="minor"/>
+    </dgm:style>
+  </dgm:styleLbl>
+  <dgm:styleLbl name="fgAcc4">
+    <dgm:scene3d>
+      <a:camera prst="orthographicFront"/>
+      <a:lightRig rig="threePt" dir="t"/>
+    </dgm:scene3d>
+    <dgm:sp3d/>
+    <dgm:txPr/>
+    <dgm:style>
+      <a:lnRef idx="2">
+        <a:scrgbClr r="0" g="0" b="0"/>
+      </a:lnRef>
+      <a:fillRef idx="1">
+        <a:scrgbClr r="0" g="0" b="0"/>
+      </a:fillRef>
+      <a:effectRef idx="0">
+        <a:scrgbClr r="0" g="0" b="0"/>
+      </a:effectRef>
+      <a:fontRef idx="minor"/>
+    </dgm:style>
+  </dgm:styleLbl>
+  <dgm:styleLbl name="bgShp">
+    <dgm:scene3d>
+      <a:camera prst="orthographicFront"/>
+      <a:lightRig rig="threePt" dir="t"/>
+    </dgm:scene3d>
+    <dgm:sp3d/>
+    <dgm:txPr/>
+    <dgm:style>
+      <a:lnRef idx="0">
+        <a:scrgbClr r="0" g="0" b="0"/>
+      </a:lnRef>
+      <a:fillRef idx="1">
+        <a:scrgbClr r="0" g="0" b="0"/>
+      </a:fillRef>
+      <a:effectRef idx="0">
+        <a:scrgbClr r="0" g="0" b="0"/>
+      </a:effectRef>
+      <a:fontRef idx="minor"/>
+    </dgm:style>
+  </dgm:styleLbl>
+  <dgm:styleLbl name="dkBgShp">
+    <dgm:scene3d>
+      <a:camera prst="orthographicFront"/>
+      <a:lightRig rig="threePt" dir="t"/>
+    </dgm:scene3d>
+    <dgm:sp3d/>
+    <dgm:txPr/>
+    <dgm:style>
+      <a:lnRef idx="0">
+        <a:scrgbClr r="0" g="0" b="0"/>
+      </a:lnRef>
+      <a:fillRef idx="1">
+        <a:scrgbClr r="0" g="0" b="0"/>
+      </a:fillRef>
+      <a:effectRef idx="0">
+        <a:scrgbClr r="0" g="0" b="0"/>
+      </a:effectRef>
+      <a:fontRef idx="minor"/>
+    </dgm:style>
+  </dgm:styleLbl>
+  <dgm:styleLbl name="trBgShp">
+    <dgm:scene3d>
+      <a:camera prst="orthographicFront"/>
+      <a:lightRig rig="threePt" dir="t"/>
+    </dgm:scene3d>
+    <dgm:sp3d/>
+    <dgm:txPr/>
+    <dgm:style>
+      <a:lnRef idx="0">
+        <a:scrgbClr r="0" g="0" b="0"/>
+      </a:lnRef>
+      <a:fillRef idx="1">
+        <a:scrgbClr r="0" g="0" b="0"/>
+      </a:fillRef>
+      <a:effectRef idx="0">
+        <a:scrgbClr r="0" g="0" b="0"/>
+      </a:effectRef>
+      <a:fontRef idx="minor"/>
+    </dgm:style>
+  </dgm:styleLbl>
+  <dgm:styleLbl name="fgShp">
+    <dgm:scene3d>
+      <a:camera prst="orthographicFront"/>
+      <a:lightRig rig="threePt" dir="t"/>
+    </dgm:scene3d>
+    <dgm:sp3d/>
+    <dgm:txPr/>
+    <dgm:style>
+      <a:lnRef idx="2">
+        <a:scrgbClr r="0" g="0" b="0"/>
+      </a:lnRef>
+      <a:fillRef idx="1">
+        <a:scrgbClr r="0" g="0" b="0"/>
+      </a:fillRef>
+      <a:effectRef idx="0">
+        <a:scrgbClr r="0" g="0" b="0"/>
+      </a:effectRef>
+      <a:fontRef idx="minor"/>
+    </dgm:style>
+  </dgm:styleLbl>
+  <dgm:styleLbl name="revTx">
+    <dgm:scene3d>
+      <a:camera prst="orthographicFront"/>
+      <a:lightRig rig="threePt" dir="t"/>
+    </dgm:scene3d>
+    <dgm:sp3d/>
+    <dgm:txPr/>
+    <dgm:style>
+      <a:lnRef idx="0">
+        <a:scrgbClr r="0" g="0" b="0"/>
+      </a:lnRef>
+      <a:fillRef idx="0">
+        <a:scrgbClr r="0" g="0" b="0"/>
+      </a:fillRef>
+      <a:effectRef idx="0">
+        <a:scrgbClr r="0" g="0" b="0"/>
+      </a:effectRef>
+      <a:fontRef idx="minor"/>
+    </dgm:style>
+  </dgm:styleLbl>
+  <dgm:styleLbl name="revTxLt">
+    <dgm:scene3d>
+      <a:camera prst="orthographicFront"/>
+      <a:lightRig rig="threePt" dir="t"/>
+    </dgm:scene3d>
+    <dgm:sp3d/>
+    <dgm:txPr/>
+    <dgm:style>
+      <a:lnRef idx="0">
+        <a:scrgbClr r="0" g="0" b="0"/>
+      </a:lnRef>
+      <a:fillRef idx="0">
+        <a:scrgbClr r="0" g="0" b="0"/>
+      </a:fillRef>
+      <a:effectRef idx="0">
+        <a:scrgbClr r="0" g="0" b="0"/>
+      </a:effectRef>
+      <a:fontRef idx="minor">
+        <a:schemeClr val="lt1"/>
+      </a:fontRef>
+    </dgm:style>
+  </dgm:styleLbl>
+</dgm:styleDef>
+</file>
+
+<file path=ppt/diagrams/quickStyle8.xml><?xml version="1.0" encoding="utf-8"?>
 <dgm:styleDef xmlns:dgm="http://schemas.openxmlformats.org/drawingml/2006/diagram" xmlns:a="http://schemas.openxmlformats.org/drawingml/2006/main" uniqueId="urn:microsoft.com/office/officeart/2005/8/quickstyle/simple1">
   <dgm:title val=""/>
   <dgm:desc val=""/>
@@ -22992,7 +25799,7 @@
           <a:p>
             <a:fld id="{D3D47A4C-1800-412B-9042-C93F1924AECC}" type="datetimeFigureOut">
               <a:rPr lang="en-US" smtClean="0"/>
-              <a:t>9/1/2026</a:t>
+              <a:t>9/2/2026</a:t>
             </a:fld>
             <a:endParaRPr lang="en-US"/>
           </a:p>
@@ -23169,7 +25976,7 @@
           <a:p>
             <a:fld id="{7000EB3D-2307-4317-8A1D-B47FA45245F0}" type="datetimeFigureOut">
               <a:rPr lang="en-US" noProof="0" smtClean="0"/>
-              <a:t>9/1/2026</a:t>
+              <a:t>9/2/2026</a:t>
             </a:fld>
             <a:endParaRPr lang="en-US" noProof="0"/>
           </a:p>
@@ -23961,7 +26768,7 @@
           <a:p>
             <a:fld id="{F9880A97-BB72-4C49-B020-C005FF9D43B4}" type="datetime1">
               <a:rPr lang="en-US" smtClean="0"/>
-              <a:t>9/1/2026</a:t>
+              <a:t>9/2/2026</a:t>
             </a:fld>
             <a:endParaRPr lang="en-US" dirty="0"/>
           </a:p>
@@ -24649,7 +27456,7 @@
           <a:p>
             <a:fld id="{8B1E16E5-E5E5-4583-9AF7-83D9607A8145}" type="datetime1">
               <a:rPr lang="en-US" smtClean="0"/>
-              <a:t>9/1/2026</a:t>
+              <a:t>9/2/2026</a:t>
             </a:fld>
             <a:endParaRPr lang="en-US" dirty="0"/>
           </a:p>
@@ -25183,7 +27990,7 @@
           <a:p>
             <a:fld id="{0B4AC9CD-0374-4BE7-8481-7982C4A3E9D1}" type="datetime1">
               <a:rPr lang="en-US" smtClean="0"/>
-              <a:t>9/1/2026</a:t>
+              <a:t>9/2/2026</a:t>
             </a:fld>
             <a:endParaRPr lang="en-US" dirty="0"/>
           </a:p>
@@ -25824,7 +28631,7 @@
           <a:p>
             <a:fld id="{222400DF-651A-4479-9C74-9CDA47151016}" type="datetime1">
               <a:rPr lang="en-US" smtClean="0"/>
-              <a:t>9/1/2026</a:t>
+              <a:t>9/2/2026</a:t>
             </a:fld>
             <a:endParaRPr lang="en-US" dirty="0"/>
           </a:p>
@@ -26624,7 +29431,7 @@
           <a:p>
             <a:fld id="{1201FEBF-D140-4633-9B70-3A503CA61AD4}" type="datetime1">
               <a:rPr lang="en-US" smtClean="0"/>
-              <a:t>9/1/2026</a:t>
+              <a:t>9/2/2026</a:t>
             </a:fld>
             <a:endParaRPr lang="en-US" dirty="0"/>
           </a:p>
@@ -27509,7 +30316,7 @@
           <a:p>
             <a:fld id="{B63BE472-3891-4216-B770-F52E53667131}" type="datetime1">
               <a:rPr lang="en-US" smtClean="0"/>
-              <a:t>9/1/2026</a:t>
+              <a:t>9/2/2026</a:t>
             </a:fld>
             <a:endParaRPr lang="en-US" dirty="0"/>
           </a:p>
@@ -27842,7 +30649,7 @@
           <a:p>
             <a:fld id="{92C9618A-2189-4802-BD34-F288EF802528}" type="datetime1">
               <a:rPr lang="en-US" smtClean="0"/>
-              <a:t>9/1/2026</a:t>
+              <a:t>9/2/2026</a:t>
             </a:fld>
             <a:endParaRPr lang="en-US" dirty="0"/>
           </a:p>
@@ -28036,7 +30843,7 @@
             <a:fld id="{3CA3B387-33D3-4D27-BE27-9B85ACC6AC8A}" type="datetime1">
               <a:rPr lang="en-US" smtClean="0"/>
               <a:pPr/>
-              <a:t>9/1/2026</a:t>
+              <a:t>9/2/2026</a:t>
             </a:fld>
             <a:endParaRPr lang="en-US" dirty="0"/>
           </a:p>
@@ -30514,10 +33321,7 @@
     <p:bg>
       <p:bgPr>
         <a:solidFill>
-          <a:schemeClr val="accent1">
-            <a:lumMod val="40000"/>
-            <a:lumOff val="60000"/>
-          </a:schemeClr>
+          <a:schemeClr val="bg1"/>
         </a:solidFill>
         <a:effectLst/>
       </p:bgPr>
@@ -30700,10 +33504,7 @@
     <p:bg>
       <p:bgPr>
         <a:solidFill>
-          <a:schemeClr val="accent1">
-            <a:lumMod val="40000"/>
-            <a:lumOff val="60000"/>
-          </a:schemeClr>
+          <a:schemeClr val="bg1"/>
         </a:solidFill>
         <a:effectLst/>
       </p:bgPr>
@@ -30886,10 +33687,7 @@
     <p:bg>
       <p:bgPr>
         <a:solidFill>
-          <a:schemeClr val="accent1">
-            <a:lumMod val="40000"/>
-            <a:lumOff val="60000"/>
-          </a:schemeClr>
+          <a:schemeClr val="bg1"/>
         </a:solidFill>
         <a:effectLst/>
       </p:bgPr>
@@ -31230,14 +34028,891 @@
 <file path=ppt/slides/slide24.xml><?xml version="1.0" encoding="utf-8"?>
 <p:sld xmlns:a="http://schemas.openxmlformats.org/drawingml/2006/main" xmlns:r="http://schemas.openxmlformats.org/officeDocument/2006/relationships" xmlns:p="http://schemas.openxmlformats.org/presentationml/2006/main">
   <p:cSld>
+    <p:spTree>
+      <p:nvGrpSpPr>
+        <p:cNvPr id="1" name=""/>
+        <p:cNvGrpSpPr/>
+        <p:nvPr/>
+      </p:nvGrpSpPr>
+      <p:grpSpPr>
+        <a:xfrm>
+          <a:off x="0" y="0"/>
+          <a:ext cx="0" cy="0"/>
+          <a:chOff x="0" y="0"/>
+          <a:chExt cx="0" cy="0"/>
+        </a:xfrm>
+      </p:grpSpPr>
+      <p:sp>
+        <p:nvSpPr>
+          <p:cNvPr id="4" name="Title 3">
+            <a:extLst>
+              <a:ext uri="{FF2B5EF4-FFF2-40B4-BE49-F238E27FC236}">
+                <a16:creationId xmlns:a16="http://schemas.microsoft.com/office/drawing/2014/main" id="{A1B36E22-9F41-2C57-13A0-B5EA6290D3D8}"/>
+              </a:ext>
+            </a:extLst>
+          </p:cNvPr>
+          <p:cNvSpPr>
+            <a:spLocks noGrp="1"/>
+          </p:cNvSpPr>
+          <p:nvPr>
+            <p:ph type="title"/>
+          </p:nvPr>
+        </p:nvSpPr>
+        <p:spPr/>
+        <p:txBody>
+          <a:bodyPr/>
+          <a:lstStyle/>
+          <a:p>
+            <a:r>
+              <a:rPr lang="en-GB" dirty="0"/>
+              <a:t>Testing Models</a:t>
+            </a:r>
+          </a:p>
+        </p:txBody>
+      </p:sp>
+      <p:sp>
+        <p:nvSpPr>
+          <p:cNvPr id="6" name="TextBox 5">
+            <a:extLst>
+              <a:ext uri="{FF2B5EF4-FFF2-40B4-BE49-F238E27FC236}">
+                <a16:creationId xmlns:a16="http://schemas.microsoft.com/office/drawing/2014/main" id="{377F0B66-5FFE-C03E-A6D9-BC308BF71027}"/>
+              </a:ext>
+            </a:extLst>
+          </p:cNvPr>
+          <p:cNvSpPr txBox="1"/>
+          <p:nvPr/>
+        </p:nvSpPr>
+        <p:spPr>
+          <a:xfrm>
+            <a:off x="6509658" y="1582346"/>
+            <a:ext cx="4844142" cy="3693319"/>
+          </a:xfrm>
+          <a:prstGeom prst="rect">
+            <a:avLst/>
+          </a:prstGeom>
+          <a:noFill/>
+        </p:spPr>
+        <p:txBody>
+          <a:bodyPr wrap="square" rtlCol="0" anchor="ctr">
+            <a:spAutoFit/>
+          </a:bodyPr>
+          <a:lstStyle/>
+          <a:p>
+            <a:r>
+              <a:rPr lang="en-GB" dirty="0">
+                <a:latin typeface="Yu Gothic UI Semilight" panose="020B0400000000000000" pitchFamily="34" charset="-128"/>
+                <a:ea typeface="Yu Gothic UI Semilight" panose="020B0400000000000000" pitchFamily="34" charset="-128"/>
+              </a:rPr>
+              <a:t>The three classification models were tested on the test set of data by predicting the smoker status of each entry. These predictions were compared against the actual smoker status of each entry, allowing us to calculate how accurate the models were. </a:t>
+            </a:r>
+          </a:p>
+          <a:p>
+            <a:endParaRPr lang="en-GB" dirty="0">
+              <a:latin typeface="Yu Gothic UI Semilight" panose="020B0400000000000000" pitchFamily="34" charset="-128"/>
+              <a:ea typeface="Yu Gothic UI Semilight" panose="020B0400000000000000" pitchFamily="34" charset="-128"/>
+            </a:endParaRPr>
+          </a:p>
+          <a:p>
+            <a:r>
+              <a:rPr lang="en-GB" dirty="0">
+                <a:latin typeface="Yu Gothic UI Semilight" panose="020B0400000000000000" pitchFamily="34" charset="-128"/>
+                <a:ea typeface="Yu Gothic UI Semilight" panose="020B0400000000000000" pitchFamily="34" charset="-128"/>
+              </a:rPr>
+              <a:t>All three models achieved around 0.8 (80%) accuracy. However, the actual correct classifications were not balanced between the two classes. We used confusion matrices to display how many false positives and false negatives the models predicted.</a:t>
+            </a:r>
+          </a:p>
+        </p:txBody>
+      </p:sp>
+    </p:spTree>
+    <p:extLst>
+      <p:ext uri="{BB962C8B-B14F-4D97-AF65-F5344CB8AC3E}">
+        <p14:creationId xmlns:p14="http://schemas.microsoft.com/office/powerpoint/2010/main" val="4293617660"/>
+      </p:ext>
+    </p:extLst>
+  </p:cSld>
+  <p:clrMapOvr>
+    <a:masterClrMapping/>
+  </p:clrMapOvr>
+</p:sld>
+</file>
+
+<file path=ppt/slides/slide25.xml><?xml version="1.0" encoding="utf-8"?>
+<p:sld xmlns:a="http://schemas.openxmlformats.org/drawingml/2006/main" xmlns:r="http://schemas.openxmlformats.org/officeDocument/2006/relationships" xmlns:p="http://schemas.openxmlformats.org/presentationml/2006/main">
+  <p:cSld>
     <p:bg>
       <p:bgPr>
         <a:solidFill>
-          <a:srgbClr val="B32752"/>
+          <a:schemeClr val="bg1"/>
         </a:solidFill>
         <a:effectLst/>
       </p:bgPr>
     </p:bg>
+    <p:spTree>
+      <p:nvGrpSpPr>
+        <p:cNvPr id="1" name="">
+          <a:extLst>
+            <a:ext uri="{FF2B5EF4-FFF2-40B4-BE49-F238E27FC236}">
+              <a16:creationId xmlns:a16="http://schemas.microsoft.com/office/drawing/2014/main" id="{EBDFFF16-D4F0-FA29-DF2D-0200E29E1E6D}"/>
+            </a:ext>
+          </a:extLst>
+        </p:cNvPr>
+        <p:cNvGrpSpPr/>
+        <p:nvPr/>
+      </p:nvGrpSpPr>
+      <p:grpSpPr>
+        <a:xfrm>
+          <a:off x="0" y="0"/>
+          <a:ext cx="0" cy="0"/>
+          <a:chOff x="0" y="0"/>
+          <a:chExt cx="0" cy="0"/>
+        </a:xfrm>
+      </p:grpSpPr>
+      <p:sp>
+        <p:nvSpPr>
+          <p:cNvPr id="4" name="Title 3">
+            <a:extLst>
+              <a:ext uri="{FF2B5EF4-FFF2-40B4-BE49-F238E27FC236}">
+                <a16:creationId xmlns:a16="http://schemas.microsoft.com/office/drawing/2014/main" id="{06E7A382-D3BC-E550-F98F-EA2E41B75BD6}"/>
+              </a:ext>
+            </a:extLst>
+          </p:cNvPr>
+          <p:cNvSpPr>
+            <a:spLocks noGrp="1"/>
+          </p:cNvSpPr>
+          <p:nvPr>
+            <p:ph type="title"/>
+          </p:nvPr>
+        </p:nvSpPr>
+        <p:spPr>
+          <a:xfrm>
+            <a:off x="838200" y="990987"/>
+            <a:ext cx="10515602" cy="1377184"/>
+          </a:xfrm>
+        </p:spPr>
+        <p:txBody>
+          <a:bodyPr>
+            <a:normAutofit/>
+          </a:bodyPr>
+          <a:lstStyle/>
+          <a:p>
+            <a:pPr algn="ctr"/>
+            <a:r>
+              <a:rPr lang="en-GB" sz="7200" dirty="0"/>
+              <a:t>The Models</a:t>
+            </a:r>
+          </a:p>
+        </p:txBody>
+      </p:sp>
+      <p:graphicFrame>
+        <p:nvGraphicFramePr>
+          <p:cNvPr id="6" name="Content Placeholder 5">
+            <a:extLst>
+              <a:ext uri="{FF2B5EF4-FFF2-40B4-BE49-F238E27FC236}">
+                <a16:creationId xmlns:a16="http://schemas.microsoft.com/office/drawing/2014/main" id="{BF9B3699-5D90-5B4C-DC11-74038794DB61}"/>
+              </a:ext>
+            </a:extLst>
+          </p:cNvPr>
+          <p:cNvGraphicFramePr>
+            <a:graphicFrameLocks noGrp="1"/>
+          </p:cNvGraphicFramePr>
+          <p:nvPr>
+            <p:ph sz="quarter" idx="14"/>
+          </p:nvPr>
+        </p:nvGraphicFramePr>
+        <p:xfrm>
+          <a:off x="838200" y="2399913"/>
+          <a:ext cx="10515600" cy="3467100"/>
+        </p:xfrm>
+        <a:graphic>
+          <a:graphicData uri="http://schemas.openxmlformats.org/drawingml/2006/diagram">
+            <dgm:relIds xmlns:dgm="http://schemas.openxmlformats.org/drawingml/2006/diagram" xmlns:r="http://schemas.openxmlformats.org/officeDocument/2006/relationships" r:dm="rId2" r:lo="rId3" r:qs="rId4" r:cs="rId5"/>
+          </a:graphicData>
+        </a:graphic>
+      </p:graphicFrame>
+    </p:spTree>
+    <p:extLst>
+      <p:ext uri="{BB962C8B-B14F-4D97-AF65-F5344CB8AC3E}">
+        <p14:creationId xmlns:p14="http://schemas.microsoft.com/office/powerpoint/2010/main" val="1824867597"/>
+      </p:ext>
+    </p:extLst>
+  </p:cSld>
+  <p:clrMapOvr>
+    <a:masterClrMapping/>
+  </p:clrMapOvr>
+</p:sld>
+</file>
+
+<file path=ppt/slides/slide26.xml><?xml version="1.0" encoding="utf-8"?>
+<p:sld xmlns:a="http://schemas.openxmlformats.org/drawingml/2006/main" xmlns:r="http://schemas.openxmlformats.org/officeDocument/2006/relationships" xmlns:p="http://schemas.openxmlformats.org/presentationml/2006/main">
+  <p:cSld>
+    <p:bg>
+      <p:bgPr>
+        <a:solidFill>
+          <a:schemeClr val="accent1">
+            <a:lumMod val="40000"/>
+            <a:lumOff val="60000"/>
+          </a:schemeClr>
+        </a:solidFill>
+        <a:effectLst/>
+      </p:bgPr>
+    </p:bg>
+    <p:spTree>
+      <p:nvGrpSpPr>
+        <p:cNvPr id="1" name="">
+          <a:extLst>
+            <a:ext uri="{FF2B5EF4-FFF2-40B4-BE49-F238E27FC236}">
+              <a16:creationId xmlns:a16="http://schemas.microsoft.com/office/drawing/2014/main" id="{4B51D8D2-8E06-00D9-41A8-79EDA1DC277E}"/>
+            </a:ext>
+          </a:extLst>
+        </p:cNvPr>
+        <p:cNvGrpSpPr/>
+        <p:nvPr/>
+      </p:nvGrpSpPr>
+      <p:grpSpPr>
+        <a:xfrm>
+          <a:off x="0" y="0"/>
+          <a:ext cx="0" cy="0"/>
+          <a:chOff x="0" y="0"/>
+          <a:chExt cx="0" cy="0"/>
+        </a:xfrm>
+      </p:grpSpPr>
+      <p:sp>
+        <p:nvSpPr>
+          <p:cNvPr id="4" name="Title 3">
+            <a:extLst>
+              <a:ext uri="{FF2B5EF4-FFF2-40B4-BE49-F238E27FC236}">
+                <a16:creationId xmlns:a16="http://schemas.microsoft.com/office/drawing/2014/main" id="{D153E9CE-1D72-D71E-9CC9-92D9124B0091}"/>
+              </a:ext>
+            </a:extLst>
+          </p:cNvPr>
+          <p:cNvSpPr>
+            <a:spLocks noGrp="1"/>
+          </p:cNvSpPr>
+          <p:nvPr>
+            <p:ph type="title"/>
+          </p:nvPr>
+        </p:nvSpPr>
+        <p:spPr>
+          <a:xfrm>
+            <a:off x="838200" y="853333"/>
+            <a:ext cx="4844143" cy="2792412"/>
+          </a:xfrm>
+        </p:spPr>
+        <p:txBody>
+          <a:bodyPr anchor="t">
+            <a:normAutofit/>
+          </a:bodyPr>
+          <a:lstStyle/>
+          <a:p>
+            <a:r>
+              <a:rPr lang="en-GB" dirty="0"/>
+              <a:t>Logistic Regression Model Confusion Matrix</a:t>
+            </a:r>
+          </a:p>
+        </p:txBody>
+      </p:sp>
+      <p:sp>
+        <p:nvSpPr>
+          <p:cNvPr id="15" name="Content Placeholder 14">
+            <a:extLst>
+              <a:ext uri="{FF2B5EF4-FFF2-40B4-BE49-F238E27FC236}">
+                <a16:creationId xmlns:a16="http://schemas.microsoft.com/office/drawing/2014/main" id="{A78FA7C7-CE2F-07E3-841D-C57C976D6D2D}"/>
+              </a:ext>
+            </a:extLst>
+          </p:cNvPr>
+          <p:cNvSpPr>
+            <a:spLocks noGrp="1"/>
+          </p:cNvSpPr>
+          <p:nvPr>
+            <p:ph sz="quarter" idx="13"/>
+          </p:nvPr>
+        </p:nvSpPr>
+        <p:spPr>
+          <a:xfrm>
+            <a:off x="837521" y="3429000"/>
+            <a:ext cx="4844142" cy="2574925"/>
+          </a:xfrm>
+        </p:spPr>
+        <p:txBody>
+          <a:bodyPr>
+            <a:normAutofit/>
+          </a:bodyPr>
+          <a:lstStyle/>
+          <a:p>
+            <a:pPr marL="0" indent="0">
+              <a:lnSpc>
+                <a:spcPct val="100000"/>
+              </a:lnSpc>
+              <a:buNone/>
+            </a:pPr>
+            <a:r>
+              <a:rPr lang="en-GB" sz="1800" dirty="0"/>
+              <a:t>Our binomial logistic regression model was the simplest out of the three. It achieved an accuracy score of 0.82 (82%), the highest out of the three models. The confusion matrix shows that the model predicted class 0 (non-smoker) well, but struggled with class 1 (smoker). The number of false negatives predicted (203) was much higher than the number of true positives predicted (74).</a:t>
+            </a:r>
+            <a:endParaRPr lang="en-GB" sz="1400" dirty="0"/>
+          </a:p>
+        </p:txBody>
+      </p:sp>
+      <p:pic>
+        <p:nvPicPr>
+          <p:cNvPr id="12" name="Picture Placeholder 11">
+            <a:extLst>
+              <a:ext uri="{FF2B5EF4-FFF2-40B4-BE49-F238E27FC236}">
+                <a16:creationId xmlns:a16="http://schemas.microsoft.com/office/drawing/2014/main" id="{5BB94179-4BD3-DD33-338E-0B8EC4FFB69C}"/>
+              </a:ext>
+            </a:extLst>
+          </p:cNvPr>
+          <p:cNvPicPr>
+            <a:picLocks noGrp="1" noChangeAspect="1"/>
+          </p:cNvPicPr>
+          <p:nvPr>
+            <p:ph sz="quarter" idx="16"/>
+          </p:nvPr>
+        </p:nvPicPr>
+        <p:blipFill>
+          <a:blip r:embed="rId2"/>
+          <a:stretch/>
+        </p:blipFill>
+        <p:spPr>
+          <a:xfrm>
+            <a:off x="6509658" y="1610605"/>
+            <a:ext cx="4844142" cy="3633106"/>
+          </a:xfrm>
+          <a:custGeom>
+            <a:avLst/>
+            <a:gdLst>
+              <a:gd name="connsiteX0" fmla="*/ 5070020 w 5070020"/>
+              <a:gd name="connsiteY0" fmla="*/ 0 h 5486400"/>
+              <a:gd name="connsiteX1" fmla="*/ 5070020 w 5070020"/>
+              <a:gd name="connsiteY1" fmla="*/ 5486400 h 5486400"/>
+              <a:gd name="connsiteX2" fmla="*/ 0 w 5070020"/>
+              <a:gd name="connsiteY2" fmla="*/ 5486399 h 5486400"/>
+              <a:gd name="connsiteX3" fmla="*/ 0 w 5070020"/>
+              <a:gd name="connsiteY3" fmla="*/ 579095 h 5486400"/>
+              <a:gd name="connsiteX4" fmla="*/ 268 w 5070020"/>
+              <a:gd name="connsiteY4" fmla="*/ 579362 h 5486400"/>
+              <a:gd name="connsiteX5" fmla="*/ 582189 w 5070020"/>
+              <a:gd name="connsiteY5" fmla="*/ 266 h 5486400"/>
+              <a:gd name="connsiteX6" fmla="*/ 581922 w 5070020"/>
+              <a:gd name="connsiteY6" fmla="*/ 1 h 5486400"/>
+            </a:gdLst>
+            <a:ahLst/>
+            <a:cxnLst>
+              <a:cxn ang="0">
+                <a:pos x="connsiteX0" y="connsiteY0"/>
+              </a:cxn>
+              <a:cxn ang="0">
+                <a:pos x="connsiteX1" y="connsiteY1"/>
+              </a:cxn>
+              <a:cxn ang="0">
+                <a:pos x="connsiteX2" y="connsiteY2"/>
+              </a:cxn>
+              <a:cxn ang="0">
+                <a:pos x="connsiteX3" y="connsiteY3"/>
+              </a:cxn>
+              <a:cxn ang="0">
+                <a:pos x="connsiteX4" y="connsiteY4"/>
+              </a:cxn>
+              <a:cxn ang="0">
+                <a:pos x="connsiteX5" y="connsiteY5"/>
+              </a:cxn>
+              <a:cxn ang="0">
+                <a:pos x="connsiteX6" y="connsiteY6"/>
+              </a:cxn>
+            </a:cxnLst>
+            <a:rect l="l" t="t" r="r" b="b"/>
+            <a:pathLst>
+              <a:path w="5070020" h="5486400">
+                <a:moveTo>
+                  <a:pt x="5070020" y="0"/>
+                </a:moveTo>
+                <a:lnTo>
+                  <a:pt x="5070020" y="5486400"/>
+                </a:lnTo>
+                <a:lnTo>
+                  <a:pt x="0" y="5486399"/>
+                </a:lnTo>
+                <a:lnTo>
+                  <a:pt x="0" y="579095"/>
+                </a:lnTo>
+                <a:lnTo>
+                  <a:pt x="268" y="579362"/>
+                </a:lnTo>
+                <a:lnTo>
+                  <a:pt x="582189" y="266"/>
+                </a:lnTo>
+                <a:lnTo>
+                  <a:pt x="581922" y="1"/>
+                </a:lnTo>
+                <a:close/>
+              </a:path>
+            </a:pathLst>
+          </a:custGeom>
+          <a:noFill/>
+        </p:spPr>
+      </p:pic>
+    </p:spTree>
+    <p:extLst>
+      <p:ext uri="{BB962C8B-B14F-4D97-AF65-F5344CB8AC3E}">
+        <p14:creationId xmlns:p14="http://schemas.microsoft.com/office/powerpoint/2010/main" val="2104800728"/>
+      </p:ext>
+    </p:extLst>
+  </p:cSld>
+  <p:clrMapOvr>
+    <a:masterClrMapping/>
+  </p:clrMapOvr>
+</p:sld>
+</file>
+
+<file path=ppt/slides/slide27.xml><?xml version="1.0" encoding="utf-8"?>
+<p:sld xmlns:a="http://schemas.openxmlformats.org/drawingml/2006/main" xmlns:r="http://schemas.openxmlformats.org/officeDocument/2006/relationships" xmlns:p="http://schemas.openxmlformats.org/presentationml/2006/main">
+  <p:cSld>
+    <p:bg>
+      <p:bgPr>
+        <a:solidFill>
+          <a:schemeClr val="accent1">
+            <a:lumMod val="40000"/>
+            <a:lumOff val="60000"/>
+          </a:schemeClr>
+        </a:solidFill>
+        <a:effectLst/>
+      </p:bgPr>
+    </p:bg>
+    <p:spTree>
+      <p:nvGrpSpPr>
+        <p:cNvPr id="1" name="">
+          <a:extLst>
+            <a:ext uri="{FF2B5EF4-FFF2-40B4-BE49-F238E27FC236}">
+              <a16:creationId xmlns:a16="http://schemas.microsoft.com/office/drawing/2014/main" id="{770F8C5C-7033-4B02-90EB-FEA722279D40}"/>
+            </a:ext>
+          </a:extLst>
+        </p:cNvPr>
+        <p:cNvGrpSpPr/>
+        <p:nvPr/>
+      </p:nvGrpSpPr>
+      <p:grpSpPr>
+        <a:xfrm>
+          <a:off x="0" y="0"/>
+          <a:ext cx="0" cy="0"/>
+          <a:chOff x="0" y="0"/>
+          <a:chExt cx="0" cy="0"/>
+        </a:xfrm>
+      </p:grpSpPr>
+      <p:sp>
+        <p:nvSpPr>
+          <p:cNvPr id="4" name="Title 3">
+            <a:extLst>
+              <a:ext uri="{FF2B5EF4-FFF2-40B4-BE49-F238E27FC236}">
+                <a16:creationId xmlns:a16="http://schemas.microsoft.com/office/drawing/2014/main" id="{D5C1B305-BEC8-CA49-40C1-58C6A65AA303}"/>
+              </a:ext>
+            </a:extLst>
+          </p:cNvPr>
+          <p:cNvSpPr>
+            <a:spLocks noGrp="1"/>
+          </p:cNvSpPr>
+          <p:nvPr>
+            <p:ph type="title"/>
+          </p:nvPr>
+        </p:nvSpPr>
+        <p:spPr>
+          <a:xfrm>
+            <a:off x="838200" y="853333"/>
+            <a:ext cx="4844143" cy="2792412"/>
+          </a:xfrm>
+        </p:spPr>
+        <p:txBody>
+          <a:bodyPr anchor="t">
+            <a:normAutofit/>
+          </a:bodyPr>
+          <a:lstStyle/>
+          <a:p>
+            <a:r>
+              <a:rPr lang="en-GB" dirty="0"/>
+              <a:t>Random Forests Classifier Confusion Matrix</a:t>
+            </a:r>
+          </a:p>
+        </p:txBody>
+      </p:sp>
+      <p:sp>
+        <p:nvSpPr>
+          <p:cNvPr id="15" name="Content Placeholder 14">
+            <a:extLst>
+              <a:ext uri="{FF2B5EF4-FFF2-40B4-BE49-F238E27FC236}">
+                <a16:creationId xmlns:a16="http://schemas.microsoft.com/office/drawing/2014/main" id="{5D3DDD3C-6AA2-D9F5-8918-C19D81DB99B8}"/>
+              </a:ext>
+            </a:extLst>
+          </p:cNvPr>
+          <p:cNvSpPr>
+            <a:spLocks noGrp="1"/>
+          </p:cNvSpPr>
+          <p:nvPr>
+            <p:ph sz="quarter" idx="13"/>
+          </p:nvPr>
+        </p:nvSpPr>
+        <p:spPr>
+          <a:xfrm>
+            <a:off x="837521" y="3429000"/>
+            <a:ext cx="4844142" cy="2574925"/>
+          </a:xfrm>
+        </p:spPr>
+        <p:txBody>
+          <a:bodyPr>
+            <a:normAutofit fontScale="77500" lnSpcReduction="20000"/>
+          </a:bodyPr>
+          <a:lstStyle/>
+          <a:p>
+            <a:pPr marL="0" indent="0">
+              <a:lnSpc>
+                <a:spcPct val="120000"/>
+              </a:lnSpc>
+              <a:buNone/>
+            </a:pPr>
+            <a:r>
+              <a:rPr lang="en-GB" dirty="0"/>
+              <a:t>Our random forests model achieved 0.80 (80%) accuracy, the lowest accuracy score out of the three models. The confusion matrix shows that the model predicted class 0 (non-smoker) better than class 1 (smoker) just as the logistic regression model did. This model predicted slightly more false negatives than the logistic regression model.</a:t>
+            </a:r>
+            <a:endParaRPr lang="en-GB" sz="1700" dirty="0"/>
+          </a:p>
+        </p:txBody>
+      </p:sp>
+      <p:pic>
+        <p:nvPicPr>
+          <p:cNvPr id="12" name="Picture Placeholder 11">
+            <a:extLst>
+              <a:ext uri="{FF2B5EF4-FFF2-40B4-BE49-F238E27FC236}">
+                <a16:creationId xmlns:a16="http://schemas.microsoft.com/office/drawing/2014/main" id="{999836BF-CC51-010F-7976-371F7D3B1A67}"/>
+              </a:ext>
+            </a:extLst>
+          </p:cNvPr>
+          <p:cNvPicPr>
+            <a:picLocks noGrp="1" noChangeAspect="1"/>
+          </p:cNvPicPr>
+          <p:nvPr>
+            <p:ph sz="quarter" idx="16"/>
+          </p:nvPr>
+        </p:nvPicPr>
+        <p:blipFill>
+          <a:blip r:embed="rId2"/>
+          <a:srcRect/>
+          <a:stretch/>
+        </p:blipFill>
+        <p:spPr>
+          <a:xfrm>
+            <a:off x="6509658" y="1610605"/>
+            <a:ext cx="4844142" cy="3633106"/>
+          </a:xfrm>
+          <a:custGeom>
+            <a:avLst/>
+            <a:gdLst>
+              <a:gd name="connsiteX0" fmla="*/ 5070020 w 5070020"/>
+              <a:gd name="connsiteY0" fmla="*/ 0 h 5486400"/>
+              <a:gd name="connsiteX1" fmla="*/ 5070020 w 5070020"/>
+              <a:gd name="connsiteY1" fmla="*/ 5486400 h 5486400"/>
+              <a:gd name="connsiteX2" fmla="*/ 0 w 5070020"/>
+              <a:gd name="connsiteY2" fmla="*/ 5486399 h 5486400"/>
+              <a:gd name="connsiteX3" fmla="*/ 0 w 5070020"/>
+              <a:gd name="connsiteY3" fmla="*/ 579095 h 5486400"/>
+              <a:gd name="connsiteX4" fmla="*/ 268 w 5070020"/>
+              <a:gd name="connsiteY4" fmla="*/ 579362 h 5486400"/>
+              <a:gd name="connsiteX5" fmla="*/ 582189 w 5070020"/>
+              <a:gd name="connsiteY5" fmla="*/ 266 h 5486400"/>
+              <a:gd name="connsiteX6" fmla="*/ 581922 w 5070020"/>
+              <a:gd name="connsiteY6" fmla="*/ 1 h 5486400"/>
+            </a:gdLst>
+            <a:ahLst/>
+            <a:cxnLst>
+              <a:cxn ang="0">
+                <a:pos x="connsiteX0" y="connsiteY0"/>
+              </a:cxn>
+              <a:cxn ang="0">
+                <a:pos x="connsiteX1" y="connsiteY1"/>
+              </a:cxn>
+              <a:cxn ang="0">
+                <a:pos x="connsiteX2" y="connsiteY2"/>
+              </a:cxn>
+              <a:cxn ang="0">
+                <a:pos x="connsiteX3" y="connsiteY3"/>
+              </a:cxn>
+              <a:cxn ang="0">
+                <a:pos x="connsiteX4" y="connsiteY4"/>
+              </a:cxn>
+              <a:cxn ang="0">
+                <a:pos x="connsiteX5" y="connsiteY5"/>
+              </a:cxn>
+              <a:cxn ang="0">
+                <a:pos x="connsiteX6" y="connsiteY6"/>
+              </a:cxn>
+            </a:cxnLst>
+            <a:rect l="l" t="t" r="r" b="b"/>
+            <a:pathLst>
+              <a:path w="5070020" h="5486400">
+                <a:moveTo>
+                  <a:pt x="5070020" y="0"/>
+                </a:moveTo>
+                <a:lnTo>
+                  <a:pt x="5070020" y="5486400"/>
+                </a:lnTo>
+                <a:lnTo>
+                  <a:pt x="0" y="5486399"/>
+                </a:lnTo>
+                <a:lnTo>
+                  <a:pt x="0" y="579095"/>
+                </a:lnTo>
+                <a:lnTo>
+                  <a:pt x="268" y="579362"/>
+                </a:lnTo>
+                <a:lnTo>
+                  <a:pt x="582189" y="266"/>
+                </a:lnTo>
+                <a:lnTo>
+                  <a:pt x="581922" y="1"/>
+                </a:lnTo>
+                <a:close/>
+              </a:path>
+            </a:pathLst>
+          </a:custGeom>
+          <a:noFill/>
+        </p:spPr>
+      </p:pic>
+    </p:spTree>
+    <p:extLst>
+      <p:ext uri="{BB962C8B-B14F-4D97-AF65-F5344CB8AC3E}">
+        <p14:creationId xmlns:p14="http://schemas.microsoft.com/office/powerpoint/2010/main" val="1132443249"/>
+      </p:ext>
+    </p:extLst>
+  </p:cSld>
+  <p:clrMapOvr>
+    <a:masterClrMapping/>
+  </p:clrMapOvr>
+</p:sld>
+</file>
+
+<file path=ppt/slides/slide28.xml><?xml version="1.0" encoding="utf-8"?>
+<p:sld xmlns:a="http://schemas.openxmlformats.org/drawingml/2006/main" xmlns:r="http://schemas.openxmlformats.org/officeDocument/2006/relationships" xmlns:p="http://schemas.openxmlformats.org/presentationml/2006/main">
+  <p:cSld>
+    <p:bg>
+      <p:bgPr>
+        <a:solidFill>
+          <a:schemeClr val="accent1">
+            <a:lumMod val="40000"/>
+            <a:lumOff val="60000"/>
+          </a:schemeClr>
+        </a:solidFill>
+        <a:effectLst/>
+      </p:bgPr>
+    </p:bg>
+    <p:spTree>
+      <p:nvGrpSpPr>
+        <p:cNvPr id="1" name="">
+          <a:extLst>
+            <a:ext uri="{FF2B5EF4-FFF2-40B4-BE49-F238E27FC236}">
+              <a16:creationId xmlns:a16="http://schemas.microsoft.com/office/drawing/2014/main" id="{C084427D-6B9F-D819-A788-13476D4CDD16}"/>
+            </a:ext>
+          </a:extLst>
+        </p:cNvPr>
+        <p:cNvGrpSpPr/>
+        <p:nvPr/>
+      </p:nvGrpSpPr>
+      <p:grpSpPr>
+        <a:xfrm>
+          <a:off x="0" y="0"/>
+          <a:ext cx="0" cy="0"/>
+          <a:chOff x="0" y="0"/>
+          <a:chExt cx="0" cy="0"/>
+        </a:xfrm>
+      </p:grpSpPr>
+      <p:sp>
+        <p:nvSpPr>
+          <p:cNvPr id="4" name="Title 3">
+            <a:extLst>
+              <a:ext uri="{FF2B5EF4-FFF2-40B4-BE49-F238E27FC236}">
+                <a16:creationId xmlns:a16="http://schemas.microsoft.com/office/drawing/2014/main" id="{B450EFAB-624A-0CD1-EAFC-5DC27EBCC0E9}"/>
+              </a:ext>
+            </a:extLst>
+          </p:cNvPr>
+          <p:cNvSpPr>
+            <a:spLocks noGrp="1"/>
+          </p:cNvSpPr>
+          <p:nvPr>
+            <p:ph type="title"/>
+          </p:nvPr>
+        </p:nvSpPr>
+        <p:spPr>
+          <a:xfrm>
+            <a:off x="838200" y="853333"/>
+            <a:ext cx="4844143" cy="2792412"/>
+          </a:xfrm>
+        </p:spPr>
+        <p:txBody>
+          <a:bodyPr anchor="t">
+            <a:normAutofit/>
+          </a:bodyPr>
+          <a:lstStyle/>
+          <a:p>
+            <a:r>
+              <a:rPr lang="en-GB" dirty="0"/>
+              <a:t>K-Nearest Neighbours Classifier Confusion Matrix</a:t>
+            </a:r>
+          </a:p>
+        </p:txBody>
+      </p:sp>
+      <p:sp>
+        <p:nvSpPr>
+          <p:cNvPr id="15" name="Content Placeholder 14">
+            <a:extLst>
+              <a:ext uri="{FF2B5EF4-FFF2-40B4-BE49-F238E27FC236}">
+                <a16:creationId xmlns:a16="http://schemas.microsoft.com/office/drawing/2014/main" id="{975B554C-8B27-27B6-5609-89878B3CCECA}"/>
+              </a:ext>
+            </a:extLst>
+          </p:cNvPr>
+          <p:cNvSpPr>
+            <a:spLocks noGrp="1"/>
+          </p:cNvSpPr>
+          <p:nvPr>
+            <p:ph sz="quarter" idx="13"/>
+          </p:nvPr>
+        </p:nvSpPr>
+        <p:spPr>
+          <a:xfrm>
+            <a:off x="837521" y="3429000"/>
+            <a:ext cx="4844142" cy="2574925"/>
+          </a:xfrm>
+        </p:spPr>
+        <p:txBody>
+          <a:bodyPr>
+            <a:normAutofit fontScale="77500" lnSpcReduction="20000"/>
+          </a:bodyPr>
+          <a:lstStyle/>
+          <a:p>
+            <a:pPr marL="0" indent="0">
+              <a:lnSpc>
+                <a:spcPct val="120000"/>
+              </a:lnSpc>
+              <a:buNone/>
+            </a:pPr>
+            <a:r>
+              <a:rPr lang="en-GB" dirty="0"/>
+              <a:t>The KNN model achieved 0.81 (81%) accuracy but appeared to have the same difficulty predicting class 1 (smoker) correctly as the previous two models. This model predicted far fewer false positives (28) than true negatives (1118), but also predicted far more false negatives (249) than true positives (28) than the other two models.</a:t>
+            </a:r>
+            <a:endParaRPr lang="en-GB" sz="1700" dirty="0"/>
+          </a:p>
+        </p:txBody>
+      </p:sp>
+      <p:pic>
+        <p:nvPicPr>
+          <p:cNvPr id="12" name="Picture Placeholder 11">
+            <a:extLst>
+              <a:ext uri="{FF2B5EF4-FFF2-40B4-BE49-F238E27FC236}">
+                <a16:creationId xmlns:a16="http://schemas.microsoft.com/office/drawing/2014/main" id="{7CBC8138-F1FC-DE53-3ED8-740068553FBD}"/>
+              </a:ext>
+            </a:extLst>
+          </p:cNvPr>
+          <p:cNvPicPr>
+            <a:picLocks noGrp="1" noChangeAspect="1"/>
+          </p:cNvPicPr>
+          <p:nvPr>
+            <p:ph sz="quarter" idx="16"/>
+          </p:nvPr>
+        </p:nvPicPr>
+        <p:blipFill>
+          <a:blip r:embed="rId2"/>
+          <a:srcRect/>
+          <a:stretch/>
+        </p:blipFill>
+        <p:spPr>
+          <a:xfrm>
+            <a:off x="6509658" y="1610605"/>
+            <a:ext cx="4844142" cy="3633106"/>
+          </a:xfrm>
+          <a:custGeom>
+            <a:avLst/>
+            <a:gdLst>
+              <a:gd name="connsiteX0" fmla="*/ 5070020 w 5070020"/>
+              <a:gd name="connsiteY0" fmla="*/ 0 h 5486400"/>
+              <a:gd name="connsiteX1" fmla="*/ 5070020 w 5070020"/>
+              <a:gd name="connsiteY1" fmla="*/ 5486400 h 5486400"/>
+              <a:gd name="connsiteX2" fmla="*/ 0 w 5070020"/>
+              <a:gd name="connsiteY2" fmla="*/ 5486399 h 5486400"/>
+              <a:gd name="connsiteX3" fmla="*/ 0 w 5070020"/>
+              <a:gd name="connsiteY3" fmla="*/ 579095 h 5486400"/>
+              <a:gd name="connsiteX4" fmla="*/ 268 w 5070020"/>
+              <a:gd name="connsiteY4" fmla="*/ 579362 h 5486400"/>
+              <a:gd name="connsiteX5" fmla="*/ 582189 w 5070020"/>
+              <a:gd name="connsiteY5" fmla="*/ 266 h 5486400"/>
+              <a:gd name="connsiteX6" fmla="*/ 581922 w 5070020"/>
+              <a:gd name="connsiteY6" fmla="*/ 1 h 5486400"/>
+            </a:gdLst>
+            <a:ahLst/>
+            <a:cxnLst>
+              <a:cxn ang="0">
+                <a:pos x="connsiteX0" y="connsiteY0"/>
+              </a:cxn>
+              <a:cxn ang="0">
+                <a:pos x="connsiteX1" y="connsiteY1"/>
+              </a:cxn>
+              <a:cxn ang="0">
+                <a:pos x="connsiteX2" y="connsiteY2"/>
+              </a:cxn>
+              <a:cxn ang="0">
+                <a:pos x="connsiteX3" y="connsiteY3"/>
+              </a:cxn>
+              <a:cxn ang="0">
+                <a:pos x="connsiteX4" y="connsiteY4"/>
+              </a:cxn>
+              <a:cxn ang="0">
+                <a:pos x="connsiteX5" y="connsiteY5"/>
+              </a:cxn>
+              <a:cxn ang="0">
+                <a:pos x="connsiteX6" y="connsiteY6"/>
+              </a:cxn>
+            </a:cxnLst>
+            <a:rect l="l" t="t" r="r" b="b"/>
+            <a:pathLst>
+              <a:path w="5070020" h="5486400">
+                <a:moveTo>
+                  <a:pt x="5070020" y="0"/>
+                </a:moveTo>
+                <a:lnTo>
+                  <a:pt x="5070020" y="5486400"/>
+                </a:lnTo>
+                <a:lnTo>
+                  <a:pt x="0" y="5486399"/>
+                </a:lnTo>
+                <a:lnTo>
+                  <a:pt x="0" y="579095"/>
+                </a:lnTo>
+                <a:lnTo>
+                  <a:pt x="268" y="579362"/>
+                </a:lnTo>
+                <a:lnTo>
+                  <a:pt x="582189" y="266"/>
+                </a:lnTo>
+                <a:lnTo>
+                  <a:pt x="581922" y="1"/>
+                </a:lnTo>
+                <a:close/>
+              </a:path>
+            </a:pathLst>
+          </a:custGeom>
+          <a:noFill/>
+        </p:spPr>
+      </p:pic>
+    </p:spTree>
+    <p:extLst>
+      <p:ext uri="{BB962C8B-B14F-4D97-AF65-F5344CB8AC3E}">
+        <p14:creationId xmlns:p14="http://schemas.microsoft.com/office/powerpoint/2010/main" val="4107183884"/>
+      </p:ext>
+    </p:extLst>
+  </p:cSld>
+  <p:clrMapOvr>
+    <a:masterClrMapping/>
+  </p:clrMapOvr>
+</p:sld>
+</file>
+
+<file path=ppt/slides/slide29.xml><?xml version="1.0" encoding="utf-8"?>
+<p:sld xmlns:a="http://schemas.openxmlformats.org/drawingml/2006/main" xmlns:r="http://schemas.openxmlformats.org/officeDocument/2006/relationships" xmlns:p="http://schemas.openxmlformats.org/presentationml/2006/main">
+  <p:cSld>
     <p:spTree>
       <p:nvGrpSpPr>
         <p:cNvPr id="1" name=""/>
@@ -31257,125 +34932,7 @@
           <p:cNvPr id="2" name="Title 1">
             <a:extLst>
               <a:ext uri="{FF2B5EF4-FFF2-40B4-BE49-F238E27FC236}">
-                <a16:creationId xmlns:a16="http://schemas.microsoft.com/office/drawing/2014/main" id="{954ABE40-AA00-F366-A36A-B3F1AADBF025}"/>
-              </a:ext>
-            </a:extLst>
-          </p:cNvPr>
-          <p:cNvSpPr>
-            <a:spLocks noGrp="1"/>
-          </p:cNvSpPr>
-          <p:nvPr>
-            <p:ph type="title"/>
-          </p:nvPr>
-        </p:nvSpPr>
-        <p:spPr>
-          <a:xfrm>
-            <a:off x="838200" y="853334"/>
-            <a:ext cx="4844142" cy="3939646"/>
-          </a:xfrm>
-          <a:noFill/>
-        </p:spPr>
-        <p:txBody>
-          <a:bodyPr>
-            <a:noAutofit/>
-          </a:bodyPr>
-          <a:lstStyle/>
-          <a:p>
-            <a:r>
-              <a:rPr lang="en-US" dirty="0"/>
-              <a:t>Conclusion</a:t>
-            </a:r>
-          </a:p>
-        </p:txBody>
-      </p:sp>
-      <p:pic>
-        <p:nvPicPr>
-          <p:cNvPr id="10" name="Online Image Placeholder 7" descr="Rows of seated people in business attire, listening to work event">
-            <a:extLst>
-              <a:ext uri="{FF2B5EF4-FFF2-40B4-BE49-F238E27FC236}">
-                <a16:creationId xmlns:a16="http://schemas.microsoft.com/office/drawing/2014/main" id="{A615D31F-0489-0629-D024-042CFF56905C}"/>
-              </a:ext>
-            </a:extLst>
-          </p:cNvPr>
-          <p:cNvPicPr>
-            <a:picLocks noGrp="1" noChangeAspect="1"/>
-          </p:cNvPicPr>
-          <p:nvPr>
-            <p:ph type="pic" sz="quarter" idx="11"/>
-          </p:nvPr>
-        </p:nvPicPr>
-        <p:blipFill rotWithShape="1">
-          <a:blip r:embed="rId2" cstate="print">
-            <a:duotone>
-              <a:prstClr val="black"/>
-              <a:schemeClr val="accent3">
-                <a:tint val="45000"/>
-                <a:satMod val="400000"/>
-              </a:schemeClr>
-            </a:duotone>
-            <a:extLst>
-              <a:ext uri="{28A0092B-C50C-407E-A947-70E740481C1C}">
-                <a14:useLocalDpi xmlns:a14="http://schemas.microsoft.com/office/drawing/2010/main"/>
-              </a:ext>
-            </a:extLst>
-          </a:blip>
-          <a:srcRect/>
-          <a:stretch/>
-        </p:blipFill>
-        <p:spPr>
-          <a:xfrm>
-            <a:off x="6428012" y="685800"/>
-            <a:ext cx="5070020" cy="5486400"/>
-          </a:xfrm>
-        </p:spPr>
-      </p:pic>
-    </p:spTree>
-    <p:extLst>
-      <p:ext uri="{BB962C8B-B14F-4D97-AF65-F5344CB8AC3E}">
-        <p14:creationId xmlns:p14="http://schemas.microsoft.com/office/powerpoint/2010/main" val="1008037533"/>
-      </p:ext>
-    </p:extLst>
-  </p:cSld>
-  <p:clrMapOvr>
-    <a:masterClrMapping/>
-  </p:clrMapOvr>
-</p:sld>
-</file>
-
-<file path=ppt/slides/slide25.xml><?xml version="1.0" encoding="utf-8"?>
-<p:sld xmlns:a="http://schemas.openxmlformats.org/drawingml/2006/main" xmlns:r="http://schemas.openxmlformats.org/officeDocument/2006/relationships" xmlns:p="http://schemas.openxmlformats.org/presentationml/2006/main">
-  <p:cSld>
-    <p:bg>
-      <p:bgPr>
-        <a:solidFill>
-          <a:schemeClr val="accent1">
-            <a:lumMod val="20000"/>
-            <a:lumOff val="80000"/>
-          </a:schemeClr>
-        </a:solidFill>
-        <a:effectLst/>
-      </p:bgPr>
-    </p:bg>
-    <p:spTree>
-      <p:nvGrpSpPr>
-        <p:cNvPr id="1" name=""/>
-        <p:cNvGrpSpPr/>
-        <p:nvPr/>
-      </p:nvGrpSpPr>
-      <p:grpSpPr>
-        <a:xfrm>
-          <a:off x="0" y="0"/>
-          <a:ext cx="0" cy="0"/>
-          <a:chOff x="0" y="0"/>
-          <a:chExt cx="0" cy="0"/>
-        </a:xfrm>
-      </p:grpSpPr>
-      <p:sp>
-        <p:nvSpPr>
-          <p:cNvPr id="2" name="Title 1">
-            <a:extLst>
-              <a:ext uri="{FF2B5EF4-FFF2-40B4-BE49-F238E27FC236}">
-                <a16:creationId xmlns:a16="http://schemas.microsoft.com/office/drawing/2014/main" id="{314C27C8-165C-5513-DB4B-9D840097C545}"/>
+                <a16:creationId xmlns:a16="http://schemas.microsoft.com/office/drawing/2014/main" id="{0D685547-9107-F195-82DC-464CBC3A5C67}"/>
               </a:ext>
             </a:extLst>
           </p:cNvPr>
@@ -31389,26 +34946,18 @@
         <p:spPr>
           <a:xfrm>
             <a:off x="838200" y="853333"/>
-            <a:ext cx="4844143" cy="2792412"/>
+            <a:ext cx="4844143" cy="5151334"/>
           </a:xfrm>
-          <a:noFill/>
         </p:spPr>
         <p:txBody>
-          <a:bodyPr anchor="t">
-            <a:noAutofit/>
+          <a:bodyPr anchor="ctr">
+            <a:normAutofit/>
           </a:bodyPr>
           <a:lstStyle/>
           <a:p>
             <a:r>
-              <a:rPr lang="en-US" dirty="0"/>
-              <a:t>Marketing </a:t>
-            </a:r>
-            <a:br>
-              <a:rPr lang="en-US" dirty="0"/>
-            </a:br>
-            <a:r>
-              <a:rPr lang="en-US" dirty="0"/>
-              <a:t>strategies</a:t>
+              <a:rPr lang="en-GB" dirty="0"/>
+              <a:t>Evaluation Summary</a:t>
             </a:r>
           </a:p>
         </p:txBody>
@@ -31418,7 +34967,7 @@
           <p:cNvPr id="3" name="Content Placeholder 2">
             <a:extLst>
               <a:ext uri="{FF2B5EF4-FFF2-40B4-BE49-F238E27FC236}">
-                <a16:creationId xmlns:a16="http://schemas.microsoft.com/office/drawing/2014/main" id="{FACE640F-7F5A-BDB7-205D-765FA80B6796}"/>
+                <a16:creationId xmlns:a16="http://schemas.microsoft.com/office/drawing/2014/main" id="{72A634FE-5870-F0B2-02F3-BD5F3981D112}"/>
               </a:ext>
             </a:extLst>
           </p:cNvPr>
@@ -31426,238 +34975,97 @@
             <a:spLocks noGrp="1"/>
           </p:cNvSpPr>
           <p:nvPr>
-            <p:ph sz="half" idx="2"/>
+            <p:ph idx="1"/>
+            <p:extLst>
+              <p:ext uri="{E7BDC344-281C-4309-B0C6-D0EE65EED2A8}">
+                <p202:designPr xmlns:p202="http://schemas.microsoft.com/office/powerpoint/2020/02/main">
+                  <p202:designTagLst>
+                    <p202:designTag name="ARCH:1:VSVAR" val="TitledTextBox"/>
+                    <p202:designTag name="ARCH:1:CLS" val="InformationBlock"/>
+                  </p202:designTagLst>
+                </p202:designPr>
+              </p:ext>
+            </p:extLst>
           </p:nvPr>
         </p:nvSpPr>
         <p:spPr>
           <a:xfrm>
-            <a:off x="838200" y="3813682"/>
-            <a:ext cx="4898571" cy="2188317"/>
+            <a:off x="6455228" y="853333"/>
+            <a:ext cx="4997631" cy="5151334"/>
           </a:xfrm>
-          <a:noFill/>
         </p:spPr>
         <p:txBody>
-          <a:bodyPr vert="horz" lIns="91440" tIns="45720" rIns="91440" bIns="45720" rtlCol="0" anchor="b">
+          <a:bodyPr>
             <a:normAutofit/>
           </a:bodyPr>
           <a:lstStyle/>
           <a:p>
+            <a:pPr marL="0" lvl="0" indent="0">
+              <a:spcBef>
+                <a:spcPts val="2500"/>
+              </a:spcBef>
+              <a:buFont typeface="Arial" panose="020B0604020202020204" pitchFamily="34" charset="0"/>
+              <a:buNone/>
+            </a:pPr>
             <a:r>
-              <a:rPr lang="en-US"/>
-              <a:t>Implement personalized engagement strategies. Tailor campaigns to resonate with specific demographics, fostering a sense of relevance and connection. Collaborate with influencers and thought leaders to amplify our brand message.</a:t>
-            </a:r>
-            <a:endParaRPr lang="en-US" dirty="0"/>
-          </a:p>
-        </p:txBody>
-      </p:sp>
-      <p:pic>
-        <p:nvPicPr>
-          <p:cNvPr id="13" name="Online Image Placeholder 9" descr="Women in business meeting">
-            <a:extLst>
-              <a:ext uri="{FF2B5EF4-FFF2-40B4-BE49-F238E27FC236}">
-                <a16:creationId xmlns:a16="http://schemas.microsoft.com/office/drawing/2014/main" id="{ECD12A93-CCA8-9CCE-6BD6-89C28F0822D7}"/>
-              </a:ext>
-            </a:extLst>
-          </p:cNvPr>
-          <p:cNvPicPr>
-            <a:picLocks noGrp="1" noChangeAspect="1"/>
-          </p:cNvPicPr>
-          <p:nvPr>
-            <p:ph type="pic" sz="quarter" idx="11"/>
-          </p:nvPr>
-        </p:nvPicPr>
-        <p:blipFill>
-          <a:blip r:embed="rId2" cstate="print">
-            <a:duotone>
-              <a:schemeClr val="accent3">
-                <a:shade val="45000"/>
-                <a:satMod val="135000"/>
-              </a:schemeClr>
-              <a:prstClr val="white"/>
-            </a:duotone>
-            <a:extLst>
-              <a:ext uri="{28A0092B-C50C-407E-A947-70E740481C1C}">
-                <a14:useLocalDpi xmlns:a14="http://schemas.microsoft.com/office/drawing/2010/main"/>
-              </a:ext>
-            </a:extLst>
-          </a:blip>
-          <a:srcRect/>
-          <a:stretch/>
-        </p:blipFill>
-        <p:spPr>
-          <a:xfrm>
-            <a:off x="6428012" y="685800"/>
-            <a:ext cx="5070020" cy="5486400"/>
-          </a:xfrm>
-        </p:spPr>
-      </p:pic>
-    </p:spTree>
-    <p:extLst>
-      <p:ext uri="{BB962C8B-B14F-4D97-AF65-F5344CB8AC3E}">
-        <p14:creationId xmlns:p14="http://schemas.microsoft.com/office/powerpoint/2010/main" val="729609147"/>
-      </p:ext>
-    </p:extLst>
-  </p:cSld>
-  <p:clrMapOvr>
-    <a:masterClrMapping/>
-  </p:clrMapOvr>
-</p:sld>
-</file>
-
-<file path=ppt/slides/slide26.xml><?xml version="1.0" encoding="utf-8"?>
-<p:sld xmlns:a="http://schemas.openxmlformats.org/drawingml/2006/main" xmlns:r="http://schemas.openxmlformats.org/officeDocument/2006/relationships" xmlns:p="http://schemas.openxmlformats.org/presentationml/2006/main">
-  <p:cSld>
-    <p:bg>
-      <p:bgPr>
-        <a:solidFill>
-          <a:schemeClr val="accent1">
-            <a:lumMod val="20000"/>
-            <a:lumOff val="80000"/>
-          </a:schemeClr>
-        </a:solidFill>
-        <a:effectLst/>
-      </p:bgPr>
-    </p:bg>
-    <p:spTree>
-      <p:nvGrpSpPr>
-        <p:cNvPr id="1" name=""/>
-        <p:cNvGrpSpPr/>
-        <p:nvPr/>
-      </p:nvGrpSpPr>
-      <p:grpSpPr>
-        <a:xfrm>
-          <a:off x="0" y="0"/>
-          <a:ext cx="0" cy="0"/>
-          <a:chOff x="0" y="0"/>
-          <a:chExt cx="0" cy="0"/>
-        </a:xfrm>
-      </p:grpSpPr>
-      <p:sp>
-        <p:nvSpPr>
-          <p:cNvPr id="2" name="Title 1">
-            <a:extLst>
-              <a:ext uri="{FF2B5EF4-FFF2-40B4-BE49-F238E27FC236}">
-                <a16:creationId xmlns:a16="http://schemas.microsoft.com/office/drawing/2014/main" id="{28BAC361-0D7A-DC05-86B5-6DD77D322F5B}"/>
-              </a:ext>
-            </a:extLst>
-          </p:cNvPr>
-          <p:cNvSpPr>
-            <a:spLocks noGrp="1"/>
-          </p:cNvSpPr>
-          <p:nvPr>
-            <p:ph type="title"/>
-          </p:nvPr>
-        </p:nvSpPr>
-        <p:spPr>
-          <a:xfrm>
-            <a:off x="838200" y="853333"/>
-            <a:ext cx="4844143" cy="2792412"/>
-          </a:xfrm>
-          <a:noFill/>
-        </p:spPr>
-        <p:txBody>
-          <a:bodyPr anchor="t">
-            <a:noAutofit/>
-          </a:bodyPr>
-          <a:lstStyle/>
-          <a:p>
-            <a:r>
-              <a:rPr lang="en-US" dirty="0"/>
-              <a:t>Financial </a:t>
-            </a:r>
-            <a:br>
-              <a:rPr lang="en-US" dirty="0"/>
-            </a:br>
-            <a:r>
-              <a:rPr lang="en-US" dirty="0"/>
-              <a:t>overview</a:t>
-            </a:r>
-          </a:p>
-        </p:txBody>
-      </p:sp>
-      <p:sp>
-        <p:nvSpPr>
-          <p:cNvPr id="4" name="Content Placeholder 3">
-            <a:extLst>
-              <a:ext uri="{FF2B5EF4-FFF2-40B4-BE49-F238E27FC236}">
-                <a16:creationId xmlns:a16="http://schemas.microsoft.com/office/drawing/2014/main" id="{D97126AE-AE4A-97A5-21F5-E5ACF7E0605F}"/>
-              </a:ext>
-            </a:extLst>
-          </p:cNvPr>
-          <p:cNvSpPr>
-            <a:spLocks noGrp="1"/>
-          </p:cNvSpPr>
-          <p:nvPr>
-            <p:ph sz="half" idx="2"/>
-          </p:nvPr>
-        </p:nvSpPr>
-        <p:spPr>
-          <a:xfrm>
-            <a:off x="838200" y="3813682"/>
-            <a:ext cx="4898571" cy="2188317"/>
-          </a:xfrm>
-          <a:noFill/>
-        </p:spPr>
-        <p:txBody>
-          <a:bodyPr vert="horz" lIns="91440" tIns="45720" rIns="91440" bIns="45720" rtlCol="0" anchor="t">
-            <a:normAutofit lnSpcReduction="10000"/>
-          </a:bodyPr>
-          <a:lstStyle/>
-          <a:p>
-            <a:r>
-              <a:rPr lang="en-US" dirty="0"/>
-              <a:t>This underscores our commitment to financial stability, positioning us for sustained growth. </a:t>
+              <a:rPr lang="en-GB" sz="1400" b="1" dirty="0"/>
+              <a:t>Prediction Accuracy</a:t>
             </a:r>
           </a:p>
           <a:p>
+            <a:pPr marL="0" lvl="1" indent="0">
+              <a:buFont typeface="Arial" panose="020B0604020202020204" pitchFamily="34" charset="0"/>
+              <a:buNone/>
+            </a:pPr>
             <a:r>
-              <a:rPr lang="en-US" dirty="0"/>
-              <a:t>Key indicators show consistent revenue growth over the past quarter, attributed to strategic cost management and successful marketing.</a:t>
+              <a:rPr lang="en-GB" sz="1400" dirty="0"/>
+              <a:t>The three models predicted class 0 (non-smoker) very well but struggled with class 1 (smoker). We saw that the overall accuracy was high, but this was mostly due to stronger performance on class 0.​</a:t>
             </a:r>
           </a:p>
           <a:p>
-            <a:endParaRPr lang="en-US" dirty="0"/>
-          </a:p>
-        </p:txBody>
-      </p:sp>
-      <p:sp>
-        <p:nvSpPr>
-          <p:cNvPr id="3" name="Content Placeholder 2">
-            <a:extLst>
-              <a:ext uri="{FF2B5EF4-FFF2-40B4-BE49-F238E27FC236}">
-                <a16:creationId xmlns:a16="http://schemas.microsoft.com/office/drawing/2014/main" id="{1BE98EFF-197D-3136-70B9-7BBD30A48931}"/>
-              </a:ext>
-            </a:extLst>
-          </p:cNvPr>
-          <p:cNvSpPr>
-            <a:spLocks noGrp="1"/>
-          </p:cNvSpPr>
-          <p:nvPr>
-            <p:ph sz="half" idx="13"/>
-          </p:nvPr>
-        </p:nvSpPr>
-        <p:spPr>
-          <a:xfrm>
-            <a:off x="6455228" y="853334"/>
-            <a:ext cx="4898571" cy="5151334"/>
-          </a:xfrm>
-          <a:noFill/>
-        </p:spPr>
-        <p:txBody>
-          <a:bodyPr vert="horz" lIns="91440" tIns="45720" rIns="91440" bIns="45720" rtlCol="0" anchor="t">
-            <a:normAutofit/>
-          </a:bodyPr>
-          <a:lstStyle/>
-          <a:p>
+            <a:pPr marL="0" lvl="0" indent="0">
+              <a:spcBef>
+                <a:spcPts val="2500"/>
+              </a:spcBef>
+              <a:buFont typeface="Arial" panose="020B0604020202020204" pitchFamily="34" charset="0"/>
+              <a:buNone/>
+            </a:pPr>
             <a:r>
-              <a:rPr lang="en-US" dirty="0"/>
-              <a:t>Operating margins have improved, signaling operational efficiency, while strengthening our reserves.</a:t>
+              <a:rPr lang="en-GB" sz="1400" b="1" dirty="0"/>
+              <a:t>Model Recall</a:t>
             </a:r>
           </a:p>
           <a:p>
+            <a:pPr marL="0" lvl="1" indent="0">
+              <a:buFont typeface="Arial" panose="020B0604020202020204" pitchFamily="34" charset="0"/>
+              <a:buNone/>
+            </a:pPr>
             <a:r>
-              <a:rPr lang="en-US" dirty="0"/>
-              <a:t>This underscores our commitment to financial stability, positioning us for sustained growth. </a:t>
+              <a:rPr lang="en-GB" sz="1400" dirty="0"/>
+              <a:t>The low recall for class 1 meant we missed many actual class 1 cases. This showed the models were likely biased towards the majority class, suggesting that our dataset’s features, or at least those we selected, were not predictive of smoker status.​</a:t>
+            </a:r>
+          </a:p>
+          <a:p>
+            <a:pPr marL="0" lvl="0" indent="0">
+              <a:spcBef>
+                <a:spcPts val="2500"/>
+              </a:spcBef>
+              <a:buFont typeface="Arial" panose="020B0604020202020204" pitchFamily="34" charset="0"/>
+              <a:buNone/>
+            </a:pPr>
+            <a:r>
+              <a:rPr lang="en-GB" sz="1400" b="1" dirty="0"/>
+              <a:t>Best-performing Model</a:t>
+            </a:r>
+          </a:p>
+          <a:p>
+            <a:pPr marL="0" lvl="1" indent="0">
+              <a:buFont typeface="Arial" panose="020B0604020202020204" pitchFamily="34" charset="0"/>
+              <a:buNone/>
+            </a:pPr>
+            <a:r>
+              <a:rPr lang="en-GB" sz="1400" dirty="0"/>
+              <a:t>Out of the three models, the logistic regression model had the fewest false positives, as shown by its higher precision for class 1 (0.56). This meant it was less likely to incorrectly predict someone as a smoker when they were not, making it the best performing model out of the three we built.</a:t>
             </a:r>
           </a:p>
         </p:txBody>
@@ -31665,1363 +35073,7 @@
     </p:spTree>
     <p:extLst>
       <p:ext uri="{BB962C8B-B14F-4D97-AF65-F5344CB8AC3E}">
-        <p14:creationId xmlns:p14="http://schemas.microsoft.com/office/powerpoint/2010/main" val="1210802199"/>
-      </p:ext>
-    </p:extLst>
-  </p:cSld>
-  <p:clrMapOvr>
-    <a:masterClrMapping/>
-  </p:clrMapOvr>
-</p:sld>
-</file>
-
-<file path=ppt/slides/slide27.xml><?xml version="1.0" encoding="utf-8"?>
-<p:sld xmlns:a="http://schemas.openxmlformats.org/drawingml/2006/main" xmlns:r="http://schemas.openxmlformats.org/officeDocument/2006/relationships" xmlns:p="http://schemas.openxmlformats.org/presentationml/2006/main">
-  <p:cSld>
-    <p:bg>
-      <p:bgPr>
-        <a:solidFill>
-          <a:schemeClr val="accent1">
-            <a:lumMod val="20000"/>
-            <a:lumOff val="80000"/>
-          </a:schemeClr>
-        </a:solidFill>
-        <a:effectLst/>
-      </p:bgPr>
-    </p:bg>
-    <p:spTree>
-      <p:nvGrpSpPr>
-        <p:cNvPr id="1" name=""/>
-        <p:cNvGrpSpPr/>
-        <p:nvPr/>
-      </p:nvGrpSpPr>
-      <p:grpSpPr>
-        <a:xfrm>
-          <a:off x="0" y="0"/>
-          <a:ext cx="0" cy="0"/>
-          <a:chOff x="0" y="0"/>
-          <a:chExt cx="0" cy="0"/>
-        </a:xfrm>
-      </p:grpSpPr>
-      <p:sp>
-        <p:nvSpPr>
-          <p:cNvPr id="2" name="Title 1">
-            <a:extLst>
-              <a:ext uri="{FF2B5EF4-FFF2-40B4-BE49-F238E27FC236}">
-                <a16:creationId xmlns:a16="http://schemas.microsoft.com/office/drawing/2014/main" id="{B7545968-70F7-0180-6448-3547E442EF4A}"/>
-              </a:ext>
-            </a:extLst>
-          </p:cNvPr>
-          <p:cNvSpPr>
-            <a:spLocks noGrp="1"/>
-          </p:cNvSpPr>
-          <p:nvPr>
-            <p:ph type="title"/>
-          </p:nvPr>
-        </p:nvSpPr>
-        <p:spPr>
-          <a:xfrm>
-            <a:off x="838200" y="853333"/>
-            <a:ext cx="4844143" cy="2792412"/>
-          </a:xfrm>
-          <a:noFill/>
-        </p:spPr>
-        <p:txBody>
-          <a:bodyPr anchor="t">
-            <a:noAutofit/>
-          </a:bodyPr>
-          <a:lstStyle/>
-          <a:p>
-            <a:r>
-              <a:rPr lang="en-US" dirty="0"/>
-              <a:t>Quarterly </a:t>
-            </a:r>
-            <a:br>
-              <a:rPr lang="en-US" dirty="0"/>
-            </a:br>
-            <a:r>
-              <a:rPr lang="en-US" dirty="0"/>
-              <a:t>targets</a:t>
-            </a:r>
-          </a:p>
-        </p:txBody>
-      </p:sp>
-      <p:sp>
-        <p:nvSpPr>
-          <p:cNvPr id="8" name="Content Placeholder 7">
-            <a:extLst>
-              <a:ext uri="{FF2B5EF4-FFF2-40B4-BE49-F238E27FC236}">
-                <a16:creationId xmlns:a16="http://schemas.microsoft.com/office/drawing/2014/main" id="{215CE58D-2739-522B-7C3A-6A7C985360C0}"/>
-              </a:ext>
-            </a:extLst>
-          </p:cNvPr>
-          <p:cNvSpPr>
-            <a:spLocks noGrp="1"/>
-          </p:cNvSpPr>
-          <p:nvPr>
-            <p:ph sz="quarter" idx="13"/>
-          </p:nvPr>
-        </p:nvSpPr>
-        <p:spPr>
-          <a:xfrm>
-            <a:off x="837521" y="3880757"/>
-            <a:ext cx="4844142" cy="2123168"/>
-          </a:xfrm>
-          <a:noFill/>
-        </p:spPr>
-        <p:txBody>
-          <a:bodyPr vert="horz" lIns="91440" tIns="45720" rIns="91440" bIns="45720" rtlCol="0" anchor="t">
-            <a:normAutofit/>
-          </a:bodyPr>
-          <a:lstStyle/>
-          <a:p>
-            <a:r>
-              <a:rPr lang="en-US" dirty="0"/>
-              <a:t>Market expansion</a:t>
-            </a:r>
-          </a:p>
-          <a:p>
-            <a:r>
-              <a:rPr lang="en-US" dirty="0"/>
-              <a:t>Product innovation</a:t>
-            </a:r>
-          </a:p>
-          <a:p>
-            <a:r>
-              <a:rPr lang="en-US" dirty="0"/>
-              <a:t>Customer retention</a:t>
-            </a:r>
-          </a:p>
-          <a:p>
-            <a:r>
-              <a:rPr lang="en-US" dirty="0"/>
-              <a:t>Operational efficiency</a:t>
-            </a:r>
-          </a:p>
-        </p:txBody>
-      </p:sp>
-      <p:graphicFrame>
-        <p:nvGraphicFramePr>
-          <p:cNvPr id="16" name="Table Placeholder 2">
-            <a:extLst>
-              <a:ext uri="{FF2B5EF4-FFF2-40B4-BE49-F238E27FC236}">
-                <a16:creationId xmlns:a16="http://schemas.microsoft.com/office/drawing/2014/main" id="{1469BF76-5E71-DF2A-4804-7A26E9D95C80}"/>
-              </a:ext>
-            </a:extLst>
-          </p:cNvPr>
-          <p:cNvGraphicFramePr>
-            <a:graphicFrameLocks noGrp="1"/>
-          </p:cNvGraphicFramePr>
-          <p:nvPr>
-            <p:ph sz="quarter" idx="16"/>
-            <p:extLst>
-              <p:ext uri="{D42A27DB-BD31-4B8C-83A1-F6EECF244321}">
-                <p14:modId xmlns:p14="http://schemas.microsoft.com/office/powerpoint/2010/main" val="323030375"/>
-              </p:ext>
-            </p:extLst>
-          </p:nvPr>
-        </p:nvGraphicFramePr>
-        <p:xfrm>
-          <a:off x="6510338" y="850900"/>
-          <a:ext cx="4843460" cy="5149850"/>
-        </p:xfrm>
-        <a:graphic>
-          <a:graphicData uri="http://schemas.openxmlformats.org/drawingml/2006/table">
-            <a:tbl>
-              <a:tblPr firstRow="1" bandRow="1">
-                <a:tableStyleId>{8799B23B-EC83-4686-B30A-512413B5E67A}</a:tableStyleId>
-              </a:tblPr>
-              <a:tblGrid>
-                <a:gridCol w="1210865">
-                  <a:extLst>
-                    <a:ext uri="{9D8B030D-6E8A-4147-A177-3AD203B41FA5}">
-                      <a16:colId xmlns:a16="http://schemas.microsoft.com/office/drawing/2014/main" val="30750867"/>
-                    </a:ext>
-                  </a:extLst>
-                </a:gridCol>
-                <a:gridCol w="1210865">
-                  <a:extLst>
-                    <a:ext uri="{9D8B030D-6E8A-4147-A177-3AD203B41FA5}">
-                      <a16:colId xmlns:a16="http://schemas.microsoft.com/office/drawing/2014/main" val="1038941322"/>
-                    </a:ext>
-                  </a:extLst>
-                </a:gridCol>
-                <a:gridCol w="1210865">
-                  <a:extLst>
-                    <a:ext uri="{9D8B030D-6E8A-4147-A177-3AD203B41FA5}">
-                      <a16:colId xmlns:a16="http://schemas.microsoft.com/office/drawing/2014/main" val="529645500"/>
-                    </a:ext>
-                  </a:extLst>
-                </a:gridCol>
-                <a:gridCol w="1210865">
-                  <a:extLst>
-                    <a:ext uri="{9D8B030D-6E8A-4147-A177-3AD203B41FA5}">
-                      <a16:colId xmlns:a16="http://schemas.microsoft.com/office/drawing/2014/main" val="3469610457"/>
-                    </a:ext>
-                  </a:extLst>
-                </a:gridCol>
-              </a:tblGrid>
-              <a:tr h="1029970">
-                <a:tc>
-                  <a:txBody>
-                    <a:bodyPr/>
-                    <a:lstStyle/>
-                    <a:p>
-                      <a:pPr algn="ctr"/>
-                      <a:r>
-                        <a:rPr lang="en-US" sz="1400" dirty="0">
-                          <a:solidFill>
-                            <a:sysClr val="windowText" lastClr="000000"/>
-                          </a:solidFill>
-                          <a:latin typeface="Yu Gothic UI Semilight" panose="020B0400000000000000" pitchFamily="34" charset="-128"/>
-                        </a:rPr>
-                        <a:t>Quarter</a:t>
-                      </a:r>
-                    </a:p>
-                  </a:txBody>
-                  <a:tcPr anchor="ctr"/>
-                </a:tc>
-                <a:tc>
-                  <a:txBody>
-                    <a:bodyPr/>
-                    <a:lstStyle/>
-                    <a:p>
-                      <a:pPr algn="ctr"/>
-                      <a:r>
-                        <a:rPr lang="en-US" sz="1400" dirty="0">
-                          <a:solidFill>
-                            <a:sysClr val="windowText" lastClr="000000"/>
-                          </a:solidFill>
-                          <a:latin typeface="Yu Gothic UI Semilight" panose="020B0400000000000000" pitchFamily="34" charset="-128"/>
-                        </a:rPr>
-                        <a:t>Revenue </a:t>
-                      </a:r>
-                      <a:br>
-                        <a:rPr lang="en-US" sz="1400" dirty="0">
-                          <a:solidFill>
-                            <a:sysClr val="windowText" lastClr="000000"/>
-                          </a:solidFill>
-                          <a:latin typeface="Yu Gothic UI Semilight" panose="020B0400000000000000" pitchFamily="34" charset="-128"/>
-                        </a:rPr>
-                      </a:br>
-                      <a:r>
-                        <a:rPr lang="en-US" sz="1400" dirty="0">
-                          <a:solidFill>
-                            <a:sysClr val="windowText" lastClr="000000"/>
-                          </a:solidFill>
-                          <a:latin typeface="Yu Gothic UI Semilight" panose="020B0400000000000000" pitchFamily="34" charset="-128"/>
-                        </a:rPr>
-                        <a:t>growth (%)</a:t>
-                      </a:r>
-                    </a:p>
-                  </a:txBody>
-                  <a:tcPr anchor="ctr"/>
-                </a:tc>
-                <a:tc>
-                  <a:txBody>
-                    <a:bodyPr/>
-                    <a:lstStyle/>
-                    <a:p>
-                      <a:pPr algn="ctr"/>
-                      <a:r>
-                        <a:rPr lang="en-US" sz="1400" dirty="0">
-                          <a:solidFill>
-                            <a:sysClr val="windowText" lastClr="000000"/>
-                          </a:solidFill>
-                          <a:latin typeface="Yu Gothic UI Semilight" panose="020B0400000000000000" pitchFamily="34" charset="-128"/>
-                        </a:rPr>
-                        <a:t>Market share increase (%)</a:t>
-                      </a:r>
-                    </a:p>
-                  </a:txBody>
-                  <a:tcPr anchor="ctr"/>
-                </a:tc>
-                <a:tc>
-                  <a:txBody>
-                    <a:bodyPr/>
-                    <a:lstStyle/>
-                    <a:p>
-                      <a:pPr algn="ctr"/>
-                      <a:r>
-                        <a:rPr lang="en-US" sz="1400" dirty="0">
-                          <a:solidFill>
-                            <a:sysClr val="windowText" lastClr="000000"/>
-                          </a:solidFill>
-                          <a:latin typeface="Yu Gothic UI Semilight" panose="020B0400000000000000" pitchFamily="34" charset="-128"/>
-                        </a:rPr>
-                        <a:t>Customer acquisition</a:t>
-                      </a:r>
-                    </a:p>
-                  </a:txBody>
-                  <a:tcPr anchor="ctr"/>
-                </a:tc>
-                <a:extLst>
-                  <a:ext uri="{0D108BD9-81ED-4DB2-BD59-A6C34878D82A}">
-                    <a16:rowId xmlns:a16="http://schemas.microsoft.com/office/drawing/2014/main" val="4251432886"/>
-                  </a:ext>
-                </a:extLst>
-              </a:tr>
-              <a:tr h="1029970">
-                <a:tc>
-                  <a:txBody>
-                    <a:bodyPr/>
-                    <a:lstStyle/>
-                    <a:p>
-                      <a:pPr algn="ctr"/>
-                      <a:r>
-                        <a:rPr lang="en-US" sz="1400" dirty="0">
-                          <a:solidFill>
-                            <a:sysClr val="windowText" lastClr="000000"/>
-                          </a:solidFill>
-                          <a:latin typeface="Yu Gothic UI Semilight" panose="020B0400000000000000" pitchFamily="34" charset="-128"/>
-                        </a:rPr>
-                        <a:t>Q1</a:t>
-                      </a:r>
-                    </a:p>
-                  </a:txBody>
-                  <a:tcPr anchor="ctr"/>
-                </a:tc>
-                <a:tc>
-                  <a:txBody>
-                    <a:bodyPr/>
-                    <a:lstStyle/>
-                    <a:p>
-                      <a:pPr algn="ctr"/>
-                      <a:r>
-                        <a:rPr lang="en-US" sz="1400" dirty="0">
-                          <a:solidFill>
-                            <a:sysClr val="windowText" lastClr="000000"/>
-                          </a:solidFill>
-                          <a:latin typeface="Yu Gothic UI Semilight" panose="020B0400000000000000" pitchFamily="34" charset="-128"/>
-                        </a:rPr>
-                        <a:t>12</a:t>
-                      </a:r>
-                    </a:p>
-                  </a:txBody>
-                  <a:tcPr anchor="ctr"/>
-                </a:tc>
-                <a:tc>
-                  <a:txBody>
-                    <a:bodyPr/>
-                    <a:lstStyle/>
-                    <a:p>
-                      <a:pPr algn="ctr"/>
-                      <a:r>
-                        <a:rPr lang="en-US" sz="1400" dirty="0">
-                          <a:solidFill>
-                            <a:sysClr val="windowText" lastClr="000000"/>
-                          </a:solidFill>
-                          <a:latin typeface="Yu Gothic UI Semilight" panose="020B0400000000000000" pitchFamily="34" charset="-128"/>
-                        </a:rPr>
-                        <a:t>2</a:t>
-                      </a:r>
-                    </a:p>
-                  </a:txBody>
-                  <a:tcPr anchor="ctr"/>
-                </a:tc>
-                <a:tc>
-                  <a:txBody>
-                    <a:bodyPr/>
-                    <a:lstStyle/>
-                    <a:p>
-                      <a:pPr algn="ctr"/>
-                      <a:r>
-                        <a:rPr lang="en-US" sz="1400" dirty="0">
-                          <a:solidFill>
-                            <a:sysClr val="windowText" lastClr="000000"/>
-                          </a:solidFill>
-                          <a:latin typeface="Yu Gothic UI Semilight" panose="020B0400000000000000" pitchFamily="34" charset="-128"/>
-                        </a:rPr>
-                        <a:t>500</a:t>
-                      </a:r>
-                    </a:p>
-                  </a:txBody>
-                  <a:tcPr anchor="ctr"/>
-                </a:tc>
-                <a:extLst>
-                  <a:ext uri="{0D108BD9-81ED-4DB2-BD59-A6C34878D82A}">
-                    <a16:rowId xmlns:a16="http://schemas.microsoft.com/office/drawing/2014/main" val="360240625"/>
-                  </a:ext>
-                </a:extLst>
-              </a:tr>
-              <a:tr h="1029970">
-                <a:tc>
-                  <a:txBody>
-                    <a:bodyPr/>
-                    <a:lstStyle/>
-                    <a:p>
-                      <a:pPr algn="ctr"/>
-                      <a:r>
-                        <a:rPr lang="en-US" sz="1400" dirty="0">
-                          <a:solidFill>
-                            <a:sysClr val="windowText" lastClr="000000"/>
-                          </a:solidFill>
-                          <a:latin typeface="Yu Gothic UI Semilight" panose="020B0400000000000000" pitchFamily="34" charset="-128"/>
-                        </a:rPr>
-                        <a:t>Q2</a:t>
-                      </a:r>
-                    </a:p>
-                  </a:txBody>
-                  <a:tcPr anchor="ctr"/>
-                </a:tc>
-                <a:tc>
-                  <a:txBody>
-                    <a:bodyPr/>
-                    <a:lstStyle/>
-                    <a:p>
-                      <a:pPr algn="ctr"/>
-                      <a:r>
-                        <a:rPr lang="en-US" sz="1400" dirty="0">
-                          <a:solidFill>
-                            <a:sysClr val="windowText" lastClr="000000"/>
-                          </a:solidFill>
-                          <a:latin typeface="Yu Gothic UI Semilight" panose="020B0400000000000000" pitchFamily="34" charset="-128"/>
-                        </a:rPr>
-                        <a:t>15</a:t>
-                      </a:r>
-                    </a:p>
-                  </a:txBody>
-                  <a:tcPr anchor="ctr"/>
-                </a:tc>
-                <a:tc>
-                  <a:txBody>
-                    <a:bodyPr/>
-                    <a:lstStyle/>
-                    <a:p>
-                      <a:pPr algn="ctr"/>
-                      <a:r>
-                        <a:rPr lang="en-US" sz="1400" dirty="0">
-                          <a:solidFill>
-                            <a:sysClr val="windowText" lastClr="000000"/>
-                          </a:solidFill>
-                          <a:latin typeface="Yu Gothic UI Semilight" panose="020B0400000000000000" pitchFamily="34" charset="-128"/>
-                        </a:rPr>
-                        <a:t>3</a:t>
-                      </a:r>
-                    </a:p>
-                  </a:txBody>
-                  <a:tcPr anchor="ctr"/>
-                </a:tc>
-                <a:tc>
-                  <a:txBody>
-                    <a:bodyPr/>
-                    <a:lstStyle/>
-                    <a:p>
-                      <a:pPr algn="ctr"/>
-                      <a:r>
-                        <a:rPr lang="en-US" sz="1400" dirty="0">
-                          <a:solidFill>
-                            <a:sysClr val="windowText" lastClr="000000"/>
-                          </a:solidFill>
-                          <a:latin typeface="Yu Gothic UI Semilight" panose="020B0400000000000000" pitchFamily="34" charset="-128"/>
-                        </a:rPr>
-                        <a:t>600</a:t>
-                      </a:r>
-                    </a:p>
-                  </a:txBody>
-                  <a:tcPr anchor="ctr"/>
-                </a:tc>
-                <a:extLst>
-                  <a:ext uri="{0D108BD9-81ED-4DB2-BD59-A6C34878D82A}">
-                    <a16:rowId xmlns:a16="http://schemas.microsoft.com/office/drawing/2014/main" val="2762393470"/>
-                  </a:ext>
-                </a:extLst>
-              </a:tr>
-              <a:tr h="1029970">
-                <a:tc>
-                  <a:txBody>
-                    <a:bodyPr/>
-                    <a:lstStyle/>
-                    <a:p>
-                      <a:pPr algn="ctr"/>
-                      <a:r>
-                        <a:rPr lang="en-US" sz="1400" dirty="0">
-                          <a:solidFill>
-                            <a:sysClr val="windowText" lastClr="000000"/>
-                          </a:solidFill>
-                          <a:latin typeface="Yu Gothic UI Semilight" panose="020B0400000000000000" pitchFamily="34" charset="-128"/>
-                        </a:rPr>
-                        <a:t>Q3</a:t>
-                      </a:r>
-                    </a:p>
-                  </a:txBody>
-                  <a:tcPr anchor="ctr"/>
-                </a:tc>
-                <a:tc>
-                  <a:txBody>
-                    <a:bodyPr/>
-                    <a:lstStyle/>
-                    <a:p>
-                      <a:pPr algn="ctr"/>
-                      <a:r>
-                        <a:rPr lang="en-US" sz="1400" dirty="0">
-                          <a:solidFill>
-                            <a:sysClr val="windowText" lastClr="000000"/>
-                          </a:solidFill>
-                          <a:latin typeface="Yu Gothic UI Semilight" panose="020B0400000000000000" pitchFamily="34" charset="-128"/>
-                        </a:rPr>
-                        <a:t>18</a:t>
-                      </a:r>
-                    </a:p>
-                  </a:txBody>
-                  <a:tcPr anchor="ctr"/>
-                </a:tc>
-                <a:tc>
-                  <a:txBody>
-                    <a:bodyPr/>
-                    <a:lstStyle/>
-                    <a:p>
-                      <a:pPr algn="ctr"/>
-                      <a:r>
-                        <a:rPr lang="en-US" sz="1400" dirty="0">
-                          <a:solidFill>
-                            <a:sysClr val="windowText" lastClr="000000"/>
-                          </a:solidFill>
-                          <a:latin typeface="Yu Gothic UI Semilight" panose="020B0400000000000000" pitchFamily="34" charset="-128"/>
-                        </a:rPr>
-                        <a:t>4</a:t>
-                      </a:r>
-                    </a:p>
-                  </a:txBody>
-                  <a:tcPr anchor="ctr"/>
-                </a:tc>
-                <a:tc>
-                  <a:txBody>
-                    <a:bodyPr/>
-                    <a:lstStyle/>
-                    <a:p>
-                      <a:pPr algn="ctr"/>
-                      <a:r>
-                        <a:rPr lang="en-US" sz="1400" dirty="0">
-                          <a:solidFill>
-                            <a:sysClr val="windowText" lastClr="000000"/>
-                          </a:solidFill>
-                          <a:latin typeface="Yu Gothic UI Semilight" panose="020B0400000000000000" pitchFamily="34" charset="-128"/>
-                        </a:rPr>
-                        <a:t>700</a:t>
-                      </a:r>
-                    </a:p>
-                  </a:txBody>
-                  <a:tcPr anchor="ctr"/>
-                </a:tc>
-                <a:extLst>
-                  <a:ext uri="{0D108BD9-81ED-4DB2-BD59-A6C34878D82A}">
-                    <a16:rowId xmlns:a16="http://schemas.microsoft.com/office/drawing/2014/main" val="1311364400"/>
-                  </a:ext>
-                </a:extLst>
-              </a:tr>
-              <a:tr h="1029970">
-                <a:tc>
-                  <a:txBody>
-                    <a:bodyPr/>
-                    <a:lstStyle/>
-                    <a:p>
-                      <a:pPr algn="ctr"/>
-                      <a:r>
-                        <a:rPr lang="en-US" sz="1400" dirty="0">
-                          <a:solidFill>
-                            <a:sysClr val="windowText" lastClr="000000"/>
-                          </a:solidFill>
-                          <a:latin typeface="Yu Gothic UI Semilight" panose="020B0400000000000000" pitchFamily="34" charset="-128"/>
-                        </a:rPr>
-                        <a:t>Q4</a:t>
-                      </a:r>
-                    </a:p>
-                  </a:txBody>
-                  <a:tcPr anchor="ctr"/>
-                </a:tc>
-                <a:tc>
-                  <a:txBody>
-                    <a:bodyPr/>
-                    <a:lstStyle/>
-                    <a:p>
-                      <a:pPr algn="ctr"/>
-                      <a:r>
-                        <a:rPr lang="en-US" sz="1400" dirty="0">
-                          <a:solidFill>
-                            <a:sysClr val="windowText" lastClr="000000"/>
-                          </a:solidFill>
-                          <a:latin typeface="Yu Gothic UI Semilight" panose="020B0400000000000000" pitchFamily="34" charset="-128"/>
-                        </a:rPr>
-                        <a:t>20</a:t>
-                      </a:r>
-                    </a:p>
-                  </a:txBody>
-                  <a:tcPr anchor="ctr"/>
-                </a:tc>
-                <a:tc>
-                  <a:txBody>
-                    <a:bodyPr/>
-                    <a:lstStyle/>
-                    <a:p>
-                      <a:pPr algn="ctr"/>
-                      <a:r>
-                        <a:rPr lang="en-US" sz="1400" dirty="0">
-                          <a:solidFill>
-                            <a:sysClr val="windowText" lastClr="000000"/>
-                          </a:solidFill>
-                          <a:latin typeface="Yu Gothic UI Semilight" panose="020B0400000000000000" pitchFamily="34" charset="-128"/>
-                        </a:rPr>
-                        <a:t>5</a:t>
-                      </a:r>
-                    </a:p>
-                  </a:txBody>
-                  <a:tcPr anchor="ctr"/>
-                </a:tc>
-                <a:tc>
-                  <a:txBody>
-                    <a:bodyPr/>
-                    <a:lstStyle/>
-                    <a:p>
-                      <a:pPr algn="ctr"/>
-                      <a:r>
-                        <a:rPr lang="en-US" sz="1400" dirty="0">
-                          <a:solidFill>
-                            <a:sysClr val="windowText" lastClr="000000"/>
-                          </a:solidFill>
-                          <a:latin typeface="Yu Gothic UI Semilight" panose="020B0400000000000000" pitchFamily="34" charset="-128"/>
-                        </a:rPr>
-                        <a:t>800</a:t>
-                      </a:r>
-                    </a:p>
-                  </a:txBody>
-                  <a:tcPr anchor="ctr"/>
-                </a:tc>
-                <a:extLst>
-                  <a:ext uri="{0D108BD9-81ED-4DB2-BD59-A6C34878D82A}">
-                    <a16:rowId xmlns:a16="http://schemas.microsoft.com/office/drawing/2014/main" val="2526263980"/>
-                  </a:ext>
-                </a:extLst>
-              </a:tr>
-            </a:tbl>
-          </a:graphicData>
-        </a:graphic>
-      </p:graphicFrame>
-    </p:spTree>
-    <p:extLst>
-      <p:ext uri="{BB962C8B-B14F-4D97-AF65-F5344CB8AC3E}">
-        <p14:creationId xmlns:p14="http://schemas.microsoft.com/office/powerpoint/2010/main" val="4259977132"/>
-      </p:ext>
-    </p:extLst>
-  </p:cSld>
-  <p:clrMapOvr>
-    <a:masterClrMapping/>
-  </p:clrMapOvr>
-</p:sld>
-</file>
-
-<file path=ppt/slides/slide28.xml><?xml version="1.0" encoding="utf-8"?>
-<p:sld xmlns:a="http://schemas.openxmlformats.org/drawingml/2006/main" xmlns:r="http://schemas.openxmlformats.org/officeDocument/2006/relationships" xmlns:p="http://schemas.openxmlformats.org/presentationml/2006/main">
-  <p:cSld>
-    <p:bg>
-      <p:bgPr>
-        <a:solidFill>
-          <a:schemeClr val="accent1">
-            <a:lumMod val="20000"/>
-            <a:lumOff val="80000"/>
-          </a:schemeClr>
-        </a:solidFill>
-        <a:effectLst/>
-      </p:bgPr>
-    </p:bg>
-    <p:spTree>
-      <p:nvGrpSpPr>
-        <p:cNvPr id="1" name=""/>
-        <p:cNvGrpSpPr/>
-        <p:nvPr/>
-      </p:nvGrpSpPr>
-      <p:grpSpPr>
-        <a:xfrm>
-          <a:off x="0" y="0"/>
-          <a:ext cx="0" cy="0"/>
-          <a:chOff x="0" y="0"/>
-          <a:chExt cx="0" cy="0"/>
-        </a:xfrm>
-      </p:grpSpPr>
-      <p:sp>
-        <p:nvSpPr>
-          <p:cNvPr id="2" name="Title 1">
-            <a:extLst>
-              <a:ext uri="{FF2B5EF4-FFF2-40B4-BE49-F238E27FC236}">
-                <a16:creationId xmlns:a16="http://schemas.microsoft.com/office/drawing/2014/main" id="{D1FC59F6-9B22-C211-4B4C-A2FD4B914C46}"/>
-              </a:ext>
-            </a:extLst>
-          </p:cNvPr>
-          <p:cNvSpPr>
-            <a:spLocks noGrp="1"/>
-          </p:cNvSpPr>
-          <p:nvPr>
-            <p:ph type="title"/>
-          </p:nvPr>
-        </p:nvSpPr>
-        <p:spPr>
-          <a:xfrm>
-            <a:off x="838198" y="853335"/>
-            <a:ext cx="10515602" cy="1377184"/>
-          </a:xfrm>
-          <a:noFill/>
-        </p:spPr>
-        <p:txBody>
-          <a:bodyPr>
-            <a:noAutofit/>
-          </a:bodyPr>
-          <a:lstStyle/>
-          <a:p>
-            <a:r>
-              <a:rPr lang="en-US" dirty="0"/>
-              <a:t>Financial </a:t>
-            </a:r>
-            <a:br>
-              <a:rPr lang="en-US" dirty="0"/>
-            </a:br>
-            <a:r>
-              <a:rPr lang="en-US" dirty="0"/>
-              <a:t>snapshot</a:t>
-            </a:r>
-          </a:p>
-        </p:txBody>
-      </p:sp>
-      <p:graphicFrame>
-        <p:nvGraphicFramePr>
-          <p:cNvPr id="8" name="Table Placeholder 3">
-            <a:extLst>
-              <a:ext uri="{FF2B5EF4-FFF2-40B4-BE49-F238E27FC236}">
-                <a16:creationId xmlns:a16="http://schemas.microsoft.com/office/drawing/2014/main" id="{6CB67956-A6C3-FCDF-EC78-F79D90449E96}"/>
-              </a:ext>
-            </a:extLst>
-          </p:cNvPr>
-          <p:cNvGraphicFramePr>
-            <a:graphicFrameLocks noGrp="1"/>
-          </p:cNvGraphicFramePr>
-          <p:nvPr>
-            <p:ph sz="quarter" idx="14"/>
-            <p:extLst>
-              <p:ext uri="{D42A27DB-BD31-4B8C-83A1-F6EECF244321}">
-                <p14:modId xmlns:p14="http://schemas.microsoft.com/office/powerpoint/2010/main" val="3883545762"/>
-              </p:ext>
-            </p:extLst>
-          </p:nvPr>
-        </p:nvGraphicFramePr>
-        <p:xfrm>
-          <a:off x="838200" y="2651125"/>
-          <a:ext cx="10515600" cy="3246120"/>
-        </p:xfrm>
-        <a:graphic>
-          <a:graphicData uri="http://schemas.openxmlformats.org/drawingml/2006/table">
-            <a:tbl>
-              <a:tblPr firstRow="1" bandRow="1">
-                <a:tableStyleId>{8799B23B-EC83-4686-B30A-512413B5E67A}</a:tableStyleId>
-              </a:tblPr>
-              <a:tblGrid>
-                <a:gridCol w="2628900">
-                  <a:extLst>
-                    <a:ext uri="{9D8B030D-6E8A-4147-A177-3AD203B41FA5}">
-                      <a16:colId xmlns:a16="http://schemas.microsoft.com/office/drawing/2014/main" val="130956065"/>
-                    </a:ext>
-                  </a:extLst>
-                </a:gridCol>
-                <a:gridCol w="2628900">
-                  <a:extLst>
-                    <a:ext uri="{9D8B030D-6E8A-4147-A177-3AD203B41FA5}">
-                      <a16:colId xmlns:a16="http://schemas.microsoft.com/office/drawing/2014/main" val="2749965458"/>
-                    </a:ext>
-                  </a:extLst>
-                </a:gridCol>
-                <a:gridCol w="2628900">
-                  <a:extLst>
-                    <a:ext uri="{9D8B030D-6E8A-4147-A177-3AD203B41FA5}">
-                      <a16:colId xmlns:a16="http://schemas.microsoft.com/office/drawing/2014/main" val="2116711163"/>
-                    </a:ext>
-                  </a:extLst>
-                </a:gridCol>
-                <a:gridCol w="2628900">
-                  <a:extLst>
-                    <a:ext uri="{9D8B030D-6E8A-4147-A177-3AD203B41FA5}">
-                      <a16:colId xmlns:a16="http://schemas.microsoft.com/office/drawing/2014/main" val="1186885001"/>
-                    </a:ext>
-                  </a:extLst>
-                </a:gridCol>
-              </a:tblGrid>
-              <a:tr h="541020">
-                <a:tc>
-                  <a:txBody>
-                    <a:bodyPr/>
-                    <a:lstStyle/>
-                    <a:p>
-                      <a:pPr algn="ctr"/>
-                      <a:r>
-                        <a:rPr lang="en-US" sz="1400" b="1" dirty="0">
-                          <a:solidFill>
-                            <a:sysClr val="windowText" lastClr="000000"/>
-                          </a:solidFill>
-                          <a:latin typeface="Yu Gothic UI Semilight" panose="020B0400000000000000" pitchFamily="34" charset="-128"/>
-                        </a:rPr>
-                        <a:t>Metric</a:t>
-                      </a:r>
-                    </a:p>
-                  </a:txBody>
-                  <a:tcPr anchor="ctr"/>
-                </a:tc>
-                <a:tc>
-                  <a:txBody>
-                    <a:bodyPr/>
-                    <a:lstStyle/>
-                    <a:p>
-                      <a:pPr algn="ctr"/>
-                      <a:r>
-                        <a:rPr lang="en-US" sz="1400" b="1" dirty="0">
-                          <a:solidFill>
-                            <a:sysClr val="windowText" lastClr="000000"/>
-                          </a:solidFill>
-                          <a:latin typeface="Yu Gothic UI Semilight" panose="020B0400000000000000" pitchFamily="34" charset="-128"/>
-                        </a:rPr>
-                        <a:t>Current value</a:t>
-                      </a:r>
-                    </a:p>
-                  </a:txBody>
-                  <a:tcPr anchor="ctr"/>
-                </a:tc>
-                <a:tc>
-                  <a:txBody>
-                    <a:bodyPr/>
-                    <a:lstStyle/>
-                    <a:p>
-                      <a:pPr algn="ctr"/>
-                      <a:r>
-                        <a:rPr lang="en-US" sz="1400" b="1" dirty="0">
-                          <a:solidFill>
-                            <a:sysClr val="windowText" lastClr="000000"/>
-                          </a:solidFill>
-                          <a:latin typeface="Yu Gothic UI Semilight" panose="020B0400000000000000" pitchFamily="34" charset="-128"/>
-                        </a:rPr>
-                        <a:t>Previous quarter</a:t>
-                      </a:r>
-                    </a:p>
-                  </a:txBody>
-                  <a:tcPr anchor="ctr"/>
-                </a:tc>
-                <a:tc>
-                  <a:txBody>
-                    <a:bodyPr/>
-                    <a:lstStyle/>
-                    <a:p>
-                      <a:pPr algn="ctr"/>
-                      <a:r>
-                        <a:rPr lang="en-US" sz="1400" b="1" dirty="0">
-                          <a:solidFill>
-                            <a:sysClr val="windowText" lastClr="000000"/>
-                          </a:solidFill>
-                          <a:latin typeface="Yu Gothic UI Semilight" panose="020B0400000000000000" pitchFamily="34" charset="-128"/>
-                        </a:rPr>
-                        <a:t>Change (%)</a:t>
-                      </a:r>
-                    </a:p>
-                  </a:txBody>
-                  <a:tcPr anchor="ctr"/>
-                </a:tc>
-                <a:extLst>
-                  <a:ext uri="{0D108BD9-81ED-4DB2-BD59-A6C34878D82A}">
-                    <a16:rowId xmlns:a16="http://schemas.microsoft.com/office/drawing/2014/main" val="3741017008"/>
-                  </a:ext>
-                </a:extLst>
-              </a:tr>
-              <a:tr h="541020">
-                <a:tc>
-                  <a:txBody>
-                    <a:bodyPr/>
-                    <a:lstStyle/>
-                    <a:p>
-                      <a:pPr algn="ctr"/>
-                      <a:r>
-                        <a:rPr lang="en-US" sz="1400" dirty="0">
-                          <a:solidFill>
-                            <a:sysClr val="windowText" lastClr="000000"/>
-                          </a:solidFill>
-                          <a:latin typeface="Yu Gothic UI Semilight" panose="020B0400000000000000" pitchFamily="34" charset="-128"/>
-                        </a:rPr>
-                        <a:t>Revenue</a:t>
-                      </a:r>
-                    </a:p>
-                  </a:txBody>
-                  <a:tcPr anchor="ctr"/>
-                </a:tc>
-                <a:tc>
-                  <a:txBody>
-                    <a:bodyPr/>
-                    <a:lstStyle/>
-                    <a:p>
-                      <a:pPr algn="ctr"/>
-                      <a:r>
-                        <a:rPr lang="en-US" sz="1400" dirty="0">
-                          <a:solidFill>
-                            <a:sysClr val="windowText" lastClr="000000"/>
-                          </a:solidFill>
-                          <a:latin typeface="Yu Gothic UI Semilight" panose="020B0400000000000000" pitchFamily="34" charset="-128"/>
-                        </a:rPr>
-                        <a:t>$2,500,000</a:t>
-                      </a:r>
-                    </a:p>
-                  </a:txBody>
-                  <a:tcPr anchor="ctr"/>
-                </a:tc>
-                <a:tc>
-                  <a:txBody>
-                    <a:bodyPr/>
-                    <a:lstStyle/>
-                    <a:p>
-                      <a:pPr algn="ctr"/>
-                      <a:r>
-                        <a:rPr lang="en-US" sz="1400" dirty="0">
-                          <a:solidFill>
-                            <a:sysClr val="windowText" lastClr="000000"/>
-                          </a:solidFill>
-                          <a:latin typeface="Yu Gothic UI Semilight" panose="020B0400000000000000" pitchFamily="34" charset="-128"/>
-                        </a:rPr>
-                        <a:t>$2,200,000</a:t>
-                      </a:r>
-                    </a:p>
-                  </a:txBody>
-                  <a:tcPr anchor="ctr"/>
-                </a:tc>
-                <a:tc>
-                  <a:txBody>
-                    <a:bodyPr/>
-                    <a:lstStyle/>
-                    <a:p>
-                      <a:pPr algn="ctr"/>
-                      <a:r>
-                        <a:rPr lang="en-US" sz="1400" dirty="0">
-                          <a:solidFill>
-                            <a:sysClr val="windowText" lastClr="000000"/>
-                          </a:solidFill>
-                          <a:latin typeface="Yu Gothic UI Semilight" panose="020B0400000000000000" pitchFamily="34" charset="-128"/>
-                        </a:rPr>
-                        <a:t>+14%</a:t>
-                      </a:r>
-                    </a:p>
-                  </a:txBody>
-                  <a:tcPr anchor="ctr"/>
-                </a:tc>
-                <a:extLst>
-                  <a:ext uri="{0D108BD9-81ED-4DB2-BD59-A6C34878D82A}">
-                    <a16:rowId xmlns:a16="http://schemas.microsoft.com/office/drawing/2014/main" val="511888340"/>
-                  </a:ext>
-                </a:extLst>
-              </a:tr>
-              <a:tr h="541020">
-                <a:tc>
-                  <a:txBody>
-                    <a:bodyPr/>
-                    <a:lstStyle/>
-                    <a:p>
-                      <a:pPr algn="ctr"/>
-                      <a:r>
-                        <a:rPr lang="en-US" sz="1400" dirty="0">
-                          <a:solidFill>
-                            <a:sysClr val="windowText" lastClr="000000"/>
-                          </a:solidFill>
-                          <a:latin typeface="Yu Gothic UI Semilight" panose="020B0400000000000000" pitchFamily="34" charset="-128"/>
-                        </a:rPr>
-                        <a:t>Operating expenses</a:t>
-                      </a:r>
-                    </a:p>
-                  </a:txBody>
-                  <a:tcPr anchor="ctr"/>
-                </a:tc>
-                <a:tc>
-                  <a:txBody>
-                    <a:bodyPr/>
-                    <a:lstStyle/>
-                    <a:p>
-                      <a:pPr algn="ctr"/>
-                      <a:r>
-                        <a:rPr lang="en-US" sz="1400" dirty="0">
-                          <a:solidFill>
-                            <a:sysClr val="windowText" lastClr="000000"/>
-                          </a:solidFill>
-                          <a:latin typeface="Yu Gothic UI Semilight" panose="020B0400000000000000" pitchFamily="34" charset="-128"/>
-                        </a:rPr>
-                        <a:t>$1,200,000</a:t>
-                      </a:r>
-                    </a:p>
-                  </a:txBody>
-                  <a:tcPr anchor="ctr"/>
-                </a:tc>
-                <a:tc>
-                  <a:txBody>
-                    <a:bodyPr/>
-                    <a:lstStyle/>
-                    <a:p>
-                      <a:pPr algn="ctr"/>
-                      <a:r>
-                        <a:rPr lang="en-US" sz="1400" dirty="0">
-                          <a:solidFill>
-                            <a:sysClr val="windowText" lastClr="000000"/>
-                          </a:solidFill>
-                          <a:latin typeface="Yu Gothic UI Semilight" panose="020B0400000000000000" pitchFamily="34" charset="-128"/>
-                        </a:rPr>
-                        <a:t>$1,400,000</a:t>
-                      </a:r>
-                    </a:p>
-                  </a:txBody>
-                  <a:tcPr anchor="ctr"/>
-                </a:tc>
-                <a:tc>
-                  <a:txBody>
-                    <a:bodyPr/>
-                    <a:lstStyle/>
-                    <a:p>
-                      <a:pPr algn="ctr"/>
-                      <a:r>
-                        <a:rPr lang="en-US" sz="1400" dirty="0">
-                          <a:solidFill>
-                            <a:sysClr val="windowText" lastClr="000000"/>
-                          </a:solidFill>
-                          <a:latin typeface="Yu Gothic UI Semilight" panose="020B0400000000000000" pitchFamily="34" charset="-128"/>
-                        </a:rPr>
-                        <a:t>-14%</a:t>
-                      </a:r>
-                    </a:p>
-                  </a:txBody>
-                  <a:tcPr anchor="ctr"/>
-                </a:tc>
-                <a:extLst>
-                  <a:ext uri="{0D108BD9-81ED-4DB2-BD59-A6C34878D82A}">
-                    <a16:rowId xmlns:a16="http://schemas.microsoft.com/office/drawing/2014/main" val="3937089168"/>
-                  </a:ext>
-                </a:extLst>
-              </a:tr>
-              <a:tr h="541020">
-                <a:tc>
-                  <a:txBody>
-                    <a:bodyPr/>
-                    <a:lstStyle/>
-                    <a:p>
-                      <a:pPr algn="ctr"/>
-                      <a:r>
-                        <a:rPr lang="en-US" sz="1400" dirty="0">
-                          <a:solidFill>
-                            <a:sysClr val="windowText" lastClr="000000"/>
-                          </a:solidFill>
-                          <a:latin typeface="Yu Gothic UI Semilight" panose="020B0400000000000000" pitchFamily="34" charset="-128"/>
-                        </a:rPr>
-                        <a:t>Net profit</a:t>
-                      </a:r>
-                    </a:p>
-                  </a:txBody>
-                  <a:tcPr anchor="ctr"/>
-                </a:tc>
-                <a:tc>
-                  <a:txBody>
-                    <a:bodyPr/>
-                    <a:lstStyle/>
-                    <a:p>
-                      <a:pPr algn="ctr"/>
-                      <a:r>
-                        <a:rPr lang="en-US" sz="1400" dirty="0">
-                          <a:solidFill>
-                            <a:sysClr val="windowText" lastClr="000000"/>
-                          </a:solidFill>
-                          <a:latin typeface="Yu Gothic UI Semilight" panose="020B0400000000000000" pitchFamily="34" charset="-128"/>
-                        </a:rPr>
-                        <a:t>$1,000,000</a:t>
-                      </a:r>
-                    </a:p>
-                  </a:txBody>
-                  <a:tcPr anchor="ctr"/>
-                </a:tc>
-                <a:tc>
-                  <a:txBody>
-                    <a:bodyPr/>
-                    <a:lstStyle/>
-                    <a:p>
-                      <a:pPr algn="ctr"/>
-                      <a:r>
-                        <a:rPr lang="en-US" sz="1400" dirty="0">
-                          <a:solidFill>
-                            <a:sysClr val="windowText" lastClr="000000"/>
-                          </a:solidFill>
-                          <a:latin typeface="Yu Gothic UI Semilight" panose="020B0400000000000000" pitchFamily="34" charset="-128"/>
-                        </a:rPr>
-                        <a:t>$800,000</a:t>
-                      </a:r>
-                    </a:p>
-                  </a:txBody>
-                  <a:tcPr anchor="ctr"/>
-                </a:tc>
-                <a:tc>
-                  <a:txBody>
-                    <a:bodyPr/>
-                    <a:lstStyle/>
-                    <a:p>
-                      <a:pPr algn="ctr"/>
-                      <a:r>
-                        <a:rPr lang="en-US" sz="1400" dirty="0">
-                          <a:solidFill>
-                            <a:sysClr val="windowText" lastClr="000000"/>
-                          </a:solidFill>
-                          <a:latin typeface="Yu Gothic UI Semilight" panose="020B0400000000000000" pitchFamily="34" charset="-128"/>
-                        </a:rPr>
-                        <a:t>+25%</a:t>
-                      </a:r>
-                    </a:p>
-                  </a:txBody>
-                  <a:tcPr anchor="ctr"/>
-                </a:tc>
-                <a:extLst>
-                  <a:ext uri="{0D108BD9-81ED-4DB2-BD59-A6C34878D82A}">
-                    <a16:rowId xmlns:a16="http://schemas.microsoft.com/office/drawing/2014/main" val="1031597798"/>
-                  </a:ext>
-                </a:extLst>
-              </a:tr>
-              <a:tr h="541020">
-                <a:tc>
-                  <a:txBody>
-                    <a:bodyPr/>
-                    <a:lstStyle/>
-                    <a:p>
-                      <a:pPr algn="ctr"/>
-                      <a:r>
-                        <a:rPr lang="en-US" sz="1400" dirty="0">
-                          <a:solidFill>
-                            <a:sysClr val="windowText" lastClr="000000"/>
-                          </a:solidFill>
-                          <a:latin typeface="Yu Gothic UI Semilight" panose="020B0400000000000000" pitchFamily="34" charset="-128"/>
-                        </a:rPr>
-                        <a:t>Operating margin</a:t>
-                      </a:r>
-                    </a:p>
-                  </a:txBody>
-                  <a:tcPr anchor="ctr"/>
-                </a:tc>
-                <a:tc>
-                  <a:txBody>
-                    <a:bodyPr/>
-                    <a:lstStyle/>
-                    <a:p>
-                      <a:pPr algn="ctr"/>
-                      <a:r>
-                        <a:rPr lang="en-US" sz="1400" dirty="0">
-                          <a:solidFill>
-                            <a:sysClr val="windowText" lastClr="000000"/>
-                          </a:solidFill>
-                          <a:latin typeface="Yu Gothic UI Semilight" panose="020B0400000000000000" pitchFamily="34" charset="-128"/>
-                        </a:rPr>
-                        <a:t>40%</a:t>
-                      </a:r>
-                    </a:p>
-                  </a:txBody>
-                  <a:tcPr anchor="ctr"/>
-                </a:tc>
-                <a:tc>
-                  <a:txBody>
-                    <a:bodyPr/>
-                    <a:lstStyle/>
-                    <a:p>
-                      <a:pPr algn="ctr"/>
-                      <a:r>
-                        <a:rPr lang="en-US" sz="1400" dirty="0">
-                          <a:solidFill>
-                            <a:sysClr val="windowText" lastClr="000000"/>
-                          </a:solidFill>
-                          <a:latin typeface="Yu Gothic UI Semilight" panose="020B0400000000000000" pitchFamily="34" charset="-128"/>
-                        </a:rPr>
-                        <a:t>36%</a:t>
-                      </a:r>
-                    </a:p>
-                  </a:txBody>
-                  <a:tcPr anchor="ctr"/>
-                </a:tc>
-                <a:tc>
-                  <a:txBody>
-                    <a:bodyPr/>
-                    <a:lstStyle/>
-                    <a:p>
-                      <a:pPr algn="ctr"/>
-                      <a:r>
-                        <a:rPr lang="en-US" sz="1400" dirty="0">
-                          <a:solidFill>
-                            <a:sysClr val="windowText" lastClr="000000"/>
-                          </a:solidFill>
-                          <a:latin typeface="Yu Gothic UI Semilight" panose="020B0400000000000000" pitchFamily="34" charset="-128"/>
-                        </a:rPr>
-                        <a:t>+4%</a:t>
-                      </a:r>
-                    </a:p>
-                  </a:txBody>
-                  <a:tcPr anchor="ctr"/>
-                </a:tc>
-                <a:extLst>
-                  <a:ext uri="{0D108BD9-81ED-4DB2-BD59-A6C34878D82A}">
-                    <a16:rowId xmlns:a16="http://schemas.microsoft.com/office/drawing/2014/main" val="1194376521"/>
-                  </a:ext>
-                </a:extLst>
-              </a:tr>
-              <a:tr h="541020">
-                <a:tc>
-                  <a:txBody>
-                    <a:bodyPr/>
-                    <a:lstStyle/>
-                    <a:p>
-                      <a:pPr algn="ctr"/>
-                      <a:r>
-                        <a:rPr lang="en-US" sz="1400" dirty="0">
-                          <a:solidFill>
-                            <a:sysClr val="windowText" lastClr="000000"/>
-                          </a:solidFill>
-                          <a:latin typeface="Yu Gothic UI Semilight" panose="020B0400000000000000" pitchFamily="34" charset="-128"/>
-                        </a:rPr>
-                        <a:t>Cash reserves</a:t>
-                      </a:r>
-                    </a:p>
-                  </a:txBody>
-                  <a:tcPr anchor="ctr"/>
-                </a:tc>
-                <a:tc>
-                  <a:txBody>
-                    <a:bodyPr/>
-                    <a:lstStyle/>
-                    <a:p>
-                      <a:pPr algn="ctr"/>
-                      <a:r>
-                        <a:rPr lang="en-US" sz="1400" dirty="0">
-                          <a:solidFill>
-                            <a:sysClr val="windowText" lastClr="000000"/>
-                          </a:solidFill>
-                          <a:latin typeface="Yu Gothic UI Semilight" panose="020B0400000000000000" pitchFamily="34" charset="-128"/>
-                        </a:rPr>
-                        <a:t>$5,000,000</a:t>
-                      </a:r>
-                    </a:p>
-                  </a:txBody>
-                  <a:tcPr anchor="ctr"/>
-                </a:tc>
-                <a:tc>
-                  <a:txBody>
-                    <a:bodyPr/>
-                    <a:lstStyle/>
-                    <a:p>
-                      <a:pPr algn="ctr"/>
-                      <a:r>
-                        <a:rPr lang="en-US" sz="1400" dirty="0">
-                          <a:solidFill>
-                            <a:sysClr val="windowText" lastClr="000000"/>
-                          </a:solidFill>
-                          <a:latin typeface="Yu Gothic UI Semilight" panose="020B0400000000000000" pitchFamily="34" charset="-128"/>
-                        </a:rPr>
-                        <a:t>$4,500,000</a:t>
-                      </a:r>
-                    </a:p>
-                  </a:txBody>
-                  <a:tcPr anchor="ctr"/>
-                </a:tc>
-                <a:tc>
-                  <a:txBody>
-                    <a:bodyPr/>
-                    <a:lstStyle/>
-                    <a:p>
-                      <a:pPr algn="ctr"/>
-                      <a:r>
-                        <a:rPr lang="en-US" sz="1400" dirty="0">
-                          <a:solidFill>
-                            <a:sysClr val="windowText" lastClr="000000"/>
-                          </a:solidFill>
-                          <a:latin typeface="Yu Gothic UI Semilight" panose="020B0400000000000000" pitchFamily="34" charset="-128"/>
-                        </a:rPr>
-                        <a:t>+11%</a:t>
-                      </a:r>
-                    </a:p>
-                  </a:txBody>
-                  <a:tcPr anchor="ctr"/>
-                </a:tc>
-                <a:extLst>
-                  <a:ext uri="{0D108BD9-81ED-4DB2-BD59-A6C34878D82A}">
-                    <a16:rowId xmlns:a16="http://schemas.microsoft.com/office/drawing/2014/main" val="1918266800"/>
-                  </a:ext>
-                </a:extLst>
-              </a:tr>
-            </a:tbl>
-          </a:graphicData>
-        </a:graphic>
-      </p:graphicFrame>
-    </p:spTree>
-    <p:extLst>
-      <p:ext uri="{BB962C8B-B14F-4D97-AF65-F5344CB8AC3E}">
-        <p14:creationId xmlns:p14="http://schemas.microsoft.com/office/powerpoint/2010/main" val="3604630649"/>
-      </p:ext>
-    </p:extLst>
-  </p:cSld>
-  <p:clrMapOvr>
-    <a:masterClrMapping/>
-  </p:clrMapOvr>
-</p:sld>
-</file>
-
-<file path=ppt/slides/slide29.xml><?xml version="1.0" encoding="utf-8"?>
-<p:sld xmlns:a="http://schemas.openxmlformats.org/drawingml/2006/main" xmlns:r="http://schemas.openxmlformats.org/officeDocument/2006/relationships" xmlns:p="http://schemas.openxmlformats.org/presentationml/2006/main">
-  <p:cSld>
-    <p:bg>
-      <p:bgPr>
-        <a:solidFill>
-          <a:srgbClr val="B32752"/>
-        </a:solidFill>
-        <a:effectLst/>
-      </p:bgPr>
-    </p:bg>
-    <p:spTree>
-      <p:nvGrpSpPr>
-        <p:cNvPr id="1" name=""/>
-        <p:cNvGrpSpPr/>
-        <p:nvPr/>
-      </p:nvGrpSpPr>
-      <p:grpSpPr>
-        <a:xfrm>
-          <a:off x="0" y="0"/>
-          <a:ext cx="0" cy="0"/>
-          <a:chOff x="0" y="0"/>
-          <a:chExt cx="0" cy="0"/>
-        </a:xfrm>
-      </p:grpSpPr>
-      <p:sp>
-        <p:nvSpPr>
-          <p:cNvPr id="3" name="Title 2">
-            <a:extLst>
-              <a:ext uri="{FF2B5EF4-FFF2-40B4-BE49-F238E27FC236}">
-                <a16:creationId xmlns:a16="http://schemas.microsoft.com/office/drawing/2014/main" id="{A0034E89-1952-5288-08A0-70A4A73BE39E}"/>
-              </a:ext>
-            </a:extLst>
-          </p:cNvPr>
-          <p:cNvSpPr>
-            <a:spLocks noGrp="1"/>
-          </p:cNvSpPr>
-          <p:nvPr>
-            <p:ph type="title"/>
-          </p:nvPr>
-        </p:nvSpPr>
-        <p:spPr>
-          <a:xfrm>
-            <a:off x="1704181" y="2167821"/>
-            <a:ext cx="8783638" cy="2522359"/>
-          </a:xfrm>
-          <a:noFill/>
-        </p:spPr>
-        <p:txBody>
-          <a:bodyPr>
-            <a:noAutofit/>
-          </a:bodyPr>
-          <a:lstStyle/>
-          <a:p>
-            <a:r>
-              <a:rPr lang="en-US" dirty="0"/>
-              <a:t>Innovative solutions</a:t>
-            </a:r>
-          </a:p>
-        </p:txBody>
-      </p:sp>
-    </p:spTree>
-    <p:extLst>
-      <p:ext uri="{BB962C8B-B14F-4D97-AF65-F5344CB8AC3E}">
-        <p14:creationId xmlns:p14="http://schemas.microsoft.com/office/powerpoint/2010/main" val="3058085568"/>
+        <p14:creationId xmlns:p14="http://schemas.microsoft.com/office/powerpoint/2010/main" val="4240178155"/>
       </p:ext>
     </p:extLst>
   </p:cSld>
@@ -33032,227 +35084,6 @@
 </file>
 
 <file path=ppt/slides/slide3.xml><?xml version="1.0" encoding="utf-8"?>
-<p:sld xmlns:a="http://schemas.openxmlformats.org/drawingml/2006/main" xmlns:r="http://schemas.openxmlformats.org/officeDocument/2006/relationships" xmlns:p="http://schemas.openxmlformats.org/presentationml/2006/main">
-  <p:cSld>
-    <p:spTree>
-      <p:nvGrpSpPr>
-        <p:cNvPr id="1" name=""/>
-        <p:cNvGrpSpPr/>
-        <p:nvPr/>
-      </p:nvGrpSpPr>
-      <p:grpSpPr>
-        <a:xfrm>
-          <a:off x="0" y="0"/>
-          <a:ext cx="0" cy="0"/>
-          <a:chOff x="0" y="0"/>
-          <a:chExt cx="0" cy="0"/>
-        </a:xfrm>
-      </p:grpSpPr>
-      <p:sp>
-        <p:nvSpPr>
-          <p:cNvPr id="3" name="Content Placeholder 2">
-            <a:extLst>
-              <a:ext uri="{FF2B5EF4-FFF2-40B4-BE49-F238E27FC236}">
-                <a16:creationId xmlns:a16="http://schemas.microsoft.com/office/drawing/2014/main" id="{9B33A463-AB57-6332-E6A2-A1A7AB3ED115}"/>
-              </a:ext>
-            </a:extLst>
-          </p:cNvPr>
-          <p:cNvSpPr>
-            <a:spLocks noGrp="1"/>
-          </p:cNvSpPr>
-          <p:nvPr>
-            <p:ph type="title"/>
-            <p:extLst>
-              <p:ext uri="{E7BDC344-281C-4309-B0C6-D0EE65EED2A8}">
-                <p202:designPr xmlns:p202="http://schemas.microsoft.com/office/powerpoint/2020/02/main">
-                  <p202:designTagLst>
-                    <p202:designTag name="ARCH:1:CLS" val="LargePlainText"/>
-                  </p202:designTagLst>
-                </p202:designPr>
-              </p:ext>
-            </p:extLst>
-          </p:nvPr>
-        </p:nvSpPr>
-        <p:spPr>
-          <a:xfrm>
-            <a:off x="1704181" y="2167821"/>
-            <a:ext cx="8783638" cy="2522359"/>
-          </a:xfrm>
-        </p:spPr>
-        <p:txBody>
-          <a:bodyPr anchor="ctr">
-            <a:normAutofit/>
-          </a:bodyPr>
-          <a:lstStyle/>
-          <a:p>
-            <a:pPr indent="0">
-              <a:buNone/>
-            </a:pPr>
-            <a:r>
-              <a:rPr lang="en-GB" sz="1800" b="1" dirty="0"/>
-              <a:t>“</a:t>
-            </a:r>
-            <a:r>
-              <a:rPr lang="en-GB" sz="1800" b="1" kern="1200" cap="all" spc="300" dirty="0"/>
-              <a:t>In recent years, there has been a massive rise in the usage of dating apps to find love. Many of these apps use sophisticated data science techniques to recommend possible matches to users and to optimize the user experience. These apps give us access to a wealth of information that we’ve never had before about how different people experience romance.” </a:t>
-            </a:r>
-            <a:br>
-              <a:rPr lang="en-GB" sz="1800" b="1" kern="1200" cap="all" spc="300" dirty="0"/>
-            </a:br>
-            <a:br>
-              <a:rPr lang="en-GB" sz="1800" b="1" kern="1200" cap="all" spc="300" dirty="0"/>
-            </a:br>
-            <a:r>
-              <a:rPr lang="en-GB" sz="1800" b="1" kern="1200" cap="all" spc="300" dirty="0"/>
-              <a:t>– </a:t>
-            </a:r>
-            <a:r>
-              <a:rPr lang="en-GB" sz="1800" b="1" kern="1200" cap="all" spc="300" dirty="0" err="1"/>
-              <a:t>Codecademy</a:t>
-            </a:r>
-            <a:endParaRPr lang="en-GB" sz="1800" dirty="0"/>
-          </a:p>
-        </p:txBody>
-      </p:sp>
-    </p:spTree>
-    <p:extLst>
-      <p:ext uri="{BB962C8B-B14F-4D97-AF65-F5344CB8AC3E}">
-        <p14:creationId xmlns:p14="http://schemas.microsoft.com/office/powerpoint/2010/main" val="806335326"/>
-      </p:ext>
-    </p:extLst>
-  </p:cSld>
-  <p:clrMapOvr>
-    <a:masterClrMapping/>
-  </p:clrMapOvr>
-</p:sld>
-</file>
-
-<file path=ppt/slides/slide30.xml><?xml version="1.0" encoding="utf-8"?>
-<p:sld xmlns:a="http://schemas.openxmlformats.org/drawingml/2006/main" xmlns:r="http://schemas.openxmlformats.org/officeDocument/2006/relationships" xmlns:p="http://schemas.openxmlformats.org/presentationml/2006/main">
-  <p:cSld>
-    <p:bg>
-      <p:bgPr>
-        <a:solidFill>
-          <a:schemeClr val="accent1">
-            <a:lumMod val="20000"/>
-            <a:lumOff val="80000"/>
-          </a:schemeClr>
-        </a:solidFill>
-        <a:effectLst/>
-      </p:bgPr>
-    </p:bg>
-    <p:spTree>
-      <p:nvGrpSpPr>
-        <p:cNvPr id="1" name=""/>
-        <p:cNvGrpSpPr/>
-        <p:nvPr/>
-      </p:nvGrpSpPr>
-      <p:grpSpPr>
-        <a:xfrm>
-          <a:off x="0" y="0"/>
-          <a:ext cx="0" cy="0"/>
-          <a:chOff x="0" y="0"/>
-          <a:chExt cx="0" cy="0"/>
-        </a:xfrm>
-      </p:grpSpPr>
-      <p:sp>
-        <p:nvSpPr>
-          <p:cNvPr id="5" name="Title 4">
-            <a:extLst>
-              <a:ext uri="{FF2B5EF4-FFF2-40B4-BE49-F238E27FC236}">
-                <a16:creationId xmlns:a16="http://schemas.microsoft.com/office/drawing/2014/main" id="{22A0D7AA-8A21-B977-56ED-94406F29957C}"/>
-              </a:ext>
-            </a:extLst>
-          </p:cNvPr>
-          <p:cNvSpPr>
-            <a:spLocks noGrp="1"/>
-          </p:cNvSpPr>
-          <p:nvPr>
-            <p:ph type="title"/>
-          </p:nvPr>
-        </p:nvSpPr>
-        <p:spPr>
-          <a:xfrm>
-            <a:off x="1754505" y="1013460"/>
-            <a:ext cx="8682990" cy="2230802"/>
-          </a:xfrm>
-          <a:noFill/>
-        </p:spPr>
-        <p:txBody>
-          <a:bodyPr anchor="ctr">
-            <a:noAutofit/>
-          </a:bodyPr>
-          <a:lstStyle/>
-          <a:p>
-            <a:r>
-              <a:rPr lang="en-US" noProof="0" dirty="0"/>
-              <a:t>Thank you</a:t>
-            </a:r>
-          </a:p>
-        </p:txBody>
-      </p:sp>
-      <p:sp>
-        <p:nvSpPr>
-          <p:cNvPr id="6" name="Content Placeholder 5">
-            <a:extLst>
-              <a:ext uri="{FF2B5EF4-FFF2-40B4-BE49-F238E27FC236}">
-                <a16:creationId xmlns:a16="http://schemas.microsoft.com/office/drawing/2014/main" id="{54D0A6B8-78EB-52CA-3D46-A46FC880D386}"/>
-              </a:ext>
-            </a:extLst>
-          </p:cNvPr>
-          <p:cNvSpPr>
-            <a:spLocks noGrp="1"/>
-          </p:cNvSpPr>
-          <p:nvPr>
-            <p:ph idx="1"/>
-          </p:nvPr>
-        </p:nvSpPr>
-        <p:spPr>
-          <a:xfrm>
-            <a:off x="1754505" y="3429000"/>
-            <a:ext cx="8682989" cy="2230802"/>
-          </a:xfrm>
-          <a:noFill/>
-        </p:spPr>
-        <p:txBody>
-          <a:bodyPr vert="horz" lIns="91440" tIns="45720" rIns="91440" bIns="45720" rtlCol="0" anchor="t" anchorCtr="0">
-            <a:normAutofit/>
-          </a:bodyPr>
-          <a:lstStyle/>
-          <a:p>
-            <a:r>
-              <a:rPr lang="en-US" noProof="0" dirty="0"/>
-              <a:t>Peyton Davis | 424-555-0124</a:t>
-            </a:r>
-          </a:p>
-          <a:p>
-            <a:r>
-              <a:rPr lang="en-US" noProof="0" dirty="0"/>
-              <a:t>peyton@northwindtraders.com</a:t>
-            </a:r>
-          </a:p>
-          <a:p>
-            <a:r>
-              <a:rPr lang="en-US" noProof="0" dirty="0"/>
-              <a:t>www.northwindtraders.com</a:t>
-            </a:r>
-          </a:p>
-        </p:txBody>
-      </p:sp>
-    </p:spTree>
-    <p:extLst>
-      <p:ext uri="{BB962C8B-B14F-4D97-AF65-F5344CB8AC3E}">
-        <p14:creationId xmlns:p14="http://schemas.microsoft.com/office/powerpoint/2010/main" val="2715385371"/>
-      </p:ext>
-    </p:extLst>
-  </p:cSld>
-  <p:clrMapOvr>
-    <a:masterClrMapping/>
-  </p:clrMapOvr>
-</p:sld>
-</file>
-
-<file path=ppt/slides/slide4.xml><?xml version="1.0" encoding="utf-8"?>
 <p:sld xmlns:a="http://schemas.openxmlformats.org/drawingml/2006/main" xmlns:r="http://schemas.openxmlformats.org/officeDocument/2006/relationships" xmlns:p="http://schemas.openxmlformats.org/presentationml/2006/main">
   <p:cSld>
     <p:bg>
@@ -33379,6 +35210,1511 @@
     <p:extLst>
       <p:ext uri="{BB962C8B-B14F-4D97-AF65-F5344CB8AC3E}">
         <p14:creationId xmlns:p14="http://schemas.microsoft.com/office/powerpoint/2010/main" val="3666674671"/>
+      </p:ext>
+    </p:extLst>
+  </p:cSld>
+  <p:clrMapOvr>
+    <a:masterClrMapping/>
+  </p:clrMapOvr>
+</p:sld>
+</file>
+
+<file path=ppt/slides/slide30.xml><?xml version="1.0" encoding="utf-8"?>
+<p:sld xmlns:a="http://schemas.openxmlformats.org/drawingml/2006/main" xmlns:r="http://schemas.openxmlformats.org/officeDocument/2006/relationships" xmlns:p="http://schemas.openxmlformats.org/presentationml/2006/main">
+  <p:cSld>
+    <p:bg>
+      <p:bgPr>
+        <a:solidFill>
+          <a:srgbClr val="B32752"/>
+        </a:solidFill>
+        <a:effectLst/>
+      </p:bgPr>
+    </p:bg>
+    <p:spTree>
+      <p:nvGrpSpPr>
+        <p:cNvPr id="1" name=""/>
+        <p:cNvGrpSpPr/>
+        <p:nvPr/>
+      </p:nvGrpSpPr>
+      <p:grpSpPr>
+        <a:xfrm>
+          <a:off x="0" y="0"/>
+          <a:ext cx="0" cy="0"/>
+          <a:chOff x="0" y="0"/>
+          <a:chExt cx="0" cy="0"/>
+        </a:xfrm>
+      </p:grpSpPr>
+      <p:sp>
+        <p:nvSpPr>
+          <p:cNvPr id="2" name="Title 1">
+            <a:extLst>
+              <a:ext uri="{FF2B5EF4-FFF2-40B4-BE49-F238E27FC236}">
+                <a16:creationId xmlns:a16="http://schemas.microsoft.com/office/drawing/2014/main" id="{954ABE40-AA00-F366-A36A-B3F1AADBF025}"/>
+              </a:ext>
+            </a:extLst>
+          </p:cNvPr>
+          <p:cNvSpPr>
+            <a:spLocks noGrp="1"/>
+          </p:cNvSpPr>
+          <p:nvPr>
+            <p:ph type="title"/>
+          </p:nvPr>
+        </p:nvSpPr>
+        <p:spPr>
+          <a:xfrm>
+            <a:off x="838200" y="853334"/>
+            <a:ext cx="4844142" cy="3939646"/>
+          </a:xfrm>
+          <a:noFill/>
+        </p:spPr>
+        <p:txBody>
+          <a:bodyPr>
+            <a:noAutofit/>
+          </a:bodyPr>
+          <a:lstStyle/>
+          <a:p>
+            <a:r>
+              <a:rPr lang="en-US" dirty="0"/>
+              <a:t>Conclusion</a:t>
+            </a:r>
+          </a:p>
+        </p:txBody>
+      </p:sp>
+      <p:pic>
+        <p:nvPicPr>
+          <p:cNvPr id="10" name="Online Image Placeholder 7" descr="Rows of seated people in business attire, listening to work event">
+            <a:extLst>
+              <a:ext uri="{FF2B5EF4-FFF2-40B4-BE49-F238E27FC236}">
+                <a16:creationId xmlns:a16="http://schemas.microsoft.com/office/drawing/2014/main" id="{A615D31F-0489-0629-D024-042CFF56905C}"/>
+              </a:ext>
+            </a:extLst>
+          </p:cNvPr>
+          <p:cNvPicPr>
+            <a:picLocks noGrp="1" noChangeAspect="1"/>
+          </p:cNvPicPr>
+          <p:nvPr>
+            <p:ph type="pic" sz="quarter" idx="11"/>
+          </p:nvPr>
+        </p:nvPicPr>
+        <p:blipFill rotWithShape="1">
+          <a:blip r:embed="rId2" cstate="print">
+            <a:duotone>
+              <a:prstClr val="black"/>
+              <a:schemeClr val="accent3">
+                <a:tint val="45000"/>
+                <a:satMod val="400000"/>
+              </a:schemeClr>
+            </a:duotone>
+            <a:extLst>
+              <a:ext uri="{28A0092B-C50C-407E-A947-70E740481C1C}">
+                <a14:useLocalDpi xmlns:a14="http://schemas.microsoft.com/office/drawing/2010/main"/>
+              </a:ext>
+            </a:extLst>
+          </a:blip>
+          <a:srcRect/>
+          <a:stretch/>
+        </p:blipFill>
+        <p:spPr>
+          <a:xfrm>
+            <a:off x="6428012" y="685800"/>
+            <a:ext cx="5070020" cy="5486400"/>
+          </a:xfrm>
+        </p:spPr>
+      </p:pic>
+    </p:spTree>
+    <p:extLst>
+      <p:ext uri="{BB962C8B-B14F-4D97-AF65-F5344CB8AC3E}">
+        <p14:creationId xmlns:p14="http://schemas.microsoft.com/office/powerpoint/2010/main" val="1008037533"/>
+      </p:ext>
+    </p:extLst>
+  </p:cSld>
+  <p:clrMapOvr>
+    <a:masterClrMapping/>
+  </p:clrMapOvr>
+</p:sld>
+</file>
+
+<file path=ppt/slides/slide31.xml><?xml version="1.0" encoding="utf-8"?>
+<p:sld xmlns:a="http://schemas.openxmlformats.org/drawingml/2006/main" xmlns:r="http://schemas.openxmlformats.org/officeDocument/2006/relationships" xmlns:p="http://schemas.openxmlformats.org/presentationml/2006/main">
+  <p:cSld>
+    <p:bg>
+      <p:bgPr>
+        <a:solidFill>
+          <a:schemeClr val="accent1">
+            <a:lumMod val="20000"/>
+            <a:lumOff val="80000"/>
+          </a:schemeClr>
+        </a:solidFill>
+        <a:effectLst/>
+      </p:bgPr>
+    </p:bg>
+    <p:spTree>
+      <p:nvGrpSpPr>
+        <p:cNvPr id="1" name=""/>
+        <p:cNvGrpSpPr/>
+        <p:nvPr/>
+      </p:nvGrpSpPr>
+      <p:grpSpPr>
+        <a:xfrm>
+          <a:off x="0" y="0"/>
+          <a:ext cx="0" cy="0"/>
+          <a:chOff x="0" y="0"/>
+          <a:chExt cx="0" cy="0"/>
+        </a:xfrm>
+      </p:grpSpPr>
+      <p:sp>
+        <p:nvSpPr>
+          <p:cNvPr id="2" name="Title 1">
+            <a:extLst>
+              <a:ext uri="{FF2B5EF4-FFF2-40B4-BE49-F238E27FC236}">
+                <a16:creationId xmlns:a16="http://schemas.microsoft.com/office/drawing/2014/main" id="{314C27C8-165C-5513-DB4B-9D840097C545}"/>
+              </a:ext>
+            </a:extLst>
+          </p:cNvPr>
+          <p:cNvSpPr>
+            <a:spLocks noGrp="1"/>
+          </p:cNvSpPr>
+          <p:nvPr>
+            <p:ph type="title"/>
+          </p:nvPr>
+        </p:nvSpPr>
+        <p:spPr>
+          <a:xfrm>
+            <a:off x="838200" y="853333"/>
+            <a:ext cx="4844143" cy="2792412"/>
+          </a:xfrm>
+          <a:noFill/>
+        </p:spPr>
+        <p:txBody>
+          <a:bodyPr anchor="t">
+            <a:noAutofit/>
+          </a:bodyPr>
+          <a:lstStyle/>
+          <a:p>
+            <a:r>
+              <a:rPr lang="en-US" dirty="0"/>
+              <a:t>Conclusion</a:t>
+            </a:r>
+          </a:p>
+        </p:txBody>
+      </p:sp>
+      <p:sp>
+        <p:nvSpPr>
+          <p:cNvPr id="3" name="Content Placeholder 2">
+            <a:extLst>
+              <a:ext uri="{FF2B5EF4-FFF2-40B4-BE49-F238E27FC236}">
+                <a16:creationId xmlns:a16="http://schemas.microsoft.com/office/drawing/2014/main" id="{FACE640F-7F5A-BDB7-205D-765FA80B6796}"/>
+              </a:ext>
+            </a:extLst>
+          </p:cNvPr>
+          <p:cNvSpPr>
+            <a:spLocks noGrp="1"/>
+          </p:cNvSpPr>
+          <p:nvPr>
+            <p:ph sz="half" idx="2"/>
+          </p:nvPr>
+        </p:nvSpPr>
+        <p:spPr>
+          <a:xfrm>
+            <a:off x="838200" y="3813682"/>
+            <a:ext cx="4898571" cy="2188317"/>
+          </a:xfrm>
+          <a:noFill/>
+        </p:spPr>
+        <p:txBody>
+          <a:bodyPr vert="horz" lIns="91440" tIns="45720" rIns="91440" bIns="45720" rtlCol="0" anchor="b">
+            <a:normAutofit fontScale="92500" lnSpcReduction="10000"/>
+          </a:bodyPr>
+          <a:lstStyle/>
+          <a:p>
+            <a:r>
+              <a:rPr lang="en-GB" dirty="0"/>
+              <a:t>Our overall analysis supported the null hypothesis: the available features did not strongly predict smoker status. </a:t>
+            </a:r>
+          </a:p>
+          <a:p>
+            <a:r>
+              <a:rPr lang="en-GB" dirty="0"/>
+              <a:t>By implementing machine learning algorithms, we saw that our models predicted non-smoker status well, but struggled with smoker status.</a:t>
+            </a:r>
+          </a:p>
+        </p:txBody>
+      </p:sp>
+      <p:pic>
+        <p:nvPicPr>
+          <p:cNvPr id="13" name="Online Image Placeholder 9">
+            <a:extLst>
+              <a:ext uri="{FF2B5EF4-FFF2-40B4-BE49-F238E27FC236}">
+                <a16:creationId xmlns:a16="http://schemas.microsoft.com/office/drawing/2014/main" id="{ECD12A93-CCA8-9CCE-6BD6-89C28F0822D7}"/>
+              </a:ext>
+            </a:extLst>
+          </p:cNvPr>
+          <p:cNvPicPr>
+            <a:picLocks noGrp="1" noChangeAspect="1"/>
+          </p:cNvPicPr>
+          <p:nvPr>
+            <p:ph type="pic" sz="quarter" idx="11"/>
+          </p:nvPr>
+        </p:nvPicPr>
+        <p:blipFill>
+          <a:blip r:embed="rId2">
+            <a:duotone>
+              <a:schemeClr val="accent3">
+                <a:shade val="45000"/>
+                <a:satMod val="135000"/>
+              </a:schemeClr>
+              <a:prstClr val="white"/>
+            </a:duotone>
+          </a:blip>
+          <a:srcRect/>
+          <a:stretch/>
+        </p:blipFill>
+        <p:spPr>
+          <a:xfrm>
+            <a:off x="6428012" y="685800"/>
+            <a:ext cx="5070020" cy="5486400"/>
+          </a:xfrm>
+        </p:spPr>
+      </p:pic>
+    </p:spTree>
+    <p:extLst>
+      <p:ext uri="{BB962C8B-B14F-4D97-AF65-F5344CB8AC3E}">
+        <p14:creationId xmlns:p14="http://schemas.microsoft.com/office/powerpoint/2010/main" val="729609147"/>
+      </p:ext>
+    </p:extLst>
+  </p:cSld>
+  <p:clrMapOvr>
+    <a:masterClrMapping/>
+  </p:clrMapOvr>
+</p:sld>
+</file>
+
+<file path=ppt/slides/slide32.xml><?xml version="1.0" encoding="utf-8"?>
+<p:sld xmlns:a="http://schemas.openxmlformats.org/drawingml/2006/main" xmlns:r="http://schemas.openxmlformats.org/officeDocument/2006/relationships" xmlns:p="http://schemas.openxmlformats.org/presentationml/2006/main">
+  <p:cSld>
+    <p:bg>
+      <p:bgPr>
+        <a:solidFill>
+          <a:schemeClr val="accent1">
+            <a:lumMod val="20000"/>
+            <a:lumOff val="80000"/>
+          </a:schemeClr>
+        </a:solidFill>
+        <a:effectLst/>
+      </p:bgPr>
+    </p:bg>
+    <p:spTree>
+      <p:nvGrpSpPr>
+        <p:cNvPr id="1" name=""/>
+        <p:cNvGrpSpPr/>
+        <p:nvPr/>
+      </p:nvGrpSpPr>
+      <p:grpSpPr>
+        <a:xfrm>
+          <a:off x="0" y="0"/>
+          <a:ext cx="0" cy="0"/>
+          <a:chOff x="0" y="0"/>
+          <a:chExt cx="0" cy="0"/>
+        </a:xfrm>
+      </p:grpSpPr>
+      <p:sp>
+        <p:nvSpPr>
+          <p:cNvPr id="2" name="Title 1">
+            <a:extLst>
+              <a:ext uri="{FF2B5EF4-FFF2-40B4-BE49-F238E27FC236}">
+                <a16:creationId xmlns:a16="http://schemas.microsoft.com/office/drawing/2014/main" id="{A0CCA9BC-1A7F-0830-63B8-1124658367E4}"/>
+              </a:ext>
+            </a:extLst>
+          </p:cNvPr>
+          <p:cNvSpPr>
+            <a:spLocks noGrp="1"/>
+          </p:cNvSpPr>
+          <p:nvPr>
+            <p:ph type="title"/>
+          </p:nvPr>
+        </p:nvSpPr>
+        <p:spPr>
+          <a:xfrm>
+            <a:off x="838200" y="853333"/>
+            <a:ext cx="4844143" cy="5151334"/>
+          </a:xfrm>
+        </p:spPr>
+        <p:txBody>
+          <a:bodyPr anchor="ctr">
+            <a:normAutofit/>
+          </a:bodyPr>
+          <a:lstStyle/>
+          <a:p>
+            <a:r>
+              <a:rPr lang="en-GB" dirty="0"/>
+              <a:t>Future Improvement Ideas:</a:t>
+            </a:r>
+          </a:p>
+        </p:txBody>
+      </p:sp>
+      <p:graphicFrame>
+        <p:nvGraphicFramePr>
+          <p:cNvPr id="6" name="Content Placeholder 5">
+            <a:extLst>
+              <a:ext uri="{FF2B5EF4-FFF2-40B4-BE49-F238E27FC236}">
+                <a16:creationId xmlns:a16="http://schemas.microsoft.com/office/drawing/2014/main" id="{6F9AE353-592D-5E1A-4910-7FC5797F6858}"/>
+              </a:ext>
+            </a:extLst>
+          </p:cNvPr>
+          <p:cNvGraphicFramePr>
+            <a:graphicFrameLocks noGrp="1"/>
+          </p:cNvGraphicFramePr>
+          <p:nvPr>
+            <p:ph idx="1"/>
+            <p:extLst>
+              <p:ext uri="{D42A27DB-BD31-4B8C-83A1-F6EECF244321}">
+                <p14:modId xmlns:p14="http://schemas.microsoft.com/office/powerpoint/2010/main" val="3273043140"/>
+              </p:ext>
+              <p:ext uri="{E7BDC344-281C-4309-B0C6-D0EE65EED2A8}">
+                <p202:designPr xmlns:p202="http://schemas.microsoft.com/office/powerpoint/2020/02/main">
+                  <p202:designTagLst>
+                    <p202:designTag name="ARCH:1:CLS" val="StackedSequentialContentTable"/>
+                  </p202:designTagLst>
+                </p202:designPr>
+              </p:ext>
+            </p:extLst>
+          </p:nvPr>
+        </p:nvGraphicFramePr>
+        <p:xfrm>
+          <a:off x="6455228" y="888853"/>
+          <a:ext cx="4997632" cy="5080297"/>
+        </p:xfrm>
+        <a:graphic>
+          <a:graphicData uri="http://schemas.openxmlformats.org/drawingml/2006/table">
+            <a:tbl>
+              <a:tblPr firstRow="1" bandRow="1">
+                <a:noFill/>
+                <a:tableStyleId>{8799B23B-EC83-4686-B30A-512413B5E67A}</a:tableStyleId>
+              </a:tblPr>
+              <a:tblGrid>
+                <a:gridCol w="622768">
+                  <a:extLst>
+                    <a:ext uri="{9D8B030D-6E8A-4147-A177-3AD203B41FA5}">
+                      <a16:colId xmlns:a16="http://schemas.microsoft.com/office/drawing/2014/main" val="3296208547"/>
+                    </a:ext>
+                  </a:extLst>
+                </a:gridCol>
+                <a:gridCol w="4374864">
+                  <a:extLst>
+                    <a:ext uri="{9D8B030D-6E8A-4147-A177-3AD203B41FA5}">
+                      <a16:colId xmlns:a16="http://schemas.microsoft.com/office/drawing/2014/main" val="3937313484"/>
+                    </a:ext>
+                  </a:extLst>
+                </a:gridCol>
+              </a:tblGrid>
+              <a:tr h="1195714">
+                <a:tc>
+                  <a:txBody>
+                    <a:bodyPr/>
+                    <a:lstStyle/>
+                    <a:p>
+                      <a:pPr algn="ctr">
+                        <a:buNone/>
+                      </a:pPr>
+                      <a:r>
+                        <a:rPr lang="en-GB" sz="3100" b="1" cap="none" spc="0">
+                          <a:solidFill>
+                            <a:schemeClr val="accent1"/>
+                          </a:solidFill>
+                          <a:effectLst/>
+                        </a:rPr>
+                        <a:t>1</a:t>
+                      </a:r>
+                    </a:p>
+                  </a:txBody>
+                  <a:tcPr marL="133849" marR="133849" marT="133849" marB="133849" anchor="ctr">
+                    <a:lnL w="12700" cmpd="sng">
+                      <a:noFill/>
+                      <a:prstDash val="solid"/>
+                    </a:lnL>
+                    <a:lnR w="12700" cmpd="sng">
+                      <a:noFill/>
+                      <a:prstDash val="solid"/>
+                    </a:lnR>
+                    <a:lnT w="6350" cap="flat" cmpd="sng" algn="ctr">
+                      <a:noFill/>
+                      <a:prstDash val="solid"/>
+                    </a:lnT>
+                    <a:lnB w="6350" cap="flat" cmpd="sng" algn="ctr">
+                      <a:noFill/>
+                      <a:prstDash val="solid"/>
+                    </a:lnB>
+                    <a:noFill/>
+                  </a:tcPr>
+                </a:tc>
+                <a:tc>
+                  <a:txBody>
+                    <a:bodyPr/>
+                    <a:lstStyle/>
+                    <a:p>
+                      <a:pPr algn="l"/>
+                      <a:r>
+                        <a:rPr lang="en-GB" sz="2000" b="0" cap="none" spc="0">
+                          <a:solidFill>
+                            <a:schemeClr val="tx1"/>
+                          </a:solidFill>
+                        </a:rPr>
+                        <a:t>Collect or engineer new features that are more closely related to smoking behaviour.</a:t>
+                      </a:r>
+                    </a:p>
+                  </a:txBody>
+                  <a:tcPr marL="133849" marR="133849" marT="133849" marB="133849" anchor="ctr">
+                    <a:lnL w="12700" cmpd="sng">
+                      <a:noFill/>
+                      <a:prstDash val="solid"/>
+                    </a:lnL>
+                    <a:lnR w="12700" cmpd="sng">
+                      <a:noFill/>
+                      <a:prstDash val="solid"/>
+                    </a:lnR>
+                    <a:lnT w="6350" cap="flat" cmpd="sng" algn="ctr">
+                      <a:noFill/>
+                      <a:prstDash val="solid"/>
+                    </a:lnT>
+                    <a:lnB w="6350" cap="flat" cmpd="sng" algn="ctr">
+                      <a:noFill/>
+                      <a:prstDash val="solid"/>
+                    </a:lnB>
+                    <a:noFill/>
+                  </a:tcPr>
+                </a:tc>
+                <a:extLst>
+                  <a:ext uri="{0D108BD9-81ED-4DB2-BD59-A6C34878D82A}">
+                    <a16:rowId xmlns:a16="http://schemas.microsoft.com/office/drawing/2014/main" val="2908052252"/>
+                  </a:ext>
+                </a:extLst>
+              </a:tr>
+              <a:tr h="1493155">
+                <a:tc>
+                  <a:txBody>
+                    <a:bodyPr/>
+                    <a:lstStyle/>
+                    <a:p>
+                      <a:pPr algn="ctr">
+                        <a:buNone/>
+                      </a:pPr>
+                      <a:r>
+                        <a:rPr lang="en-GB" sz="3100" b="1" cap="none" spc="0">
+                          <a:solidFill>
+                            <a:schemeClr val="accent1"/>
+                          </a:solidFill>
+                          <a:effectLst/>
+                        </a:rPr>
+                        <a:t>2</a:t>
+                      </a:r>
+                    </a:p>
+                  </a:txBody>
+                  <a:tcPr marL="133849" marR="133849" marT="133849" marB="133849" anchor="ctr">
+                    <a:lnL w="12700" cmpd="sng">
+                      <a:noFill/>
+                      <a:prstDash val="solid"/>
+                    </a:lnL>
+                    <a:lnR w="12700" cmpd="sng">
+                      <a:noFill/>
+                      <a:prstDash val="solid"/>
+                    </a:lnR>
+                    <a:lnT w="6350" cap="flat" cmpd="sng" algn="ctr">
+                      <a:noFill/>
+                      <a:prstDash val="solid"/>
+                    </a:lnT>
+                    <a:lnB w="6350" cap="flat" cmpd="sng" algn="ctr">
+                      <a:noFill/>
+                      <a:prstDash val="solid"/>
+                    </a:lnB>
+                    <a:noFill/>
+                  </a:tcPr>
+                </a:tc>
+                <a:tc>
+                  <a:txBody>
+                    <a:bodyPr/>
+                    <a:lstStyle/>
+                    <a:p>
+                      <a:pPr lvl="0" algn="l"/>
+                      <a:r>
+                        <a:rPr lang="en-GB" sz="2000" b="0" i="0" kern="1200" cap="none" spc="0">
+                          <a:solidFill>
+                            <a:schemeClr val="tx1"/>
+                          </a:solidFill>
+                          <a:effectLst/>
+                          <a:latin typeface="+mn-lt"/>
+                          <a:ea typeface="+mn-ea"/>
+                          <a:cs typeface="+mn-cs"/>
+                        </a:rPr>
+                        <a:t>Address class imbalance using resampling techniques or by gathering more data for the minority class.</a:t>
+                      </a:r>
+                    </a:p>
+                  </a:txBody>
+                  <a:tcPr marL="133849" marR="133849" marT="133849" marB="133849" anchor="ctr">
+                    <a:lnL w="12700" cmpd="sng">
+                      <a:noFill/>
+                      <a:prstDash val="solid"/>
+                    </a:lnL>
+                    <a:lnR w="12700" cmpd="sng">
+                      <a:noFill/>
+                      <a:prstDash val="solid"/>
+                    </a:lnR>
+                    <a:lnT w="6350" cap="flat" cmpd="sng" algn="ctr">
+                      <a:noFill/>
+                      <a:prstDash val="solid"/>
+                    </a:lnT>
+                    <a:lnB w="6350" cap="flat" cmpd="sng" algn="ctr">
+                      <a:noFill/>
+                      <a:prstDash val="solid"/>
+                    </a:lnB>
+                    <a:noFill/>
+                  </a:tcPr>
+                </a:tc>
+                <a:extLst>
+                  <a:ext uri="{0D108BD9-81ED-4DB2-BD59-A6C34878D82A}">
+                    <a16:rowId xmlns:a16="http://schemas.microsoft.com/office/drawing/2014/main" val="1570600705"/>
+                  </a:ext>
+                </a:extLst>
+              </a:tr>
+              <a:tr h="1195714">
+                <a:tc>
+                  <a:txBody>
+                    <a:bodyPr/>
+                    <a:lstStyle/>
+                    <a:p>
+                      <a:pPr algn="ctr">
+                        <a:buNone/>
+                      </a:pPr>
+                      <a:r>
+                        <a:rPr lang="en-GB" sz="3100" b="1" cap="none" spc="0">
+                          <a:solidFill>
+                            <a:schemeClr val="accent1"/>
+                          </a:solidFill>
+                          <a:effectLst/>
+                        </a:rPr>
+                        <a:t>3</a:t>
+                      </a:r>
+                    </a:p>
+                  </a:txBody>
+                  <a:tcPr marL="133849" marR="133849" marT="133849" marB="133849" anchor="ctr">
+                    <a:lnL w="12700" cmpd="sng">
+                      <a:noFill/>
+                      <a:prstDash val="solid"/>
+                    </a:lnL>
+                    <a:lnR w="12700" cmpd="sng">
+                      <a:noFill/>
+                      <a:prstDash val="solid"/>
+                    </a:lnR>
+                    <a:lnT w="6350" cap="flat" cmpd="sng" algn="ctr">
+                      <a:noFill/>
+                      <a:prstDash val="solid"/>
+                    </a:lnT>
+                    <a:lnB w="6350" cap="flat" cmpd="sng" algn="ctr">
+                      <a:noFill/>
+                      <a:prstDash val="solid"/>
+                    </a:lnB>
+                    <a:noFill/>
+                  </a:tcPr>
+                </a:tc>
+                <a:tc>
+                  <a:txBody>
+                    <a:bodyPr/>
+                    <a:lstStyle/>
+                    <a:p>
+                      <a:pPr lvl="0" algn="l"/>
+                      <a:r>
+                        <a:rPr lang="en-GB" sz="2000" b="0" i="0" kern="1200" cap="none" spc="0">
+                          <a:solidFill>
+                            <a:schemeClr val="tx1"/>
+                          </a:solidFill>
+                          <a:effectLst/>
+                          <a:latin typeface="+mn-lt"/>
+                          <a:ea typeface="+mn-ea"/>
+                          <a:cs typeface="+mn-cs"/>
+                        </a:rPr>
+                        <a:t>Explore alternative machine learning algorithms or ensemble methods that may handle imbalanced data better.</a:t>
+                      </a:r>
+                    </a:p>
+                  </a:txBody>
+                  <a:tcPr marL="133849" marR="133849" marT="133849" marB="133849" anchor="ctr">
+                    <a:lnL w="12700" cmpd="sng">
+                      <a:noFill/>
+                      <a:prstDash val="solid"/>
+                    </a:lnL>
+                    <a:lnR w="12700" cmpd="sng">
+                      <a:noFill/>
+                      <a:prstDash val="solid"/>
+                    </a:lnR>
+                    <a:lnT w="6350" cap="flat" cmpd="sng" algn="ctr">
+                      <a:noFill/>
+                      <a:prstDash val="solid"/>
+                    </a:lnT>
+                    <a:lnB w="6350" cap="flat" cmpd="sng" algn="ctr">
+                      <a:noFill/>
+                      <a:prstDash val="solid"/>
+                    </a:lnB>
+                    <a:noFill/>
+                  </a:tcPr>
+                </a:tc>
+                <a:extLst>
+                  <a:ext uri="{0D108BD9-81ED-4DB2-BD59-A6C34878D82A}">
+                    <a16:rowId xmlns:a16="http://schemas.microsoft.com/office/drawing/2014/main" val="281584038"/>
+                  </a:ext>
+                </a:extLst>
+              </a:tr>
+              <a:tr h="1195714">
+                <a:tc>
+                  <a:txBody>
+                    <a:bodyPr/>
+                    <a:lstStyle/>
+                    <a:p>
+                      <a:pPr algn="ctr">
+                        <a:buNone/>
+                      </a:pPr>
+                      <a:r>
+                        <a:rPr lang="en-GB" sz="3100" b="1" cap="none" spc="0">
+                          <a:solidFill>
+                            <a:schemeClr val="accent1"/>
+                          </a:solidFill>
+                          <a:effectLst/>
+                        </a:rPr>
+                        <a:t>4</a:t>
+                      </a:r>
+                    </a:p>
+                  </a:txBody>
+                  <a:tcPr marL="133849" marR="133849" marT="133849" marB="133849" anchor="ctr">
+                    <a:lnL w="12700" cmpd="sng">
+                      <a:noFill/>
+                      <a:prstDash val="solid"/>
+                    </a:lnL>
+                    <a:lnR w="12700" cmpd="sng">
+                      <a:noFill/>
+                      <a:prstDash val="solid"/>
+                    </a:lnR>
+                    <a:lnT w="6350" cap="flat" cmpd="sng" algn="ctr">
+                      <a:noFill/>
+                      <a:prstDash val="solid"/>
+                    </a:lnT>
+                    <a:lnB w="6350" cap="flat" cmpd="sng" algn="ctr">
+                      <a:noFill/>
+                      <a:prstDash val="solid"/>
+                    </a:lnB>
+                    <a:noFill/>
+                  </a:tcPr>
+                </a:tc>
+                <a:tc>
+                  <a:txBody>
+                    <a:bodyPr/>
+                    <a:lstStyle/>
+                    <a:p>
+                      <a:pPr lvl="0" algn="l"/>
+                      <a:r>
+                        <a:rPr lang="en-GB" sz="2000" b="0" i="0" kern="1200" cap="none" spc="0">
+                          <a:solidFill>
+                            <a:schemeClr val="tx1"/>
+                          </a:solidFill>
+                          <a:effectLst/>
+                          <a:latin typeface="+mn-lt"/>
+                          <a:ea typeface="+mn-ea"/>
+                          <a:cs typeface="+mn-cs"/>
+                        </a:rPr>
+                        <a:t>Perform feature selection or dimensionality reduction to identify any hidden patterns. </a:t>
+                      </a:r>
+                    </a:p>
+                  </a:txBody>
+                  <a:tcPr marL="133849" marR="133849" marT="133849" marB="133849" anchor="ctr">
+                    <a:lnL w="12700" cmpd="sng">
+                      <a:noFill/>
+                      <a:prstDash val="solid"/>
+                    </a:lnL>
+                    <a:lnR w="12700" cmpd="sng">
+                      <a:noFill/>
+                      <a:prstDash val="solid"/>
+                    </a:lnR>
+                    <a:lnT w="6350" cap="flat" cmpd="sng" algn="ctr">
+                      <a:noFill/>
+                      <a:prstDash val="solid"/>
+                    </a:lnT>
+                    <a:lnB w="6350" cap="flat" cmpd="sng" algn="ctr">
+                      <a:noFill/>
+                      <a:prstDash val="solid"/>
+                    </a:lnB>
+                    <a:noFill/>
+                  </a:tcPr>
+                </a:tc>
+                <a:extLst>
+                  <a:ext uri="{0D108BD9-81ED-4DB2-BD59-A6C34878D82A}">
+                    <a16:rowId xmlns:a16="http://schemas.microsoft.com/office/drawing/2014/main" val="2265869593"/>
+                  </a:ext>
+                </a:extLst>
+              </a:tr>
+            </a:tbl>
+          </a:graphicData>
+        </a:graphic>
+      </p:graphicFrame>
+    </p:spTree>
+    <p:extLst>
+      <p:ext uri="{BB962C8B-B14F-4D97-AF65-F5344CB8AC3E}">
+        <p14:creationId xmlns:p14="http://schemas.microsoft.com/office/powerpoint/2010/main" val="3511969397"/>
+      </p:ext>
+    </p:extLst>
+  </p:cSld>
+  <p:clrMapOvr>
+    <a:masterClrMapping/>
+  </p:clrMapOvr>
+</p:sld>
+</file>
+
+<file path=ppt/slides/slide33.xml><?xml version="1.0" encoding="utf-8"?>
+<p:sld xmlns:a="http://schemas.openxmlformats.org/drawingml/2006/main" xmlns:r="http://schemas.openxmlformats.org/officeDocument/2006/relationships" xmlns:p="http://schemas.openxmlformats.org/presentationml/2006/main">
+  <p:cSld>
+    <p:bg>
+      <p:bgPr>
+        <a:solidFill>
+          <a:schemeClr val="accent1">
+            <a:lumMod val="20000"/>
+            <a:lumOff val="80000"/>
+          </a:schemeClr>
+        </a:solidFill>
+        <a:effectLst/>
+      </p:bgPr>
+    </p:bg>
+    <p:spTree>
+      <p:nvGrpSpPr>
+        <p:cNvPr id="1" name=""/>
+        <p:cNvGrpSpPr/>
+        <p:nvPr/>
+      </p:nvGrpSpPr>
+      <p:grpSpPr>
+        <a:xfrm>
+          <a:off x="0" y="0"/>
+          <a:ext cx="0" cy="0"/>
+          <a:chOff x="0" y="0"/>
+          <a:chExt cx="0" cy="0"/>
+        </a:xfrm>
+      </p:grpSpPr>
+      <p:sp>
+        <p:nvSpPr>
+          <p:cNvPr id="2" name="Title 1">
+            <a:extLst>
+              <a:ext uri="{FF2B5EF4-FFF2-40B4-BE49-F238E27FC236}">
+                <a16:creationId xmlns:a16="http://schemas.microsoft.com/office/drawing/2014/main" id="{28BAC361-0D7A-DC05-86B5-6DD77D322F5B}"/>
+              </a:ext>
+            </a:extLst>
+          </p:cNvPr>
+          <p:cNvSpPr>
+            <a:spLocks noGrp="1"/>
+          </p:cNvSpPr>
+          <p:nvPr>
+            <p:ph type="title"/>
+          </p:nvPr>
+        </p:nvSpPr>
+        <p:spPr>
+          <a:xfrm>
+            <a:off x="838200" y="853333"/>
+            <a:ext cx="4844143" cy="2792412"/>
+          </a:xfrm>
+          <a:noFill/>
+        </p:spPr>
+        <p:txBody>
+          <a:bodyPr anchor="t">
+            <a:noAutofit/>
+          </a:bodyPr>
+          <a:lstStyle/>
+          <a:p>
+            <a:r>
+              <a:rPr lang="en-US" dirty="0"/>
+              <a:t>Links and Credits</a:t>
+            </a:r>
+          </a:p>
+        </p:txBody>
+      </p:sp>
+      <p:sp>
+        <p:nvSpPr>
+          <p:cNvPr id="4" name="Content Placeholder 3">
+            <a:extLst>
+              <a:ext uri="{FF2B5EF4-FFF2-40B4-BE49-F238E27FC236}">
+                <a16:creationId xmlns:a16="http://schemas.microsoft.com/office/drawing/2014/main" id="{D97126AE-AE4A-97A5-21F5-E5ACF7E0605F}"/>
+              </a:ext>
+            </a:extLst>
+          </p:cNvPr>
+          <p:cNvSpPr>
+            <a:spLocks noGrp="1"/>
+          </p:cNvSpPr>
+          <p:nvPr>
+            <p:ph sz="half" idx="2"/>
+          </p:nvPr>
+        </p:nvSpPr>
+        <p:spPr>
+          <a:xfrm>
+            <a:off x="838200" y="3813682"/>
+            <a:ext cx="4898571" cy="2188317"/>
+          </a:xfrm>
+          <a:noFill/>
+        </p:spPr>
+        <p:txBody>
+          <a:bodyPr vert="horz" lIns="91440" tIns="45720" rIns="91440" bIns="45720" rtlCol="0" anchor="t">
+            <a:normAutofit lnSpcReduction="10000"/>
+          </a:bodyPr>
+          <a:lstStyle/>
+          <a:p>
+            <a:r>
+              <a:rPr lang="en-US" dirty="0"/>
+              <a:t>This project was completed as part of the </a:t>
+            </a:r>
+            <a:r>
+              <a:rPr lang="en-US" b="1" dirty="0" err="1"/>
+              <a:t>Codecademy</a:t>
+            </a:r>
+            <a:r>
+              <a:rPr lang="en-US" dirty="0"/>
+              <a:t> </a:t>
+            </a:r>
+            <a:r>
+              <a:rPr lang="en-GB" b="1" dirty="0"/>
+              <a:t>Data Scientist: Machine Learning Specialist </a:t>
+            </a:r>
+            <a:r>
+              <a:rPr lang="en-US" dirty="0"/>
+              <a:t>career path.</a:t>
+            </a:r>
+          </a:p>
+          <a:p>
+            <a:r>
+              <a:rPr lang="en-US" dirty="0"/>
+              <a:t>Inspiration for some improvements to the models built in this project were taken from the </a:t>
+            </a:r>
+            <a:r>
+              <a:rPr lang="en-US" b="1" dirty="0" err="1"/>
+              <a:t>OKCupid</a:t>
+            </a:r>
+            <a:r>
+              <a:rPr lang="en-US" b="1" dirty="0"/>
+              <a:t> project </a:t>
+            </a:r>
+            <a:r>
+              <a:rPr lang="en-US" dirty="0"/>
+              <a:t>by </a:t>
+            </a:r>
+            <a:r>
+              <a:rPr lang="en-US" b="1" dirty="0"/>
+              <a:t>nsmith7atafi</a:t>
+            </a:r>
+            <a:r>
+              <a:rPr lang="en-US" dirty="0"/>
+              <a:t> on GitHub.</a:t>
+            </a:r>
+          </a:p>
+        </p:txBody>
+      </p:sp>
+      <p:sp>
+        <p:nvSpPr>
+          <p:cNvPr id="3" name="Content Placeholder 2">
+            <a:extLst>
+              <a:ext uri="{FF2B5EF4-FFF2-40B4-BE49-F238E27FC236}">
+                <a16:creationId xmlns:a16="http://schemas.microsoft.com/office/drawing/2014/main" id="{1BE98EFF-197D-3136-70B9-7BBD30A48931}"/>
+              </a:ext>
+            </a:extLst>
+          </p:cNvPr>
+          <p:cNvSpPr>
+            <a:spLocks noGrp="1"/>
+          </p:cNvSpPr>
+          <p:nvPr>
+            <p:ph sz="half" idx="13"/>
+          </p:nvPr>
+        </p:nvSpPr>
+        <p:spPr>
+          <a:xfrm>
+            <a:off x="6455228" y="853334"/>
+            <a:ext cx="4898571" cy="5151334"/>
+          </a:xfrm>
+          <a:noFill/>
+        </p:spPr>
+        <p:txBody>
+          <a:bodyPr vert="horz" lIns="91440" tIns="45720" rIns="91440" bIns="45720" rtlCol="0" anchor="t">
+            <a:normAutofit/>
+          </a:bodyPr>
+          <a:lstStyle/>
+          <a:p>
+            <a:pPr lvl="0"/>
+            <a:r>
+              <a:rPr lang="en-GB" dirty="0">
+                <a:solidFill>
+                  <a:srgbClr val="B32752"/>
+                </a:solidFill>
+                <a:hlinkClick r:id="rId2">
+                  <a:extLst>
+                    <a:ext uri="{A12FA001-AC4F-418D-AE19-62706E023703}">
+                      <ahyp:hlinkClr xmlns:ahyp="http://schemas.microsoft.com/office/drawing/2018/hyperlinkcolor" val="tx"/>
+                    </a:ext>
+                  </a:extLst>
+                </a:hlinkClick>
+              </a:rPr>
+              <a:t>codecademy.com/paths/data-science/tracks/</a:t>
+            </a:r>
+            <a:r>
+              <a:rPr lang="en-GB" dirty="0" err="1">
+                <a:solidFill>
+                  <a:srgbClr val="B32752"/>
+                </a:solidFill>
+                <a:hlinkClick r:id="rId2">
+                  <a:extLst>
+                    <a:ext uri="{A12FA001-AC4F-418D-AE19-62706E023703}">
+                      <ahyp:hlinkClr xmlns:ahyp="http://schemas.microsoft.com/office/drawing/2018/hyperlinkcolor" val="tx"/>
+                    </a:ext>
+                  </a:extLst>
+                </a:hlinkClick>
+              </a:rPr>
+              <a:t>dscp</a:t>
+            </a:r>
+            <a:r>
+              <a:rPr lang="en-GB" dirty="0">
+                <a:solidFill>
+                  <a:srgbClr val="B32752"/>
+                </a:solidFill>
+                <a:hlinkClick r:id="rId2">
+                  <a:extLst>
+                    <a:ext uri="{A12FA001-AC4F-418D-AE19-62706E023703}">
+                      <ahyp:hlinkClr xmlns:ahyp="http://schemas.microsoft.com/office/drawing/2018/hyperlinkcolor" val="tx"/>
+                    </a:ext>
+                  </a:extLst>
+                </a:hlinkClick>
+              </a:rPr>
+              <a:t>-machine-learning-portfolio-project/modules/</a:t>
+            </a:r>
+            <a:r>
+              <a:rPr lang="en-GB" dirty="0" err="1">
+                <a:solidFill>
+                  <a:srgbClr val="B32752"/>
+                </a:solidFill>
+                <a:hlinkClick r:id="rId2">
+                  <a:extLst>
+                    <a:ext uri="{A12FA001-AC4F-418D-AE19-62706E023703}">
+                      <ahyp:hlinkClr xmlns:ahyp="http://schemas.microsoft.com/office/drawing/2018/hyperlinkcolor" val="tx"/>
+                    </a:ext>
+                  </a:extLst>
+                </a:hlinkClick>
+              </a:rPr>
+              <a:t>dscp</a:t>
+            </a:r>
+            <a:r>
+              <a:rPr lang="en-GB" dirty="0">
+                <a:solidFill>
+                  <a:srgbClr val="B32752"/>
+                </a:solidFill>
+                <a:hlinkClick r:id="rId2">
+                  <a:extLst>
+                    <a:ext uri="{A12FA001-AC4F-418D-AE19-62706E023703}">
+                      <ahyp:hlinkClr xmlns:ahyp="http://schemas.microsoft.com/office/drawing/2018/hyperlinkcolor" val="tx"/>
+                    </a:ext>
+                  </a:extLst>
+                </a:hlinkClick>
+              </a:rPr>
+              <a:t>-group-project-</a:t>
+            </a:r>
+            <a:r>
+              <a:rPr lang="en-GB" dirty="0" err="1">
+                <a:solidFill>
+                  <a:srgbClr val="B32752"/>
+                </a:solidFill>
+                <a:hlinkClick r:id="rId2">
+                  <a:extLst>
+                    <a:ext uri="{A12FA001-AC4F-418D-AE19-62706E023703}">
+                      <ahyp:hlinkClr xmlns:ahyp="http://schemas.microsoft.com/office/drawing/2018/hyperlinkcolor" val="tx"/>
+                    </a:ext>
+                  </a:extLst>
+                </a:hlinkClick>
+              </a:rPr>
+              <a:t>okcupid</a:t>
+            </a:r>
+            <a:r>
+              <a:rPr lang="en-GB" dirty="0">
+                <a:solidFill>
+                  <a:srgbClr val="B32752"/>
+                </a:solidFill>
+                <a:hlinkClick r:id="rId2">
+                  <a:extLst>
+                    <a:ext uri="{A12FA001-AC4F-418D-AE19-62706E023703}">
+                      <ahyp:hlinkClr xmlns:ahyp="http://schemas.microsoft.com/office/drawing/2018/hyperlinkcolor" val="tx"/>
+                    </a:ext>
+                  </a:extLst>
+                </a:hlinkClick>
+              </a:rPr>
+              <a:t>-date-a-scientist/</a:t>
+            </a:r>
+            <a:r>
+              <a:rPr lang="en-GB" dirty="0" err="1">
+                <a:solidFill>
+                  <a:srgbClr val="B32752"/>
+                </a:solidFill>
+                <a:hlinkClick r:id="rId2">
+                  <a:extLst>
+                    <a:ext uri="{A12FA001-AC4F-418D-AE19-62706E023703}">
+                      <ahyp:hlinkClr xmlns:ahyp="http://schemas.microsoft.com/office/drawing/2018/hyperlinkcolor" val="tx"/>
+                    </a:ext>
+                  </a:extLst>
+                </a:hlinkClick>
+              </a:rPr>
+              <a:t>informationals</a:t>
+            </a:r>
+            <a:r>
+              <a:rPr lang="en-GB" dirty="0">
+                <a:solidFill>
+                  <a:srgbClr val="B32752"/>
+                </a:solidFill>
+                <a:hlinkClick r:id="rId2">
+                  <a:extLst>
+                    <a:ext uri="{A12FA001-AC4F-418D-AE19-62706E023703}">
+                      <ahyp:hlinkClr xmlns:ahyp="http://schemas.microsoft.com/office/drawing/2018/hyperlinkcolor" val="tx"/>
+                    </a:ext>
+                  </a:extLst>
+                </a:hlinkClick>
+              </a:rPr>
+              <a:t>/</a:t>
+            </a:r>
+            <a:r>
+              <a:rPr lang="en-GB" dirty="0" err="1">
+                <a:solidFill>
+                  <a:srgbClr val="B32752"/>
+                </a:solidFill>
+                <a:hlinkClick r:id="rId2">
+                  <a:extLst>
+                    <a:ext uri="{A12FA001-AC4F-418D-AE19-62706E023703}">
+                      <ahyp:hlinkClr xmlns:ahyp="http://schemas.microsoft.com/office/drawing/2018/hyperlinkcolor" val="tx"/>
+                    </a:ext>
+                  </a:extLst>
+                </a:hlinkClick>
+              </a:rPr>
+              <a:t>dscp</a:t>
+            </a:r>
+            <a:r>
+              <a:rPr lang="en-GB" dirty="0">
+                <a:solidFill>
+                  <a:srgbClr val="B32752"/>
+                </a:solidFill>
+                <a:hlinkClick r:id="rId2">
+                  <a:extLst>
+                    <a:ext uri="{A12FA001-AC4F-418D-AE19-62706E023703}">
+                      <ahyp:hlinkClr xmlns:ahyp="http://schemas.microsoft.com/office/drawing/2018/hyperlinkcolor" val="tx"/>
+                    </a:ext>
+                  </a:extLst>
+                </a:hlinkClick>
+              </a:rPr>
+              <a:t>-group-project-</a:t>
+            </a:r>
+            <a:r>
+              <a:rPr lang="en-GB" dirty="0" err="1">
+                <a:solidFill>
+                  <a:srgbClr val="B32752"/>
+                </a:solidFill>
+                <a:hlinkClick r:id="rId2">
+                  <a:extLst>
+                    <a:ext uri="{A12FA001-AC4F-418D-AE19-62706E023703}">
+                      <ahyp:hlinkClr xmlns:ahyp="http://schemas.microsoft.com/office/drawing/2018/hyperlinkcolor" val="tx"/>
+                    </a:ext>
+                  </a:extLst>
+                </a:hlinkClick>
+              </a:rPr>
+              <a:t>okcupid</a:t>
+            </a:r>
+            <a:r>
+              <a:rPr lang="en-GB" dirty="0">
+                <a:solidFill>
+                  <a:srgbClr val="B32752"/>
+                </a:solidFill>
+                <a:hlinkClick r:id="rId2">
+                  <a:extLst>
+                    <a:ext uri="{A12FA001-AC4F-418D-AE19-62706E023703}">
+                      <ahyp:hlinkClr xmlns:ahyp="http://schemas.microsoft.com/office/drawing/2018/hyperlinkcolor" val="tx"/>
+                    </a:ext>
+                  </a:extLst>
+                </a:hlinkClick>
+              </a:rPr>
+              <a:t>-date-a-scientist </a:t>
+            </a:r>
+            <a:endParaRPr lang="en-GB" dirty="0">
+              <a:solidFill>
+                <a:srgbClr val="B32752"/>
+              </a:solidFill>
+            </a:endParaRPr>
+          </a:p>
+          <a:p>
+            <a:pPr marL="342900" lvl="0" indent="-342900">
+              <a:buFont typeface="Arial" panose="020B0604020202020204" pitchFamily="34" charset="0"/>
+              <a:buChar char="•"/>
+            </a:pPr>
+            <a:endParaRPr lang="en-GB" dirty="0">
+              <a:solidFill>
+                <a:srgbClr val="B32752"/>
+              </a:solidFill>
+            </a:endParaRPr>
+          </a:p>
+          <a:p>
+            <a:pPr lvl="0"/>
+            <a:r>
+              <a:rPr lang="en-GB" dirty="0">
+                <a:solidFill>
+                  <a:srgbClr val="B32752"/>
+                </a:solidFill>
+                <a:hlinkClick r:id="rId3">
+                  <a:extLst>
+                    <a:ext uri="{A12FA001-AC4F-418D-AE19-62706E023703}">
+                      <ahyp:hlinkClr xmlns:ahyp="http://schemas.microsoft.com/office/drawing/2018/hyperlinkcolor" val="tx"/>
+                    </a:ext>
+                  </a:extLst>
+                </a:hlinkClick>
+              </a:rPr>
+              <a:t>nsmith7atafi/</a:t>
+            </a:r>
+            <a:r>
+              <a:rPr lang="en-GB" dirty="0" err="1">
+                <a:solidFill>
+                  <a:srgbClr val="B32752"/>
+                </a:solidFill>
+                <a:hlinkClick r:id="rId3">
+                  <a:extLst>
+                    <a:ext uri="{A12FA001-AC4F-418D-AE19-62706E023703}">
+                      <ahyp:hlinkClr xmlns:ahyp="http://schemas.microsoft.com/office/drawing/2018/hyperlinkcolor" val="tx"/>
+                    </a:ext>
+                  </a:extLst>
+                </a:hlinkClick>
+              </a:rPr>
+              <a:t>OKCupid_Project</a:t>
+            </a:r>
+            <a:r>
+              <a:rPr lang="en-GB" dirty="0">
+                <a:solidFill>
+                  <a:srgbClr val="B32752"/>
+                </a:solidFill>
+                <a:hlinkClick r:id="rId3">
+                  <a:extLst>
+                    <a:ext uri="{A12FA001-AC4F-418D-AE19-62706E023703}">
+                      <ahyp:hlinkClr xmlns:ahyp="http://schemas.microsoft.com/office/drawing/2018/hyperlinkcolor" val="tx"/>
+                    </a:ext>
+                  </a:extLst>
+                </a:hlinkClick>
+              </a:rPr>
+              <a:t>: </a:t>
+            </a:r>
+            <a:r>
+              <a:rPr lang="en-GB" dirty="0" err="1">
+                <a:solidFill>
+                  <a:srgbClr val="B32752"/>
+                </a:solidFill>
+                <a:hlinkClick r:id="rId3">
+                  <a:extLst>
+                    <a:ext uri="{A12FA001-AC4F-418D-AE19-62706E023703}">
+                      <ahyp:hlinkClr xmlns:ahyp="http://schemas.microsoft.com/office/drawing/2018/hyperlinkcolor" val="tx"/>
+                    </a:ext>
+                  </a:extLst>
+                </a:hlinkClick>
+              </a:rPr>
+              <a:t>Codecademy</a:t>
+            </a:r>
+            <a:r>
+              <a:rPr lang="en-GB" dirty="0">
+                <a:solidFill>
+                  <a:srgbClr val="B32752"/>
+                </a:solidFill>
+                <a:hlinkClick r:id="rId3">
+                  <a:extLst>
+                    <a:ext uri="{A12FA001-AC4F-418D-AE19-62706E023703}">
+                      <ahyp:hlinkClr xmlns:ahyp="http://schemas.microsoft.com/office/drawing/2018/hyperlinkcolor" val="tx"/>
+                    </a:ext>
+                  </a:extLst>
+                </a:hlinkClick>
+              </a:rPr>
+              <a:t> Build a Machine Learning Model Capstone Project: </a:t>
+            </a:r>
+            <a:r>
+              <a:rPr lang="en-GB" dirty="0" err="1">
+                <a:solidFill>
+                  <a:srgbClr val="B32752"/>
+                </a:solidFill>
+                <a:hlinkClick r:id="rId3">
+                  <a:extLst>
+                    <a:ext uri="{A12FA001-AC4F-418D-AE19-62706E023703}">
+                      <ahyp:hlinkClr xmlns:ahyp="http://schemas.microsoft.com/office/drawing/2018/hyperlinkcolor" val="tx"/>
+                    </a:ext>
+                  </a:extLst>
+                </a:hlinkClick>
+              </a:rPr>
+              <a:t>OKCupid</a:t>
+            </a:r>
+            <a:r>
+              <a:rPr lang="en-GB" dirty="0">
+                <a:solidFill>
+                  <a:srgbClr val="B32752"/>
+                </a:solidFill>
+                <a:hlinkClick r:id="rId3">
+                  <a:extLst>
+                    <a:ext uri="{A12FA001-AC4F-418D-AE19-62706E023703}">
+                      <ahyp:hlinkClr xmlns:ahyp="http://schemas.microsoft.com/office/drawing/2018/hyperlinkcolor" val="tx"/>
+                    </a:ext>
+                  </a:extLst>
+                </a:hlinkClick>
+              </a:rPr>
+              <a:t> Date-A-Scientist</a:t>
+            </a:r>
+            <a:endParaRPr lang="en-GB" dirty="0">
+              <a:solidFill>
+                <a:srgbClr val="B32752"/>
+              </a:solidFill>
+            </a:endParaRPr>
+          </a:p>
+        </p:txBody>
+      </p:sp>
+    </p:spTree>
+    <p:extLst>
+      <p:ext uri="{BB962C8B-B14F-4D97-AF65-F5344CB8AC3E}">
+        <p14:creationId xmlns:p14="http://schemas.microsoft.com/office/powerpoint/2010/main" val="1210802199"/>
+      </p:ext>
+    </p:extLst>
+  </p:cSld>
+  <p:clrMapOvr>
+    <a:masterClrMapping/>
+  </p:clrMapOvr>
+</p:sld>
+</file>
+
+<file path=ppt/slides/slide34.xml><?xml version="1.0" encoding="utf-8"?>
+<p:sld xmlns:a="http://schemas.openxmlformats.org/drawingml/2006/main" xmlns:r="http://schemas.openxmlformats.org/officeDocument/2006/relationships" xmlns:p="http://schemas.openxmlformats.org/presentationml/2006/main">
+  <p:cSld>
+    <p:spTree>
+      <p:nvGrpSpPr>
+        <p:cNvPr id="1" name=""/>
+        <p:cNvGrpSpPr/>
+        <p:nvPr/>
+      </p:nvGrpSpPr>
+      <p:grpSpPr>
+        <a:xfrm>
+          <a:off x="0" y="0"/>
+          <a:ext cx="0" cy="0"/>
+          <a:chOff x="0" y="0"/>
+          <a:chExt cx="0" cy="0"/>
+        </a:xfrm>
+      </p:grpSpPr>
+      <p:sp>
+        <p:nvSpPr>
+          <p:cNvPr id="3" name="Content Placeholder 2">
+            <a:extLst>
+              <a:ext uri="{FF2B5EF4-FFF2-40B4-BE49-F238E27FC236}">
+                <a16:creationId xmlns:a16="http://schemas.microsoft.com/office/drawing/2014/main" id="{7A2BF019-18D5-E448-A4CD-FF49F5494431}"/>
+              </a:ext>
+            </a:extLst>
+          </p:cNvPr>
+          <p:cNvSpPr>
+            <a:spLocks noGrp="1"/>
+          </p:cNvSpPr>
+          <p:nvPr>
+            <p:ph type="title"/>
+            <p:extLst>
+              <p:ext uri="{E7BDC344-281C-4309-B0C6-D0EE65EED2A8}">
+                <p202:designPr xmlns:p202="http://schemas.microsoft.com/office/powerpoint/2020/02/main">
+                  <p202:designTagLst>
+                    <p202:designTag name="ARCH:1:CLS" val="LargePlainText"/>
+                  </p202:designTagLst>
+                </p202:designPr>
+              </p:ext>
+            </p:extLst>
+          </p:nvPr>
+        </p:nvSpPr>
+        <p:spPr>
+          <a:xfrm>
+            <a:off x="1704181" y="2167821"/>
+            <a:ext cx="8783638" cy="2522359"/>
+          </a:xfrm>
+        </p:spPr>
+        <p:txBody>
+          <a:bodyPr anchor="ctr">
+            <a:normAutofit/>
+          </a:bodyPr>
+          <a:lstStyle/>
+          <a:p>
+            <a:pPr indent="0">
+              <a:buNone/>
+            </a:pPr>
+            <a:r>
+              <a:rPr lang="en-GB" b="1" i="0" kern="1200" cap="all" spc="300" baseline="0" dirty="0"/>
+              <a:t>Smoking kills. Protect your health.</a:t>
+            </a:r>
+            <a:endParaRPr lang="en-GB" dirty="0"/>
+          </a:p>
+        </p:txBody>
+      </p:sp>
+    </p:spTree>
+    <p:extLst>
+      <p:ext uri="{BB962C8B-B14F-4D97-AF65-F5344CB8AC3E}">
+        <p14:creationId xmlns:p14="http://schemas.microsoft.com/office/powerpoint/2010/main" val="1100299613"/>
+      </p:ext>
+    </p:extLst>
+  </p:cSld>
+  <p:clrMapOvr>
+    <a:masterClrMapping/>
+  </p:clrMapOvr>
+</p:sld>
+</file>
+
+<file path=ppt/slides/slide35.xml><?xml version="1.0" encoding="utf-8"?>
+<p:sld xmlns:a="http://schemas.openxmlformats.org/drawingml/2006/main" xmlns:r="http://schemas.openxmlformats.org/officeDocument/2006/relationships" xmlns:p="http://schemas.openxmlformats.org/presentationml/2006/main">
+  <p:cSld>
+    <p:bg>
+      <p:bgPr>
+        <a:solidFill>
+          <a:srgbClr val="B32752"/>
+        </a:solidFill>
+        <a:effectLst/>
+      </p:bgPr>
+    </p:bg>
+    <p:spTree>
+      <p:nvGrpSpPr>
+        <p:cNvPr id="1" name=""/>
+        <p:cNvGrpSpPr/>
+        <p:nvPr/>
+      </p:nvGrpSpPr>
+      <p:grpSpPr>
+        <a:xfrm>
+          <a:off x="0" y="0"/>
+          <a:ext cx="0" cy="0"/>
+          <a:chOff x="0" y="0"/>
+          <a:chExt cx="0" cy="0"/>
+        </a:xfrm>
+      </p:grpSpPr>
+      <p:sp>
+        <p:nvSpPr>
+          <p:cNvPr id="3" name="Title 2">
+            <a:extLst>
+              <a:ext uri="{FF2B5EF4-FFF2-40B4-BE49-F238E27FC236}">
+                <a16:creationId xmlns:a16="http://schemas.microsoft.com/office/drawing/2014/main" id="{A0034E89-1952-5288-08A0-70A4A73BE39E}"/>
+              </a:ext>
+            </a:extLst>
+          </p:cNvPr>
+          <p:cNvSpPr>
+            <a:spLocks noGrp="1"/>
+          </p:cNvSpPr>
+          <p:nvPr>
+            <p:ph type="title"/>
+          </p:nvPr>
+        </p:nvSpPr>
+        <p:spPr>
+          <a:xfrm>
+            <a:off x="1704181" y="2167821"/>
+            <a:ext cx="8783638" cy="2522359"/>
+          </a:xfrm>
+          <a:noFill/>
+        </p:spPr>
+        <p:txBody>
+          <a:bodyPr>
+            <a:noAutofit/>
+          </a:bodyPr>
+          <a:lstStyle/>
+          <a:p>
+            <a:r>
+              <a:rPr lang="en-US" dirty="0"/>
+              <a:t>Thank you.</a:t>
+            </a:r>
+          </a:p>
+        </p:txBody>
+      </p:sp>
+    </p:spTree>
+    <p:extLst>
+      <p:ext uri="{BB962C8B-B14F-4D97-AF65-F5344CB8AC3E}">
+        <p14:creationId xmlns:p14="http://schemas.microsoft.com/office/powerpoint/2010/main" val="3058085568"/>
+      </p:ext>
+    </p:extLst>
+  </p:cSld>
+  <p:clrMapOvr>
+    <a:masterClrMapping/>
+  </p:clrMapOvr>
+</p:sld>
+</file>
+
+<file path=ppt/slides/slide4.xml><?xml version="1.0" encoding="utf-8"?>
+<p:sld xmlns:a="http://schemas.openxmlformats.org/drawingml/2006/main" xmlns:r="http://schemas.openxmlformats.org/officeDocument/2006/relationships" xmlns:p="http://schemas.openxmlformats.org/presentationml/2006/main">
+  <p:cSld>
+    <p:spTree>
+      <p:nvGrpSpPr>
+        <p:cNvPr id="1" name=""/>
+        <p:cNvGrpSpPr/>
+        <p:nvPr/>
+      </p:nvGrpSpPr>
+      <p:grpSpPr>
+        <a:xfrm>
+          <a:off x="0" y="0"/>
+          <a:ext cx="0" cy="0"/>
+          <a:chOff x="0" y="0"/>
+          <a:chExt cx="0" cy="0"/>
+        </a:xfrm>
+      </p:grpSpPr>
+      <p:sp>
+        <p:nvSpPr>
+          <p:cNvPr id="3" name="Content Placeholder 2">
+            <a:extLst>
+              <a:ext uri="{FF2B5EF4-FFF2-40B4-BE49-F238E27FC236}">
+                <a16:creationId xmlns:a16="http://schemas.microsoft.com/office/drawing/2014/main" id="{9B33A463-AB57-6332-E6A2-A1A7AB3ED115}"/>
+              </a:ext>
+            </a:extLst>
+          </p:cNvPr>
+          <p:cNvSpPr>
+            <a:spLocks noGrp="1"/>
+          </p:cNvSpPr>
+          <p:nvPr>
+            <p:ph type="title"/>
+            <p:extLst>
+              <p:ext uri="{E7BDC344-281C-4309-B0C6-D0EE65EED2A8}">
+                <p202:designPr xmlns:p202="http://schemas.microsoft.com/office/powerpoint/2020/02/main">
+                  <p202:designTagLst>
+                    <p202:designTag name="ARCH:1:CLS" val="LargePlainText"/>
+                  </p202:designTagLst>
+                </p202:designPr>
+              </p:ext>
+            </p:extLst>
+          </p:nvPr>
+        </p:nvSpPr>
+        <p:spPr>
+          <a:xfrm>
+            <a:off x="1704181" y="2167821"/>
+            <a:ext cx="8783638" cy="2522359"/>
+          </a:xfrm>
+        </p:spPr>
+        <p:txBody>
+          <a:bodyPr anchor="ctr">
+            <a:normAutofit/>
+          </a:bodyPr>
+          <a:lstStyle/>
+          <a:p>
+            <a:pPr indent="0">
+              <a:buNone/>
+            </a:pPr>
+            <a:r>
+              <a:rPr lang="en-GB" sz="1800" b="1" dirty="0"/>
+              <a:t>“</a:t>
+            </a:r>
+            <a:r>
+              <a:rPr lang="en-GB" sz="1800" b="1" kern="1200" cap="all" spc="300" dirty="0"/>
+              <a:t>In recent years, there has been a massive rise in the usage of dating apps to find love. Many of these apps use sophisticated data science techniques to recommend possible matches to users and to optimize the user experience. These apps give us access to a wealth of information that we’ve never had before about how different people experience romance.” </a:t>
+            </a:r>
+            <a:br>
+              <a:rPr lang="en-GB" sz="1800" b="1" kern="1200" cap="all" spc="300" dirty="0"/>
+            </a:br>
+            <a:br>
+              <a:rPr lang="en-GB" sz="1800" b="1" kern="1200" cap="all" spc="300" dirty="0"/>
+            </a:br>
+            <a:r>
+              <a:rPr lang="en-GB" sz="1800" b="1" kern="1200" cap="all" spc="300" dirty="0"/>
+              <a:t>– </a:t>
+            </a:r>
+            <a:r>
+              <a:rPr lang="en-GB" sz="1800" b="1" kern="1200" cap="all" spc="300" dirty="0" err="1"/>
+              <a:t>Codecademy</a:t>
+            </a:r>
+            <a:endParaRPr lang="en-GB" sz="1800" dirty="0"/>
+          </a:p>
+        </p:txBody>
+      </p:sp>
+    </p:spTree>
+    <p:extLst>
+      <p:ext uri="{BB962C8B-B14F-4D97-AF65-F5344CB8AC3E}">
+        <p14:creationId xmlns:p14="http://schemas.microsoft.com/office/powerpoint/2010/main" val="806335326"/>
       </p:ext>
     </p:extLst>
   </p:cSld>
@@ -33692,10 +37028,7 @@
     <p:bg>
       <p:bgPr>
         <a:solidFill>
-          <a:schemeClr val="accent1">
-            <a:lumMod val="20000"/>
-            <a:lumOff val="80000"/>
-          </a:schemeClr>
+          <a:schemeClr val="bg1"/>
         </a:solidFill>
         <a:effectLst/>
       </p:bgPr>
@@ -34976,6 +38309,15 @@
 </file>
 
 <file path=customXml/item1.xml><?xml version="1.0" encoding="utf-8"?>
+<?mso-contentType ?>
+<FormTemplates xmlns="http://schemas.microsoft.com/sharepoint/v3/contenttype/forms">
+  <Display>DocumentLibraryForm</Display>
+  <Edit>DocumentLibraryForm</Edit>
+  <New>DocumentLibraryForm</New>
+</FormTemplates>
+</file>
+
+<file path=customXml/item2.xml><?xml version="1.0" encoding="utf-8"?>
 <ct:contentTypeSchema xmlns:ct="http://schemas.microsoft.com/office/2006/metadata/contentType" xmlns:ma="http://schemas.microsoft.com/office/2006/metadata/properties/metaAttributes" ct:_="" ma:_="" ma:contentTypeName="Document" ma:contentTypeID="0x01010079F111ED35F8CC479449609E8A0923A6" ma:contentTypeVersion="30" ma:contentTypeDescription="Create a new document." ma:contentTypeScope="" ma:versionID="cec0622158e8f13124e9e8fd4de31bd1">
   <xsd:schema xmlns:xsd="http://www.w3.org/2001/XMLSchema" xmlns:xs="http://www.w3.org/2001/XMLSchema" xmlns:p="http://schemas.microsoft.com/office/2006/metadata/properties" xmlns:ns1="http://schemas.microsoft.com/sharepoint/v3" xmlns:ns2="71af3243-3dd4-4a8d-8c0d-dd76da1f02a5" xmlns:ns3="16c05727-aa75-4e4a-9b5f-8a80a1165891" xmlns:ns4="230e9df3-be65-4c73-a93b-d1236ebd677e" targetNamespace="http://schemas.microsoft.com/office/2006/metadata/properties" ma:root="true" ma:fieldsID="3b52f30ab005d15df08657af532e6e38" ns1:_="" ns2:_="" ns3:_="" ns4:_="">
     <xsd:import namespace="http://schemas.microsoft.com/sharepoint/v3"/>
@@ -35293,15 +38635,6 @@
 </ct:contentTypeSchema>
 </file>
 
-<file path=customXml/item2.xml><?xml version="1.0" encoding="utf-8"?>
-<?mso-contentType ?>
-<FormTemplates xmlns="http://schemas.microsoft.com/sharepoint/v3/contenttype/forms">
-  <Display>DocumentLibraryForm</Display>
-  <Edit>DocumentLibraryForm</Edit>
-  <New>DocumentLibraryForm</New>
-</FormTemplates>
-</file>
-
 <file path=customXml/item3.xml><?xml version="1.0" encoding="utf-8"?>
 <p:properties xmlns:p="http://schemas.microsoft.com/office/2006/metadata/properties" xmlns:xsi="http://www.w3.org/2001/XMLSchema-instance" xmlns:pc="http://schemas.microsoft.com/office/infopath/2007/PartnerControls">
   <documentManagement>
@@ -35323,6 +38656,14 @@
 </file>
 
 <file path=customXml/itemProps1.xml><?xml version="1.0" encoding="utf-8"?>
+<ds:datastoreItem xmlns:ds="http://schemas.openxmlformats.org/officeDocument/2006/customXml" ds:itemID="{0F60B100-7079-4DE7-AF7C-20BFB1D62C46}">
+  <ds:schemaRefs>
+    <ds:schemaRef ds:uri="http://schemas.microsoft.com/sharepoint/v3/contenttype/forms"/>
+  </ds:schemaRefs>
+</ds:datastoreItem>
+</file>
+
+<file path=customXml/itemProps2.xml><?xml version="1.0" encoding="utf-8"?>
 <ds:datastoreItem xmlns:ds="http://schemas.openxmlformats.org/officeDocument/2006/customXml" ds:itemID="{118B1F56-8983-41A9-8E90-86247BC2C41D}">
   <ds:schemaRefs>
     <ds:schemaRef ds:uri="http://schemas.microsoft.com/office/2006/metadata/contentType"/>
@@ -35339,14 +38680,6 @@
     <ds:schemaRef ds:uri="http://purl.org/dc/elements/1.1/"/>
     <ds:schemaRef ds:uri="http://purl.org/dc/terms/"/>
     <ds:schemaRef ds:uri="http://schemas.microsoft.com/internal/obd"/>
-  </ds:schemaRefs>
-</ds:datastoreItem>
-</file>
-
-<file path=customXml/itemProps2.xml><?xml version="1.0" encoding="utf-8"?>
-<ds:datastoreItem xmlns:ds="http://schemas.openxmlformats.org/officeDocument/2006/customXml" ds:itemID="{0F60B100-7079-4DE7-AF7C-20BFB1D62C46}">
-  <ds:schemaRefs>
-    <ds:schemaRef ds:uri="http://schemas.microsoft.com/sharepoint/v3/contenttype/forms"/>
   </ds:schemaRefs>
 </ds:datastoreItem>
 </file>
